--- a/report/ebay_anchoring_rl_presentation.pptx
+++ b/report/ebay_anchoring_rl_presentation.pptx
@@ -2,29 +2,29 @@
 <file path=ppt/presentation.xml><?xml version="1.0" encoding="utf-8"?>
 <p:presentation xmlns:p="http://schemas.openxmlformats.org/presentationml/2006/main">
   <p:sldMasterIdLst>
-    <p:sldMasterId xmlns:r="http://schemas.openxmlformats.org/officeDocument/2006/relationships" id="2147483648" r:id="R0cde4c704c10437b"/>
-    <p:sldMasterId xmlns:r="http://schemas.openxmlformats.org/officeDocument/2006/relationships" id="2147483651" r:id="R0b58c77e3a9347fe"/>
-    <p:sldMasterId xmlns:r="http://schemas.openxmlformats.org/officeDocument/2006/relationships" id="2147483653" r:id="R23357731a8b64c69"/>
-    <p:sldMasterId xmlns:r="http://schemas.openxmlformats.org/officeDocument/2006/relationships" id="2147483656" r:id="R0583713eae1c432d"/>
-    <p:sldMasterId xmlns:r="http://schemas.openxmlformats.org/officeDocument/2006/relationships" id="2147483659" r:id="R44f53428791d4029"/>
-    <p:sldMasterId xmlns:r="http://schemas.openxmlformats.org/officeDocument/2006/relationships" id="2147483678" r:id="R591c3e0b80474d4a"/>
-    <p:sldMasterId xmlns:r="http://schemas.openxmlformats.org/officeDocument/2006/relationships" id="2147483680" r:id="Ra29e2e32dc904001"/>
+    <p:sldMasterId xmlns:r="http://schemas.openxmlformats.org/officeDocument/2006/relationships" id="2147483648" r:id="R743c506193a448d7"/>
+    <p:sldMasterId xmlns:r="http://schemas.openxmlformats.org/officeDocument/2006/relationships" id="2147483651" r:id="Rbefb6a906f2449ea"/>
+    <p:sldMasterId xmlns:r="http://schemas.openxmlformats.org/officeDocument/2006/relationships" id="2147483653" r:id="R8581195f533f470b"/>
+    <p:sldMasterId xmlns:r="http://schemas.openxmlformats.org/officeDocument/2006/relationships" id="2147483656" r:id="Rc087f7d309d24f04"/>
+    <p:sldMasterId xmlns:r="http://schemas.openxmlformats.org/officeDocument/2006/relationships" id="2147483659" r:id="R677f41ecdd9a4d57"/>
+    <p:sldMasterId xmlns:r="http://schemas.openxmlformats.org/officeDocument/2006/relationships" id="2147483678" r:id="Rd4020f0307584f52"/>
+    <p:sldMasterId xmlns:r="http://schemas.openxmlformats.org/officeDocument/2006/relationships" id="2147483680" r:id="R509edf10df6c42eb"/>
   </p:sldMasterIdLst>
   <p:notesMasterIdLst>
-    <p:notesMasterId xmlns:r="http://schemas.openxmlformats.org/officeDocument/2006/relationships" r:id="Racdbe72f8a57414d"/>
+    <p:notesMasterId xmlns:r="http://schemas.openxmlformats.org/officeDocument/2006/relationships" r:id="Rebd1237e162842a4"/>
   </p:notesMasterIdLst>
   <p:sldIdLst>
-    <p:sldId xmlns:r="http://schemas.openxmlformats.org/officeDocument/2006/relationships" id="256" r:id="R1a5e4f5d11584a1f"/>
-    <p:sldId xmlns:r="http://schemas.openxmlformats.org/officeDocument/2006/relationships" id="257" r:id="R32bfad5b9870490a"/>
-    <p:sldId xmlns:r="http://schemas.openxmlformats.org/officeDocument/2006/relationships" id="258" r:id="R4ba3af05f13e4d5e"/>
-    <p:sldId xmlns:r="http://schemas.openxmlformats.org/officeDocument/2006/relationships" id="259" r:id="R9c6af3324aa047f8"/>
-    <p:sldId xmlns:r="http://schemas.openxmlformats.org/officeDocument/2006/relationships" id="260" r:id="R0ba290964ac24585"/>
-    <p:sldId xmlns:r="http://schemas.openxmlformats.org/officeDocument/2006/relationships" id="261" r:id="R6d12626b898b4636"/>
-    <p:sldId xmlns:r="http://schemas.openxmlformats.org/officeDocument/2006/relationships" id="262" r:id="Rd4ff8320a3fb4f8f"/>
-    <p:sldId xmlns:r="http://schemas.openxmlformats.org/officeDocument/2006/relationships" id="263" r:id="Ra19615df69174af0"/>
-    <p:sldId xmlns:r="http://schemas.openxmlformats.org/officeDocument/2006/relationships" id="264" r:id="R635ae9f23e604755"/>
-    <p:sldId xmlns:r="http://schemas.openxmlformats.org/officeDocument/2006/relationships" id="265" r:id="Rab2cb8d4eaab4289"/>
-    <p:sldId xmlns:r="http://schemas.openxmlformats.org/officeDocument/2006/relationships" id="266" r:id="R04732871f2e0466a"/>
+    <p:sldId xmlns:r="http://schemas.openxmlformats.org/officeDocument/2006/relationships" id="256" r:id="R144adb0e54924706"/>
+    <p:sldId xmlns:r="http://schemas.openxmlformats.org/officeDocument/2006/relationships" id="257" r:id="Raf2786c8d0104135"/>
+    <p:sldId xmlns:r="http://schemas.openxmlformats.org/officeDocument/2006/relationships" id="258" r:id="R704d3811473b4db3"/>
+    <p:sldId xmlns:r="http://schemas.openxmlformats.org/officeDocument/2006/relationships" id="259" r:id="R9fd26a97216d4fae"/>
+    <p:sldId xmlns:r="http://schemas.openxmlformats.org/officeDocument/2006/relationships" id="260" r:id="Rabc25dab316042b3"/>
+    <p:sldId xmlns:r="http://schemas.openxmlformats.org/officeDocument/2006/relationships" id="261" r:id="Rda6b39315a4e4e5d"/>
+    <p:sldId xmlns:r="http://schemas.openxmlformats.org/officeDocument/2006/relationships" id="262" r:id="Ra94100e8b6174f84"/>
+    <p:sldId xmlns:r="http://schemas.openxmlformats.org/officeDocument/2006/relationships" id="263" r:id="R1d8b70bf120b4924"/>
+    <p:sldId xmlns:r="http://schemas.openxmlformats.org/officeDocument/2006/relationships" id="264" r:id="Rfae9d43120ea4e05"/>
+    <p:sldId xmlns:r="http://schemas.openxmlformats.org/officeDocument/2006/relationships" id="265" r:id="R015ffb0978a6427a"/>
+    <p:sldId xmlns:r="http://schemas.openxmlformats.org/officeDocument/2006/relationships" id="266" r:id="R381d7b2378d440ac"/>
   </p:sldIdLst>
   <p:sldSz cx="9144000" cy="5143500"/>
   <p:notesSz cx="6858000" cy="9144000"/>
@@ -4313,7 +4313,7 @@
           <p:nvPr/>
         </p:nvPicPr>
         <p:blipFill>
-          <a:blip xmlns:r="http://schemas.openxmlformats.org/officeDocument/2006/relationships" xmlns:a="http://schemas.openxmlformats.org/drawingml/2006/main" r:embed="R3fbe00b673ee4421"/>
+          <a:blip xmlns:r="http://schemas.openxmlformats.org/officeDocument/2006/relationships" xmlns:a="http://schemas.openxmlformats.org/drawingml/2006/main" r:embed="R098ceda945f84a4d"/>
           <a:stretch xmlns:a="http://schemas.openxmlformats.org/drawingml/2006/main">
             <a:fillRect l="0" t="0" r="0" b="0"/>
           </a:stretch>
@@ -7191,7 +7191,7 @@
           <p:nvPr/>
         </p:nvPicPr>
         <p:blipFill>
-          <a:blip xmlns:r="http://schemas.openxmlformats.org/officeDocument/2006/relationships" xmlns:a="http://schemas.openxmlformats.org/drawingml/2006/main" r:embed="Rf112d10286e2484e"/>
+          <a:blip xmlns:r="http://schemas.openxmlformats.org/officeDocument/2006/relationships" xmlns:a="http://schemas.openxmlformats.org/drawingml/2006/main" r:embed="Rb78a7d06019b4133"/>
           <a:stretch xmlns:a="http://schemas.openxmlformats.org/drawingml/2006/main">
             <a:fillRect l="0" t="0" r="0" b="0"/>
           </a:stretch>
@@ -7944,7 +7944,7 @@
           <p:nvPr/>
         </p:nvPicPr>
         <p:blipFill>
-          <a:blip xmlns:r="http://schemas.openxmlformats.org/officeDocument/2006/relationships" xmlns:a="http://schemas.openxmlformats.org/drawingml/2006/main" r:embed="R02587295c735481b"/>
+          <a:blip xmlns:r="http://schemas.openxmlformats.org/officeDocument/2006/relationships" xmlns:a="http://schemas.openxmlformats.org/drawingml/2006/main" r:embed="Rd8043deb2fdd40f4"/>
           <a:stretch xmlns:a="http://schemas.openxmlformats.org/drawingml/2006/main">
             <a:fillRect l="0" t="0" r="0" b="0"/>
           </a:stretch>
@@ -7963,8 +7963,8 @@
   </p:cSld>
   <p:clrMap bg1="lt1" tx1="dk1" bg2="lt2" tx2="dk2" accent1="accent1" accent2="accent2" accent3="accent3" accent4="accent4" accent5="accent5" accent6="accent6" hlink="hlink" folHlink="folHlink"/>
   <p:sldLayoutIdLst>
-    <p:sldLayoutId xmlns:r="http://schemas.openxmlformats.org/officeDocument/2006/relationships" id="2147483649" r:id="R520b2685f97d4276"/>
-    <p:sldLayoutId xmlns:r="http://schemas.openxmlformats.org/officeDocument/2006/relationships" id="2147483650" r:id="Rbb2ae502ff6a494e"/>
+    <p:sldLayoutId xmlns:r="http://schemas.openxmlformats.org/officeDocument/2006/relationships" id="2147483649" r:id="Rcdcbf14d247b4457"/>
+    <p:sldLayoutId xmlns:r="http://schemas.openxmlformats.org/officeDocument/2006/relationships" id="2147483650" r:id="Re53f1bc6b92044d8"/>
   </p:sldLayoutIdLst>
   <p:hf hdr="0" dt="0"/>
   <p:txStyles>
@@ -8330,7 +8330,7 @@
   </p:cSld>
   <p:clrMap bg1="lt1" tx1="dk1" bg2="lt2" tx2="dk2" accent1="accent1" accent2="accent2" accent3="accent3" accent4="accent4" accent5="accent5" accent6="accent6" hlink="hlink" folHlink="folHlink"/>
   <p:sldLayoutIdLst>
-    <p:sldLayoutId xmlns:r="http://schemas.openxmlformats.org/officeDocument/2006/relationships" id="2147483652" r:id="R6f6bacd4b1d14190"/>
+    <p:sldLayoutId xmlns:r="http://schemas.openxmlformats.org/officeDocument/2006/relationships" id="2147483652" r:id="R87fda122a45d4413"/>
   </p:sldLayoutIdLst>
   <p:txStyles>
     <p:titleStyle>
@@ -8697,7 +8697,7 @@
           <p:nvPr/>
         </p:nvPicPr>
         <p:blipFill>
-          <a:blip xmlns:r="http://schemas.openxmlformats.org/officeDocument/2006/relationships" xmlns:a="http://schemas.openxmlformats.org/drawingml/2006/main" r:embed="R6e4906e3a32a4047"/>
+          <a:blip xmlns:r="http://schemas.openxmlformats.org/officeDocument/2006/relationships" xmlns:a="http://schemas.openxmlformats.org/drawingml/2006/main" r:embed="Rc3e76cfec8af4515"/>
           <a:srcRect xmlns:a="http://schemas.openxmlformats.org/drawingml/2006/main" l="398" t="14167" r="0" b="10833"/>
           <a:stretch xmlns:a="http://schemas.openxmlformats.org/drawingml/2006/main">
             <a:fillRect l="0" t="0" r="0" b="0"/>
@@ -8722,7 +8722,7 @@
           <p:nvPr/>
         </p:nvPicPr>
         <p:blipFill>
-          <a:blip xmlns:r="http://schemas.openxmlformats.org/officeDocument/2006/relationships" xmlns:a="http://schemas.openxmlformats.org/drawingml/2006/main" r:embed="R665a7f8b3b8c436d"/>
+          <a:blip xmlns:r="http://schemas.openxmlformats.org/officeDocument/2006/relationships" xmlns:a="http://schemas.openxmlformats.org/drawingml/2006/main" r:embed="Rd2d48e6800044376"/>
           <a:stretch xmlns:a="http://schemas.openxmlformats.org/drawingml/2006/main">
             <a:fillRect l="0" t="0" r="0" b="0"/>
           </a:stretch>
@@ -8829,8 +8829,8 @@
   </p:cSld>
   <p:clrMap bg1="lt1" tx1="dk1" bg2="lt2" tx2="dk2" accent1="accent1" accent2="accent2" accent3="accent3" accent4="accent4" accent5="accent5" accent6="accent6" hlink="hlink" folHlink="folHlink"/>
   <p:sldLayoutIdLst>
-    <p:sldLayoutId xmlns:r="http://schemas.openxmlformats.org/officeDocument/2006/relationships" id="2147483654" r:id="R83dbbbba90134538"/>
-    <p:sldLayoutId xmlns:r="http://schemas.openxmlformats.org/officeDocument/2006/relationships" id="2147483655" r:id="R970294dacc6845c3"/>
+    <p:sldLayoutId xmlns:r="http://schemas.openxmlformats.org/officeDocument/2006/relationships" id="2147483654" r:id="R150d7dbb518646d3"/>
+    <p:sldLayoutId xmlns:r="http://schemas.openxmlformats.org/officeDocument/2006/relationships" id="2147483655" r:id="R0239ea74b55c474a"/>
   </p:sldLayoutIdLst>
   <p:hf hdr="0" dt="0"/>
   <p:txStyles>
@@ -9289,7 +9289,7 @@
           <p:nvPr/>
         </p:nvPicPr>
         <p:blipFill>
-          <a:blip xmlns:r="http://schemas.openxmlformats.org/officeDocument/2006/relationships" xmlns:a="http://schemas.openxmlformats.org/drawingml/2006/main" r:embed="Rb408763c0fbb4f0c"/>
+          <a:blip xmlns:r="http://schemas.openxmlformats.org/officeDocument/2006/relationships" xmlns:a="http://schemas.openxmlformats.org/drawingml/2006/main" r:embed="R82e4feb1db0e4816"/>
           <a:stretch xmlns:a="http://schemas.openxmlformats.org/drawingml/2006/main">
             <a:fillRect l="0" t="0" r="0" b="0"/>
           </a:stretch>
@@ -9396,8 +9396,8 @@
   </p:cSld>
   <p:clrMap bg1="lt1" tx1="dk1" bg2="lt2" tx2="dk2" accent1="accent1" accent2="accent2" accent3="accent3" accent4="accent4" accent5="accent5" accent6="accent6" hlink="hlink" folHlink="folHlink"/>
   <p:sldLayoutIdLst>
-    <p:sldLayoutId xmlns:r="http://schemas.openxmlformats.org/officeDocument/2006/relationships" id="2147483657" r:id="R1b40a161162b408b"/>
-    <p:sldLayoutId xmlns:r="http://schemas.openxmlformats.org/officeDocument/2006/relationships" id="2147483658" r:id="R8cadb8f17f5f4e00"/>
+    <p:sldLayoutId xmlns:r="http://schemas.openxmlformats.org/officeDocument/2006/relationships" id="2147483657" r:id="Rd1452dfe98604e60"/>
+    <p:sldLayoutId xmlns:r="http://schemas.openxmlformats.org/officeDocument/2006/relationships" id="2147483658" r:id="R71dd905b73ff4625"/>
   </p:sldLayoutIdLst>
   <p:hf hdr="0" dt="0"/>
   <p:txStyles>
@@ -9768,7 +9768,7 @@
           <p:nvPr/>
         </p:nvPicPr>
         <p:blipFill>
-          <a:blip xmlns:r="http://schemas.openxmlformats.org/officeDocument/2006/relationships" xmlns:a="http://schemas.openxmlformats.org/drawingml/2006/main" r:embed="R3bc505e3d7e24900"/>
+          <a:blip xmlns:r="http://schemas.openxmlformats.org/officeDocument/2006/relationships" xmlns:a="http://schemas.openxmlformats.org/drawingml/2006/main" r:embed="Rb64e5aa013da4384"/>
           <a:stretch xmlns:a="http://schemas.openxmlformats.org/drawingml/2006/main">
             <a:fillRect l="0" t="0" r="0" b="0"/>
           </a:stretch>
@@ -9875,24 +9875,24 @@
   </p:cSld>
   <p:clrMap bg1="lt1" tx1="dk1" bg2="lt2" tx2="dk2" accent1="accent1" accent2="accent2" accent3="accent3" accent4="accent4" accent5="accent5" accent6="accent6" hlink="hlink" folHlink="folHlink"/>
   <p:sldLayoutIdLst>
-    <p:sldLayoutId xmlns:r="http://schemas.openxmlformats.org/officeDocument/2006/relationships" id="2147483660" r:id="Reb721e16747e46b4"/>
-    <p:sldLayoutId xmlns:r="http://schemas.openxmlformats.org/officeDocument/2006/relationships" id="2147483661" r:id="Rb36aa605d6fc47c4"/>
-    <p:sldLayoutId xmlns:r="http://schemas.openxmlformats.org/officeDocument/2006/relationships" id="2147483662" r:id="R1972f43a5246417d"/>
-    <p:sldLayoutId xmlns:r="http://schemas.openxmlformats.org/officeDocument/2006/relationships" id="2147483663" r:id="R1602b0d12970454f"/>
-    <p:sldLayoutId xmlns:r="http://schemas.openxmlformats.org/officeDocument/2006/relationships" id="2147483664" r:id="R0dd8f74263404425"/>
-    <p:sldLayoutId xmlns:r="http://schemas.openxmlformats.org/officeDocument/2006/relationships" id="2147483665" r:id="Raf41d927342b4185"/>
-    <p:sldLayoutId xmlns:r="http://schemas.openxmlformats.org/officeDocument/2006/relationships" id="2147483666" r:id="Rd2d394b65a4a4edb"/>
-    <p:sldLayoutId xmlns:r="http://schemas.openxmlformats.org/officeDocument/2006/relationships" id="2147483667" r:id="Rbdd52f3459c94810"/>
-    <p:sldLayoutId xmlns:r="http://schemas.openxmlformats.org/officeDocument/2006/relationships" id="2147483668" r:id="R6953db1bf40e439c"/>
-    <p:sldLayoutId xmlns:r="http://schemas.openxmlformats.org/officeDocument/2006/relationships" id="2147483669" r:id="Rf7d06951aedd4cd3"/>
-    <p:sldLayoutId xmlns:r="http://schemas.openxmlformats.org/officeDocument/2006/relationships" id="2147483670" r:id="R2da9f2c66688483f"/>
-    <p:sldLayoutId xmlns:r="http://schemas.openxmlformats.org/officeDocument/2006/relationships" id="2147483671" r:id="Ra82011e34ea0470b"/>
-    <p:sldLayoutId xmlns:r="http://schemas.openxmlformats.org/officeDocument/2006/relationships" id="2147483672" r:id="R9dcc37d305b64a25"/>
-    <p:sldLayoutId xmlns:r="http://schemas.openxmlformats.org/officeDocument/2006/relationships" id="2147483673" r:id="R8f3afc43f2fe4361"/>
-    <p:sldLayoutId xmlns:r="http://schemas.openxmlformats.org/officeDocument/2006/relationships" id="2147483674" r:id="R3f1d1a3b8bc04562"/>
-    <p:sldLayoutId xmlns:r="http://schemas.openxmlformats.org/officeDocument/2006/relationships" id="2147483675" r:id="R90cb1192b7d9486b"/>
-    <p:sldLayoutId xmlns:r="http://schemas.openxmlformats.org/officeDocument/2006/relationships" id="2147483676" r:id="R8c4f6dcf2dc84854"/>
-    <p:sldLayoutId xmlns:r="http://schemas.openxmlformats.org/officeDocument/2006/relationships" id="2147483677" r:id="R1371b0eb7a954f07"/>
+    <p:sldLayoutId xmlns:r="http://schemas.openxmlformats.org/officeDocument/2006/relationships" id="2147483660" r:id="R6dfff7dba3f5460a"/>
+    <p:sldLayoutId xmlns:r="http://schemas.openxmlformats.org/officeDocument/2006/relationships" id="2147483661" r:id="R17d2fc9975ad40ce"/>
+    <p:sldLayoutId xmlns:r="http://schemas.openxmlformats.org/officeDocument/2006/relationships" id="2147483662" r:id="R939734f8e6454734"/>
+    <p:sldLayoutId xmlns:r="http://schemas.openxmlformats.org/officeDocument/2006/relationships" id="2147483663" r:id="R49bb90d95ba64c27"/>
+    <p:sldLayoutId xmlns:r="http://schemas.openxmlformats.org/officeDocument/2006/relationships" id="2147483664" r:id="Rd075a8c8625b4481"/>
+    <p:sldLayoutId xmlns:r="http://schemas.openxmlformats.org/officeDocument/2006/relationships" id="2147483665" r:id="R92b28ca4fdf54a37"/>
+    <p:sldLayoutId xmlns:r="http://schemas.openxmlformats.org/officeDocument/2006/relationships" id="2147483666" r:id="R9ecb1645487d419b"/>
+    <p:sldLayoutId xmlns:r="http://schemas.openxmlformats.org/officeDocument/2006/relationships" id="2147483667" r:id="Red33d9fa5be546ad"/>
+    <p:sldLayoutId xmlns:r="http://schemas.openxmlformats.org/officeDocument/2006/relationships" id="2147483668" r:id="R7897471309a5488e"/>
+    <p:sldLayoutId xmlns:r="http://schemas.openxmlformats.org/officeDocument/2006/relationships" id="2147483669" r:id="R4e2ca18b688e4e80"/>
+    <p:sldLayoutId xmlns:r="http://schemas.openxmlformats.org/officeDocument/2006/relationships" id="2147483670" r:id="R308a66b6e5824c7c"/>
+    <p:sldLayoutId xmlns:r="http://schemas.openxmlformats.org/officeDocument/2006/relationships" id="2147483671" r:id="R9d1b34c8677649d7"/>
+    <p:sldLayoutId xmlns:r="http://schemas.openxmlformats.org/officeDocument/2006/relationships" id="2147483672" r:id="R7e16060facfe4930"/>
+    <p:sldLayoutId xmlns:r="http://schemas.openxmlformats.org/officeDocument/2006/relationships" id="2147483673" r:id="R820e3d31c03b45a0"/>
+    <p:sldLayoutId xmlns:r="http://schemas.openxmlformats.org/officeDocument/2006/relationships" id="2147483674" r:id="Ra36c505c313f4b59"/>
+    <p:sldLayoutId xmlns:r="http://schemas.openxmlformats.org/officeDocument/2006/relationships" id="2147483675" r:id="R891bb355873642fb"/>
+    <p:sldLayoutId xmlns:r="http://schemas.openxmlformats.org/officeDocument/2006/relationships" id="2147483676" r:id="R8e12c461724847a0"/>
+    <p:sldLayoutId xmlns:r="http://schemas.openxmlformats.org/officeDocument/2006/relationships" id="2147483677" r:id="Rf6f6f114efdd4101"/>
   </p:sldLayoutIdLst>
   <p:hf hdr="0" dt="0"/>
   <p:txStyles>
@@ -10320,7 +10320,7 @@
           <p:nvPr/>
         </p:nvPicPr>
         <p:blipFill>
-          <a:blip xmlns:r="http://schemas.openxmlformats.org/officeDocument/2006/relationships" xmlns:a="http://schemas.openxmlformats.org/drawingml/2006/main" r:embed="R5421dad5f70e40f1"/>
+          <a:blip xmlns:r="http://schemas.openxmlformats.org/officeDocument/2006/relationships" xmlns:a="http://schemas.openxmlformats.org/drawingml/2006/main" r:embed="Rcb1e27caca7445c2"/>
           <a:stretch xmlns:a="http://schemas.openxmlformats.org/drawingml/2006/main">
             <a:fillRect l="0" t="0" r="0" b="0"/>
           </a:stretch>
@@ -10427,7 +10427,7 @@
   </p:cSld>
   <p:clrMap bg1="lt1" tx1="dk1" bg2="lt2" tx2="dk2" accent1="accent1" accent2="accent2" accent3="accent3" accent4="accent4" accent5="accent5" accent6="accent6" hlink="hlink" folHlink="folHlink"/>
   <p:sldLayoutIdLst>
-    <p:sldLayoutId xmlns:r="http://schemas.openxmlformats.org/officeDocument/2006/relationships" id="2147483679" r:id="R43eb7ee42d044234"/>
+    <p:sldLayoutId xmlns:r="http://schemas.openxmlformats.org/officeDocument/2006/relationships" id="2147483679" r:id="Rcd63dae349ab4fba"/>
   </p:sldLayoutIdLst>
   <p:hf hdr="0" dt="0"/>
   <p:txStyles>
@@ -10858,7 +10858,7 @@
           <p:nvPr/>
         </p:nvPicPr>
         <p:blipFill>
-          <a:blip xmlns:r="http://schemas.openxmlformats.org/officeDocument/2006/relationships" xmlns:a="http://schemas.openxmlformats.org/drawingml/2006/main" r:embed="Rbca2a666e1c6401e"/>
+          <a:blip xmlns:r="http://schemas.openxmlformats.org/officeDocument/2006/relationships" xmlns:a="http://schemas.openxmlformats.org/drawingml/2006/main" r:embed="R65af7736ccec408a"/>
           <a:stretch xmlns:a="http://schemas.openxmlformats.org/drawingml/2006/main">
             <a:fillRect l="0" t="0" r="0" b="0"/>
           </a:stretch>
@@ -10965,7 +10965,7 @@
   </p:cSld>
   <p:clrMap bg1="lt1" tx1="dk1" bg2="lt2" tx2="dk2" accent1="accent1" accent2="accent2" accent3="accent3" accent4="accent4" accent5="accent5" accent6="accent6" hlink="hlink" folHlink="folHlink"/>
   <p:sldLayoutIdLst>
-    <p:sldLayoutId xmlns:r="http://schemas.openxmlformats.org/officeDocument/2006/relationships" id="2147483681" r:id="R90854993d219471a"/>
+    <p:sldLayoutId xmlns:r="http://schemas.openxmlformats.org/officeDocument/2006/relationships" id="2147483681" r:id="R4d4238a45f0b406f"/>
   </p:sldLayoutIdLst>
   <p:hf hdr="0" dt="0"/>
   <p:txStyles>
@@ -13179,7 +13179,7 @@
           <p:nvPr/>
         </p:nvPicPr>
         <p:blipFill>
-          <a:blip xmlns:r="http://schemas.openxmlformats.org/officeDocument/2006/relationships" xmlns:a="http://schemas.openxmlformats.org/drawingml/2006/main" r:embed="R00d14ca362b8479c"/>
+          <a:blip xmlns:r="http://schemas.openxmlformats.org/officeDocument/2006/relationships" xmlns:a="http://schemas.openxmlformats.org/drawingml/2006/main" r:embed="Ra8e1ed3ce6f24162"/>
           <a:stretch xmlns:a="http://schemas.openxmlformats.org/drawingml/2006/main">
             <a:fillRect l="0" t="0" r="0" b="0"/>
           </a:stretch>
@@ -13246,7 +13246,7 @@
           </a:p>
           <a:p xmlns:a="http://schemas.openxmlformats.org/drawingml/2006/main">
             <a:r>
-              <a:t>Ming Liang | Final project presentation | July 2026</a:t>
+              <a:t>soluthan | Final project presentation | July 2026</a:t>
             </a:r>
           </a:p>
         </p:txBody>
@@ -14241,7 +14241,7 @@
           <p:cNvPr id="7" name="">
             <a:extLst xmlns:a="http://schemas.openxmlformats.org/drawingml/2006/main">
               <a:ext uri="{FF2B5EF4-FFF2-40B4-BE49-F238E27FC236}">
-                <a16:creationId xmlns:a16="http://schemas.microsoft.com/office/drawing/2014/main" id="{D01AFA04-91DC-4AF6-A35B-83C800AFCF2B}"/>
+                <a16:creationId xmlns:a16="http://schemas.microsoft.com/office/drawing/2014/main" id="{1285EDA0-5DE3-4AB6-A960-8130A20C1556}"/>
               </a:ext>
             </a:extLst>
           </p:cNvPr>
@@ -14274,7 +14274,7 @@
           <p:cNvPr id="8" name="">
             <a:extLst xmlns:a="http://schemas.openxmlformats.org/drawingml/2006/main">
               <a:ext uri="{FF2B5EF4-FFF2-40B4-BE49-F238E27FC236}">
-                <a16:creationId xmlns:a16="http://schemas.microsoft.com/office/drawing/2014/main" id="{43FAECC5-D2F1-488D-92C6-18651429A603}"/>
+                <a16:creationId xmlns:a16="http://schemas.microsoft.com/office/drawing/2014/main" id="{E38E9282-90DF-4CEF-87A6-DCFE09704FA7}"/>
               </a:ext>
             </a:extLst>
           </p:cNvPr>
@@ -14324,7 +14324,7 @@
           <p:cNvPr id="9" name="">
             <a:extLst xmlns:a="http://schemas.openxmlformats.org/drawingml/2006/main">
               <a:ext uri="{FF2B5EF4-FFF2-40B4-BE49-F238E27FC236}">
-                <a16:creationId xmlns:a16="http://schemas.microsoft.com/office/drawing/2014/main" id="{6E63E3F4-959E-4A46-876E-FB927945FACD}"/>
+                <a16:creationId xmlns:a16="http://schemas.microsoft.com/office/drawing/2014/main" id="{C4E6AB7C-1FA2-4AD3-A3C0-2D938E6EB77F}"/>
               </a:ext>
             </a:extLst>
           </p:cNvPr>
@@ -14374,7 +14374,7 @@
           <p:cNvPr id="10" name="">
             <a:extLst xmlns:a="http://schemas.openxmlformats.org/drawingml/2006/main">
               <a:ext uri="{FF2B5EF4-FFF2-40B4-BE49-F238E27FC236}">
-                <a16:creationId xmlns:a16="http://schemas.microsoft.com/office/drawing/2014/main" id="{98044173-AA32-4405-A5DA-216B3C15E17E}"/>
+                <a16:creationId xmlns:a16="http://schemas.microsoft.com/office/drawing/2014/main" id="{BDE6BD0C-2F28-49B6-9990-391E52111678}"/>
               </a:ext>
             </a:extLst>
           </p:cNvPr>
@@ -14407,7 +14407,7 @@
           <p:cNvPr id="11" name="">
             <a:extLst xmlns:a="http://schemas.openxmlformats.org/drawingml/2006/main">
               <a:ext uri="{FF2B5EF4-FFF2-40B4-BE49-F238E27FC236}">
-                <a16:creationId xmlns:a16="http://schemas.microsoft.com/office/drawing/2014/main" id="{7F168E22-1991-4FA0-9696-FD357A5FAF28}"/>
+                <a16:creationId xmlns:a16="http://schemas.microsoft.com/office/drawing/2014/main" id="{6DAA2806-F397-4735-A6EE-170E32A2717A}"/>
               </a:ext>
             </a:extLst>
           </p:cNvPr>
@@ -14457,7 +14457,7 @@
           <p:cNvPr id="12" name="">
             <a:extLst xmlns:a="http://schemas.openxmlformats.org/drawingml/2006/main">
               <a:ext uri="{FF2B5EF4-FFF2-40B4-BE49-F238E27FC236}">
-                <a16:creationId xmlns:a16="http://schemas.microsoft.com/office/drawing/2014/main" id="{FEEFBF91-1F12-4E00-BFD4-F295BA13A944}"/>
+                <a16:creationId xmlns:a16="http://schemas.microsoft.com/office/drawing/2014/main" id="{C41D1B8A-C7C4-4F18-85D6-056132BC5AFD}"/>
               </a:ext>
             </a:extLst>
           </p:cNvPr>
@@ -14507,7 +14507,7 @@
           <p:cNvPr id="13" name="">
             <a:extLst xmlns:a="http://schemas.openxmlformats.org/drawingml/2006/main">
               <a:ext uri="{FF2B5EF4-FFF2-40B4-BE49-F238E27FC236}">
-                <a16:creationId xmlns:a16="http://schemas.microsoft.com/office/drawing/2014/main" id="{4845D1E4-750A-48AE-BFC3-3E1DAAA39D33}"/>
+                <a16:creationId xmlns:a16="http://schemas.microsoft.com/office/drawing/2014/main" id="{DEBFFCF4-7D48-409F-8942-E7903519B987}"/>
               </a:ext>
             </a:extLst>
           </p:cNvPr>
@@ -14540,7 +14540,7 @@
           <p:cNvPr id="14" name="">
             <a:extLst xmlns:a="http://schemas.openxmlformats.org/drawingml/2006/main">
               <a:ext uri="{FF2B5EF4-FFF2-40B4-BE49-F238E27FC236}">
-                <a16:creationId xmlns:a16="http://schemas.microsoft.com/office/drawing/2014/main" id="{2A0EAF2D-FE1C-4F1D-AE88-D0532025CCD4}"/>
+                <a16:creationId xmlns:a16="http://schemas.microsoft.com/office/drawing/2014/main" id="{55ADCC09-5444-4F0F-83C7-DFCE971F063B}"/>
               </a:ext>
             </a:extLst>
           </p:cNvPr>
@@ -14590,7 +14590,7 @@
           <p:cNvPr id="15" name="">
             <a:extLst xmlns:a="http://schemas.openxmlformats.org/drawingml/2006/main">
               <a:ext uri="{FF2B5EF4-FFF2-40B4-BE49-F238E27FC236}">
-                <a16:creationId xmlns:a16="http://schemas.microsoft.com/office/drawing/2014/main" id="{2CCAF25F-E961-485E-9A80-FEA9517BFE9C}"/>
+                <a16:creationId xmlns:a16="http://schemas.microsoft.com/office/drawing/2014/main" id="{9D4129D1-411B-4F15-9775-0BED763D8970}"/>
               </a:ext>
             </a:extLst>
           </p:cNvPr>
@@ -14640,7 +14640,7 @@
           <p:cNvPr id="16" name="">
             <a:extLst xmlns:a="http://schemas.openxmlformats.org/drawingml/2006/main">
               <a:ext uri="{FF2B5EF4-FFF2-40B4-BE49-F238E27FC236}">
-                <a16:creationId xmlns:a16="http://schemas.microsoft.com/office/drawing/2014/main" id="{37141068-034D-4EE2-A04C-FB5A9ACA1AB7}"/>
+                <a16:creationId xmlns:a16="http://schemas.microsoft.com/office/drawing/2014/main" id="{F4576094-0DBA-4508-8322-41CD48DB3B1C}"/>
               </a:ext>
             </a:extLst>
           </p:cNvPr>
@@ -14870,7 +14870,7 @@
           <p:cNvPr id="7" name="">
             <a:extLst xmlns:a="http://schemas.openxmlformats.org/drawingml/2006/main">
               <a:ext uri="{FF2B5EF4-FFF2-40B4-BE49-F238E27FC236}">
-                <a16:creationId xmlns:a16="http://schemas.microsoft.com/office/drawing/2014/main" id="{4AADD3FD-E5BC-451F-B38E-6592F7BA249A}"/>
+                <a16:creationId xmlns:a16="http://schemas.microsoft.com/office/drawing/2014/main" id="{FE58300D-AD43-46E5-83B0-435D00D94B23}"/>
               </a:ext>
             </a:extLst>
           </p:cNvPr>
@@ -14903,7 +14903,7 @@
           <p:cNvPr id="8" name="">
             <a:extLst xmlns:a="http://schemas.openxmlformats.org/drawingml/2006/main">
               <a:ext uri="{FF2B5EF4-FFF2-40B4-BE49-F238E27FC236}">
-                <a16:creationId xmlns:a16="http://schemas.microsoft.com/office/drawing/2014/main" id="{CD74D665-8296-474E-A7A6-3C719BFE4EDB}"/>
+                <a16:creationId xmlns:a16="http://schemas.microsoft.com/office/drawing/2014/main" id="{C260DF0B-72BB-4152-9C53-CAAB2920362C}"/>
               </a:ext>
             </a:extLst>
           </p:cNvPr>
@@ -14953,7 +14953,7 @@
           <p:cNvPr id="9" name="">
             <a:extLst xmlns:a="http://schemas.openxmlformats.org/drawingml/2006/main">
               <a:ext uri="{FF2B5EF4-FFF2-40B4-BE49-F238E27FC236}">
-                <a16:creationId xmlns:a16="http://schemas.microsoft.com/office/drawing/2014/main" id="{E5DEC01C-6F6D-4B7C-897F-B6ED9423EFA3}"/>
+                <a16:creationId xmlns:a16="http://schemas.microsoft.com/office/drawing/2014/main" id="{F50674C3-A7F6-4BAD-A449-BF132B616FFD}"/>
               </a:ext>
             </a:extLst>
           </p:cNvPr>
@@ -14984,7 +14984,7 @@
           <p:cNvPr id="10" name="">
             <a:extLst xmlns:a="http://schemas.openxmlformats.org/drawingml/2006/main">
               <a:ext uri="{FF2B5EF4-FFF2-40B4-BE49-F238E27FC236}">
-                <a16:creationId xmlns:a16="http://schemas.microsoft.com/office/drawing/2014/main" id="{7807F31B-1D20-4A79-AD3A-71AB0F5BAF3D}"/>
+                <a16:creationId xmlns:a16="http://schemas.microsoft.com/office/drawing/2014/main" id="{D29BEB69-FC12-4CD1-A8BD-CDC0F011AC71}"/>
               </a:ext>
             </a:extLst>
           </p:cNvPr>
@@ -15034,7 +15034,7 @@
           <p:cNvPr id="11" name="">
             <a:extLst xmlns:a="http://schemas.openxmlformats.org/drawingml/2006/main">
               <a:ext uri="{FF2B5EF4-FFF2-40B4-BE49-F238E27FC236}">
-                <a16:creationId xmlns:a16="http://schemas.microsoft.com/office/drawing/2014/main" id="{F4C802F0-B8CF-4BAB-8622-F3B4BA16A2AA}"/>
+                <a16:creationId xmlns:a16="http://schemas.microsoft.com/office/drawing/2014/main" id="{FD42DC32-3734-4284-A9E1-DB4A6CCC5B11}"/>
               </a:ext>
             </a:extLst>
           </p:cNvPr>
@@ -15065,7 +15065,7 @@
           <p:cNvPr id="12" name="">
             <a:extLst xmlns:a="http://schemas.openxmlformats.org/drawingml/2006/main">
               <a:ext uri="{FF2B5EF4-FFF2-40B4-BE49-F238E27FC236}">
-                <a16:creationId xmlns:a16="http://schemas.microsoft.com/office/drawing/2014/main" id="{C0F764D8-87B8-4AB4-BB50-3D6A099AAED8}"/>
+                <a16:creationId xmlns:a16="http://schemas.microsoft.com/office/drawing/2014/main" id="{3BA2F3F8-DDD5-4816-97D8-8B645D978585}"/>
               </a:ext>
             </a:extLst>
           </p:cNvPr>
@@ -15115,7 +15115,7 @@
           <p:cNvPr id="13" name="">
             <a:extLst xmlns:a="http://schemas.openxmlformats.org/drawingml/2006/main">
               <a:ext uri="{FF2B5EF4-FFF2-40B4-BE49-F238E27FC236}">
-                <a16:creationId xmlns:a16="http://schemas.microsoft.com/office/drawing/2014/main" id="{2C944491-7E61-4087-8F31-F3498E3F8784}"/>
+                <a16:creationId xmlns:a16="http://schemas.microsoft.com/office/drawing/2014/main" id="{AC3F99C5-7F2A-45F7-9205-83A1367ED32D}"/>
               </a:ext>
             </a:extLst>
           </p:cNvPr>
@@ -15146,7 +15146,7 @@
           <p:cNvPr id="14" name="">
             <a:extLst xmlns:a="http://schemas.openxmlformats.org/drawingml/2006/main">
               <a:ext uri="{FF2B5EF4-FFF2-40B4-BE49-F238E27FC236}">
-                <a16:creationId xmlns:a16="http://schemas.microsoft.com/office/drawing/2014/main" id="{2D333E22-C3E0-4EE0-AE08-49CB586F67A2}"/>
+                <a16:creationId xmlns:a16="http://schemas.microsoft.com/office/drawing/2014/main" id="{48AD6342-7AF7-4B8D-90C6-00721F776C02}"/>
               </a:ext>
             </a:extLst>
           </p:cNvPr>
@@ -15196,7 +15196,7 @@
           <p:cNvPr id="15" name="">
             <a:extLst xmlns:a="http://schemas.openxmlformats.org/drawingml/2006/main">
               <a:ext uri="{FF2B5EF4-FFF2-40B4-BE49-F238E27FC236}">
-                <a16:creationId xmlns:a16="http://schemas.microsoft.com/office/drawing/2014/main" id="{3A330572-4047-4332-A6A0-B3B5A5C3DED6}"/>
+                <a16:creationId xmlns:a16="http://schemas.microsoft.com/office/drawing/2014/main" id="{5AE0B5B2-61C3-4079-9BA0-E59E6C729FD1}"/>
               </a:ext>
             </a:extLst>
           </p:cNvPr>
@@ -15229,7 +15229,7 @@
           <p:cNvPr id="16" name="">
             <a:extLst xmlns:a="http://schemas.openxmlformats.org/drawingml/2006/main">
               <a:ext uri="{FF2B5EF4-FFF2-40B4-BE49-F238E27FC236}">
-                <a16:creationId xmlns:a16="http://schemas.microsoft.com/office/drawing/2014/main" id="{1ACCCF7D-3A3B-4963-991A-3769C0F2FB2F}"/>
+                <a16:creationId xmlns:a16="http://schemas.microsoft.com/office/drawing/2014/main" id="{79BDF618-B7D9-4D8A-886C-D7A90998DBFE}"/>
               </a:ext>
             </a:extLst>
           </p:cNvPr>
@@ -15279,7 +15279,7 @@
           <p:cNvPr id="17" name="">
             <a:extLst xmlns:a="http://schemas.openxmlformats.org/drawingml/2006/main">
               <a:ext uri="{FF2B5EF4-FFF2-40B4-BE49-F238E27FC236}">
-                <a16:creationId xmlns:a16="http://schemas.microsoft.com/office/drawing/2014/main" id="{3874E45B-D495-4E9D-8434-10943EA04DE8}"/>
+                <a16:creationId xmlns:a16="http://schemas.microsoft.com/office/drawing/2014/main" id="{453ED001-5537-4B29-B2DB-6F698046377E}"/>
               </a:ext>
             </a:extLst>
           </p:cNvPr>
@@ -15310,7 +15310,7 @@
           <p:cNvPr id="18" name="">
             <a:extLst xmlns:a="http://schemas.openxmlformats.org/drawingml/2006/main">
               <a:ext uri="{FF2B5EF4-FFF2-40B4-BE49-F238E27FC236}">
-                <a16:creationId xmlns:a16="http://schemas.microsoft.com/office/drawing/2014/main" id="{A9289DDF-2DE4-44BB-B1E5-2EB4E310EBF9}"/>
+                <a16:creationId xmlns:a16="http://schemas.microsoft.com/office/drawing/2014/main" id="{67935473-847E-404B-A302-BA3B50D81432}"/>
               </a:ext>
             </a:extLst>
           </p:cNvPr>
@@ -15360,7 +15360,7 @@
           <p:cNvPr id="19" name="">
             <a:extLst xmlns:a="http://schemas.openxmlformats.org/drawingml/2006/main">
               <a:ext uri="{FF2B5EF4-FFF2-40B4-BE49-F238E27FC236}">
-                <a16:creationId xmlns:a16="http://schemas.microsoft.com/office/drawing/2014/main" id="{00AEB120-13F9-471D-8241-1A4385C01200}"/>
+                <a16:creationId xmlns:a16="http://schemas.microsoft.com/office/drawing/2014/main" id="{E9CB9E12-86E4-4D67-B840-1D21C9D7385C}"/>
               </a:ext>
             </a:extLst>
           </p:cNvPr>
@@ -15391,7 +15391,7 @@
           <p:cNvPr id="20" name="">
             <a:extLst xmlns:a="http://schemas.openxmlformats.org/drawingml/2006/main">
               <a:ext uri="{FF2B5EF4-FFF2-40B4-BE49-F238E27FC236}">
-                <a16:creationId xmlns:a16="http://schemas.microsoft.com/office/drawing/2014/main" id="{8F1F12EE-7E7D-4876-8780-693FE672865C}"/>
+                <a16:creationId xmlns:a16="http://schemas.microsoft.com/office/drawing/2014/main" id="{0B1189F9-E716-4D8F-8781-E8ADC7E981F3}"/>
               </a:ext>
             </a:extLst>
           </p:cNvPr>
@@ -15441,7 +15441,7 @@
           <p:cNvPr id="21" name="">
             <a:extLst xmlns:a="http://schemas.openxmlformats.org/drawingml/2006/main">
               <a:ext uri="{FF2B5EF4-FFF2-40B4-BE49-F238E27FC236}">
-                <a16:creationId xmlns:a16="http://schemas.microsoft.com/office/drawing/2014/main" id="{63A0B12C-35FD-4C4D-BACC-D8838B78FB94}"/>
+                <a16:creationId xmlns:a16="http://schemas.microsoft.com/office/drawing/2014/main" id="{3569D6AE-C48B-484A-9DA5-CC70CE961090}"/>
               </a:ext>
             </a:extLst>
           </p:cNvPr>
@@ -15472,7 +15472,7 @@
           <p:cNvPr id="22" name="">
             <a:extLst xmlns:a="http://schemas.openxmlformats.org/drawingml/2006/main">
               <a:ext uri="{FF2B5EF4-FFF2-40B4-BE49-F238E27FC236}">
-                <a16:creationId xmlns:a16="http://schemas.microsoft.com/office/drawing/2014/main" id="{55678F79-5D8E-4C08-9E56-603B50035179}"/>
+                <a16:creationId xmlns:a16="http://schemas.microsoft.com/office/drawing/2014/main" id="{EA574023-3D18-404B-B353-F30841C3D151}"/>
               </a:ext>
             </a:extLst>
           </p:cNvPr>
@@ -15522,7 +15522,7 @@
           <p:cNvPr id="23" name="">
             <a:extLst xmlns:a="http://schemas.openxmlformats.org/drawingml/2006/main">
               <a:ext uri="{FF2B5EF4-FFF2-40B4-BE49-F238E27FC236}">
-                <a16:creationId xmlns:a16="http://schemas.microsoft.com/office/drawing/2014/main" id="{EA18C900-744D-4EC3-B774-00686A7032F1}"/>
+                <a16:creationId xmlns:a16="http://schemas.microsoft.com/office/drawing/2014/main" id="{77A39309-4948-45B3-8D1C-01541455B47E}"/>
               </a:ext>
             </a:extLst>
           </p:cNvPr>
@@ -15555,7 +15555,7 @@
           <p:cNvPr id="24" name="">
             <a:extLst xmlns:a="http://schemas.openxmlformats.org/drawingml/2006/main">
               <a:ext uri="{FF2B5EF4-FFF2-40B4-BE49-F238E27FC236}">
-                <a16:creationId xmlns:a16="http://schemas.microsoft.com/office/drawing/2014/main" id="{34C3ED8D-897A-4C26-BDB0-BBD4D1385A37}"/>
+                <a16:creationId xmlns:a16="http://schemas.microsoft.com/office/drawing/2014/main" id="{6FDFDAAE-66BA-494B-90D8-2C0A6018392A}"/>
               </a:ext>
             </a:extLst>
           </p:cNvPr>
@@ -15605,7 +15605,7 @@
           <p:cNvPr id="25" name="">
             <a:extLst xmlns:a="http://schemas.openxmlformats.org/drawingml/2006/main">
               <a:ext uri="{FF2B5EF4-FFF2-40B4-BE49-F238E27FC236}">
-                <a16:creationId xmlns:a16="http://schemas.microsoft.com/office/drawing/2014/main" id="{15BA2986-B149-46C4-8A3B-7FD691DBEE3E}"/>
+                <a16:creationId xmlns:a16="http://schemas.microsoft.com/office/drawing/2014/main" id="{DB0F5690-32B2-4E73-BCFC-65F14EEA872C}"/>
               </a:ext>
             </a:extLst>
           </p:cNvPr>
@@ -15636,7 +15636,7 @@
           <p:cNvPr id="26" name="">
             <a:extLst xmlns:a="http://schemas.openxmlformats.org/drawingml/2006/main">
               <a:ext uri="{FF2B5EF4-FFF2-40B4-BE49-F238E27FC236}">
-                <a16:creationId xmlns:a16="http://schemas.microsoft.com/office/drawing/2014/main" id="{89892A8E-2F9C-40CB-B8F0-5F54B368D120}"/>
+                <a16:creationId xmlns:a16="http://schemas.microsoft.com/office/drawing/2014/main" id="{C2BF3D16-C258-4489-8EFC-07D4EC393A06}"/>
               </a:ext>
             </a:extLst>
           </p:cNvPr>
@@ -15686,7 +15686,7 @@
           <p:cNvPr id="27" name="">
             <a:extLst xmlns:a="http://schemas.openxmlformats.org/drawingml/2006/main">
               <a:ext uri="{FF2B5EF4-FFF2-40B4-BE49-F238E27FC236}">
-                <a16:creationId xmlns:a16="http://schemas.microsoft.com/office/drawing/2014/main" id="{58C53FAD-91BE-4632-ACFC-B8EF61AC4BBE}"/>
+                <a16:creationId xmlns:a16="http://schemas.microsoft.com/office/drawing/2014/main" id="{723940C0-92F5-4544-97A8-D4CF85904B84}"/>
               </a:ext>
             </a:extLst>
           </p:cNvPr>
@@ -15717,7 +15717,7 @@
           <p:cNvPr id="28" name="">
             <a:extLst xmlns:a="http://schemas.openxmlformats.org/drawingml/2006/main">
               <a:ext uri="{FF2B5EF4-FFF2-40B4-BE49-F238E27FC236}">
-                <a16:creationId xmlns:a16="http://schemas.microsoft.com/office/drawing/2014/main" id="{84BBC913-B249-46DF-AA9F-0F34973F4795}"/>
+                <a16:creationId xmlns:a16="http://schemas.microsoft.com/office/drawing/2014/main" id="{51C358B3-E423-41E8-B4A5-651CE4A5052B}"/>
               </a:ext>
             </a:extLst>
           </p:cNvPr>
@@ -15767,7 +15767,7 @@
           <p:cNvPr id="29" name="">
             <a:extLst xmlns:a="http://schemas.openxmlformats.org/drawingml/2006/main">
               <a:ext uri="{FF2B5EF4-FFF2-40B4-BE49-F238E27FC236}">
-                <a16:creationId xmlns:a16="http://schemas.microsoft.com/office/drawing/2014/main" id="{3A7FB69E-C0BD-4C56-86F1-DB898C1CFF04}"/>
+                <a16:creationId xmlns:a16="http://schemas.microsoft.com/office/drawing/2014/main" id="{CA9E5744-D33F-4804-ABCC-C4452FCA39DD}"/>
               </a:ext>
             </a:extLst>
           </p:cNvPr>
@@ -15798,7 +15798,7 @@
           <p:cNvPr id="30" name="">
             <a:extLst xmlns:a="http://schemas.openxmlformats.org/drawingml/2006/main">
               <a:ext uri="{FF2B5EF4-FFF2-40B4-BE49-F238E27FC236}">
-                <a16:creationId xmlns:a16="http://schemas.microsoft.com/office/drawing/2014/main" id="{4428105B-79AF-44EF-80F6-5296CF97A01F}"/>
+                <a16:creationId xmlns:a16="http://schemas.microsoft.com/office/drawing/2014/main" id="{9DB1A701-D8B8-419D-8EFC-2502D18D6C0D}"/>
               </a:ext>
             </a:extLst>
           </p:cNvPr>
@@ -15848,7 +15848,7 @@
           <p:cNvPr id="31" name="">
             <a:extLst xmlns:a="http://schemas.openxmlformats.org/drawingml/2006/main">
               <a:ext uri="{FF2B5EF4-FFF2-40B4-BE49-F238E27FC236}">
-                <a16:creationId xmlns:a16="http://schemas.microsoft.com/office/drawing/2014/main" id="{EE778D06-48F0-4BCE-A889-2ACC1659FA8E}"/>
+                <a16:creationId xmlns:a16="http://schemas.microsoft.com/office/drawing/2014/main" id="{950598EB-DA64-4D17-8B8E-2D9CF466FB16}"/>
               </a:ext>
             </a:extLst>
           </p:cNvPr>
@@ -15881,7 +15881,7 @@
           <p:cNvPr id="32" name="">
             <a:extLst xmlns:a="http://schemas.openxmlformats.org/drawingml/2006/main">
               <a:ext uri="{FF2B5EF4-FFF2-40B4-BE49-F238E27FC236}">
-                <a16:creationId xmlns:a16="http://schemas.microsoft.com/office/drawing/2014/main" id="{7F45402D-B856-448F-A0CF-499E2E892663}"/>
+                <a16:creationId xmlns:a16="http://schemas.microsoft.com/office/drawing/2014/main" id="{61C39E4B-F241-476C-A137-CAAFAA6B785B}"/>
               </a:ext>
             </a:extLst>
           </p:cNvPr>
@@ -15931,7 +15931,7 @@
           <p:cNvPr id="33" name="">
             <a:extLst xmlns:a="http://schemas.openxmlformats.org/drawingml/2006/main">
               <a:ext uri="{FF2B5EF4-FFF2-40B4-BE49-F238E27FC236}">
-                <a16:creationId xmlns:a16="http://schemas.microsoft.com/office/drawing/2014/main" id="{4E92B1D2-7F15-40F4-8D79-0A9126CA0C3B}"/>
+                <a16:creationId xmlns:a16="http://schemas.microsoft.com/office/drawing/2014/main" id="{43DCF9E5-1D91-4240-992F-EF242BD4FC1B}"/>
               </a:ext>
             </a:extLst>
           </p:cNvPr>
@@ -15962,7 +15962,7 @@
           <p:cNvPr id="34" name="">
             <a:extLst xmlns:a="http://schemas.openxmlformats.org/drawingml/2006/main">
               <a:ext uri="{FF2B5EF4-FFF2-40B4-BE49-F238E27FC236}">
-                <a16:creationId xmlns:a16="http://schemas.microsoft.com/office/drawing/2014/main" id="{EE4355B5-8044-4BB0-AE10-0262884B0632}"/>
+                <a16:creationId xmlns:a16="http://schemas.microsoft.com/office/drawing/2014/main" id="{CAB8C4CD-124B-423A-B8F2-83E8E5D2A256}"/>
               </a:ext>
             </a:extLst>
           </p:cNvPr>
@@ -16012,7 +16012,7 @@
           <p:cNvPr id="35" name="">
             <a:extLst xmlns:a="http://schemas.openxmlformats.org/drawingml/2006/main">
               <a:ext uri="{FF2B5EF4-FFF2-40B4-BE49-F238E27FC236}">
-                <a16:creationId xmlns:a16="http://schemas.microsoft.com/office/drawing/2014/main" id="{1FAC11C5-F0FA-47B3-A461-D2CFEF2F67F5}"/>
+                <a16:creationId xmlns:a16="http://schemas.microsoft.com/office/drawing/2014/main" id="{8E151CB7-6D3D-465A-B902-D1424DE4155E}"/>
               </a:ext>
             </a:extLst>
           </p:cNvPr>
@@ -16043,7 +16043,7 @@
           <p:cNvPr id="36" name="">
             <a:extLst xmlns:a="http://schemas.openxmlformats.org/drawingml/2006/main">
               <a:ext uri="{FF2B5EF4-FFF2-40B4-BE49-F238E27FC236}">
-                <a16:creationId xmlns:a16="http://schemas.microsoft.com/office/drawing/2014/main" id="{0CF291C0-F70F-42AB-946F-1FED97F07B93}"/>
+                <a16:creationId xmlns:a16="http://schemas.microsoft.com/office/drawing/2014/main" id="{7A10FA40-83E1-4D27-B92A-188734C4EDC4}"/>
               </a:ext>
             </a:extLst>
           </p:cNvPr>
@@ -16093,7 +16093,7 @@
           <p:cNvPr id="37" name="">
             <a:extLst xmlns:a="http://schemas.openxmlformats.org/drawingml/2006/main">
               <a:ext uri="{FF2B5EF4-FFF2-40B4-BE49-F238E27FC236}">
-                <a16:creationId xmlns:a16="http://schemas.microsoft.com/office/drawing/2014/main" id="{39057947-7C2B-4F29-8E3C-85DFB51F3D49}"/>
+                <a16:creationId xmlns:a16="http://schemas.microsoft.com/office/drawing/2014/main" id="{40149701-1C50-40FD-82D9-0F5B8B600D3F}"/>
               </a:ext>
             </a:extLst>
           </p:cNvPr>
@@ -16124,7 +16124,7 @@
           <p:cNvPr id="38" name="">
             <a:extLst xmlns:a="http://schemas.openxmlformats.org/drawingml/2006/main">
               <a:ext uri="{FF2B5EF4-FFF2-40B4-BE49-F238E27FC236}">
-                <a16:creationId xmlns:a16="http://schemas.microsoft.com/office/drawing/2014/main" id="{BAAB6720-40E5-4231-99DA-D2D2F6165650}"/>
+                <a16:creationId xmlns:a16="http://schemas.microsoft.com/office/drawing/2014/main" id="{1C2653C1-6A44-48BA-8DC9-49F7216529C5}"/>
               </a:ext>
             </a:extLst>
           </p:cNvPr>
@@ -16174,7 +16174,7 @@
           <p:cNvPr id="39" name="">
             <a:extLst xmlns:a="http://schemas.openxmlformats.org/drawingml/2006/main">
               <a:ext uri="{FF2B5EF4-FFF2-40B4-BE49-F238E27FC236}">
-                <a16:creationId xmlns:a16="http://schemas.microsoft.com/office/drawing/2014/main" id="{A541BA5D-8D27-48B7-8AD2-FC6EB6533926}"/>
+                <a16:creationId xmlns:a16="http://schemas.microsoft.com/office/drawing/2014/main" id="{4CA9061F-0A0E-4EB7-9ED5-53C6C1136F1A}"/>
               </a:ext>
             </a:extLst>
           </p:cNvPr>
@@ -16207,7 +16207,7 @@
           <p:cNvPr id="40" name="">
             <a:extLst xmlns:a="http://schemas.openxmlformats.org/drawingml/2006/main">
               <a:ext uri="{FF2B5EF4-FFF2-40B4-BE49-F238E27FC236}">
-                <a16:creationId xmlns:a16="http://schemas.microsoft.com/office/drawing/2014/main" id="{E1DDC2D5-0388-4B46-912E-BE291F9D45AC}"/>
+                <a16:creationId xmlns:a16="http://schemas.microsoft.com/office/drawing/2014/main" id="{2C4B225E-E3BF-442D-AB7B-6F15B140FE42}"/>
               </a:ext>
             </a:extLst>
           </p:cNvPr>
@@ -16257,7 +16257,7 @@
           <p:cNvPr id="41" name="">
             <a:extLst xmlns:a="http://schemas.openxmlformats.org/drawingml/2006/main">
               <a:ext uri="{FF2B5EF4-FFF2-40B4-BE49-F238E27FC236}">
-                <a16:creationId xmlns:a16="http://schemas.microsoft.com/office/drawing/2014/main" id="{94F748D4-AF3A-4CFE-BF22-1652CE219183}"/>
+                <a16:creationId xmlns:a16="http://schemas.microsoft.com/office/drawing/2014/main" id="{2CD3DFE5-CE4D-4E82-840C-A330410D6713}"/>
               </a:ext>
             </a:extLst>
           </p:cNvPr>
@@ -16288,7 +16288,7 @@
           <p:cNvPr id="42" name="">
             <a:extLst xmlns:a="http://schemas.openxmlformats.org/drawingml/2006/main">
               <a:ext uri="{FF2B5EF4-FFF2-40B4-BE49-F238E27FC236}">
-                <a16:creationId xmlns:a16="http://schemas.microsoft.com/office/drawing/2014/main" id="{5F627E27-53C4-4E9D-B9C3-C07DAE16EC7D}"/>
+                <a16:creationId xmlns:a16="http://schemas.microsoft.com/office/drawing/2014/main" id="{B9AB7C7C-FAD6-4C96-B6BA-2C07131D1240}"/>
               </a:ext>
             </a:extLst>
           </p:cNvPr>
@@ -16338,7 +16338,7 @@
           <p:cNvPr id="43" name="">
             <a:extLst xmlns:a="http://schemas.openxmlformats.org/drawingml/2006/main">
               <a:ext uri="{FF2B5EF4-FFF2-40B4-BE49-F238E27FC236}">
-                <a16:creationId xmlns:a16="http://schemas.microsoft.com/office/drawing/2014/main" id="{94EE4C75-3C8B-46AD-9591-3F04462250B4}"/>
+                <a16:creationId xmlns:a16="http://schemas.microsoft.com/office/drawing/2014/main" id="{4191188E-E87B-4CE5-B801-4167A8DBB66B}"/>
               </a:ext>
             </a:extLst>
           </p:cNvPr>
@@ -16369,7 +16369,7 @@
           <p:cNvPr id="44" name="">
             <a:extLst xmlns:a="http://schemas.openxmlformats.org/drawingml/2006/main">
               <a:ext uri="{FF2B5EF4-FFF2-40B4-BE49-F238E27FC236}">
-                <a16:creationId xmlns:a16="http://schemas.microsoft.com/office/drawing/2014/main" id="{56A545E9-A550-4863-8F50-6463DF74B8FE}"/>
+                <a16:creationId xmlns:a16="http://schemas.microsoft.com/office/drawing/2014/main" id="{C8E479F3-EAA2-45F4-A2E4-CDB7D5ED7F3E}"/>
               </a:ext>
             </a:extLst>
           </p:cNvPr>
@@ -16419,7 +16419,7 @@
           <p:cNvPr id="45" name="">
             <a:extLst xmlns:a="http://schemas.openxmlformats.org/drawingml/2006/main">
               <a:ext uri="{FF2B5EF4-FFF2-40B4-BE49-F238E27FC236}">
-                <a16:creationId xmlns:a16="http://schemas.microsoft.com/office/drawing/2014/main" id="{A07AF7B7-A107-4871-92D5-C267D1C63F54}"/>
+                <a16:creationId xmlns:a16="http://schemas.microsoft.com/office/drawing/2014/main" id="{733AF275-DA17-4D84-B336-070432A9DB6A}"/>
               </a:ext>
             </a:extLst>
           </p:cNvPr>
@@ -16450,7 +16450,7 @@
           <p:cNvPr id="46" name="">
             <a:extLst xmlns:a="http://schemas.openxmlformats.org/drawingml/2006/main">
               <a:ext uri="{FF2B5EF4-FFF2-40B4-BE49-F238E27FC236}">
-                <a16:creationId xmlns:a16="http://schemas.microsoft.com/office/drawing/2014/main" id="{2E644005-4996-40DE-82E0-7B965C5A37EF}"/>
+                <a16:creationId xmlns:a16="http://schemas.microsoft.com/office/drawing/2014/main" id="{D43F5FB2-1CDD-42B6-8596-3338CBC133DC}"/>
               </a:ext>
             </a:extLst>
           </p:cNvPr>
@@ -16500,7 +16500,7 @@
           <p:cNvPr id="47" name="">
             <a:extLst xmlns:a="http://schemas.openxmlformats.org/drawingml/2006/main">
               <a:ext uri="{FF2B5EF4-FFF2-40B4-BE49-F238E27FC236}">
-                <a16:creationId xmlns:a16="http://schemas.microsoft.com/office/drawing/2014/main" id="{1282B31C-20EE-4324-AF11-AF185A4273AF}"/>
+                <a16:creationId xmlns:a16="http://schemas.microsoft.com/office/drawing/2014/main" id="{D2E190EC-ACF1-417F-80F8-B308A258A2D4}"/>
               </a:ext>
             </a:extLst>
           </p:cNvPr>
@@ -16707,7 +16707,7 @@
         </p:xfrm>
         <a:graphic xmlns:a="http://schemas.openxmlformats.org/drawingml/2006/main">
           <a:graphicData uri="http://schemas.openxmlformats.org/drawingml/2006/chart">
-            <c:chart xmlns:r="http://schemas.openxmlformats.org/officeDocument/2006/relationships" xmlns:c="http://schemas.openxmlformats.org/drawingml/2006/chart" r:id="Rbb2415458dfa472a"/>
+            <c:chart xmlns:r="http://schemas.openxmlformats.org/officeDocument/2006/relationships" xmlns:c="http://schemas.openxmlformats.org/drawingml/2006/chart" r:id="Rc63073dc0ac84d8e"/>
           </a:graphicData>
         </a:graphic>
       </p:graphicFrame>
@@ -16716,7 +16716,7 @@
           <p:cNvPr id="8" name="">
             <a:extLst xmlns:a="http://schemas.openxmlformats.org/drawingml/2006/main">
               <a:ext uri="{FF2B5EF4-FFF2-40B4-BE49-F238E27FC236}">
-                <a16:creationId xmlns:a16="http://schemas.microsoft.com/office/drawing/2014/main" id="{D0D53B40-0FF3-4CD7-A264-A125A01ED587}"/>
+                <a16:creationId xmlns:a16="http://schemas.microsoft.com/office/drawing/2014/main" id="{7ABE2744-2123-4663-8934-1DC8DFE92A4A}"/>
               </a:ext>
             </a:extLst>
           </p:cNvPr>

--- a/report/ebay_anchoring_rl_presentation.pptx
+++ b/report/ebay_anchoring_rl_presentation.pptx
@@ -2,29 +2,30 @@
 <file path=ppt/presentation.xml><?xml version="1.0" encoding="utf-8"?>
 <p:presentation xmlns:p="http://schemas.openxmlformats.org/presentationml/2006/main">
   <p:sldMasterIdLst>
-    <p:sldMasterId xmlns:r="http://schemas.openxmlformats.org/officeDocument/2006/relationships" id="2147483648" r:id="R743c506193a448d7"/>
-    <p:sldMasterId xmlns:r="http://schemas.openxmlformats.org/officeDocument/2006/relationships" id="2147483651" r:id="Rbefb6a906f2449ea"/>
-    <p:sldMasterId xmlns:r="http://schemas.openxmlformats.org/officeDocument/2006/relationships" id="2147483653" r:id="R8581195f533f470b"/>
-    <p:sldMasterId xmlns:r="http://schemas.openxmlformats.org/officeDocument/2006/relationships" id="2147483656" r:id="Rc087f7d309d24f04"/>
-    <p:sldMasterId xmlns:r="http://schemas.openxmlformats.org/officeDocument/2006/relationships" id="2147483659" r:id="R677f41ecdd9a4d57"/>
-    <p:sldMasterId xmlns:r="http://schemas.openxmlformats.org/officeDocument/2006/relationships" id="2147483678" r:id="Rd4020f0307584f52"/>
-    <p:sldMasterId xmlns:r="http://schemas.openxmlformats.org/officeDocument/2006/relationships" id="2147483680" r:id="R509edf10df6c42eb"/>
+    <p:sldMasterId xmlns:r="http://schemas.openxmlformats.org/officeDocument/2006/relationships" id="2147483648" r:id="R36efdad330a748d6"/>
+    <p:sldMasterId xmlns:r="http://schemas.openxmlformats.org/officeDocument/2006/relationships" id="2147483651" r:id="Rfd8afe45cfc6451b"/>
+    <p:sldMasterId xmlns:r="http://schemas.openxmlformats.org/officeDocument/2006/relationships" id="2147483653" r:id="Rcddcdf10c9ec434c"/>
+    <p:sldMasterId xmlns:r="http://schemas.openxmlformats.org/officeDocument/2006/relationships" id="2147483656" r:id="R587b71eba5c6428f"/>
+    <p:sldMasterId xmlns:r="http://schemas.openxmlformats.org/officeDocument/2006/relationships" id="2147483659" r:id="R90ed40131d7c4418"/>
+    <p:sldMasterId xmlns:r="http://schemas.openxmlformats.org/officeDocument/2006/relationships" id="2147483678" r:id="R849b9fc974034a24"/>
+    <p:sldMasterId xmlns:r="http://schemas.openxmlformats.org/officeDocument/2006/relationships" id="2147483680" r:id="Rfd01af23512d4abb"/>
   </p:sldMasterIdLst>
   <p:notesMasterIdLst>
-    <p:notesMasterId xmlns:r="http://schemas.openxmlformats.org/officeDocument/2006/relationships" r:id="Rebd1237e162842a4"/>
+    <p:notesMasterId xmlns:r="http://schemas.openxmlformats.org/officeDocument/2006/relationships" r:id="R9578b32faa364784"/>
   </p:notesMasterIdLst>
   <p:sldIdLst>
-    <p:sldId xmlns:r="http://schemas.openxmlformats.org/officeDocument/2006/relationships" id="256" r:id="R144adb0e54924706"/>
-    <p:sldId xmlns:r="http://schemas.openxmlformats.org/officeDocument/2006/relationships" id="257" r:id="Raf2786c8d0104135"/>
-    <p:sldId xmlns:r="http://schemas.openxmlformats.org/officeDocument/2006/relationships" id="258" r:id="R704d3811473b4db3"/>
-    <p:sldId xmlns:r="http://schemas.openxmlformats.org/officeDocument/2006/relationships" id="259" r:id="R9fd26a97216d4fae"/>
-    <p:sldId xmlns:r="http://schemas.openxmlformats.org/officeDocument/2006/relationships" id="260" r:id="Rabc25dab316042b3"/>
-    <p:sldId xmlns:r="http://schemas.openxmlformats.org/officeDocument/2006/relationships" id="261" r:id="Rda6b39315a4e4e5d"/>
-    <p:sldId xmlns:r="http://schemas.openxmlformats.org/officeDocument/2006/relationships" id="262" r:id="Ra94100e8b6174f84"/>
-    <p:sldId xmlns:r="http://schemas.openxmlformats.org/officeDocument/2006/relationships" id="263" r:id="R1d8b70bf120b4924"/>
-    <p:sldId xmlns:r="http://schemas.openxmlformats.org/officeDocument/2006/relationships" id="264" r:id="Rfae9d43120ea4e05"/>
-    <p:sldId xmlns:r="http://schemas.openxmlformats.org/officeDocument/2006/relationships" id="265" r:id="R015ffb0978a6427a"/>
-    <p:sldId xmlns:r="http://schemas.openxmlformats.org/officeDocument/2006/relationships" id="266" r:id="R381d7b2378d440ac"/>
+    <p:sldId xmlns:r="http://schemas.openxmlformats.org/officeDocument/2006/relationships" id="256" r:id="Rec2edb18c5084a41"/>
+    <p:sldId xmlns:r="http://schemas.openxmlformats.org/officeDocument/2006/relationships" id="257" r:id="Rf5959b7fc81f4b8f"/>
+    <p:sldId xmlns:r="http://schemas.openxmlformats.org/officeDocument/2006/relationships" id="258" r:id="R6129ba2fdf9741f9"/>
+    <p:sldId xmlns:r="http://schemas.openxmlformats.org/officeDocument/2006/relationships" id="259" r:id="Re6fa1360680e4a64"/>
+    <p:sldId xmlns:r="http://schemas.openxmlformats.org/officeDocument/2006/relationships" id="260" r:id="Rb2037f19f99740ad"/>
+    <p:sldId xmlns:r="http://schemas.openxmlformats.org/officeDocument/2006/relationships" id="261" r:id="Re2f4338eb3ff43b5"/>
+    <p:sldId xmlns:r="http://schemas.openxmlformats.org/officeDocument/2006/relationships" id="262" r:id="Rc0c000101ed045bc"/>
+    <p:sldId xmlns:r="http://schemas.openxmlformats.org/officeDocument/2006/relationships" id="263" r:id="Rd80567da6fc849bd"/>
+    <p:sldId xmlns:r="http://schemas.openxmlformats.org/officeDocument/2006/relationships" id="264" r:id="Rb6b8d639147747c2"/>
+    <p:sldId xmlns:r="http://schemas.openxmlformats.org/officeDocument/2006/relationships" id="265" r:id="R15e781b0c6e7488c"/>
+    <p:sldId xmlns:r="http://schemas.openxmlformats.org/officeDocument/2006/relationships" id="266" r:id="R0c11f72d339b44b7"/>
+    <p:sldId xmlns:r="http://schemas.openxmlformats.org/officeDocument/2006/relationships" id="267" r:id="R3f48ff8a48d04b71"/>
   </p:sldIdLst>
   <p:sldSz cx="9144000" cy="5143500"/>
   <p:notesSz cx="6858000" cy="9144000"/>
@@ -595,12 +596,7 @@
           <a:lstStyle xmlns:a="http://schemas.openxmlformats.org/drawingml/2006/main"/>
           <a:p xmlns:a="http://schemas.openxmlformats.org/drawingml/2006/main">
             <a:r>
-              <a:t>This is the report's negative-but-instructive framing.</a:t>
-            </a:r>
-          </a:p>
-          <a:p xmlns:a="http://schemas.openxmlformats.org/drawingml/2006/main">
-            <a:r>
-              <a:t>Do not present CQL as a reward win; present it as support discipline.</a:t>
+              <a:t>Transition from mechanics to conclusions.</a:t>
             </a:r>
           </a:p>
         </p:txBody>
@@ -670,6 +666,81 @@
           <a:lstStyle xmlns:a="http://schemas.openxmlformats.org/drawingml/2006/main"/>
           <a:p xmlns:a="http://schemas.openxmlformats.org/drawingml/2006/main">
             <a:r>
+              <a:t>This is the report's negative-but-instructive framing.</a:t>
+            </a:r>
+          </a:p>
+          <a:p xmlns:a="http://schemas.openxmlformats.org/drawingml/2006/main">
+            <a:r>
+              <a:t>Do not present CQL as a reward win; present it as support discipline.</a:t>
+            </a:r>
+          </a:p>
+        </p:txBody>
+      </p:sp>
+      <p:sp>
+        <p:nvSpPr>
+          <p:cNvPr id="4" name="Slide Number Placeholder 3"/>
+          <p:cNvSpPr>
+            <a:spLocks xmlns:a="http://schemas.openxmlformats.org/drawingml/2006/main" noGrp="1"/>
+          </p:cNvSpPr>
+          <p:nvPr>
+            <p:ph type="sldNum" idx="5"/>
+          </p:nvPr>
+        </p:nvSpPr>
+        <p:spPr/>
+        <p:txBody>
+          <a:bodyPr xmlns:a="http://schemas.openxmlformats.org/drawingml/2006/main"/>
+          <a:lstStyle xmlns:a="http://schemas.openxmlformats.org/drawingml/2006/main"/>
+          <a:p xmlns:a="http://schemas.openxmlformats.org/drawingml/2006/main"/>
+        </p:txBody>
+      </p:sp>
+    </p:spTree>
+  </p:cSld>
+  <p:clrMapOvr>
+    <a:masterClrMapping xmlns:a="http://schemas.openxmlformats.org/drawingml/2006/main"/>
+  </p:clrMapOvr>
+</p:notes>
+</file>
+
+<file path=ppt/notesSlides/notesSlide12.xml><?xml version="1.0" encoding="utf-8"?>
+<p:notes xmlns:p="http://schemas.openxmlformats.org/presentationml/2006/main">
+  <p:cSld>
+    <p:spTree>
+      <p:nvGrpSpPr>
+        <p:cNvPr id="1" name=""/>
+        <p:cNvGrpSpPr/>
+        <p:nvPr/>
+      </p:nvGrpSpPr>
+      <p:grpSpPr>
+        <a:xfrm xmlns:a="http://schemas.openxmlformats.org/drawingml/2006/main"/>
+      </p:grpSpPr>
+      <p:sp>
+        <p:nvSpPr>
+          <p:cNvPr id="2" name="Slide Image Placeholder 1"/>
+          <p:cNvSpPr>
+            <a:spLocks xmlns:a="http://schemas.openxmlformats.org/drawingml/2006/main" noGrp="1"/>
+          </p:cNvSpPr>
+          <p:nvPr>
+            <p:ph type="sldImg" idx="0"/>
+          </p:nvPr>
+        </p:nvSpPr>
+        <p:spPr/>
+      </p:sp>
+      <p:sp>
+        <p:nvSpPr>
+          <p:cNvPr id="3" name="Notes Placeholder 2"/>
+          <p:cNvSpPr>
+            <a:spLocks xmlns:a="http://schemas.openxmlformats.org/drawingml/2006/main" noGrp="1"/>
+          </p:cNvSpPr>
+          <p:nvPr>
+            <p:ph type="body" idx="1"/>
+          </p:nvPr>
+        </p:nvSpPr>
+        <p:spPr/>
+        <p:txBody>
+          <a:bodyPr xmlns:a="http://schemas.openxmlformats.org/drawingml/2006/main"/>
+          <a:lstStyle xmlns:a="http://schemas.openxmlformats.org/drawingml/2006/main"/>
+          <a:p xmlns:a="http://schemas.openxmlformats.org/drawingml/2006/main">
+            <a:r>
               <a:t>Close with the claim boundary.</a:t>
             </a:r>
           </a:p>
@@ -1110,12 +1181,12 @@
           <a:lstStyle xmlns:a="http://schemas.openxmlformats.org/drawingml/2006/main"/>
           <a:p xmlns:a="http://schemas.openxmlformats.org/drawingml/2006/main">
             <a:r>
-              <a:t>State explicitly that the rows are not directly comparable as a ranking.</a:t>
-            </a:r>
-          </a:p>
-          <a:p xmlns:a="http://schemas.openxmlformats.org/drawingml/2006/main">
-            <a:r>
-              <a:t>The key is how each number was produced.</a:t>
+              <a:t>Use this slide to answer why the supervised baseline is not enough.</a:t>
+            </a:r>
+          </a:p>
+          <a:p xmlns:a="http://schemas.openxmlformats.org/drawingml/2006/main">
+            <a:r>
+              <a:t>The issue is not that AUC is useless; the issue is greedy extrapolation.</a:t>
             </a:r>
           </a:p>
         </p:txBody>
@@ -1185,12 +1256,12 @@
           <a:lstStyle xmlns:a="http://schemas.openxmlformats.org/drawingml/2006/main"/>
           <a:p xmlns:a="http://schemas.openxmlformats.org/drawingml/2006/main">
             <a:r>
-              <a:t>This is the central evidence slide.</a:t>
-            </a:r>
-          </a:p>
-          <a:p xmlns:a="http://schemas.openxmlformats.org/drawingml/2006/main">
-            <a:r>
-              <a:t>Explain ESS simply: how much usable logged support remains after weighting.</a:t>
+              <a:t>State explicitly that the rows are not directly comparable as a ranking.</a:t>
+            </a:r>
+          </a:p>
+          <a:p xmlns:a="http://schemas.openxmlformats.org/drawingml/2006/main">
+            <a:r>
+              <a:t>The key is how each number was produced.</a:t>
             </a:r>
           </a:p>
         </p:txBody>
@@ -1260,7 +1331,12 @@
           <a:lstStyle xmlns:a="http://schemas.openxmlformats.org/drawingml/2006/main"/>
           <a:p xmlns:a="http://schemas.openxmlformats.org/drawingml/2006/main">
             <a:r>
-              <a:t>Transition from mechanics to conclusions.</a:t>
+              <a:t>This is the central evidence slide.</a:t>
+            </a:r>
+          </a:p>
+          <a:p xmlns:a="http://schemas.openxmlformats.org/drawingml/2006/main">
+            <a:r>
+              <a:t>Explain ESS simply: how much usable logged support remains after weighting.</a:t>
             </a:r>
           </a:p>
         </p:txBody>
@@ -1307,7 +1383,7 @@
           <p:cNvPr id="12" name="Titel 1">
             <a:extLst xmlns:a="http://schemas.openxmlformats.org/drawingml/2006/main">
               <a:ext uri="{FF2B5EF4-FFF2-40B4-BE49-F238E27FC236}">
-                <a16:creationId xmlns:a16="http://schemas.microsoft.com/office/drawing/2014/main" id="{0C842C3C-4309-41AB-9DB2-A9458E5EA6D7}"/>
+                <a16:creationId xmlns:a16="http://schemas.microsoft.com/office/drawing/2014/main" id="{9A4EB549-F9A3-4845-82C6-C2A3C1BB722F}"/>
               </a:ext>
             </a:extLst>
           </p:cNvPr>
@@ -1361,7 +1437,7 @@
           <p:cNvPr id="16" name="Inhaltsplatzhalter 2">
             <a:extLst xmlns:a="http://schemas.openxmlformats.org/drawingml/2006/main">
               <a:ext uri="{FF2B5EF4-FFF2-40B4-BE49-F238E27FC236}">
-                <a16:creationId xmlns:a16="http://schemas.microsoft.com/office/drawing/2014/main" id="{E9F6DB42-E0FA-45BB-BCC9-4E91EF22D01D}"/>
+                <a16:creationId xmlns:a16="http://schemas.microsoft.com/office/drawing/2014/main" id="{82C43D66-5FB8-4D6E-8831-D4467AF2C5DE}"/>
               </a:ext>
             </a:extLst>
           </p:cNvPr>
@@ -1419,7 +1495,7 @@
           <p:cNvPr id="14" name="Rechteck 13">
             <a:extLst xmlns:a="http://schemas.openxmlformats.org/drawingml/2006/main">
               <a:ext uri="{FF2B5EF4-FFF2-40B4-BE49-F238E27FC236}">
-                <a16:creationId xmlns:a16="http://schemas.microsoft.com/office/drawing/2014/main" id="{7B5D8E2C-C666-4B1F-AE36-6ACD9C9D2176}"/>
+                <a16:creationId xmlns:a16="http://schemas.microsoft.com/office/drawing/2014/main" id="{B6A1662A-C474-41F0-9E49-ED00AEDE2D17}"/>
               </a:ext>
             </a:extLst>
           </p:cNvPr>
@@ -1470,7 +1546,7 @@
           <p:cNvPr id="6" name="Foliennummernplatzhalter 5">
             <a:extLst xmlns:a="http://schemas.openxmlformats.org/drawingml/2006/main">
               <a:ext uri="{FF2B5EF4-FFF2-40B4-BE49-F238E27FC236}">
-                <a16:creationId xmlns:a16="http://schemas.microsoft.com/office/drawing/2014/main" id="{7534DD79-70A0-4173-A899-52EF5A6E328F}"/>
+                <a16:creationId xmlns:a16="http://schemas.microsoft.com/office/drawing/2014/main" id="{59F3C7F3-D3FB-4F12-AC64-5D65013A57CE}"/>
               </a:ext>
             </a:extLst>
           </p:cNvPr>
@@ -1514,7 +1590,7 @@
           <p:cNvPr id="10" name="Titel 1">
             <a:extLst xmlns:a="http://schemas.openxmlformats.org/drawingml/2006/main">
               <a:ext uri="{FF2B5EF4-FFF2-40B4-BE49-F238E27FC236}">
-                <a16:creationId xmlns:a16="http://schemas.microsoft.com/office/drawing/2014/main" id="{52D7B14C-58EC-4C26-A42E-0FFD9ADE6440}"/>
+                <a16:creationId xmlns:a16="http://schemas.microsoft.com/office/drawing/2014/main" id="{610BBE4C-3860-4728-8720-CA2E75409495}"/>
               </a:ext>
             </a:extLst>
           </p:cNvPr>
@@ -1570,7 +1646,7 @@
           <p:cNvPr id="5" name="Foliennummernplatzhalter 4">
             <a:extLst xmlns:a="http://schemas.openxmlformats.org/drawingml/2006/main">
               <a:ext uri="{FF2B5EF4-FFF2-40B4-BE49-F238E27FC236}">
-                <a16:creationId xmlns:a16="http://schemas.microsoft.com/office/drawing/2014/main" id="{7CC482BA-802B-452A-80AF-3BA1F7359A76}"/>
+                <a16:creationId xmlns:a16="http://schemas.microsoft.com/office/drawing/2014/main" id="{BC44031A-EFE8-4581-8FA2-F1A2DD1EA374}"/>
               </a:ext>
             </a:extLst>
           </p:cNvPr>
@@ -1597,7 +1673,7 @@
           <p:cNvPr id="7" name="Fußzeilenplatzhalter 6">
             <a:extLst xmlns:a="http://schemas.openxmlformats.org/drawingml/2006/main">
               <a:ext uri="{FF2B5EF4-FFF2-40B4-BE49-F238E27FC236}">
-                <a16:creationId xmlns:a16="http://schemas.microsoft.com/office/drawing/2014/main" id="{1ED4D4CE-9C3B-41F0-B5A6-1C1C91C5F39A}"/>
+                <a16:creationId xmlns:a16="http://schemas.microsoft.com/office/drawing/2014/main" id="{698A76E8-E369-40D1-B477-D5C0358846E9}"/>
               </a:ext>
             </a:extLst>
           </p:cNvPr>
@@ -1641,7 +1717,7 @@
           <p:cNvPr id="3" name="Inhaltsplatzhalter 2">
             <a:extLst xmlns:a="http://schemas.openxmlformats.org/drawingml/2006/main">
               <a:ext uri="{FF2B5EF4-FFF2-40B4-BE49-F238E27FC236}">
-                <a16:creationId xmlns:a16="http://schemas.microsoft.com/office/drawing/2014/main" id="{9FB6B2A8-46A0-4C15-A1AE-AC37AFE25797}"/>
+                <a16:creationId xmlns:a16="http://schemas.microsoft.com/office/drawing/2014/main" id="{3F7C3D29-0C9D-4AA8-B980-7EC62FFC820A}"/>
               </a:ext>
             </a:extLst>
           </p:cNvPr>
@@ -1717,7 +1793,7 @@
           <p:cNvPr id="5" name="Foliennummernplatzhalter 4">
             <a:extLst xmlns:a="http://schemas.openxmlformats.org/drawingml/2006/main">
               <a:ext uri="{FF2B5EF4-FFF2-40B4-BE49-F238E27FC236}">
-                <a16:creationId xmlns:a16="http://schemas.microsoft.com/office/drawing/2014/main" id="{FC685114-FBE8-4F09-9E98-609450E307DD}"/>
+                <a16:creationId xmlns:a16="http://schemas.microsoft.com/office/drawing/2014/main" id="{9A5E0CE5-E2B1-4EE9-ACE3-09E1E15B2861}"/>
               </a:ext>
             </a:extLst>
           </p:cNvPr>
@@ -1744,7 +1820,7 @@
           <p:cNvPr id="7" name="Fußzeilenplatzhalter 6">
             <a:extLst xmlns:a="http://schemas.openxmlformats.org/drawingml/2006/main">
               <a:ext uri="{FF2B5EF4-FFF2-40B4-BE49-F238E27FC236}">
-                <a16:creationId xmlns:a16="http://schemas.microsoft.com/office/drawing/2014/main" id="{9DE51DE6-D6D2-4BCA-A354-2C32FF8FD5F5}"/>
+                <a16:creationId xmlns:a16="http://schemas.microsoft.com/office/drawing/2014/main" id="{7A7A8F1B-1EA8-43E6-AC95-BDC17E002111}"/>
               </a:ext>
             </a:extLst>
           </p:cNvPr>
@@ -1771,7 +1847,7 @@
           <p:cNvPr id="6" name="Textplatzhalter 7">
             <a:extLst xmlns:a="http://schemas.openxmlformats.org/drawingml/2006/main">
               <a:ext uri="{FF2B5EF4-FFF2-40B4-BE49-F238E27FC236}">
-                <a16:creationId xmlns:a16="http://schemas.microsoft.com/office/drawing/2014/main" id="{B4E66127-E51E-4382-BCF9-1CE443D233DA}"/>
+                <a16:creationId xmlns:a16="http://schemas.microsoft.com/office/drawing/2014/main" id="{636D36AF-95DC-44E5-867C-5AE089A3DB3E}"/>
               </a:ext>
             </a:extLst>
           </p:cNvPr>
@@ -1984,7 +2060,7 @@
           <p:cNvPr id="3" name="Inhaltsplatzhalter 2">
             <a:extLst xmlns:a="http://schemas.openxmlformats.org/drawingml/2006/main">
               <a:ext uri="{FF2B5EF4-FFF2-40B4-BE49-F238E27FC236}">
-                <a16:creationId xmlns:a16="http://schemas.microsoft.com/office/drawing/2014/main" id="{7689D7F0-030B-46AC-A827-17059A3FAE0D}"/>
+                <a16:creationId xmlns:a16="http://schemas.microsoft.com/office/drawing/2014/main" id="{7CAB7C17-A5AD-4B0C-8D74-9C4AC8301458}"/>
               </a:ext>
             </a:extLst>
           </p:cNvPr>
@@ -2060,7 +2136,7 @@
           <p:cNvPr id="5" name="Foliennummernplatzhalter 4">
             <a:extLst xmlns:a="http://schemas.openxmlformats.org/drawingml/2006/main">
               <a:ext uri="{FF2B5EF4-FFF2-40B4-BE49-F238E27FC236}">
-                <a16:creationId xmlns:a16="http://schemas.microsoft.com/office/drawing/2014/main" id="{AAC4C312-F0C9-42D6-8C2E-7701AFF88BC8}"/>
+                <a16:creationId xmlns:a16="http://schemas.microsoft.com/office/drawing/2014/main" id="{7BE0B502-2217-4E1F-B85E-A60EBD240446}"/>
               </a:ext>
             </a:extLst>
           </p:cNvPr>
@@ -2087,7 +2163,7 @@
           <p:cNvPr id="7" name="Fußzeilenplatzhalter 6">
             <a:extLst xmlns:a="http://schemas.openxmlformats.org/drawingml/2006/main">
               <a:ext uri="{FF2B5EF4-FFF2-40B4-BE49-F238E27FC236}">
-                <a16:creationId xmlns:a16="http://schemas.microsoft.com/office/drawing/2014/main" id="{CD6087E1-873D-4778-B2EB-791DEBE1D6C6}"/>
+                <a16:creationId xmlns:a16="http://schemas.microsoft.com/office/drawing/2014/main" id="{556AF79E-0CFE-4F30-8065-944EAEBE5E75}"/>
               </a:ext>
             </a:extLst>
           </p:cNvPr>
@@ -2114,7 +2190,7 @@
           <p:cNvPr id="6" name="Textplatzhalter 7">
             <a:extLst xmlns:a="http://schemas.openxmlformats.org/drawingml/2006/main">
               <a:ext uri="{FF2B5EF4-FFF2-40B4-BE49-F238E27FC236}">
-                <a16:creationId xmlns:a16="http://schemas.microsoft.com/office/drawing/2014/main" id="{2B30746B-DDD7-447A-BD0C-317BF6E7AAFD}"/>
+                <a16:creationId xmlns:a16="http://schemas.microsoft.com/office/drawing/2014/main" id="{1811A9AE-516B-4398-ACC0-0A6109378D9B}"/>
               </a:ext>
             </a:extLst>
           </p:cNvPr>
@@ -2236,7 +2312,7 @@
           <p:cNvPr id="3" name="Inhaltsplatzhalter 2">
             <a:extLst xmlns:a="http://schemas.openxmlformats.org/drawingml/2006/main">
               <a:ext uri="{FF2B5EF4-FFF2-40B4-BE49-F238E27FC236}">
-                <a16:creationId xmlns:a16="http://schemas.microsoft.com/office/drawing/2014/main" id="{53A74070-D0E1-4788-A8CA-89AD06BC896C}"/>
+                <a16:creationId xmlns:a16="http://schemas.microsoft.com/office/drawing/2014/main" id="{79054BAA-CD8A-4356-83CC-D343A69D8342}"/>
               </a:ext>
             </a:extLst>
           </p:cNvPr>
@@ -2312,7 +2388,7 @@
           <p:cNvPr id="5" name="Foliennummernplatzhalter 4">
             <a:extLst xmlns:a="http://schemas.openxmlformats.org/drawingml/2006/main">
               <a:ext uri="{FF2B5EF4-FFF2-40B4-BE49-F238E27FC236}">
-                <a16:creationId xmlns:a16="http://schemas.microsoft.com/office/drawing/2014/main" id="{2C39C9EA-FAB9-4EF1-AD2D-82A7EBA30881}"/>
+                <a16:creationId xmlns:a16="http://schemas.microsoft.com/office/drawing/2014/main" id="{F5B1A7D2-266E-4DD9-9C41-76492A322096}"/>
               </a:ext>
             </a:extLst>
           </p:cNvPr>
@@ -2339,7 +2415,7 @@
           <p:cNvPr id="7" name="Fußzeilenplatzhalter 6">
             <a:extLst xmlns:a="http://schemas.openxmlformats.org/drawingml/2006/main">
               <a:ext uri="{FF2B5EF4-FFF2-40B4-BE49-F238E27FC236}">
-                <a16:creationId xmlns:a16="http://schemas.microsoft.com/office/drawing/2014/main" id="{7293576E-21A5-42A0-91F9-26B44B8B2A4C}"/>
+                <a16:creationId xmlns:a16="http://schemas.microsoft.com/office/drawing/2014/main" id="{52EC5770-22CA-4CFA-B210-2198C6C1CC45}"/>
               </a:ext>
             </a:extLst>
           </p:cNvPr>
@@ -2366,7 +2442,7 @@
           <p:cNvPr id="6" name="Textplatzhalter 7">
             <a:extLst xmlns:a="http://schemas.openxmlformats.org/drawingml/2006/main">
               <a:ext uri="{FF2B5EF4-FFF2-40B4-BE49-F238E27FC236}">
-                <a16:creationId xmlns:a16="http://schemas.microsoft.com/office/drawing/2014/main" id="{171CE642-6248-41FC-BF22-83C9E25D049C}"/>
+                <a16:creationId xmlns:a16="http://schemas.microsoft.com/office/drawing/2014/main" id="{550F141D-142C-4121-9F39-82F616BB8200}"/>
               </a:ext>
             </a:extLst>
           </p:cNvPr>
@@ -2488,7 +2564,7 @@
           <p:cNvPr id="3" name="Inhaltsplatzhalter 2">
             <a:extLst xmlns:a="http://schemas.openxmlformats.org/drawingml/2006/main">
               <a:ext uri="{FF2B5EF4-FFF2-40B4-BE49-F238E27FC236}">
-                <a16:creationId xmlns:a16="http://schemas.microsoft.com/office/drawing/2014/main" id="{51ACDE97-4B6A-442C-8B98-23CF725E9DF5}"/>
+                <a16:creationId xmlns:a16="http://schemas.microsoft.com/office/drawing/2014/main" id="{20BC1E01-A0C2-411E-A1DA-F42E41EEBE52}"/>
               </a:ext>
             </a:extLst>
           </p:cNvPr>
@@ -2564,7 +2640,7 @@
           <p:cNvPr id="5" name="Foliennummernplatzhalter 4">
             <a:extLst xmlns:a="http://schemas.openxmlformats.org/drawingml/2006/main">
               <a:ext uri="{FF2B5EF4-FFF2-40B4-BE49-F238E27FC236}">
-                <a16:creationId xmlns:a16="http://schemas.microsoft.com/office/drawing/2014/main" id="{B179233F-2A72-4EB5-9BDD-390863AD3FC2}"/>
+                <a16:creationId xmlns:a16="http://schemas.microsoft.com/office/drawing/2014/main" id="{1705F7CE-6125-49C8-9035-58B4B8024098}"/>
               </a:ext>
             </a:extLst>
           </p:cNvPr>
@@ -2591,7 +2667,7 @@
           <p:cNvPr id="7" name="Fußzeilenplatzhalter 6">
             <a:extLst xmlns:a="http://schemas.openxmlformats.org/drawingml/2006/main">
               <a:ext uri="{FF2B5EF4-FFF2-40B4-BE49-F238E27FC236}">
-                <a16:creationId xmlns:a16="http://schemas.microsoft.com/office/drawing/2014/main" id="{44A06E1C-5F29-4B2B-98F5-73DC14998B83}"/>
+                <a16:creationId xmlns:a16="http://schemas.microsoft.com/office/drawing/2014/main" id="{A9730C4B-8063-4F20-A01C-EE39E4D69E6F}"/>
               </a:ext>
             </a:extLst>
           </p:cNvPr>
@@ -2782,7 +2858,7 @@
           <p:cNvPr id="3" name="Inhaltsplatzhalter 2">
             <a:extLst xmlns:a="http://schemas.openxmlformats.org/drawingml/2006/main">
               <a:ext uri="{FF2B5EF4-FFF2-40B4-BE49-F238E27FC236}">
-                <a16:creationId xmlns:a16="http://schemas.microsoft.com/office/drawing/2014/main" id="{6BF4CD57-754C-4C67-B1DB-15CED9C10E56}"/>
+                <a16:creationId xmlns:a16="http://schemas.microsoft.com/office/drawing/2014/main" id="{B97B1E55-9A47-47F5-B95C-BDCE29F1B38C}"/>
               </a:ext>
             </a:extLst>
           </p:cNvPr>
@@ -2858,7 +2934,7 @@
           <p:cNvPr id="5" name="Foliennummernplatzhalter 4">
             <a:extLst xmlns:a="http://schemas.openxmlformats.org/drawingml/2006/main">
               <a:ext uri="{FF2B5EF4-FFF2-40B4-BE49-F238E27FC236}">
-                <a16:creationId xmlns:a16="http://schemas.microsoft.com/office/drawing/2014/main" id="{175472D2-BBC8-4576-84FE-6E544C62A740}"/>
+                <a16:creationId xmlns:a16="http://schemas.microsoft.com/office/drawing/2014/main" id="{411CB76C-581A-4600-BB2B-1634279C8C1E}"/>
               </a:ext>
             </a:extLst>
           </p:cNvPr>
@@ -2885,7 +2961,7 @@
           <p:cNvPr id="7" name="Fußzeilenplatzhalter 6">
             <a:extLst xmlns:a="http://schemas.openxmlformats.org/drawingml/2006/main">
               <a:ext uri="{FF2B5EF4-FFF2-40B4-BE49-F238E27FC236}">
-                <a16:creationId xmlns:a16="http://schemas.microsoft.com/office/drawing/2014/main" id="{C442CEE0-87E5-46CE-A55A-B3D1752A4542}"/>
+                <a16:creationId xmlns:a16="http://schemas.microsoft.com/office/drawing/2014/main" id="{C4F3BA6A-3BE4-4CB7-9788-3FE2DD0AB144}"/>
               </a:ext>
             </a:extLst>
           </p:cNvPr>
@@ -2985,7 +3061,7 @@
           <p:cNvPr id="11" name="Inhaltsplatzhalter 2">
             <a:extLst xmlns:a="http://schemas.openxmlformats.org/drawingml/2006/main">
               <a:ext uri="{FF2B5EF4-FFF2-40B4-BE49-F238E27FC236}">
-                <a16:creationId xmlns:a16="http://schemas.microsoft.com/office/drawing/2014/main" id="{B35F090F-DEA4-4491-8051-2C98E4C15400}"/>
+                <a16:creationId xmlns:a16="http://schemas.microsoft.com/office/drawing/2014/main" id="{4651B423-BFD2-4645-894A-942980817246}"/>
               </a:ext>
             </a:extLst>
           </p:cNvPr>
@@ -3062,7 +3138,7 @@
           <p:cNvPr id="13" name="Inhaltsplatzhalter 2">
             <a:extLst xmlns:a="http://schemas.openxmlformats.org/drawingml/2006/main">
               <a:ext uri="{FF2B5EF4-FFF2-40B4-BE49-F238E27FC236}">
-                <a16:creationId xmlns:a16="http://schemas.microsoft.com/office/drawing/2014/main" id="{BD895D63-0F33-470E-AB75-E7561F2EE056}"/>
+                <a16:creationId xmlns:a16="http://schemas.microsoft.com/office/drawing/2014/main" id="{F1B7DA78-E76A-4204-9EBE-6EE20D1F0BED}"/>
               </a:ext>
             </a:extLst>
           </p:cNvPr>
@@ -3139,7 +3215,7 @@
           <p:cNvPr id="6" name="Foliennummernplatzhalter 5">
             <a:extLst xmlns:a="http://schemas.openxmlformats.org/drawingml/2006/main">
               <a:ext uri="{FF2B5EF4-FFF2-40B4-BE49-F238E27FC236}">
-                <a16:creationId xmlns:a16="http://schemas.microsoft.com/office/drawing/2014/main" id="{5BA9829F-4723-4380-ABA5-58AB89DFF7FF}"/>
+                <a16:creationId xmlns:a16="http://schemas.microsoft.com/office/drawing/2014/main" id="{7CB0BD19-C75D-4F2C-A50C-B49B73CCE65F}"/>
               </a:ext>
             </a:extLst>
           </p:cNvPr>
@@ -3166,7 +3242,7 @@
           <p:cNvPr id="8" name="Fußzeilenplatzhalter 7">
             <a:extLst xmlns:a="http://schemas.openxmlformats.org/drawingml/2006/main">
               <a:ext uri="{FF2B5EF4-FFF2-40B4-BE49-F238E27FC236}">
-                <a16:creationId xmlns:a16="http://schemas.microsoft.com/office/drawing/2014/main" id="{724028DD-883D-44A7-8C0D-B0A19FE9AA95}"/>
+                <a16:creationId xmlns:a16="http://schemas.microsoft.com/office/drawing/2014/main" id="{E362D030-EAB3-4FB3-8A1D-48DA809088EB}"/>
               </a:ext>
             </a:extLst>
           </p:cNvPr>
@@ -3357,7 +3433,7 @@
           <p:cNvPr id="11" name="Inhaltsplatzhalter 2">
             <a:extLst xmlns:a="http://schemas.openxmlformats.org/drawingml/2006/main">
               <a:ext uri="{FF2B5EF4-FFF2-40B4-BE49-F238E27FC236}">
-                <a16:creationId xmlns:a16="http://schemas.microsoft.com/office/drawing/2014/main" id="{9F41627E-3E2A-4DDA-8BD5-8AF1EC18CB68}"/>
+                <a16:creationId xmlns:a16="http://schemas.microsoft.com/office/drawing/2014/main" id="{0C487978-2D99-4BA3-97DA-E517FC329D47}"/>
               </a:ext>
             </a:extLst>
           </p:cNvPr>
@@ -3434,7 +3510,7 @@
           <p:cNvPr id="13" name="Inhaltsplatzhalter 2">
             <a:extLst xmlns:a="http://schemas.openxmlformats.org/drawingml/2006/main">
               <a:ext uri="{FF2B5EF4-FFF2-40B4-BE49-F238E27FC236}">
-                <a16:creationId xmlns:a16="http://schemas.microsoft.com/office/drawing/2014/main" id="{77B2108F-6F6D-45B0-824E-E7822E122B7B}"/>
+                <a16:creationId xmlns:a16="http://schemas.microsoft.com/office/drawing/2014/main" id="{EDB22EBB-1103-4F03-9658-96E2CC3B21CC}"/>
               </a:ext>
             </a:extLst>
           </p:cNvPr>
@@ -3511,7 +3587,7 @@
           <p:cNvPr id="6" name="Foliennummernplatzhalter 5">
             <a:extLst xmlns:a="http://schemas.openxmlformats.org/drawingml/2006/main">
               <a:ext uri="{FF2B5EF4-FFF2-40B4-BE49-F238E27FC236}">
-                <a16:creationId xmlns:a16="http://schemas.microsoft.com/office/drawing/2014/main" id="{981B724B-BA7C-463E-969D-E9D986333D0D}"/>
+                <a16:creationId xmlns:a16="http://schemas.microsoft.com/office/drawing/2014/main" id="{0B33DE64-8FA8-4FF0-9E9A-B4CCDB6B0CA4}"/>
               </a:ext>
             </a:extLst>
           </p:cNvPr>
@@ -3538,7 +3614,7 @@
           <p:cNvPr id="8" name="Fußzeilenplatzhalter 7">
             <a:extLst xmlns:a="http://schemas.openxmlformats.org/drawingml/2006/main">
               <a:ext uri="{FF2B5EF4-FFF2-40B4-BE49-F238E27FC236}">
-                <a16:creationId xmlns:a16="http://schemas.microsoft.com/office/drawing/2014/main" id="{BB678100-B51C-4019-B0BB-289DF315DA75}"/>
+                <a16:creationId xmlns:a16="http://schemas.microsoft.com/office/drawing/2014/main" id="{81CEED1D-ADB4-47EA-A524-FC93B6480EBC}"/>
               </a:ext>
             </a:extLst>
           </p:cNvPr>
@@ -3638,7 +3714,7 @@
           <p:cNvPr id="18" name="Textplatzhalter 7">
             <a:extLst xmlns:a="http://schemas.openxmlformats.org/drawingml/2006/main">
               <a:ext uri="{FF2B5EF4-FFF2-40B4-BE49-F238E27FC236}">
-                <a16:creationId xmlns:a16="http://schemas.microsoft.com/office/drawing/2014/main" id="{1F859CA0-22A9-4D75-AEDA-82078C8DF039}"/>
+                <a16:creationId xmlns:a16="http://schemas.microsoft.com/office/drawing/2014/main" id="{349C9AB4-42BC-4876-84C1-D1CA98B60EC6}"/>
               </a:ext>
             </a:extLst>
           </p:cNvPr>
@@ -3688,7 +3764,7 @@
           <p:cNvPr id="7" name="Foliennummernplatzhalter 6">
             <a:extLst xmlns:a="http://schemas.openxmlformats.org/drawingml/2006/main">
               <a:ext uri="{FF2B5EF4-FFF2-40B4-BE49-F238E27FC236}">
-                <a16:creationId xmlns:a16="http://schemas.microsoft.com/office/drawing/2014/main" id="{1C0E1EED-2438-4852-BF29-BE078136A1B6}"/>
+                <a16:creationId xmlns:a16="http://schemas.microsoft.com/office/drawing/2014/main" id="{D3D5B76D-D201-4FEE-A402-A624CA38433B}"/>
               </a:ext>
             </a:extLst>
           </p:cNvPr>
@@ -3715,7 +3791,7 @@
           <p:cNvPr id="12" name="Fußzeilenplatzhalter 11">
             <a:extLst xmlns:a="http://schemas.openxmlformats.org/drawingml/2006/main">
               <a:ext uri="{FF2B5EF4-FFF2-40B4-BE49-F238E27FC236}">
-                <a16:creationId xmlns:a16="http://schemas.microsoft.com/office/drawing/2014/main" id="{8FA99611-FC4C-400F-9669-8A174D90733D}"/>
+                <a16:creationId xmlns:a16="http://schemas.microsoft.com/office/drawing/2014/main" id="{41EA85AE-510A-459A-99BC-E73F2ECB8DDE}"/>
               </a:ext>
             </a:extLst>
           </p:cNvPr>
@@ -3742,7 +3818,7 @@
           <p:cNvPr id="8" name="Inhaltsplatzhalter 9">
             <a:extLst xmlns:a="http://schemas.openxmlformats.org/drawingml/2006/main">
               <a:ext uri="{FF2B5EF4-FFF2-40B4-BE49-F238E27FC236}">
-                <a16:creationId xmlns:a16="http://schemas.microsoft.com/office/drawing/2014/main" id="{4F671E99-F2EE-4A1A-A94C-FD99032B9EF2}"/>
+                <a16:creationId xmlns:a16="http://schemas.microsoft.com/office/drawing/2014/main" id="{706B941C-23B2-4855-B55D-9652B41CB359}"/>
               </a:ext>
             </a:extLst>
           </p:cNvPr>
@@ -3816,7 +3892,7 @@
           <p:cNvPr id="11" name="Bildplatzhalter 2">
             <a:extLst xmlns:a="http://schemas.openxmlformats.org/drawingml/2006/main">
               <a:ext uri="{FF2B5EF4-FFF2-40B4-BE49-F238E27FC236}">
-                <a16:creationId xmlns:a16="http://schemas.microsoft.com/office/drawing/2014/main" id="{911E37DF-568F-425F-AAB6-E8D2601D02AC}"/>
+                <a16:creationId xmlns:a16="http://schemas.microsoft.com/office/drawing/2014/main" id="{8BDB3539-B816-4610-B008-2A66A1DBD407}"/>
               </a:ext>
             </a:extLst>
           </p:cNvPr>
@@ -4019,7 +4095,7 @@
           <p:cNvPr id="18" name="Textplatzhalter 7">
             <a:extLst xmlns:a="http://schemas.openxmlformats.org/drawingml/2006/main">
               <a:ext uri="{FF2B5EF4-FFF2-40B4-BE49-F238E27FC236}">
-                <a16:creationId xmlns:a16="http://schemas.microsoft.com/office/drawing/2014/main" id="{313A7067-EBFF-43BD-89C2-F2F9AD63FA92}"/>
+                <a16:creationId xmlns:a16="http://schemas.microsoft.com/office/drawing/2014/main" id="{495BB896-DF84-4227-BF48-674128686108}"/>
               </a:ext>
             </a:extLst>
           </p:cNvPr>
@@ -4069,7 +4145,7 @@
           <p:cNvPr id="7" name="Foliennummernplatzhalter 6">
             <a:extLst xmlns:a="http://schemas.openxmlformats.org/drawingml/2006/main">
               <a:ext uri="{FF2B5EF4-FFF2-40B4-BE49-F238E27FC236}">
-                <a16:creationId xmlns:a16="http://schemas.microsoft.com/office/drawing/2014/main" id="{3ECD2471-DA94-4E57-B661-6F21B526A14B}"/>
+                <a16:creationId xmlns:a16="http://schemas.microsoft.com/office/drawing/2014/main" id="{48D6844B-C385-435B-8335-C88915E217AF}"/>
               </a:ext>
             </a:extLst>
           </p:cNvPr>
@@ -4096,7 +4172,7 @@
           <p:cNvPr id="12" name="Fußzeilenplatzhalter 11">
             <a:extLst xmlns:a="http://schemas.openxmlformats.org/drawingml/2006/main">
               <a:ext uri="{FF2B5EF4-FFF2-40B4-BE49-F238E27FC236}">
-                <a16:creationId xmlns:a16="http://schemas.microsoft.com/office/drawing/2014/main" id="{4734F881-B279-4FEF-A3E2-2041B4CEB293}"/>
+                <a16:creationId xmlns:a16="http://schemas.microsoft.com/office/drawing/2014/main" id="{E88628A8-D405-43C0-A855-1C68040353A6}"/>
               </a:ext>
             </a:extLst>
           </p:cNvPr>
@@ -4123,7 +4199,7 @@
           <p:cNvPr id="8" name="Inhaltsplatzhalter 9">
             <a:extLst xmlns:a="http://schemas.openxmlformats.org/drawingml/2006/main">
               <a:ext uri="{FF2B5EF4-FFF2-40B4-BE49-F238E27FC236}">
-                <a16:creationId xmlns:a16="http://schemas.microsoft.com/office/drawing/2014/main" id="{C030E6DA-A317-4DCF-858B-783266EBE595}"/>
+                <a16:creationId xmlns:a16="http://schemas.microsoft.com/office/drawing/2014/main" id="{04DECFEA-1740-40EC-B246-1782A0DD1AF1}"/>
               </a:ext>
             </a:extLst>
           </p:cNvPr>
@@ -4197,7 +4273,7 @@
           <p:cNvPr id="11" name="Bildplatzhalter 2">
             <a:extLst xmlns:a="http://schemas.openxmlformats.org/drawingml/2006/main">
               <a:ext uri="{FF2B5EF4-FFF2-40B4-BE49-F238E27FC236}">
-                <a16:creationId xmlns:a16="http://schemas.microsoft.com/office/drawing/2014/main" id="{5D62D7C0-54EE-4D86-AD0F-666B59BFD6F2}"/>
+                <a16:creationId xmlns:a16="http://schemas.microsoft.com/office/drawing/2014/main" id="{E40B3265-AB26-47F6-80EC-485DFB635F3A}"/>
               </a:ext>
             </a:extLst>
           </p:cNvPr>
@@ -4313,7 +4389,7 @@
           <p:nvPr/>
         </p:nvPicPr>
         <p:blipFill>
-          <a:blip xmlns:r="http://schemas.openxmlformats.org/officeDocument/2006/relationships" xmlns:a="http://schemas.openxmlformats.org/drawingml/2006/main" r:embed="R098ceda945f84a4d"/>
+          <a:blip xmlns:r="http://schemas.openxmlformats.org/officeDocument/2006/relationships" xmlns:a="http://schemas.openxmlformats.org/drawingml/2006/main" r:embed="Ra752140831a042c4"/>
           <a:stretch xmlns:a="http://schemas.openxmlformats.org/drawingml/2006/main">
             <a:fillRect l="0" t="0" r="0" b="0"/>
           </a:stretch>
@@ -4333,7 +4409,7 @@
           <p:cNvPr id="12" name="Titel 1">
             <a:extLst xmlns:a="http://schemas.openxmlformats.org/drawingml/2006/main">
               <a:ext uri="{FF2B5EF4-FFF2-40B4-BE49-F238E27FC236}">
-                <a16:creationId xmlns:a16="http://schemas.microsoft.com/office/drawing/2014/main" id="{FC62E4C3-AD5B-4F18-A6E8-3CD520563E2F}"/>
+                <a16:creationId xmlns:a16="http://schemas.microsoft.com/office/drawing/2014/main" id="{D7660815-41FC-4171-98FD-B5D88701B7BD}"/>
               </a:ext>
             </a:extLst>
           </p:cNvPr>
@@ -4387,7 +4463,7 @@
           <p:cNvPr id="16" name="Inhaltsplatzhalter 2">
             <a:extLst xmlns:a="http://schemas.openxmlformats.org/drawingml/2006/main">
               <a:ext uri="{FF2B5EF4-FFF2-40B4-BE49-F238E27FC236}">
-                <a16:creationId xmlns:a16="http://schemas.microsoft.com/office/drawing/2014/main" id="{54EFA432-92C8-40E8-B064-3285F823E634}"/>
+                <a16:creationId xmlns:a16="http://schemas.microsoft.com/office/drawing/2014/main" id="{162C22B9-B08C-497A-A4C1-18F99A5C8D7B}"/>
               </a:ext>
             </a:extLst>
           </p:cNvPr>
@@ -4445,7 +4521,7 @@
           <p:cNvPr id="14" name="Rechteck 13">
             <a:extLst xmlns:a="http://schemas.openxmlformats.org/drawingml/2006/main">
               <a:ext uri="{FF2B5EF4-FFF2-40B4-BE49-F238E27FC236}">
-                <a16:creationId xmlns:a16="http://schemas.microsoft.com/office/drawing/2014/main" id="{A621E9D3-A749-406B-B3CE-0477918A96A4}"/>
+                <a16:creationId xmlns:a16="http://schemas.microsoft.com/office/drawing/2014/main" id="{238357C7-4FF5-46BF-9031-52B45F65BFA5}"/>
               </a:ext>
             </a:extLst>
           </p:cNvPr>
@@ -4496,7 +4572,7 @@
           <p:cNvPr id="6" name="Foliennummernplatzhalter 5">
             <a:extLst xmlns:a="http://schemas.openxmlformats.org/drawingml/2006/main">
               <a:ext uri="{FF2B5EF4-FFF2-40B4-BE49-F238E27FC236}">
-                <a16:creationId xmlns:a16="http://schemas.microsoft.com/office/drawing/2014/main" id="{C6076C19-033D-42F0-8DF4-D6D4DE1725C6}"/>
+                <a16:creationId xmlns:a16="http://schemas.microsoft.com/office/drawing/2014/main" id="{D455CE3B-EEC3-413B-9D17-0590C94F06A8}"/>
               </a:ext>
             </a:extLst>
           </p:cNvPr>
@@ -4540,7 +4616,7 @@
           <p:cNvPr id="9" name="Rechteck 8">
             <a:extLst xmlns:a="http://schemas.openxmlformats.org/drawingml/2006/main">
               <a:ext uri="{FF2B5EF4-FFF2-40B4-BE49-F238E27FC236}">
-                <a16:creationId xmlns:a16="http://schemas.microsoft.com/office/drawing/2014/main" id="{42EF5934-D531-48B8-8C9A-D320F8640ECC}"/>
+                <a16:creationId xmlns:a16="http://schemas.microsoft.com/office/drawing/2014/main" id="{7614EC11-A042-4342-A5CB-CE3ABA2296CD}"/>
               </a:ext>
             </a:extLst>
           </p:cNvPr>
@@ -4584,7 +4660,7 @@
           <p:cNvPr id="7" name="Foliennummernplatzhalter 6">
             <a:extLst xmlns:a="http://schemas.openxmlformats.org/drawingml/2006/main">
               <a:ext uri="{FF2B5EF4-FFF2-40B4-BE49-F238E27FC236}">
-                <a16:creationId xmlns:a16="http://schemas.microsoft.com/office/drawing/2014/main" id="{8F068A01-1080-44F4-B25D-6E1F67B18D09}"/>
+                <a16:creationId xmlns:a16="http://schemas.microsoft.com/office/drawing/2014/main" id="{B1A28750-E781-4948-B211-90F7218125EC}"/>
               </a:ext>
             </a:extLst>
           </p:cNvPr>
@@ -4611,7 +4687,7 @@
           <p:cNvPr id="12" name="Fußzeilenplatzhalter 11">
             <a:extLst xmlns:a="http://schemas.openxmlformats.org/drawingml/2006/main">
               <a:ext uri="{FF2B5EF4-FFF2-40B4-BE49-F238E27FC236}">
-                <a16:creationId xmlns:a16="http://schemas.microsoft.com/office/drawing/2014/main" id="{1902EEA9-B559-4D7F-9054-57E2ECA5CABD}"/>
+                <a16:creationId xmlns:a16="http://schemas.microsoft.com/office/drawing/2014/main" id="{1C1820C0-D5EC-49E3-978F-5857FDF8713D}"/>
               </a:ext>
             </a:extLst>
           </p:cNvPr>
@@ -4638,7 +4714,7 @@
           <p:cNvPr id="8" name="Inhaltsplatzhalter 9">
             <a:extLst xmlns:a="http://schemas.openxmlformats.org/drawingml/2006/main">
               <a:ext uri="{FF2B5EF4-FFF2-40B4-BE49-F238E27FC236}">
-                <a16:creationId xmlns:a16="http://schemas.microsoft.com/office/drawing/2014/main" id="{8C511424-4769-414C-B773-B1EFB097B28B}"/>
+                <a16:creationId xmlns:a16="http://schemas.microsoft.com/office/drawing/2014/main" id="{9BB51670-3623-4E7A-8BB4-D19E6F3E0939}"/>
               </a:ext>
             </a:extLst>
           </p:cNvPr>
@@ -4712,7 +4788,7 @@
           <p:cNvPr id="11" name="Bildplatzhalter 2">
             <a:extLst xmlns:a="http://schemas.openxmlformats.org/drawingml/2006/main">
               <a:ext uri="{FF2B5EF4-FFF2-40B4-BE49-F238E27FC236}">
-                <a16:creationId xmlns:a16="http://schemas.microsoft.com/office/drawing/2014/main" id="{881CF1ED-85B5-4704-9B4A-C2A94049440B}"/>
+                <a16:creationId xmlns:a16="http://schemas.microsoft.com/office/drawing/2014/main" id="{A69F8112-E76D-49BD-9F4A-1D73B1DFB040}"/>
               </a:ext>
             </a:extLst>
           </p:cNvPr>
@@ -4751,7 +4827,7 @@
           <p:cNvPr id="10" name="Textplatzhalter 7">
             <a:extLst xmlns:a="http://schemas.openxmlformats.org/drawingml/2006/main">
               <a:ext uri="{FF2B5EF4-FFF2-40B4-BE49-F238E27FC236}">
-                <a16:creationId xmlns:a16="http://schemas.microsoft.com/office/drawing/2014/main" id="{87C23807-E62C-4A4F-B8C6-94666BAC13CB}"/>
+                <a16:creationId xmlns:a16="http://schemas.microsoft.com/office/drawing/2014/main" id="{01E6D905-F7CE-4A9C-81D1-A60B947869C4}"/>
               </a:ext>
             </a:extLst>
           </p:cNvPr>
@@ -4965,7 +5041,7 @@
           <p:cNvPr id="9" name="Rechteck 8">
             <a:extLst xmlns:a="http://schemas.openxmlformats.org/drawingml/2006/main">
               <a:ext uri="{FF2B5EF4-FFF2-40B4-BE49-F238E27FC236}">
-                <a16:creationId xmlns:a16="http://schemas.microsoft.com/office/drawing/2014/main" id="{36F4F194-2F74-4551-8CF1-9AE25546C616}"/>
+                <a16:creationId xmlns:a16="http://schemas.microsoft.com/office/drawing/2014/main" id="{6B04B78B-AB3E-4B73-9278-4811796A7FD2}"/>
               </a:ext>
             </a:extLst>
           </p:cNvPr>
@@ -5009,7 +5085,7 @@
           <p:cNvPr id="7" name="Foliennummernplatzhalter 6">
             <a:extLst xmlns:a="http://schemas.openxmlformats.org/drawingml/2006/main">
               <a:ext uri="{FF2B5EF4-FFF2-40B4-BE49-F238E27FC236}">
-                <a16:creationId xmlns:a16="http://schemas.microsoft.com/office/drawing/2014/main" id="{2AEF0ACD-A56F-438F-B240-C3768E8ED6FC}"/>
+                <a16:creationId xmlns:a16="http://schemas.microsoft.com/office/drawing/2014/main" id="{73195A0A-FFAD-4C28-8A7A-5B4810549F9F}"/>
               </a:ext>
             </a:extLst>
           </p:cNvPr>
@@ -5036,7 +5112,7 @@
           <p:cNvPr id="12" name="Fußzeilenplatzhalter 11">
             <a:extLst xmlns:a="http://schemas.openxmlformats.org/drawingml/2006/main">
               <a:ext uri="{FF2B5EF4-FFF2-40B4-BE49-F238E27FC236}">
-                <a16:creationId xmlns:a16="http://schemas.microsoft.com/office/drawing/2014/main" id="{569C09DD-84BA-419D-80FC-CC7119D3C2B1}"/>
+                <a16:creationId xmlns:a16="http://schemas.microsoft.com/office/drawing/2014/main" id="{E0E6FAC7-9AE9-4AE2-9B90-D10C7A86E0F8}"/>
               </a:ext>
             </a:extLst>
           </p:cNvPr>
@@ -5063,7 +5139,7 @@
           <p:cNvPr id="8" name="Inhaltsplatzhalter 9">
             <a:extLst xmlns:a="http://schemas.openxmlformats.org/drawingml/2006/main">
               <a:ext uri="{FF2B5EF4-FFF2-40B4-BE49-F238E27FC236}">
-                <a16:creationId xmlns:a16="http://schemas.microsoft.com/office/drawing/2014/main" id="{6976BAB2-4D6F-4249-805C-AFB84622A6EA}"/>
+                <a16:creationId xmlns:a16="http://schemas.microsoft.com/office/drawing/2014/main" id="{D3710DE9-2E1F-4505-87AF-DCAEC39F7AC1}"/>
               </a:ext>
             </a:extLst>
           </p:cNvPr>
@@ -5137,7 +5213,7 @@
           <p:cNvPr id="11" name="Bildplatzhalter 2">
             <a:extLst xmlns:a="http://schemas.openxmlformats.org/drawingml/2006/main">
               <a:ext uri="{FF2B5EF4-FFF2-40B4-BE49-F238E27FC236}">
-                <a16:creationId xmlns:a16="http://schemas.microsoft.com/office/drawing/2014/main" id="{768B0AA4-F021-4939-A141-910683BCD0E1}"/>
+                <a16:creationId xmlns:a16="http://schemas.microsoft.com/office/drawing/2014/main" id="{B6A9E4CB-AA1D-4C10-8D48-1B05F3E769FA}"/>
               </a:ext>
             </a:extLst>
           </p:cNvPr>
@@ -5176,7 +5252,7 @@
           <p:cNvPr id="10" name="Textplatzhalter 7">
             <a:extLst xmlns:a="http://schemas.openxmlformats.org/drawingml/2006/main">
               <a:ext uri="{FF2B5EF4-FFF2-40B4-BE49-F238E27FC236}">
-                <a16:creationId xmlns:a16="http://schemas.microsoft.com/office/drawing/2014/main" id="{E69A1903-2486-4D13-82D8-95B51EAC1CEE}"/>
+                <a16:creationId xmlns:a16="http://schemas.microsoft.com/office/drawing/2014/main" id="{736A49E1-7ECF-449A-93EB-EF5F2292C9E8}"/>
               </a:ext>
             </a:extLst>
           </p:cNvPr>
@@ -5299,7 +5375,7 @@
           <p:cNvPr id="7" name="Foliennummernplatzhalter 6">
             <a:extLst xmlns:a="http://schemas.openxmlformats.org/drawingml/2006/main">
               <a:ext uri="{FF2B5EF4-FFF2-40B4-BE49-F238E27FC236}">
-                <a16:creationId xmlns:a16="http://schemas.microsoft.com/office/drawing/2014/main" id="{3C2574D1-9F54-4AB9-9F16-D96259B3662C}"/>
+                <a16:creationId xmlns:a16="http://schemas.microsoft.com/office/drawing/2014/main" id="{68E83F5A-F501-4789-B1B1-A05416B22F95}"/>
               </a:ext>
             </a:extLst>
           </p:cNvPr>
@@ -5326,7 +5402,7 @@
           <p:cNvPr id="12" name="Fußzeilenplatzhalter 11">
             <a:extLst xmlns:a="http://schemas.openxmlformats.org/drawingml/2006/main">
               <a:ext uri="{FF2B5EF4-FFF2-40B4-BE49-F238E27FC236}">
-                <a16:creationId xmlns:a16="http://schemas.microsoft.com/office/drawing/2014/main" id="{CCBF7E90-3507-4ED1-AE32-564C23F3F2DC}"/>
+                <a16:creationId xmlns:a16="http://schemas.microsoft.com/office/drawing/2014/main" id="{1F02D1F3-637C-4A16-AA38-37BFCC21E618}"/>
               </a:ext>
             </a:extLst>
           </p:cNvPr>
@@ -5353,7 +5429,7 @@
           <p:cNvPr id="9" name="Bildplatzhalter 8">
             <a:extLst xmlns:a="http://schemas.openxmlformats.org/drawingml/2006/main">
               <a:ext uri="{FF2B5EF4-FFF2-40B4-BE49-F238E27FC236}">
-                <a16:creationId xmlns:a16="http://schemas.microsoft.com/office/drawing/2014/main" id="{1882A00F-5F8D-4FB9-B323-667EDCD51219}"/>
+                <a16:creationId xmlns:a16="http://schemas.microsoft.com/office/drawing/2014/main" id="{C84DA204-2EAE-4FFF-A1AD-907D9E4541FD}"/>
               </a:ext>
             </a:extLst>
           </p:cNvPr>
@@ -5389,7 +5465,7 @@
           <p:cNvPr id="8" name="Textplatzhalter 7">
             <a:extLst xmlns:a="http://schemas.openxmlformats.org/drawingml/2006/main">
               <a:ext uri="{FF2B5EF4-FFF2-40B4-BE49-F238E27FC236}">
-                <a16:creationId xmlns:a16="http://schemas.microsoft.com/office/drawing/2014/main" id="{128FC414-7C1E-479C-AD0D-EAFD20944746}"/>
+                <a16:creationId xmlns:a16="http://schemas.microsoft.com/office/drawing/2014/main" id="{9C3C520A-4CC4-4A5B-8F17-B00F35C85C5F}"/>
               </a:ext>
             </a:extLst>
           </p:cNvPr>
@@ -5603,7 +5679,7 @@
           <p:cNvPr id="7" name="Foliennummernplatzhalter 6">
             <a:extLst xmlns:a="http://schemas.openxmlformats.org/drawingml/2006/main">
               <a:ext uri="{FF2B5EF4-FFF2-40B4-BE49-F238E27FC236}">
-                <a16:creationId xmlns:a16="http://schemas.microsoft.com/office/drawing/2014/main" id="{837CF4D8-4FBA-43AC-B416-E6000C3AAE0D}"/>
+                <a16:creationId xmlns:a16="http://schemas.microsoft.com/office/drawing/2014/main" id="{DA25F5F0-3353-45DD-A9D5-13E881347EB7}"/>
               </a:ext>
             </a:extLst>
           </p:cNvPr>
@@ -5630,7 +5706,7 @@
           <p:cNvPr id="12" name="Fußzeilenplatzhalter 11">
             <a:extLst xmlns:a="http://schemas.openxmlformats.org/drawingml/2006/main">
               <a:ext uri="{FF2B5EF4-FFF2-40B4-BE49-F238E27FC236}">
-                <a16:creationId xmlns:a16="http://schemas.microsoft.com/office/drawing/2014/main" id="{7FDE1D62-4117-46AF-A53D-65FD80745DB9}"/>
+                <a16:creationId xmlns:a16="http://schemas.microsoft.com/office/drawing/2014/main" id="{C27C89DD-21BC-4B53-831A-7C0F24987E7F}"/>
               </a:ext>
             </a:extLst>
           </p:cNvPr>
@@ -5657,7 +5733,7 @@
           <p:cNvPr id="9" name="Bildplatzhalter 8">
             <a:extLst xmlns:a="http://schemas.openxmlformats.org/drawingml/2006/main">
               <a:ext uri="{FF2B5EF4-FFF2-40B4-BE49-F238E27FC236}">
-                <a16:creationId xmlns:a16="http://schemas.microsoft.com/office/drawing/2014/main" id="{F99156D0-BA81-4333-8B1E-6FED4F1F6A7C}"/>
+                <a16:creationId xmlns:a16="http://schemas.microsoft.com/office/drawing/2014/main" id="{8837161C-323D-4C4C-9978-F2CB5306073B}"/>
               </a:ext>
             </a:extLst>
           </p:cNvPr>
@@ -5693,7 +5769,7 @@
           <p:cNvPr id="8" name="Textplatzhalter 7">
             <a:extLst xmlns:a="http://schemas.openxmlformats.org/drawingml/2006/main">
               <a:ext uri="{FF2B5EF4-FFF2-40B4-BE49-F238E27FC236}">
-                <a16:creationId xmlns:a16="http://schemas.microsoft.com/office/drawing/2014/main" id="{B48727E4-CB95-49AE-869B-7E3D8E8B0311}"/>
+                <a16:creationId xmlns:a16="http://schemas.microsoft.com/office/drawing/2014/main" id="{58D3D7BA-4B4A-41B0-8BD8-2C236972B559}"/>
               </a:ext>
             </a:extLst>
           </p:cNvPr>
@@ -5816,7 +5892,7 @@
           <p:cNvPr id="8" name="Bildplatzhalter 2">
             <a:extLst xmlns:a="http://schemas.openxmlformats.org/drawingml/2006/main">
               <a:ext uri="{FF2B5EF4-FFF2-40B4-BE49-F238E27FC236}">
-                <a16:creationId xmlns:a16="http://schemas.microsoft.com/office/drawing/2014/main" id="{72E5420F-527A-45AD-8153-FB411A2CB273}"/>
+                <a16:creationId xmlns:a16="http://schemas.microsoft.com/office/drawing/2014/main" id="{50D3B05C-E0F9-4193-85F8-515A43A62EED}"/>
               </a:ext>
             </a:extLst>
           </p:cNvPr>
@@ -5855,7 +5931,7 @@
           <p:cNvPr id="6" name="Foliennummernplatzhalter 5">
             <a:extLst xmlns:a="http://schemas.openxmlformats.org/drawingml/2006/main">
               <a:ext uri="{FF2B5EF4-FFF2-40B4-BE49-F238E27FC236}">
-                <a16:creationId xmlns:a16="http://schemas.microsoft.com/office/drawing/2014/main" id="{0F9A01B0-4ACE-4E6F-A99C-3504CE7B0981}"/>
+                <a16:creationId xmlns:a16="http://schemas.microsoft.com/office/drawing/2014/main" id="{FC65015B-E983-43C8-83F4-260B22602956}"/>
               </a:ext>
             </a:extLst>
           </p:cNvPr>
@@ -5882,7 +5958,7 @@
           <p:cNvPr id="10" name="Fußzeilenplatzhalter 9">
             <a:extLst xmlns:a="http://schemas.openxmlformats.org/drawingml/2006/main">
               <a:ext uri="{FF2B5EF4-FFF2-40B4-BE49-F238E27FC236}">
-                <a16:creationId xmlns:a16="http://schemas.microsoft.com/office/drawing/2014/main" id="{8033138A-8E9B-43B4-BB26-E8D317DACB88}"/>
+                <a16:creationId xmlns:a16="http://schemas.microsoft.com/office/drawing/2014/main" id="{925BFC70-7828-4AB5-9EF0-5493465B4542}"/>
               </a:ext>
             </a:extLst>
           </p:cNvPr>
@@ -6073,7 +6149,7 @@
           <p:cNvPr id="8" name="Bildplatzhalter 2">
             <a:extLst xmlns:a="http://schemas.openxmlformats.org/drawingml/2006/main">
               <a:ext uri="{FF2B5EF4-FFF2-40B4-BE49-F238E27FC236}">
-                <a16:creationId xmlns:a16="http://schemas.microsoft.com/office/drawing/2014/main" id="{51376CB4-9196-4A58-86AF-E4E51A5DD5A5}"/>
+                <a16:creationId xmlns:a16="http://schemas.microsoft.com/office/drawing/2014/main" id="{25216346-AD81-4C53-BD4A-82989E92A986}"/>
               </a:ext>
             </a:extLst>
           </p:cNvPr>
@@ -6112,7 +6188,7 @@
           <p:cNvPr id="6" name="Foliennummernplatzhalter 5">
             <a:extLst xmlns:a="http://schemas.openxmlformats.org/drawingml/2006/main">
               <a:ext uri="{FF2B5EF4-FFF2-40B4-BE49-F238E27FC236}">
-                <a16:creationId xmlns:a16="http://schemas.microsoft.com/office/drawing/2014/main" id="{FE3156EB-87D6-4523-B670-0F734DBAEE10}"/>
+                <a16:creationId xmlns:a16="http://schemas.microsoft.com/office/drawing/2014/main" id="{C2242E6B-F053-4D86-A91C-216D2F7B06DF}"/>
               </a:ext>
             </a:extLst>
           </p:cNvPr>
@@ -6139,7 +6215,7 @@
           <p:cNvPr id="10" name="Fußzeilenplatzhalter 9">
             <a:extLst xmlns:a="http://schemas.openxmlformats.org/drawingml/2006/main">
               <a:ext uri="{FF2B5EF4-FFF2-40B4-BE49-F238E27FC236}">
-                <a16:creationId xmlns:a16="http://schemas.microsoft.com/office/drawing/2014/main" id="{803145A5-B29F-4754-A030-790C249485E2}"/>
+                <a16:creationId xmlns:a16="http://schemas.microsoft.com/office/drawing/2014/main" id="{25A5F9C1-E257-4E55-B913-B6525EB18442}"/>
               </a:ext>
             </a:extLst>
           </p:cNvPr>
@@ -6239,7 +6315,7 @@
           <p:cNvPr id="12" name="Titel 1">
             <a:extLst xmlns:a="http://schemas.openxmlformats.org/drawingml/2006/main">
               <a:ext uri="{FF2B5EF4-FFF2-40B4-BE49-F238E27FC236}">
-                <a16:creationId xmlns:a16="http://schemas.microsoft.com/office/drawing/2014/main" id="{16FF5CFB-5EE6-429E-9B0B-F46AE488E3E3}"/>
+                <a16:creationId xmlns:a16="http://schemas.microsoft.com/office/drawing/2014/main" id="{3A152828-FC63-4389-B35F-09DDEDDA6A5C}"/>
               </a:ext>
             </a:extLst>
           </p:cNvPr>
@@ -6306,7 +6382,7 @@
           <p:cNvPr id="5" name="Foliennummernplatzhalter 4">
             <a:extLst xmlns:a="http://schemas.openxmlformats.org/drawingml/2006/main">
               <a:ext uri="{FF2B5EF4-FFF2-40B4-BE49-F238E27FC236}">
-                <a16:creationId xmlns:a16="http://schemas.microsoft.com/office/drawing/2014/main" id="{40925EF4-0BDE-48C8-9113-553F58110F0F}"/>
+                <a16:creationId xmlns:a16="http://schemas.microsoft.com/office/drawing/2014/main" id="{801643E5-AB76-4434-92DC-F796F4CD2935}"/>
               </a:ext>
             </a:extLst>
           </p:cNvPr>
@@ -6333,7 +6409,7 @@
           <p:cNvPr id="7" name="Fußzeilenplatzhalter 6">
             <a:extLst xmlns:a="http://schemas.openxmlformats.org/drawingml/2006/main">
               <a:ext uri="{FF2B5EF4-FFF2-40B4-BE49-F238E27FC236}">
-                <a16:creationId xmlns:a16="http://schemas.microsoft.com/office/drawing/2014/main" id="{76AD58D1-F0DB-4B2B-8B48-4AE4FF62FFA9}"/>
+                <a16:creationId xmlns:a16="http://schemas.microsoft.com/office/drawing/2014/main" id="{F0F7B6D3-1A8D-4EC5-8A91-DF08AE1C6420}"/>
               </a:ext>
             </a:extLst>
           </p:cNvPr>
@@ -6377,7 +6453,7 @@
           <p:cNvPr id="12" name="Titel 1">
             <a:extLst xmlns:a="http://schemas.openxmlformats.org/drawingml/2006/main">
               <a:ext uri="{FF2B5EF4-FFF2-40B4-BE49-F238E27FC236}">
-                <a16:creationId xmlns:a16="http://schemas.microsoft.com/office/drawing/2014/main" id="{D3E87927-EB5D-4A81-A694-3380707B8891}"/>
+                <a16:creationId xmlns:a16="http://schemas.microsoft.com/office/drawing/2014/main" id="{4A05C10A-79A7-4DBF-AAD0-06984F88B18C}"/>
               </a:ext>
             </a:extLst>
           </p:cNvPr>
@@ -6444,7 +6520,7 @@
           <p:cNvPr id="6" name="Foliennummernplatzhalter 5">
             <a:extLst xmlns:a="http://schemas.openxmlformats.org/drawingml/2006/main">
               <a:ext uri="{FF2B5EF4-FFF2-40B4-BE49-F238E27FC236}">
-                <a16:creationId xmlns:a16="http://schemas.microsoft.com/office/drawing/2014/main" id="{39EC0D3E-BFDF-410C-B498-CD082DF0A12D}"/>
+                <a16:creationId xmlns:a16="http://schemas.microsoft.com/office/drawing/2014/main" id="{25DA1AA8-920E-4A27-ABA1-8632B16DF5EF}"/>
               </a:ext>
             </a:extLst>
           </p:cNvPr>
@@ -6480,7 +6556,7 @@
           <p:cNvPr id="8" name="Fußzeilenplatzhalter 7">
             <a:extLst xmlns:a="http://schemas.openxmlformats.org/drawingml/2006/main">
               <a:ext uri="{FF2B5EF4-FFF2-40B4-BE49-F238E27FC236}">
-                <a16:creationId xmlns:a16="http://schemas.microsoft.com/office/drawing/2014/main" id="{213142F2-1AAB-42FC-8377-15B1C125A7A7}"/>
+                <a16:creationId xmlns:a16="http://schemas.microsoft.com/office/drawing/2014/main" id="{98A5BC2F-A025-4A8A-A115-8E8CE82CAC74}"/>
               </a:ext>
             </a:extLst>
           </p:cNvPr>
@@ -6550,7 +6626,7 @@
           <p:cNvPr id="12" name="Titel 1">
             <a:extLst xmlns:a="http://schemas.openxmlformats.org/drawingml/2006/main">
               <a:ext uri="{FF2B5EF4-FFF2-40B4-BE49-F238E27FC236}">
-                <a16:creationId xmlns:a16="http://schemas.microsoft.com/office/drawing/2014/main" id="{6C20E8BF-281A-449F-83B7-5ACF8A5EA31A}"/>
+                <a16:creationId xmlns:a16="http://schemas.microsoft.com/office/drawing/2014/main" id="{7DB9A25D-F14C-40CC-A844-AE35053423CF}"/>
               </a:ext>
             </a:extLst>
           </p:cNvPr>
@@ -6604,7 +6680,7 @@
           <p:cNvPr id="16" name="Inhaltsplatzhalter 2">
             <a:extLst xmlns:a="http://schemas.openxmlformats.org/drawingml/2006/main">
               <a:ext uri="{FF2B5EF4-FFF2-40B4-BE49-F238E27FC236}">
-                <a16:creationId xmlns:a16="http://schemas.microsoft.com/office/drawing/2014/main" id="{34ADC3F5-4745-46B4-8125-8A1BF7D6FA97}"/>
+                <a16:creationId xmlns:a16="http://schemas.microsoft.com/office/drawing/2014/main" id="{6EA9C5EB-C8CF-4768-86D5-A46DC300BEAA}"/>
               </a:ext>
             </a:extLst>
           </p:cNvPr>
@@ -6666,7 +6742,7 @@
           <p:cNvPr id="5" name="Foliennummernplatzhalter 4">
             <a:extLst xmlns:a="http://schemas.openxmlformats.org/drawingml/2006/main">
               <a:ext uri="{FF2B5EF4-FFF2-40B4-BE49-F238E27FC236}">
-                <a16:creationId xmlns:a16="http://schemas.microsoft.com/office/drawing/2014/main" id="{199F29C0-64CB-4F1D-8951-016864BBC89D}"/>
+                <a16:creationId xmlns:a16="http://schemas.microsoft.com/office/drawing/2014/main" id="{17C56E80-E865-4895-ACC8-0C6DF44150FA}"/>
               </a:ext>
             </a:extLst>
           </p:cNvPr>
@@ -6719,7 +6795,7 @@
           <p:cNvPr id="12" name="Titel 1">
             <a:extLst xmlns:a="http://schemas.openxmlformats.org/drawingml/2006/main">
               <a:ext uri="{FF2B5EF4-FFF2-40B4-BE49-F238E27FC236}">
-                <a16:creationId xmlns:a16="http://schemas.microsoft.com/office/drawing/2014/main" id="{DB2B2DD2-DEC3-4BCD-A9E1-9EADA11152BC}"/>
+                <a16:creationId xmlns:a16="http://schemas.microsoft.com/office/drawing/2014/main" id="{47712126-E1A4-487E-9CF7-EB8432C58B98}"/>
               </a:ext>
             </a:extLst>
           </p:cNvPr>
@@ -6773,7 +6849,7 @@
           <p:cNvPr id="16" name="Inhaltsplatzhalter 2">
             <a:extLst xmlns:a="http://schemas.openxmlformats.org/drawingml/2006/main">
               <a:ext uri="{FF2B5EF4-FFF2-40B4-BE49-F238E27FC236}">
-                <a16:creationId xmlns:a16="http://schemas.microsoft.com/office/drawing/2014/main" id="{5B18E820-02F7-47EE-BAD8-A379B7359A7A}"/>
+                <a16:creationId xmlns:a16="http://schemas.microsoft.com/office/drawing/2014/main" id="{49B44634-755D-4873-BE50-A1E4C9989249}"/>
               </a:ext>
             </a:extLst>
           </p:cNvPr>
@@ -6835,7 +6911,7 @@
           <p:cNvPr id="5" name="Foliennummernplatzhalter 4">
             <a:extLst xmlns:a="http://schemas.openxmlformats.org/drawingml/2006/main">
               <a:ext uri="{FF2B5EF4-FFF2-40B4-BE49-F238E27FC236}">
-                <a16:creationId xmlns:a16="http://schemas.microsoft.com/office/drawing/2014/main" id="{647D15CF-8720-4A5A-9BD1-C02C5C1ACB08}"/>
+                <a16:creationId xmlns:a16="http://schemas.microsoft.com/office/drawing/2014/main" id="{227AD20F-BA14-4E31-B18D-D823469B40CD}"/>
               </a:ext>
             </a:extLst>
           </p:cNvPr>
@@ -6976,7 +7052,7 @@
           <p:cNvPr id="12" name="Titel 1">
             <a:extLst xmlns:a="http://schemas.openxmlformats.org/drawingml/2006/main">
               <a:ext uri="{FF2B5EF4-FFF2-40B4-BE49-F238E27FC236}">
-                <a16:creationId xmlns:a16="http://schemas.microsoft.com/office/drawing/2014/main" id="{298DCBD3-9385-4E9C-B826-5D3524EF7D1A}"/>
+                <a16:creationId xmlns:a16="http://schemas.microsoft.com/office/drawing/2014/main" id="{82CA6B56-C4D4-4C42-8DA1-6F894B2954DF}"/>
               </a:ext>
             </a:extLst>
           </p:cNvPr>
@@ -7030,7 +7106,7 @@
           <p:cNvPr id="16" name="Inhaltsplatzhalter 2">
             <a:extLst xmlns:a="http://schemas.openxmlformats.org/drawingml/2006/main">
               <a:ext uri="{FF2B5EF4-FFF2-40B4-BE49-F238E27FC236}">
-                <a16:creationId xmlns:a16="http://schemas.microsoft.com/office/drawing/2014/main" id="{6A2BF818-19D9-48AC-9459-6CA401DBBF91}"/>
+                <a16:creationId xmlns:a16="http://schemas.microsoft.com/office/drawing/2014/main" id="{7D653EDE-C7D8-4E0A-BC73-86502B830344}"/>
               </a:ext>
             </a:extLst>
           </p:cNvPr>
@@ -7092,7 +7168,7 @@
           <p:cNvPr id="14" name="Rechteck 13">
             <a:extLst xmlns:a="http://schemas.openxmlformats.org/drawingml/2006/main">
               <a:ext uri="{FF2B5EF4-FFF2-40B4-BE49-F238E27FC236}">
-                <a16:creationId xmlns:a16="http://schemas.microsoft.com/office/drawing/2014/main" id="{27B886CB-E445-43B0-8FE1-51845E9D3F64}"/>
+                <a16:creationId xmlns:a16="http://schemas.microsoft.com/office/drawing/2014/main" id="{126A0324-9CD0-4B94-8838-C15F9DBDA9D5}"/>
               </a:ext>
             </a:extLst>
           </p:cNvPr>
@@ -7143,7 +7219,7 @@
           <p:cNvPr id="6" name="Foliennummernplatzhalter 5">
             <a:extLst xmlns:a="http://schemas.openxmlformats.org/drawingml/2006/main">
               <a:ext uri="{FF2B5EF4-FFF2-40B4-BE49-F238E27FC236}">
-                <a16:creationId xmlns:a16="http://schemas.microsoft.com/office/drawing/2014/main" id="{F9F170B1-9250-4BC8-B6E1-404B756F8286}"/>
+                <a16:creationId xmlns:a16="http://schemas.microsoft.com/office/drawing/2014/main" id="{26B00A92-C3CD-4573-93CF-D732344F1BBE}"/>
               </a:ext>
             </a:extLst>
           </p:cNvPr>
@@ -7191,7 +7267,7 @@
           <p:nvPr/>
         </p:nvPicPr>
         <p:blipFill>
-          <a:blip xmlns:r="http://schemas.openxmlformats.org/officeDocument/2006/relationships" xmlns:a="http://schemas.openxmlformats.org/drawingml/2006/main" r:embed="Rb78a7d06019b4133"/>
+          <a:blip xmlns:r="http://schemas.openxmlformats.org/officeDocument/2006/relationships" xmlns:a="http://schemas.openxmlformats.org/drawingml/2006/main" r:embed="Rc20545f58bd74eec"/>
           <a:stretch xmlns:a="http://schemas.openxmlformats.org/drawingml/2006/main">
             <a:fillRect l="0" t="0" r="0" b="0"/>
           </a:stretch>
@@ -7211,7 +7287,7 @@
           <p:cNvPr id="12" name="Titel 1">
             <a:extLst xmlns:a="http://schemas.openxmlformats.org/drawingml/2006/main">
               <a:ext uri="{FF2B5EF4-FFF2-40B4-BE49-F238E27FC236}">
-                <a16:creationId xmlns:a16="http://schemas.microsoft.com/office/drawing/2014/main" id="{465C6A33-01C6-4E11-847B-3D3AAC1AEF0C}"/>
+                <a16:creationId xmlns:a16="http://schemas.microsoft.com/office/drawing/2014/main" id="{C46EF0B1-9300-42F3-A658-92F0A77B1F79}"/>
               </a:ext>
             </a:extLst>
           </p:cNvPr>
@@ -7265,7 +7341,7 @@
           <p:cNvPr id="16" name="Inhaltsplatzhalter 2">
             <a:extLst xmlns:a="http://schemas.openxmlformats.org/drawingml/2006/main">
               <a:ext uri="{FF2B5EF4-FFF2-40B4-BE49-F238E27FC236}">
-                <a16:creationId xmlns:a16="http://schemas.microsoft.com/office/drawing/2014/main" id="{EEBC5754-05B9-4A1C-98DA-846E93BC16A0}"/>
+                <a16:creationId xmlns:a16="http://schemas.microsoft.com/office/drawing/2014/main" id="{1531F2A4-0660-4EA9-8F8A-0EE20DAEDED9}"/>
               </a:ext>
             </a:extLst>
           </p:cNvPr>
@@ -7327,7 +7403,7 @@
           <p:cNvPr id="14" name="Rechteck 13">
             <a:extLst xmlns:a="http://schemas.openxmlformats.org/drawingml/2006/main">
               <a:ext uri="{FF2B5EF4-FFF2-40B4-BE49-F238E27FC236}">
-                <a16:creationId xmlns:a16="http://schemas.microsoft.com/office/drawing/2014/main" id="{AFCE0ED9-6C7F-466D-8DCF-844467A4059C}"/>
+                <a16:creationId xmlns:a16="http://schemas.microsoft.com/office/drawing/2014/main" id="{93BA9CE5-A6B7-4F3C-8DC4-099958E30E4C}"/>
               </a:ext>
             </a:extLst>
           </p:cNvPr>
@@ -7378,7 +7454,7 @@
           <p:cNvPr id="6" name="Foliennummernplatzhalter 5">
             <a:extLst xmlns:a="http://schemas.openxmlformats.org/drawingml/2006/main">
               <a:ext uri="{FF2B5EF4-FFF2-40B4-BE49-F238E27FC236}">
-                <a16:creationId xmlns:a16="http://schemas.microsoft.com/office/drawing/2014/main" id="{BB975192-D2ED-4273-BAA9-203829F8A857}"/>
+                <a16:creationId xmlns:a16="http://schemas.microsoft.com/office/drawing/2014/main" id="{B8A8C0B6-8051-46F5-892E-C2BAFD34F1EB}"/>
               </a:ext>
             </a:extLst>
           </p:cNvPr>
@@ -7422,7 +7498,7 @@
           <p:cNvPr id="16" name="Inhaltsplatzhalter 2">
             <a:extLst xmlns:a="http://schemas.openxmlformats.org/drawingml/2006/main">
               <a:ext uri="{FF2B5EF4-FFF2-40B4-BE49-F238E27FC236}">
-                <a16:creationId xmlns:a16="http://schemas.microsoft.com/office/drawing/2014/main" id="{3F784C58-6069-4E66-A0D6-E9B1AB0DFFF2}"/>
+                <a16:creationId xmlns:a16="http://schemas.microsoft.com/office/drawing/2014/main" id="{D3759A11-0711-47A5-AAA2-FAC25D42CA63}"/>
               </a:ext>
             </a:extLst>
           </p:cNvPr>
@@ -7480,7 +7556,7 @@
           <p:cNvPr id="14" name="Rechteck 13">
             <a:extLst xmlns:a="http://schemas.openxmlformats.org/drawingml/2006/main">
               <a:ext uri="{FF2B5EF4-FFF2-40B4-BE49-F238E27FC236}">
-                <a16:creationId xmlns:a16="http://schemas.microsoft.com/office/drawing/2014/main" id="{AFA0F52B-E80A-4065-BD28-CDCE8C24D8C9}"/>
+                <a16:creationId xmlns:a16="http://schemas.microsoft.com/office/drawing/2014/main" id="{DD67E651-E998-4386-8BDC-142807BC41E8}"/>
               </a:ext>
             </a:extLst>
           </p:cNvPr>
@@ -7531,7 +7607,7 @@
           <p:cNvPr id="8" name="Foliennummernplatzhalter 7">
             <a:extLst xmlns:a="http://schemas.openxmlformats.org/drawingml/2006/main">
               <a:ext uri="{FF2B5EF4-FFF2-40B4-BE49-F238E27FC236}">
-                <a16:creationId xmlns:a16="http://schemas.microsoft.com/office/drawing/2014/main" id="{DF6454F2-9C09-45F7-8108-6AB56D73308D}"/>
+                <a16:creationId xmlns:a16="http://schemas.microsoft.com/office/drawing/2014/main" id="{ACB2D86C-500C-4846-B986-334DDEC34AF9}"/>
               </a:ext>
             </a:extLst>
           </p:cNvPr>
@@ -7629,7 +7705,7 @@
           <p:cNvPr id="10" name="Titel 1">
             <a:extLst xmlns:a="http://schemas.openxmlformats.org/drawingml/2006/main">
               <a:ext uri="{FF2B5EF4-FFF2-40B4-BE49-F238E27FC236}">
-                <a16:creationId xmlns:a16="http://schemas.microsoft.com/office/drawing/2014/main" id="{AD8A5A84-30BC-41F2-89BC-3F9999BAF48E}"/>
+                <a16:creationId xmlns:a16="http://schemas.microsoft.com/office/drawing/2014/main" id="{FE5BE3E0-0988-454A-9A1D-0F1474B99AB0}"/>
               </a:ext>
             </a:extLst>
           </p:cNvPr>
@@ -7685,7 +7761,7 @@
           <p:cNvPr id="5" name="Foliennummernplatzhalter 4">
             <a:extLst xmlns:a="http://schemas.openxmlformats.org/drawingml/2006/main">
               <a:ext uri="{FF2B5EF4-FFF2-40B4-BE49-F238E27FC236}">
-                <a16:creationId xmlns:a16="http://schemas.microsoft.com/office/drawing/2014/main" id="{1EA35FF7-842A-4CA9-B6C2-BB67918AF23D}"/>
+                <a16:creationId xmlns:a16="http://schemas.microsoft.com/office/drawing/2014/main" id="{CF7C5CE9-77CC-43E4-A1A4-A71133C147D1}"/>
               </a:ext>
             </a:extLst>
           </p:cNvPr>
@@ -7712,7 +7788,7 @@
           <p:cNvPr id="7" name="Fußzeilenplatzhalter 6">
             <a:extLst xmlns:a="http://schemas.openxmlformats.org/drawingml/2006/main">
               <a:ext uri="{FF2B5EF4-FFF2-40B4-BE49-F238E27FC236}">
-                <a16:creationId xmlns:a16="http://schemas.microsoft.com/office/drawing/2014/main" id="{BADF0145-635C-47FB-9EEE-E9708BC0BBDA}"/>
+                <a16:creationId xmlns:a16="http://schemas.microsoft.com/office/drawing/2014/main" id="{B456A35B-2AB3-4A41-ADE0-F5E4C682B5D1}"/>
               </a:ext>
             </a:extLst>
           </p:cNvPr>
@@ -7852,7 +7928,7 @@
           <p:cNvPr id="10" name="Fußzeilenplatzhalter 3">
             <a:extLst xmlns:a="http://schemas.openxmlformats.org/drawingml/2006/main">
               <a:ext uri="{FF2B5EF4-FFF2-40B4-BE49-F238E27FC236}">
-                <a16:creationId xmlns:a16="http://schemas.microsoft.com/office/drawing/2014/main" id="{367286D5-526A-49E3-9EE6-B4CEEA84D47E}"/>
+                <a16:creationId xmlns:a16="http://schemas.microsoft.com/office/drawing/2014/main" id="{7CA078E3-5C74-44F9-88B1-441A23902BD5}"/>
               </a:ext>
             </a:extLst>
           </p:cNvPr>
@@ -7896,7 +7972,7 @@
           <p:cNvPr id="11" name="Foliennummernplatzhalter 4">
             <a:extLst xmlns:a="http://schemas.openxmlformats.org/drawingml/2006/main">
               <a:ext uri="{FF2B5EF4-FFF2-40B4-BE49-F238E27FC236}">
-                <a16:creationId xmlns:a16="http://schemas.microsoft.com/office/drawing/2014/main" id="{D7317FFE-B60D-483B-95C2-0AD7544D11A5}"/>
+                <a16:creationId xmlns:a16="http://schemas.microsoft.com/office/drawing/2014/main" id="{ECE0E2D3-3ACE-49A7-B962-36576D2A5BE7}"/>
               </a:ext>
             </a:extLst>
           </p:cNvPr>
@@ -7944,7 +8020,7 @@
           <p:nvPr/>
         </p:nvPicPr>
         <p:blipFill>
-          <a:blip xmlns:r="http://schemas.openxmlformats.org/officeDocument/2006/relationships" xmlns:a="http://schemas.openxmlformats.org/drawingml/2006/main" r:embed="Rd8043deb2fdd40f4"/>
+          <a:blip xmlns:r="http://schemas.openxmlformats.org/officeDocument/2006/relationships" xmlns:a="http://schemas.openxmlformats.org/drawingml/2006/main" r:embed="R23fdc8e6abff4387"/>
           <a:stretch xmlns:a="http://schemas.openxmlformats.org/drawingml/2006/main">
             <a:fillRect l="0" t="0" r="0" b="0"/>
           </a:stretch>
@@ -7963,8 +8039,8 @@
   </p:cSld>
   <p:clrMap bg1="lt1" tx1="dk1" bg2="lt2" tx2="dk2" accent1="accent1" accent2="accent2" accent3="accent3" accent4="accent4" accent5="accent5" accent6="accent6" hlink="hlink" folHlink="folHlink"/>
   <p:sldLayoutIdLst>
-    <p:sldLayoutId xmlns:r="http://schemas.openxmlformats.org/officeDocument/2006/relationships" id="2147483649" r:id="Rcdcbf14d247b4457"/>
-    <p:sldLayoutId xmlns:r="http://schemas.openxmlformats.org/officeDocument/2006/relationships" id="2147483650" r:id="Re53f1bc6b92044d8"/>
+    <p:sldLayoutId xmlns:r="http://schemas.openxmlformats.org/officeDocument/2006/relationships" id="2147483649" r:id="R97767a616c7e48f1"/>
+    <p:sldLayoutId xmlns:r="http://schemas.openxmlformats.org/officeDocument/2006/relationships" id="2147483650" r:id="R041fd9837baa49ba"/>
   </p:sldLayoutIdLst>
   <p:hf hdr="0" dt="0"/>
   <p:txStyles>
@@ -8330,7 +8406,7 @@
   </p:cSld>
   <p:clrMap bg1="lt1" tx1="dk1" bg2="lt2" tx2="dk2" accent1="accent1" accent2="accent2" accent3="accent3" accent4="accent4" accent5="accent5" accent6="accent6" hlink="hlink" folHlink="folHlink"/>
   <p:sldLayoutIdLst>
-    <p:sldLayoutId xmlns:r="http://schemas.openxmlformats.org/officeDocument/2006/relationships" id="2147483652" r:id="R87fda122a45d4413"/>
+    <p:sldLayoutId xmlns:r="http://schemas.openxmlformats.org/officeDocument/2006/relationships" id="2147483652" r:id="R323a112869854327"/>
   </p:sldLayoutIdLst>
   <p:txStyles>
     <p:titleStyle>
@@ -8647,7 +8723,7 @@
           <p:cNvPr id="23" name="Textfeld 22">
             <a:extLst xmlns:a="http://schemas.openxmlformats.org/drawingml/2006/main">
               <a:ext uri="{FF2B5EF4-FFF2-40B4-BE49-F238E27FC236}">
-                <a16:creationId xmlns:a16="http://schemas.microsoft.com/office/drawing/2014/main" id="{E3E1F16E-DBAE-44BF-84B7-5BD4601F44A5}"/>
+                <a16:creationId xmlns:a16="http://schemas.microsoft.com/office/drawing/2014/main" id="{1A40185E-ABCB-4646-8F08-C6595A04E1BB}"/>
               </a:ext>
             </a:extLst>
           </p:cNvPr>
@@ -8697,7 +8773,7 @@
           <p:nvPr/>
         </p:nvPicPr>
         <p:blipFill>
-          <a:blip xmlns:r="http://schemas.openxmlformats.org/officeDocument/2006/relationships" xmlns:a="http://schemas.openxmlformats.org/drawingml/2006/main" r:embed="Rc3e76cfec8af4515"/>
+          <a:blip xmlns:r="http://schemas.openxmlformats.org/officeDocument/2006/relationships" xmlns:a="http://schemas.openxmlformats.org/drawingml/2006/main" r:embed="R8b5a2d1878e84f99"/>
           <a:srcRect xmlns:a="http://schemas.openxmlformats.org/drawingml/2006/main" l="398" t="14167" r="0" b="10833"/>
           <a:stretch xmlns:a="http://schemas.openxmlformats.org/drawingml/2006/main">
             <a:fillRect l="0" t="0" r="0" b="0"/>
@@ -8722,7 +8798,7 @@
           <p:nvPr/>
         </p:nvPicPr>
         <p:blipFill>
-          <a:blip xmlns:r="http://schemas.openxmlformats.org/officeDocument/2006/relationships" xmlns:a="http://schemas.openxmlformats.org/drawingml/2006/main" r:embed="Rd2d48e6800044376"/>
+          <a:blip xmlns:r="http://schemas.openxmlformats.org/officeDocument/2006/relationships" xmlns:a="http://schemas.openxmlformats.org/drawingml/2006/main" r:embed="Ra37077224ec44488"/>
           <a:stretch xmlns:a="http://schemas.openxmlformats.org/drawingml/2006/main">
             <a:fillRect l="0" t="0" r="0" b="0"/>
           </a:stretch>
@@ -8742,7 +8818,7 @@
           <p:cNvPr id="8" name="Foliennummernplatzhalter 4">
             <a:extLst xmlns:a="http://schemas.openxmlformats.org/drawingml/2006/main">
               <a:ext uri="{FF2B5EF4-FFF2-40B4-BE49-F238E27FC236}">
-                <a16:creationId xmlns:a16="http://schemas.microsoft.com/office/drawing/2014/main" id="{E564BF43-2274-4F41-A5B6-454F515B1DEB}"/>
+                <a16:creationId xmlns:a16="http://schemas.microsoft.com/office/drawing/2014/main" id="{030B493D-8E3F-48DF-843B-96FBD702B5E1}"/>
               </a:ext>
             </a:extLst>
           </p:cNvPr>
@@ -8786,7 +8862,7 @@
           <p:cNvPr id="10" name="Fußzeilenplatzhalter 3">
             <a:extLst xmlns:a="http://schemas.openxmlformats.org/drawingml/2006/main">
               <a:ext uri="{FF2B5EF4-FFF2-40B4-BE49-F238E27FC236}">
-                <a16:creationId xmlns:a16="http://schemas.microsoft.com/office/drawing/2014/main" id="{204C7619-3CC7-46B5-BF86-73A2356ECB24}"/>
+                <a16:creationId xmlns:a16="http://schemas.microsoft.com/office/drawing/2014/main" id="{D04A2A21-CA9F-4C31-860F-CEBA946E0FF1}"/>
               </a:ext>
             </a:extLst>
           </p:cNvPr>
@@ -8829,8 +8905,8 @@
   </p:cSld>
   <p:clrMap bg1="lt1" tx1="dk1" bg2="lt2" tx2="dk2" accent1="accent1" accent2="accent2" accent3="accent3" accent4="accent4" accent5="accent5" accent6="accent6" hlink="hlink" folHlink="folHlink"/>
   <p:sldLayoutIdLst>
-    <p:sldLayoutId xmlns:r="http://schemas.openxmlformats.org/officeDocument/2006/relationships" id="2147483654" r:id="R150d7dbb518646d3"/>
-    <p:sldLayoutId xmlns:r="http://schemas.openxmlformats.org/officeDocument/2006/relationships" id="2147483655" r:id="R0239ea74b55c474a"/>
+    <p:sldLayoutId xmlns:r="http://schemas.openxmlformats.org/officeDocument/2006/relationships" id="2147483654" r:id="R69425ce36b984810"/>
+    <p:sldLayoutId xmlns:r="http://schemas.openxmlformats.org/officeDocument/2006/relationships" id="2147483655" r:id="R2e994c96bac94a10"/>
   </p:sldLayoutIdLst>
   <p:hf hdr="0" dt="0"/>
   <p:txStyles>
@@ -9197,7 +9273,7 @@
           <p:cNvPr id="9" name="Foliennummernplatzhalter 4">
             <a:extLst xmlns:a="http://schemas.openxmlformats.org/drawingml/2006/main">
               <a:ext uri="{FF2B5EF4-FFF2-40B4-BE49-F238E27FC236}">
-                <a16:creationId xmlns:a16="http://schemas.microsoft.com/office/drawing/2014/main" id="{B6005DB6-967D-477A-840B-724192F2032B}"/>
+                <a16:creationId xmlns:a16="http://schemas.microsoft.com/office/drawing/2014/main" id="{9A11307C-A099-4275-B205-5942C1AB30E3}"/>
               </a:ext>
             </a:extLst>
           </p:cNvPr>
@@ -9241,7 +9317,7 @@
           <p:cNvPr id="10" name="Fußzeilenplatzhalter 3">
             <a:extLst xmlns:a="http://schemas.openxmlformats.org/drawingml/2006/main">
               <a:ext uri="{FF2B5EF4-FFF2-40B4-BE49-F238E27FC236}">
-                <a16:creationId xmlns:a16="http://schemas.microsoft.com/office/drawing/2014/main" id="{1230CDBD-062C-4E59-A7D7-D03390B152B7}"/>
+                <a16:creationId xmlns:a16="http://schemas.microsoft.com/office/drawing/2014/main" id="{6CE05DA3-1AE4-49AF-91A3-6C602E66CF1B}"/>
               </a:ext>
             </a:extLst>
           </p:cNvPr>
@@ -9289,7 +9365,7 @@
           <p:nvPr/>
         </p:nvPicPr>
         <p:blipFill>
-          <a:blip xmlns:r="http://schemas.openxmlformats.org/officeDocument/2006/relationships" xmlns:a="http://schemas.openxmlformats.org/drawingml/2006/main" r:embed="R82e4feb1db0e4816"/>
+          <a:blip xmlns:r="http://schemas.openxmlformats.org/officeDocument/2006/relationships" xmlns:a="http://schemas.openxmlformats.org/drawingml/2006/main" r:embed="R07352bc28ab34628"/>
           <a:stretch xmlns:a="http://schemas.openxmlformats.org/drawingml/2006/main">
             <a:fillRect l="0" t="0" r="0" b="0"/>
           </a:stretch>
@@ -9309,7 +9385,7 @@
           <p:cNvPr id="11" name="Textfeld 10">
             <a:extLst xmlns:a="http://schemas.openxmlformats.org/drawingml/2006/main">
               <a:ext uri="{FF2B5EF4-FFF2-40B4-BE49-F238E27FC236}">
-                <a16:creationId xmlns:a16="http://schemas.microsoft.com/office/drawing/2014/main" id="{8CCFFF43-9E59-42F7-A836-2184495A4A60}"/>
+                <a16:creationId xmlns:a16="http://schemas.microsoft.com/office/drawing/2014/main" id="{BB9A2B42-1577-4DB7-8438-E264AB8A29F9}"/>
               </a:ext>
             </a:extLst>
           </p:cNvPr>
@@ -9396,8 +9472,8 @@
   </p:cSld>
   <p:clrMap bg1="lt1" tx1="dk1" bg2="lt2" tx2="dk2" accent1="accent1" accent2="accent2" accent3="accent3" accent4="accent4" accent5="accent5" accent6="accent6" hlink="hlink" folHlink="folHlink"/>
   <p:sldLayoutIdLst>
-    <p:sldLayoutId xmlns:r="http://schemas.openxmlformats.org/officeDocument/2006/relationships" id="2147483657" r:id="Rd1452dfe98604e60"/>
-    <p:sldLayoutId xmlns:r="http://schemas.openxmlformats.org/officeDocument/2006/relationships" id="2147483658" r:id="R71dd905b73ff4625"/>
+    <p:sldLayoutId xmlns:r="http://schemas.openxmlformats.org/officeDocument/2006/relationships" id="2147483657" r:id="R4f1fe410730b4e5e"/>
+    <p:sldLayoutId xmlns:r="http://schemas.openxmlformats.org/officeDocument/2006/relationships" id="2147483658" r:id="R246c1ec709c14e9f"/>
   </p:sldLayoutIdLst>
   <p:hf hdr="0" dt="0"/>
   <p:txStyles>
@@ -9768,7 +9844,7 @@
           <p:nvPr/>
         </p:nvPicPr>
         <p:blipFill>
-          <a:blip xmlns:r="http://schemas.openxmlformats.org/officeDocument/2006/relationships" xmlns:a="http://schemas.openxmlformats.org/drawingml/2006/main" r:embed="Rb64e5aa013da4384"/>
+          <a:blip xmlns:r="http://schemas.openxmlformats.org/officeDocument/2006/relationships" xmlns:a="http://schemas.openxmlformats.org/drawingml/2006/main" r:embed="R13d23e2532434b09"/>
           <a:stretch xmlns:a="http://schemas.openxmlformats.org/drawingml/2006/main">
             <a:fillRect l="0" t="0" r="0" b="0"/>
           </a:stretch>
@@ -9788,7 +9864,7 @@
           <p:cNvPr id="5" name="Foliennummernplatzhalter 4">
             <a:extLst xmlns:a="http://schemas.openxmlformats.org/drawingml/2006/main">
               <a:ext uri="{FF2B5EF4-FFF2-40B4-BE49-F238E27FC236}">
-                <a16:creationId xmlns:a16="http://schemas.microsoft.com/office/drawing/2014/main" id="{9013060E-39BF-4E44-B58D-05FB2E767A89}"/>
+                <a16:creationId xmlns:a16="http://schemas.microsoft.com/office/drawing/2014/main" id="{635FB71E-E1FF-45F6-9075-B2909AAF3FC2}"/>
               </a:ext>
             </a:extLst>
           </p:cNvPr>
@@ -9832,7 +9908,7 @@
           <p:cNvPr id="6" name="Fußzeilenplatzhalter 3">
             <a:extLst xmlns:a="http://schemas.openxmlformats.org/drawingml/2006/main">
               <a:ext uri="{FF2B5EF4-FFF2-40B4-BE49-F238E27FC236}">
-                <a16:creationId xmlns:a16="http://schemas.microsoft.com/office/drawing/2014/main" id="{39318D8C-101B-45FE-BE8B-464C7CE7D326}"/>
+                <a16:creationId xmlns:a16="http://schemas.microsoft.com/office/drawing/2014/main" id="{CBE85E2A-F675-4519-A8CF-B8BDCDE0006F}"/>
               </a:ext>
             </a:extLst>
           </p:cNvPr>
@@ -9875,24 +9951,24 @@
   </p:cSld>
   <p:clrMap bg1="lt1" tx1="dk1" bg2="lt2" tx2="dk2" accent1="accent1" accent2="accent2" accent3="accent3" accent4="accent4" accent5="accent5" accent6="accent6" hlink="hlink" folHlink="folHlink"/>
   <p:sldLayoutIdLst>
-    <p:sldLayoutId xmlns:r="http://schemas.openxmlformats.org/officeDocument/2006/relationships" id="2147483660" r:id="R6dfff7dba3f5460a"/>
-    <p:sldLayoutId xmlns:r="http://schemas.openxmlformats.org/officeDocument/2006/relationships" id="2147483661" r:id="R17d2fc9975ad40ce"/>
-    <p:sldLayoutId xmlns:r="http://schemas.openxmlformats.org/officeDocument/2006/relationships" id="2147483662" r:id="R939734f8e6454734"/>
-    <p:sldLayoutId xmlns:r="http://schemas.openxmlformats.org/officeDocument/2006/relationships" id="2147483663" r:id="R49bb90d95ba64c27"/>
-    <p:sldLayoutId xmlns:r="http://schemas.openxmlformats.org/officeDocument/2006/relationships" id="2147483664" r:id="Rd075a8c8625b4481"/>
-    <p:sldLayoutId xmlns:r="http://schemas.openxmlformats.org/officeDocument/2006/relationships" id="2147483665" r:id="R92b28ca4fdf54a37"/>
-    <p:sldLayoutId xmlns:r="http://schemas.openxmlformats.org/officeDocument/2006/relationships" id="2147483666" r:id="R9ecb1645487d419b"/>
-    <p:sldLayoutId xmlns:r="http://schemas.openxmlformats.org/officeDocument/2006/relationships" id="2147483667" r:id="Red33d9fa5be546ad"/>
-    <p:sldLayoutId xmlns:r="http://schemas.openxmlformats.org/officeDocument/2006/relationships" id="2147483668" r:id="R7897471309a5488e"/>
-    <p:sldLayoutId xmlns:r="http://schemas.openxmlformats.org/officeDocument/2006/relationships" id="2147483669" r:id="R4e2ca18b688e4e80"/>
-    <p:sldLayoutId xmlns:r="http://schemas.openxmlformats.org/officeDocument/2006/relationships" id="2147483670" r:id="R308a66b6e5824c7c"/>
-    <p:sldLayoutId xmlns:r="http://schemas.openxmlformats.org/officeDocument/2006/relationships" id="2147483671" r:id="R9d1b34c8677649d7"/>
-    <p:sldLayoutId xmlns:r="http://schemas.openxmlformats.org/officeDocument/2006/relationships" id="2147483672" r:id="R7e16060facfe4930"/>
-    <p:sldLayoutId xmlns:r="http://schemas.openxmlformats.org/officeDocument/2006/relationships" id="2147483673" r:id="R820e3d31c03b45a0"/>
-    <p:sldLayoutId xmlns:r="http://schemas.openxmlformats.org/officeDocument/2006/relationships" id="2147483674" r:id="Ra36c505c313f4b59"/>
-    <p:sldLayoutId xmlns:r="http://schemas.openxmlformats.org/officeDocument/2006/relationships" id="2147483675" r:id="R891bb355873642fb"/>
-    <p:sldLayoutId xmlns:r="http://schemas.openxmlformats.org/officeDocument/2006/relationships" id="2147483676" r:id="R8e12c461724847a0"/>
-    <p:sldLayoutId xmlns:r="http://schemas.openxmlformats.org/officeDocument/2006/relationships" id="2147483677" r:id="Rf6f6f114efdd4101"/>
+    <p:sldLayoutId xmlns:r="http://schemas.openxmlformats.org/officeDocument/2006/relationships" id="2147483660" r:id="Rd1e26b674692472c"/>
+    <p:sldLayoutId xmlns:r="http://schemas.openxmlformats.org/officeDocument/2006/relationships" id="2147483661" r:id="R5ec8b00225184a6f"/>
+    <p:sldLayoutId xmlns:r="http://schemas.openxmlformats.org/officeDocument/2006/relationships" id="2147483662" r:id="R1f10dcf76e414e96"/>
+    <p:sldLayoutId xmlns:r="http://schemas.openxmlformats.org/officeDocument/2006/relationships" id="2147483663" r:id="R389955db262242a3"/>
+    <p:sldLayoutId xmlns:r="http://schemas.openxmlformats.org/officeDocument/2006/relationships" id="2147483664" r:id="R827b578e48d84264"/>
+    <p:sldLayoutId xmlns:r="http://schemas.openxmlformats.org/officeDocument/2006/relationships" id="2147483665" r:id="R0044877a18de4b83"/>
+    <p:sldLayoutId xmlns:r="http://schemas.openxmlformats.org/officeDocument/2006/relationships" id="2147483666" r:id="R73f37c597dc94bac"/>
+    <p:sldLayoutId xmlns:r="http://schemas.openxmlformats.org/officeDocument/2006/relationships" id="2147483667" r:id="R1c934dc3641d4e30"/>
+    <p:sldLayoutId xmlns:r="http://schemas.openxmlformats.org/officeDocument/2006/relationships" id="2147483668" r:id="R12cb8104b4ff42ad"/>
+    <p:sldLayoutId xmlns:r="http://schemas.openxmlformats.org/officeDocument/2006/relationships" id="2147483669" r:id="R2c083011bd944df5"/>
+    <p:sldLayoutId xmlns:r="http://schemas.openxmlformats.org/officeDocument/2006/relationships" id="2147483670" r:id="Rb2fa32a792a840d3"/>
+    <p:sldLayoutId xmlns:r="http://schemas.openxmlformats.org/officeDocument/2006/relationships" id="2147483671" r:id="Rf0d827a58e3d44c0"/>
+    <p:sldLayoutId xmlns:r="http://schemas.openxmlformats.org/officeDocument/2006/relationships" id="2147483672" r:id="R976747fb98e942f2"/>
+    <p:sldLayoutId xmlns:r="http://schemas.openxmlformats.org/officeDocument/2006/relationships" id="2147483673" r:id="R808b1d5986484f56"/>
+    <p:sldLayoutId xmlns:r="http://schemas.openxmlformats.org/officeDocument/2006/relationships" id="2147483674" r:id="Rd20964a01de0439a"/>
+    <p:sldLayoutId xmlns:r="http://schemas.openxmlformats.org/officeDocument/2006/relationships" id="2147483675" r:id="Rfca80a75b0ba4a29"/>
+    <p:sldLayoutId xmlns:r="http://schemas.openxmlformats.org/officeDocument/2006/relationships" id="2147483676" r:id="Rb81a2d4a1ddb4f40"/>
+    <p:sldLayoutId xmlns:r="http://schemas.openxmlformats.org/officeDocument/2006/relationships" id="2147483677" r:id="Ra0fa0bf5d4b345ca"/>
   </p:sldLayoutIdLst>
   <p:hf hdr="0" dt="0"/>
   <p:txStyles>
@@ -10259,7 +10335,7 @@
           <p:cNvPr id="6" name="Rechteck 5">
             <a:extLst xmlns:a="http://schemas.openxmlformats.org/drawingml/2006/main">
               <a:ext uri="{FF2B5EF4-FFF2-40B4-BE49-F238E27FC236}">
-                <a16:creationId xmlns:a16="http://schemas.microsoft.com/office/drawing/2014/main" id="{4CE1A12B-E833-43B4-BEBF-46EB27742F92}"/>
+                <a16:creationId xmlns:a16="http://schemas.microsoft.com/office/drawing/2014/main" id="{26B35B20-EF19-4F23-9B44-228FAEE86EE0}"/>
               </a:ext>
             </a:extLst>
           </p:cNvPr>
@@ -10320,7 +10396,7 @@
           <p:nvPr/>
         </p:nvPicPr>
         <p:blipFill>
-          <a:blip xmlns:r="http://schemas.openxmlformats.org/officeDocument/2006/relationships" xmlns:a="http://schemas.openxmlformats.org/drawingml/2006/main" r:embed="Rcb1e27caca7445c2"/>
+          <a:blip xmlns:r="http://schemas.openxmlformats.org/officeDocument/2006/relationships" xmlns:a="http://schemas.openxmlformats.org/drawingml/2006/main" r:embed="Rfc67b1ff69b14e49"/>
           <a:stretch xmlns:a="http://schemas.openxmlformats.org/drawingml/2006/main">
             <a:fillRect l="0" t="0" r="0" b="0"/>
           </a:stretch>
@@ -10340,7 +10416,7 @@
           <p:cNvPr id="7" name="Foliennummernplatzhalter 4">
             <a:extLst xmlns:a="http://schemas.openxmlformats.org/drawingml/2006/main">
               <a:ext uri="{FF2B5EF4-FFF2-40B4-BE49-F238E27FC236}">
-                <a16:creationId xmlns:a16="http://schemas.microsoft.com/office/drawing/2014/main" id="{BAF3BCEF-21AF-408D-AC59-7F40538A2AE7}"/>
+                <a16:creationId xmlns:a16="http://schemas.microsoft.com/office/drawing/2014/main" id="{6F393A5F-A531-4C49-8515-37BD4CD10D5F}"/>
               </a:ext>
             </a:extLst>
           </p:cNvPr>
@@ -10384,7 +10460,7 @@
           <p:cNvPr id="8" name="Fußzeilenplatzhalter 3">
             <a:extLst xmlns:a="http://schemas.openxmlformats.org/drawingml/2006/main">
               <a:ext uri="{FF2B5EF4-FFF2-40B4-BE49-F238E27FC236}">
-                <a16:creationId xmlns:a16="http://schemas.microsoft.com/office/drawing/2014/main" id="{C2C95388-B151-4D38-A442-EB94B0B25955}"/>
+                <a16:creationId xmlns:a16="http://schemas.microsoft.com/office/drawing/2014/main" id="{7EED4967-60F4-4073-A5A9-69950D3BD36F}"/>
               </a:ext>
             </a:extLst>
           </p:cNvPr>
@@ -10427,7 +10503,7 @@
   </p:cSld>
   <p:clrMap bg1="lt1" tx1="dk1" bg2="lt2" tx2="dk2" accent1="accent1" accent2="accent2" accent3="accent3" accent4="accent4" accent5="accent5" accent6="accent6" hlink="hlink" folHlink="folHlink"/>
   <p:sldLayoutIdLst>
-    <p:sldLayoutId xmlns:r="http://schemas.openxmlformats.org/officeDocument/2006/relationships" id="2147483679" r:id="Rcd63dae349ab4fba"/>
+    <p:sldLayoutId xmlns:r="http://schemas.openxmlformats.org/officeDocument/2006/relationships" id="2147483679" r:id="R699255896a9547e9"/>
   </p:sldLayoutIdLst>
   <p:hf hdr="0" dt="0"/>
   <p:txStyles>
@@ -10794,7 +10870,7 @@
           <p:cNvPr id="7" name="Rechteck 6">
             <a:extLst xmlns:a="http://schemas.openxmlformats.org/drawingml/2006/main">
               <a:ext uri="{FF2B5EF4-FFF2-40B4-BE49-F238E27FC236}">
-                <a16:creationId xmlns:a16="http://schemas.microsoft.com/office/drawing/2014/main" id="{01A112F3-6970-4DE7-8FCC-0845727F3C1B}"/>
+                <a16:creationId xmlns:a16="http://schemas.microsoft.com/office/drawing/2014/main" id="{F00DF550-2570-4092-97CC-5E1CD9B916DE}"/>
               </a:ext>
             </a:extLst>
           </p:cNvPr>
@@ -10858,7 +10934,7 @@
           <p:nvPr/>
         </p:nvPicPr>
         <p:blipFill>
-          <a:blip xmlns:r="http://schemas.openxmlformats.org/officeDocument/2006/relationships" xmlns:a="http://schemas.openxmlformats.org/drawingml/2006/main" r:embed="R65af7736ccec408a"/>
+          <a:blip xmlns:r="http://schemas.openxmlformats.org/officeDocument/2006/relationships" xmlns:a="http://schemas.openxmlformats.org/drawingml/2006/main" r:embed="Rde894f053fb44702"/>
           <a:stretch xmlns:a="http://schemas.openxmlformats.org/drawingml/2006/main">
             <a:fillRect l="0" t="0" r="0" b="0"/>
           </a:stretch>
@@ -10878,7 +10954,7 @@
           <p:cNvPr id="9" name="Foliennummernplatzhalter 4">
             <a:extLst xmlns:a="http://schemas.openxmlformats.org/drawingml/2006/main">
               <a:ext uri="{FF2B5EF4-FFF2-40B4-BE49-F238E27FC236}">
-                <a16:creationId xmlns:a16="http://schemas.microsoft.com/office/drawing/2014/main" id="{2B76794F-1E5C-4281-8E2D-6EBAE9D58B02}"/>
+                <a16:creationId xmlns:a16="http://schemas.microsoft.com/office/drawing/2014/main" id="{22BF88A4-511D-4C80-97F2-D2D2E5B3D755}"/>
               </a:ext>
             </a:extLst>
           </p:cNvPr>
@@ -10922,7 +10998,7 @@
           <p:cNvPr id="10" name="Fußzeilenplatzhalter 3">
             <a:extLst xmlns:a="http://schemas.openxmlformats.org/drawingml/2006/main">
               <a:ext uri="{FF2B5EF4-FFF2-40B4-BE49-F238E27FC236}">
-                <a16:creationId xmlns:a16="http://schemas.microsoft.com/office/drawing/2014/main" id="{F85DC7C4-9FFA-47B2-A04F-B704FBBF1D76}"/>
+                <a16:creationId xmlns:a16="http://schemas.microsoft.com/office/drawing/2014/main" id="{3766AC22-6CB1-45D8-826E-0AB0CB452F31}"/>
               </a:ext>
             </a:extLst>
           </p:cNvPr>
@@ -10965,7 +11041,7 @@
   </p:cSld>
   <p:clrMap bg1="lt1" tx1="dk1" bg2="lt2" tx2="dk2" accent1="accent1" accent2="accent2" accent3="accent3" accent4="accent4" accent5="accent5" accent6="accent6" hlink="hlink" folHlink="folHlink"/>
   <p:sldLayoutIdLst>
-    <p:sldLayoutId xmlns:r="http://schemas.openxmlformats.org/officeDocument/2006/relationships" id="2147483681" r:id="R4d4238a45f0b406f"/>
+    <p:sldLayoutId xmlns:r="http://schemas.openxmlformats.org/officeDocument/2006/relationships" id="2147483681" r:id="R43a1d966b4ac4375"/>
   </p:sldLayoutIdLst>
   <p:hf hdr="0" dt="0"/>
   <p:txStyles>
@@ -13179,7 +13255,7 @@
           <p:nvPr/>
         </p:nvPicPr>
         <p:blipFill>
-          <a:blip xmlns:r="http://schemas.openxmlformats.org/officeDocument/2006/relationships" xmlns:a="http://schemas.openxmlformats.org/drawingml/2006/main" r:embed="Ra8e1ed3ce6f24162"/>
+          <a:blip xmlns:r="http://schemas.openxmlformats.org/officeDocument/2006/relationships" xmlns:a="http://schemas.openxmlformats.org/drawingml/2006/main" r:embed="Rd0464a82546f49c5"/>
           <a:stretch xmlns:a="http://schemas.openxmlformats.org/drawingml/2006/main">
             <a:fillRect l="0" t="0" r="0" b="0"/>
           </a:stretch>
@@ -13199,7 +13275,7 @@
           <p:cNvPr id="3" name="Inhaltsplatzhalter 2">
             <a:extLst xmlns:a="http://schemas.openxmlformats.org/drawingml/2006/main">
               <a:ext uri="{FF2B5EF4-FFF2-40B4-BE49-F238E27FC236}">
-                <a16:creationId xmlns:a16="http://schemas.microsoft.com/office/drawing/2014/main" id="{D8032C7D-B010-4C74-96C0-8E8D4A69D4F4}"/>
+                <a16:creationId xmlns:a16="http://schemas.microsoft.com/office/drawing/2014/main" id="{833DE235-5022-481B-BF8E-045342A233CC}"/>
               </a:ext>
             </a:extLst>
           </p:cNvPr>
@@ -13254,7 +13330,7 @@
     </p:spTree>
     <p:extLst>
       <p:ext uri="{BB962C8B-B14F-4D97-AF65-F5344CB8AC3E}">
-        <p14:creationId xmlns:p14="http://schemas.microsoft.com/office/powerpoint/2010/main" val="312704087"/>
+        <p14:creationId xmlns:p14="http://schemas.microsoft.com/office/powerpoint/2010/main" val="567851067"/>
       </p:ext>
     </p:extLst>
   </p:cSld>
@@ -13275,18 +13351,18 @@
       </p:grpSpPr>
       <p:sp>
         <p:nvSpPr>
-          <p:cNvPr id="2" name="Content Placeholder 1">
-            <a:extLst xmlns:a="http://schemas.openxmlformats.org/drawingml/2006/main">
-              <a:ext uri="{FF2B5EF4-FFF2-40B4-BE49-F238E27FC236}">
-                <a16:creationId xmlns:a16="http://schemas.microsoft.com/office/drawing/2014/main" id="{76DA83A1-33C7-42C4-8F9C-3BD42E18E156}"/>
-              </a:ext>
-            </a:extLst>
-          </p:cNvPr>
-          <p:cNvSpPr>
-            <a:spLocks xmlns:a="http://schemas.openxmlformats.org/drawingml/2006/main" noGrp="1"/>
-          </p:cNvSpPr>
-          <p:nvPr>
-            <p:ph idx="1"/>
+          <p:cNvPr id="3" name="Inhaltsplatzhalter 2">
+            <a:extLst xmlns:a="http://schemas.openxmlformats.org/drawingml/2006/main">
+              <a:ext uri="{FF2B5EF4-FFF2-40B4-BE49-F238E27FC236}">
+                <a16:creationId xmlns:a16="http://schemas.microsoft.com/office/drawing/2014/main" id="{9FE37DC3-0575-43D9-AF7C-F5144AB7CF0E}"/>
+              </a:ext>
+            </a:extLst>
+          </p:cNvPr>
+          <p:cNvSpPr>
+            <a:spLocks xmlns:a="http://schemas.openxmlformats.org/drawingml/2006/main" noGrp="1"/>
+          </p:cNvSpPr>
+          <p:nvPr>
+            <p:ph idx="10"/>
           </p:nvPr>
         </p:nvSpPr>
         <p:spPr/>
@@ -13295,147 +13371,12 @@
           <a:lstStyle xmlns:a="http://schemas.openxmlformats.org/drawingml/2006/main"/>
           <a:p xmlns:a="http://schemas.openxmlformats.org/drawingml/2006/main">
             <a:r>
-              <a:t>Supported claim</a:t>
-            </a:r>
-          </a:p>
-          <a:p xmlns:a="http://schemas.openxmlformats.org/drawingml/2006/main">
-            <a:r>
-              <a:t>CQL changes the recommendation profile and remains much more evaluable than greedy optimization.</a:t>
-            </a:r>
-          </a:p>
-          <a:p xmlns:a="http://schemas.openxmlformats.org/drawingml/2006/main">
-            <a:r>
-              <a:t/>
-            </a:r>
-          </a:p>
-          <a:p xmlns:a="http://schemas.openxmlformats.org/drawingml/2006/main">
-            <a:r>
-              <a:t>Careful claim</a:t>
-            </a:r>
-          </a:p>
-          <a:p xmlns:a="http://schemas.openxmlformats.org/drawingml/2006/main">
-            <a:r>
-              <a:t>PPO obtains high simulator rewards, but those are learned-environment stress-test results.</a:t>
-            </a:r>
-          </a:p>
-          <a:p xmlns:a="http://schemas.openxmlformats.org/drawingml/2006/main">
-            <a:r>
-              <a:t/>
-            </a:r>
-          </a:p>
-          <a:p xmlns:a="http://schemas.openxmlformats.org/drawingml/2006/main">
-            <a:pPr>
-              <a:buNone/>
-            </a:pPr>
-            <a:r>
-              <a:t>Avoid claiming</a:t>
-            </a:r>
-          </a:p>
-          <a:p xmlns:a="http://schemas.openxmlformats.org/drawingml/2006/main">
-            <a:pPr>
-              <a:buNone/>
-            </a:pPr>
-            <a:r>
-              <a:t>RL has proven live marketplace lift.</a:t>
-            </a:r>
-          </a:p>
-          <a:p xmlns:a="http://schemas.openxmlformats.org/drawingml/2006/main">
-            <a:pPr>
-              <a:buNone/>
-            </a:pPr>
-            <a:r>
-              <a:t/>
-            </a:r>
-          </a:p>
-          <a:p xmlns:a="http://schemas.openxmlformats.org/drawingml/2006/main">
-            <a:r>
-              <a:t>Future work</a:t>
-            </a:r>
-          </a:p>
-          <a:p xmlns:a="http://schemas.openxmlformats.org/drawingml/2006/main">
-            <a:r>
-              <a:t>sequential negotiation, richer item features, temporal and leaf-holdout robustness tables</a:t>
-            </a:r>
-          </a:p>
-        </p:txBody>
-      </p:sp>
-      <p:sp>
-        <p:nvSpPr>
-          <p:cNvPr id="3" name="Slide Number Placeholder 2">
-            <a:extLst xmlns:a="http://schemas.openxmlformats.org/drawingml/2006/main">
-              <a:ext uri="{FF2B5EF4-FFF2-40B4-BE49-F238E27FC236}">
-                <a16:creationId xmlns:a16="http://schemas.microsoft.com/office/drawing/2014/main" id="{C44891E6-FD77-4ED2-B33D-9D52420B512C}"/>
-              </a:ext>
-            </a:extLst>
-          </p:cNvPr>
-          <p:cNvSpPr>
-            <a:spLocks xmlns:a="http://schemas.openxmlformats.org/drawingml/2006/main" noGrp="1"/>
-          </p:cNvSpPr>
-          <p:nvPr>
-            <p:ph type="sldNum" idx="11"/>
-          </p:nvPr>
-        </p:nvSpPr>
-        <p:spPr/>
-        <p:txBody>
-          <a:bodyPr xmlns:a="http://schemas.openxmlformats.org/drawingml/2006/main"/>
-          <a:lstStyle xmlns:a="http://schemas.openxmlformats.org/drawingml/2006/main"/>
-          <a:p xmlns:a="http://schemas.openxmlformats.org/drawingml/2006/main">
-            <a:fld id="{DB7BEEEC-A170-5376-2B6E-CB54687B0CB1}" type="slidenum">
-              <a:t>10</a:t>
-            </a:fld>
-          </a:p>
-        </p:txBody>
-      </p:sp>
-      <p:sp>
-        <p:nvSpPr>
-          <p:cNvPr id="4" name="Footer Placeholder 3">
-            <a:extLst xmlns:a="http://schemas.openxmlformats.org/drawingml/2006/main">
-              <a:ext uri="{FF2B5EF4-FFF2-40B4-BE49-F238E27FC236}">
-                <a16:creationId xmlns:a16="http://schemas.microsoft.com/office/drawing/2014/main" id="{73735118-2018-403D-97C0-573C8DD06D6A}"/>
-              </a:ext>
-            </a:extLst>
-          </p:cNvPr>
-          <p:cNvSpPr>
-            <a:spLocks xmlns:a="http://schemas.openxmlformats.org/drawingml/2006/main" noGrp="1"/>
-          </p:cNvSpPr>
-          <p:nvPr>
-            <p:ph type="ftr" idx="12"/>
-          </p:nvPr>
-        </p:nvSpPr>
-        <p:spPr/>
-        <p:txBody>
-          <a:bodyPr xmlns:a="http://schemas.openxmlformats.org/drawingml/2006/main"/>
-          <a:lstStyle xmlns:a="http://schemas.openxmlformats.org/drawingml/2006/main"/>
-          <a:p xmlns:a="http://schemas.openxmlformats.org/drawingml/2006/main">
-            <a:r>
-              <a:t>eBay Best Offer anchoring RL | Why / How / What</a:t>
-            </a:r>
-          </a:p>
-        </p:txBody>
-      </p:sp>
-      <p:sp>
-        <p:nvSpPr>
-          <p:cNvPr id="5" name="Title 4">
-            <a:extLst xmlns:a="http://schemas.openxmlformats.org/drawingml/2006/main">
-              <a:ext uri="{FF2B5EF4-FFF2-40B4-BE49-F238E27FC236}">
-                <a16:creationId xmlns:a16="http://schemas.microsoft.com/office/drawing/2014/main" id="{5E5BBDBF-7D0D-4939-977B-4D07FC6EF406}"/>
-              </a:ext>
-            </a:extLst>
-          </p:cNvPr>
-          <p:cNvSpPr>
-            <a:spLocks xmlns:a="http://schemas.openxmlformats.org/drawingml/2006/main" noGrp="1"/>
-          </p:cNvSpPr>
-          <p:nvPr>
-            <p:ph type="title" idx="0"/>
-          </p:nvPr>
-        </p:nvSpPr>
-        <p:spPr/>
-        <p:txBody>
-          <a:bodyPr xmlns:a="http://schemas.openxmlformats.org/drawingml/2006/main"/>
-          <a:lstStyle xmlns:a="http://schemas.openxmlformats.org/drawingml/2006/main"/>
-          <a:p xmlns:a="http://schemas.openxmlformats.org/drawingml/2006/main">
-            <a:r>
-              <a:t>What: the strongest claim is diagnostic</a:t>
+              <a:t>WHAT</a:t>
+            </a:r>
+          </a:p>
+          <a:p xmlns:a="http://schemas.openxmlformats.org/drawingml/2006/main">
+            <a:r>
+              <a:t>What the results mean and what remains uncertain</a:t>
             </a:r>
           </a:p>
         </p:txBody>
@@ -13443,7 +13384,7 @@
     </p:spTree>
     <p:extLst>
       <p:ext uri="{BB962C8B-B14F-4D97-AF65-F5344CB8AC3E}">
-        <p14:creationId xmlns:p14="http://schemas.microsoft.com/office/powerpoint/2010/main" val="3934807106"/>
+        <p14:creationId xmlns:p14="http://schemas.microsoft.com/office/powerpoint/2010/main" val="22518012"/>
       </p:ext>
     </p:extLst>
   </p:cSld>
@@ -13467,7 +13408,7 @@
           <p:cNvPr id="2" name="Content Placeholder 1">
             <a:extLst xmlns:a="http://schemas.openxmlformats.org/drawingml/2006/main">
               <a:ext uri="{FF2B5EF4-FFF2-40B4-BE49-F238E27FC236}">
-                <a16:creationId xmlns:a16="http://schemas.microsoft.com/office/drawing/2014/main" id="{E6F57E75-77ED-F878-48AE-05A29C686D9A}"/>
+                <a16:creationId xmlns:a16="http://schemas.microsoft.com/office/drawing/2014/main" id="{76DA83A1-33C7-42C4-8F9C-3BD42E18E156}"/>
               </a:ext>
             </a:extLst>
           </p:cNvPr>
@@ -13484,7 +13425,12 @@
           <a:lstStyle xmlns:a="http://schemas.openxmlformats.org/drawingml/2006/main"/>
           <a:p xmlns:a="http://schemas.openxmlformats.org/drawingml/2006/main">
             <a:r>
-              <a:t>The project does not show that RL beats historical buyers in production.</a:t>
+              <a:t>Supported claim</a:t>
+            </a:r>
+          </a:p>
+          <a:p xmlns:a="http://schemas.openxmlformats.org/drawingml/2006/main">
+            <a:r>
+              <a:t>CQL changes the recommendation profile and remains much more evaluable than greedy optimization.</a:t>
             </a:r>
           </a:p>
           <a:p xmlns:a="http://schemas.openxmlformats.org/drawingml/2006/main">
@@ -13494,7 +13440,12 @@
           </a:p>
           <a:p xmlns:a="http://schemas.openxmlformats.org/drawingml/2006/main">
             <a:r>
-              <a:t>It shows why that claim would be unsafe without support diagnostics.</a:t>
+              <a:t>Careful claim</a:t>
+            </a:r>
+          </a:p>
+          <a:p xmlns:a="http://schemas.openxmlformats.org/drawingml/2006/main">
+            <a:r>
+              <a:t>PPO obtains high simulator rewards, but those are learned-environment stress-test results.</a:t>
             </a:r>
           </a:p>
           <a:p xmlns:a="http://schemas.openxmlformats.org/drawingml/2006/main">
@@ -13503,8 +13454,37 @@
             </a:r>
           </a:p>
           <a:p xmlns:a="http://schemas.openxmlformats.org/drawingml/2006/main">
-            <a:r>
-              <a:t>CQL makes the extrapolation problem measurable; PPO shows what the learned simulator incentivizes; the next model should handle multi-turn counteroffers with explicit uncertainty.</a:t>
+            <a:pPr>
+              <a:buNone/>
+            </a:pPr>
+            <a:r>
+              <a:t>Avoid claiming</a:t>
+            </a:r>
+          </a:p>
+          <a:p xmlns:a="http://schemas.openxmlformats.org/drawingml/2006/main">
+            <a:pPr>
+              <a:buNone/>
+            </a:pPr>
+            <a:r>
+              <a:t>RL has proven live marketplace lift.</a:t>
+            </a:r>
+          </a:p>
+          <a:p xmlns:a="http://schemas.openxmlformats.org/drawingml/2006/main">
+            <a:pPr>
+              <a:buNone/>
+            </a:pPr>
+            <a:r>
+              <a:t/>
+            </a:r>
+          </a:p>
+          <a:p xmlns:a="http://schemas.openxmlformats.org/drawingml/2006/main">
+            <a:r>
+              <a:t>Future work</a:t>
+            </a:r>
+          </a:p>
+          <a:p xmlns:a="http://schemas.openxmlformats.org/drawingml/2006/main">
+            <a:r>
+              <a:t>sequential negotiation, richer item features, temporal and leaf-holdout robustness tables</a:t>
             </a:r>
           </a:p>
         </p:txBody>
@@ -13514,7 +13494,7 @@
           <p:cNvPr id="3" name="Slide Number Placeholder 2">
             <a:extLst xmlns:a="http://schemas.openxmlformats.org/drawingml/2006/main">
               <a:ext uri="{FF2B5EF4-FFF2-40B4-BE49-F238E27FC236}">
-                <a16:creationId xmlns:a16="http://schemas.microsoft.com/office/drawing/2014/main" id="{BDDE685E-FB47-68F2-8D0F-75B31344B105}"/>
+                <a16:creationId xmlns:a16="http://schemas.microsoft.com/office/drawing/2014/main" id="{C44891E6-FD77-4ED2-B33D-9D52420B512C}"/>
               </a:ext>
             </a:extLst>
           </p:cNvPr>
@@ -13532,6 +13512,156 @@
           <a:p xmlns:a="http://schemas.openxmlformats.org/drawingml/2006/main">
             <a:fld id="{30394428-F1DC-E5F6-DB0C-7DE31F3D8A23}" type="slidenum">
               <a:t>11</a:t>
+            </a:fld>
+          </a:p>
+        </p:txBody>
+      </p:sp>
+      <p:sp>
+        <p:nvSpPr>
+          <p:cNvPr id="4" name="Footer Placeholder 3">
+            <a:extLst xmlns:a="http://schemas.openxmlformats.org/drawingml/2006/main">
+              <a:ext uri="{FF2B5EF4-FFF2-40B4-BE49-F238E27FC236}">
+                <a16:creationId xmlns:a16="http://schemas.microsoft.com/office/drawing/2014/main" id="{73735118-2018-403D-97C0-573C8DD06D6A}"/>
+              </a:ext>
+            </a:extLst>
+          </p:cNvPr>
+          <p:cNvSpPr>
+            <a:spLocks xmlns:a="http://schemas.openxmlformats.org/drawingml/2006/main" noGrp="1"/>
+          </p:cNvSpPr>
+          <p:nvPr>
+            <p:ph type="ftr" idx="12"/>
+          </p:nvPr>
+        </p:nvSpPr>
+        <p:spPr/>
+        <p:txBody>
+          <a:bodyPr xmlns:a="http://schemas.openxmlformats.org/drawingml/2006/main"/>
+          <a:lstStyle xmlns:a="http://schemas.openxmlformats.org/drawingml/2006/main"/>
+          <a:p xmlns:a="http://schemas.openxmlformats.org/drawingml/2006/main">
+            <a:r>
+              <a:t>eBay Best Offer anchoring RL | Why / How / What</a:t>
+            </a:r>
+          </a:p>
+        </p:txBody>
+      </p:sp>
+      <p:sp>
+        <p:nvSpPr>
+          <p:cNvPr id="5" name="Title 4">
+            <a:extLst xmlns:a="http://schemas.openxmlformats.org/drawingml/2006/main">
+              <a:ext uri="{FF2B5EF4-FFF2-40B4-BE49-F238E27FC236}">
+                <a16:creationId xmlns:a16="http://schemas.microsoft.com/office/drawing/2014/main" id="{5E5BBDBF-7D0D-4939-977B-4D07FC6EF406}"/>
+              </a:ext>
+            </a:extLst>
+          </p:cNvPr>
+          <p:cNvSpPr>
+            <a:spLocks xmlns:a="http://schemas.openxmlformats.org/drawingml/2006/main" noGrp="1"/>
+          </p:cNvSpPr>
+          <p:nvPr>
+            <p:ph type="title" idx="0"/>
+          </p:nvPr>
+        </p:nvSpPr>
+        <p:spPr/>
+        <p:txBody>
+          <a:bodyPr xmlns:a="http://schemas.openxmlformats.org/drawingml/2006/main"/>
+          <a:lstStyle xmlns:a="http://schemas.openxmlformats.org/drawingml/2006/main"/>
+          <a:p xmlns:a="http://schemas.openxmlformats.org/drawingml/2006/main">
+            <a:r>
+              <a:t>What: the strongest claim is diagnostic</a:t>
+            </a:r>
+          </a:p>
+        </p:txBody>
+      </p:sp>
+    </p:spTree>
+    <p:extLst>
+      <p:ext uri="{BB962C8B-B14F-4D97-AF65-F5344CB8AC3E}">
+        <p14:creationId xmlns:p14="http://schemas.microsoft.com/office/powerpoint/2010/main" val="3934807106"/>
+      </p:ext>
+    </p:extLst>
+  </p:cSld>
+</p:sld>
+</file>
+
+<file path=ppt/slides/slide12.xml><?xml version="1.0" encoding="utf-8"?>
+<p:sld xmlns:p="http://schemas.openxmlformats.org/presentationml/2006/main">
+  <p:cSld>
+    <p:spTree>
+      <p:nvGrpSpPr>
+        <p:cNvPr id="1" name=""/>
+        <p:cNvGrpSpPr/>
+        <p:nvPr/>
+      </p:nvGrpSpPr>
+      <p:grpSpPr>
+        <a:xfrm xmlns:a="http://schemas.openxmlformats.org/drawingml/2006/main"/>
+      </p:grpSpPr>
+      <p:sp>
+        <p:nvSpPr>
+          <p:cNvPr id="2" name="Content Placeholder 1">
+            <a:extLst xmlns:a="http://schemas.openxmlformats.org/drawingml/2006/main">
+              <a:ext uri="{FF2B5EF4-FFF2-40B4-BE49-F238E27FC236}">
+                <a16:creationId xmlns:a16="http://schemas.microsoft.com/office/drawing/2014/main" id="{E6F57E75-77ED-F878-48AE-05A29C686D9A}"/>
+              </a:ext>
+            </a:extLst>
+          </p:cNvPr>
+          <p:cNvSpPr>
+            <a:spLocks xmlns:a="http://schemas.openxmlformats.org/drawingml/2006/main" noGrp="1"/>
+          </p:cNvSpPr>
+          <p:nvPr>
+            <p:ph idx="1"/>
+          </p:nvPr>
+        </p:nvSpPr>
+        <p:spPr/>
+        <p:txBody>
+          <a:bodyPr xmlns:a="http://schemas.openxmlformats.org/drawingml/2006/main"/>
+          <a:lstStyle xmlns:a="http://schemas.openxmlformats.org/drawingml/2006/main"/>
+          <a:p xmlns:a="http://schemas.openxmlformats.org/drawingml/2006/main">
+            <a:r>
+              <a:t>The project does not show that RL beats historical buyers in production.</a:t>
+            </a:r>
+          </a:p>
+          <a:p xmlns:a="http://schemas.openxmlformats.org/drawingml/2006/main">
+            <a:r>
+              <a:t/>
+            </a:r>
+          </a:p>
+          <a:p xmlns:a="http://schemas.openxmlformats.org/drawingml/2006/main">
+            <a:r>
+              <a:t>It shows why that claim would be unsafe without support diagnostics.</a:t>
+            </a:r>
+          </a:p>
+          <a:p xmlns:a="http://schemas.openxmlformats.org/drawingml/2006/main">
+            <a:r>
+              <a:t/>
+            </a:r>
+          </a:p>
+          <a:p xmlns:a="http://schemas.openxmlformats.org/drawingml/2006/main">
+            <a:r>
+              <a:t>CQL makes the extrapolation problem measurable; PPO shows what the learned simulator incentivizes; the next model should handle multi-turn counteroffers with explicit uncertainty.</a:t>
+            </a:r>
+          </a:p>
+        </p:txBody>
+      </p:sp>
+      <p:sp>
+        <p:nvSpPr>
+          <p:cNvPr id="3" name="Slide Number Placeholder 2">
+            <a:extLst xmlns:a="http://schemas.openxmlformats.org/drawingml/2006/main">
+              <a:ext uri="{FF2B5EF4-FFF2-40B4-BE49-F238E27FC236}">
+                <a16:creationId xmlns:a16="http://schemas.microsoft.com/office/drawing/2014/main" id="{BDDE685E-FB47-68F2-8D0F-75B31344B105}"/>
+              </a:ext>
+            </a:extLst>
+          </p:cNvPr>
+          <p:cNvSpPr>
+            <a:spLocks xmlns:a="http://schemas.openxmlformats.org/drawingml/2006/main" noGrp="1"/>
+          </p:cNvSpPr>
+          <p:nvPr>
+            <p:ph type="sldNum" idx="11"/>
+          </p:nvPr>
+        </p:nvSpPr>
+        <p:spPr/>
+        <p:txBody>
+          <a:bodyPr xmlns:a="http://schemas.openxmlformats.org/drawingml/2006/main"/>
+          <a:lstStyle xmlns:a="http://schemas.openxmlformats.org/drawingml/2006/main"/>
+          <a:p xmlns:a="http://schemas.openxmlformats.org/drawingml/2006/main">
+            <a:fld id="{4DB16885-0D3F-A391-B669-3211DB3B26E8}" type="slidenum">
+              <a:t>12</a:t>
             </a:fld>
           </a:p>
         </p:txBody>
@@ -13644,7 +13774,7 @@
           <p:cNvPr id="3" name="Inhaltsplatzhalter 2">
             <a:extLst xmlns:a="http://schemas.openxmlformats.org/drawingml/2006/main">
               <a:ext uri="{FF2B5EF4-FFF2-40B4-BE49-F238E27FC236}">
-                <a16:creationId xmlns:a16="http://schemas.microsoft.com/office/drawing/2014/main" id="{9B360291-1646-43F1-83B2-63EB06490FA6}"/>
+                <a16:creationId xmlns:a16="http://schemas.microsoft.com/office/drawing/2014/main" id="{9FE37DC3-0575-43D9-AF7C-F5144AB7CF0E}"/>
               </a:ext>
             </a:extLst>
           </p:cNvPr>
@@ -13674,7 +13804,7 @@
     </p:spTree>
     <p:extLst>
       <p:ext uri="{BB962C8B-B14F-4D97-AF65-F5344CB8AC3E}">
-        <p14:creationId xmlns:p14="http://schemas.microsoft.com/office/powerpoint/2010/main" val="202101467"/>
+        <p14:creationId xmlns:p14="http://schemas.microsoft.com/office/powerpoint/2010/main" val="22518012"/>
       </p:ext>
     </p:extLst>
   </p:cSld>
@@ -14029,7 +14159,7 @@
           <p:cNvPr id="3" name="Inhaltsplatzhalter 2">
             <a:extLst xmlns:a="http://schemas.openxmlformats.org/drawingml/2006/main">
               <a:ext uri="{FF2B5EF4-FFF2-40B4-BE49-F238E27FC236}">
-                <a16:creationId xmlns:a16="http://schemas.microsoft.com/office/drawing/2014/main" id="{9B360291-1646-43F1-83B2-63EB06490FA6}"/>
+                <a16:creationId xmlns:a16="http://schemas.microsoft.com/office/drawing/2014/main" id="{9FE37DC3-0575-43D9-AF7C-F5144AB7CF0E}"/>
               </a:ext>
             </a:extLst>
           </p:cNvPr>
@@ -14059,7 +14189,7 @@
     </p:spTree>
     <p:extLst>
       <p:ext uri="{BB962C8B-B14F-4D97-AF65-F5344CB8AC3E}">
-        <p14:creationId xmlns:p14="http://schemas.microsoft.com/office/powerpoint/2010/main" val="202101467"/>
+        <p14:creationId xmlns:p14="http://schemas.microsoft.com/office/powerpoint/2010/main" val="22518012"/>
       </p:ext>
     </p:extLst>
   </p:cSld>
@@ -14241,7 +14371,7 @@
           <p:cNvPr id="7" name="">
             <a:extLst xmlns:a="http://schemas.openxmlformats.org/drawingml/2006/main">
               <a:ext uri="{FF2B5EF4-FFF2-40B4-BE49-F238E27FC236}">
-                <a16:creationId xmlns:a16="http://schemas.microsoft.com/office/drawing/2014/main" id="{1285EDA0-5DE3-4AB6-A960-8130A20C1556}"/>
+                <a16:creationId xmlns:a16="http://schemas.microsoft.com/office/drawing/2014/main" id="{D851B8E5-6F08-4919-885C-8AB8BB610871}"/>
               </a:ext>
             </a:extLst>
           </p:cNvPr>
@@ -14274,7 +14404,7 @@
           <p:cNvPr id="8" name="">
             <a:extLst xmlns:a="http://schemas.openxmlformats.org/drawingml/2006/main">
               <a:ext uri="{FF2B5EF4-FFF2-40B4-BE49-F238E27FC236}">
-                <a16:creationId xmlns:a16="http://schemas.microsoft.com/office/drawing/2014/main" id="{E38E9282-90DF-4CEF-87A6-DCFE09704FA7}"/>
+                <a16:creationId xmlns:a16="http://schemas.microsoft.com/office/drawing/2014/main" id="{F44C6871-6099-4C2A-9CC2-44CF44C4771C}"/>
               </a:ext>
             </a:extLst>
           </p:cNvPr>
@@ -14324,7 +14454,7 @@
           <p:cNvPr id="9" name="">
             <a:extLst xmlns:a="http://schemas.openxmlformats.org/drawingml/2006/main">
               <a:ext uri="{FF2B5EF4-FFF2-40B4-BE49-F238E27FC236}">
-                <a16:creationId xmlns:a16="http://schemas.microsoft.com/office/drawing/2014/main" id="{C4E6AB7C-1FA2-4AD3-A3C0-2D938E6EB77F}"/>
+                <a16:creationId xmlns:a16="http://schemas.microsoft.com/office/drawing/2014/main" id="{F2FB8C52-2B14-4ACA-88E2-01632B212680}"/>
               </a:ext>
             </a:extLst>
           </p:cNvPr>
@@ -14374,7 +14504,7 @@
           <p:cNvPr id="10" name="">
             <a:extLst xmlns:a="http://schemas.openxmlformats.org/drawingml/2006/main">
               <a:ext uri="{FF2B5EF4-FFF2-40B4-BE49-F238E27FC236}">
-                <a16:creationId xmlns:a16="http://schemas.microsoft.com/office/drawing/2014/main" id="{BDE6BD0C-2F28-49B6-9990-391E52111678}"/>
+                <a16:creationId xmlns:a16="http://schemas.microsoft.com/office/drawing/2014/main" id="{20D337F0-CD6A-416A-A68F-A710C8DF5C66}"/>
               </a:ext>
             </a:extLst>
           </p:cNvPr>
@@ -14407,7 +14537,7 @@
           <p:cNvPr id="11" name="">
             <a:extLst xmlns:a="http://schemas.openxmlformats.org/drawingml/2006/main">
               <a:ext uri="{FF2B5EF4-FFF2-40B4-BE49-F238E27FC236}">
-                <a16:creationId xmlns:a16="http://schemas.microsoft.com/office/drawing/2014/main" id="{6DAA2806-F397-4735-A6EE-170E32A2717A}"/>
+                <a16:creationId xmlns:a16="http://schemas.microsoft.com/office/drawing/2014/main" id="{BE10B7A0-5D90-439E-B841-1A94AF796A75}"/>
               </a:ext>
             </a:extLst>
           </p:cNvPr>
@@ -14457,7 +14587,7 @@
           <p:cNvPr id="12" name="">
             <a:extLst xmlns:a="http://schemas.openxmlformats.org/drawingml/2006/main">
               <a:ext uri="{FF2B5EF4-FFF2-40B4-BE49-F238E27FC236}">
-                <a16:creationId xmlns:a16="http://schemas.microsoft.com/office/drawing/2014/main" id="{C41D1B8A-C7C4-4F18-85D6-056132BC5AFD}"/>
+                <a16:creationId xmlns:a16="http://schemas.microsoft.com/office/drawing/2014/main" id="{3C6AA587-2222-441B-8027-943AF3A6A98A}"/>
               </a:ext>
             </a:extLst>
           </p:cNvPr>
@@ -14507,7 +14637,7 @@
           <p:cNvPr id="13" name="">
             <a:extLst xmlns:a="http://schemas.openxmlformats.org/drawingml/2006/main">
               <a:ext uri="{FF2B5EF4-FFF2-40B4-BE49-F238E27FC236}">
-                <a16:creationId xmlns:a16="http://schemas.microsoft.com/office/drawing/2014/main" id="{DEBFFCF4-7D48-409F-8942-E7903519B987}"/>
+                <a16:creationId xmlns:a16="http://schemas.microsoft.com/office/drawing/2014/main" id="{4B922DC8-FF76-4568-B877-F147EEE9F165}"/>
               </a:ext>
             </a:extLst>
           </p:cNvPr>
@@ -14540,7 +14670,7 @@
           <p:cNvPr id="14" name="">
             <a:extLst xmlns:a="http://schemas.openxmlformats.org/drawingml/2006/main">
               <a:ext uri="{FF2B5EF4-FFF2-40B4-BE49-F238E27FC236}">
-                <a16:creationId xmlns:a16="http://schemas.microsoft.com/office/drawing/2014/main" id="{55ADCC09-5444-4F0F-83C7-DFCE971F063B}"/>
+                <a16:creationId xmlns:a16="http://schemas.microsoft.com/office/drawing/2014/main" id="{8B37B74C-55BE-4FB2-A399-EFFA967B7664}"/>
               </a:ext>
             </a:extLst>
           </p:cNvPr>
@@ -14590,7 +14720,7 @@
           <p:cNvPr id="15" name="">
             <a:extLst xmlns:a="http://schemas.openxmlformats.org/drawingml/2006/main">
               <a:ext uri="{FF2B5EF4-FFF2-40B4-BE49-F238E27FC236}">
-                <a16:creationId xmlns:a16="http://schemas.microsoft.com/office/drawing/2014/main" id="{9D4129D1-411B-4F15-9775-0BED763D8970}"/>
+                <a16:creationId xmlns:a16="http://schemas.microsoft.com/office/drawing/2014/main" id="{205F0CA9-F5CC-42BC-A1F0-E57AE1855073}"/>
               </a:ext>
             </a:extLst>
           </p:cNvPr>
@@ -14640,7 +14770,7 @@
           <p:cNvPr id="16" name="">
             <a:extLst xmlns:a="http://schemas.openxmlformats.org/drawingml/2006/main">
               <a:ext uri="{FF2B5EF4-FFF2-40B4-BE49-F238E27FC236}">
-                <a16:creationId xmlns:a16="http://schemas.microsoft.com/office/drawing/2014/main" id="{F4576094-0DBA-4508-8322-41CD48DB3B1C}"/>
+                <a16:creationId xmlns:a16="http://schemas.microsoft.com/office/drawing/2014/main" id="{F2FE1F1D-9D9F-4BEB-A572-4BB7CB7E58DE}"/>
               </a:ext>
             </a:extLst>
           </p:cNvPr>
@@ -14729,12 +14859,12 @@
           <a:lstStyle xmlns:a="http://schemas.openxmlformats.org/drawingml/2006/main"/>
           <a:p xmlns:a="http://schemas.openxmlformats.org/drawingml/2006/main">
             <a:r>
-              <a:t>Phase 1</a:t>
-            </a:r>
-          </a:p>
-          <a:p xmlns:a="http://schemas.openxmlformats.org/drawingml/2006/main">
-            <a:r>
-              <a:t>supervised acceptance model</a:t>
+              <a:t>Phase 1 learns</a:t>
+            </a:r>
+          </a:p>
+          <a:p xmlns:a="http://schemas.openxmlformats.org/drawingml/2006/main">
+            <a:r>
+              <a:t>P(accept | state, anchor)</a:t>
             </a:r>
           </a:p>
           <a:p xmlns:a="http://schemas.openxmlformats.org/drawingml/2006/main">
@@ -14744,12 +14874,7 @@
           </a:p>
           <a:p xmlns:a="http://schemas.openxmlformats.org/drawingml/2006/main">
             <a:r>
-              <a:t>Phase 2</a:t>
-            </a:r>
-          </a:p>
-          <a:p xmlns:a="http://schemas.openxmlformats.org/drawingml/2006/main">
-            <a:r>
-              <a:t>CQL offline RL, conservative under distribution shift</a:t>
+              <a:t>It is a response model, not a value function.</a:t>
             </a:r>
           </a:p>
           <a:p xmlns:a="http://schemas.openxmlformats.org/drawingml/2006/main">
@@ -14759,12 +14884,7 @@
           </a:p>
           <a:p xmlns:a="http://schemas.openxmlformats.org/drawingml/2006/main">
             <a:r>
-              <a:t>Phase 3</a:t>
-            </a:r>
-          </a:p>
-          <a:p xmlns:a="http://schemas.openxmlformats.org/drawingml/2006/main">
-            <a:r>
-              <a:t>PPO in a learned faithful simulator</a:t>
+              <a:t>The model is useful for prediction and simple baselines.</a:t>
             </a:r>
           </a:p>
           <a:p xmlns:a="http://schemas.openxmlformats.org/drawingml/2006/main">
@@ -14774,12 +14894,7 @@
           </a:p>
           <a:p xmlns:a="http://schemas.openxmlformats.org/drawingml/2006/main">
             <a:r>
-              <a:t>Evaluation</a:t>
-            </a:r>
-          </a:p>
-          <a:p xmlns:a="http://schemas.openxmlformats.org/drawingml/2006/main">
-            <a:r>
-              <a:t>report evidence type beside every number</a:t>
+              <a:t>The failure appears when the learned surface is maximized greedily: the target anchors move outside reliable logged support.</a:t>
             </a:r>
           </a:p>
         </p:txBody>
@@ -14860,7 +14975,7 @@
           <a:lstStyle xmlns:a="http://schemas.openxmlformats.org/drawingml/2006/main"/>
           <a:p xmlns:a="http://schemas.openxmlformats.org/drawingml/2006/main">
             <a:r>
-              <a:t>How: three model layers are compared</a:t>
+              <a:t>How: Phase 1 predicts acceptance, but greedy use is unsafe</a:t>
             </a:r>
           </a:p>
         </p:txBody>
@@ -14870,7 +14985,7 @@
           <p:cNvPr id="7" name="">
             <a:extLst xmlns:a="http://schemas.openxmlformats.org/drawingml/2006/main">
               <a:ext uri="{FF2B5EF4-FFF2-40B4-BE49-F238E27FC236}">
-                <a16:creationId xmlns:a16="http://schemas.microsoft.com/office/drawing/2014/main" id="{FE58300D-AD43-46E5-83B0-435D00D94B23}"/>
+                <a16:creationId xmlns:a16="http://schemas.microsoft.com/office/drawing/2014/main" id="{3694BF57-AB0F-4F86-BEA2-E4EAE835E403}"/>
               </a:ext>
             </a:extLst>
           </p:cNvPr>
@@ -14903,7 +15018,7 @@
           <p:cNvPr id="8" name="">
             <a:extLst xmlns:a="http://schemas.openxmlformats.org/drawingml/2006/main">
               <a:ext uri="{FF2B5EF4-FFF2-40B4-BE49-F238E27FC236}">
-                <a16:creationId xmlns:a16="http://schemas.microsoft.com/office/drawing/2014/main" id="{C260DF0B-72BB-4152-9C53-CAAB2920362C}"/>
+                <a16:creationId xmlns:a16="http://schemas.microsoft.com/office/drawing/2014/main" id="{9740568A-B654-43EA-BC10-B98E6CD12BD2}"/>
               </a:ext>
             </a:extLst>
           </p:cNvPr>
@@ -14915,7 +15030,7 @@
         <p:spPr>
           <a:xfrm xmlns:a="http://schemas.openxmlformats.org/drawingml/2006/main">
             <a:off x="4819650" y="1409700"/>
-            <a:ext cx="781050" cy="171450"/>
+            <a:ext cx="819150" cy="228600"/>
           </a:xfrm>
           <a:prstGeom xmlns:a="http://schemas.openxmlformats.org/drawingml/2006/main" prst="rect">
             <a:avLst/>
@@ -14931,19 +15046,19 @@
           <a:lstStyle xmlns:a="http://schemas.openxmlformats.org/drawingml/2006/main"/>
           <a:p xmlns:a="http://schemas.openxmlformats.org/drawingml/2006/main">
             <a:pPr algn="l">
-              <a:defRPr sz="788" b="1">
+              <a:defRPr sz="765" b="1">
                 <a:solidFill>
                   <a:srgbClr val="FFFFFF"/>
                 </a:solidFill>
               </a:defRPr>
             </a:pPr>
             <a:r>
-              <a:rPr sz="788" b="1">
+              <a:rPr sz="765" b="1">
                 <a:solidFill>
                   <a:srgbClr val="FFFFFF"/>
                 </a:solidFill>
               </a:rPr>
-              <a:t>Policy</a:t>
+              <a:t>Signal</a:t>
             </a:r>
           </a:p>
         </p:txBody>
@@ -14953,7 +15068,7 @@
           <p:cNvPr id="9" name="">
             <a:extLst xmlns:a="http://schemas.openxmlformats.org/drawingml/2006/main">
               <a:ext uri="{FF2B5EF4-FFF2-40B4-BE49-F238E27FC236}">
-                <a16:creationId xmlns:a16="http://schemas.microsoft.com/office/drawing/2014/main" id="{F50674C3-A7F6-4BAD-A449-BF132B616FFD}"/>
+                <a16:creationId xmlns:a16="http://schemas.microsoft.com/office/drawing/2014/main" id="{D5EB6A4D-AC6D-4280-BADC-79CBA641DA4B}"/>
               </a:ext>
             </a:extLst>
           </p:cNvPr>
@@ -14964,7 +15079,7 @@
         </p:nvSpPr>
         <p:spPr>
           <a:xfrm xmlns:a="http://schemas.openxmlformats.org/drawingml/2006/main">
-            <a:off x="5638800" y="1352550"/>
+            <a:off x="5676900" y="1352550"/>
             <a:ext cx="7144" cy="266700"/>
           </a:xfrm>
           <a:prstGeom xmlns:a="http://schemas.openxmlformats.org/drawingml/2006/main" prst="rect">
@@ -14984,7 +15099,7 @@
           <p:cNvPr id="10" name="">
             <a:extLst xmlns:a="http://schemas.openxmlformats.org/drawingml/2006/main">
               <a:ext uri="{FF2B5EF4-FFF2-40B4-BE49-F238E27FC236}">
-                <a16:creationId xmlns:a16="http://schemas.microsoft.com/office/drawing/2014/main" id="{D29BEB69-FC12-4CD1-A8BD-CDC0F011AC71}"/>
+                <a16:creationId xmlns:a16="http://schemas.microsoft.com/office/drawing/2014/main" id="{67B6457C-C5D7-4D6D-8414-CA461033A15E}"/>
               </a:ext>
             </a:extLst>
           </p:cNvPr>
@@ -14995,8 +15110,8 @@
         </p:nvSpPr>
         <p:spPr>
           <a:xfrm xmlns:a="http://schemas.openxmlformats.org/drawingml/2006/main">
-            <a:off x="5695950" y="1409700"/>
-            <a:ext cx="647700" cy="171450"/>
+            <a:off x="5734050" y="1409700"/>
+            <a:ext cx="952500" cy="228600"/>
           </a:xfrm>
           <a:prstGeom xmlns:a="http://schemas.openxmlformats.org/drawingml/2006/main" prst="rect">
             <a:avLst/>
@@ -15012,19 +15127,19 @@
           <a:lstStyle xmlns:a="http://schemas.openxmlformats.org/drawingml/2006/main"/>
           <a:p xmlns:a="http://schemas.openxmlformats.org/drawingml/2006/main">
             <a:pPr algn="l">
-              <a:defRPr sz="788" b="1">
+              <a:defRPr sz="765" b="1">
                 <a:solidFill>
                   <a:srgbClr val="FFFFFF"/>
                 </a:solidFill>
               </a:defRPr>
             </a:pPr>
             <a:r>
-              <a:rPr sz="788" b="1">
+              <a:rPr sz="765" b="1">
                 <a:solidFill>
                   <a:srgbClr val="FFFFFF"/>
                 </a:solidFill>
               </a:rPr>
-              <a:t>Evidence</a:t>
+              <a:t>Result</a:t>
             </a:r>
           </a:p>
         </p:txBody>
@@ -15034,7 +15149,7 @@
           <p:cNvPr id="11" name="">
             <a:extLst xmlns:a="http://schemas.openxmlformats.org/drawingml/2006/main">
               <a:ext uri="{FF2B5EF4-FFF2-40B4-BE49-F238E27FC236}">
-                <a16:creationId xmlns:a16="http://schemas.microsoft.com/office/drawing/2014/main" id="{FD42DC32-3734-4284-A9E1-DB4A6CCC5B11}"/>
+                <a16:creationId xmlns:a16="http://schemas.microsoft.com/office/drawing/2014/main" id="{36C4BC3A-794B-473E-9A98-378D8E0A1927}"/>
               </a:ext>
             </a:extLst>
           </p:cNvPr>
@@ -15045,7 +15160,7 @@
         </p:nvSpPr>
         <p:spPr>
           <a:xfrm xmlns:a="http://schemas.openxmlformats.org/drawingml/2006/main">
-            <a:off x="6381750" y="1352550"/>
+            <a:off x="6724650" y="1352550"/>
             <a:ext cx="7144" cy="266700"/>
           </a:xfrm>
           <a:prstGeom xmlns:a="http://schemas.openxmlformats.org/drawingml/2006/main" prst="rect">
@@ -15065,7 +15180,7 @@
           <p:cNvPr id="12" name="">
             <a:extLst xmlns:a="http://schemas.openxmlformats.org/drawingml/2006/main">
               <a:ext uri="{FF2B5EF4-FFF2-40B4-BE49-F238E27FC236}">
-                <a16:creationId xmlns:a16="http://schemas.microsoft.com/office/drawing/2014/main" id="{3BA2F3F8-DDD5-4816-97D8-8B645D978585}"/>
+                <a16:creationId xmlns:a16="http://schemas.microsoft.com/office/drawing/2014/main" id="{3EE0636D-5866-4A97-B08A-FE8F3BFC134A}"/>
               </a:ext>
             </a:extLst>
           </p:cNvPr>
@@ -15076,8 +15191,8 @@
         </p:nvSpPr>
         <p:spPr>
           <a:xfrm xmlns:a="http://schemas.openxmlformats.org/drawingml/2006/main">
-            <a:off x="6438900" y="1409700"/>
-            <a:ext cx="590550" cy="171450"/>
+            <a:off x="6781800" y="1409700"/>
+            <a:ext cx="1619250" cy="228600"/>
           </a:xfrm>
           <a:prstGeom xmlns:a="http://schemas.openxmlformats.org/drawingml/2006/main" prst="rect">
             <a:avLst/>
@@ -15093,19 +15208,19 @@
           <a:lstStyle xmlns:a="http://schemas.openxmlformats.org/drawingml/2006/main"/>
           <a:p xmlns:a="http://schemas.openxmlformats.org/drawingml/2006/main">
             <a:pPr algn="l">
-              <a:defRPr sz="788" b="1">
+              <a:defRPr sz="765" b="1">
                 <a:solidFill>
                   <a:srgbClr val="FFFFFF"/>
                 </a:solidFill>
               </a:defRPr>
             </a:pPr>
             <a:r>
-              <a:rPr sz="788" b="1">
+              <a:rPr sz="765" b="1">
                 <a:solidFill>
                   <a:srgbClr val="FFFFFF"/>
                 </a:solidFill>
               </a:rPr>
-              <a:t>Savings</a:t>
+              <a:t>Meaning</a:t>
             </a:r>
           </a:p>
         </p:txBody>
@@ -15115,88 +15230,7 @@
           <p:cNvPr id="13" name="">
             <a:extLst xmlns:a="http://schemas.openxmlformats.org/drawingml/2006/main">
               <a:ext uri="{FF2B5EF4-FFF2-40B4-BE49-F238E27FC236}">
-                <a16:creationId xmlns:a16="http://schemas.microsoft.com/office/drawing/2014/main" id="{AC3F99C5-7F2A-45F7-9205-83A1367ED32D}"/>
-              </a:ext>
-            </a:extLst>
-          </p:cNvPr>
-          <p:cNvSpPr>
-            <a:spLocks xmlns:a="http://schemas.openxmlformats.org/drawingml/2006/main" noGrp="1"/>
-          </p:cNvSpPr>
-          <p:nvPr/>
-        </p:nvSpPr>
-        <p:spPr>
-          <a:xfrm xmlns:a="http://schemas.openxmlformats.org/drawingml/2006/main">
-            <a:off x="7067550" y="1352550"/>
-            <a:ext cx="7144" cy="266700"/>
-          </a:xfrm>
-          <a:prstGeom xmlns:a="http://schemas.openxmlformats.org/drawingml/2006/main" prst="rect">
-            <a:avLst/>
-          </a:prstGeom>
-          <a:solidFill xmlns:a="http://schemas.openxmlformats.org/drawingml/2006/main">
-            <a:srgbClr val="8DAAC5"/>
-          </a:solidFill>
-          <a:ln xmlns:a="http://schemas.openxmlformats.org/drawingml/2006/main" w="0">
-            <a:noFill/>
-            <a:prstDash val="solid"/>
-          </a:ln>
-        </p:spPr>
-      </p:sp>
-      <p:sp>
-        <p:nvSpPr>
-          <p:cNvPr id="14" name="">
-            <a:extLst xmlns:a="http://schemas.openxmlformats.org/drawingml/2006/main">
-              <a:ext uri="{FF2B5EF4-FFF2-40B4-BE49-F238E27FC236}">
-                <a16:creationId xmlns:a16="http://schemas.microsoft.com/office/drawing/2014/main" id="{48AD6342-7AF7-4B8D-90C6-00721F776C02}"/>
-              </a:ext>
-            </a:extLst>
-          </p:cNvPr>
-          <p:cNvSpPr>
-            <a:spLocks xmlns:a="http://schemas.openxmlformats.org/drawingml/2006/main" noGrp="1"/>
-          </p:cNvSpPr>
-          <p:nvPr/>
-        </p:nvSpPr>
-        <p:spPr>
-          <a:xfrm xmlns:a="http://schemas.openxmlformats.org/drawingml/2006/main">
-            <a:off x="7124700" y="1409700"/>
-            <a:ext cx="1276350" cy="171450"/>
-          </a:xfrm>
-          <a:prstGeom xmlns:a="http://schemas.openxmlformats.org/drawingml/2006/main" prst="rect">
-            <a:avLst/>
-          </a:prstGeom>
-          <a:noFill xmlns:a="http://schemas.openxmlformats.org/drawingml/2006/main"/>
-          <a:ln xmlns:a="http://schemas.openxmlformats.org/drawingml/2006/main" w="0">
-            <a:noFill/>
-            <a:prstDash val="solid"/>
-          </a:ln>
-        </p:spPr>
-        <p:txBody>
-          <a:bodyPr xmlns:a="http://schemas.openxmlformats.org/drawingml/2006/main"/>
-          <a:lstStyle xmlns:a="http://schemas.openxmlformats.org/drawingml/2006/main"/>
-          <a:p xmlns:a="http://schemas.openxmlformats.org/drawingml/2006/main">
-            <a:pPr algn="l">
-              <a:defRPr sz="788" b="1">
-                <a:solidFill>
-                  <a:srgbClr val="FFFFFF"/>
-                </a:solidFill>
-              </a:defRPr>
-            </a:pPr>
-            <a:r>
-              <a:rPr sz="788" b="1">
-                <a:solidFill>
-                  <a:srgbClr val="FFFFFF"/>
-                </a:solidFill>
-              </a:rPr>
-              <a:t>Support read</a:t>
-            </a:r>
-          </a:p>
-        </p:txBody>
-      </p:sp>
-      <p:sp>
-        <p:nvSpPr>
-          <p:cNvPr id="15" name="">
-            <a:extLst xmlns:a="http://schemas.openxmlformats.org/drawingml/2006/main">
-              <a:ext uri="{FF2B5EF4-FFF2-40B4-BE49-F238E27FC236}">
-                <a16:creationId xmlns:a16="http://schemas.microsoft.com/office/drawing/2014/main" id="{5AE0B5B2-61C3-4079-9BA0-E59E6C729FD1}"/>
+                <a16:creationId xmlns:a16="http://schemas.microsoft.com/office/drawing/2014/main" id="{B40B6008-0513-466D-89F4-A5D6FDBE32E1}"/>
               </a:ext>
             </a:extLst>
           </p:cNvPr>
@@ -15208,7 +15242,7 @@
         <p:spPr>
           <a:xfrm xmlns:a="http://schemas.openxmlformats.org/drawingml/2006/main">
             <a:off x="4762500" y="1619250"/>
-            <a:ext cx="3676650" cy="285750"/>
+            <a:ext cx="3676650" cy="400050"/>
           </a:xfrm>
           <a:prstGeom xmlns:a="http://schemas.openxmlformats.org/drawingml/2006/main" prst="rect">
             <a:avLst/>
@@ -15226,10 +15260,10 @@
       </p:sp>
       <p:sp>
         <p:nvSpPr>
-          <p:cNvPr id="16" name="">
-            <a:extLst xmlns:a="http://schemas.openxmlformats.org/drawingml/2006/main">
-              <a:ext uri="{FF2B5EF4-FFF2-40B4-BE49-F238E27FC236}">
-                <a16:creationId xmlns:a16="http://schemas.microsoft.com/office/drawing/2014/main" id="{79BDF618-B7D9-4D8A-886C-D7A90998DBFE}"/>
+          <p:cNvPr id="14" name="">
+            <a:extLst xmlns:a="http://schemas.openxmlformats.org/drawingml/2006/main">
+              <a:ext uri="{FF2B5EF4-FFF2-40B4-BE49-F238E27FC236}">
+                <a16:creationId xmlns:a16="http://schemas.microsoft.com/office/drawing/2014/main" id="{52E3AD3E-7412-4FB4-8DCF-AF1AB3F10CDB}"/>
               </a:ext>
             </a:extLst>
           </p:cNvPr>
@@ -15240,8 +15274,8 @@
         </p:nvSpPr>
         <p:spPr>
           <a:xfrm xmlns:a="http://schemas.openxmlformats.org/drawingml/2006/main">
-            <a:off x="4819650" y="1685925"/>
-            <a:ext cx="781050" cy="171450"/>
+            <a:off x="4819650" y="1695450"/>
+            <a:ext cx="819150" cy="228600"/>
           </a:xfrm>
           <a:prstGeom xmlns:a="http://schemas.openxmlformats.org/drawingml/2006/main" prst="rect">
             <a:avLst/>
@@ -15257,29 +15291,29 @@
           <a:lstStyle xmlns:a="http://schemas.openxmlformats.org/drawingml/2006/main"/>
           <a:p xmlns:a="http://schemas.openxmlformats.org/drawingml/2006/main">
             <a:pPr algn="l">
-              <a:defRPr sz="750" b="0">
+              <a:defRPr sz="728" b="0">
                 <a:solidFill>
                   <a:srgbClr val="000000"/>
                 </a:solidFill>
               </a:defRPr>
             </a:pPr>
             <a:r>
-              <a:rPr sz="750" b="0">
+              <a:rPr sz="728" b="0">
                 <a:solidFill>
                   <a:srgbClr val="000000"/>
                 </a:solidFill>
               </a:rPr>
-              <a:t>Behavior</a:t>
-            </a:r>
-          </a:p>
-        </p:txBody>
-      </p:sp>
-      <p:sp>
-        <p:nvSpPr>
-          <p:cNvPr id="17" name="">
-            <a:extLst xmlns:a="http://schemas.openxmlformats.org/drawingml/2006/main">
-              <a:ext uri="{FF2B5EF4-FFF2-40B4-BE49-F238E27FC236}">
-                <a16:creationId xmlns:a16="http://schemas.microsoft.com/office/drawing/2014/main" id="{453ED001-5537-4B29-B2DB-6F698046377E}"/>
+              <a:t>Predictor</a:t>
+            </a:r>
+          </a:p>
+        </p:txBody>
+      </p:sp>
+      <p:sp>
+        <p:nvSpPr>
+          <p:cNvPr id="15" name="">
+            <a:extLst xmlns:a="http://schemas.openxmlformats.org/drawingml/2006/main">
+              <a:ext uri="{FF2B5EF4-FFF2-40B4-BE49-F238E27FC236}">
+                <a16:creationId xmlns:a16="http://schemas.microsoft.com/office/drawing/2014/main" id="{B1699F3A-FF0B-48FB-B8A4-86243C48F84B}"/>
               </a:ext>
             </a:extLst>
           </p:cNvPr>
@@ -15290,8 +15324,8 @@
         </p:nvSpPr>
         <p:spPr>
           <a:xfrm xmlns:a="http://schemas.openxmlformats.org/drawingml/2006/main">
-            <a:off x="5638800" y="1619250"/>
-            <a:ext cx="7144" cy="285750"/>
+            <a:off x="5676900" y="1619250"/>
+            <a:ext cx="7144" cy="400050"/>
           </a:xfrm>
           <a:prstGeom xmlns:a="http://schemas.openxmlformats.org/drawingml/2006/main" prst="rect">
             <a:avLst/>
@@ -15307,10 +15341,10 @@
       </p:sp>
       <p:sp>
         <p:nvSpPr>
-          <p:cNvPr id="18" name="">
-            <a:extLst xmlns:a="http://schemas.openxmlformats.org/drawingml/2006/main">
-              <a:ext uri="{FF2B5EF4-FFF2-40B4-BE49-F238E27FC236}">
-                <a16:creationId xmlns:a16="http://schemas.microsoft.com/office/drawing/2014/main" id="{67935473-847E-404B-A302-BA3B50D81432}"/>
+          <p:cNvPr id="16" name="">
+            <a:extLst xmlns:a="http://schemas.openxmlformats.org/drawingml/2006/main">
+              <a:ext uri="{FF2B5EF4-FFF2-40B4-BE49-F238E27FC236}">
+                <a16:creationId xmlns:a16="http://schemas.microsoft.com/office/drawing/2014/main" id="{D1E9EC40-1F27-419A-BB8B-A563F79A5438}"/>
               </a:ext>
             </a:extLst>
           </p:cNvPr>
@@ -15321,8 +15355,8 @@
         </p:nvSpPr>
         <p:spPr>
           <a:xfrm xmlns:a="http://schemas.openxmlformats.org/drawingml/2006/main">
-            <a:off x="5695950" y="1685925"/>
-            <a:ext cx="647700" cy="171450"/>
+            <a:off x="5734050" y="1695450"/>
+            <a:ext cx="952500" cy="228600"/>
           </a:xfrm>
           <a:prstGeom xmlns:a="http://schemas.openxmlformats.org/drawingml/2006/main" prst="rect">
             <a:avLst/>
@@ -15338,29 +15372,29 @@
           <a:lstStyle xmlns:a="http://schemas.openxmlformats.org/drawingml/2006/main"/>
           <a:p xmlns:a="http://schemas.openxmlformats.org/drawingml/2006/main">
             <a:pPr algn="l">
-              <a:defRPr sz="750" b="0">
+              <a:defRPr sz="728" b="1">
                 <a:solidFill>
                   <a:srgbClr val="000000"/>
                 </a:solidFill>
               </a:defRPr>
             </a:pPr>
             <a:r>
-              <a:rPr sz="750" b="0">
+              <a:rPr sz="728" b="1">
                 <a:solidFill>
                   <a:srgbClr val="000000"/>
                 </a:solidFill>
               </a:rPr>
-              <a:t>observed</a:t>
-            </a:r>
-          </a:p>
-        </p:txBody>
-      </p:sp>
-      <p:sp>
-        <p:nvSpPr>
-          <p:cNvPr id="19" name="">
-            <a:extLst xmlns:a="http://schemas.openxmlformats.org/drawingml/2006/main">
-              <a:ext uri="{FF2B5EF4-FFF2-40B4-BE49-F238E27FC236}">
-                <a16:creationId xmlns:a16="http://schemas.microsoft.com/office/drawing/2014/main" id="{E9CB9E12-86E4-4D67-B840-1D21C9D7385C}"/>
+              <a:t>AUC 0.701</a:t>
+            </a:r>
+          </a:p>
+        </p:txBody>
+      </p:sp>
+      <p:sp>
+        <p:nvSpPr>
+          <p:cNvPr id="17" name="">
+            <a:extLst xmlns:a="http://schemas.openxmlformats.org/drawingml/2006/main">
+              <a:ext uri="{FF2B5EF4-FFF2-40B4-BE49-F238E27FC236}">
+                <a16:creationId xmlns:a16="http://schemas.microsoft.com/office/drawing/2014/main" id="{79070675-FC3A-4F61-B1F3-90757B078567}"/>
               </a:ext>
             </a:extLst>
           </p:cNvPr>
@@ -15371,8 +15405,8 @@
         </p:nvSpPr>
         <p:spPr>
           <a:xfrm xmlns:a="http://schemas.openxmlformats.org/drawingml/2006/main">
-            <a:off x="6381750" y="1619250"/>
-            <a:ext cx="7144" cy="285750"/>
+            <a:off x="6724650" y="1619250"/>
+            <a:ext cx="7144" cy="400050"/>
           </a:xfrm>
           <a:prstGeom xmlns:a="http://schemas.openxmlformats.org/drawingml/2006/main" prst="rect">
             <a:avLst/>
@@ -15388,10 +15422,10 @@
       </p:sp>
       <p:sp>
         <p:nvSpPr>
-          <p:cNvPr id="20" name="">
-            <a:extLst xmlns:a="http://schemas.openxmlformats.org/drawingml/2006/main">
-              <a:ext uri="{FF2B5EF4-FFF2-40B4-BE49-F238E27FC236}">
-                <a16:creationId xmlns:a16="http://schemas.microsoft.com/office/drawing/2014/main" id="{0B1189F9-E716-4D8F-8781-E8ADC7E981F3}"/>
+          <p:cNvPr id="18" name="">
+            <a:extLst xmlns:a="http://schemas.openxmlformats.org/drawingml/2006/main">
+              <a:ext uri="{FF2B5EF4-FFF2-40B4-BE49-F238E27FC236}">
+                <a16:creationId xmlns:a16="http://schemas.microsoft.com/office/drawing/2014/main" id="{076F8397-79F5-4A3B-9E64-D0F807606DF8}"/>
               </a:ext>
             </a:extLst>
           </p:cNvPr>
@@ -15402,8 +15436,8 @@
         </p:nvSpPr>
         <p:spPr>
           <a:xfrm xmlns:a="http://schemas.openxmlformats.org/drawingml/2006/main">
-            <a:off x="6438900" y="1685925"/>
-            <a:ext cx="590550" cy="171450"/>
+            <a:off x="6781800" y="1695450"/>
+            <a:ext cx="1619250" cy="228600"/>
           </a:xfrm>
           <a:prstGeom xmlns:a="http://schemas.openxmlformats.org/drawingml/2006/main" prst="rect">
             <a:avLst/>
@@ -15419,29 +15453,29 @@
           <a:lstStyle xmlns:a="http://schemas.openxmlformats.org/drawingml/2006/main"/>
           <a:p xmlns:a="http://schemas.openxmlformats.org/drawingml/2006/main">
             <a:pPr algn="l">
-              <a:defRPr sz="750" b="0">
+              <a:defRPr sz="728" b="0">
                 <a:solidFill>
                   <a:srgbClr val="000000"/>
                 </a:solidFill>
               </a:defRPr>
             </a:pPr>
             <a:r>
-              <a:rPr sz="750" b="0">
+              <a:rPr sz="728" b="0">
                 <a:solidFill>
                   <a:srgbClr val="000000"/>
                 </a:solidFill>
               </a:rPr>
-              <a:t>0.050</a:t>
-            </a:r>
-          </a:p>
-        </p:txBody>
-      </p:sp>
-      <p:sp>
-        <p:nvSpPr>
-          <p:cNvPr id="21" name="">
-            <a:extLst xmlns:a="http://schemas.openxmlformats.org/drawingml/2006/main">
-              <a:ext uri="{FF2B5EF4-FFF2-40B4-BE49-F238E27FC236}">
-                <a16:creationId xmlns:a16="http://schemas.microsoft.com/office/drawing/2014/main" id="{3569D6AE-C48B-484A-9DA5-CC70CE961090}"/>
+              <a:t>usable acceptance model</a:t>
+            </a:r>
+          </a:p>
+        </p:txBody>
+      </p:sp>
+      <p:sp>
+        <p:nvSpPr>
+          <p:cNvPr id="19" name="">
+            <a:extLst xmlns:a="http://schemas.openxmlformats.org/drawingml/2006/main">
+              <a:ext uri="{FF2B5EF4-FFF2-40B4-BE49-F238E27FC236}">
+                <a16:creationId xmlns:a16="http://schemas.microsoft.com/office/drawing/2014/main" id="{A47792D9-B728-4904-9780-7D92CAEED603}"/>
               </a:ext>
             </a:extLst>
           </p:cNvPr>
@@ -15452,89 +15486,8 @@
         </p:nvSpPr>
         <p:spPr>
           <a:xfrm xmlns:a="http://schemas.openxmlformats.org/drawingml/2006/main">
-            <a:off x="7067550" y="1619250"/>
-            <a:ext cx="7144" cy="285750"/>
-          </a:xfrm>
-          <a:prstGeom xmlns:a="http://schemas.openxmlformats.org/drawingml/2006/main" prst="rect">
-            <a:avLst/>
-          </a:prstGeom>
-          <a:solidFill xmlns:a="http://schemas.openxmlformats.org/drawingml/2006/main">
-            <a:srgbClr val="8DAAC5"/>
-          </a:solidFill>
-          <a:ln xmlns:a="http://schemas.openxmlformats.org/drawingml/2006/main" w="0">
-            <a:noFill/>
-            <a:prstDash val="solid"/>
-          </a:ln>
-        </p:spPr>
-      </p:sp>
-      <p:sp>
-        <p:nvSpPr>
-          <p:cNvPr id="22" name="">
-            <a:extLst xmlns:a="http://schemas.openxmlformats.org/drawingml/2006/main">
-              <a:ext uri="{FF2B5EF4-FFF2-40B4-BE49-F238E27FC236}">
-                <a16:creationId xmlns:a16="http://schemas.microsoft.com/office/drawing/2014/main" id="{EA574023-3D18-404B-B353-F30841C3D151}"/>
-              </a:ext>
-            </a:extLst>
-          </p:cNvPr>
-          <p:cNvSpPr>
-            <a:spLocks xmlns:a="http://schemas.openxmlformats.org/drawingml/2006/main" noGrp="1"/>
-          </p:cNvSpPr>
-          <p:nvPr/>
-        </p:nvSpPr>
-        <p:spPr>
-          <a:xfrm xmlns:a="http://schemas.openxmlformats.org/drawingml/2006/main">
-            <a:off x="7124700" y="1685925"/>
-            <a:ext cx="1276350" cy="171450"/>
-          </a:xfrm>
-          <a:prstGeom xmlns:a="http://schemas.openxmlformats.org/drawingml/2006/main" prst="rect">
-            <a:avLst/>
-          </a:prstGeom>
-          <a:noFill xmlns:a="http://schemas.openxmlformats.org/drawingml/2006/main"/>
-          <a:ln xmlns:a="http://schemas.openxmlformats.org/drawingml/2006/main" w="0">
-            <a:noFill/>
-            <a:prstDash val="solid"/>
-          </a:ln>
-        </p:spPr>
-        <p:txBody>
-          <a:bodyPr xmlns:a="http://schemas.openxmlformats.org/drawingml/2006/main"/>
-          <a:lstStyle xmlns:a="http://schemas.openxmlformats.org/drawingml/2006/main"/>
-          <a:p xmlns:a="http://schemas.openxmlformats.org/drawingml/2006/main">
-            <a:pPr algn="l">
-              <a:defRPr sz="750" b="0">
-                <a:solidFill>
-                  <a:srgbClr val="000000"/>
-                </a:solidFill>
-              </a:defRPr>
-            </a:pPr>
-            <a:r>
-              <a:rPr sz="750" b="0">
-                <a:solidFill>
-                  <a:srgbClr val="000000"/>
-                </a:solidFill>
-              </a:rPr>
-              <a:t>logged baseline</a:t>
-            </a:r>
-          </a:p>
-        </p:txBody>
-      </p:sp>
-      <p:sp>
-        <p:nvSpPr>
-          <p:cNvPr id="23" name="">
-            <a:extLst xmlns:a="http://schemas.openxmlformats.org/drawingml/2006/main">
-              <a:ext uri="{FF2B5EF4-FFF2-40B4-BE49-F238E27FC236}">
-                <a16:creationId xmlns:a16="http://schemas.microsoft.com/office/drawing/2014/main" id="{77A39309-4948-45B3-8D1C-01541455B47E}"/>
-              </a:ext>
-            </a:extLst>
-          </p:cNvPr>
-          <p:cNvSpPr>
-            <a:spLocks xmlns:a="http://schemas.openxmlformats.org/drawingml/2006/main" noGrp="1"/>
-          </p:cNvSpPr>
-          <p:nvPr/>
-        </p:nvSpPr>
-        <p:spPr>
-          <a:xfrm xmlns:a="http://schemas.openxmlformats.org/drawingml/2006/main">
-            <a:off x="4762500" y="1905000"/>
-            <a:ext cx="3676650" cy="285750"/>
+            <a:off x="4762500" y="2019300"/>
+            <a:ext cx="3676650" cy="400050"/>
           </a:xfrm>
           <a:prstGeom xmlns:a="http://schemas.openxmlformats.org/drawingml/2006/main" prst="rect">
             <a:avLst/>
@@ -15552,10 +15505,10 @@
       </p:sp>
       <p:sp>
         <p:nvSpPr>
-          <p:cNvPr id="24" name="">
-            <a:extLst xmlns:a="http://schemas.openxmlformats.org/drawingml/2006/main">
-              <a:ext uri="{FF2B5EF4-FFF2-40B4-BE49-F238E27FC236}">
-                <a16:creationId xmlns:a16="http://schemas.microsoft.com/office/drawing/2014/main" id="{6FDFDAAE-66BA-494B-90D8-2C0A6018392A}"/>
+          <p:cNvPr id="20" name="">
+            <a:extLst xmlns:a="http://schemas.openxmlformats.org/drawingml/2006/main">
+              <a:ext uri="{FF2B5EF4-FFF2-40B4-BE49-F238E27FC236}">
+                <a16:creationId xmlns:a16="http://schemas.microsoft.com/office/drawing/2014/main" id="{1FEEC272-13D4-4D46-98E1-381A9DB34319}"/>
               </a:ext>
             </a:extLst>
           </p:cNvPr>
@@ -15566,8 +15519,8 @@
         </p:nvSpPr>
         <p:spPr>
           <a:xfrm xmlns:a="http://schemas.openxmlformats.org/drawingml/2006/main">
-            <a:off x="4819650" y="1971675"/>
-            <a:ext cx="781050" cy="171450"/>
+            <a:off x="4819650" y="2095500"/>
+            <a:ext cx="819150" cy="228600"/>
           </a:xfrm>
           <a:prstGeom xmlns:a="http://schemas.openxmlformats.org/drawingml/2006/main" prst="rect">
             <a:avLst/>
@@ -15583,29 +15536,29 @@
           <a:lstStyle xmlns:a="http://schemas.openxmlformats.org/drawingml/2006/main"/>
           <a:p xmlns:a="http://schemas.openxmlformats.org/drawingml/2006/main">
             <a:pPr algn="l">
-              <a:defRPr sz="750" b="0">
+              <a:defRPr sz="728" b="0">
                 <a:solidFill>
                   <a:srgbClr val="000000"/>
                 </a:solidFill>
               </a:defRPr>
             </a:pPr>
             <a:r>
-              <a:rPr sz="750" b="0">
+              <a:rPr sz="728" b="0">
                 <a:solidFill>
                   <a:srgbClr val="000000"/>
                 </a:solidFill>
               </a:rPr>
-              <a:t>Greedy</a:t>
-            </a:r>
-          </a:p>
-        </p:txBody>
-      </p:sp>
-      <p:sp>
-        <p:nvSpPr>
-          <p:cNvPr id="25" name="">
-            <a:extLst xmlns:a="http://schemas.openxmlformats.org/drawingml/2006/main">
-              <a:ext uri="{FF2B5EF4-FFF2-40B4-BE49-F238E27FC236}">
-                <a16:creationId xmlns:a16="http://schemas.microsoft.com/office/drawing/2014/main" id="{DB0F5690-32B2-4E73-BCFC-65F14EEA872C}"/>
+              <a:t>Fixed 0.70</a:t>
+            </a:r>
+          </a:p>
+        </p:txBody>
+      </p:sp>
+      <p:sp>
+        <p:nvSpPr>
+          <p:cNvPr id="21" name="">
+            <a:extLst xmlns:a="http://schemas.openxmlformats.org/drawingml/2006/main">
+              <a:ext uri="{FF2B5EF4-FFF2-40B4-BE49-F238E27FC236}">
+                <a16:creationId xmlns:a16="http://schemas.microsoft.com/office/drawing/2014/main" id="{AFA00F3C-D154-4FC3-B90E-0F066A11C277}"/>
               </a:ext>
             </a:extLst>
           </p:cNvPr>
@@ -15616,8 +15569,8 @@
         </p:nvSpPr>
         <p:spPr>
           <a:xfrm xmlns:a="http://schemas.openxmlformats.org/drawingml/2006/main">
-            <a:off x="5638800" y="1905000"/>
-            <a:ext cx="7144" cy="285750"/>
+            <a:off x="5676900" y="2019300"/>
+            <a:ext cx="7144" cy="400050"/>
           </a:xfrm>
           <a:prstGeom xmlns:a="http://schemas.openxmlformats.org/drawingml/2006/main" prst="rect">
             <a:avLst/>
@@ -15633,10 +15586,10 @@
       </p:sp>
       <p:sp>
         <p:nvSpPr>
-          <p:cNvPr id="26" name="">
-            <a:extLst xmlns:a="http://schemas.openxmlformats.org/drawingml/2006/main">
-              <a:ext uri="{FF2B5EF4-FFF2-40B4-BE49-F238E27FC236}">
-                <a16:creationId xmlns:a16="http://schemas.microsoft.com/office/drawing/2014/main" id="{C2BF3D16-C258-4489-8EFC-07D4EC393A06}"/>
+          <p:cNvPr id="22" name="">
+            <a:extLst xmlns:a="http://schemas.openxmlformats.org/drawingml/2006/main">
+              <a:ext uri="{FF2B5EF4-FFF2-40B4-BE49-F238E27FC236}">
+                <a16:creationId xmlns:a16="http://schemas.microsoft.com/office/drawing/2014/main" id="{8E0C5C30-F3DF-4354-A5BD-294DB3FAE4D8}"/>
               </a:ext>
             </a:extLst>
           </p:cNvPr>
@@ -15647,8 +15600,8 @@
         </p:nvSpPr>
         <p:spPr>
           <a:xfrm xmlns:a="http://schemas.openxmlformats.org/drawingml/2006/main">
-            <a:off x="5695950" y="1971675"/>
-            <a:ext cx="647700" cy="171450"/>
+            <a:off x="5734050" y="2095500"/>
+            <a:ext cx="952500" cy="228600"/>
           </a:xfrm>
           <a:prstGeom xmlns:a="http://schemas.openxmlformats.org/drawingml/2006/main" prst="rect">
             <a:avLst/>
@@ -15664,29 +15617,29 @@
           <a:lstStyle xmlns:a="http://schemas.openxmlformats.org/drawingml/2006/main"/>
           <a:p xmlns:a="http://schemas.openxmlformats.org/drawingml/2006/main">
             <a:pPr algn="l">
-              <a:defRPr sz="750" b="0">
+              <a:defRPr sz="728" b="1">
                 <a:solidFill>
                   <a:srgbClr val="000000"/>
                 </a:solidFill>
               </a:defRPr>
             </a:pPr>
             <a:r>
-              <a:rPr sz="750" b="0">
+              <a:rPr sz="728" b="1">
                 <a:solidFill>
                   <a:srgbClr val="000000"/>
                 </a:solidFill>
               </a:rPr>
-              <a:t>model</a:t>
-            </a:r>
-          </a:p>
-        </p:txBody>
-      </p:sp>
-      <p:sp>
-        <p:nvSpPr>
-          <p:cNvPr id="27" name="">
-            <a:extLst xmlns:a="http://schemas.openxmlformats.org/drawingml/2006/main">
-              <a:ext uri="{FF2B5EF4-FFF2-40B4-BE49-F238E27FC236}">
-                <a16:creationId xmlns:a16="http://schemas.microsoft.com/office/drawing/2014/main" id="{723940C0-92F5-4544-97A8-D4CF85904B84}"/>
+              <a:t>0.0268</a:t>
+            </a:r>
+          </a:p>
+        </p:txBody>
+      </p:sp>
+      <p:sp>
+        <p:nvSpPr>
+          <p:cNvPr id="23" name="">
+            <a:extLst xmlns:a="http://schemas.openxmlformats.org/drawingml/2006/main">
+              <a:ext uri="{FF2B5EF4-FFF2-40B4-BE49-F238E27FC236}">
+                <a16:creationId xmlns:a16="http://schemas.microsoft.com/office/drawing/2014/main" id="{0E0CF950-7899-4B4D-80A3-A3F7AA52004B}"/>
               </a:ext>
             </a:extLst>
           </p:cNvPr>
@@ -15697,8 +15650,8 @@
         </p:nvSpPr>
         <p:spPr>
           <a:xfrm xmlns:a="http://schemas.openxmlformats.org/drawingml/2006/main">
-            <a:off x="6381750" y="1905000"/>
-            <a:ext cx="7144" cy="285750"/>
+            <a:off x="6724650" y="2019300"/>
+            <a:ext cx="7144" cy="400050"/>
           </a:xfrm>
           <a:prstGeom xmlns:a="http://schemas.openxmlformats.org/drawingml/2006/main" prst="rect">
             <a:avLst/>
@@ -15714,10 +15667,10 @@
       </p:sp>
       <p:sp>
         <p:nvSpPr>
-          <p:cNvPr id="28" name="">
-            <a:extLst xmlns:a="http://schemas.openxmlformats.org/drawingml/2006/main">
-              <a:ext uri="{FF2B5EF4-FFF2-40B4-BE49-F238E27FC236}">
-                <a16:creationId xmlns:a16="http://schemas.microsoft.com/office/drawing/2014/main" id="{51C358B3-E423-41E8-B4A5-651CE4A5052B}"/>
+          <p:cNvPr id="24" name="">
+            <a:extLst xmlns:a="http://schemas.openxmlformats.org/drawingml/2006/main">
+              <a:ext uri="{FF2B5EF4-FFF2-40B4-BE49-F238E27FC236}">
+                <a16:creationId xmlns:a16="http://schemas.microsoft.com/office/drawing/2014/main" id="{98D9BFC4-CF7D-48AC-B34A-5567B432B0EF}"/>
               </a:ext>
             </a:extLst>
           </p:cNvPr>
@@ -15728,8 +15681,8 @@
         </p:nvSpPr>
         <p:spPr>
           <a:xfrm xmlns:a="http://schemas.openxmlformats.org/drawingml/2006/main">
-            <a:off x="6438900" y="1971675"/>
-            <a:ext cx="590550" cy="171450"/>
+            <a:off x="6781800" y="2095500"/>
+            <a:ext cx="1619250" cy="228600"/>
           </a:xfrm>
           <a:prstGeom xmlns:a="http://schemas.openxmlformats.org/drawingml/2006/main" prst="rect">
             <a:avLst/>
@@ -15745,29 +15698,29 @@
           <a:lstStyle xmlns:a="http://schemas.openxmlformats.org/drawingml/2006/main"/>
           <a:p xmlns:a="http://schemas.openxmlformats.org/drawingml/2006/main">
             <a:pPr algn="l">
-              <a:defRPr sz="750" b="0">
+              <a:defRPr sz="728" b="0">
                 <a:solidFill>
                   <a:srgbClr val="000000"/>
                 </a:solidFill>
               </a:defRPr>
             </a:pPr>
             <a:r>
-              <a:rPr sz="750" b="0">
+              <a:rPr sz="728" b="0">
                 <a:solidFill>
                   <a:srgbClr val="000000"/>
                 </a:solidFill>
               </a:rPr>
-              <a:t>0.027</a:t>
-            </a:r>
-          </a:p>
-        </p:txBody>
-      </p:sp>
-      <p:sp>
-        <p:nvSpPr>
-          <p:cNvPr id="29" name="">
-            <a:extLst xmlns:a="http://schemas.openxmlformats.org/drawingml/2006/main">
-              <a:ext uri="{FF2B5EF4-FFF2-40B4-BE49-F238E27FC236}">
-                <a16:creationId xmlns:a16="http://schemas.microsoft.com/office/drawing/2014/main" id="{CA9E5744-D33F-4804-ABCC-C4452FCA39DD}"/>
+              <a:t>expected savings</a:t>
+            </a:r>
+          </a:p>
+        </p:txBody>
+      </p:sp>
+      <p:sp>
+        <p:nvSpPr>
+          <p:cNvPr id="25" name="">
+            <a:extLst xmlns:a="http://schemas.openxmlformats.org/drawingml/2006/main">
+              <a:ext uri="{FF2B5EF4-FFF2-40B4-BE49-F238E27FC236}">
+                <a16:creationId xmlns:a16="http://schemas.microsoft.com/office/drawing/2014/main" id="{46D9EDF8-D846-4AFA-9E2F-A2C53EED5F1A}"/>
               </a:ext>
             </a:extLst>
           </p:cNvPr>
@@ -15778,89 +15731,8 @@
         </p:nvSpPr>
         <p:spPr>
           <a:xfrm xmlns:a="http://schemas.openxmlformats.org/drawingml/2006/main">
-            <a:off x="7067550" y="1905000"/>
-            <a:ext cx="7144" cy="285750"/>
-          </a:xfrm>
-          <a:prstGeom xmlns:a="http://schemas.openxmlformats.org/drawingml/2006/main" prst="rect">
-            <a:avLst/>
-          </a:prstGeom>
-          <a:solidFill xmlns:a="http://schemas.openxmlformats.org/drawingml/2006/main">
-            <a:srgbClr val="8DAAC5"/>
-          </a:solidFill>
-          <a:ln xmlns:a="http://schemas.openxmlformats.org/drawingml/2006/main" w="0">
-            <a:noFill/>
-            <a:prstDash val="solid"/>
-          </a:ln>
-        </p:spPr>
-      </p:sp>
-      <p:sp>
-        <p:nvSpPr>
-          <p:cNvPr id="30" name="">
-            <a:extLst xmlns:a="http://schemas.openxmlformats.org/drawingml/2006/main">
-              <a:ext uri="{FF2B5EF4-FFF2-40B4-BE49-F238E27FC236}">
-                <a16:creationId xmlns:a16="http://schemas.microsoft.com/office/drawing/2014/main" id="{9DB1A701-D8B8-419D-8EFC-2502D18D6C0D}"/>
-              </a:ext>
-            </a:extLst>
-          </p:cNvPr>
-          <p:cNvSpPr>
-            <a:spLocks xmlns:a="http://schemas.openxmlformats.org/drawingml/2006/main" noGrp="1"/>
-          </p:cNvSpPr>
-          <p:nvPr/>
-        </p:nvSpPr>
-        <p:spPr>
-          <a:xfrm xmlns:a="http://schemas.openxmlformats.org/drawingml/2006/main">
-            <a:off x="7124700" y="1971675"/>
-            <a:ext cx="1276350" cy="171450"/>
-          </a:xfrm>
-          <a:prstGeom xmlns:a="http://schemas.openxmlformats.org/drawingml/2006/main" prst="rect">
-            <a:avLst/>
-          </a:prstGeom>
-          <a:noFill xmlns:a="http://schemas.openxmlformats.org/drawingml/2006/main"/>
-          <a:ln xmlns:a="http://schemas.openxmlformats.org/drawingml/2006/main" w="0">
-            <a:noFill/>
-            <a:prstDash val="solid"/>
-          </a:ln>
-        </p:spPr>
-        <p:txBody>
-          <a:bodyPr xmlns:a="http://schemas.openxmlformats.org/drawingml/2006/main"/>
-          <a:lstStyle xmlns:a="http://schemas.openxmlformats.org/drawingml/2006/main"/>
-          <a:p xmlns:a="http://schemas.openxmlformats.org/drawingml/2006/main">
-            <a:pPr algn="l">
-              <a:defRPr sz="750" b="0">
-                <a:solidFill>
-                  <a:srgbClr val="000000"/>
-                </a:solidFill>
-              </a:defRPr>
-            </a:pPr>
-            <a:r>
-              <a:rPr sz="750" b="0">
-                <a:solidFill>
-                  <a:srgbClr val="000000"/>
-                </a:solidFill>
-              </a:rPr>
-              <a:t>weak support</a:t>
-            </a:r>
-          </a:p>
-        </p:txBody>
-      </p:sp>
-      <p:sp>
-        <p:nvSpPr>
-          <p:cNvPr id="31" name="">
-            <a:extLst xmlns:a="http://schemas.openxmlformats.org/drawingml/2006/main">
-              <a:ext uri="{FF2B5EF4-FFF2-40B4-BE49-F238E27FC236}">
-                <a16:creationId xmlns:a16="http://schemas.microsoft.com/office/drawing/2014/main" id="{950598EB-DA64-4D17-8B8E-2D9CF466FB16}"/>
-              </a:ext>
-            </a:extLst>
-          </p:cNvPr>
-          <p:cNvSpPr>
-            <a:spLocks xmlns:a="http://schemas.openxmlformats.org/drawingml/2006/main" noGrp="1"/>
-          </p:cNvSpPr>
-          <p:nvPr/>
-        </p:nvSpPr>
-        <p:spPr>
-          <a:xfrm xmlns:a="http://schemas.openxmlformats.org/drawingml/2006/main">
-            <a:off x="4762500" y="2190750"/>
-            <a:ext cx="3676650" cy="285750"/>
+            <a:off x="4762500" y="2419350"/>
+            <a:ext cx="3676650" cy="400050"/>
           </a:xfrm>
           <a:prstGeom xmlns:a="http://schemas.openxmlformats.org/drawingml/2006/main" prst="rect">
             <a:avLst/>
@@ -15878,10 +15750,10 @@
       </p:sp>
       <p:sp>
         <p:nvSpPr>
-          <p:cNvPr id="32" name="">
-            <a:extLst xmlns:a="http://schemas.openxmlformats.org/drawingml/2006/main">
-              <a:ext uri="{FF2B5EF4-FFF2-40B4-BE49-F238E27FC236}">
-                <a16:creationId xmlns:a16="http://schemas.microsoft.com/office/drawing/2014/main" id="{61C39E4B-F241-476C-A137-CAAFAA6B785B}"/>
+          <p:cNvPr id="26" name="">
+            <a:extLst xmlns:a="http://schemas.openxmlformats.org/drawingml/2006/main">
+              <a:ext uri="{FF2B5EF4-FFF2-40B4-BE49-F238E27FC236}">
+                <a16:creationId xmlns:a16="http://schemas.microsoft.com/office/drawing/2014/main" id="{B766437C-6168-41D7-A09C-8363526C9E10}"/>
               </a:ext>
             </a:extLst>
           </p:cNvPr>
@@ -15892,8 +15764,8 @@
         </p:nvSpPr>
         <p:spPr>
           <a:xfrm xmlns:a="http://schemas.openxmlformats.org/drawingml/2006/main">
-            <a:off x="4819650" y="2257425"/>
-            <a:ext cx="781050" cy="171450"/>
+            <a:off x="4819650" y="2495550"/>
+            <a:ext cx="819150" cy="228600"/>
           </a:xfrm>
           <a:prstGeom xmlns:a="http://schemas.openxmlformats.org/drawingml/2006/main" prst="rect">
             <a:avLst/>
@@ -15909,29 +15781,29 @@
           <a:lstStyle xmlns:a="http://schemas.openxmlformats.org/drawingml/2006/main"/>
           <a:p xmlns:a="http://schemas.openxmlformats.org/drawingml/2006/main">
             <a:pPr algn="l">
-              <a:defRPr sz="750" b="0">
+              <a:defRPr sz="728" b="0">
                 <a:solidFill>
                   <a:srgbClr val="000000"/>
                 </a:solidFill>
               </a:defRPr>
             </a:pPr>
             <a:r>
-              <a:rPr sz="750" b="0">
+              <a:rPr sz="728" b="0">
                 <a:solidFill>
                   <a:srgbClr val="000000"/>
                 </a:solidFill>
               </a:rPr>
-              <a:t>CQL</a:t>
-            </a:r>
-          </a:p>
-        </p:txBody>
-      </p:sp>
-      <p:sp>
-        <p:nvSpPr>
-          <p:cNvPr id="33" name="">
-            <a:extLst xmlns:a="http://schemas.openxmlformats.org/drawingml/2006/main">
-              <a:ext uri="{FF2B5EF4-FFF2-40B4-BE49-F238E27FC236}">
-                <a16:creationId xmlns:a16="http://schemas.microsoft.com/office/drawing/2014/main" id="{43DCF9E5-1D91-4240-992F-EF242BD4FC1B}"/>
+              <a:t>Greedy use</a:t>
+            </a:r>
+          </a:p>
+        </p:txBody>
+      </p:sp>
+      <p:sp>
+        <p:nvSpPr>
+          <p:cNvPr id="27" name="">
+            <a:extLst xmlns:a="http://schemas.openxmlformats.org/drawingml/2006/main">
+              <a:ext uri="{FF2B5EF4-FFF2-40B4-BE49-F238E27FC236}">
+                <a16:creationId xmlns:a16="http://schemas.microsoft.com/office/drawing/2014/main" id="{C98B82AD-4E31-41CC-8375-EFC6886AAE7E}"/>
               </a:ext>
             </a:extLst>
           </p:cNvPr>
@@ -15942,8 +15814,8 @@
         </p:nvSpPr>
         <p:spPr>
           <a:xfrm xmlns:a="http://schemas.openxmlformats.org/drawingml/2006/main">
-            <a:off x="5638800" y="2190750"/>
-            <a:ext cx="7144" cy="285750"/>
+            <a:off x="5676900" y="2419350"/>
+            <a:ext cx="7144" cy="400050"/>
           </a:xfrm>
           <a:prstGeom xmlns:a="http://schemas.openxmlformats.org/drawingml/2006/main" prst="rect">
             <a:avLst/>
@@ -15959,10 +15831,10 @@
       </p:sp>
       <p:sp>
         <p:nvSpPr>
-          <p:cNvPr id="34" name="">
-            <a:extLst xmlns:a="http://schemas.openxmlformats.org/drawingml/2006/main">
-              <a:ext uri="{FF2B5EF4-FFF2-40B4-BE49-F238E27FC236}">
-                <a16:creationId xmlns:a16="http://schemas.microsoft.com/office/drawing/2014/main" id="{CAB8C4CD-124B-423A-B8F2-83E8E5D2A256}"/>
+          <p:cNvPr id="28" name="">
+            <a:extLst xmlns:a="http://schemas.openxmlformats.org/drawingml/2006/main">
+              <a:ext uri="{FF2B5EF4-FFF2-40B4-BE49-F238E27FC236}">
+                <a16:creationId xmlns:a16="http://schemas.microsoft.com/office/drawing/2014/main" id="{E436FEBC-D40A-4AE2-91B1-11B2FC3CEEF4}"/>
               </a:ext>
             </a:extLst>
           </p:cNvPr>
@@ -15973,8 +15845,8 @@
         </p:nvSpPr>
         <p:spPr>
           <a:xfrm xmlns:a="http://schemas.openxmlformats.org/drawingml/2006/main">
-            <a:off x="5695950" y="2257425"/>
-            <a:ext cx="647700" cy="171450"/>
+            <a:off x="5734050" y="2495550"/>
+            <a:ext cx="952500" cy="228600"/>
           </a:xfrm>
           <a:prstGeom xmlns:a="http://schemas.openxmlformats.org/drawingml/2006/main" prst="rect">
             <a:avLst/>
@@ -15990,29 +15862,29 @@
           <a:lstStyle xmlns:a="http://schemas.openxmlformats.org/drawingml/2006/main"/>
           <a:p xmlns:a="http://schemas.openxmlformats.org/drawingml/2006/main">
             <a:pPr algn="l">
-              <a:defRPr sz="750" b="0">
+              <a:defRPr sz="728" b="1">
                 <a:solidFill>
                   <a:srgbClr val="000000"/>
                 </a:solidFill>
               </a:defRPr>
             </a:pPr>
             <a:r>
-              <a:rPr sz="750" b="0">
+              <a:rPr sz="728" b="1">
                 <a:solidFill>
                   <a:srgbClr val="000000"/>
                 </a:solidFill>
               </a:rPr>
-              <a:t>model</a:t>
-            </a:r>
-          </a:p>
-        </p:txBody>
-      </p:sp>
-      <p:sp>
-        <p:nvSpPr>
-          <p:cNvPr id="35" name="">
-            <a:extLst xmlns:a="http://schemas.openxmlformats.org/drawingml/2006/main">
-              <a:ext uri="{FF2B5EF4-FFF2-40B4-BE49-F238E27FC236}">
-                <a16:creationId xmlns:a16="http://schemas.microsoft.com/office/drawing/2014/main" id="{8E151CB7-6D3D-465A-B902-D1424DE4155E}"/>
+              <a:t>ESS 0.008</a:t>
+            </a:r>
+          </a:p>
+        </p:txBody>
+      </p:sp>
+      <p:sp>
+        <p:nvSpPr>
+          <p:cNvPr id="29" name="">
+            <a:extLst xmlns:a="http://schemas.openxmlformats.org/drawingml/2006/main">
+              <a:ext uri="{FF2B5EF4-FFF2-40B4-BE49-F238E27FC236}">
+                <a16:creationId xmlns:a16="http://schemas.microsoft.com/office/drawing/2014/main" id="{A514396C-610F-4857-A374-1095C14EAFEF}"/>
               </a:ext>
             </a:extLst>
           </p:cNvPr>
@@ -16023,8 +15895,8 @@
         </p:nvSpPr>
         <p:spPr>
           <a:xfrm xmlns:a="http://schemas.openxmlformats.org/drawingml/2006/main">
-            <a:off x="6381750" y="2190750"/>
-            <a:ext cx="7144" cy="285750"/>
+            <a:off x="6724650" y="2419350"/>
+            <a:ext cx="7144" cy="400050"/>
           </a:xfrm>
           <a:prstGeom xmlns:a="http://schemas.openxmlformats.org/drawingml/2006/main" prst="rect">
             <a:avLst/>
@@ -16040,10 +15912,10 @@
       </p:sp>
       <p:sp>
         <p:nvSpPr>
-          <p:cNvPr id="36" name="">
-            <a:extLst xmlns:a="http://schemas.openxmlformats.org/drawingml/2006/main">
-              <a:ext uri="{FF2B5EF4-FFF2-40B4-BE49-F238E27FC236}">
-                <a16:creationId xmlns:a16="http://schemas.microsoft.com/office/drawing/2014/main" id="{7A10FA40-83E1-4D27-B92A-188734C4EDC4}"/>
+          <p:cNvPr id="30" name="">
+            <a:extLst xmlns:a="http://schemas.openxmlformats.org/drawingml/2006/main">
+              <a:ext uri="{FF2B5EF4-FFF2-40B4-BE49-F238E27FC236}">
+                <a16:creationId xmlns:a16="http://schemas.microsoft.com/office/drawing/2014/main" id="{32B50270-BE0A-403D-A805-C658A448FB14}"/>
               </a:ext>
             </a:extLst>
           </p:cNvPr>
@@ -16054,8 +15926,8 @@
         </p:nvSpPr>
         <p:spPr>
           <a:xfrm xmlns:a="http://schemas.openxmlformats.org/drawingml/2006/main">
-            <a:off x="6438900" y="2257425"/>
-            <a:ext cx="590550" cy="171450"/>
+            <a:off x="6781800" y="2495550"/>
+            <a:ext cx="1619250" cy="228600"/>
           </a:xfrm>
           <a:prstGeom xmlns:a="http://schemas.openxmlformats.org/drawingml/2006/main" prst="rect">
             <a:avLst/>
@@ -16071,29 +15943,29 @@
           <a:lstStyle xmlns:a="http://schemas.openxmlformats.org/drawingml/2006/main"/>
           <a:p xmlns:a="http://schemas.openxmlformats.org/drawingml/2006/main">
             <a:pPr algn="l">
-              <a:defRPr sz="750" b="0">
+              <a:defRPr sz="728" b="0">
                 <a:solidFill>
                   <a:srgbClr val="000000"/>
                 </a:solidFill>
               </a:defRPr>
             </a:pPr>
             <a:r>
-              <a:rPr sz="750" b="0">
+              <a:rPr sz="728" b="0">
                 <a:solidFill>
                   <a:srgbClr val="000000"/>
                 </a:solidFill>
               </a:rPr>
-              <a:t>0.020</a:t>
-            </a:r>
-          </a:p>
-        </p:txBody>
-      </p:sp>
-      <p:sp>
-        <p:nvSpPr>
-          <p:cNvPr id="37" name="">
-            <a:extLst xmlns:a="http://schemas.openxmlformats.org/drawingml/2006/main">
-              <a:ext uri="{FF2B5EF4-FFF2-40B4-BE49-F238E27FC236}">
-                <a16:creationId xmlns:a16="http://schemas.microsoft.com/office/drawing/2014/main" id="{40149701-1C50-40FD-82D9-0F5B8B600D3F}"/>
+              <a:t>almost no logged support</a:t>
+            </a:r>
+          </a:p>
+        </p:txBody>
+      </p:sp>
+      <p:sp>
+        <p:nvSpPr>
+          <p:cNvPr id="31" name="">
+            <a:extLst xmlns:a="http://schemas.openxmlformats.org/drawingml/2006/main">
+              <a:ext uri="{FF2B5EF4-FFF2-40B4-BE49-F238E27FC236}">
+                <a16:creationId xmlns:a16="http://schemas.microsoft.com/office/drawing/2014/main" id="{85E3F836-27AC-46B1-996D-6761E9C2983E}"/>
               </a:ext>
             </a:extLst>
           </p:cNvPr>
@@ -16104,39 +15976,8 @@
         </p:nvSpPr>
         <p:spPr>
           <a:xfrm xmlns:a="http://schemas.openxmlformats.org/drawingml/2006/main">
-            <a:off x="7067550" y="2190750"/>
-            <a:ext cx="7144" cy="285750"/>
-          </a:xfrm>
-          <a:prstGeom xmlns:a="http://schemas.openxmlformats.org/drawingml/2006/main" prst="rect">
-            <a:avLst/>
-          </a:prstGeom>
-          <a:solidFill xmlns:a="http://schemas.openxmlformats.org/drawingml/2006/main">
-            <a:srgbClr val="8DAAC5"/>
-          </a:solidFill>
-          <a:ln xmlns:a="http://schemas.openxmlformats.org/drawingml/2006/main" w="0">
-            <a:noFill/>
-            <a:prstDash val="solid"/>
-          </a:ln>
-        </p:spPr>
-      </p:sp>
-      <p:sp>
-        <p:nvSpPr>
-          <p:cNvPr id="38" name="">
-            <a:extLst xmlns:a="http://schemas.openxmlformats.org/drawingml/2006/main">
-              <a:ext uri="{FF2B5EF4-FFF2-40B4-BE49-F238E27FC236}">
-                <a16:creationId xmlns:a16="http://schemas.microsoft.com/office/drawing/2014/main" id="{1C2653C1-6A44-48BA-8DC9-49F7216529C5}"/>
-              </a:ext>
-            </a:extLst>
-          </p:cNvPr>
-          <p:cNvSpPr>
-            <a:spLocks xmlns:a="http://schemas.openxmlformats.org/drawingml/2006/main" noGrp="1"/>
-          </p:cNvSpPr>
-          <p:nvPr/>
-        </p:nvSpPr>
-        <p:spPr>
-          <a:xfrm xmlns:a="http://schemas.openxmlformats.org/drawingml/2006/main">
-            <a:off x="7124700" y="2257425"/>
-            <a:ext cx="1276350" cy="171450"/>
+            <a:off x="4810125" y="3190875"/>
+            <a:ext cx="3476625" cy="552450"/>
           </a:xfrm>
           <a:prstGeom xmlns:a="http://schemas.openxmlformats.org/drawingml/2006/main" prst="rect">
             <a:avLst/>
@@ -16152,395 +15993,69 @@
           <a:lstStyle xmlns:a="http://schemas.openxmlformats.org/drawingml/2006/main"/>
           <a:p xmlns:a="http://schemas.openxmlformats.org/drawingml/2006/main">
             <a:pPr algn="l">
-              <a:defRPr sz="750" b="0">
+              <a:defRPr sz="1125" b="1">
+                <a:solidFill>
+                  <a:srgbClr val="005293"/>
+                </a:solidFill>
+              </a:defRPr>
+            </a:pPr>
+            <a:r>
+              <a:rPr sz="1125" b="1">
+                <a:solidFill>
+                  <a:srgbClr val="005293"/>
+                </a:solidFill>
+              </a:rPr>
+              <a:t>This closes Phase 1: prediction works, but support-aware optimization is still needed.</a:t>
+            </a:r>
+          </a:p>
+        </p:txBody>
+      </p:sp>
+      <p:sp>
+        <p:nvSpPr>
+          <p:cNvPr id="32" name="">
+            <a:extLst xmlns:a="http://schemas.openxmlformats.org/drawingml/2006/main">
+              <a:ext uri="{FF2B5EF4-FFF2-40B4-BE49-F238E27FC236}">
+                <a16:creationId xmlns:a16="http://schemas.microsoft.com/office/drawing/2014/main" id="{42363C00-A225-4036-BC4D-EDDC186311FD}"/>
+              </a:ext>
+            </a:extLst>
+          </p:cNvPr>
+          <p:cNvSpPr>
+            <a:spLocks xmlns:a="http://schemas.openxmlformats.org/drawingml/2006/main" noGrp="1"/>
+          </p:cNvSpPr>
+          <p:nvPr/>
+        </p:nvSpPr>
+        <p:spPr>
+          <a:xfrm xmlns:a="http://schemas.openxmlformats.org/drawingml/2006/main">
+            <a:off x="4810125" y="3771900"/>
+            <a:ext cx="3476625" cy="228600"/>
+          </a:xfrm>
+          <a:prstGeom xmlns:a="http://schemas.openxmlformats.org/drawingml/2006/main" prst="rect">
+            <a:avLst/>
+          </a:prstGeom>
+          <a:noFill xmlns:a="http://schemas.openxmlformats.org/drawingml/2006/main"/>
+          <a:ln xmlns:a="http://schemas.openxmlformats.org/drawingml/2006/main" w="0">
+            <a:noFill/>
+            <a:prstDash val="solid"/>
+          </a:ln>
+        </p:spPr>
+        <p:txBody>
+          <a:bodyPr xmlns:a="http://schemas.openxmlformats.org/drawingml/2006/main"/>
+          <a:lstStyle xmlns:a="http://schemas.openxmlformats.org/drawingml/2006/main"/>
+          <a:p xmlns:a="http://schemas.openxmlformats.org/drawingml/2006/main">
+            <a:pPr algn="l">
+              <a:defRPr sz="788" b="0">
                 <a:solidFill>
                   <a:srgbClr val="000000"/>
                 </a:solidFill>
               </a:defRPr>
             </a:pPr>
             <a:r>
-              <a:rPr sz="750" b="0">
+              <a:rPr sz="788" b="0">
                 <a:solidFill>
                   <a:srgbClr val="000000"/>
                 </a:solidFill>
               </a:rPr>
-              <a:t>healthy ESS</a:t>
-            </a:r>
-          </a:p>
-        </p:txBody>
-      </p:sp>
-      <p:sp>
-        <p:nvSpPr>
-          <p:cNvPr id="39" name="">
-            <a:extLst xmlns:a="http://schemas.openxmlformats.org/drawingml/2006/main">
-              <a:ext uri="{FF2B5EF4-FFF2-40B4-BE49-F238E27FC236}">
-                <a16:creationId xmlns:a16="http://schemas.microsoft.com/office/drawing/2014/main" id="{4CA9061F-0A0E-4EB7-9ED5-53C6C1136F1A}"/>
-              </a:ext>
-            </a:extLst>
-          </p:cNvPr>
-          <p:cNvSpPr>
-            <a:spLocks xmlns:a="http://schemas.openxmlformats.org/drawingml/2006/main" noGrp="1"/>
-          </p:cNvSpPr>
-          <p:nvPr/>
-        </p:nvSpPr>
-        <p:spPr>
-          <a:xfrm xmlns:a="http://schemas.openxmlformats.org/drawingml/2006/main">
-            <a:off x="4762500" y="2476500"/>
-            <a:ext cx="3676650" cy="285750"/>
-          </a:xfrm>
-          <a:prstGeom xmlns:a="http://schemas.openxmlformats.org/drawingml/2006/main" prst="rect">
-            <a:avLst/>
-          </a:prstGeom>
-          <a:solidFill xmlns:a="http://schemas.openxmlformats.org/drawingml/2006/main">
-            <a:srgbClr val="FFFFFF"/>
-          </a:solidFill>
-          <a:ln xmlns:a="http://schemas.openxmlformats.org/drawingml/2006/main" w="7144">
-            <a:solidFill>
-              <a:srgbClr val="8DAAC5"/>
-            </a:solidFill>
-            <a:prstDash val="solid"/>
-          </a:ln>
-        </p:spPr>
-      </p:sp>
-      <p:sp>
-        <p:nvSpPr>
-          <p:cNvPr id="40" name="">
-            <a:extLst xmlns:a="http://schemas.openxmlformats.org/drawingml/2006/main">
-              <a:ext uri="{FF2B5EF4-FFF2-40B4-BE49-F238E27FC236}">
-                <a16:creationId xmlns:a16="http://schemas.microsoft.com/office/drawing/2014/main" id="{2C4B225E-E3BF-442D-AB7B-6F15B140FE42}"/>
-              </a:ext>
-            </a:extLst>
-          </p:cNvPr>
-          <p:cNvSpPr>
-            <a:spLocks xmlns:a="http://schemas.openxmlformats.org/drawingml/2006/main" noGrp="1"/>
-          </p:cNvSpPr>
-          <p:nvPr/>
-        </p:nvSpPr>
-        <p:spPr>
-          <a:xfrm xmlns:a="http://schemas.openxmlformats.org/drawingml/2006/main">
-            <a:off x="4819650" y="2543175"/>
-            <a:ext cx="781050" cy="171450"/>
-          </a:xfrm>
-          <a:prstGeom xmlns:a="http://schemas.openxmlformats.org/drawingml/2006/main" prst="rect">
-            <a:avLst/>
-          </a:prstGeom>
-          <a:noFill xmlns:a="http://schemas.openxmlformats.org/drawingml/2006/main"/>
-          <a:ln xmlns:a="http://schemas.openxmlformats.org/drawingml/2006/main" w="0">
-            <a:noFill/>
-            <a:prstDash val="solid"/>
-          </a:ln>
-        </p:spPr>
-        <p:txBody>
-          <a:bodyPr xmlns:a="http://schemas.openxmlformats.org/drawingml/2006/main"/>
-          <a:lstStyle xmlns:a="http://schemas.openxmlformats.org/drawingml/2006/main"/>
-          <a:p xmlns:a="http://schemas.openxmlformats.org/drawingml/2006/main">
-            <a:pPr algn="l">
-              <a:defRPr sz="750" b="0">
-                <a:solidFill>
-                  <a:srgbClr val="000000"/>
-                </a:solidFill>
-              </a:defRPr>
-            </a:pPr>
-            <a:r>
-              <a:rPr sz="750" b="0">
-                <a:solidFill>
-                  <a:srgbClr val="000000"/>
-                </a:solidFill>
-              </a:rPr>
-              <a:t>PPO</a:t>
-            </a:r>
-          </a:p>
-        </p:txBody>
-      </p:sp>
-      <p:sp>
-        <p:nvSpPr>
-          <p:cNvPr id="41" name="">
-            <a:extLst xmlns:a="http://schemas.openxmlformats.org/drawingml/2006/main">
-              <a:ext uri="{FF2B5EF4-FFF2-40B4-BE49-F238E27FC236}">
-                <a16:creationId xmlns:a16="http://schemas.microsoft.com/office/drawing/2014/main" id="{2CD3DFE5-CE4D-4E82-840C-A330410D6713}"/>
-              </a:ext>
-            </a:extLst>
-          </p:cNvPr>
-          <p:cNvSpPr>
-            <a:spLocks xmlns:a="http://schemas.openxmlformats.org/drawingml/2006/main" noGrp="1"/>
-          </p:cNvSpPr>
-          <p:nvPr/>
-        </p:nvSpPr>
-        <p:spPr>
-          <a:xfrm xmlns:a="http://schemas.openxmlformats.org/drawingml/2006/main">
-            <a:off x="5638800" y="2476500"/>
-            <a:ext cx="7144" cy="285750"/>
-          </a:xfrm>
-          <a:prstGeom xmlns:a="http://schemas.openxmlformats.org/drawingml/2006/main" prst="rect">
-            <a:avLst/>
-          </a:prstGeom>
-          <a:solidFill xmlns:a="http://schemas.openxmlformats.org/drawingml/2006/main">
-            <a:srgbClr val="8DAAC5"/>
-          </a:solidFill>
-          <a:ln xmlns:a="http://schemas.openxmlformats.org/drawingml/2006/main" w="0">
-            <a:noFill/>
-            <a:prstDash val="solid"/>
-          </a:ln>
-        </p:spPr>
-      </p:sp>
-      <p:sp>
-        <p:nvSpPr>
-          <p:cNvPr id="42" name="">
-            <a:extLst xmlns:a="http://schemas.openxmlformats.org/drawingml/2006/main">
-              <a:ext uri="{FF2B5EF4-FFF2-40B4-BE49-F238E27FC236}">
-                <a16:creationId xmlns:a16="http://schemas.microsoft.com/office/drawing/2014/main" id="{B9AB7C7C-FAD6-4C96-B6BA-2C07131D1240}"/>
-              </a:ext>
-            </a:extLst>
-          </p:cNvPr>
-          <p:cNvSpPr>
-            <a:spLocks xmlns:a="http://schemas.openxmlformats.org/drawingml/2006/main" noGrp="1"/>
-          </p:cNvSpPr>
-          <p:nvPr/>
-        </p:nvSpPr>
-        <p:spPr>
-          <a:xfrm xmlns:a="http://schemas.openxmlformats.org/drawingml/2006/main">
-            <a:off x="5695950" y="2543175"/>
-            <a:ext cx="647700" cy="171450"/>
-          </a:xfrm>
-          <a:prstGeom xmlns:a="http://schemas.openxmlformats.org/drawingml/2006/main" prst="rect">
-            <a:avLst/>
-          </a:prstGeom>
-          <a:noFill xmlns:a="http://schemas.openxmlformats.org/drawingml/2006/main"/>
-          <a:ln xmlns:a="http://schemas.openxmlformats.org/drawingml/2006/main" w="0">
-            <a:noFill/>
-            <a:prstDash val="solid"/>
-          </a:ln>
-        </p:spPr>
-        <p:txBody>
-          <a:bodyPr xmlns:a="http://schemas.openxmlformats.org/drawingml/2006/main"/>
-          <a:lstStyle xmlns:a="http://schemas.openxmlformats.org/drawingml/2006/main"/>
-          <a:p xmlns:a="http://schemas.openxmlformats.org/drawingml/2006/main">
-            <a:pPr algn="l">
-              <a:defRPr sz="750" b="0">
-                <a:solidFill>
-                  <a:srgbClr val="000000"/>
-                </a:solidFill>
-              </a:defRPr>
-            </a:pPr>
-            <a:r>
-              <a:rPr sz="750" b="0">
-                <a:solidFill>
-                  <a:srgbClr val="000000"/>
-                </a:solidFill>
-              </a:rPr>
-              <a:t>simulator</a:t>
-            </a:r>
-          </a:p>
-        </p:txBody>
-      </p:sp>
-      <p:sp>
-        <p:nvSpPr>
-          <p:cNvPr id="43" name="">
-            <a:extLst xmlns:a="http://schemas.openxmlformats.org/drawingml/2006/main">
-              <a:ext uri="{FF2B5EF4-FFF2-40B4-BE49-F238E27FC236}">
-                <a16:creationId xmlns:a16="http://schemas.microsoft.com/office/drawing/2014/main" id="{4191188E-E87B-4CE5-B801-4167A8DBB66B}"/>
-              </a:ext>
-            </a:extLst>
-          </p:cNvPr>
-          <p:cNvSpPr>
-            <a:spLocks xmlns:a="http://schemas.openxmlformats.org/drawingml/2006/main" noGrp="1"/>
-          </p:cNvSpPr>
-          <p:nvPr/>
-        </p:nvSpPr>
-        <p:spPr>
-          <a:xfrm xmlns:a="http://schemas.openxmlformats.org/drawingml/2006/main">
-            <a:off x="6381750" y="2476500"/>
-            <a:ext cx="7144" cy="285750"/>
-          </a:xfrm>
-          <a:prstGeom xmlns:a="http://schemas.openxmlformats.org/drawingml/2006/main" prst="rect">
-            <a:avLst/>
-          </a:prstGeom>
-          <a:solidFill xmlns:a="http://schemas.openxmlformats.org/drawingml/2006/main">
-            <a:srgbClr val="8DAAC5"/>
-          </a:solidFill>
-          <a:ln xmlns:a="http://schemas.openxmlformats.org/drawingml/2006/main" w="0">
-            <a:noFill/>
-            <a:prstDash val="solid"/>
-          </a:ln>
-        </p:spPr>
-      </p:sp>
-      <p:sp>
-        <p:nvSpPr>
-          <p:cNvPr id="44" name="">
-            <a:extLst xmlns:a="http://schemas.openxmlformats.org/drawingml/2006/main">
-              <a:ext uri="{FF2B5EF4-FFF2-40B4-BE49-F238E27FC236}">
-                <a16:creationId xmlns:a16="http://schemas.microsoft.com/office/drawing/2014/main" id="{C8E479F3-EAA2-45F4-A2E4-CDB7D5ED7F3E}"/>
-              </a:ext>
-            </a:extLst>
-          </p:cNvPr>
-          <p:cNvSpPr>
-            <a:spLocks xmlns:a="http://schemas.openxmlformats.org/drawingml/2006/main" noGrp="1"/>
-          </p:cNvSpPr>
-          <p:nvPr/>
-        </p:nvSpPr>
-        <p:spPr>
-          <a:xfrm xmlns:a="http://schemas.openxmlformats.org/drawingml/2006/main">
-            <a:off x="6438900" y="2543175"/>
-            <a:ext cx="590550" cy="171450"/>
-          </a:xfrm>
-          <a:prstGeom xmlns:a="http://schemas.openxmlformats.org/drawingml/2006/main" prst="rect">
-            <a:avLst/>
-          </a:prstGeom>
-          <a:noFill xmlns:a="http://schemas.openxmlformats.org/drawingml/2006/main"/>
-          <a:ln xmlns:a="http://schemas.openxmlformats.org/drawingml/2006/main" w="0">
-            <a:noFill/>
-            <a:prstDash val="solid"/>
-          </a:ln>
-        </p:spPr>
-        <p:txBody>
-          <a:bodyPr xmlns:a="http://schemas.openxmlformats.org/drawingml/2006/main"/>
-          <a:lstStyle xmlns:a="http://schemas.openxmlformats.org/drawingml/2006/main"/>
-          <a:p xmlns:a="http://schemas.openxmlformats.org/drawingml/2006/main">
-            <a:pPr algn="l">
-              <a:defRPr sz="750" b="0">
-                <a:solidFill>
-                  <a:srgbClr val="000000"/>
-                </a:solidFill>
-              </a:defRPr>
-            </a:pPr>
-            <a:r>
-              <a:rPr sz="750" b="0">
-                <a:solidFill>
-                  <a:srgbClr val="000000"/>
-                </a:solidFill>
-              </a:rPr>
-              <a:t>0.184</a:t>
-            </a:r>
-          </a:p>
-        </p:txBody>
-      </p:sp>
-      <p:sp>
-        <p:nvSpPr>
-          <p:cNvPr id="45" name="">
-            <a:extLst xmlns:a="http://schemas.openxmlformats.org/drawingml/2006/main">
-              <a:ext uri="{FF2B5EF4-FFF2-40B4-BE49-F238E27FC236}">
-                <a16:creationId xmlns:a16="http://schemas.microsoft.com/office/drawing/2014/main" id="{733AF275-DA17-4D84-B336-070432A9DB6A}"/>
-              </a:ext>
-            </a:extLst>
-          </p:cNvPr>
-          <p:cNvSpPr>
-            <a:spLocks xmlns:a="http://schemas.openxmlformats.org/drawingml/2006/main" noGrp="1"/>
-          </p:cNvSpPr>
-          <p:nvPr/>
-        </p:nvSpPr>
-        <p:spPr>
-          <a:xfrm xmlns:a="http://schemas.openxmlformats.org/drawingml/2006/main">
-            <a:off x="7067550" y="2476500"/>
-            <a:ext cx="7144" cy="285750"/>
-          </a:xfrm>
-          <a:prstGeom xmlns:a="http://schemas.openxmlformats.org/drawingml/2006/main" prst="rect">
-            <a:avLst/>
-          </a:prstGeom>
-          <a:solidFill xmlns:a="http://schemas.openxmlformats.org/drawingml/2006/main">
-            <a:srgbClr val="8DAAC5"/>
-          </a:solidFill>
-          <a:ln xmlns:a="http://schemas.openxmlformats.org/drawingml/2006/main" w="0">
-            <a:noFill/>
-            <a:prstDash val="solid"/>
-          </a:ln>
-        </p:spPr>
-      </p:sp>
-      <p:sp>
-        <p:nvSpPr>
-          <p:cNvPr id="46" name="">
-            <a:extLst xmlns:a="http://schemas.openxmlformats.org/drawingml/2006/main">
-              <a:ext uri="{FF2B5EF4-FFF2-40B4-BE49-F238E27FC236}">
-                <a16:creationId xmlns:a16="http://schemas.microsoft.com/office/drawing/2014/main" id="{D43F5FB2-1CDD-42B6-8596-3338CBC133DC}"/>
-              </a:ext>
-            </a:extLst>
-          </p:cNvPr>
-          <p:cNvSpPr>
-            <a:spLocks xmlns:a="http://schemas.openxmlformats.org/drawingml/2006/main" noGrp="1"/>
-          </p:cNvSpPr>
-          <p:nvPr/>
-        </p:nvSpPr>
-        <p:spPr>
-          <a:xfrm xmlns:a="http://schemas.openxmlformats.org/drawingml/2006/main">
-            <a:off x="7124700" y="2543175"/>
-            <a:ext cx="1276350" cy="171450"/>
-          </a:xfrm>
-          <a:prstGeom xmlns:a="http://schemas.openxmlformats.org/drawingml/2006/main" prst="rect">
-            <a:avLst/>
-          </a:prstGeom>
-          <a:noFill xmlns:a="http://schemas.openxmlformats.org/drawingml/2006/main"/>
-          <a:ln xmlns:a="http://schemas.openxmlformats.org/drawingml/2006/main" w="0">
-            <a:noFill/>
-            <a:prstDash val="solid"/>
-          </a:ln>
-        </p:spPr>
-        <p:txBody>
-          <a:bodyPr xmlns:a="http://schemas.openxmlformats.org/drawingml/2006/main"/>
-          <a:lstStyle xmlns:a="http://schemas.openxmlformats.org/drawingml/2006/main"/>
-          <a:p xmlns:a="http://schemas.openxmlformats.org/drawingml/2006/main">
-            <a:pPr algn="l">
-              <a:defRPr sz="750" b="0">
-                <a:solidFill>
-                  <a:srgbClr val="000000"/>
-                </a:solidFill>
-              </a:defRPr>
-            </a:pPr>
-            <a:r>
-              <a:rPr sz="750" b="0">
-                <a:solidFill>
-                  <a:srgbClr val="000000"/>
-                </a:solidFill>
-              </a:rPr>
-              <a:t>simulator only</a:t>
-            </a:r>
-          </a:p>
-        </p:txBody>
-      </p:sp>
-      <p:sp>
-        <p:nvSpPr>
-          <p:cNvPr id="47" name="">
-            <a:extLst xmlns:a="http://schemas.openxmlformats.org/drawingml/2006/main">
-              <a:ext uri="{FF2B5EF4-FFF2-40B4-BE49-F238E27FC236}">
-                <a16:creationId xmlns:a16="http://schemas.microsoft.com/office/drawing/2014/main" id="{D2E190EC-ACF1-417F-80F8-B308A258A2D4}"/>
-              </a:ext>
-            </a:extLst>
-          </p:cNvPr>
-          <p:cNvSpPr>
-            <a:spLocks xmlns:a="http://schemas.openxmlformats.org/drawingml/2006/main" noGrp="1"/>
-          </p:cNvSpPr>
-          <p:nvPr/>
-        </p:nvSpPr>
-        <p:spPr>
-          <a:xfrm xmlns:a="http://schemas.openxmlformats.org/drawingml/2006/main">
-            <a:off x="4762500" y="3381375"/>
-            <a:ext cx="3524250" cy="571500"/>
-          </a:xfrm>
-          <a:prstGeom xmlns:a="http://schemas.openxmlformats.org/drawingml/2006/main" prst="rect">
-            <a:avLst/>
-          </a:prstGeom>
-          <a:noFill xmlns:a="http://schemas.openxmlformats.org/drawingml/2006/main"/>
-          <a:ln xmlns:a="http://schemas.openxmlformats.org/drawingml/2006/main" w="0">
-            <a:noFill/>
-            <a:prstDash val="solid"/>
-          </a:ln>
-        </p:spPr>
-        <p:txBody>
-          <a:bodyPr xmlns:a="http://schemas.openxmlformats.org/drawingml/2006/main"/>
-          <a:lstStyle xmlns:a="http://schemas.openxmlformats.org/drawingml/2006/main"/>
-          <a:p xmlns:a="http://schemas.openxmlformats.org/drawingml/2006/main">
-            <a:pPr algn="l">
-              <a:defRPr sz="1050" b="0">
-                <a:solidFill>
-                  <a:srgbClr val="000000"/>
-                </a:solidFill>
-              </a:defRPr>
-            </a:pPr>
-            <a:r>
-              <a:rPr sz="1050" b="0">
-                <a:solidFill>
-                  <a:srgbClr val="000000"/>
-                </a:solidFill>
-              </a:rPr>
-              <a:t>Read this as evidence triage, not a leaderboard. PPO is simulator-only; CQL is lower reward but more evaluable.</a:t>
+              <a:t>ESS shown for h = 0.05.</a:t>
             </a:r>
           </a:p>
         </p:txBody>
@@ -16589,7 +16104,12 @@
           <a:lstStyle xmlns:a="http://schemas.openxmlformats.org/drawingml/2006/main"/>
           <a:p xmlns:a="http://schemas.openxmlformats.org/drawingml/2006/main">
             <a:r>
-              <a:t>OPE is diagnostic because true logging propensities are unavailable.</a:t>
+              <a:t>Phase 1</a:t>
+            </a:r>
+          </a:p>
+          <a:p xmlns:a="http://schemas.openxmlformats.org/drawingml/2006/main">
+            <a:r>
+              <a:t>supervised acceptance model</a:t>
             </a:r>
           </a:p>
           <a:p xmlns:a="http://schemas.openxmlformats.org/drawingml/2006/main">
@@ -16599,7 +16119,12 @@
           </a:p>
           <a:p xmlns:a="http://schemas.openxmlformats.org/drawingml/2006/main">
             <a:r>
-              <a:t>The useful question is whether target actions have enough logged support.</a:t>
+              <a:t>Phase 2</a:t>
+            </a:r>
+          </a:p>
+          <a:p xmlns:a="http://schemas.openxmlformats.org/drawingml/2006/main">
+            <a:r>
+              <a:t>CQL offline RL, conservative under distribution shift</a:t>
             </a:r>
           </a:p>
           <a:p xmlns:a="http://schemas.openxmlformats.org/drawingml/2006/main">
@@ -16609,7 +16134,27 @@
           </a:p>
           <a:p xmlns:a="http://schemas.openxmlformats.org/drawingml/2006/main">
             <a:r>
-              <a:t>ESS makes unsupported extrapolation visible.</a:t>
+              <a:t>Phase 3</a:t>
+            </a:r>
+          </a:p>
+          <a:p xmlns:a="http://schemas.openxmlformats.org/drawingml/2006/main">
+            <a:r>
+              <a:t>PPO in a learned faithful simulator</a:t>
+            </a:r>
+          </a:p>
+          <a:p xmlns:a="http://schemas.openxmlformats.org/drawingml/2006/main">
+            <a:r>
+              <a:t/>
+            </a:r>
+          </a:p>
+          <a:p xmlns:a="http://schemas.openxmlformats.org/drawingml/2006/main">
+            <a:r>
+              <a:t>Evaluation</a:t>
+            </a:r>
+          </a:p>
+          <a:p xmlns:a="http://schemas.openxmlformats.org/drawingml/2006/main">
+            <a:r>
+              <a:t>report evidence type beside every number</a:t>
             </a:r>
           </a:p>
         </p:txBody>
@@ -16690,33 +16235,50 @@
           <a:lstStyle xmlns:a="http://schemas.openxmlformats.org/drawingml/2006/main"/>
           <a:p xmlns:a="http://schemas.openxmlformats.org/drawingml/2006/main">
             <a:r>
-              <a:t>How: OPE tests whether a policy is evaluable</a:t>
-            </a:r>
-          </a:p>
-        </p:txBody>
-      </p:sp>
-      <p:graphicFrame>
-        <p:nvGraphicFramePr>
-          <p:cNvPr id="13" name="Chart"/>
-          <p:cNvGraphicFramePr/>
+              <a:t>How: three model layers are compared</a:t>
+            </a:r>
+          </a:p>
+        </p:txBody>
+      </p:sp>
+      <p:sp>
+        <p:nvSpPr>
+          <p:cNvPr id="7" name="">
+            <a:extLst xmlns:a="http://schemas.openxmlformats.org/drawingml/2006/main">
+              <a:ext uri="{FF2B5EF4-FFF2-40B4-BE49-F238E27FC236}">
+                <a16:creationId xmlns:a16="http://schemas.microsoft.com/office/drawing/2014/main" id="{9EC0A1F4-9BA9-4D71-B7A3-448546C24A71}"/>
+              </a:ext>
+            </a:extLst>
+          </p:cNvPr>
+          <p:cNvSpPr>
+            <a:spLocks xmlns:a="http://schemas.openxmlformats.org/drawingml/2006/main" noGrp="1"/>
+          </p:cNvSpPr>
           <p:nvPr/>
-        </p:nvGraphicFramePr>
-        <p:xfrm>
-          <a:off xmlns:a="http://schemas.openxmlformats.org/drawingml/2006/main" x="4810125" y="1257300"/>
-          <a:ext xmlns:a="http://schemas.openxmlformats.org/drawingml/2006/main" cx="3524250" cy="2381250"/>
-        </p:xfrm>
-        <a:graphic xmlns:a="http://schemas.openxmlformats.org/drawingml/2006/main">
-          <a:graphicData uri="http://schemas.openxmlformats.org/drawingml/2006/chart">
-            <c:chart xmlns:r="http://schemas.openxmlformats.org/officeDocument/2006/relationships" xmlns:c="http://schemas.openxmlformats.org/drawingml/2006/chart" r:id="Rc63073dc0ac84d8e"/>
-          </a:graphicData>
-        </a:graphic>
-      </p:graphicFrame>
+        </p:nvSpPr>
+        <p:spPr>
+          <a:xfrm xmlns:a="http://schemas.openxmlformats.org/drawingml/2006/main">
+            <a:off x="4762500" y="1352550"/>
+            <a:ext cx="3676650" cy="266700"/>
+          </a:xfrm>
+          <a:prstGeom xmlns:a="http://schemas.openxmlformats.org/drawingml/2006/main" prst="rect">
+            <a:avLst/>
+          </a:prstGeom>
+          <a:solidFill xmlns:a="http://schemas.openxmlformats.org/drawingml/2006/main">
+            <a:srgbClr val="005293"/>
+          </a:solidFill>
+          <a:ln xmlns:a="http://schemas.openxmlformats.org/drawingml/2006/main" w="7144">
+            <a:solidFill>
+              <a:srgbClr val="8DAAC5"/>
+            </a:solidFill>
+            <a:prstDash val="solid"/>
+          </a:ln>
+        </p:spPr>
+      </p:sp>
       <p:sp>
         <p:nvSpPr>
           <p:cNvPr id="8" name="">
             <a:extLst xmlns:a="http://schemas.openxmlformats.org/drawingml/2006/main">
               <a:ext uri="{FF2B5EF4-FFF2-40B4-BE49-F238E27FC236}">
-                <a16:creationId xmlns:a16="http://schemas.microsoft.com/office/drawing/2014/main" id="{7ABE2744-2123-4663-8934-1DC8DFE92A4A}"/>
+                <a16:creationId xmlns:a16="http://schemas.microsoft.com/office/drawing/2014/main" id="{331C36F9-D11D-4E00-878F-D687D734E992}"/>
               </a:ext>
             </a:extLst>
           </p:cNvPr>
@@ -16727,8 +16289,8 @@
         </p:nvSpPr>
         <p:spPr>
           <a:xfrm xmlns:a="http://schemas.openxmlformats.org/drawingml/2006/main">
-            <a:off x="4857750" y="3771900"/>
-            <a:ext cx="3333750" cy="323850"/>
+            <a:off x="4819650" y="1409700"/>
+            <a:ext cx="781050" cy="171450"/>
           </a:xfrm>
           <a:prstGeom xmlns:a="http://schemas.openxmlformats.org/drawingml/2006/main" prst="rect">
             <a:avLst/>
@@ -16744,19 +16306,1616 @@
           <a:lstStyle xmlns:a="http://schemas.openxmlformats.org/drawingml/2006/main"/>
           <a:p xmlns:a="http://schemas.openxmlformats.org/drawingml/2006/main">
             <a:pPr algn="l">
-              <a:defRPr sz="1050" b="1">
+              <a:defRPr sz="788" b="1">
                 <a:solidFill>
-                  <a:srgbClr val="005293"/>
+                  <a:srgbClr val="FFFFFF"/>
                 </a:solidFill>
               </a:defRPr>
             </a:pPr>
             <a:r>
-              <a:rPr sz="1050" b="1">
+              <a:rPr sz="788" b="1">
                 <a:solidFill>
-                  <a:srgbClr val="005293"/>
+                  <a:srgbClr val="FFFFFF"/>
                 </a:solidFill>
               </a:rPr>
-              <a:t>At h = 0.05, CQL retains 36.2% effective support; greedy retains 0.8%.</a:t>
+              <a:t>Policy</a:t>
+            </a:r>
+          </a:p>
+        </p:txBody>
+      </p:sp>
+      <p:sp>
+        <p:nvSpPr>
+          <p:cNvPr id="9" name="">
+            <a:extLst xmlns:a="http://schemas.openxmlformats.org/drawingml/2006/main">
+              <a:ext uri="{FF2B5EF4-FFF2-40B4-BE49-F238E27FC236}">
+                <a16:creationId xmlns:a16="http://schemas.microsoft.com/office/drawing/2014/main" id="{B6E12695-3ADE-4F4F-B2A8-1280DDB33BB6}"/>
+              </a:ext>
+            </a:extLst>
+          </p:cNvPr>
+          <p:cNvSpPr>
+            <a:spLocks xmlns:a="http://schemas.openxmlformats.org/drawingml/2006/main" noGrp="1"/>
+          </p:cNvSpPr>
+          <p:nvPr/>
+        </p:nvSpPr>
+        <p:spPr>
+          <a:xfrm xmlns:a="http://schemas.openxmlformats.org/drawingml/2006/main">
+            <a:off x="5638800" y="1352550"/>
+            <a:ext cx="7144" cy="266700"/>
+          </a:xfrm>
+          <a:prstGeom xmlns:a="http://schemas.openxmlformats.org/drawingml/2006/main" prst="rect">
+            <a:avLst/>
+          </a:prstGeom>
+          <a:solidFill xmlns:a="http://schemas.openxmlformats.org/drawingml/2006/main">
+            <a:srgbClr val="8DAAC5"/>
+          </a:solidFill>
+          <a:ln xmlns:a="http://schemas.openxmlformats.org/drawingml/2006/main" w="0">
+            <a:noFill/>
+            <a:prstDash val="solid"/>
+          </a:ln>
+        </p:spPr>
+      </p:sp>
+      <p:sp>
+        <p:nvSpPr>
+          <p:cNvPr id="10" name="">
+            <a:extLst xmlns:a="http://schemas.openxmlformats.org/drawingml/2006/main">
+              <a:ext uri="{FF2B5EF4-FFF2-40B4-BE49-F238E27FC236}">
+                <a16:creationId xmlns:a16="http://schemas.microsoft.com/office/drawing/2014/main" id="{81ED31C0-A2C8-4EE0-B75C-27887C2414B1}"/>
+              </a:ext>
+            </a:extLst>
+          </p:cNvPr>
+          <p:cNvSpPr>
+            <a:spLocks xmlns:a="http://schemas.openxmlformats.org/drawingml/2006/main" noGrp="1"/>
+          </p:cNvSpPr>
+          <p:nvPr/>
+        </p:nvSpPr>
+        <p:spPr>
+          <a:xfrm xmlns:a="http://schemas.openxmlformats.org/drawingml/2006/main">
+            <a:off x="5695950" y="1409700"/>
+            <a:ext cx="647700" cy="171450"/>
+          </a:xfrm>
+          <a:prstGeom xmlns:a="http://schemas.openxmlformats.org/drawingml/2006/main" prst="rect">
+            <a:avLst/>
+          </a:prstGeom>
+          <a:noFill xmlns:a="http://schemas.openxmlformats.org/drawingml/2006/main"/>
+          <a:ln xmlns:a="http://schemas.openxmlformats.org/drawingml/2006/main" w="0">
+            <a:noFill/>
+            <a:prstDash val="solid"/>
+          </a:ln>
+        </p:spPr>
+        <p:txBody>
+          <a:bodyPr xmlns:a="http://schemas.openxmlformats.org/drawingml/2006/main"/>
+          <a:lstStyle xmlns:a="http://schemas.openxmlformats.org/drawingml/2006/main"/>
+          <a:p xmlns:a="http://schemas.openxmlformats.org/drawingml/2006/main">
+            <a:pPr algn="l">
+              <a:defRPr sz="788" b="1">
+                <a:solidFill>
+                  <a:srgbClr val="FFFFFF"/>
+                </a:solidFill>
+              </a:defRPr>
+            </a:pPr>
+            <a:r>
+              <a:rPr sz="788" b="1">
+                <a:solidFill>
+                  <a:srgbClr val="FFFFFF"/>
+                </a:solidFill>
+              </a:rPr>
+              <a:t>Evidence</a:t>
+            </a:r>
+          </a:p>
+        </p:txBody>
+      </p:sp>
+      <p:sp>
+        <p:nvSpPr>
+          <p:cNvPr id="11" name="">
+            <a:extLst xmlns:a="http://schemas.openxmlformats.org/drawingml/2006/main">
+              <a:ext uri="{FF2B5EF4-FFF2-40B4-BE49-F238E27FC236}">
+                <a16:creationId xmlns:a16="http://schemas.microsoft.com/office/drawing/2014/main" id="{BFA76A8A-E07C-4257-8BA7-9DC80145C256}"/>
+              </a:ext>
+            </a:extLst>
+          </p:cNvPr>
+          <p:cNvSpPr>
+            <a:spLocks xmlns:a="http://schemas.openxmlformats.org/drawingml/2006/main" noGrp="1"/>
+          </p:cNvSpPr>
+          <p:nvPr/>
+        </p:nvSpPr>
+        <p:spPr>
+          <a:xfrm xmlns:a="http://schemas.openxmlformats.org/drawingml/2006/main">
+            <a:off x="6381750" y="1352550"/>
+            <a:ext cx="7144" cy="266700"/>
+          </a:xfrm>
+          <a:prstGeom xmlns:a="http://schemas.openxmlformats.org/drawingml/2006/main" prst="rect">
+            <a:avLst/>
+          </a:prstGeom>
+          <a:solidFill xmlns:a="http://schemas.openxmlformats.org/drawingml/2006/main">
+            <a:srgbClr val="8DAAC5"/>
+          </a:solidFill>
+          <a:ln xmlns:a="http://schemas.openxmlformats.org/drawingml/2006/main" w="0">
+            <a:noFill/>
+            <a:prstDash val="solid"/>
+          </a:ln>
+        </p:spPr>
+      </p:sp>
+      <p:sp>
+        <p:nvSpPr>
+          <p:cNvPr id="12" name="">
+            <a:extLst xmlns:a="http://schemas.openxmlformats.org/drawingml/2006/main">
+              <a:ext uri="{FF2B5EF4-FFF2-40B4-BE49-F238E27FC236}">
+                <a16:creationId xmlns:a16="http://schemas.microsoft.com/office/drawing/2014/main" id="{199D8B93-65B0-489D-8F13-5E0F5696D81C}"/>
+              </a:ext>
+            </a:extLst>
+          </p:cNvPr>
+          <p:cNvSpPr>
+            <a:spLocks xmlns:a="http://schemas.openxmlformats.org/drawingml/2006/main" noGrp="1"/>
+          </p:cNvSpPr>
+          <p:nvPr/>
+        </p:nvSpPr>
+        <p:spPr>
+          <a:xfrm xmlns:a="http://schemas.openxmlformats.org/drawingml/2006/main">
+            <a:off x="6438900" y="1409700"/>
+            <a:ext cx="590550" cy="171450"/>
+          </a:xfrm>
+          <a:prstGeom xmlns:a="http://schemas.openxmlformats.org/drawingml/2006/main" prst="rect">
+            <a:avLst/>
+          </a:prstGeom>
+          <a:noFill xmlns:a="http://schemas.openxmlformats.org/drawingml/2006/main"/>
+          <a:ln xmlns:a="http://schemas.openxmlformats.org/drawingml/2006/main" w="0">
+            <a:noFill/>
+            <a:prstDash val="solid"/>
+          </a:ln>
+        </p:spPr>
+        <p:txBody>
+          <a:bodyPr xmlns:a="http://schemas.openxmlformats.org/drawingml/2006/main"/>
+          <a:lstStyle xmlns:a="http://schemas.openxmlformats.org/drawingml/2006/main"/>
+          <a:p xmlns:a="http://schemas.openxmlformats.org/drawingml/2006/main">
+            <a:pPr algn="l">
+              <a:defRPr sz="788" b="1">
+                <a:solidFill>
+                  <a:srgbClr val="FFFFFF"/>
+                </a:solidFill>
+              </a:defRPr>
+            </a:pPr>
+            <a:r>
+              <a:rPr sz="788" b="1">
+                <a:solidFill>
+                  <a:srgbClr val="FFFFFF"/>
+                </a:solidFill>
+              </a:rPr>
+              <a:t>Savings</a:t>
+            </a:r>
+          </a:p>
+        </p:txBody>
+      </p:sp>
+      <p:sp>
+        <p:nvSpPr>
+          <p:cNvPr id="13" name="">
+            <a:extLst xmlns:a="http://schemas.openxmlformats.org/drawingml/2006/main">
+              <a:ext uri="{FF2B5EF4-FFF2-40B4-BE49-F238E27FC236}">
+                <a16:creationId xmlns:a16="http://schemas.microsoft.com/office/drawing/2014/main" id="{08A2F879-6CF6-4D3C-8EB2-CDD4A2663B0F}"/>
+              </a:ext>
+            </a:extLst>
+          </p:cNvPr>
+          <p:cNvSpPr>
+            <a:spLocks xmlns:a="http://schemas.openxmlformats.org/drawingml/2006/main" noGrp="1"/>
+          </p:cNvSpPr>
+          <p:nvPr/>
+        </p:nvSpPr>
+        <p:spPr>
+          <a:xfrm xmlns:a="http://schemas.openxmlformats.org/drawingml/2006/main">
+            <a:off x="7067550" y="1352550"/>
+            <a:ext cx="7144" cy="266700"/>
+          </a:xfrm>
+          <a:prstGeom xmlns:a="http://schemas.openxmlformats.org/drawingml/2006/main" prst="rect">
+            <a:avLst/>
+          </a:prstGeom>
+          <a:solidFill xmlns:a="http://schemas.openxmlformats.org/drawingml/2006/main">
+            <a:srgbClr val="8DAAC5"/>
+          </a:solidFill>
+          <a:ln xmlns:a="http://schemas.openxmlformats.org/drawingml/2006/main" w="0">
+            <a:noFill/>
+            <a:prstDash val="solid"/>
+          </a:ln>
+        </p:spPr>
+      </p:sp>
+      <p:sp>
+        <p:nvSpPr>
+          <p:cNvPr id="14" name="">
+            <a:extLst xmlns:a="http://schemas.openxmlformats.org/drawingml/2006/main">
+              <a:ext uri="{FF2B5EF4-FFF2-40B4-BE49-F238E27FC236}">
+                <a16:creationId xmlns:a16="http://schemas.microsoft.com/office/drawing/2014/main" id="{2752BEE1-FFD2-411C-B0B4-3CC70222C8BC}"/>
+              </a:ext>
+            </a:extLst>
+          </p:cNvPr>
+          <p:cNvSpPr>
+            <a:spLocks xmlns:a="http://schemas.openxmlformats.org/drawingml/2006/main" noGrp="1"/>
+          </p:cNvSpPr>
+          <p:nvPr/>
+        </p:nvSpPr>
+        <p:spPr>
+          <a:xfrm xmlns:a="http://schemas.openxmlformats.org/drawingml/2006/main">
+            <a:off x="7124700" y="1409700"/>
+            <a:ext cx="1276350" cy="171450"/>
+          </a:xfrm>
+          <a:prstGeom xmlns:a="http://schemas.openxmlformats.org/drawingml/2006/main" prst="rect">
+            <a:avLst/>
+          </a:prstGeom>
+          <a:noFill xmlns:a="http://schemas.openxmlformats.org/drawingml/2006/main"/>
+          <a:ln xmlns:a="http://schemas.openxmlformats.org/drawingml/2006/main" w="0">
+            <a:noFill/>
+            <a:prstDash val="solid"/>
+          </a:ln>
+        </p:spPr>
+        <p:txBody>
+          <a:bodyPr xmlns:a="http://schemas.openxmlformats.org/drawingml/2006/main"/>
+          <a:lstStyle xmlns:a="http://schemas.openxmlformats.org/drawingml/2006/main"/>
+          <a:p xmlns:a="http://schemas.openxmlformats.org/drawingml/2006/main">
+            <a:pPr algn="l">
+              <a:defRPr sz="788" b="1">
+                <a:solidFill>
+                  <a:srgbClr val="FFFFFF"/>
+                </a:solidFill>
+              </a:defRPr>
+            </a:pPr>
+            <a:r>
+              <a:rPr sz="788" b="1">
+                <a:solidFill>
+                  <a:srgbClr val="FFFFFF"/>
+                </a:solidFill>
+              </a:rPr>
+              <a:t>Support read</a:t>
+            </a:r>
+          </a:p>
+        </p:txBody>
+      </p:sp>
+      <p:sp>
+        <p:nvSpPr>
+          <p:cNvPr id="15" name="">
+            <a:extLst xmlns:a="http://schemas.openxmlformats.org/drawingml/2006/main">
+              <a:ext uri="{FF2B5EF4-FFF2-40B4-BE49-F238E27FC236}">
+                <a16:creationId xmlns:a16="http://schemas.microsoft.com/office/drawing/2014/main" id="{35D03AFE-B15D-4A96-80FA-48440317CC8B}"/>
+              </a:ext>
+            </a:extLst>
+          </p:cNvPr>
+          <p:cNvSpPr>
+            <a:spLocks xmlns:a="http://schemas.openxmlformats.org/drawingml/2006/main" noGrp="1"/>
+          </p:cNvSpPr>
+          <p:nvPr/>
+        </p:nvSpPr>
+        <p:spPr>
+          <a:xfrm xmlns:a="http://schemas.openxmlformats.org/drawingml/2006/main">
+            <a:off x="4762500" y="1619250"/>
+            <a:ext cx="3676650" cy="285750"/>
+          </a:xfrm>
+          <a:prstGeom xmlns:a="http://schemas.openxmlformats.org/drawingml/2006/main" prst="rect">
+            <a:avLst/>
+          </a:prstGeom>
+          <a:solidFill xmlns:a="http://schemas.openxmlformats.org/drawingml/2006/main">
+            <a:srgbClr val="FFFFFF"/>
+          </a:solidFill>
+          <a:ln xmlns:a="http://schemas.openxmlformats.org/drawingml/2006/main" w="7144">
+            <a:solidFill>
+              <a:srgbClr val="8DAAC5"/>
+            </a:solidFill>
+            <a:prstDash val="solid"/>
+          </a:ln>
+        </p:spPr>
+      </p:sp>
+      <p:sp>
+        <p:nvSpPr>
+          <p:cNvPr id="16" name="">
+            <a:extLst xmlns:a="http://schemas.openxmlformats.org/drawingml/2006/main">
+              <a:ext uri="{FF2B5EF4-FFF2-40B4-BE49-F238E27FC236}">
+                <a16:creationId xmlns:a16="http://schemas.microsoft.com/office/drawing/2014/main" id="{85279771-FF5A-4560-9A39-90452B648EBD}"/>
+              </a:ext>
+            </a:extLst>
+          </p:cNvPr>
+          <p:cNvSpPr>
+            <a:spLocks xmlns:a="http://schemas.openxmlformats.org/drawingml/2006/main" noGrp="1"/>
+          </p:cNvSpPr>
+          <p:nvPr/>
+        </p:nvSpPr>
+        <p:spPr>
+          <a:xfrm xmlns:a="http://schemas.openxmlformats.org/drawingml/2006/main">
+            <a:off x="4819650" y="1685925"/>
+            <a:ext cx="781050" cy="171450"/>
+          </a:xfrm>
+          <a:prstGeom xmlns:a="http://schemas.openxmlformats.org/drawingml/2006/main" prst="rect">
+            <a:avLst/>
+          </a:prstGeom>
+          <a:noFill xmlns:a="http://schemas.openxmlformats.org/drawingml/2006/main"/>
+          <a:ln xmlns:a="http://schemas.openxmlformats.org/drawingml/2006/main" w="0">
+            <a:noFill/>
+            <a:prstDash val="solid"/>
+          </a:ln>
+        </p:spPr>
+        <p:txBody>
+          <a:bodyPr xmlns:a="http://schemas.openxmlformats.org/drawingml/2006/main"/>
+          <a:lstStyle xmlns:a="http://schemas.openxmlformats.org/drawingml/2006/main"/>
+          <a:p xmlns:a="http://schemas.openxmlformats.org/drawingml/2006/main">
+            <a:pPr algn="l">
+              <a:defRPr sz="750" b="0">
+                <a:solidFill>
+                  <a:srgbClr val="000000"/>
+                </a:solidFill>
+              </a:defRPr>
+            </a:pPr>
+            <a:r>
+              <a:rPr sz="750" b="0">
+                <a:solidFill>
+                  <a:srgbClr val="000000"/>
+                </a:solidFill>
+              </a:rPr>
+              <a:t>Behavior</a:t>
+            </a:r>
+          </a:p>
+        </p:txBody>
+      </p:sp>
+      <p:sp>
+        <p:nvSpPr>
+          <p:cNvPr id="17" name="">
+            <a:extLst xmlns:a="http://schemas.openxmlformats.org/drawingml/2006/main">
+              <a:ext uri="{FF2B5EF4-FFF2-40B4-BE49-F238E27FC236}">
+                <a16:creationId xmlns:a16="http://schemas.microsoft.com/office/drawing/2014/main" id="{8909C49C-358A-43D2-A685-C8EFE47D4FC1}"/>
+              </a:ext>
+            </a:extLst>
+          </p:cNvPr>
+          <p:cNvSpPr>
+            <a:spLocks xmlns:a="http://schemas.openxmlformats.org/drawingml/2006/main" noGrp="1"/>
+          </p:cNvSpPr>
+          <p:nvPr/>
+        </p:nvSpPr>
+        <p:spPr>
+          <a:xfrm xmlns:a="http://schemas.openxmlformats.org/drawingml/2006/main">
+            <a:off x="5638800" y="1619250"/>
+            <a:ext cx="7144" cy="285750"/>
+          </a:xfrm>
+          <a:prstGeom xmlns:a="http://schemas.openxmlformats.org/drawingml/2006/main" prst="rect">
+            <a:avLst/>
+          </a:prstGeom>
+          <a:solidFill xmlns:a="http://schemas.openxmlformats.org/drawingml/2006/main">
+            <a:srgbClr val="8DAAC5"/>
+          </a:solidFill>
+          <a:ln xmlns:a="http://schemas.openxmlformats.org/drawingml/2006/main" w="0">
+            <a:noFill/>
+            <a:prstDash val="solid"/>
+          </a:ln>
+        </p:spPr>
+      </p:sp>
+      <p:sp>
+        <p:nvSpPr>
+          <p:cNvPr id="18" name="">
+            <a:extLst xmlns:a="http://schemas.openxmlformats.org/drawingml/2006/main">
+              <a:ext uri="{FF2B5EF4-FFF2-40B4-BE49-F238E27FC236}">
+                <a16:creationId xmlns:a16="http://schemas.microsoft.com/office/drawing/2014/main" id="{0F54A0EE-FE56-4375-8CC7-C55490E1FC8D}"/>
+              </a:ext>
+            </a:extLst>
+          </p:cNvPr>
+          <p:cNvSpPr>
+            <a:spLocks xmlns:a="http://schemas.openxmlformats.org/drawingml/2006/main" noGrp="1"/>
+          </p:cNvSpPr>
+          <p:nvPr/>
+        </p:nvSpPr>
+        <p:spPr>
+          <a:xfrm xmlns:a="http://schemas.openxmlformats.org/drawingml/2006/main">
+            <a:off x="5695950" y="1685925"/>
+            <a:ext cx="647700" cy="171450"/>
+          </a:xfrm>
+          <a:prstGeom xmlns:a="http://schemas.openxmlformats.org/drawingml/2006/main" prst="rect">
+            <a:avLst/>
+          </a:prstGeom>
+          <a:noFill xmlns:a="http://schemas.openxmlformats.org/drawingml/2006/main"/>
+          <a:ln xmlns:a="http://schemas.openxmlformats.org/drawingml/2006/main" w="0">
+            <a:noFill/>
+            <a:prstDash val="solid"/>
+          </a:ln>
+        </p:spPr>
+        <p:txBody>
+          <a:bodyPr xmlns:a="http://schemas.openxmlformats.org/drawingml/2006/main"/>
+          <a:lstStyle xmlns:a="http://schemas.openxmlformats.org/drawingml/2006/main"/>
+          <a:p xmlns:a="http://schemas.openxmlformats.org/drawingml/2006/main">
+            <a:pPr algn="l">
+              <a:defRPr sz="750" b="0">
+                <a:solidFill>
+                  <a:srgbClr val="000000"/>
+                </a:solidFill>
+              </a:defRPr>
+            </a:pPr>
+            <a:r>
+              <a:rPr sz="750" b="0">
+                <a:solidFill>
+                  <a:srgbClr val="000000"/>
+                </a:solidFill>
+              </a:rPr>
+              <a:t>observed</a:t>
+            </a:r>
+          </a:p>
+        </p:txBody>
+      </p:sp>
+      <p:sp>
+        <p:nvSpPr>
+          <p:cNvPr id="19" name="">
+            <a:extLst xmlns:a="http://schemas.openxmlformats.org/drawingml/2006/main">
+              <a:ext uri="{FF2B5EF4-FFF2-40B4-BE49-F238E27FC236}">
+                <a16:creationId xmlns:a16="http://schemas.microsoft.com/office/drawing/2014/main" id="{C29F6021-7292-4455-BE25-03467519F300}"/>
+              </a:ext>
+            </a:extLst>
+          </p:cNvPr>
+          <p:cNvSpPr>
+            <a:spLocks xmlns:a="http://schemas.openxmlformats.org/drawingml/2006/main" noGrp="1"/>
+          </p:cNvSpPr>
+          <p:nvPr/>
+        </p:nvSpPr>
+        <p:spPr>
+          <a:xfrm xmlns:a="http://schemas.openxmlformats.org/drawingml/2006/main">
+            <a:off x="6381750" y="1619250"/>
+            <a:ext cx="7144" cy="285750"/>
+          </a:xfrm>
+          <a:prstGeom xmlns:a="http://schemas.openxmlformats.org/drawingml/2006/main" prst="rect">
+            <a:avLst/>
+          </a:prstGeom>
+          <a:solidFill xmlns:a="http://schemas.openxmlformats.org/drawingml/2006/main">
+            <a:srgbClr val="8DAAC5"/>
+          </a:solidFill>
+          <a:ln xmlns:a="http://schemas.openxmlformats.org/drawingml/2006/main" w="0">
+            <a:noFill/>
+            <a:prstDash val="solid"/>
+          </a:ln>
+        </p:spPr>
+      </p:sp>
+      <p:sp>
+        <p:nvSpPr>
+          <p:cNvPr id="20" name="">
+            <a:extLst xmlns:a="http://schemas.openxmlformats.org/drawingml/2006/main">
+              <a:ext uri="{FF2B5EF4-FFF2-40B4-BE49-F238E27FC236}">
+                <a16:creationId xmlns:a16="http://schemas.microsoft.com/office/drawing/2014/main" id="{8A6EE0A8-1969-4FF8-B803-D932FD516C3D}"/>
+              </a:ext>
+            </a:extLst>
+          </p:cNvPr>
+          <p:cNvSpPr>
+            <a:spLocks xmlns:a="http://schemas.openxmlformats.org/drawingml/2006/main" noGrp="1"/>
+          </p:cNvSpPr>
+          <p:nvPr/>
+        </p:nvSpPr>
+        <p:spPr>
+          <a:xfrm xmlns:a="http://schemas.openxmlformats.org/drawingml/2006/main">
+            <a:off x="6438900" y="1685925"/>
+            <a:ext cx="590550" cy="171450"/>
+          </a:xfrm>
+          <a:prstGeom xmlns:a="http://schemas.openxmlformats.org/drawingml/2006/main" prst="rect">
+            <a:avLst/>
+          </a:prstGeom>
+          <a:noFill xmlns:a="http://schemas.openxmlformats.org/drawingml/2006/main"/>
+          <a:ln xmlns:a="http://schemas.openxmlformats.org/drawingml/2006/main" w="0">
+            <a:noFill/>
+            <a:prstDash val="solid"/>
+          </a:ln>
+        </p:spPr>
+        <p:txBody>
+          <a:bodyPr xmlns:a="http://schemas.openxmlformats.org/drawingml/2006/main"/>
+          <a:lstStyle xmlns:a="http://schemas.openxmlformats.org/drawingml/2006/main"/>
+          <a:p xmlns:a="http://schemas.openxmlformats.org/drawingml/2006/main">
+            <a:pPr algn="l">
+              <a:defRPr sz="750" b="0">
+                <a:solidFill>
+                  <a:srgbClr val="000000"/>
+                </a:solidFill>
+              </a:defRPr>
+            </a:pPr>
+            <a:r>
+              <a:rPr sz="750" b="0">
+                <a:solidFill>
+                  <a:srgbClr val="000000"/>
+                </a:solidFill>
+              </a:rPr>
+              <a:t>0.050</a:t>
+            </a:r>
+          </a:p>
+        </p:txBody>
+      </p:sp>
+      <p:sp>
+        <p:nvSpPr>
+          <p:cNvPr id="21" name="">
+            <a:extLst xmlns:a="http://schemas.openxmlformats.org/drawingml/2006/main">
+              <a:ext uri="{FF2B5EF4-FFF2-40B4-BE49-F238E27FC236}">
+                <a16:creationId xmlns:a16="http://schemas.microsoft.com/office/drawing/2014/main" id="{6E6A5AF8-A8E7-4D6C-9D17-60E19DB8FEFA}"/>
+              </a:ext>
+            </a:extLst>
+          </p:cNvPr>
+          <p:cNvSpPr>
+            <a:spLocks xmlns:a="http://schemas.openxmlformats.org/drawingml/2006/main" noGrp="1"/>
+          </p:cNvSpPr>
+          <p:nvPr/>
+        </p:nvSpPr>
+        <p:spPr>
+          <a:xfrm xmlns:a="http://schemas.openxmlformats.org/drawingml/2006/main">
+            <a:off x="7067550" y="1619250"/>
+            <a:ext cx="7144" cy="285750"/>
+          </a:xfrm>
+          <a:prstGeom xmlns:a="http://schemas.openxmlformats.org/drawingml/2006/main" prst="rect">
+            <a:avLst/>
+          </a:prstGeom>
+          <a:solidFill xmlns:a="http://schemas.openxmlformats.org/drawingml/2006/main">
+            <a:srgbClr val="8DAAC5"/>
+          </a:solidFill>
+          <a:ln xmlns:a="http://schemas.openxmlformats.org/drawingml/2006/main" w="0">
+            <a:noFill/>
+            <a:prstDash val="solid"/>
+          </a:ln>
+        </p:spPr>
+      </p:sp>
+      <p:sp>
+        <p:nvSpPr>
+          <p:cNvPr id="22" name="">
+            <a:extLst xmlns:a="http://schemas.openxmlformats.org/drawingml/2006/main">
+              <a:ext uri="{FF2B5EF4-FFF2-40B4-BE49-F238E27FC236}">
+                <a16:creationId xmlns:a16="http://schemas.microsoft.com/office/drawing/2014/main" id="{79BB99A4-6687-4BBC-8363-A4A1BA5DA61B}"/>
+              </a:ext>
+            </a:extLst>
+          </p:cNvPr>
+          <p:cNvSpPr>
+            <a:spLocks xmlns:a="http://schemas.openxmlformats.org/drawingml/2006/main" noGrp="1"/>
+          </p:cNvSpPr>
+          <p:nvPr/>
+        </p:nvSpPr>
+        <p:spPr>
+          <a:xfrm xmlns:a="http://schemas.openxmlformats.org/drawingml/2006/main">
+            <a:off x="7124700" y="1685925"/>
+            <a:ext cx="1276350" cy="171450"/>
+          </a:xfrm>
+          <a:prstGeom xmlns:a="http://schemas.openxmlformats.org/drawingml/2006/main" prst="rect">
+            <a:avLst/>
+          </a:prstGeom>
+          <a:noFill xmlns:a="http://schemas.openxmlformats.org/drawingml/2006/main"/>
+          <a:ln xmlns:a="http://schemas.openxmlformats.org/drawingml/2006/main" w="0">
+            <a:noFill/>
+            <a:prstDash val="solid"/>
+          </a:ln>
+        </p:spPr>
+        <p:txBody>
+          <a:bodyPr xmlns:a="http://schemas.openxmlformats.org/drawingml/2006/main"/>
+          <a:lstStyle xmlns:a="http://schemas.openxmlformats.org/drawingml/2006/main"/>
+          <a:p xmlns:a="http://schemas.openxmlformats.org/drawingml/2006/main">
+            <a:pPr algn="l">
+              <a:defRPr sz="750" b="0">
+                <a:solidFill>
+                  <a:srgbClr val="000000"/>
+                </a:solidFill>
+              </a:defRPr>
+            </a:pPr>
+            <a:r>
+              <a:rPr sz="750" b="0">
+                <a:solidFill>
+                  <a:srgbClr val="000000"/>
+                </a:solidFill>
+              </a:rPr>
+              <a:t>logged baseline</a:t>
+            </a:r>
+          </a:p>
+        </p:txBody>
+      </p:sp>
+      <p:sp>
+        <p:nvSpPr>
+          <p:cNvPr id="23" name="">
+            <a:extLst xmlns:a="http://schemas.openxmlformats.org/drawingml/2006/main">
+              <a:ext uri="{FF2B5EF4-FFF2-40B4-BE49-F238E27FC236}">
+                <a16:creationId xmlns:a16="http://schemas.microsoft.com/office/drawing/2014/main" id="{7F56E3FC-B695-4938-8C07-E7DC47DCBAA6}"/>
+              </a:ext>
+            </a:extLst>
+          </p:cNvPr>
+          <p:cNvSpPr>
+            <a:spLocks xmlns:a="http://schemas.openxmlformats.org/drawingml/2006/main" noGrp="1"/>
+          </p:cNvSpPr>
+          <p:nvPr/>
+        </p:nvSpPr>
+        <p:spPr>
+          <a:xfrm xmlns:a="http://schemas.openxmlformats.org/drawingml/2006/main">
+            <a:off x="4762500" y="1905000"/>
+            <a:ext cx="3676650" cy="285750"/>
+          </a:xfrm>
+          <a:prstGeom xmlns:a="http://schemas.openxmlformats.org/drawingml/2006/main" prst="rect">
+            <a:avLst/>
+          </a:prstGeom>
+          <a:solidFill xmlns:a="http://schemas.openxmlformats.org/drawingml/2006/main">
+            <a:srgbClr val="FFFFFF"/>
+          </a:solidFill>
+          <a:ln xmlns:a="http://schemas.openxmlformats.org/drawingml/2006/main" w="7144">
+            <a:solidFill>
+              <a:srgbClr val="8DAAC5"/>
+            </a:solidFill>
+            <a:prstDash val="solid"/>
+          </a:ln>
+        </p:spPr>
+      </p:sp>
+      <p:sp>
+        <p:nvSpPr>
+          <p:cNvPr id="24" name="">
+            <a:extLst xmlns:a="http://schemas.openxmlformats.org/drawingml/2006/main">
+              <a:ext uri="{FF2B5EF4-FFF2-40B4-BE49-F238E27FC236}">
+                <a16:creationId xmlns:a16="http://schemas.microsoft.com/office/drawing/2014/main" id="{3108DABD-C96E-4732-A950-BA574AF15555}"/>
+              </a:ext>
+            </a:extLst>
+          </p:cNvPr>
+          <p:cNvSpPr>
+            <a:spLocks xmlns:a="http://schemas.openxmlformats.org/drawingml/2006/main" noGrp="1"/>
+          </p:cNvSpPr>
+          <p:nvPr/>
+        </p:nvSpPr>
+        <p:spPr>
+          <a:xfrm xmlns:a="http://schemas.openxmlformats.org/drawingml/2006/main">
+            <a:off x="4819650" y="1971675"/>
+            <a:ext cx="781050" cy="171450"/>
+          </a:xfrm>
+          <a:prstGeom xmlns:a="http://schemas.openxmlformats.org/drawingml/2006/main" prst="rect">
+            <a:avLst/>
+          </a:prstGeom>
+          <a:noFill xmlns:a="http://schemas.openxmlformats.org/drawingml/2006/main"/>
+          <a:ln xmlns:a="http://schemas.openxmlformats.org/drawingml/2006/main" w="0">
+            <a:noFill/>
+            <a:prstDash val="solid"/>
+          </a:ln>
+        </p:spPr>
+        <p:txBody>
+          <a:bodyPr xmlns:a="http://schemas.openxmlformats.org/drawingml/2006/main"/>
+          <a:lstStyle xmlns:a="http://schemas.openxmlformats.org/drawingml/2006/main"/>
+          <a:p xmlns:a="http://schemas.openxmlformats.org/drawingml/2006/main">
+            <a:pPr algn="l">
+              <a:defRPr sz="750" b="0">
+                <a:solidFill>
+                  <a:srgbClr val="000000"/>
+                </a:solidFill>
+              </a:defRPr>
+            </a:pPr>
+            <a:r>
+              <a:rPr sz="750" b="0">
+                <a:solidFill>
+                  <a:srgbClr val="000000"/>
+                </a:solidFill>
+              </a:rPr>
+              <a:t>Greedy</a:t>
+            </a:r>
+          </a:p>
+        </p:txBody>
+      </p:sp>
+      <p:sp>
+        <p:nvSpPr>
+          <p:cNvPr id="25" name="">
+            <a:extLst xmlns:a="http://schemas.openxmlformats.org/drawingml/2006/main">
+              <a:ext uri="{FF2B5EF4-FFF2-40B4-BE49-F238E27FC236}">
+                <a16:creationId xmlns:a16="http://schemas.microsoft.com/office/drawing/2014/main" id="{D96D759A-C946-4286-AB86-C78F2E83073D}"/>
+              </a:ext>
+            </a:extLst>
+          </p:cNvPr>
+          <p:cNvSpPr>
+            <a:spLocks xmlns:a="http://schemas.openxmlformats.org/drawingml/2006/main" noGrp="1"/>
+          </p:cNvSpPr>
+          <p:nvPr/>
+        </p:nvSpPr>
+        <p:spPr>
+          <a:xfrm xmlns:a="http://schemas.openxmlformats.org/drawingml/2006/main">
+            <a:off x="5638800" y="1905000"/>
+            <a:ext cx="7144" cy="285750"/>
+          </a:xfrm>
+          <a:prstGeom xmlns:a="http://schemas.openxmlformats.org/drawingml/2006/main" prst="rect">
+            <a:avLst/>
+          </a:prstGeom>
+          <a:solidFill xmlns:a="http://schemas.openxmlformats.org/drawingml/2006/main">
+            <a:srgbClr val="8DAAC5"/>
+          </a:solidFill>
+          <a:ln xmlns:a="http://schemas.openxmlformats.org/drawingml/2006/main" w="0">
+            <a:noFill/>
+            <a:prstDash val="solid"/>
+          </a:ln>
+        </p:spPr>
+      </p:sp>
+      <p:sp>
+        <p:nvSpPr>
+          <p:cNvPr id="26" name="">
+            <a:extLst xmlns:a="http://schemas.openxmlformats.org/drawingml/2006/main">
+              <a:ext uri="{FF2B5EF4-FFF2-40B4-BE49-F238E27FC236}">
+                <a16:creationId xmlns:a16="http://schemas.microsoft.com/office/drawing/2014/main" id="{C4F03E6D-0BDB-4EE7-8083-EAA50CE88C72}"/>
+              </a:ext>
+            </a:extLst>
+          </p:cNvPr>
+          <p:cNvSpPr>
+            <a:spLocks xmlns:a="http://schemas.openxmlformats.org/drawingml/2006/main" noGrp="1"/>
+          </p:cNvSpPr>
+          <p:nvPr/>
+        </p:nvSpPr>
+        <p:spPr>
+          <a:xfrm xmlns:a="http://schemas.openxmlformats.org/drawingml/2006/main">
+            <a:off x="5695950" y="1971675"/>
+            <a:ext cx="647700" cy="171450"/>
+          </a:xfrm>
+          <a:prstGeom xmlns:a="http://schemas.openxmlformats.org/drawingml/2006/main" prst="rect">
+            <a:avLst/>
+          </a:prstGeom>
+          <a:noFill xmlns:a="http://schemas.openxmlformats.org/drawingml/2006/main"/>
+          <a:ln xmlns:a="http://schemas.openxmlformats.org/drawingml/2006/main" w="0">
+            <a:noFill/>
+            <a:prstDash val="solid"/>
+          </a:ln>
+        </p:spPr>
+        <p:txBody>
+          <a:bodyPr xmlns:a="http://schemas.openxmlformats.org/drawingml/2006/main"/>
+          <a:lstStyle xmlns:a="http://schemas.openxmlformats.org/drawingml/2006/main"/>
+          <a:p xmlns:a="http://schemas.openxmlformats.org/drawingml/2006/main">
+            <a:pPr algn="l">
+              <a:defRPr sz="750" b="0">
+                <a:solidFill>
+                  <a:srgbClr val="000000"/>
+                </a:solidFill>
+              </a:defRPr>
+            </a:pPr>
+            <a:r>
+              <a:rPr sz="750" b="0">
+                <a:solidFill>
+                  <a:srgbClr val="000000"/>
+                </a:solidFill>
+              </a:rPr>
+              <a:t>model</a:t>
+            </a:r>
+          </a:p>
+        </p:txBody>
+      </p:sp>
+      <p:sp>
+        <p:nvSpPr>
+          <p:cNvPr id="27" name="">
+            <a:extLst xmlns:a="http://schemas.openxmlformats.org/drawingml/2006/main">
+              <a:ext uri="{FF2B5EF4-FFF2-40B4-BE49-F238E27FC236}">
+                <a16:creationId xmlns:a16="http://schemas.microsoft.com/office/drawing/2014/main" id="{3FBD7A2C-73E7-446B-A891-DF7BA205452C}"/>
+              </a:ext>
+            </a:extLst>
+          </p:cNvPr>
+          <p:cNvSpPr>
+            <a:spLocks xmlns:a="http://schemas.openxmlformats.org/drawingml/2006/main" noGrp="1"/>
+          </p:cNvSpPr>
+          <p:nvPr/>
+        </p:nvSpPr>
+        <p:spPr>
+          <a:xfrm xmlns:a="http://schemas.openxmlformats.org/drawingml/2006/main">
+            <a:off x="6381750" y="1905000"/>
+            <a:ext cx="7144" cy="285750"/>
+          </a:xfrm>
+          <a:prstGeom xmlns:a="http://schemas.openxmlformats.org/drawingml/2006/main" prst="rect">
+            <a:avLst/>
+          </a:prstGeom>
+          <a:solidFill xmlns:a="http://schemas.openxmlformats.org/drawingml/2006/main">
+            <a:srgbClr val="8DAAC5"/>
+          </a:solidFill>
+          <a:ln xmlns:a="http://schemas.openxmlformats.org/drawingml/2006/main" w="0">
+            <a:noFill/>
+            <a:prstDash val="solid"/>
+          </a:ln>
+        </p:spPr>
+      </p:sp>
+      <p:sp>
+        <p:nvSpPr>
+          <p:cNvPr id="28" name="">
+            <a:extLst xmlns:a="http://schemas.openxmlformats.org/drawingml/2006/main">
+              <a:ext uri="{FF2B5EF4-FFF2-40B4-BE49-F238E27FC236}">
+                <a16:creationId xmlns:a16="http://schemas.microsoft.com/office/drawing/2014/main" id="{F99BA319-B612-4E7A-8FB2-B91044373F03}"/>
+              </a:ext>
+            </a:extLst>
+          </p:cNvPr>
+          <p:cNvSpPr>
+            <a:spLocks xmlns:a="http://schemas.openxmlformats.org/drawingml/2006/main" noGrp="1"/>
+          </p:cNvSpPr>
+          <p:nvPr/>
+        </p:nvSpPr>
+        <p:spPr>
+          <a:xfrm xmlns:a="http://schemas.openxmlformats.org/drawingml/2006/main">
+            <a:off x="6438900" y="1971675"/>
+            <a:ext cx="590550" cy="171450"/>
+          </a:xfrm>
+          <a:prstGeom xmlns:a="http://schemas.openxmlformats.org/drawingml/2006/main" prst="rect">
+            <a:avLst/>
+          </a:prstGeom>
+          <a:noFill xmlns:a="http://schemas.openxmlformats.org/drawingml/2006/main"/>
+          <a:ln xmlns:a="http://schemas.openxmlformats.org/drawingml/2006/main" w="0">
+            <a:noFill/>
+            <a:prstDash val="solid"/>
+          </a:ln>
+        </p:spPr>
+        <p:txBody>
+          <a:bodyPr xmlns:a="http://schemas.openxmlformats.org/drawingml/2006/main"/>
+          <a:lstStyle xmlns:a="http://schemas.openxmlformats.org/drawingml/2006/main"/>
+          <a:p xmlns:a="http://schemas.openxmlformats.org/drawingml/2006/main">
+            <a:pPr algn="l">
+              <a:defRPr sz="750" b="0">
+                <a:solidFill>
+                  <a:srgbClr val="000000"/>
+                </a:solidFill>
+              </a:defRPr>
+            </a:pPr>
+            <a:r>
+              <a:rPr sz="750" b="0">
+                <a:solidFill>
+                  <a:srgbClr val="000000"/>
+                </a:solidFill>
+              </a:rPr>
+              <a:t>0.027</a:t>
+            </a:r>
+          </a:p>
+        </p:txBody>
+      </p:sp>
+      <p:sp>
+        <p:nvSpPr>
+          <p:cNvPr id="29" name="">
+            <a:extLst xmlns:a="http://schemas.openxmlformats.org/drawingml/2006/main">
+              <a:ext uri="{FF2B5EF4-FFF2-40B4-BE49-F238E27FC236}">
+                <a16:creationId xmlns:a16="http://schemas.microsoft.com/office/drawing/2014/main" id="{80D1C8B6-75C2-4947-AFCA-D4040D62AF28}"/>
+              </a:ext>
+            </a:extLst>
+          </p:cNvPr>
+          <p:cNvSpPr>
+            <a:spLocks xmlns:a="http://schemas.openxmlformats.org/drawingml/2006/main" noGrp="1"/>
+          </p:cNvSpPr>
+          <p:nvPr/>
+        </p:nvSpPr>
+        <p:spPr>
+          <a:xfrm xmlns:a="http://schemas.openxmlformats.org/drawingml/2006/main">
+            <a:off x="7067550" y="1905000"/>
+            <a:ext cx="7144" cy="285750"/>
+          </a:xfrm>
+          <a:prstGeom xmlns:a="http://schemas.openxmlformats.org/drawingml/2006/main" prst="rect">
+            <a:avLst/>
+          </a:prstGeom>
+          <a:solidFill xmlns:a="http://schemas.openxmlformats.org/drawingml/2006/main">
+            <a:srgbClr val="8DAAC5"/>
+          </a:solidFill>
+          <a:ln xmlns:a="http://schemas.openxmlformats.org/drawingml/2006/main" w="0">
+            <a:noFill/>
+            <a:prstDash val="solid"/>
+          </a:ln>
+        </p:spPr>
+      </p:sp>
+      <p:sp>
+        <p:nvSpPr>
+          <p:cNvPr id="30" name="">
+            <a:extLst xmlns:a="http://schemas.openxmlformats.org/drawingml/2006/main">
+              <a:ext uri="{FF2B5EF4-FFF2-40B4-BE49-F238E27FC236}">
+                <a16:creationId xmlns:a16="http://schemas.microsoft.com/office/drawing/2014/main" id="{292514CD-A8FD-4234-8A83-A1A897A2B043}"/>
+              </a:ext>
+            </a:extLst>
+          </p:cNvPr>
+          <p:cNvSpPr>
+            <a:spLocks xmlns:a="http://schemas.openxmlformats.org/drawingml/2006/main" noGrp="1"/>
+          </p:cNvSpPr>
+          <p:nvPr/>
+        </p:nvSpPr>
+        <p:spPr>
+          <a:xfrm xmlns:a="http://schemas.openxmlformats.org/drawingml/2006/main">
+            <a:off x="7124700" y="1971675"/>
+            <a:ext cx="1276350" cy="171450"/>
+          </a:xfrm>
+          <a:prstGeom xmlns:a="http://schemas.openxmlformats.org/drawingml/2006/main" prst="rect">
+            <a:avLst/>
+          </a:prstGeom>
+          <a:noFill xmlns:a="http://schemas.openxmlformats.org/drawingml/2006/main"/>
+          <a:ln xmlns:a="http://schemas.openxmlformats.org/drawingml/2006/main" w="0">
+            <a:noFill/>
+            <a:prstDash val="solid"/>
+          </a:ln>
+        </p:spPr>
+        <p:txBody>
+          <a:bodyPr xmlns:a="http://schemas.openxmlformats.org/drawingml/2006/main"/>
+          <a:lstStyle xmlns:a="http://schemas.openxmlformats.org/drawingml/2006/main"/>
+          <a:p xmlns:a="http://schemas.openxmlformats.org/drawingml/2006/main">
+            <a:pPr algn="l">
+              <a:defRPr sz="750" b="0">
+                <a:solidFill>
+                  <a:srgbClr val="000000"/>
+                </a:solidFill>
+              </a:defRPr>
+            </a:pPr>
+            <a:r>
+              <a:rPr sz="750" b="0">
+                <a:solidFill>
+                  <a:srgbClr val="000000"/>
+                </a:solidFill>
+              </a:rPr>
+              <a:t>weak support</a:t>
+            </a:r>
+          </a:p>
+        </p:txBody>
+      </p:sp>
+      <p:sp>
+        <p:nvSpPr>
+          <p:cNvPr id="31" name="">
+            <a:extLst xmlns:a="http://schemas.openxmlformats.org/drawingml/2006/main">
+              <a:ext uri="{FF2B5EF4-FFF2-40B4-BE49-F238E27FC236}">
+                <a16:creationId xmlns:a16="http://schemas.microsoft.com/office/drawing/2014/main" id="{87573E4F-0EF7-4527-BC9B-564FD11EBA8A}"/>
+              </a:ext>
+            </a:extLst>
+          </p:cNvPr>
+          <p:cNvSpPr>
+            <a:spLocks xmlns:a="http://schemas.openxmlformats.org/drawingml/2006/main" noGrp="1"/>
+          </p:cNvSpPr>
+          <p:nvPr/>
+        </p:nvSpPr>
+        <p:spPr>
+          <a:xfrm xmlns:a="http://schemas.openxmlformats.org/drawingml/2006/main">
+            <a:off x="4762500" y="2190750"/>
+            <a:ext cx="3676650" cy="285750"/>
+          </a:xfrm>
+          <a:prstGeom xmlns:a="http://schemas.openxmlformats.org/drawingml/2006/main" prst="rect">
+            <a:avLst/>
+          </a:prstGeom>
+          <a:solidFill xmlns:a="http://schemas.openxmlformats.org/drawingml/2006/main">
+            <a:srgbClr val="FFFFFF"/>
+          </a:solidFill>
+          <a:ln xmlns:a="http://schemas.openxmlformats.org/drawingml/2006/main" w="7144">
+            <a:solidFill>
+              <a:srgbClr val="8DAAC5"/>
+            </a:solidFill>
+            <a:prstDash val="solid"/>
+          </a:ln>
+        </p:spPr>
+      </p:sp>
+      <p:sp>
+        <p:nvSpPr>
+          <p:cNvPr id="32" name="">
+            <a:extLst xmlns:a="http://schemas.openxmlformats.org/drawingml/2006/main">
+              <a:ext uri="{FF2B5EF4-FFF2-40B4-BE49-F238E27FC236}">
+                <a16:creationId xmlns:a16="http://schemas.microsoft.com/office/drawing/2014/main" id="{57C3B4FA-2835-4D0C-9599-C6370A82D2DB}"/>
+              </a:ext>
+            </a:extLst>
+          </p:cNvPr>
+          <p:cNvSpPr>
+            <a:spLocks xmlns:a="http://schemas.openxmlformats.org/drawingml/2006/main" noGrp="1"/>
+          </p:cNvSpPr>
+          <p:nvPr/>
+        </p:nvSpPr>
+        <p:spPr>
+          <a:xfrm xmlns:a="http://schemas.openxmlformats.org/drawingml/2006/main">
+            <a:off x="4819650" y="2257425"/>
+            <a:ext cx="781050" cy="171450"/>
+          </a:xfrm>
+          <a:prstGeom xmlns:a="http://schemas.openxmlformats.org/drawingml/2006/main" prst="rect">
+            <a:avLst/>
+          </a:prstGeom>
+          <a:noFill xmlns:a="http://schemas.openxmlformats.org/drawingml/2006/main"/>
+          <a:ln xmlns:a="http://schemas.openxmlformats.org/drawingml/2006/main" w="0">
+            <a:noFill/>
+            <a:prstDash val="solid"/>
+          </a:ln>
+        </p:spPr>
+        <p:txBody>
+          <a:bodyPr xmlns:a="http://schemas.openxmlformats.org/drawingml/2006/main"/>
+          <a:lstStyle xmlns:a="http://schemas.openxmlformats.org/drawingml/2006/main"/>
+          <a:p xmlns:a="http://schemas.openxmlformats.org/drawingml/2006/main">
+            <a:pPr algn="l">
+              <a:defRPr sz="750" b="0">
+                <a:solidFill>
+                  <a:srgbClr val="000000"/>
+                </a:solidFill>
+              </a:defRPr>
+            </a:pPr>
+            <a:r>
+              <a:rPr sz="750" b="0">
+                <a:solidFill>
+                  <a:srgbClr val="000000"/>
+                </a:solidFill>
+              </a:rPr>
+              <a:t>CQL</a:t>
+            </a:r>
+          </a:p>
+        </p:txBody>
+      </p:sp>
+      <p:sp>
+        <p:nvSpPr>
+          <p:cNvPr id="33" name="">
+            <a:extLst xmlns:a="http://schemas.openxmlformats.org/drawingml/2006/main">
+              <a:ext uri="{FF2B5EF4-FFF2-40B4-BE49-F238E27FC236}">
+                <a16:creationId xmlns:a16="http://schemas.microsoft.com/office/drawing/2014/main" id="{76F8E392-1F77-480A-812E-B7222A3EB7AB}"/>
+              </a:ext>
+            </a:extLst>
+          </p:cNvPr>
+          <p:cNvSpPr>
+            <a:spLocks xmlns:a="http://schemas.openxmlformats.org/drawingml/2006/main" noGrp="1"/>
+          </p:cNvSpPr>
+          <p:nvPr/>
+        </p:nvSpPr>
+        <p:spPr>
+          <a:xfrm xmlns:a="http://schemas.openxmlformats.org/drawingml/2006/main">
+            <a:off x="5638800" y="2190750"/>
+            <a:ext cx="7144" cy="285750"/>
+          </a:xfrm>
+          <a:prstGeom xmlns:a="http://schemas.openxmlformats.org/drawingml/2006/main" prst="rect">
+            <a:avLst/>
+          </a:prstGeom>
+          <a:solidFill xmlns:a="http://schemas.openxmlformats.org/drawingml/2006/main">
+            <a:srgbClr val="8DAAC5"/>
+          </a:solidFill>
+          <a:ln xmlns:a="http://schemas.openxmlformats.org/drawingml/2006/main" w="0">
+            <a:noFill/>
+            <a:prstDash val="solid"/>
+          </a:ln>
+        </p:spPr>
+      </p:sp>
+      <p:sp>
+        <p:nvSpPr>
+          <p:cNvPr id="34" name="">
+            <a:extLst xmlns:a="http://schemas.openxmlformats.org/drawingml/2006/main">
+              <a:ext uri="{FF2B5EF4-FFF2-40B4-BE49-F238E27FC236}">
+                <a16:creationId xmlns:a16="http://schemas.microsoft.com/office/drawing/2014/main" id="{71826977-0D7D-4993-A521-BDEB7B69E6F0}"/>
+              </a:ext>
+            </a:extLst>
+          </p:cNvPr>
+          <p:cNvSpPr>
+            <a:spLocks xmlns:a="http://schemas.openxmlformats.org/drawingml/2006/main" noGrp="1"/>
+          </p:cNvSpPr>
+          <p:nvPr/>
+        </p:nvSpPr>
+        <p:spPr>
+          <a:xfrm xmlns:a="http://schemas.openxmlformats.org/drawingml/2006/main">
+            <a:off x="5695950" y="2257425"/>
+            <a:ext cx="647700" cy="171450"/>
+          </a:xfrm>
+          <a:prstGeom xmlns:a="http://schemas.openxmlformats.org/drawingml/2006/main" prst="rect">
+            <a:avLst/>
+          </a:prstGeom>
+          <a:noFill xmlns:a="http://schemas.openxmlformats.org/drawingml/2006/main"/>
+          <a:ln xmlns:a="http://schemas.openxmlformats.org/drawingml/2006/main" w="0">
+            <a:noFill/>
+            <a:prstDash val="solid"/>
+          </a:ln>
+        </p:spPr>
+        <p:txBody>
+          <a:bodyPr xmlns:a="http://schemas.openxmlformats.org/drawingml/2006/main"/>
+          <a:lstStyle xmlns:a="http://schemas.openxmlformats.org/drawingml/2006/main"/>
+          <a:p xmlns:a="http://schemas.openxmlformats.org/drawingml/2006/main">
+            <a:pPr algn="l">
+              <a:defRPr sz="750" b="0">
+                <a:solidFill>
+                  <a:srgbClr val="000000"/>
+                </a:solidFill>
+              </a:defRPr>
+            </a:pPr>
+            <a:r>
+              <a:rPr sz="750" b="0">
+                <a:solidFill>
+                  <a:srgbClr val="000000"/>
+                </a:solidFill>
+              </a:rPr>
+              <a:t>model</a:t>
+            </a:r>
+          </a:p>
+        </p:txBody>
+      </p:sp>
+      <p:sp>
+        <p:nvSpPr>
+          <p:cNvPr id="35" name="">
+            <a:extLst xmlns:a="http://schemas.openxmlformats.org/drawingml/2006/main">
+              <a:ext uri="{FF2B5EF4-FFF2-40B4-BE49-F238E27FC236}">
+                <a16:creationId xmlns:a16="http://schemas.microsoft.com/office/drawing/2014/main" id="{943A0087-07E5-4617-87AB-E545D6EE0B98}"/>
+              </a:ext>
+            </a:extLst>
+          </p:cNvPr>
+          <p:cNvSpPr>
+            <a:spLocks xmlns:a="http://schemas.openxmlformats.org/drawingml/2006/main" noGrp="1"/>
+          </p:cNvSpPr>
+          <p:nvPr/>
+        </p:nvSpPr>
+        <p:spPr>
+          <a:xfrm xmlns:a="http://schemas.openxmlformats.org/drawingml/2006/main">
+            <a:off x="6381750" y="2190750"/>
+            <a:ext cx="7144" cy="285750"/>
+          </a:xfrm>
+          <a:prstGeom xmlns:a="http://schemas.openxmlformats.org/drawingml/2006/main" prst="rect">
+            <a:avLst/>
+          </a:prstGeom>
+          <a:solidFill xmlns:a="http://schemas.openxmlformats.org/drawingml/2006/main">
+            <a:srgbClr val="8DAAC5"/>
+          </a:solidFill>
+          <a:ln xmlns:a="http://schemas.openxmlformats.org/drawingml/2006/main" w="0">
+            <a:noFill/>
+            <a:prstDash val="solid"/>
+          </a:ln>
+        </p:spPr>
+      </p:sp>
+      <p:sp>
+        <p:nvSpPr>
+          <p:cNvPr id="36" name="">
+            <a:extLst xmlns:a="http://schemas.openxmlformats.org/drawingml/2006/main">
+              <a:ext uri="{FF2B5EF4-FFF2-40B4-BE49-F238E27FC236}">
+                <a16:creationId xmlns:a16="http://schemas.microsoft.com/office/drawing/2014/main" id="{F3206267-CFEE-4801-BE50-572F175C72F1}"/>
+              </a:ext>
+            </a:extLst>
+          </p:cNvPr>
+          <p:cNvSpPr>
+            <a:spLocks xmlns:a="http://schemas.openxmlformats.org/drawingml/2006/main" noGrp="1"/>
+          </p:cNvSpPr>
+          <p:nvPr/>
+        </p:nvSpPr>
+        <p:spPr>
+          <a:xfrm xmlns:a="http://schemas.openxmlformats.org/drawingml/2006/main">
+            <a:off x="6438900" y="2257425"/>
+            <a:ext cx="590550" cy="171450"/>
+          </a:xfrm>
+          <a:prstGeom xmlns:a="http://schemas.openxmlformats.org/drawingml/2006/main" prst="rect">
+            <a:avLst/>
+          </a:prstGeom>
+          <a:noFill xmlns:a="http://schemas.openxmlformats.org/drawingml/2006/main"/>
+          <a:ln xmlns:a="http://schemas.openxmlformats.org/drawingml/2006/main" w="0">
+            <a:noFill/>
+            <a:prstDash val="solid"/>
+          </a:ln>
+        </p:spPr>
+        <p:txBody>
+          <a:bodyPr xmlns:a="http://schemas.openxmlformats.org/drawingml/2006/main"/>
+          <a:lstStyle xmlns:a="http://schemas.openxmlformats.org/drawingml/2006/main"/>
+          <a:p xmlns:a="http://schemas.openxmlformats.org/drawingml/2006/main">
+            <a:pPr algn="l">
+              <a:defRPr sz="750" b="0">
+                <a:solidFill>
+                  <a:srgbClr val="000000"/>
+                </a:solidFill>
+              </a:defRPr>
+            </a:pPr>
+            <a:r>
+              <a:rPr sz="750" b="0">
+                <a:solidFill>
+                  <a:srgbClr val="000000"/>
+                </a:solidFill>
+              </a:rPr>
+              <a:t>0.020</a:t>
+            </a:r>
+          </a:p>
+        </p:txBody>
+      </p:sp>
+      <p:sp>
+        <p:nvSpPr>
+          <p:cNvPr id="37" name="">
+            <a:extLst xmlns:a="http://schemas.openxmlformats.org/drawingml/2006/main">
+              <a:ext uri="{FF2B5EF4-FFF2-40B4-BE49-F238E27FC236}">
+                <a16:creationId xmlns:a16="http://schemas.microsoft.com/office/drawing/2014/main" id="{A3841E4A-86FF-440A-B7D2-85D7C07ED647}"/>
+              </a:ext>
+            </a:extLst>
+          </p:cNvPr>
+          <p:cNvSpPr>
+            <a:spLocks xmlns:a="http://schemas.openxmlformats.org/drawingml/2006/main" noGrp="1"/>
+          </p:cNvSpPr>
+          <p:nvPr/>
+        </p:nvSpPr>
+        <p:spPr>
+          <a:xfrm xmlns:a="http://schemas.openxmlformats.org/drawingml/2006/main">
+            <a:off x="7067550" y="2190750"/>
+            <a:ext cx="7144" cy="285750"/>
+          </a:xfrm>
+          <a:prstGeom xmlns:a="http://schemas.openxmlformats.org/drawingml/2006/main" prst="rect">
+            <a:avLst/>
+          </a:prstGeom>
+          <a:solidFill xmlns:a="http://schemas.openxmlformats.org/drawingml/2006/main">
+            <a:srgbClr val="8DAAC5"/>
+          </a:solidFill>
+          <a:ln xmlns:a="http://schemas.openxmlformats.org/drawingml/2006/main" w="0">
+            <a:noFill/>
+            <a:prstDash val="solid"/>
+          </a:ln>
+        </p:spPr>
+      </p:sp>
+      <p:sp>
+        <p:nvSpPr>
+          <p:cNvPr id="38" name="">
+            <a:extLst xmlns:a="http://schemas.openxmlformats.org/drawingml/2006/main">
+              <a:ext uri="{FF2B5EF4-FFF2-40B4-BE49-F238E27FC236}">
+                <a16:creationId xmlns:a16="http://schemas.microsoft.com/office/drawing/2014/main" id="{F2A309E5-B7E7-48EC-BBFC-BE2EDBA41065}"/>
+              </a:ext>
+            </a:extLst>
+          </p:cNvPr>
+          <p:cNvSpPr>
+            <a:spLocks xmlns:a="http://schemas.openxmlformats.org/drawingml/2006/main" noGrp="1"/>
+          </p:cNvSpPr>
+          <p:nvPr/>
+        </p:nvSpPr>
+        <p:spPr>
+          <a:xfrm xmlns:a="http://schemas.openxmlformats.org/drawingml/2006/main">
+            <a:off x="7124700" y="2257425"/>
+            <a:ext cx="1276350" cy="171450"/>
+          </a:xfrm>
+          <a:prstGeom xmlns:a="http://schemas.openxmlformats.org/drawingml/2006/main" prst="rect">
+            <a:avLst/>
+          </a:prstGeom>
+          <a:noFill xmlns:a="http://schemas.openxmlformats.org/drawingml/2006/main"/>
+          <a:ln xmlns:a="http://schemas.openxmlformats.org/drawingml/2006/main" w="0">
+            <a:noFill/>
+            <a:prstDash val="solid"/>
+          </a:ln>
+        </p:spPr>
+        <p:txBody>
+          <a:bodyPr xmlns:a="http://schemas.openxmlformats.org/drawingml/2006/main"/>
+          <a:lstStyle xmlns:a="http://schemas.openxmlformats.org/drawingml/2006/main"/>
+          <a:p xmlns:a="http://schemas.openxmlformats.org/drawingml/2006/main">
+            <a:pPr algn="l">
+              <a:defRPr sz="750" b="0">
+                <a:solidFill>
+                  <a:srgbClr val="000000"/>
+                </a:solidFill>
+              </a:defRPr>
+            </a:pPr>
+            <a:r>
+              <a:rPr sz="750" b="0">
+                <a:solidFill>
+                  <a:srgbClr val="000000"/>
+                </a:solidFill>
+              </a:rPr>
+              <a:t>healthy ESS</a:t>
+            </a:r>
+          </a:p>
+        </p:txBody>
+      </p:sp>
+      <p:sp>
+        <p:nvSpPr>
+          <p:cNvPr id="39" name="">
+            <a:extLst xmlns:a="http://schemas.openxmlformats.org/drawingml/2006/main">
+              <a:ext uri="{FF2B5EF4-FFF2-40B4-BE49-F238E27FC236}">
+                <a16:creationId xmlns:a16="http://schemas.microsoft.com/office/drawing/2014/main" id="{D50E4A15-851B-46CF-9F3D-9773EA43AF28}"/>
+              </a:ext>
+            </a:extLst>
+          </p:cNvPr>
+          <p:cNvSpPr>
+            <a:spLocks xmlns:a="http://schemas.openxmlformats.org/drawingml/2006/main" noGrp="1"/>
+          </p:cNvSpPr>
+          <p:nvPr/>
+        </p:nvSpPr>
+        <p:spPr>
+          <a:xfrm xmlns:a="http://schemas.openxmlformats.org/drawingml/2006/main">
+            <a:off x="4762500" y="2476500"/>
+            <a:ext cx="3676650" cy="285750"/>
+          </a:xfrm>
+          <a:prstGeom xmlns:a="http://schemas.openxmlformats.org/drawingml/2006/main" prst="rect">
+            <a:avLst/>
+          </a:prstGeom>
+          <a:solidFill xmlns:a="http://schemas.openxmlformats.org/drawingml/2006/main">
+            <a:srgbClr val="FFFFFF"/>
+          </a:solidFill>
+          <a:ln xmlns:a="http://schemas.openxmlformats.org/drawingml/2006/main" w="7144">
+            <a:solidFill>
+              <a:srgbClr val="8DAAC5"/>
+            </a:solidFill>
+            <a:prstDash val="solid"/>
+          </a:ln>
+        </p:spPr>
+      </p:sp>
+      <p:sp>
+        <p:nvSpPr>
+          <p:cNvPr id="40" name="">
+            <a:extLst xmlns:a="http://schemas.openxmlformats.org/drawingml/2006/main">
+              <a:ext uri="{FF2B5EF4-FFF2-40B4-BE49-F238E27FC236}">
+                <a16:creationId xmlns:a16="http://schemas.microsoft.com/office/drawing/2014/main" id="{1741C08B-E302-46DD-BAE8-28D835EA706A}"/>
+              </a:ext>
+            </a:extLst>
+          </p:cNvPr>
+          <p:cNvSpPr>
+            <a:spLocks xmlns:a="http://schemas.openxmlformats.org/drawingml/2006/main" noGrp="1"/>
+          </p:cNvSpPr>
+          <p:nvPr/>
+        </p:nvSpPr>
+        <p:spPr>
+          <a:xfrm xmlns:a="http://schemas.openxmlformats.org/drawingml/2006/main">
+            <a:off x="4819650" y="2543175"/>
+            <a:ext cx="781050" cy="171450"/>
+          </a:xfrm>
+          <a:prstGeom xmlns:a="http://schemas.openxmlformats.org/drawingml/2006/main" prst="rect">
+            <a:avLst/>
+          </a:prstGeom>
+          <a:noFill xmlns:a="http://schemas.openxmlformats.org/drawingml/2006/main"/>
+          <a:ln xmlns:a="http://schemas.openxmlformats.org/drawingml/2006/main" w="0">
+            <a:noFill/>
+            <a:prstDash val="solid"/>
+          </a:ln>
+        </p:spPr>
+        <p:txBody>
+          <a:bodyPr xmlns:a="http://schemas.openxmlformats.org/drawingml/2006/main"/>
+          <a:lstStyle xmlns:a="http://schemas.openxmlformats.org/drawingml/2006/main"/>
+          <a:p xmlns:a="http://schemas.openxmlformats.org/drawingml/2006/main">
+            <a:pPr algn="l">
+              <a:defRPr sz="750" b="0">
+                <a:solidFill>
+                  <a:srgbClr val="000000"/>
+                </a:solidFill>
+              </a:defRPr>
+            </a:pPr>
+            <a:r>
+              <a:rPr sz="750" b="0">
+                <a:solidFill>
+                  <a:srgbClr val="000000"/>
+                </a:solidFill>
+              </a:rPr>
+              <a:t>PPO</a:t>
+            </a:r>
+          </a:p>
+        </p:txBody>
+      </p:sp>
+      <p:sp>
+        <p:nvSpPr>
+          <p:cNvPr id="41" name="">
+            <a:extLst xmlns:a="http://schemas.openxmlformats.org/drawingml/2006/main">
+              <a:ext uri="{FF2B5EF4-FFF2-40B4-BE49-F238E27FC236}">
+                <a16:creationId xmlns:a16="http://schemas.microsoft.com/office/drawing/2014/main" id="{18799E3A-B089-47D4-8C97-174B2CE4545D}"/>
+              </a:ext>
+            </a:extLst>
+          </p:cNvPr>
+          <p:cNvSpPr>
+            <a:spLocks xmlns:a="http://schemas.openxmlformats.org/drawingml/2006/main" noGrp="1"/>
+          </p:cNvSpPr>
+          <p:nvPr/>
+        </p:nvSpPr>
+        <p:spPr>
+          <a:xfrm xmlns:a="http://schemas.openxmlformats.org/drawingml/2006/main">
+            <a:off x="5638800" y="2476500"/>
+            <a:ext cx="7144" cy="285750"/>
+          </a:xfrm>
+          <a:prstGeom xmlns:a="http://schemas.openxmlformats.org/drawingml/2006/main" prst="rect">
+            <a:avLst/>
+          </a:prstGeom>
+          <a:solidFill xmlns:a="http://schemas.openxmlformats.org/drawingml/2006/main">
+            <a:srgbClr val="8DAAC5"/>
+          </a:solidFill>
+          <a:ln xmlns:a="http://schemas.openxmlformats.org/drawingml/2006/main" w="0">
+            <a:noFill/>
+            <a:prstDash val="solid"/>
+          </a:ln>
+        </p:spPr>
+      </p:sp>
+      <p:sp>
+        <p:nvSpPr>
+          <p:cNvPr id="42" name="">
+            <a:extLst xmlns:a="http://schemas.openxmlformats.org/drawingml/2006/main">
+              <a:ext uri="{FF2B5EF4-FFF2-40B4-BE49-F238E27FC236}">
+                <a16:creationId xmlns:a16="http://schemas.microsoft.com/office/drawing/2014/main" id="{2FFEF599-3784-489F-9EC6-AD800FF32545}"/>
+              </a:ext>
+            </a:extLst>
+          </p:cNvPr>
+          <p:cNvSpPr>
+            <a:spLocks xmlns:a="http://schemas.openxmlformats.org/drawingml/2006/main" noGrp="1"/>
+          </p:cNvSpPr>
+          <p:nvPr/>
+        </p:nvSpPr>
+        <p:spPr>
+          <a:xfrm xmlns:a="http://schemas.openxmlformats.org/drawingml/2006/main">
+            <a:off x="5695950" y="2543175"/>
+            <a:ext cx="647700" cy="171450"/>
+          </a:xfrm>
+          <a:prstGeom xmlns:a="http://schemas.openxmlformats.org/drawingml/2006/main" prst="rect">
+            <a:avLst/>
+          </a:prstGeom>
+          <a:noFill xmlns:a="http://schemas.openxmlformats.org/drawingml/2006/main"/>
+          <a:ln xmlns:a="http://schemas.openxmlformats.org/drawingml/2006/main" w="0">
+            <a:noFill/>
+            <a:prstDash val="solid"/>
+          </a:ln>
+        </p:spPr>
+        <p:txBody>
+          <a:bodyPr xmlns:a="http://schemas.openxmlformats.org/drawingml/2006/main"/>
+          <a:lstStyle xmlns:a="http://schemas.openxmlformats.org/drawingml/2006/main"/>
+          <a:p xmlns:a="http://schemas.openxmlformats.org/drawingml/2006/main">
+            <a:pPr algn="l">
+              <a:defRPr sz="750" b="0">
+                <a:solidFill>
+                  <a:srgbClr val="000000"/>
+                </a:solidFill>
+              </a:defRPr>
+            </a:pPr>
+            <a:r>
+              <a:rPr sz="750" b="0">
+                <a:solidFill>
+                  <a:srgbClr val="000000"/>
+                </a:solidFill>
+              </a:rPr>
+              <a:t>simulator</a:t>
+            </a:r>
+          </a:p>
+        </p:txBody>
+      </p:sp>
+      <p:sp>
+        <p:nvSpPr>
+          <p:cNvPr id="43" name="">
+            <a:extLst xmlns:a="http://schemas.openxmlformats.org/drawingml/2006/main">
+              <a:ext uri="{FF2B5EF4-FFF2-40B4-BE49-F238E27FC236}">
+                <a16:creationId xmlns:a16="http://schemas.microsoft.com/office/drawing/2014/main" id="{661B8352-7472-405A-8AAC-E5DE8B90EC4E}"/>
+              </a:ext>
+            </a:extLst>
+          </p:cNvPr>
+          <p:cNvSpPr>
+            <a:spLocks xmlns:a="http://schemas.openxmlformats.org/drawingml/2006/main" noGrp="1"/>
+          </p:cNvSpPr>
+          <p:nvPr/>
+        </p:nvSpPr>
+        <p:spPr>
+          <a:xfrm xmlns:a="http://schemas.openxmlformats.org/drawingml/2006/main">
+            <a:off x="6381750" y="2476500"/>
+            <a:ext cx="7144" cy="285750"/>
+          </a:xfrm>
+          <a:prstGeom xmlns:a="http://schemas.openxmlformats.org/drawingml/2006/main" prst="rect">
+            <a:avLst/>
+          </a:prstGeom>
+          <a:solidFill xmlns:a="http://schemas.openxmlformats.org/drawingml/2006/main">
+            <a:srgbClr val="8DAAC5"/>
+          </a:solidFill>
+          <a:ln xmlns:a="http://schemas.openxmlformats.org/drawingml/2006/main" w="0">
+            <a:noFill/>
+            <a:prstDash val="solid"/>
+          </a:ln>
+        </p:spPr>
+      </p:sp>
+      <p:sp>
+        <p:nvSpPr>
+          <p:cNvPr id="44" name="">
+            <a:extLst xmlns:a="http://schemas.openxmlformats.org/drawingml/2006/main">
+              <a:ext uri="{FF2B5EF4-FFF2-40B4-BE49-F238E27FC236}">
+                <a16:creationId xmlns:a16="http://schemas.microsoft.com/office/drawing/2014/main" id="{90DD310B-4B37-4CCB-B216-56AF9E29FE44}"/>
+              </a:ext>
+            </a:extLst>
+          </p:cNvPr>
+          <p:cNvSpPr>
+            <a:spLocks xmlns:a="http://schemas.openxmlformats.org/drawingml/2006/main" noGrp="1"/>
+          </p:cNvSpPr>
+          <p:nvPr/>
+        </p:nvSpPr>
+        <p:spPr>
+          <a:xfrm xmlns:a="http://schemas.openxmlformats.org/drawingml/2006/main">
+            <a:off x="6438900" y="2543175"/>
+            <a:ext cx="590550" cy="171450"/>
+          </a:xfrm>
+          <a:prstGeom xmlns:a="http://schemas.openxmlformats.org/drawingml/2006/main" prst="rect">
+            <a:avLst/>
+          </a:prstGeom>
+          <a:noFill xmlns:a="http://schemas.openxmlformats.org/drawingml/2006/main"/>
+          <a:ln xmlns:a="http://schemas.openxmlformats.org/drawingml/2006/main" w="0">
+            <a:noFill/>
+            <a:prstDash val="solid"/>
+          </a:ln>
+        </p:spPr>
+        <p:txBody>
+          <a:bodyPr xmlns:a="http://schemas.openxmlformats.org/drawingml/2006/main"/>
+          <a:lstStyle xmlns:a="http://schemas.openxmlformats.org/drawingml/2006/main"/>
+          <a:p xmlns:a="http://schemas.openxmlformats.org/drawingml/2006/main">
+            <a:pPr algn="l">
+              <a:defRPr sz="750" b="0">
+                <a:solidFill>
+                  <a:srgbClr val="000000"/>
+                </a:solidFill>
+              </a:defRPr>
+            </a:pPr>
+            <a:r>
+              <a:rPr sz="750" b="0">
+                <a:solidFill>
+                  <a:srgbClr val="000000"/>
+                </a:solidFill>
+              </a:rPr>
+              <a:t>0.184</a:t>
+            </a:r>
+          </a:p>
+        </p:txBody>
+      </p:sp>
+      <p:sp>
+        <p:nvSpPr>
+          <p:cNvPr id="45" name="">
+            <a:extLst xmlns:a="http://schemas.openxmlformats.org/drawingml/2006/main">
+              <a:ext uri="{FF2B5EF4-FFF2-40B4-BE49-F238E27FC236}">
+                <a16:creationId xmlns:a16="http://schemas.microsoft.com/office/drawing/2014/main" id="{054191EB-678E-4176-BE0E-5A8D6BE8514E}"/>
+              </a:ext>
+            </a:extLst>
+          </p:cNvPr>
+          <p:cNvSpPr>
+            <a:spLocks xmlns:a="http://schemas.openxmlformats.org/drawingml/2006/main" noGrp="1"/>
+          </p:cNvSpPr>
+          <p:nvPr/>
+        </p:nvSpPr>
+        <p:spPr>
+          <a:xfrm xmlns:a="http://schemas.openxmlformats.org/drawingml/2006/main">
+            <a:off x="7067550" y="2476500"/>
+            <a:ext cx="7144" cy="285750"/>
+          </a:xfrm>
+          <a:prstGeom xmlns:a="http://schemas.openxmlformats.org/drawingml/2006/main" prst="rect">
+            <a:avLst/>
+          </a:prstGeom>
+          <a:solidFill xmlns:a="http://schemas.openxmlformats.org/drawingml/2006/main">
+            <a:srgbClr val="8DAAC5"/>
+          </a:solidFill>
+          <a:ln xmlns:a="http://schemas.openxmlformats.org/drawingml/2006/main" w="0">
+            <a:noFill/>
+            <a:prstDash val="solid"/>
+          </a:ln>
+        </p:spPr>
+      </p:sp>
+      <p:sp>
+        <p:nvSpPr>
+          <p:cNvPr id="46" name="">
+            <a:extLst xmlns:a="http://schemas.openxmlformats.org/drawingml/2006/main">
+              <a:ext uri="{FF2B5EF4-FFF2-40B4-BE49-F238E27FC236}">
+                <a16:creationId xmlns:a16="http://schemas.microsoft.com/office/drawing/2014/main" id="{B97C46D9-D2E6-4AB1-9F19-EF4DBBD9540F}"/>
+              </a:ext>
+            </a:extLst>
+          </p:cNvPr>
+          <p:cNvSpPr>
+            <a:spLocks xmlns:a="http://schemas.openxmlformats.org/drawingml/2006/main" noGrp="1"/>
+          </p:cNvSpPr>
+          <p:nvPr/>
+        </p:nvSpPr>
+        <p:spPr>
+          <a:xfrm xmlns:a="http://schemas.openxmlformats.org/drawingml/2006/main">
+            <a:off x="7124700" y="2543175"/>
+            <a:ext cx="1276350" cy="171450"/>
+          </a:xfrm>
+          <a:prstGeom xmlns:a="http://schemas.openxmlformats.org/drawingml/2006/main" prst="rect">
+            <a:avLst/>
+          </a:prstGeom>
+          <a:noFill xmlns:a="http://schemas.openxmlformats.org/drawingml/2006/main"/>
+          <a:ln xmlns:a="http://schemas.openxmlformats.org/drawingml/2006/main" w="0">
+            <a:noFill/>
+            <a:prstDash val="solid"/>
+          </a:ln>
+        </p:spPr>
+        <p:txBody>
+          <a:bodyPr xmlns:a="http://schemas.openxmlformats.org/drawingml/2006/main"/>
+          <a:lstStyle xmlns:a="http://schemas.openxmlformats.org/drawingml/2006/main"/>
+          <a:p xmlns:a="http://schemas.openxmlformats.org/drawingml/2006/main">
+            <a:pPr algn="l">
+              <a:defRPr sz="750" b="0">
+                <a:solidFill>
+                  <a:srgbClr val="000000"/>
+                </a:solidFill>
+              </a:defRPr>
+            </a:pPr>
+            <a:r>
+              <a:rPr sz="750" b="0">
+                <a:solidFill>
+                  <a:srgbClr val="000000"/>
+                </a:solidFill>
+              </a:rPr>
+              <a:t>simulator only</a:t>
+            </a:r>
+          </a:p>
+        </p:txBody>
+      </p:sp>
+      <p:sp>
+        <p:nvSpPr>
+          <p:cNvPr id="47" name="">
+            <a:extLst xmlns:a="http://schemas.openxmlformats.org/drawingml/2006/main">
+              <a:ext uri="{FF2B5EF4-FFF2-40B4-BE49-F238E27FC236}">
+                <a16:creationId xmlns:a16="http://schemas.microsoft.com/office/drawing/2014/main" id="{0DA9A460-B1D7-423E-8F09-4898267C337B}"/>
+              </a:ext>
+            </a:extLst>
+          </p:cNvPr>
+          <p:cNvSpPr>
+            <a:spLocks xmlns:a="http://schemas.openxmlformats.org/drawingml/2006/main" noGrp="1"/>
+          </p:cNvSpPr>
+          <p:nvPr/>
+        </p:nvSpPr>
+        <p:spPr>
+          <a:xfrm xmlns:a="http://schemas.openxmlformats.org/drawingml/2006/main">
+            <a:off x="4762500" y="3381375"/>
+            <a:ext cx="3524250" cy="571500"/>
+          </a:xfrm>
+          <a:prstGeom xmlns:a="http://schemas.openxmlformats.org/drawingml/2006/main" prst="rect">
+            <a:avLst/>
+          </a:prstGeom>
+          <a:noFill xmlns:a="http://schemas.openxmlformats.org/drawingml/2006/main"/>
+          <a:ln xmlns:a="http://schemas.openxmlformats.org/drawingml/2006/main" w="0">
+            <a:noFill/>
+            <a:prstDash val="solid"/>
+          </a:ln>
+        </p:spPr>
+        <p:txBody>
+          <a:bodyPr xmlns:a="http://schemas.openxmlformats.org/drawingml/2006/main"/>
+          <a:lstStyle xmlns:a="http://schemas.openxmlformats.org/drawingml/2006/main"/>
+          <a:p xmlns:a="http://schemas.openxmlformats.org/drawingml/2006/main">
+            <a:pPr algn="l">
+              <a:defRPr sz="1050" b="0">
+                <a:solidFill>
+                  <a:srgbClr val="000000"/>
+                </a:solidFill>
+              </a:defRPr>
+            </a:pPr>
+            <a:r>
+              <a:rPr sz="1050" b="0">
+                <a:solidFill>
+                  <a:srgbClr val="000000"/>
+                </a:solidFill>
+              </a:rPr>
+              <a:t>Read this as evidence triage, not a leaderboard. PPO is simulator-only; CQL is lower reward but more evaluable.</a:t>
             </a:r>
           </a:p>
         </p:txBody>
@@ -16785,18 +17944,18 @@
       </p:grpSpPr>
       <p:sp>
         <p:nvSpPr>
-          <p:cNvPr id="3" name="Inhaltsplatzhalter 2">
-            <a:extLst xmlns:a="http://schemas.openxmlformats.org/drawingml/2006/main">
-              <a:ext uri="{FF2B5EF4-FFF2-40B4-BE49-F238E27FC236}">
-                <a16:creationId xmlns:a16="http://schemas.microsoft.com/office/drawing/2014/main" id="{9B360291-1646-43F1-83B2-63EB06490FA6}"/>
-              </a:ext>
-            </a:extLst>
-          </p:cNvPr>
-          <p:cNvSpPr>
-            <a:spLocks xmlns:a="http://schemas.openxmlformats.org/drawingml/2006/main" noGrp="1"/>
-          </p:cNvSpPr>
-          <p:nvPr>
-            <p:ph idx="10"/>
+          <p:cNvPr id="2" name="Content Placeholder 1">
+            <a:extLst xmlns:a="http://schemas.openxmlformats.org/drawingml/2006/main">
+              <a:ext uri="{FF2B5EF4-FFF2-40B4-BE49-F238E27FC236}">
+                <a16:creationId xmlns:a16="http://schemas.microsoft.com/office/drawing/2014/main" id="{38F05BFB-8908-46EB-84F3-3B1D5835FAE4}"/>
+              </a:ext>
+            </a:extLst>
+          </p:cNvPr>
+          <p:cNvSpPr>
+            <a:spLocks xmlns:a="http://schemas.openxmlformats.org/drawingml/2006/main" noGrp="1"/>
+          </p:cNvSpPr>
+          <p:nvPr>
+            <p:ph idx="14"/>
           </p:nvPr>
         </p:nvSpPr>
         <p:spPr/>
@@ -16805,12 +17964,174 @@
           <a:lstStyle xmlns:a="http://schemas.openxmlformats.org/drawingml/2006/main"/>
           <a:p xmlns:a="http://schemas.openxmlformats.org/drawingml/2006/main">
             <a:r>
-              <a:t>WHAT</a:t>
-            </a:r>
-          </a:p>
-          <a:p xmlns:a="http://schemas.openxmlformats.org/drawingml/2006/main">
-            <a:r>
-              <a:t>What the results mean and what remains uncertain</a:t>
+              <a:t>OPE is diagnostic because true logging propensities are unavailable.</a:t>
+            </a:r>
+          </a:p>
+          <a:p xmlns:a="http://schemas.openxmlformats.org/drawingml/2006/main">
+            <a:r>
+              <a:t/>
+            </a:r>
+          </a:p>
+          <a:p xmlns:a="http://schemas.openxmlformats.org/drawingml/2006/main">
+            <a:r>
+              <a:t>The useful question is whether target actions have enough logged support.</a:t>
+            </a:r>
+          </a:p>
+          <a:p xmlns:a="http://schemas.openxmlformats.org/drawingml/2006/main">
+            <a:r>
+              <a:t/>
+            </a:r>
+          </a:p>
+          <a:p xmlns:a="http://schemas.openxmlformats.org/drawingml/2006/main">
+            <a:r>
+              <a:t>ESS makes unsupported extrapolation visible.</a:t>
+            </a:r>
+          </a:p>
+        </p:txBody>
+      </p:sp>
+      <p:sp>
+        <p:nvSpPr>
+          <p:cNvPr id="4" name="Slide Number Placeholder 3">
+            <a:extLst xmlns:a="http://schemas.openxmlformats.org/drawingml/2006/main">
+              <a:ext uri="{FF2B5EF4-FFF2-40B4-BE49-F238E27FC236}">
+                <a16:creationId xmlns:a16="http://schemas.microsoft.com/office/drawing/2014/main" id="{B00B1BF6-1E0F-4AD0-89BA-806F600E6D7D}"/>
+              </a:ext>
+            </a:extLst>
+          </p:cNvPr>
+          <p:cNvSpPr>
+            <a:spLocks xmlns:a="http://schemas.openxmlformats.org/drawingml/2006/main" noGrp="1"/>
+          </p:cNvSpPr>
+          <p:nvPr>
+            <p:ph type="sldNum" idx="16"/>
+          </p:nvPr>
+        </p:nvSpPr>
+        <p:spPr/>
+        <p:txBody>
+          <a:bodyPr xmlns:a="http://schemas.openxmlformats.org/drawingml/2006/main"/>
+          <a:lstStyle xmlns:a="http://schemas.openxmlformats.org/drawingml/2006/main"/>
+          <a:p xmlns:a="http://schemas.openxmlformats.org/drawingml/2006/main">
+            <a:fld id="{44235D47-801C-AA1F-E2A0-5E98061CBF6D}" type="slidenum">
+              <a:t>09</a:t>
+            </a:fld>
+          </a:p>
+        </p:txBody>
+      </p:sp>
+      <p:sp>
+        <p:nvSpPr>
+          <p:cNvPr id="5" name="Footer Placeholder 4">
+            <a:extLst xmlns:a="http://schemas.openxmlformats.org/drawingml/2006/main">
+              <a:ext uri="{FF2B5EF4-FFF2-40B4-BE49-F238E27FC236}">
+                <a16:creationId xmlns:a16="http://schemas.microsoft.com/office/drawing/2014/main" id="{B4AEE372-D5A0-447D-9407-E3C69944FFDA}"/>
+              </a:ext>
+            </a:extLst>
+          </p:cNvPr>
+          <p:cNvSpPr>
+            <a:spLocks xmlns:a="http://schemas.openxmlformats.org/drawingml/2006/main" noGrp="1"/>
+          </p:cNvSpPr>
+          <p:nvPr>
+            <p:ph type="ftr" idx="17"/>
+          </p:nvPr>
+        </p:nvSpPr>
+        <p:spPr/>
+        <p:txBody>
+          <a:bodyPr xmlns:a="http://schemas.openxmlformats.org/drawingml/2006/main"/>
+          <a:lstStyle xmlns:a="http://schemas.openxmlformats.org/drawingml/2006/main"/>
+          <a:p xmlns:a="http://schemas.openxmlformats.org/drawingml/2006/main">
+            <a:r>
+              <a:t>eBay Best Offer anchoring RL | Why / How / What</a:t>
+            </a:r>
+          </a:p>
+        </p:txBody>
+      </p:sp>
+      <p:sp>
+        <p:nvSpPr>
+          <p:cNvPr id="6" name="Title 5">
+            <a:extLst xmlns:a="http://schemas.openxmlformats.org/drawingml/2006/main">
+              <a:ext uri="{FF2B5EF4-FFF2-40B4-BE49-F238E27FC236}">
+                <a16:creationId xmlns:a16="http://schemas.microsoft.com/office/drawing/2014/main" id="{0514C42E-BA49-4954-A66B-22C9793B6568}"/>
+              </a:ext>
+            </a:extLst>
+          </p:cNvPr>
+          <p:cNvSpPr>
+            <a:spLocks xmlns:a="http://schemas.openxmlformats.org/drawingml/2006/main" noGrp="1"/>
+          </p:cNvSpPr>
+          <p:nvPr>
+            <p:ph type="title" idx="0"/>
+          </p:nvPr>
+        </p:nvSpPr>
+        <p:spPr/>
+        <p:txBody>
+          <a:bodyPr xmlns:a="http://schemas.openxmlformats.org/drawingml/2006/main"/>
+          <a:lstStyle xmlns:a="http://schemas.openxmlformats.org/drawingml/2006/main"/>
+          <a:p xmlns:a="http://schemas.openxmlformats.org/drawingml/2006/main">
+            <a:r>
+              <a:t>How: OPE tests whether a policy is evaluable</a:t>
+            </a:r>
+          </a:p>
+        </p:txBody>
+      </p:sp>
+      <p:graphicFrame>
+        <p:nvGraphicFramePr>
+          <p:cNvPr id="13" name="Chart"/>
+          <p:cNvGraphicFramePr/>
+          <p:nvPr/>
+        </p:nvGraphicFramePr>
+        <p:xfrm>
+          <a:off xmlns:a="http://schemas.openxmlformats.org/drawingml/2006/main" x="4810125" y="1257300"/>
+          <a:ext xmlns:a="http://schemas.openxmlformats.org/drawingml/2006/main" cx="3524250" cy="2381250"/>
+        </p:xfrm>
+        <a:graphic xmlns:a="http://schemas.openxmlformats.org/drawingml/2006/main">
+          <a:graphicData uri="http://schemas.openxmlformats.org/drawingml/2006/chart">
+            <c:chart xmlns:r="http://schemas.openxmlformats.org/officeDocument/2006/relationships" xmlns:c="http://schemas.openxmlformats.org/drawingml/2006/chart" r:id="R482a2d29f3c64933"/>
+          </a:graphicData>
+        </a:graphic>
+      </p:graphicFrame>
+      <p:sp>
+        <p:nvSpPr>
+          <p:cNvPr id="8" name="">
+            <a:extLst xmlns:a="http://schemas.openxmlformats.org/drawingml/2006/main">
+              <a:ext uri="{FF2B5EF4-FFF2-40B4-BE49-F238E27FC236}">
+                <a16:creationId xmlns:a16="http://schemas.microsoft.com/office/drawing/2014/main" id="{0D5730CE-EF6E-4EEF-BFB1-D674517E2F79}"/>
+              </a:ext>
+            </a:extLst>
+          </p:cNvPr>
+          <p:cNvSpPr>
+            <a:spLocks xmlns:a="http://schemas.openxmlformats.org/drawingml/2006/main" noGrp="1"/>
+          </p:cNvSpPr>
+          <p:nvPr/>
+        </p:nvSpPr>
+        <p:spPr>
+          <a:xfrm xmlns:a="http://schemas.openxmlformats.org/drawingml/2006/main">
+            <a:off x="4857750" y="3771900"/>
+            <a:ext cx="3333750" cy="323850"/>
+          </a:xfrm>
+          <a:prstGeom xmlns:a="http://schemas.openxmlformats.org/drawingml/2006/main" prst="rect">
+            <a:avLst/>
+          </a:prstGeom>
+          <a:noFill xmlns:a="http://schemas.openxmlformats.org/drawingml/2006/main"/>
+          <a:ln xmlns:a="http://schemas.openxmlformats.org/drawingml/2006/main" w="0">
+            <a:noFill/>
+            <a:prstDash val="solid"/>
+          </a:ln>
+        </p:spPr>
+        <p:txBody>
+          <a:bodyPr xmlns:a="http://schemas.openxmlformats.org/drawingml/2006/main"/>
+          <a:lstStyle xmlns:a="http://schemas.openxmlformats.org/drawingml/2006/main"/>
+          <a:p xmlns:a="http://schemas.openxmlformats.org/drawingml/2006/main">
+            <a:pPr algn="l">
+              <a:defRPr sz="1050" b="1">
+                <a:solidFill>
+                  <a:srgbClr val="005293"/>
+                </a:solidFill>
+              </a:defRPr>
+            </a:pPr>
+            <a:r>
+              <a:rPr sz="1050" b="1">
+                <a:solidFill>
+                  <a:srgbClr val="005293"/>
+                </a:solidFill>
+              </a:rPr>
+              <a:t>At h = 0.05, CQL retains 36.2% effective support; greedy retains 0.8%.</a:t>
             </a:r>
           </a:p>
         </p:txBody>
@@ -16818,7 +18139,7 @@
     </p:spTree>
     <p:extLst>
       <p:ext uri="{BB962C8B-B14F-4D97-AF65-F5344CB8AC3E}">
-        <p14:creationId xmlns:p14="http://schemas.microsoft.com/office/powerpoint/2010/main" val="202101467"/>
+        <p14:creationId xmlns:p14="http://schemas.microsoft.com/office/powerpoint/2010/main" val="3265107568"/>
       </p:ext>
     </p:extLst>
   </p:cSld>

--- a/report/ebay_anchoring_rl_presentation.pptx
+++ b/report/ebay_anchoring_rl_presentation.pptx
@@ -2,30 +2,31 @@
 <file path=ppt/presentation.xml><?xml version="1.0" encoding="utf-8"?>
 <p:presentation xmlns:p="http://schemas.openxmlformats.org/presentationml/2006/main">
   <p:sldMasterIdLst>
-    <p:sldMasterId xmlns:r="http://schemas.openxmlformats.org/officeDocument/2006/relationships" id="2147483648" r:id="R36efdad330a748d6"/>
-    <p:sldMasterId xmlns:r="http://schemas.openxmlformats.org/officeDocument/2006/relationships" id="2147483651" r:id="Rfd8afe45cfc6451b"/>
-    <p:sldMasterId xmlns:r="http://schemas.openxmlformats.org/officeDocument/2006/relationships" id="2147483653" r:id="Rcddcdf10c9ec434c"/>
-    <p:sldMasterId xmlns:r="http://schemas.openxmlformats.org/officeDocument/2006/relationships" id="2147483656" r:id="R587b71eba5c6428f"/>
-    <p:sldMasterId xmlns:r="http://schemas.openxmlformats.org/officeDocument/2006/relationships" id="2147483659" r:id="R90ed40131d7c4418"/>
-    <p:sldMasterId xmlns:r="http://schemas.openxmlformats.org/officeDocument/2006/relationships" id="2147483678" r:id="R849b9fc974034a24"/>
-    <p:sldMasterId xmlns:r="http://schemas.openxmlformats.org/officeDocument/2006/relationships" id="2147483680" r:id="Rfd01af23512d4abb"/>
+    <p:sldMasterId xmlns:r="http://schemas.openxmlformats.org/officeDocument/2006/relationships" id="2147483648" r:id="Rac42406fd4de47c0"/>
+    <p:sldMasterId xmlns:r="http://schemas.openxmlformats.org/officeDocument/2006/relationships" id="2147483651" r:id="R45ae95d033094c4b"/>
+    <p:sldMasterId xmlns:r="http://schemas.openxmlformats.org/officeDocument/2006/relationships" id="2147483653" r:id="Rc12f72195dce453c"/>
+    <p:sldMasterId xmlns:r="http://schemas.openxmlformats.org/officeDocument/2006/relationships" id="2147483656" r:id="R87ffe2e50f37443e"/>
+    <p:sldMasterId xmlns:r="http://schemas.openxmlformats.org/officeDocument/2006/relationships" id="2147483659" r:id="Rbf5ae044a2aa400b"/>
+    <p:sldMasterId xmlns:r="http://schemas.openxmlformats.org/officeDocument/2006/relationships" id="2147483678" r:id="R56add585c64344fa"/>
+    <p:sldMasterId xmlns:r="http://schemas.openxmlformats.org/officeDocument/2006/relationships" id="2147483680" r:id="Raedad35e984e4a2b"/>
   </p:sldMasterIdLst>
   <p:notesMasterIdLst>
-    <p:notesMasterId xmlns:r="http://schemas.openxmlformats.org/officeDocument/2006/relationships" r:id="R9578b32faa364784"/>
+    <p:notesMasterId xmlns:r="http://schemas.openxmlformats.org/officeDocument/2006/relationships" r:id="R5fb2435cb3b845e8"/>
   </p:notesMasterIdLst>
   <p:sldIdLst>
-    <p:sldId xmlns:r="http://schemas.openxmlformats.org/officeDocument/2006/relationships" id="256" r:id="Rec2edb18c5084a41"/>
-    <p:sldId xmlns:r="http://schemas.openxmlformats.org/officeDocument/2006/relationships" id="257" r:id="Rf5959b7fc81f4b8f"/>
-    <p:sldId xmlns:r="http://schemas.openxmlformats.org/officeDocument/2006/relationships" id="258" r:id="R6129ba2fdf9741f9"/>
-    <p:sldId xmlns:r="http://schemas.openxmlformats.org/officeDocument/2006/relationships" id="259" r:id="Re6fa1360680e4a64"/>
-    <p:sldId xmlns:r="http://schemas.openxmlformats.org/officeDocument/2006/relationships" id="260" r:id="Rb2037f19f99740ad"/>
-    <p:sldId xmlns:r="http://schemas.openxmlformats.org/officeDocument/2006/relationships" id="261" r:id="Re2f4338eb3ff43b5"/>
-    <p:sldId xmlns:r="http://schemas.openxmlformats.org/officeDocument/2006/relationships" id="262" r:id="Rc0c000101ed045bc"/>
-    <p:sldId xmlns:r="http://schemas.openxmlformats.org/officeDocument/2006/relationships" id="263" r:id="Rd80567da6fc849bd"/>
-    <p:sldId xmlns:r="http://schemas.openxmlformats.org/officeDocument/2006/relationships" id="264" r:id="Rb6b8d639147747c2"/>
-    <p:sldId xmlns:r="http://schemas.openxmlformats.org/officeDocument/2006/relationships" id="265" r:id="R15e781b0c6e7488c"/>
-    <p:sldId xmlns:r="http://schemas.openxmlformats.org/officeDocument/2006/relationships" id="266" r:id="R0c11f72d339b44b7"/>
-    <p:sldId xmlns:r="http://schemas.openxmlformats.org/officeDocument/2006/relationships" id="267" r:id="R3f48ff8a48d04b71"/>
+    <p:sldId xmlns:r="http://schemas.openxmlformats.org/officeDocument/2006/relationships" id="256" r:id="Rec43373aa6724f53"/>
+    <p:sldId xmlns:r="http://schemas.openxmlformats.org/officeDocument/2006/relationships" id="257" r:id="R7b685f26b90a48f9"/>
+    <p:sldId xmlns:r="http://schemas.openxmlformats.org/officeDocument/2006/relationships" id="258" r:id="Rf0c8abfdd55f4208"/>
+    <p:sldId xmlns:r="http://schemas.openxmlformats.org/officeDocument/2006/relationships" id="259" r:id="Rf20a71498ae4476d"/>
+    <p:sldId xmlns:r="http://schemas.openxmlformats.org/officeDocument/2006/relationships" id="260" r:id="R58447623be554826"/>
+    <p:sldId xmlns:r="http://schemas.openxmlformats.org/officeDocument/2006/relationships" id="261" r:id="Rb4d31ab110704ea8"/>
+    <p:sldId xmlns:r="http://schemas.openxmlformats.org/officeDocument/2006/relationships" id="262" r:id="Rf1e3de2d96ab41a3"/>
+    <p:sldId xmlns:r="http://schemas.openxmlformats.org/officeDocument/2006/relationships" id="263" r:id="R9b402bcca22444eb"/>
+    <p:sldId xmlns:r="http://schemas.openxmlformats.org/officeDocument/2006/relationships" id="264" r:id="Re7dfec8dc72b4970"/>
+    <p:sldId xmlns:r="http://schemas.openxmlformats.org/officeDocument/2006/relationships" id="265" r:id="Rb3d9ac4722d54613"/>
+    <p:sldId xmlns:r="http://schemas.openxmlformats.org/officeDocument/2006/relationships" id="266" r:id="R49a92f5c024c4863"/>
+    <p:sldId xmlns:r="http://schemas.openxmlformats.org/officeDocument/2006/relationships" id="267" r:id="R9f123e46f5f6458d"/>
+    <p:sldId xmlns:r="http://schemas.openxmlformats.org/officeDocument/2006/relationships" id="268" r:id="R0e25531f839444dc"/>
   </p:sldIdLst>
   <p:sldSz cx="9144000" cy="5143500"/>
   <p:notesSz cx="6858000" cy="9144000"/>
@@ -521,7 +522,7 @@
           <a:lstStyle xmlns:a="http://schemas.openxmlformats.org/drawingml/2006/main"/>
           <a:p xmlns:a="http://schemas.openxmlformats.org/drawingml/2006/main">
             <a:r>
-              <a:t>Open with the frame: this is not a production-lift claim.</a:t>
+              <a:t>Open with the frame: this is buyer-side decision support, not a production-lift claim.</a:t>
             </a:r>
           </a:p>
           <a:p xmlns:a="http://schemas.openxmlformats.org/drawingml/2006/main">
@@ -594,11 +595,7 @@
         <p:txBody>
           <a:bodyPr xmlns:a="http://schemas.openxmlformats.org/drawingml/2006/main"/>
           <a:lstStyle xmlns:a="http://schemas.openxmlformats.org/drawingml/2006/main"/>
-          <a:p xmlns:a="http://schemas.openxmlformats.org/drawingml/2006/main">
-            <a:r>
-              <a:t>Transition from mechanics to conclusions.</a:t>
-            </a:r>
-          </a:p>
+          <a:p xmlns:a="http://schemas.openxmlformats.org/drawingml/2006/main"/>
         </p:txBody>
       </p:sp>
       <p:sp>
@@ -664,16 +661,7 @@
         <p:txBody>
           <a:bodyPr xmlns:a="http://schemas.openxmlformats.org/drawingml/2006/main"/>
           <a:lstStyle xmlns:a="http://schemas.openxmlformats.org/drawingml/2006/main"/>
-          <a:p xmlns:a="http://schemas.openxmlformats.org/drawingml/2006/main">
-            <a:r>
-              <a:t>This is the report's negative-but-instructive framing.</a:t>
-            </a:r>
-          </a:p>
-          <a:p xmlns:a="http://schemas.openxmlformats.org/drawingml/2006/main">
-            <a:r>
-              <a:t>Do not present CQL as a reward win; present it as support discipline.</a:t>
-            </a:r>
-          </a:p>
+          <a:p xmlns:a="http://schemas.openxmlformats.org/drawingml/2006/main"/>
         </p:txBody>
       </p:sp>
       <p:sp>
@@ -739,16 +727,73 @@
         <p:txBody>
           <a:bodyPr xmlns:a="http://schemas.openxmlformats.org/drawingml/2006/main"/>
           <a:lstStyle xmlns:a="http://schemas.openxmlformats.org/drawingml/2006/main"/>
-          <a:p xmlns:a="http://schemas.openxmlformats.org/drawingml/2006/main">
-            <a:r>
-              <a:t>Close with the claim boundary.</a:t>
-            </a:r>
-          </a:p>
-          <a:p xmlns:a="http://schemas.openxmlformats.org/drawingml/2006/main">
-            <a:r>
-              <a:t>This final line ties the project back to scientific methodology and future work.</a:t>
-            </a:r>
-          </a:p>
+          <a:p xmlns:a="http://schemas.openxmlformats.org/drawingml/2006/main"/>
+        </p:txBody>
+      </p:sp>
+      <p:sp>
+        <p:nvSpPr>
+          <p:cNvPr id="4" name="Slide Number Placeholder 3"/>
+          <p:cNvSpPr>
+            <a:spLocks xmlns:a="http://schemas.openxmlformats.org/drawingml/2006/main" noGrp="1"/>
+          </p:cNvSpPr>
+          <p:nvPr>
+            <p:ph type="sldNum" idx="5"/>
+          </p:nvPr>
+        </p:nvSpPr>
+        <p:spPr/>
+        <p:txBody>
+          <a:bodyPr xmlns:a="http://schemas.openxmlformats.org/drawingml/2006/main"/>
+          <a:lstStyle xmlns:a="http://schemas.openxmlformats.org/drawingml/2006/main"/>
+          <a:p xmlns:a="http://schemas.openxmlformats.org/drawingml/2006/main"/>
+        </p:txBody>
+      </p:sp>
+    </p:spTree>
+  </p:cSld>
+  <p:clrMapOvr>
+    <a:masterClrMapping xmlns:a="http://schemas.openxmlformats.org/drawingml/2006/main"/>
+  </p:clrMapOvr>
+</p:notes>
+</file>
+
+<file path=ppt/notesSlides/notesSlide13.xml><?xml version="1.0" encoding="utf-8"?>
+<p:notes xmlns:p="http://schemas.openxmlformats.org/presentationml/2006/main">
+  <p:cSld>
+    <p:spTree>
+      <p:nvGrpSpPr>
+        <p:cNvPr id="1" name=""/>
+        <p:cNvGrpSpPr/>
+        <p:nvPr/>
+      </p:nvGrpSpPr>
+      <p:grpSpPr>
+        <a:xfrm xmlns:a="http://schemas.openxmlformats.org/drawingml/2006/main"/>
+      </p:grpSpPr>
+      <p:sp>
+        <p:nvSpPr>
+          <p:cNvPr id="2" name="Slide Image Placeholder 1"/>
+          <p:cNvSpPr>
+            <a:spLocks xmlns:a="http://schemas.openxmlformats.org/drawingml/2006/main" noGrp="1"/>
+          </p:cNvSpPr>
+          <p:nvPr>
+            <p:ph type="sldImg" idx="0"/>
+          </p:nvPr>
+        </p:nvSpPr>
+        <p:spPr/>
+      </p:sp>
+      <p:sp>
+        <p:nvSpPr>
+          <p:cNvPr id="3" name="Notes Placeholder 2"/>
+          <p:cNvSpPr>
+            <a:spLocks xmlns:a="http://schemas.openxmlformats.org/drawingml/2006/main" noGrp="1"/>
+          </p:cNvSpPr>
+          <p:nvPr>
+            <p:ph type="body" idx="1"/>
+          </p:nvPr>
+        </p:nvSpPr>
+        <p:spPr/>
+        <p:txBody>
+          <a:bodyPr xmlns:a="http://schemas.openxmlformats.org/drawingml/2006/main"/>
+          <a:lstStyle xmlns:a="http://schemas.openxmlformats.org/drawingml/2006/main"/>
+          <a:p xmlns:a="http://schemas.openxmlformats.org/drawingml/2006/main"/>
         </p:txBody>
       </p:sp>
       <p:sp>
@@ -814,11 +859,7 @@
         <p:txBody>
           <a:bodyPr xmlns:a="http://schemas.openxmlformats.org/drawingml/2006/main"/>
           <a:lstStyle xmlns:a="http://schemas.openxmlformats.org/drawingml/2006/main"/>
-          <a:p xmlns:a="http://schemas.openxmlformats.org/drawingml/2006/main">
-            <a:r>
-              <a:t>Use this as the transition from the title into the motivation.</a:t>
-            </a:r>
-          </a:p>
+          <a:p xmlns:a="http://schemas.openxmlformats.org/drawingml/2006/main"/>
         </p:txBody>
       </p:sp>
       <p:sp>
@@ -886,12 +927,12 @@
           <a:lstStyle xmlns:a="http://schemas.openxmlformats.org/drawingml/2006/main"/>
           <a:p xmlns:a="http://schemas.openxmlformats.org/drawingml/2006/main">
             <a:r>
-              <a:t>Explain anchor ratio in plain terms: offer divided by list price.</a:t>
-            </a:r>
-          </a:p>
-          <a:p xmlns:a="http://schemas.openxmlformats.org/drawingml/2006/main">
-            <a:r>
-              <a:t>The tension is savings versus rejection risk.</a:t>
+              <a:t>Use the EUR 100 example to make the anchor ratio concrete.</a:t>
+            </a:r>
+          </a:p>
+          <a:p xmlns:a="http://schemas.openxmlformats.org/drawingml/2006/main">
+            <a:r>
+              <a:t>The chart is illustrative; do not present it as an empirical curve.</a:t>
             </a:r>
           </a:p>
         </p:txBody>
@@ -961,12 +1002,7 @@
           <a:lstStyle xmlns:a="http://schemas.openxmlformats.org/drawingml/2006/main"/>
           <a:p xmlns:a="http://schemas.openxmlformats.org/drawingml/2006/main">
             <a:r>
-              <a:t>Set up why offline RL and OPE are used.</a:t>
-            </a:r>
-          </a:p>
-          <a:p xmlns:a="http://schemas.openxmlformats.org/drawingml/2006/main">
-            <a:r>
-              <a:t>Avoid saying the model estimates a causal anchoring effect.</a:t>
+              <a:t>This slide closes the literature requirement and protects against causal overclaiming.</a:t>
             </a:r>
           </a:p>
         </p:txBody>
@@ -1034,11 +1070,7 @@
         <p:txBody>
           <a:bodyPr xmlns:a="http://schemas.openxmlformats.org/drawingml/2006/main"/>
           <a:lstStyle xmlns:a="http://schemas.openxmlformats.org/drawingml/2006/main"/>
-          <a:p xmlns:a="http://schemas.openxmlformats.org/drawingml/2006/main">
-            <a:r>
-              <a:t>Transition from motivation to pipeline and evaluation design.</a:t>
-            </a:r>
-          </a:p>
+          <a:p xmlns:a="http://schemas.openxmlformats.org/drawingml/2006/main"/>
         </p:txBody>
       </p:sp>
       <p:sp>
@@ -1104,16 +1136,7 @@
         <p:txBody>
           <a:bodyPr xmlns:a="http://schemas.openxmlformats.org/drawingml/2006/main"/>
           <a:lstStyle xmlns:a="http://schemas.openxmlformats.org/drawingml/2006/main"/>
-          <a:p xmlns:a="http://schemas.openxmlformats.org/drawingml/2006/main">
-            <a:r>
-              <a:t>This slide maps directly to Problem Formulation in the report.</a:t>
-            </a:r>
-          </a:p>
-          <a:p xmlns:a="http://schemas.openxmlformats.org/drawingml/2006/main">
-            <a:r>
-              <a:t>Mention the regressor removal as a simplification and correctness improvement.</a:t>
-            </a:r>
-          </a:p>
+          <a:p xmlns:a="http://schemas.openxmlformats.org/drawingml/2006/main"/>
         </p:txBody>
       </p:sp>
       <p:sp>
@@ -1179,16 +1202,7 @@
         <p:txBody>
           <a:bodyPr xmlns:a="http://schemas.openxmlformats.org/drawingml/2006/main"/>
           <a:lstStyle xmlns:a="http://schemas.openxmlformats.org/drawingml/2006/main"/>
-          <a:p xmlns:a="http://schemas.openxmlformats.org/drawingml/2006/main">
-            <a:r>
-              <a:t>Use this slide to answer why the supervised baseline is not enough.</a:t>
-            </a:r>
-          </a:p>
-          <a:p xmlns:a="http://schemas.openxmlformats.org/drawingml/2006/main">
-            <a:r>
-              <a:t>The issue is not that AUC is useless; the issue is greedy extrapolation.</a:t>
-            </a:r>
-          </a:p>
+          <a:p xmlns:a="http://schemas.openxmlformats.org/drawingml/2006/main"/>
         </p:txBody>
       </p:sp>
       <p:sp>
@@ -1254,16 +1268,7 @@
         <p:txBody>
           <a:bodyPr xmlns:a="http://schemas.openxmlformats.org/drawingml/2006/main"/>
           <a:lstStyle xmlns:a="http://schemas.openxmlformats.org/drawingml/2006/main"/>
-          <a:p xmlns:a="http://schemas.openxmlformats.org/drawingml/2006/main">
-            <a:r>
-              <a:t>State explicitly that the rows are not directly comparable as a ranking.</a:t>
-            </a:r>
-          </a:p>
-          <a:p xmlns:a="http://schemas.openxmlformats.org/drawingml/2006/main">
-            <a:r>
-              <a:t>The key is how each number was produced.</a:t>
-            </a:r>
-          </a:p>
+          <a:p xmlns:a="http://schemas.openxmlformats.org/drawingml/2006/main"/>
         </p:txBody>
       </p:sp>
       <p:sp>
@@ -1329,16 +1334,7 @@
         <p:txBody>
           <a:bodyPr xmlns:a="http://schemas.openxmlformats.org/drawingml/2006/main"/>
           <a:lstStyle xmlns:a="http://schemas.openxmlformats.org/drawingml/2006/main"/>
-          <a:p xmlns:a="http://schemas.openxmlformats.org/drawingml/2006/main">
-            <a:r>
-              <a:t>This is the central evidence slide.</a:t>
-            </a:r>
-          </a:p>
-          <a:p xmlns:a="http://schemas.openxmlformats.org/drawingml/2006/main">
-            <a:r>
-              <a:t>Explain ESS simply: how much usable logged support remains after weighting.</a:t>
-            </a:r>
-          </a:p>
+          <a:p xmlns:a="http://schemas.openxmlformats.org/drawingml/2006/main"/>
         </p:txBody>
       </p:sp>
       <p:sp>
@@ -1383,7 +1379,7 @@
           <p:cNvPr id="12" name="Titel 1">
             <a:extLst xmlns:a="http://schemas.openxmlformats.org/drawingml/2006/main">
               <a:ext uri="{FF2B5EF4-FFF2-40B4-BE49-F238E27FC236}">
-                <a16:creationId xmlns:a16="http://schemas.microsoft.com/office/drawing/2014/main" id="{9A4EB549-F9A3-4845-82C6-C2A3C1BB722F}"/>
+                <a16:creationId xmlns:a16="http://schemas.microsoft.com/office/drawing/2014/main" id="{DBBB0606-97D3-40D3-BD12-33674A1086D7}"/>
               </a:ext>
             </a:extLst>
           </p:cNvPr>
@@ -1437,7 +1433,7 @@
           <p:cNvPr id="16" name="Inhaltsplatzhalter 2">
             <a:extLst xmlns:a="http://schemas.openxmlformats.org/drawingml/2006/main">
               <a:ext uri="{FF2B5EF4-FFF2-40B4-BE49-F238E27FC236}">
-                <a16:creationId xmlns:a16="http://schemas.microsoft.com/office/drawing/2014/main" id="{82C43D66-5FB8-4D6E-8831-D4467AF2C5DE}"/>
+                <a16:creationId xmlns:a16="http://schemas.microsoft.com/office/drawing/2014/main" id="{4305F04F-2838-4DDD-BEFE-0D7749F8DF2B}"/>
               </a:ext>
             </a:extLst>
           </p:cNvPr>
@@ -1495,7 +1491,7 @@
           <p:cNvPr id="14" name="Rechteck 13">
             <a:extLst xmlns:a="http://schemas.openxmlformats.org/drawingml/2006/main">
               <a:ext uri="{FF2B5EF4-FFF2-40B4-BE49-F238E27FC236}">
-                <a16:creationId xmlns:a16="http://schemas.microsoft.com/office/drawing/2014/main" id="{B6A1662A-C474-41F0-9E49-ED00AEDE2D17}"/>
+                <a16:creationId xmlns:a16="http://schemas.microsoft.com/office/drawing/2014/main" id="{C19FE86D-B35C-42B8-A22F-87192944053E}"/>
               </a:ext>
             </a:extLst>
           </p:cNvPr>
@@ -1546,7 +1542,7 @@
           <p:cNvPr id="6" name="Foliennummernplatzhalter 5">
             <a:extLst xmlns:a="http://schemas.openxmlformats.org/drawingml/2006/main">
               <a:ext uri="{FF2B5EF4-FFF2-40B4-BE49-F238E27FC236}">
-                <a16:creationId xmlns:a16="http://schemas.microsoft.com/office/drawing/2014/main" id="{59F3C7F3-D3FB-4F12-AC64-5D65013A57CE}"/>
+                <a16:creationId xmlns:a16="http://schemas.microsoft.com/office/drawing/2014/main" id="{22F736D6-4E81-451F-A3B0-04762A1E9FC0}"/>
               </a:ext>
             </a:extLst>
           </p:cNvPr>
@@ -1590,7 +1586,7 @@
           <p:cNvPr id="10" name="Titel 1">
             <a:extLst xmlns:a="http://schemas.openxmlformats.org/drawingml/2006/main">
               <a:ext uri="{FF2B5EF4-FFF2-40B4-BE49-F238E27FC236}">
-                <a16:creationId xmlns:a16="http://schemas.microsoft.com/office/drawing/2014/main" id="{610BBE4C-3860-4728-8720-CA2E75409495}"/>
+                <a16:creationId xmlns:a16="http://schemas.microsoft.com/office/drawing/2014/main" id="{2205BFAB-FE18-40DB-97E3-79A43A59BEAB}"/>
               </a:ext>
             </a:extLst>
           </p:cNvPr>
@@ -1646,7 +1642,7 @@
           <p:cNvPr id="5" name="Foliennummernplatzhalter 4">
             <a:extLst xmlns:a="http://schemas.openxmlformats.org/drawingml/2006/main">
               <a:ext uri="{FF2B5EF4-FFF2-40B4-BE49-F238E27FC236}">
-                <a16:creationId xmlns:a16="http://schemas.microsoft.com/office/drawing/2014/main" id="{BC44031A-EFE8-4581-8FA2-F1A2DD1EA374}"/>
+                <a16:creationId xmlns:a16="http://schemas.microsoft.com/office/drawing/2014/main" id="{0800EA14-9E80-4403-BF38-69C87F988EC6}"/>
               </a:ext>
             </a:extLst>
           </p:cNvPr>
@@ -1673,7 +1669,7 @@
           <p:cNvPr id="7" name="Fußzeilenplatzhalter 6">
             <a:extLst xmlns:a="http://schemas.openxmlformats.org/drawingml/2006/main">
               <a:ext uri="{FF2B5EF4-FFF2-40B4-BE49-F238E27FC236}">
-                <a16:creationId xmlns:a16="http://schemas.microsoft.com/office/drawing/2014/main" id="{698A76E8-E369-40D1-B477-D5C0358846E9}"/>
+                <a16:creationId xmlns:a16="http://schemas.microsoft.com/office/drawing/2014/main" id="{B0B2516D-8007-4F98-ADE2-F4A699A28A68}"/>
               </a:ext>
             </a:extLst>
           </p:cNvPr>
@@ -1717,7 +1713,7 @@
           <p:cNvPr id="3" name="Inhaltsplatzhalter 2">
             <a:extLst xmlns:a="http://schemas.openxmlformats.org/drawingml/2006/main">
               <a:ext uri="{FF2B5EF4-FFF2-40B4-BE49-F238E27FC236}">
-                <a16:creationId xmlns:a16="http://schemas.microsoft.com/office/drawing/2014/main" id="{3F7C3D29-0C9D-4AA8-B980-7EC62FFC820A}"/>
+                <a16:creationId xmlns:a16="http://schemas.microsoft.com/office/drawing/2014/main" id="{8476312C-61A5-4367-850F-3BC4D9F175C3}"/>
               </a:ext>
             </a:extLst>
           </p:cNvPr>
@@ -1793,7 +1789,7 @@
           <p:cNvPr id="5" name="Foliennummernplatzhalter 4">
             <a:extLst xmlns:a="http://schemas.openxmlformats.org/drawingml/2006/main">
               <a:ext uri="{FF2B5EF4-FFF2-40B4-BE49-F238E27FC236}">
-                <a16:creationId xmlns:a16="http://schemas.microsoft.com/office/drawing/2014/main" id="{9A5E0CE5-E2B1-4EE9-ACE3-09E1E15B2861}"/>
+                <a16:creationId xmlns:a16="http://schemas.microsoft.com/office/drawing/2014/main" id="{6B8A33B5-EA39-4379-BAFD-403D4538B3EA}"/>
               </a:ext>
             </a:extLst>
           </p:cNvPr>
@@ -1820,7 +1816,7 @@
           <p:cNvPr id="7" name="Fußzeilenplatzhalter 6">
             <a:extLst xmlns:a="http://schemas.openxmlformats.org/drawingml/2006/main">
               <a:ext uri="{FF2B5EF4-FFF2-40B4-BE49-F238E27FC236}">
-                <a16:creationId xmlns:a16="http://schemas.microsoft.com/office/drawing/2014/main" id="{7A7A8F1B-1EA8-43E6-AC95-BDC17E002111}"/>
+                <a16:creationId xmlns:a16="http://schemas.microsoft.com/office/drawing/2014/main" id="{25A5C26E-D858-4267-8329-8C17D7A31160}"/>
               </a:ext>
             </a:extLst>
           </p:cNvPr>
@@ -1847,7 +1843,7 @@
           <p:cNvPr id="6" name="Textplatzhalter 7">
             <a:extLst xmlns:a="http://schemas.openxmlformats.org/drawingml/2006/main">
               <a:ext uri="{FF2B5EF4-FFF2-40B4-BE49-F238E27FC236}">
-                <a16:creationId xmlns:a16="http://schemas.microsoft.com/office/drawing/2014/main" id="{636D36AF-95DC-44E5-867C-5AE089A3DB3E}"/>
+                <a16:creationId xmlns:a16="http://schemas.microsoft.com/office/drawing/2014/main" id="{7652F0CE-E7FE-44C1-8372-D5070340FA63}"/>
               </a:ext>
             </a:extLst>
           </p:cNvPr>
@@ -2060,7 +2056,7 @@
           <p:cNvPr id="3" name="Inhaltsplatzhalter 2">
             <a:extLst xmlns:a="http://schemas.openxmlformats.org/drawingml/2006/main">
               <a:ext uri="{FF2B5EF4-FFF2-40B4-BE49-F238E27FC236}">
-                <a16:creationId xmlns:a16="http://schemas.microsoft.com/office/drawing/2014/main" id="{7CAB7C17-A5AD-4B0C-8D74-9C4AC8301458}"/>
+                <a16:creationId xmlns:a16="http://schemas.microsoft.com/office/drawing/2014/main" id="{AB72AEB2-19D1-40A1-AB45-79C4F2588B13}"/>
               </a:ext>
             </a:extLst>
           </p:cNvPr>
@@ -2136,7 +2132,7 @@
           <p:cNvPr id="5" name="Foliennummernplatzhalter 4">
             <a:extLst xmlns:a="http://schemas.openxmlformats.org/drawingml/2006/main">
               <a:ext uri="{FF2B5EF4-FFF2-40B4-BE49-F238E27FC236}">
-                <a16:creationId xmlns:a16="http://schemas.microsoft.com/office/drawing/2014/main" id="{7BE0B502-2217-4E1F-B85E-A60EBD240446}"/>
+                <a16:creationId xmlns:a16="http://schemas.microsoft.com/office/drawing/2014/main" id="{9BC1DC17-E589-48BA-BC32-E2418DB6625A}"/>
               </a:ext>
             </a:extLst>
           </p:cNvPr>
@@ -2163,7 +2159,7 @@
           <p:cNvPr id="7" name="Fußzeilenplatzhalter 6">
             <a:extLst xmlns:a="http://schemas.openxmlformats.org/drawingml/2006/main">
               <a:ext uri="{FF2B5EF4-FFF2-40B4-BE49-F238E27FC236}">
-                <a16:creationId xmlns:a16="http://schemas.microsoft.com/office/drawing/2014/main" id="{556AF79E-0CFE-4F30-8065-944EAEBE5E75}"/>
+                <a16:creationId xmlns:a16="http://schemas.microsoft.com/office/drawing/2014/main" id="{7CDF779B-E509-4D86-B6D3-C31E99A5001E}"/>
               </a:ext>
             </a:extLst>
           </p:cNvPr>
@@ -2190,7 +2186,7 @@
           <p:cNvPr id="6" name="Textplatzhalter 7">
             <a:extLst xmlns:a="http://schemas.openxmlformats.org/drawingml/2006/main">
               <a:ext uri="{FF2B5EF4-FFF2-40B4-BE49-F238E27FC236}">
-                <a16:creationId xmlns:a16="http://schemas.microsoft.com/office/drawing/2014/main" id="{1811A9AE-516B-4398-ACC0-0A6109378D9B}"/>
+                <a16:creationId xmlns:a16="http://schemas.microsoft.com/office/drawing/2014/main" id="{606792FA-DD00-4229-8DC9-B412C6BFA454}"/>
               </a:ext>
             </a:extLst>
           </p:cNvPr>
@@ -2312,7 +2308,7 @@
           <p:cNvPr id="3" name="Inhaltsplatzhalter 2">
             <a:extLst xmlns:a="http://schemas.openxmlformats.org/drawingml/2006/main">
               <a:ext uri="{FF2B5EF4-FFF2-40B4-BE49-F238E27FC236}">
-                <a16:creationId xmlns:a16="http://schemas.microsoft.com/office/drawing/2014/main" id="{79054BAA-CD8A-4356-83CC-D343A69D8342}"/>
+                <a16:creationId xmlns:a16="http://schemas.microsoft.com/office/drawing/2014/main" id="{703B62ED-38A3-44F2-BBC2-4E271E440056}"/>
               </a:ext>
             </a:extLst>
           </p:cNvPr>
@@ -2388,7 +2384,7 @@
           <p:cNvPr id="5" name="Foliennummernplatzhalter 4">
             <a:extLst xmlns:a="http://schemas.openxmlformats.org/drawingml/2006/main">
               <a:ext uri="{FF2B5EF4-FFF2-40B4-BE49-F238E27FC236}">
-                <a16:creationId xmlns:a16="http://schemas.microsoft.com/office/drawing/2014/main" id="{F5B1A7D2-266E-4DD9-9C41-76492A322096}"/>
+                <a16:creationId xmlns:a16="http://schemas.microsoft.com/office/drawing/2014/main" id="{880B1848-4CE3-4210-BA93-17FD1B5F025D}"/>
               </a:ext>
             </a:extLst>
           </p:cNvPr>
@@ -2415,7 +2411,7 @@
           <p:cNvPr id="7" name="Fußzeilenplatzhalter 6">
             <a:extLst xmlns:a="http://schemas.openxmlformats.org/drawingml/2006/main">
               <a:ext uri="{FF2B5EF4-FFF2-40B4-BE49-F238E27FC236}">
-                <a16:creationId xmlns:a16="http://schemas.microsoft.com/office/drawing/2014/main" id="{52EC5770-22CA-4CFA-B210-2198C6C1CC45}"/>
+                <a16:creationId xmlns:a16="http://schemas.microsoft.com/office/drawing/2014/main" id="{56434DA2-E31D-400E-9397-F12672CF876A}"/>
               </a:ext>
             </a:extLst>
           </p:cNvPr>
@@ -2442,7 +2438,7 @@
           <p:cNvPr id="6" name="Textplatzhalter 7">
             <a:extLst xmlns:a="http://schemas.openxmlformats.org/drawingml/2006/main">
               <a:ext uri="{FF2B5EF4-FFF2-40B4-BE49-F238E27FC236}">
-                <a16:creationId xmlns:a16="http://schemas.microsoft.com/office/drawing/2014/main" id="{550F141D-142C-4121-9F39-82F616BB8200}"/>
+                <a16:creationId xmlns:a16="http://schemas.microsoft.com/office/drawing/2014/main" id="{2EB550DB-B8CE-4283-B4F9-A073CC221255}"/>
               </a:ext>
             </a:extLst>
           </p:cNvPr>
@@ -2564,7 +2560,7 @@
           <p:cNvPr id="3" name="Inhaltsplatzhalter 2">
             <a:extLst xmlns:a="http://schemas.openxmlformats.org/drawingml/2006/main">
               <a:ext uri="{FF2B5EF4-FFF2-40B4-BE49-F238E27FC236}">
-                <a16:creationId xmlns:a16="http://schemas.microsoft.com/office/drawing/2014/main" id="{20BC1E01-A0C2-411E-A1DA-F42E41EEBE52}"/>
+                <a16:creationId xmlns:a16="http://schemas.microsoft.com/office/drawing/2014/main" id="{FD02C337-3501-4941-859C-F824844999DC}"/>
               </a:ext>
             </a:extLst>
           </p:cNvPr>
@@ -2640,7 +2636,7 @@
           <p:cNvPr id="5" name="Foliennummernplatzhalter 4">
             <a:extLst xmlns:a="http://schemas.openxmlformats.org/drawingml/2006/main">
               <a:ext uri="{FF2B5EF4-FFF2-40B4-BE49-F238E27FC236}">
-                <a16:creationId xmlns:a16="http://schemas.microsoft.com/office/drawing/2014/main" id="{1705F7CE-6125-49C8-9035-58B4B8024098}"/>
+                <a16:creationId xmlns:a16="http://schemas.microsoft.com/office/drawing/2014/main" id="{C138E9C3-60EF-4B94-9F8C-BA4266369FA5}"/>
               </a:ext>
             </a:extLst>
           </p:cNvPr>
@@ -2667,7 +2663,7 @@
           <p:cNvPr id="7" name="Fußzeilenplatzhalter 6">
             <a:extLst xmlns:a="http://schemas.openxmlformats.org/drawingml/2006/main">
               <a:ext uri="{FF2B5EF4-FFF2-40B4-BE49-F238E27FC236}">
-                <a16:creationId xmlns:a16="http://schemas.microsoft.com/office/drawing/2014/main" id="{A9730C4B-8063-4F20-A01C-EE39E4D69E6F}"/>
+                <a16:creationId xmlns:a16="http://schemas.microsoft.com/office/drawing/2014/main" id="{B0C82233-1DAB-4F11-BF18-EE69A5855B5B}"/>
               </a:ext>
             </a:extLst>
           </p:cNvPr>
@@ -2858,7 +2854,7 @@
           <p:cNvPr id="3" name="Inhaltsplatzhalter 2">
             <a:extLst xmlns:a="http://schemas.openxmlformats.org/drawingml/2006/main">
               <a:ext uri="{FF2B5EF4-FFF2-40B4-BE49-F238E27FC236}">
-                <a16:creationId xmlns:a16="http://schemas.microsoft.com/office/drawing/2014/main" id="{B97B1E55-9A47-47F5-B95C-BDCE29F1B38C}"/>
+                <a16:creationId xmlns:a16="http://schemas.microsoft.com/office/drawing/2014/main" id="{A9E757B7-83C8-416E-9FC0-ACF34C35D672}"/>
               </a:ext>
             </a:extLst>
           </p:cNvPr>
@@ -2934,7 +2930,7 @@
           <p:cNvPr id="5" name="Foliennummernplatzhalter 4">
             <a:extLst xmlns:a="http://schemas.openxmlformats.org/drawingml/2006/main">
               <a:ext uri="{FF2B5EF4-FFF2-40B4-BE49-F238E27FC236}">
-                <a16:creationId xmlns:a16="http://schemas.microsoft.com/office/drawing/2014/main" id="{411CB76C-581A-4600-BB2B-1634279C8C1E}"/>
+                <a16:creationId xmlns:a16="http://schemas.microsoft.com/office/drawing/2014/main" id="{CA05C56C-BF0C-49C9-BA8E-C5F64A4526F3}"/>
               </a:ext>
             </a:extLst>
           </p:cNvPr>
@@ -2961,7 +2957,7 @@
           <p:cNvPr id="7" name="Fußzeilenplatzhalter 6">
             <a:extLst xmlns:a="http://schemas.openxmlformats.org/drawingml/2006/main">
               <a:ext uri="{FF2B5EF4-FFF2-40B4-BE49-F238E27FC236}">
-                <a16:creationId xmlns:a16="http://schemas.microsoft.com/office/drawing/2014/main" id="{C4F3BA6A-3BE4-4CB7-9788-3FE2DD0AB144}"/>
+                <a16:creationId xmlns:a16="http://schemas.microsoft.com/office/drawing/2014/main" id="{07A87AA3-49A1-491C-B7DC-D860DF3D80C4}"/>
               </a:ext>
             </a:extLst>
           </p:cNvPr>
@@ -3061,7 +3057,7 @@
           <p:cNvPr id="11" name="Inhaltsplatzhalter 2">
             <a:extLst xmlns:a="http://schemas.openxmlformats.org/drawingml/2006/main">
               <a:ext uri="{FF2B5EF4-FFF2-40B4-BE49-F238E27FC236}">
-                <a16:creationId xmlns:a16="http://schemas.microsoft.com/office/drawing/2014/main" id="{4651B423-BFD2-4645-894A-942980817246}"/>
+                <a16:creationId xmlns:a16="http://schemas.microsoft.com/office/drawing/2014/main" id="{70F5258B-C96A-4339-8F6B-B6B098C16EF3}"/>
               </a:ext>
             </a:extLst>
           </p:cNvPr>
@@ -3138,7 +3134,7 @@
           <p:cNvPr id="13" name="Inhaltsplatzhalter 2">
             <a:extLst xmlns:a="http://schemas.openxmlformats.org/drawingml/2006/main">
               <a:ext uri="{FF2B5EF4-FFF2-40B4-BE49-F238E27FC236}">
-                <a16:creationId xmlns:a16="http://schemas.microsoft.com/office/drawing/2014/main" id="{F1B7DA78-E76A-4204-9EBE-6EE20D1F0BED}"/>
+                <a16:creationId xmlns:a16="http://schemas.microsoft.com/office/drawing/2014/main" id="{CD038F35-9282-401B-905E-E6193277ED8A}"/>
               </a:ext>
             </a:extLst>
           </p:cNvPr>
@@ -3215,7 +3211,7 @@
           <p:cNvPr id="6" name="Foliennummernplatzhalter 5">
             <a:extLst xmlns:a="http://schemas.openxmlformats.org/drawingml/2006/main">
               <a:ext uri="{FF2B5EF4-FFF2-40B4-BE49-F238E27FC236}">
-                <a16:creationId xmlns:a16="http://schemas.microsoft.com/office/drawing/2014/main" id="{7CB0BD19-C75D-4F2C-A50C-B49B73CCE65F}"/>
+                <a16:creationId xmlns:a16="http://schemas.microsoft.com/office/drawing/2014/main" id="{1384436B-8DD7-468F-9308-A11F92976070}"/>
               </a:ext>
             </a:extLst>
           </p:cNvPr>
@@ -3242,7 +3238,7 @@
           <p:cNvPr id="8" name="Fußzeilenplatzhalter 7">
             <a:extLst xmlns:a="http://schemas.openxmlformats.org/drawingml/2006/main">
               <a:ext uri="{FF2B5EF4-FFF2-40B4-BE49-F238E27FC236}">
-                <a16:creationId xmlns:a16="http://schemas.microsoft.com/office/drawing/2014/main" id="{E362D030-EAB3-4FB3-8A1D-48DA809088EB}"/>
+                <a16:creationId xmlns:a16="http://schemas.microsoft.com/office/drawing/2014/main" id="{4CAE1E4F-A6CB-45AF-AD79-D651131B72A5}"/>
               </a:ext>
             </a:extLst>
           </p:cNvPr>
@@ -3433,7 +3429,7 @@
           <p:cNvPr id="11" name="Inhaltsplatzhalter 2">
             <a:extLst xmlns:a="http://schemas.openxmlformats.org/drawingml/2006/main">
               <a:ext uri="{FF2B5EF4-FFF2-40B4-BE49-F238E27FC236}">
-                <a16:creationId xmlns:a16="http://schemas.microsoft.com/office/drawing/2014/main" id="{0C487978-2D99-4BA3-97DA-E517FC329D47}"/>
+                <a16:creationId xmlns:a16="http://schemas.microsoft.com/office/drawing/2014/main" id="{227C99F9-78D3-441F-AEA4-87748B206DB9}"/>
               </a:ext>
             </a:extLst>
           </p:cNvPr>
@@ -3510,7 +3506,7 @@
           <p:cNvPr id="13" name="Inhaltsplatzhalter 2">
             <a:extLst xmlns:a="http://schemas.openxmlformats.org/drawingml/2006/main">
               <a:ext uri="{FF2B5EF4-FFF2-40B4-BE49-F238E27FC236}">
-                <a16:creationId xmlns:a16="http://schemas.microsoft.com/office/drawing/2014/main" id="{EDB22EBB-1103-4F03-9658-96E2CC3B21CC}"/>
+                <a16:creationId xmlns:a16="http://schemas.microsoft.com/office/drawing/2014/main" id="{A52CDB22-8DDB-4186-AD79-88A94D661C75}"/>
               </a:ext>
             </a:extLst>
           </p:cNvPr>
@@ -3587,7 +3583,7 @@
           <p:cNvPr id="6" name="Foliennummernplatzhalter 5">
             <a:extLst xmlns:a="http://schemas.openxmlformats.org/drawingml/2006/main">
               <a:ext uri="{FF2B5EF4-FFF2-40B4-BE49-F238E27FC236}">
-                <a16:creationId xmlns:a16="http://schemas.microsoft.com/office/drawing/2014/main" id="{0B33DE64-8FA8-4FF0-9E9A-B4CCDB6B0CA4}"/>
+                <a16:creationId xmlns:a16="http://schemas.microsoft.com/office/drawing/2014/main" id="{992F7371-C5D2-440C-A40D-802BAD8515C9}"/>
               </a:ext>
             </a:extLst>
           </p:cNvPr>
@@ -3614,7 +3610,7 @@
           <p:cNvPr id="8" name="Fußzeilenplatzhalter 7">
             <a:extLst xmlns:a="http://schemas.openxmlformats.org/drawingml/2006/main">
               <a:ext uri="{FF2B5EF4-FFF2-40B4-BE49-F238E27FC236}">
-                <a16:creationId xmlns:a16="http://schemas.microsoft.com/office/drawing/2014/main" id="{81CEED1D-ADB4-47EA-A524-FC93B6480EBC}"/>
+                <a16:creationId xmlns:a16="http://schemas.microsoft.com/office/drawing/2014/main" id="{7446E47E-8ACB-4DD9-8A9A-D7F362DDB395}"/>
               </a:ext>
             </a:extLst>
           </p:cNvPr>
@@ -3714,7 +3710,7 @@
           <p:cNvPr id="18" name="Textplatzhalter 7">
             <a:extLst xmlns:a="http://schemas.openxmlformats.org/drawingml/2006/main">
               <a:ext uri="{FF2B5EF4-FFF2-40B4-BE49-F238E27FC236}">
-                <a16:creationId xmlns:a16="http://schemas.microsoft.com/office/drawing/2014/main" id="{349C9AB4-42BC-4876-84C1-D1CA98B60EC6}"/>
+                <a16:creationId xmlns:a16="http://schemas.microsoft.com/office/drawing/2014/main" id="{E3A4DA55-55D5-4D2D-AE38-A263D1F6BF09}"/>
               </a:ext>
             </a:extLst>
           </p:cNvPr>
@@ -3764,7 +3760,7 @@
           <p:cNvPr id="7" name="Foliennummernplatzhalter 6">
             <a:extLst xmlns:a="http://schemas.openxmlformats.org/drawingml/2006/main">
               <a:ext uri="{FF2B5EF4-FFF2-40B4-BE49-F238E27FC236}">
-                <a16:creationId xmlns:a16="http://schemas.microsoft.com/office/drawing/2014/main" id="{D3D5B76D-D201-4FEE-A402-A624CA38433B}"/>
+                <a16:creationId xmlns:a16="http://schemas.microsoft.com/office/drawing/2014/main" id="{EC35F762-93D9-40B4-BA52-E212320BB41F}"/>
               </a:ext>
             </a:extLst>
           </p:cNvPr>
@@ -3791,7 +3787,7 @@
           <p:cNvPr id="12" name="Fußzeilenplatzhalter 11">
             <a:extLst xmlns:a="http://schemas.openxmlformats.org/drawingml/2006/main">
               <a:ext uri="{FF2B5EF4-FFF2-40B4-BE49-F238E27FC236}">
-                <a16:creationId xmlns:a16="http://schemas.microsoft.com/office/drawing/2014/main" id="{41EA85AE-510A-459A-99BC-E73F2ECB8DDE}"/>
+                <a16:creationId xmlns:a16="http://schemas.microsoft.com/office/drawing/2014/main" id="{1884C8DD-899C-498D-ADFB-027AC9D8BEAC}"/>
               </a:ext>
             </a:extLst>
           </p:cNvPr>
@@ -3818,7 +3814,7 @@
           <p:cNvPr id="8" name="Inhaltsplatzhalter 9">
             <a:extLst xmlns:a="http://schemas.openxmlformats.org/drawingml/2006/main">
               <a:ext uri="{FF2B5EF4-FFF2-40B4-BE49-F238E27FC236}">
-                <a16:creationId xmlns:a16="http://schemas.microsoft.com/office/drawing/2014/main" id="{706B941C-23B2-4855-B55D-9652B41CB359}"/>
+                <a16:creationId xmlns:a16="http://schemas.microsoft.com/office/drawing/2014/main" id="{B17ECBDD-D9A0-4DC2-A8F2-CCE46852DE3C}"/>
               </a:ext>
             </a:extLst>
           </p:cNvPr>
@@ -3892,7 +3888,7 @@
           <p:cNvPr id="11" name="Bildplatzhalter 2">
             <a:extLst xmlns:a="http://schemas.openxmlformats.org/drawingml/2006/main">
               <a:ext uri="{FF2B5EF4-FFF2-40B4-BE49-F238E27FC236}">
-                <a16:creationId xmlns:a16="http://schemas.microsoft.com/office/drawing/2014/main" id="{8BDB3539-B816-4610-B008-2A66A1DBD407}"/>
+                <a16:creationId xmlns:a16="http://schemas.microsoft.com/office/drawing/2014/main" id="{9A3A6E6E-CA05-4F6C-87E1-90229BAD54D6}"/>
               </a:ext>
             </a:extLst>
           </p:cNvPr>
@@ -4095,7 +4091,7 @@
           <p:cNvPr id="18" name="Textplatzhalter 7">
             <a:extLst xmlns:a="http://schemas.openxmlformats.org/drawingml/2006/main">
               <a:ext uri="{FF2B5EF4-FFF2-40B4-BE49-F238E27FC236}">
-                <a16:creationId xmlns:a16="http://schemas.microsoft.com/office/drawing/2014/main" id="{495BB896-DF84-4227-BF48-674128686108}"/>
+                <a16:creationId xmlns:a16="http://schemas.microsoft.com/office/drawing/2014/main" id="{59505522-EAD6-47B8-AEF8-5B1EAE71CDD9}"/>
               </a:ext>
             </a:extLst>
           </p:cNvPr>
@@ -4145,7 +4141,7 @@
           <p:cNvPr id="7" name="Foliennummernplatzhalter 6">
             <a:extLst xmlns:a="http://schemas.openxmlformats.org/drawingml/2006/main">
               <a:ext uri="{FF2B5EF4-FFF2-40B4-BE49-F238E27FC236}">
-                <a16:creationId xmlns:a16="http://schemas.microsoft.com/office/drawing/2014/main" id="{48D6844B-C385-435B-8335-C88915E217AF}"/>
+                <a16:creationId xmlns:a16="http://schemas.microsoft.com/office/drawing/2014/main" id="{EFF41A7D-084A-4618-8A7E-4A2D9680383F}"/>
               </a:ext>
             </a:extLst>
           </p:cNvPr>
@@ -4172,7 +4168,7 @@
           <p:cNvPr id="12" name="Fußzeilenplatzhalter 11">
             <a:extLst xmlns:a="http://schemas.openxmlformats.org/drawingml/2006/main">
               <a:ext uri="{FF2B5EF4-FFF2-40B4-BE49-F238E27FC236}">
-                <a16:creationId xmlns:a16="http://schemas.microsoft.com/office/drawing/2014/main" id="{E88628A8-D405-43C0-A855-1C68040353A6}"/>
+                <a16:creationId xmlns:a16="http://schemas.microsoft.com/office/drawing/2014/main" id="{F87F39BD-D0D0-4875-B3FA-1A48DA0BC453}"/>
               </a:ext>
             </a:extLst>
           </p:cNvPr>
@@ -4199,7 +4195,7 @@
           <p:cNvPr id="8" name="Inhaltsplatzhalter 9">
             <a:extLst xmlns:a="http://schemas.openxmlformats.org/drawingml/2006/main">
               <a:ext uri="{FF2B5EF4-FFF2-40B4-BE49-F238E27FC236}">
-                <a16:creationId xmlns:a16="http://schemas.microsoft.com/office/drawing/2014/main" id="{04DECFEA-1740-40EC-B246-1782A0DD1AF1}"/>
+                <a16:creationId xmlns:a16="http://schemas.microsoft.com/office/drawing/2014/main" id="{7C1A8CDE-A72A-425E-A42A-7AD1EDDFEEF6}"/>
               </a:ext>
             </a:extLst>
           </p:cNvPr>
@@ -4273,7 +4269,7 @@
           <p:cNvPr id="11" name="Bildplatzhalter 2">
             <a:extLst xmlns:a="http://schemas.openxmlformats.org/drawingml/2006/main">
               <a:ext uri="{FF2B5EF4-FFF2-40B4-BE49-F238E27FC236}">
-                <a16:creationId xmlns:a16="http://schemas.microsoft.com/office/drawing/2014/main" id="{E40B3265-AB26-47F6-80EC-485DFB635F3A}"/>
+                <a16:creationId xmlns:a16="http://schemas.microsoft.com/office/drawing/2014/main" id="{C450B946-72E5-4B96-B5A1-D03F717E9120}"/>
               </a:ext>
             </a:extLst>
           </p:cNvPr>
@@ -4389,7 +4385,7 @@
           <p:nvPr/>
         </p:nvPicPr>
         <p:blipFill>
-          <a:blip xmlns:r="http://schemas.openxmlformats.org/officeDocument/2006/relationships" xmlns:a="http://schemas.openxmlformats.org/drawingml/2006/main" r:embed="Ra752140831a042c4"/>
+          <a:blip xmlns:r="http://schemas.openxmlformats.org/officeDocument/2006/relationships" xmlns:a="http://schemas.openxmlformats.org/drawingml/2006/main" r:embed="Rc1216209ccda49fd"/>
           <a:stretch xmlns:a="http://schemas.openxmlformats.org/drawingml/2006/main">
             <a:fillRect l="0" t="0" r="0" b="0"/>
           </a:stretch>
@@ -4409,7 +4405,7 @@
           <p:cNvPr id="12" name="Titel 1">
             <a:extLst xmlns:a="http://schemas.openxmlformats.org/drawingml/2006/main">
               <a:ext uri="{FF2B5EF4-FFF2-40B4-BE49-F238E27FC236}">
-                <a16:creationId xmlns:a16="http://schemas.microsoft.com/office/drawing/2014/main" id="{D7660815-41FC-4171-98FD-B5D88701B7BD}"/>
+                <a16:creationId xmlns:a16="http://schemas.microsoft.com/office/drawing/2014/main" id="{710DE8E7-5AF7-4421-91A3-8985528CFF88}"/>
               </a:ext>
             </a:extLst>
           </p:cNvPr>
@@ -4463,7 +4459,7 @@
           <p:cNvPr id="16" name="Inhaltsplatzhalter 2">
             <a:extLst xmlns:a="http://schemas.openxmlformats.org/drawingml/2006/main">
               <a:ext uri="{FF2B5EF4-FFF2-40B4-BE49-F238E27FC236}">
-                <a16:creationId xmlns:a16="http://schemas.microsoft.com/office/drawing/2014/main" id="{162C22B9-B08C-497A-A4C1-18F99A5C8D7B}"/>
+                <a16:creationId xmlns:a16="http://schemas.microsoft.com/office/drawing/2014/main" id="{B465E5B6-C640-4A4F-8422-1C0AF014F960}"/>
               </a:ext>
             </a:extLst>
           </p:cNvPr>
@@ -4521,7 +4517,7 @@
           <p:cNvPr id="14" name="Rechteck 13">
             <a:extLst xmlns:a="http://schemas.openxmlformats.org/drawingml/2006/main">
               <a:ext uri="{FF2B5EF4-FFF2-40B4-BE49-F238E27FC236}">
-                <a16:creationId xmlns:a16="http://schemas.microsoft.com/office/drawing/2014/main" id="{238357C7-4FF5-46BF-9031-52B45F65BFA5}"/>
+                <a16:creationId xmlns:a16="http://schemas.microsoft.com/office/drawing/2014/main" id="{A86FBD57-EC94-4409-A51A-848C195DA989}"/>
               </a:ext>
             </a:extLst>
           </p:cNvPr>
@@ -4572,7 +4568,7 @@
           <p:cNvPr id="6" name="Foliennummernplatzhalter 5">
             <a:extLst xmlns:a="http://schemas.openxmlformats.org/drawingml/2006/main">
               <a:ext uri="{FF2B5EF4-FFF2-40B4-BE49-F238E27FC236}">
-                <a16:creationId xmlns:a16="http://schemas.microsoft.com/office/drawing/2014/main" id="{D455CE3B-EEC3-413B-9D17-0590C94F06A8}"/>
+                <a16:creationId xmlns:a16="http://schemas.microsoft.com/office/drawing/2014/main" id="{C1079152-7445-405C-BE21-A134B9E02B80}"/>
               </a:ext>
             </a:extLst>
           </p:cNvPr>
@@ -4616,7 +4612,7 @@
           <p:cNvPr id="9" name="Rechteck 8">
             <a:extLst xmlns:a="http://schemas.openxmlformats.org/drawingml/2006/main">
               <a:ext uri="{FF2B5EF4-FFF2-40B4-BE49-F238E27FC236}">
-                <a16:creationId xmlns:a16="http://schemas.microsoft.com/office/drawing/2014/main" id="{7614EC11-A042-4342-A5CB-CE3ABA2296CD}"/>
+                <a16:creationId xmlns:a16="http://schemas.microsoft.com/office/drawing/2014/main" id="{E4230E61-2D3A-4A93-98EA-384951F0BA77}"/>
               </a:ext>
             </a:extLst>
           </p:cNvPr>
@@ -4660,7 +4656,7 @@
           <p:cNvPr id="7" name="Foliennummernplatzhalter 6">
             <a:extLst xmlns:a="http://schemas.openxmlformats.org/drawingml/2006/main">
               <a:ext uri="{FF2B5EF4-FFF2-40B4-BE49-F238E27FC236}">
-                <a16:creationId xmlns:a16="http://schemas.microsoft.com/office/drawing/2014/main" id="{B1A28750-E781-4948-B211-90F7218125EC}"/>
+                <a16:creationId xmlns:a16="http://schemas.microsoft.com/office/drawing/2014/main" id="{C0338CCD-EF01-4121-BC3D-48098F7CF355}"/>
               </a:ext>
             </a:extLst>
           </p:cNvPr>
@@ -4687,7 +4683,7 @@
           <p:cNvPr id="12" name="Fußzeilenplatzhalter 11">
             <a:extLst xmlns:a="http://schemas.openxmlformats.org/drawingml/2006/main">
               <a:ext uri="{FF2B5EF4-FFF2-40B4-BE49-F238E27FC236}">
-                <a16:creationId xmlns:a16="http://schemas.microsoft.com/office/drawing/2014/main" id="{1C1820C0-D5EC-49E3-978F-5857FDF8713D}"/>
+                <a16:creationId xmlns:a16="http://schemas.microsoft.com/office/drawing/2014/main" id="{C320FD19-0CB5-4AE2-AF60-0DC10E291828}"/>
               </a:ext>
             </a:extLst>
           </p:cNvPr>
@@ -4714,7 +4710,7 @@
           <p:cNvPr id="8" name="Inhaltsplatzhalter 9">
             <a:extLst xmlns:a="http://schemas.openxmlformats.org/drawingml/2006/main">
               <a:ext uri="{FF2B5EF4-FFF2-40B4-BE49-F238E27FC236}">
-                <a16:creationId xmlns:a16="http://schemas.microsoft.com/office/drawing/2014/main" id="{9BB51670-3623-4E7A-8BB4-D19E6F3E0939}"/>
+                <a16:creationId xmlns:a16="http://schemas.microsoft.com/office/drawing/2014/main" id="{10843598-2178-4EB2-8716-97EC323D0146}"/>
               </a:ext>
             </a:extLst>
           </p:cNvPr>
@@ -4788,7 +4784,7 @@
           <p:cNvPr id="11" name="Bildplatzhalter 2">
             <a:extLst xmlns:a="http://schemas.openxmlformats.org/drawingml/2006/main">
               <a:ext uri="{FF2B5EF4-FFF2-40B4-BE49-F238E27FC236}">
-                <a16:creationId xmlns:a16="http://schemas.microsoft.com/office/drawing/2014/main" id="{A69F8112-E76D-49BD-9F4A-1D73B1DFB040}"/>
+                <a16:creationId xmlns:a16="http://schemas.microsoft.com/office/drawing/2014/main" id="{A253C37A-CC43-4335-91D0-2AB8CD3784E3}"/>
               </a:ext>
             </a:extLst>
           </p:cNvPr>
@@ -4827,7 +4823,7 @@
           <p:cNvPr id="10" name="Textplatzhalter 7">
             <a:extLst xmlns:a="http://schemas.openxmlformats.org/drawingml/2006/main">
               <a:ext uri="{FF2B5EF4-FFF2-40B4-BE49-F238E27FC236}">
-                <a16:creationId xmlns:a16="http://schemas.microsoft.com/office/drawing/2014/main" id="{01E6D905-F7CE-4A9C-81D1-A60B947869C4}"/>
+                <a16:creationId xmlns:a16="http://schemas.microsoft.com/office/drawing/2014/main" id="{E7004A25-3EBF-48D6-9779-620444C00183}"/>
               </a:ext>
             </a:extLst>
           </p:cNvPr>
@@ -5041,7 +5037,7 @@
           <p:cNvPr id="9" name="Rechteck 8">
             <a:extLst xmlns:a="http://schemas.openxmlformats.org/drawingml/2006/main">
               <a:ext uri="{FF2B5EF4-FFF2-40B4-BE49-F238E27FC236}">
-                <a16:creationId xmlns:a16="http://schemas.microsoft.com/office/drawing/2014/main" id="{6B04B78B-AB3E-4B73-9278-4811796A7FD2}"/>
+                <a16:creationId xmlns:a16="http://schemas.microsoft.com/office/drawing/2014/main" id="{6E300778-931C-42F1-AE13-435F4D22D349}"/>
               </a:ext>
             </a:extLst>
           </p:cNvPr>
@@ -5085,7 +5081,7 @@
           <p:cNvPr id="7" name="Foliennummernplatzhalter 6">
             <a:extLst xmlns:a="http://schemas.openxmlformats.org/drawingml/2006/main">
               <a:ext uri="{FF2B5EF4-FFF2-40B4-BE49-F238E27FC236}">
-                <a16:creationId xmlns:a16="http://schemas.microsoft.com/office/drawing/2014/main" id="{73195A0A-FFAD-4C28-8A7A-5B4810549F9F}"/>
+                <a16:creationId xmlns:a16="http://schemas.microsoft.com/office/drawing/2014/main" id="{39A5D65B-9D7A-4450-83EB-8A66CE1FB076}"/>
               </a:ext>
             </a:extLst>
           </p:cNvPr>
@@ -5112,7 +5108,7 @@
           <p:cNvPr id="12" name="Fußzeilenplatzhalter 11">
             <a:extLst xmlns:a="http://schemas.openxmlformats.org/drawingml/2006/main">
               <a:ext uri="{FF2B5EF4-FFF2-40B4-BE49-F238E27FC236}">
-                <a16:creationId xmlns:a16="http://schemas.microsoft.com/office/drawing/2014/main" id="{E0E6FAC7-9AE9-4AE2-9B90-D10C7A86E0F8}"/>
+                <a16:creationId xmlns:a16="http://schemas.microsoft.com/office/drawing/2014/main" id="{9B353CA0-1B1A-4DF0-A9A0-FF8CF00F7AA1}"/>
               </a:ext>
             </a:extLst>
           </p:cNvPr>
@@ -5139,7 +5135,7 @@
           <p:cNvPr id="8" name="Inhaltsplatzhalter 9">
             <a:extLst xmlns:a="http://schemas.openxmlformats.org/drawingml/2006/main">
               <a:ext uri="{FF2B5EF4-FFF2-40B4-BE49-F238E27FC236}">
-                <a16:creationId xmlns:a16="http://schemas.microsoft.com/office/drawing/2014/main" id="{D3710DE9-2E1F-4505-87AF-DCAEC39F7AC1}"/>
+                <a16:creationId xmlns:a16="http://schemas.microsoft.com/office/drawing/2014/main" id="{360ED430-DB59-4C3D-8BDC-6D70A70D707A}"/>
               </a:ext>
             </a:extLst>
           </p:cNvPr>
@@ -5213,7 +5209,7 @@
           <p:cNvPr id="11" name="Bildplatzhalter 2">
             <a:extLst xmlns:a="http://schemas.openxmlformats.org/drawingml/2006/main">
               <a:ext uri="{FF2B5EF4-FFF2-40B4-BE49-F238E27FC236}">
-                <a16:creationId xmlns:a16="http://schemas.microsoft.com/office/drawing/2014/main" id="{B6A9E4CB-AA1D-4C10-8D48-1B05F3E769FA}"/>
+                <a16:creationId xmlns:a16="http://schemas.microsoft.com/office/drawing/2014/main" id="{2C40D364-4ADA-4154-8CC9-093078288899}"/>
               </a:ext>
             </a:extLst>
           </p:cNvPr>
@@ -5252,7 +5248,7 @@
           <p:cNvPr id="10" name="Textplatzhalter 7">
             <a:extLst xmlns:a="http://schemas.openxmlformats.org/drawingml/2006/main">
               <a:ext uri="{FF2B5EF4-FFF2-40B4-BE49-F238E27FC236}">
-                <a16:creationId xmlns:a16="http://schemas.microsoft.com/office/drawing/2014/main" id="{736A49E1-7ECF-449A-93EB-EF5F2292C9E8}"/>
+                <a16:creationId xmlns:a16="http://schemas.microsoft.com/office/drawing/2014/main" id="{184DEEE3-AAF7-4C4B-B15F-024CD88E4C6C}"/>
               </a:ext>
             </a:extLst>
           </p:cNvPr>
@@ -5375,7 +5371,7 @@
           <p:cNvPr id="7" name="Foliennummernplatzhalter 6">
             <a:extLst xmlns:a="http://schemas.openxmlformats.org/drawingml/2006/main">
               <a:ext uri="{FF2B5EF4-FFF2-40B4-BE49-F238E27FC236}">
-                <a16:creationId xmlns:a16="http://schemas.microsoft.com/office/drawing/2014/main" id="{68E83F5A-F501-4789-B1B1-A05416B22F95}"/>
+                <a16:creationId xmlns:a16="http://schemas.microsoft.com/office/drawing/2014/main" id="{B471378A-9C85-4656-9643-2D9A10569EA2}"/>
               </a:ext>
             </a:extLst>
           </p:cNvPr>
@@ -5402,7 +5398,7 @@
           <p:cNvPr id="12" name="Fußzeilenplatzhalter 11">
             <a:extLst xmlns:a="http://schemas.openxmlformats.org/drawingml/2006/main">
               <a:ext uri="{FF2B5EF4-FFF2-40B4-BE49-F238E27FC236}">
-                <a16:creationId xmlns:a16="http://schemas.microsoft.com/office/drawing/2014/main" id="{1F02D1F3-637C-4A16-AA38-37BFCC21E618}"/>
+                <a16:creationId xmlns:a16="http://schemas.microsoft.com/office/drawing/2014/main" id="{9B137A78-D692-47FF-B723-C5B38313EF1F}"/>
               </a:ext>
             </a:extLst>
           </p:cNvPr>
@@ -5429,7 +5425,7 @@
           <p:cNvPr id="9" name="Bildplatzhalter 8">
             <a:extLst xmlns:a="http://schemas.openxmlformats.org/drawingml/2006/main">
               <a:ext uri="{FF2B5EF4-FFF2-40B4-BE49-F238E27FC236}">
-                <a16:creationId xmlns:a16="http://schemas.microsoft.com/office/drawing/2014/main" id="{C84DA204-2EAE-4FFF-A1AD-907D9E4541FD}"/>
+                <a16:creationId xmlns:a16="http://schemas.microsoft.com/office/drawing/2014/main" id="{3B4A073F-C1E1-4EA2-9D20-D49C48310AC0}"/>
               </a:ext>
             </a:extLst>
           </p:cNvPr>
@@ -5465,7 +5461,7 @@
           <p:cNvPr id="8" name="Textplatzhalter 7">
             <a:extLst xmlns:a="http://schemas.openxmlformats.org/drawingml/2006/main">
               <a:ext uri="{FF2B5EF4-FFF2-40B4-BE49-F238E27FC236}">
-                <a16:creationId xmlns:a16="http://schemas.microsoft.com/office/drawing/2014/main" id="{9C3C520A-4CC4-4A5B-8F17-B00F35C85C5F}"/>
+                <a16:creationId xmlns:a16="http://schemas.microsoft.com/office/drawing/2014/main" id="{9A57D856-7FE4-4B1A-A2F9-A757730EFE41}"/>
               </a:ext>
             </a:extLst>
           </p:cNvPr>
@@ -5679,7 +5675,7 @@
           <p:cNvPr id="7" name="Foliennummernplatzhalter 6">
             <a:extLst xmlns:a="http://schemas.openxmlformats.org/drawingml/2006/main">
               <a:ext uri="{FF2B5EF4-FFF2-40B4-BE49-F238E27FC236}">
-                <a16:creationId xmlns:a16="http://schemas.microsoft.com/office/drawing/2014/main" id="{DA25F5F0-3353-45DD-A9D5-13E881347EB7}"/>
+                <a16:creationId xmlns:a16="http://schemas.microsoft.com/office/drawing/2014/main" id="{02E649A0-F2BE-4EEA-A204-0BAACBC12BB2}"/>
               </a:ext>
             </a:extLst>
           </p:cNvPr>
@@ -5706,7 +5702,7 @@
           <p:cNvPr id="12" name="Fußzeilenplatzhalter 11">
             <a:extLst xmlns:a="http://schemas.openxmlformats.org/drawingml/2006/main">
               <a:ext uri="{FF2B5EF4-FFF2-40B4-BE49-F238E27FC236}">
-                <a16:creationId xmlns:a16="http://schemas.microsoft.com/office/drawing/2014/main" id="{C27C89DD-21BC-4B53-831A-7C0F24987E7F}"/>
+                <a16:creationId xmlns:a16="http://schemas.microsoft.com/office/drawing/2014/main" id="{0410BF53-C592-423F-87B4-09FB61C1F8CD}"/>
               </a:ext>
             </a:extLst>
           </p:cNvPr>
@@ -5733,7 +5729,7 @@
           <p:cNvPr id="9" name="Bildplatzhalter 8">
             <a:extLst xmlns:a="http://schemas.openxmlformats.org/drawingml/2006/main">
               <a:ext uri="{FF2B5EF4-FFF2-40B4-BE49-F238E27FC236}">
-                <a16:creationId xmlns:a16="http://schemas.microsoft.com/office/drawing/2014/main" id="{8837161C-323D-4C4C-9978-F2CB5306073B}"/>
+                <a16:creationId xmlns:a16="http://schemas.microsoft.com/office/drawing/2014/main" id="{60B4DC94-AA7D-4FA7-8FAB-2306C4594ED5}"/>
               </a:ext>
             </a:extLst>
           </p:cNvPr>
@@ -5769,7 +5765,7 @@
           <p:cNvPr id="8" name="Textplatzhalter 7">
             <a:extLst xmlns:a="http://schemas.openxmlformats.org/drawingml/2006/main">
               <a:ext uri="{FF2B5EF4-FFF2-40B4-BE49-F238E27FC236}">
-                <a16:creationId xmlns:a16="http://schemas.microsoft.com/office/drawing/2014/main" id="{58D3D7BA-4B4A-41B0-8BD8-2C236972B559}"/>
+                <a16:creationId xmlns:a16="http://schemas.microsoft.com/office/drawing/2014/main" id="{27923844-D1F1-4EFC-8C0F-B05487E88828}"/>
               </a:ext>
             </a:extLst>
           </p:cNvPr>
@@ -5892,7 +5888,7 @@
           <p:cNvPr id="8" name="Bildplatzhalter 2">
             <a:extLst xmlns:a="http://schemas.openxmlformats.org/drawingml/2006/main">
               <a:ext uri="{FF2B5EF4-FFF2-40B4-BE49-F238E27FC236}">
-                <a16:creationId xmlns:a16="http://schemas.microsoft.com/office/drawing/2014/main" id="{50D3B05C-E0F9-4193-85F8-515A43A62EED}"/>
+                <a16:creationId xmlns:a16="http://schemas.microsoft.com/office/drawing/2014/main" id="{9C6290BB-707D-47E8-A6D2-D07B80CF168D}"/>
               </a:ext>
             </a:extLst>
           </p:cNvPr>
@@ -5931,7 +5927,7 @@
           <p:cNvPr id="6" name="Foliennummernplatzhalter 5">
             <a:extLst xmlns:a="http://schemas.openxmlformats.org/drawingml/2006/main">
               <a:ext uri="{FF2B5EF4-FFF2-40B4-BE49-F238E27FC236}">
-                <a16:creationId xmlns:a16="http://schemas.microsoft.com/office/drawing/2014/main" id="{FC65015B-E983-43C8-83F4-260B22602956}"/>
+                <a16:creationId xmlns:a16="http://schemas.microsoft.com/office/drawing/2014/main" id="{EB77F5F3-859C-4572-91C3-70EF6FEBD7FC}"/>
               </a:ext>
             </a:extLst>
           </p:cNvPr>
@@ -5958,7 +5954,7 @@
           <p:cNvPr id="10" name="Fußzeilenplatzhalter 9">
             <a:extLst xmlns:a="http://schemas.openxmlformats.org/drawingml/2006/main">
               <a:ext uri="{FF2B5EF4-FFF2-40B4-BE49-F238E27FC236}">
-                <a16:creationId xmlns:a16="http://schemas.microsoft.com/office/drawing/2014/main" id="{925BFC70-7828-4AB5-9EF0-5493465B4542}"/>
+                <a16:creationId xmlns:a16="http://schemas.microsoft.com/office/drawing/2014/main" id="{7E96845B-9F46-4F40-89A4-CA01E1B3EAC1}"/>
               </a:ext>
             </a:extLst>
           </p:cNvPr>
@@ -6149,7 +6145,7 @@
           <p:cNvPr id="8" name="Bildplatzhalter 2">
             <a:extLst xmlns:a="http://schemas.openxmlformats.org/drawingml/2006/main">
               <a:ext uri="{FF2B5EF4-FFF2-40B4-BE49-F238E27FC236}">
-                <a16:creationId xmlns:a16="http://schemas.microsoft.com/office/drawing/2014/main" id="{25216346-AD81-4C53-BD4A-82989E92A986}"/>
+                <a16:creationId xmlns:a16="http://schemas.microsoft.com/office/drawing/2014/main" id="{647CB70D-4BEA-402A-AA42-EC17B226C897}"/>
               </a:ext>
             </a:extLst>
           </p:cNvPr>
@@ -6188,7 +6184,7 @@
           <p:cNvPr id="6" name="Foliennummernplatzhalter 5">
             <a:extLst xmlns:a="http://schemas.openxmlformats.org/drawingml/2006/main">
               <a:ext uri="{FF2B5EF4-FFF2-40B4-BE49-F238E27FC236}">
-                <a16:creationId xmlns:a16="http://schemas.microsoft.com/office/drawing/2014/main" id="{C2242E6B-F053-4D86-A91C-216D2F7B06DF}"/>
+                <a16:creationId xmlns:a16="http://schemas.microsoft.com/office/drawing/2014/main" id="{675C33AA-CC89-42F0-AE53-7BB3E4333FE1}"/>
               </a:ext>
             </a:extLst>
           </p:cNvPr>
@@ -6215,7 +6211,7 @@
           <p:cNvPr id="10" name="Fußzeilenplatzhalter 9">
             <a:extLst xmlns:a="http://schemas.openxmlformats.org/drawingml/2006/main">
               <a:ext uri="{FF2B5EF4-FFF2-40B4-BE49-F238E27FC236}">
-                <a16:creationId xmlns:a16="http://schemas.microsoft.com/office/drawing/2014/main" id="{25A5F9C1-E257-4E55-B913-B6525EB18442}"/>
+                <a16:creationId xmlns:a16="http://schemas.microsoft.com/office/drawing/2014/main" id="{27C02584-48FE-4BCE-80E7-B25FD062506F}"/>
               </a:ext>
             </a:extLst>
           </p:cNvPr>
@@ -6315,7 +6311,7 @@
           <p:cNvPr id="12" name="Titel 1">
             <a:extLst xmlns:a="http://schemas.openxmlformats.org/drawingml/2006/main">
               <a:ext uri="{FF2B5EF4-FFF2-40B4-BE49-F238E27FC236}">
-                <a16:creationId xmlns:a16="http://schemas.microsoft.com/office/drawing/2014/main" id="{3A152828-FC63-4389-B35F-09DDEDDA6A5C}"/>
+                <a16:creationId xmlns:a16="http://schemas.microsoft.com/office/drawing/2014/main" id="{3C7BD577-B22A-4A4C-8D66-B526962E1AF1}"/>
               </a:ext>
             </a:extLst>
           </p:cNvPr>
@@ -6382,7 +6378,7 @@
           <p:cNvPr id="5" name="Foliennummernplatzhalter 4">
             <a:extLst xmlns:a="http://schemas.openxmlformats.org/drawingml/2006/main">
               <a:ext uri="{FF2B5EF4-FFF2-40B4-BE49-F238E27FC236}">
-                <a16:creationId xmlns:a16="http://schemas.microsoft.com/office/drawing/2014/main" id="{801643E5-AB76-4434-92DC-F796F4CD2935}"/>
+                <a16:creationId xmlns:a16="http://schemas.microsoft.com/office/drawing/2014/main" id="{B4E36D5C-A9C5-4213-8D86-6747A4078C02}"/>
               </a:ext>
             </a:extLst>
           </p:cNvPr>
@@ -6409,7 +6405,7 @@
           <p:cNvPr id="7" name="Fußzeilenplatzhalter 6">
             <a:extLst xmlns:a="http://schemas.openxmlformats.org/drawingml/2006/main">
               <a:ext uri="{FF2B5EF4-FFF2-40B4-BE49-F238E27FC236}">
-                <a16:creationId xmlns:a16="http://schemas.microsoft.com/office/drawing/2014/main" id="{F0F7B6D3-1A8D-4EC5-8A91-DF08AE1C6420}"/>
+                <a16:creationId xmlns:a16="http://schemas.microsoft.com/office/drawing/2014/main" id="{2E83E363-79DB-4401-831A-292385623AEA}"/>
               </a:ext>
             </a:extLst>
           </p:cNvPr>
@@ -6453,7 +6449,7 @@
           <p:cNvPr id="12" name="Titel 1">
             <a:extLst xmlns:a="http://schemas.openxmlformats.org/drawingml/2006/main">
               <a:ext uri="{FF2B5EF4-FFF2-40B4-BE49-F238E27FC236}">
-                <a16:creationId xmlns:a16="http://schemas.microsoft.com/office/drawing/2014/main" id="{4A05C10A-79A7-4DBF-AAD0-06984F88B18C}"/>
+                <a16:creationId xmlns:a16="http://schemas.microsoft.com/office/drawing/2014/main" id="{0A172BE7-9580-4777-B9B3-69AE32668203}"/>
               </a:ext>
             </a:extLst>
           </p:cNvPr>
@@ -6520,7 +6516,7 @@
           <p:cNvPr id="6" name="Foliennummernplatzhalter 5">
             <a:extLst xmlns:a="http://schemas.openxmlformats.org/drawingml/2006/main">
               <a:ext uri="{FF2B5EF4-FFF2-40B4-BE49-F238E27FC236}">
-                <a16:creationId xmlns:a16="http://schemas.microsoft.com/office/drawing/2014/main" id="{25DA1AA8-920E-4A27-ABA1-8632B16DF5EF}"/>
+                <a16:creationId xmlns:a16="http://schemas.microsoft.com/office/drawing/2014/main" id="{A88CF1F4-6F53-44D5-B03D-6AB2735B621E}"/>
               </a:ext>
             </a:extLst>
           </p:cNvPr>
@@ -6556,7 +6552,7 @@
           <p:cNvPr id="8" name="Fußzeilenplatzhalter 7">
             <a:extLst xmlns:a="http://schemas.openxmlformats.org/drawingml/2006/main">
               <a:ext uri="{FF2B5EF4-FFF2-40B4-BE49-F238E27FC236}">
-                <a16:creationId xmlns:a16="http://schemas.microsoft.com/office/drawing/2014/main" id="{98A5BC2F-A025-4A8A-A115-8E8CE82CAC74}"/>
+                <a16:creationId xmlns:a16="http://schemas.microsoft.com/office/drawing/2014/main" id="{C46C423E-9A40-4B59-9A21-7E92CB2A9CEA}"/>
               </a:ext>
             </a:extLst>
           </p:cNvPr>
@@ -6626,7 +6622,7 @@
           <p:cNvPr id="12" name="Titel 1">
             <a:extLst xmlns:a="http://schemas.openxmlformats.org/drawingml/2006/main">
               <a:ext uri="{FF2B5EF4-FFF2-40B4-BE49-F238E27FC236}">
-                <a16:creationId xmlns:a16="http://schemas.microsoft.com/office/drawing/2014/main" id="{7DB9A25D-F14C-40CC-A844-AE35053423CF}"/>
+                <a16:creationId xmlns:a16="http://schemas.microsoft.com/office/drawing/2014/main" id="{93079879-2E74-4E4B-A431-B7D37086AFCC}"/>
               </a:ext>
             </a:extLst>
           </p:cNvPr>
@@ -6680,7 +6676,7 @@
           <p:cNvPr id="16" name="Inhaltsplatzhalter 2">
             <a:extLst xmlns:a="http://schemas.openxmlformats.org/drawingml/2006/main">
               <a:ext uri="{FF2B5EF4-FFF2-40B4-BE49-F238E27FC236}">
-                <a16:creationId xmlns:a16="http://schemas.microsoft.com/office/drawing/2014/main" id="{6EA9C5EB-C8CF-4768-86D5-A46DC300BEAA}"/>
+                <a16:creationId xmlns:a16="http://schemas.microsoft.com/office/drawing/2014/main" id="{D70DF861-CF06-4139-8B1F-77CCA7DDF426}"/>
               </a:ext>
             </a:extLst>
           </p:cNvPr>
@@ -6742,7 +6738,7 @@
           <p:cNvPr id="5" name="Foliennummernplatzhalter 4">
             <a:extLst xmlns:a="http://schemas.openxmlformats.org/drawingml/2006/main">
               <a:ext uri="{FF2B5EF4-FFF2-40B4-BE49-F238E27FC236}">
-                <a16:creationId xmlns:a16="http://schemas.microsoft.com/office/drawing/2014/main" id="{17C56E80-E865-4895-ACC8-0C6DF44150FA}"/>
+                <a16:creationId xmlns:a16="http://schemas.microsoft.com/office/drawing/2014/main" id="{4C9AB89C-0E40-47A2-ABB7-FBFC103E4E48}"/>
               </a:ext>
             </a:extLst>
           </p:cNvPr>
@@ -6795,7 +6791,7 @@
           <p:cNvPr id="12" name="Titel 1">
             <a:extLst xmlns:a="http://schemas.openxmlformats.org/drawingml/2006/main">
               <a:ext uri="{FF2B5EF4-FFF2-40B4-BE49-F238E27FC236}">
-                <a16:creationId xmlns:a16="http://schemas.microsoft.com/office/drawing/2014/main" id="{47712126-E1A4-487E-9CF7-EB8432C58B98}"/>
+                <a16:creationId xmlns:a16="http://schemas.microsoft.com/office/drawing/2014/main" id="{8DB0FF6B-6283-438F-AA7A-9E7531BA0286}"/>
               </a:ext>
             </a:extLst>
           </p:cNvPr>
@@ -6849,7 +6845,7 @@
           <p:cNvPr id="16" name="Inhaltsplatzhalter 2">
             <a:extLst xmlns:a="http://schemas.openxmlformats.org/drawingml/2006/main">
               <a:ext uri="{FF2B5EF4-FFF2-40B4-BE49-F238E27FC236}">
-                <a16:creationId xmlns:a16="http://schemas.microsoft.com/office/drawing/2014/main" id="{49B44634-755D-4873-BE50-A1E4C9989249}"/>
+                <a16:creationId xmlns:a16="http://schemas.microsoft.com/office/drawing/2014/main" id="{67105889-7AA5-4765-B822-32012840BC43}"/>
               </a:ext>
             </a:extLst>
           </p:cNvPr>
@@ -6911,7 +6907,7 @@
           <p:cNvPr id="5" name="Foliennummernplatzhalter 4">
             <a:extLst xmlns:a="http://schemas.openxmlformats.org/drawingml/2006/main">
               <a:ext uri="{FF2B5EF4-FFF2-40B4-BE49-F238E27FC236}">
-                <a16:creationId xmlns:a16="http://schemas.microsoft.com/office/drawing/2014/main" id="{227AD20F-BA14-4E31-B18D-D823469B40CD}"/>
+                <a16:creationId xmlns:a16="http://schemas.microsoft.com/office/drawing/2014/main" id="{D15F34A3-480A-4113-B6F0-596D88D86A36}"/>
               </a:ext>
             </a:extLst>
           </p:cNvPr>
@@ -7052,7 +7048,7 @@
           <p:cNvPr id="12" name="Titel 1">
             <a:extLst xmlns:a="http://schemas.openxmlformats.org/drawingml/2006/main">
               <a:ext uri="{FF2B5EF4-FFF2-40B4-BE49-F238E27FC236}">
-                <a16:creationId xmlns:a16="http://schemas.microsoft.com/office/drawing/2014/main" id="{82CA6B56-C4D4-4C42-8DA1-6F894B2954DF}"/>
+                <a16:creationId xmlns:a16="http://schemas.microsoft.com/office/drawing/2014/main" id="{938522E0-6491-4311-93D5-FC0CE6FF0672}"/>
               </a:ext>
             </a:extLst>
           </p:cNvPr>
@@ -7106,7 +7102,7 @@
           <p:cNvPr id="16" name="Inhaltsplatzhalter 2">
             <a:extLst xmlns:a="http://schemas.openxmlformats.org/drawingml/2006/main">
               <a:ext uri="{FF2B5EF4-FFF2-40B4-BE49-F238E27FC236}">
-                <a16:creationId xmlns:a16="http://schemas.microsoft.com/office/drawing/2014/main" id="{7D653EDE-C7D8-4E0A-BC73-86502B830344}"/>
+                <a16:creationId xmlns:a16="http://schemas.microsoft.com/office/drawing/2014/main" id="{90100EA0-5384-474E-A1AD-9C9A3544B844}"/>
               </a:ext>
             </a:extLst>
           </p:cNvPr>
@@ -7168,7 +7164,7 @@
           <p:cNvPr id="14" name="Rechteck 13">
             <a:extLst xmlns:a="http://schemas.openxmlformats.org/drawingml/2006/main">
               <a:ext uri="{FF2B5EF4-FFF2-40B4-BE49-F238E27FC236}">
-                <a16:creationId xmlns:a16="http://schemas.microsoft.com/office/drawing/2014/main" id="{126A0324-9CD0-4B94-8838-C15F9DBDA9D5}"/>
+                <a16:creationId xmlns:a16="http://schemas.microsoft.com/office/drawing/2014/main" id="{0A355CFD-0952-41F7-8C0A-992C680D217F}"/>
               </a:ext>
             </a:extLst>
           </p:cNvPr>
@@ -7219,7 +7215,7 @@
           <p:cNvPr id="6" name="Foliennummernplatzhalter 5">
             <a:extLst xmlns:a="http://schemas.openxmlformats.org/drawingml/2006/main">
               <a:ext uri="{FF2B5EF4-FFF2-40B4-BE49-F238E27FC236}">
-                <a16:creationId xmlns:a16="http://schemas.microsoft.com/office/drawing/2014/main" id="{26B00A92-C3CD-4573-93CF-D732344F1BBE}"/>
+                <a16:creationId xmlns:a16="http://schemas.microsoft.com/office/drawing/2014/main" id="{B9D02BE0-7532-49EF-A3D8-42ED33C06780}"/>
               </a:ext>
             </a:extLst>
           </p:cNvPr>
@@ -7267,7 +7263,7 @@
           <p:nvPr/>
         </p:nvPicPr>
         <p:blipFill>
-          <a:blip xmlns:r="http://schemas.openxmlformats.org/officeDocument/2006/relationships" xmlns:a="http://schemas.openxmlformats.org/drawingml/2006/main" r:embed="Rc20545f58bd74eec"/>
+          <a:blip xmlns:r="http://schemas.openxmlformats.org/officeDocument/2006/relationships" xmlns:a="http://schemas.openxmlformats.org/drawingml/2006/main" r:embed="R06360ed232734d71"/>
           <a:stretch xmlns:a="http://schemas.openxmlformats.org/drawingml/2006/main">
             <a:fillRect l="0" t="0" r="0" b="0"/>
           </a:stretch>
@@ -7287,7 +7283,7 @@
           <p:cNvPr id="12" name="Titel 1">
             <a:extLst xmlns:a="http://schemas.openxmlformats.org/drawingml/2006/main">
               <a:ext uri="{FF2B5EF4-FFF2-40B4-BE49-F238E27FC236}">
-                <a16:creationId xmlns:a16="http://schemas.microsoft.com/office/drawing/2014/main" id="{C46EF0B1-9300-42F3-A658-92F0A77B1F79}"/>
+                <a16:creationId xmlns:a16="http://schemas.microsoft.com/office/drawing/2014/main" id="{2EBF8150-C58E-402C-A650-9E5527742FC1}"/>
               </a:ext>
             </a:extLst>
           </p:cNvPr>
@@ -7341,7 +7337,7 @@
           <p:cNvPr id="16" name="Inhaltsplatzhalter 2">
             <a:extLst xmlns:a="http://schemas.openxmlformats.org/drawingml/2006/main">
               <a:ext uri="{FF2B5EF4-FFF2-40B4-BE49-F238E27FC236}">
-                <a16:creationId xmlns:a16="http://schemas.microsoft.com/office/drawing/2014/main" id="{1531F2A4-0660-4EA9-8F8A-0EE20DAEDED9}"/>
+                <a16:creationId xmlns:a16="http://schemas.microsoft.com/office/drawing/2014/main" id="{8BD0A7F2-705F-444A-90B7-D151D9DB2AA4}"/>
               </a:ext>
             </a:extLst>
           </p:cNvPr>
@@ -7403,7 +7399,7 @@
           <p:cNvPr id="14" name="Rechteck 13">
             <a:extLst xmlns:a="http://schemas.openxmlformats.org/drawingml/2006/main">
               <a:ext uri="{FF2B5EF4-FFF2-40B4-BE49-F238E27FC236}">
-                <a16:creationId xmlns:a16="http://schemas.microsoft.com/office/drawing/2014/main" id="{93BA9CE5-A6B7-4F3C-8DC4-099958E30E4C}"/>
+                <a16:creationId xmlns:a16="http://schemas.microsoft.com/office/drawing/2014/main" id="{2DD92840-E305-4145-9673-4C2B2D07BCEA}"/>
               </a:ext>
             </a:extLst>
           </p:cNvPr>
@@ -7454,7 +7450,7 @@
           <p:cNvPr id="6" name="Foliennummernplatzhalter 5">
             <a:extLst xmlns:a="http://schemas.openxmlformats.org/drawingml/2006/main">
               <a:ext uri="{FF2B5EF4-FFF2-40B4-BE49-F238E27FC236}">
-                <a16:creationId xmlns:a16="http://schemas.microsoft.com/office/drawing/2014/main" id="{B8A8C0B6-8051-46F5-892E-C2BAFD34F1EB}"/>
+                <a16:creationId xmlns:a16="http://schemas.microsoft.com/office/drawing/2014/main" id="{C0FD85BD-E007-4BAF-9629-98AAB7283221}"/>
               </a:ext>
             </a:extLst>
           </p:cNvPr>
@@ -7498,7 +7494,7 @@
           <p:cNvPr id="16" name="Inhaltsplatzhalter 2">
             <a:extLst xmlns:a="http://schemas.openxmlformats.org/drawingml/2006/main">
               <a:ext uri="{FF2B5EF4-FFF2-40B4-BE49-F238E27FC236}">
-                <a16:creationId xmlns:a16="http://schemas.microsoft.com/office/drawing/2014/main" id="{D3759A11-0711-47A5-AAA2-FAC25D42CA63}"/>
+                <a16:creationId xmlns:a16="http://schemas.microsoft.com/office/drawing/2014/main" id="{BB2F6E59-5067-40B9-BFB7-C1AE776F0FB8}"/>
               </a:ext>
             </a:extLst>
           </p:cNvPr>
@@ -7556,7 +7552,7 @@
           <p:cNvPr id="14" name="Rechteck 13">
             <a:extLst xmlns:a="http://schemas.openxmlformats.org/drawingml/2006/main">
               <a:ext uri="{FF2B5EF4-FFF2-40B4-BE49-F238E27FC236}">
-                <a16:creationId xmlns:a16="http://schemas.microsoft.com/office/drawing/2014/main" id="{DD67E651-E998-4386-8BDC-142807BC41E8}"/>
+                <a16:creationId xmlns:a16="http://schemas.microsoft.com/office/drawing/2014/main" id="{598DBEE1-A1E9-40BA-BA1B-F66040FDEFAB}"/>
               </a:ext>
             </a:extLst>
           </p:cNvPr>
@@ -7607,7 +7603,7 @@
           <p:cNvPr id="8" name="Foliennummernplatzhalter 7">
             <a:extLst xmlns:a="http://schemas.openxmlformats.org/drawingml/2006/main">
               <a:ext uri="{FF2B5EF4-FFF2-40B4-BE49-F238E27FC236}">
-                <a16:creationId xmlns:a16="http://schemas.microsoft.com/office/drawing/2014/main" id="{ACB2D86C-500C-4846-B986-334DDEC34AF9}"/>
+                <a16:creationId xmlns:a16="http://schemas.microsoft.com/office/drawing/2014/main" id="{9176F313-6064-4571-98D9-EC88830BBF89}"/>
               </a:ext>
             </a:extLst>
           </p:cNvPr>
@@ -7705,7 +7701,7 @@
           <p:cNvPr id="10" name="Titel 1">
             <a:extLst xmlns:a="http://schemas.openxmlformats.org/drawingml/2006/main">
               <a:ext uri="{FF2B5EF4-FFF2-40B4-BE49-F238E27FC236}">
-                <a16:creationId xmlns:a16="http://schemas.microsoft.com/office/drawing/2014/main" id="{FE5BE3E0-0988-454A-9A1D-0F1474B99AB0}"/>
+                <a16:creationId xmlns:a16="http://schemas.microsoft.com/office/drawing/2014/main" id="{6185A26C-ABDA-4581-A06B-AA1DD0CE8AF1}"/>
               </a:ext>
             </a:extLst>
           </p:cNvPr>
@@ -7761,7 +7757,7 @@
           <p:cNvPr id="5" name="Foliennummernplatzhalter 4">
             <a:extLst xmlns:a="http://schemas.openxmlformats.org/drawingml/2006/main">
               <a:ext uri="{FF2B5EF4-FFF2-40B4-BE49-F238E27FC236}">
-                <a16:creationId xmlns:a16="http://schemas.microsoft.com/office/drawing/2014/main" id="{CF7C5CE9-77CC-43E4-A1A4-A71133C147D1}"/>
+                <a16:creationId xmlns:a16="http://schemas.microsoft.com/office/drawing/2014/main" id="{C0BF8C79-AF5A-4C59-A7F2-726A4A91AFAF}"/>
               </a:ext>
             </a:extLst>
           </p:cNvPr>
@@ -7788,7 +7784,7 @@
           <p:cNvPr id="7" name="Fußzeilenplatzhalter 6">
             <a:extLst xmlns:a="http://schemas.openxmlformats.org/drawingml/2006/main">
               <a:ext uri="{FF2B5EF4-FFF2-40B4-BE49-F238E27FC236}">
-                <a16:creationId xmlns:a16="http://schemas.microsoft.com/office/drawing/2014/main" id="{B456A35B-2AB3-4A41-ADE0-F5E4C682B5D1}"/>
+                <a16:creationId xmlns:a16="http://schemas.microsoft.com/office/drawing/2014/main" id="{F6A44818-05C3-4E95-852B-514408950B0E}"/>
               </a:ext>
             </a:extLst>
           </p:cNvPr>
@@ -7928,7 +7924,7 @@
           <p:cNvPr id="10" name="Fußzeilenplatzhalter 3">
             <a:extLst xmlns:a="http://schemas.openxmlformats.org/drawingml/2006/main">
               <a:ext uri="{FF2B5EF4-FFF2-40B4-BE49-F238E27FC236}">
-                <a16:creationId xmlns:a16="http://schemas.microsoft.com/office/drawing/2014/main" id="{7CA078E3-5C74-44F9-88B1-441A23902BD5}"/>
+                <a16:creationId xmlns:a16="http://schemas.microsoft.com/office/drawing/2014/main" id="{693FD1BF-8AD2-4D54-AF01-E3BB0D0DBAB7}"/>
               </a:ext>
             </a:extLst>
           </p:cNvPr>
@@ -7972,7 +7968,7 @@
           <p:cNvPr id="11" name="Foliennummernplatzhalter 4">
             <a:extLst xmlns:a="http://schemas.openxmlformats.org/drawingml/2006/main">
               <a:ext uri="{FF2B5EF4-FFF2-40B4-BE49-F238E27FC236}">
-                <a16:creationId xmlns:a16="http://schemas.microsoft.com/office/drawing/2014/main" id="{ECE0E2D3-3ACE-49A7-B962-36576D2A5BE7}"/>
+                <a16:creationId xmlns:a16="http://schemas.microsoft.com/office/drawing/2014/main" id="{8BEF0153-28FB-4F74-AFA0-2BFBF9DB0341}"/>
               </a:ext>
             </a:extLst>
           </p:cNvPr>
@@ -8020,7 +8016,7 @@
           <p:nvPr/>
         </p:nvPicPr>
         <p:blipFill>
-          <a:blip xmlns:r="http://schemas.openxmlformats.org/officeDocument/2006/relationships" xmlns:a="http://schemas.openxmlformats.org/drawingml/2006/main" r:embed="R23fdc8e6abff4387"/>
+          <a:blip xmlns:r="http://schemas.openxmlformats.org/officeDocument/2006/relationships" xmlns:a="http://schemas.openxmlformats.org/drawingml/2006/main" r:embed="R770d457371ca4db1"/>
           <a:stretch xmlns:a="http://schemas.openxmlformats.org/drawingml/2006/main">
             <a:fillRect l="0" t="0" r="0" b="0"/>
           </a:stretch>
@@ -8039,8 +8035,8 @@
   </p:cSld>
   <p:clrMap bg1="lt1" tx1="dk1" bg2="lt2" tx2="dk2" accent1="accent1" accent2="accent2" accent3="accent3" accent4="accent4" accent5="accent5" accent6="accent6" hlink="hlink" folHlink="folHlink"/>
   <p:sldLayoutIdLst>
-    <p:sldLayoutId xmlns:r="http://schemas.openxmlformats.org/officeDocument/2006/relationships" id="2147483649" r:id="R97767a616c7e48f1"/>
-    <p:sldLayoutId xmlns:r="http://schemas.openxmlformats.org/officeDocument/2006/relationships" id="2147483650" r:id="R041fd9837baa49ba"/>
+    <p:sldLayoutId xmlns:r="http://schemas.openxmlformats.org/officeDocument/2006/relationships" id="2147483649" r:id="Rfd5992b20a3f478c"/>
+    <p:sldLayoutId xmlns:r="http://schemas.openxmlformats.org/officeDocument/2006/relationships" id="2147483650" r:id="R72865965219f4923"/>
   </p:sldLayoutIdLst>
   <p:hf hdr="0" dt="0"/>
   <p:txStyles>
@@ -8406,7 +8402,7 @@
   </p:cSld>
   <p:clrMap bg1="lt1" tx1="dk1" bg2="lt2" tx2="dk2" accent1="accent1" accent2="accent2" accent3="accent3" accent4="accent4" accent5="accent5" accent6="accent6" hlink="hlink" folHlink="folHlink"/>
   <p:sldLayoutIdLst>
-    <p:sldLayoutId xmlns:r="http://schemas.openxmlformats.org/officeDocument/2006/relationships" id="2147483652" r:id="R323a112869854327"/>
+    <p:sldLayoutId xmlns:r="http://schemas.openxmlformats.org/officeDocument/2006/relationships" id="2147483652" r:id="R0683f4ff852d4819"/>
   </p:sldLayoutIdLst>
   <p:txStyles>
     <p:titleStyle>
@@ -8723,7 +8719,7 @@
           <p:cNvPr id="23" name="Textfeld 22">
             <a:extLst xmlns:a="http://schemas.openxmlformats.org/drawingml/2006/main">
               <a:ext uri="{FF2B5EF4-FFF2-40B4-BE49-F238E27FC236}">
-                <a16:creationId xmlns:a16="http://schemas.microsoft.com/office/drawing/2014/main" id="{1A40185E-ABCB-4646-8F08-C6595A04E1BB}"/>
+                <a16:creationId xmlns:a16="http://schemas.microsoft.com/office/drawing/2014/main" id="{8FECA4B2-9A3C-41E2-BB87-DDC20C56C2A7}"/>
               </a:ext>
             </a:extLst>
           </p:cNvPr>
@@ -8773,7 +8769,7 @@
           <p:nvPr/>
         </p:nvPicPr>
         <p:blipFill>
-          <a:blip xmlns:r="http://schemas.openxmlformats.org/officeDocument/2006/relationships" xmlns:a="http://schemas.openxmlformats.org/drawingml/2006/main" r:embed="R8b5a2d1878e84f99"/>
+          <a:blip xmlns:r="http://schemas.openxmlformats.org/officeDocument/2006/relationships" xmlns:a="http://schemas.openxmlformats.org/drawingml/2006/main" r:embed="R4dd7ecbd10364957"/>
           <a:srcRect xmlns:a="http://schemas.openxmlformats.org/drawingml/2006/main" l="398" t="14167" r="0" b="10833"/>
           <a:stretch xmlns:a="http://schemas.openxmlformats.org/drawingml/2006/main">
             <a:fillRect l="0" t="0" r="0" b="0"/>
@@ -8798,7 +8794,7 @@
           <p:nvPr/>
         </p:nvPicPr>
         <p:blipFill>
-          <a:blip xmlns:r="http://schemas.openxmlformats.org/officeDocument/2006/relationships" xmlns:a="http://schemas.openxmlformats.org/drawingml/2006/main" r:embed="Ra37077224ec44488"/>
+          <a:blip xmlns:r="http://schemas.openxmlformats.org/officeDocument/2006/relationships" xmlns:a="http://schemas.openxmlformats.org/drawingml/2006/main" r:embed="R69c91b76116145f9"/>
           <a:stretch xmlns:a="http://schemas.openxmlformats.org/drawingml/2006/main">
             <a:fillRect l="0" t="0" r="0" b="0"/>
           </a:stretch>
@@ -8818,7 +8814,7 @@
           <p:cNvPr id="8" name="Foliennummernplatzhalter 4">
             <a:extLst xmlns:a="http://schemas.openxmlformats.org/drawingml/2006/main">
               <a:ext uri="{FF2B5EF4-FFF2-40B4-BE49-F238E27FC236}">
-                <a16:creationId xmlns:a16="http://schemas.microsoft.com/office/drawing/2014/main" id="{030B493D-8E3F-48DF-843B-96FBD702B5E1}"/>
+                <a16:creationId xmlns:a16="http://schemas.microsoft.com/office/drawing/2014/main" id="{58A52F4E-682F-4938-BBCF-3D06A31AA3E5}"/>
               </a:ext>
             </a:extLst>
           </p:cNvPr>
@@ -8862,7 +8858,7 @@
           <p:cNvPr id="10" name="Fußzeilenplatzhalter 3">
             <a:extLst xmlns:a="http://schemas.openxmlformats.org/drawingml/2006/main">
               <a:ext uri="{FF2B5EF4-FFF2-40B4-BE49-F238E27FC236}">
-                <a16:creationId xmlns:a16="http://schemas.microsoft.com/office/drawing/2014/main" id="{D04A2A21-CA9F-4C31-860F-CEBA946E0FF1}"/>
+                <a16:creationId xmlns:a16="http://schemas.microsoft.com/office/drawing/2014/main" id="{4E841291-7BFB-4930-B448-41153F9C420E}"/>
               </a:ext>
             </a:extLst>
           </p:cNvPr>
@@ -8905,8 +8901,8 @@
   </p:cSld>
   <p:clrMap bg1="lt1" tx1="dk1" bg2="lt2" tx2="dk2" accent1="accent1" accent2="accent2" accent3="accent3" accent4="accent4" accent5="accent5" accent6="accent6" hlink="hlink" folHlink="folHlink"/>
   <p:sldLayoutIdLst>
-    <p:sldLayoutId xmlns:r="http://schemas.openxmlformats.org/officeDocument/2006/relationships" id="2147483654" r:id="R69425ce36b984810"/>
-    <p:sldLayoutId xmlns:r="http://schemas.openxmlformats.org/officeDocument/2006/relationships" id="2147483655" r:id="R2e994c96bac94a10"/>
+    <p:sldLayoutId xmlns:r="http://schemas.openxmlformats.org/officeDocument/2006/relationships" id="2147483654" r:id="Rbcb81f97636c4b1c"/>
+    <p:sldLayoutId xmlns:r="http://schemas.openxmlformats.org/officeDocument/2006/relationships" id="2147483655" r:id="Rc4787534d3a8483d"/>
   </p:sldLayoutIdLst>
   <p:hf hdr="0" dt="0"/>
   <p:txStyles>
@@ -9273,7 +9269,7 @@
           <p:cNvPr id="9" name="Foliennummernplatzhalter 4">
             <a:extLst xmlns:a="http://schemas.openxmlformats.org/drawingml/2006/main">
               <a:ext uri="{FF2B5EF4-FFF2-40B4-BE49-F238E27FC236}">
-                <a16:creationId xmlns:a16="http://schemas.microsoft.com/office/drawing/2014/main" id="{9A11307C-A099-4275-B205-5942C1AB30E3}"/>
+                <a16:creationId xmlns:a16="http://schemas.microsoft.com/office/drawing/2014/main" id="{ACD7A4E8-F9F3-48F6-A30C-80CE86B8D8D3}"/>
               </a:ext>
             </a:extLst>
           </p:cNvPr>
@@ -9317,7 +9313,7 @@
           <p:cNvPr id="10" name="Fußzeilenplatzhalter 3">
             <a:extLst xmlns:a="http://schemas.openxmlformats.org/drawingml/2006/main">
               <a:ext uri="{FF2B5EF4-FFF2-40B4-BE49-F238E27FC236}">
-                <a16:creationId xmlns:a16="http://schemas.microsoft.com/office/drawing/2014/main" id="{6CE05DA3-1AE4-49AF-91A3-6C602E66CF1B}"/>
+                <a16:creationId xmlns:a16="http://schemas.microsoft.com/office/drawing/2014/main" id="{C1AD0A71-FB4B-456D-88F1-88565BC488E7}"/>
               </a:ext>
             </a:extLst>
           </p:cNvPr>
@@ -9365,7 +9361,7 @@
           <p:nvPr/>
         </p:nvPicPr>
         <p:blipFill>
-          <a:blip xmlns:r="http://schemas.openxmlformats.org/officeDocument/2006/relationships" xmlns:a="http://schemas.openxmlformats.org/drawingml/2006/main" r:embed="R07352bc28ab34628"/>
+          <a:blip xmlns:r="http://schemas.openxmlformats.org/officeDocument/2006/relationships" xmlns:a="http://schemas.openxmlformats.org/drawingml/2006/main" r:embed="Rb0f241e5d97346a0"/>
           <a:stretch xmlns:a="http://schemas.openxmlformats.org/drawingml/2006/main">
             <a:fillRect l="0" t="0" r="0" b="0"/>
           </a:stretch>
@@ -9385,7 +9381,7 @@
           <p:cNvPr id="11" name="Textfeld 10">
             <a:extLst xmlns:a="http://schemas.openxmlformats.org/drawingml/2006/main">
               <a:ext uri="{FF2B5EF4-FFF2-40B4-BE49-F238E27FC236}">
-                <a16:creationId xmlns:a16="http://schemas.microsoft.com/office/drawing/2014/main" id="{BB9A2B42-1577-4DB7-8438-E264AB8A29F9}"/>
+                <a16:creationId xmlns:a16="http://schemas.microsoft.com/office/drawing/2014/main" id="{31BFDA52-9264-4EC0-A59E-9E21E748C112}"/>
               </a:ext>
             </a:extLst>
           </p:cNvPr>
@@ -9472,8 +9468,8 @@
   </p:cSld>
   <p:clrMap bg1="lt1" tx1="dk1" bg2="lt2" tx2="dk2" accent1="accent1" accent2="accent2" accent3="accent3" accent4="accent4" accent5="accent5" accent6="accent6" hlink="hlink" folHlink="folHlink"/>
   <p:sldLayoutIdLst>
-    <p:sldLayoutId xmlns:r="http://schemas.openxmlformats.org/officeDocument/2006/relationships" id="2147483657" r:id="R4f1fe410730b4e5e"/>
-    <p:sldLayoutId xmlns:r="http://schemas.openxmlformats.org/officeDocument/2006/relationships" id="2147483658" r:id="R246c1ec709c14e9f"/>
+    <p:sldLayoutId xmlns:r="http://schemas.openxmlformats.org/officeDocument/2006/relationships" id="2147483657" r:id="Rbbe7dc55503145cd"/>
+    <p:sldLayoutId xmlns:r="http://schemas.openxmlformats.org/officeDocument/2006/relationships" id="2147483658" r:id="R53b8f43dcc714854"/>
   </p:sldLayoutIdLst>
   <p:hf hdr="0" dt="0"/>
   <p:txStyles>
@@ -9844,7 +9840,7 @@
           <p:nvPr/>
         </p:nvPicPr>
         <p:blipFill>
-          <a:blip xmlns:r="http://schemas.openxmlformats.org/officeDocument/2006/relationships" xmlns:a="http://schemas.openxmlformats.org/drawingml/2006/main" r:embed="R13d23e2532434b09"/>
+          <a:blip xmlns:r="http://schemas.openxmlformats.org/officeDocument/2006/relationships" xmlns:a="http://schemas.openxmlformats.org/drawingml/2006/main" r:embed="R4ebc877c5b4d4571"/>
           <a:stretch xmlns:a="http://schemas.openxmlformats.org/drawingml/2006/main">
             <a:fillRect l="0" t="0" r="0" b="0"/>
           </a:stretch>
@@ -9864,7 +9860,7 @@
           <p:cNvPr id="5" name="Foliennummernplatzhalter 4">
             <a:extLst xmlns:a="http://schemas.openxmlformats.org/drawingml/2006/main">
               <a:ext uri="{FF2B5EF4-FFF2-40B4-BE49-F238E27FC236}">
-                <a16:creationId xmlns:a16="http://schemas.microsoft.com/office/drawing/2014/main" id="{635FB71E-E1FF-45F6-9075-B2909AAF3FC2}"/>
+                <a16:creationId xmlns:a16="http://schemas.microsoft.com/office/drawing/2014/main" id="{98B7BD3C-E339-44E2-817C-65E4B4F201D0}"/>
               </a:ext>
             </a:extLst>
           </p:cNvPr>
@@ -9908,7 +9904,7 @@
           <p:cNvPr id="6" name="Fußzeilenplatzhalter 3">
             <a:extLst xmlns:a="http://schemas.openxmlformats.org/drawingml/2006/main">
               <a:ext uri="{FF2B5EF4-FFF2-40B4-BE49-F238E27FC236}">
-                <a16:creationId xmlns:a16="http://schemas.microsoft.com/office/drawing/2014/main" id="{CBE85E2A-F675-4519-A8CF-B8BDCDE0006F}"/>
+                <a16:creationId xmlns:a16="http://schemas.microsoft.com/office/drawing/2014/main" id="{907CC1B3-8195-4E5D-89AE-DABE60365FBD}"/>
               </a:ext>
             </a:extLst>
           </p:cNvPr>
@@ -9951,24 +9947,24 @@
   </p:cSld>
   <p:clrMap bg1="lt1" tx1="dk1" bg2="lt2" tx2="dk2" accent1="accent1" accent2="accent2" accent3="accent3" accent4="accent4" accent5="accent5" accent6="accent6" hlink="hlink" folHlink="folHlink"/>
   <p:sldLayoutIdLst>
-    <p:sldLayoutId xmlns:r="http://schemas.openxmlformats.org/officeDocument/2006/relationships" id="2147483660" r:id="Rd1e26b674692472c"/>
-    <p:sldLayoutId xmlns:r="http://schemas.openxmlformats.org/officeDocument/2006/relationships" id="2147483661" r:id="R5ec8b00225184a6f"/>
-    <p:sldLayoutId xmlns:r="http://schemas.openxmlformats.org/officeDocument/2006/relationships" id="2147483662" r:id="R1f10dcf76e414e96"/>
-    <p:sldLayoutId xmlns:r="http://schemas.openxmlformats.org/officeDocument/2006/relationships" id="2147483663" r:id="R389955db262242a3"/>
-    <p:sldLayoutId xmlns:r="http://schemas.openxmlformats.org/officeDocument/2006/relationships" id="2147483664" r:id="R827b578e48d84264"/>
-    <p:sldLayoutId xmlns:r="http://schemas.openxmlformats.org/officeDocument/2006/relationships" id="2147483665" r:id="R0044877a18de4b83"/>
-    <p:sldLayoutId xmlns:r="http://schemas.openxmlformats.org/officeDocument/2006/relationships" id="2147483666" r:id="R73f37c597dc94bac"/>
-    <p:sldLayoutId xmlns:r="http://schemas.openxmlformats.org/officeDocument/2006/relationships" id="2147483667" r:id="R1c934dc3641d4e30"/>
-    <p:sldLayoutId xmlns:r="http://schemas.openxmlformats.org/officeDocument/2006/relationships" id="2147483668" r:id="R12cb8104b4ff42ad"/>
-    <p:sldLayoutId xmlns:r="http://schemas.openxmlformats.org/officeDocument/2006/relationships" id="2147483669" r:id="R2c083011bd944df5"/>
-    <p:sldLayoutId xmlns:r="http://schemas.openxmlformats.org/officeDocument/2006/relationships" id="2147483670" r:id="Rb2fa32a792a840d3"/>
-    <p:sldLayoutId xmlns:r="http://schemas.openxmlformats.org/officeDocument/2006/relationships" id="2147483671" r:id="Rf0d827a58e3d44c0"/>
-    <p:sldLayoutId xmlns:r="http://schemas.openxmlformats.org/officeDocument/2006/relationships" id="2147483672" r:id="R976747fb98e942f2"/>
-    <p:sldLayoutId xmlns:r="http://schemas.openxmlformats.org/officeDocument/2006/relationships" id="2147483673" r:id="R808b1d5986484f56"/>
-    <p:sldLayoutId xmlns:r="http://schemas.openxmlformats.org/officeDocument/2006/relationships" id="2147483674" r:id="Rd20964a01de0439a"/>
-    <p:sldLayoutId xmlns:r="http://schemas.openxmlformats.org/officeDocument/2006/relationships" id="2147483675" r:id="Rfca80a75b0ba4a29"/>
-    <p:sldLayoutId xmlns:r="http://schemas.openxmlformats.org/officeDocument/2006/relationships" id="2147483676" r:id="Rb81a2d4a1ddb4f40"/>
-    <p:sldLayoutId xmlns:r="http://schemas.openxmlformats.org/officeDocument/2006/relationships" id="2147483677" r:id="Ra0fa0bf5d4b345ca"/>
+    <p:sldLayoutId xmlns:r="http://schemas.openxmlformats.org/officeDocument/2006/relationships" id="2147483660" r:id="Rf90fd3a16b544679"/>
+    <p:sldLayoutId xmlns:r="http://schemas.openxmlformats.org/officeDocument/2006/relationships" id="2147483661" r:id="Reb5c878900d54fa4"/>
+    <p:sldLayoutId xmlns:r="http://schemas.openxmlformats.org/officeDocument/2006/relationships" id="2147483662" r:id="R98a96b8e5e3c4c2c"/>
+    <p:sldLayoutId xmlns:r="http://schemas.openxmlformats.org/officeDocument/2006/relationships" id="2147483663" r:id="Rb5eb813f68d94f6f"/>
+    <p:sldLayoutId xmlns:r="http://schemas.openxmlformats.org/officeDocument/2006/relationships" id="2147483664" r:id="R14cab425ef114756"/>
+    <p:sldLayoutId xmlns:r="http://schemas.openxmlformats.org/officeDocument/2006/relationships" id="2147483665" r:id="R896241b59c594af5"/>
+    <p:sldLayoutId xmlns:r="http://schemas.openxmlformats.org/officeDocument/2006/relationships" id="2147483666" r:id="R3f3c0943b4f9413c"/>
+    <p:sldLayoutId xmlns:r="http://schemas.openxmlformats.org/officeDocument/2006/relationships" id="2147483667" r:id="R609ba7722c924057"/>
+    <p:sldLayoutId xmlns:r="http://schemas.openxmlformats.org/officeDocument/2006/relationships" id="2147483668" r:id="Rca007ab048974c37"/>
+    <p:sldLayoutId xmlns:r="http://schemas.openxmlformats.org/officeDocument/2006/relationships" id="2147483669" r:id="Refd82761672449a0"/>
+    <p:sldLayoutId xmlns:r="http://schemas.openxmlformats.org/officeDocument/2006/relationships" id="2147483670" r:id="R14365bacd9da47d4"/>
+    <p:sldLayoutId xmlns:r="http://schemas.openxmlformats.org/officeDocument/2006/relationships" id="2147483671" r:id="R66f494659fc348bd"/>
+    <p:sldLayoutId xmlns:r="http://schemas.openxmlformats.org/officeDocument/2006/relationships" id="2147483672" r:id="R6c7cd59f50c34769"/>
+    <p:sldLayoutId xmlns:r="http://schemas.openxmlformats.org/officeDocument/2006/relationships" id="2147483673" r:id="R97909ab8c4914fe4"/>
+    <p:sldLayoutId xmlns:r="http://schemas.openxmlformats.org/officeDocument/2006/relationships" id="2147483674" r:id="Rcacff20f4daa48dd"/>
+    <p:sldLayoutId xmlns:r="http://schemas.openxmlformats.org/officeDocument/2006/relationships" id="2147483675" r:id="R0209b7b144274fc5"/>
+    <p:sldLayoutId xmlns:r="http://schemas.openxmlformats.org/officeDocument/2006/relationships" id="2147483676" r:id="R8e59412ef56c43cc"/>
+    <p:sldLayoutId xmlns:r="http://schemas.openxmlformats.org/officeDocument/2006/relationships" id="2147483677" r:id="Rf973666c16aa4a0f"/>
   </p:sldLayoutIdLst>
   <p:hf hdr="0" dt="0"/>
   <p:txStyles>
@@ -10335,7 +10331,7 @@
           <p:cNvPr id="6" name="Rechteck 5">
             <a:extLst xmlns:a="http://schemas.openxmlformats.org/drawingml/2006/main">
               <a:ext uri="{FF2B5EF4-FFF2-40B4-BE49-F238E27FC236}">
-                <a16:creationId xmlns:a16="http://schemas.microsoft.com/office/drawing/2014/main" id="{26B35B20-EF19-4F23-9B44-228FAEE86EE0}"/>
+                <a16:creationId xmlns:a16="http://schemas.microsoft.com/office/drawing/2014/main" id="{F59C46F9-EE3A-44A0-9072-A0721856251F}"/>
               </a:ext>
             </a:extLst>
           </p:cNvPr>
@@ -10396,7 +10392,7 @@
           <p:nvPr/>
         </p:nvPicPr>
         <p:blipFill>
-          <a:blip xmlns:r="http://schemas.openxmlformats.org/officeDocument/2006/relationships" xmlns:a="http://schemas.openxmlformats.org/drawingml/2006/main" r:embed="Rfc67b1ff69b14e49"/>
+          <a:blip xmlns:r="http://schemas.openxmlformats.org/officeDocument/2006/relationships" xmlns:a="http://schemas.openxmlformats.org/drawingml/2006/main" r:embed="Rfecf20267c604412"/>
           <a:stretch xmlns:a="http://schemas.openxmlformats.org/drawingml/2006/main">
             <a:fillRect l="0" t="0" r="0" b="0"/>
           </a:stretch>
@@ -10416,7 +10412,7 @@
           <p:cNvPr id="7" name="Foliennummernplatzhalter 4">
             <a:extLst xmlns:a="http://schemas.openxmlformats.org/drawingml/2006/main">
               <a:ext uri="{FF2B5EF4-FFF2-40B4-BE49-F238E27FC236}">
-                <a16:creationId xmlns:a16="http://schemas.microsoft.com/office/drawing/2014/main" id="{6F393A5F-A531-4C49-8515-37BD4CD10D5F}"/>
+                <a16:creationId xmlns:a16="http://schemas.microsoft.com/office/drawing/2014/main" id="{D759EAAE-F44E-429A-BE24-40EB65410DA9}"/>
               </a:ext>
             </a:extLst>
           </p:cNvPr>
@@ -10460,7 +10456,7 @@
           <p:cNvPr id="8" name="Fußzeilenplatzhalter 3">
             <a:extLst xmlns:a="http://schemas.openxmlformats.org/drawingml/2006/main">
               <a:ext uri="{FF2B5EF4-FFF2-40B4-BE49-F238E27FC236}">
-                <a16:creationId xmlns:a16="http://schemas.microsoft.com/office/drawing/2014/main" id="{7EED4967-60F4-4073-A5A9-69950D3BD36F}"/>
+                <a16:creationId xmlns:a16="http://schemas.microsoft.com/office/drawing/2014/main" id="{CBC80C1A-A56E-4025-BE65-2945465A5B55}"/>
               </a:ext>
             </a:extLst>
           </p:cNvPr>
@@ -10503,7 +10499,7 @@
   </p:cSld>
   <p:clrMap bg1="lt1" tx1="dk1" bg2="lt2" tx2="dk2" accent1="accent1" accent2="accent2" accent3="accent3" accent4="accent4" accent5="accent5" accent6="accent6" hlink="hlink" folHlink="folHlink"/>
   <p:sldLayoutIdLst>
-    <p:sldLayoutId xmlns:r="http://schemas.openxmlformats.org/officeDocument/2006/relationships" id="2147483679" r:id="R699255896a9547e9"/>
+    <p:sldLayoutId xmlns:r="http://schemas.openxmlformats.org/officeDocument/2006/relationships" id="2147483679" r:id="R2c9bcd778f4d4aac"/>
   </p:sldLayoutIdLst>
   <p:hf hdr="0" dt="0"/>
   <p:txStyles>
@@ -10870,7 +10866,7 @@
           <p:cNvPr id="7" name="Rechteck 6">
             <a:extLst xmlns:a="http://schemas.openxmlformats.org/drawingml/2006/main">
               <a:ext uri="{FF2B5EF4-FFF2-40B4-BE49-F238E27FC236}">
-                <a16:creationId xmlns:a16="http://schemas.microsoft.com/office/drawing/2014/main" id="{F00DF550-2570-4092-97CC-5E1CD9B916DE}"/>
+                <a16:creationId xmlns:a16="http://schemas.microsoft.com/office/drawing/2014/main" id="{C948EF10-418F-4E44-B3E4-72122A111C89}"/>
               </a:ext>
             </a:extLst>
           </p:cNvPr>
@@ -10934,7 +10930,7 @@
           <p:nvPr/>
         </p:nvPicPr>
         <p:blipFill>
-          <a:blip xmlns:r="http://schemas.openxmlformats.org/officeDocument/2006/relationships" xmlns:a="http://schemas.openxmlformats.org/drawingml/2006/main" r:embed="Rde894f053fb44702"/>
+          <a:blip xmlns:r="http://schemas.openxmlformats.org/officeDocument/2006/relationships" xmlns:a="http://schemas.openxmlformats.org/drawingml/2006/main" r:embed="R70f29f99b75942e7"/>
           <a:stretch xmlns:a="http://schemas.openxmlformats.org/drawingml/2006/main">
             <a:fillRect l="0" t="0" r="0" b="0"/>
           </a:stretch>
@@ -10954,7 +10950,7 @@
           <p:cNvPr id="9" name="Foliennummernplatzhalter 4">
             <a:extLst xmlns:a="http://schemas.openxmlformats.org/drawingml/2006/main">
               <a:ext uri="{FF2B5EF4-FFF2-40B4-BE49-F238E27FC236}">
-                <a16:creationId xmlns:a16="http://schemas.microsoft.com/office/drawing/2014/main" id="{22BF88A4-511D-4C80-97F2-D2D2E5B3D755}"/>
+                <a16:creationId xmlns:a16="http://schemas.microsoft.com/office/drawing/2014/main" id="{C9284DA5-5B66-4F69-AAEA-2D61F83C376A}"/>
               </a:ext>
             </a:extLst>
           </p:cNvPr>
@@ -10998,7 +10994,7 @@
           <p:cNvPr id="10" name="Fußzeilenplatzhalter 3">
             <a:extLst xmlns:a="http://schemas.openxmlformats.org/drawingml/2006/main">
               <a:ext uri="{FF2B5EF4-FFF2-40B4-BE49-F238E27FC236}">
-                <a16:creationId xmlns:a16="http://schemas.microsoft.com/office/drawing/2014/main" id="{3766AC22-6CB1-45D8-826E-0AB0CB452F31}"/>
+                <a16:creationId xmlns:a16="http://schemas.microsoft.com/office/drawing/2014/main" id="{F91B359D-4147-4FEB-BA0D-B39859A275E5}"/>
               </a:ext>
             </a:extLst>
           </p:cNvPr>
@@ -11041,7 +11037,7 @@
   </p:cSld>
   <p:clrMap bg1="lt1" tx1="dk1" bg2="lt2" tx2="dk2" accent1="accent1" accent2="accent2" accent3="accent3" accent4="accent4" accent5="accent5" accent6="accent6" hlink="hlink" folHlink="folHlink"/>
   <p:sldLayoutIdLst>
-    <p:sldLayoutId xmlns:r="http://schemas.openxmlformats.org/officeDocument/2006/relationships" id="2147483681" r:id="R43a1d966b4ac4375"/>
+    <p:sldLayoutId xmlns:r="http://schemas.openxmlformats.org/officeDocument/2006/relationships" id="2147483681" r:id="R05bf316611644b93"/>
   </p:sldLayoutIdLst>
   <p:hf hdr="0" dt="0"/>
   <p:txStyles>
@@ -12947,144 +12943,306 @@
 <c:chartSpace xmlns:c="http://schemas.openxmlformats.org/drawingml/2006/chart">
   <c:lang val="en-US"/>
   <c:chart>
+    <c:title>
+      <c:tx>
+        <c:rich>
+          <a:bodyPr xmlns:a="http://schemas.openxmlformats.org/drawingml/2006/main"/>
+          <a:lstStyle xmlns:a="http://schemas.openxmlformats.org/drawingml/2006/main"/>
+          <a:p xmlns:a="http://schemas.openxmlformats.org/drawingml/2006/main">
+            <a:r>
+              <a:rPr sz="750" b="1">
+                <a:solidFill>
+                  <a:srgbClr val="000000"/>
+                </a:solidFill>
+              </a:rPr>
+              <a:t>Offer-anchor trade-off</a:t>
+            </a:r>
+          </a:p>
+        </c:rich>
+      </c:tx>
+      <c:overlay val="0"/>
+      <c:txPr>
+        <a:bodyPr xmlns:a="http://schemas.openxmlformats.org/drawingml/2006/main" anchorCtr="1"/>
+        <a:lstStyle xmlns:a="http://schemas.openxmlformats.org/drawingml/2006/main"/>
+        <a:p xmlns:a="http://schemas.openxmlformats.org/drawingml/2006/main">
+          <a:pPr>
+            <a:defRPr sz="750" b="1">
+              <a:solidFill>
+                <a:srgbClr val="000000"/>
+              </a:solidFill>
+            </a:defRPr>
+          </a:pPr>
+        </a:p>
+      </c:txPr>
+    </c:title>
+    <c:autoTitleDeleted val="0"/>
     <c:plotArea>
-      <c:barChart>
-        <c:barDir val="col"/>
-        <c:grouping val="clustered"/>
-        <c:varyColors val="0"/>
+      <c:lineChart>
+        <c:grouping val="standard"/>
         <c:ser>
           <c:idx val="0"/>
           <c:order val="0"/>
           <c:tx>
-            <c:v>CQL</c:v>
+            <c:v>P(accept)</c:v>
           </c:tx>
           <c:spPr>
-            <a:solidFill xmlns:a="http://schemas.openxmlformats.org/drawingml/2006/main">
-              <a:srgbClr val="005293"/>
-            </a:solidFill>
+            <a:ln xmlns:a="http://schemas.openxmlformats.org/drawingml/2006/main" w="20955">
+              <a:solidFill>
+                <a:srgbClr val="005293"/>
+              </a:solidFill>
+              <a:prstDash val="solid"/>
+            </a:ln>
           </c:spPr>
+          <c:marker>
+            <c:symbol val="none"/>
+          </c:marker>
           <c:dLbls/>
           <c:cat>
-            <c:strLit>
-              <c:ptCount val="3"/>
+            <c:numLit>
+              <c:formatCode>General</c:formatCode>
+              <c:ptCount val="9"/>
               <c:pt idx="0">
-                <c:v>h=.03</c:v>
+                <c:v>0.1</c:v>
               </c:pt>
               <c:pt idx="1">
-                <c:v>h=.05</c:v>
+                <c:v>0.2</c:v>
               </c:pt>
               <c:pt idx="2">
-                <c:v>h=.10</c:v>
+                <c:v>0.3</c:v>
               </c:pt>
-            </c:strLit>
+              <c:pt idx="3">
+                <c:v>0.4</c:v>
+              </c:pt>
+              <c:pt idx="4">
+                <c:v>0.5</c:v>
+              </c:pt>
+              <c:pt idx="5">
+                <c:v>0.6</c:v>
+              </c:pt>
+              <c:pt idx="6">
+                <c:v>0.7</c:v>
+              </c:pt>
+              <c:pt idx="7">
+                <c:v>0.8</c:v>
+              </c:pt>
+              <c:pt idx="8">
+                <c:v>0.9</c:v>
+              </c:pt>
+            </c:numLit>
           </c:cat>
           <c:val>
             <c:numLit>
-              <c:formatCode>0</c:formatCode>
-              <c:ptCount val="3"/>
+              <c:formatCode>0.0</c:formatCode>
+              <c:ptCount val="9"/>
               <c:pt idx="0">
-                <c:v>22.54</c:v>
+                <c:v>0.05</c:v>
               </c:pt>
               <c:pt idx="1">
-                <c:v>36.19</c:v>
+                <c:v>0.09</c:v>
               </c:pt>
               <c:pt idx="2">
-                <c:v>60.18</c:v>
+                <c:v>0.16</c:v>
+              </c:pt>
+              <c:pt idx="3">
+                <c:v>0.27</c:v>
+              </c:pt>
+              <c:pt idx="4">
+                <c:v>0.42</c:v>
+              </c:pt>
+              <c:pt idx="5">
+                <c:v>0.58</c:v>
+              </c:pt>
+              <c:pt idx="6">
+                <c:v>0.73</c:v>
+              </c:pt>
+              <c:pt idx="7">
+                <c:v>0.84</c:v>
+              </c:pt>
+              <c:pt idx="8">
+                <c:v>0.91</c:v>
               </c:pt>
             </c:numLit>
           </c:val>
+          <c:smooth val="0"/>
         </c:ser>
         <c:ser>
           <c:idx val="1"/>
           <c:order val="1"/>
           <c:tx>
-            <c:v>Fixed</c:v>
+            <c:v>1 - anchor</c:v>
           </c:tx>
           <c:spPr>
-            <a:solidFill xmlns:a="http://schemas.openxmlformats.org/drawingml/2006/main">
-              <a:srgbClr val="64A0C8"/>
-            </a:solidFill>
+            <a:ln xmlns:a="http://schemas.openxmlformats.org/drawingml/2006/main" w="15240">
+              <a:solidFill>
+                <a:srgbClr val="777777"/>
+              </a:solidFill>
+              <a:prstDash val="solid"/>
+            </a:ln>
           </c:spPr>
+          <c:marker>
+            <c:symbol val="none"/>
+          </c:marker>
           <c:dLbls/>
           <c:cat>
-            <c:strLit>
-              <c:ptCount val="3"/>
+            <c:numLit>
+              <c:formatCode>General</c:formatCode>
+              <c:ptCount val="9"/>
               <c:pt idx="0">
-                <c:v>h=.03</c:v>
+                <c:v>0.1</c:v>
               </c:pt>
               <c:pt idx="1">
-                <c:v>h=.05</c:v>
+                <c:v>0.2</c:v>
               </c:pt>
               <c:pt idx="2">
-                <c:v>h=.10</c:v>
+                <c:v>0.3</c:v>
               </c:pt>
-            </c:strLit>
+              <c:pt idx="3">
+                <c:v>0.4</c:v>
+              </c:pt>
+              <c:pt idx="4">
+                <c:v>0.5</c:v>
+              </c:pt>
+              <c:pt idx="5">
+                <c:v>0.6</c:v>
+              </c:pt>
+              <c:pt idx="6">
+                <c:v>0.7</c:v>
+              </c:pt>
+              <c:pt idx="7">
+                <c:v>0.8</c:v>
+              </c:pt>
+              <c:pt idx="8">
+                <c:v>0.9</c:v>
+              </c:pt>
+            </c:numLit>
           </c:cat>
           <c:val>
             <c:numLit>
-              <c:formatCode>0</c:formatCode>
-              <c:ptCount val="3"/>
+              <c:formatCode>0.0</c:formatCode>
+              <c:ptCount val="9"/>
               <c:pt idx="0">
-                <c:v>21.62</c:v>
+                <c:v>0.9</c:v>
               </c:pt>
               <c:pt idx="1">
-                <c:v>36.21</c:v>
+                <c:v>0.8</c:v>
               </c:pt>
               <c:pt idx="2">
-                <c:v>68.72</c:v>
+                <c:v>0.7</c:v>
+              </c:pt>
+              <c:pt idx="3">
+                <c:v>0.6</c:v>
+              </c:pt>
+              <c:pt idx="4">
+                <c:v>0.5</c:v>
+              </c:pt>
+              <c:pt idx="5">
+                <c:v>0.4</c:v>
+              </c:pt>
+              <c:pt idx="6">
+                <c:v>0.3</c:v>
+              </c:pt>
+              <c:pt idx="7">
+                <c:v>0.2</c:v>
+              </c:pt>
+              <c:pt idx="8">
+                <c:v>0.1</c:v>
               </c:pt>
             </c:numLit>
           </c:val>
+          <c:smooth val="0"/>
         </c:ser>
         <c:ser>
           <c:idx val="2"/>
           <c:order val="2"/>
           <c:tx>
-            <c:v>Greedy</c:v>
+            <c:v>expected savings</c:v>
           </c:tx>
           <c:spPr>
-            <a:solidFill xmlns:a="http://schemas.openxmlformats.org/drawingml/2006/main">
-              <a:srgbClr val="DAD7CB"/>
-            </a:solidFill>
+            <a:ln xmlns:a="http://schemas.openxmlformats.org/drawingml/2006/main" w="22860">
+              <a:solidFill>
+                <a:srgbClr val="A2AD00"/>
+              </a:solidFill>
+              <a:prstDash val="solid"/>
+            </a:ln>
           </c:spPr>
+          <c:marker>
+            <c:symbol val="none"/>
+          </c:marker>
           <c:dLbls/>
           <c:cat>
-            <c:strLit>
-              <c:ptCount val="3"/>
+            <c:numLit>
+              <c:formatCode>General</c:formatCode>
+              <c:ptCount val="9"/>
               <c:pt idx="0">
-                <c:v>h=.03</c:v>
+                <c:v>0.1</c:v>
               </c:pt>
               <c:pt idx="1">
-                <c:v>h=.05</c:v>
+                <c:v>0.2</c:v>
               </c:pt>
               <c:pt idx="2">
-                <c:v>h=.10</c:v>
+                <c:v>0.3</c:v>
               </c:pt>
-            </c:strLit>
+              <c:pt idx="3">
+                <c:v>0.4</c:v>
+              </c:pt>
+              <c:pt idx="4">
+                <c:v>0.5</c:v>
+              </c:pt>
+              <c:pt idx="5">
+                <c:v>0.6</c:v>
+              </c:pt>
+              <c:pt idx="6">
+                <c:v>0.7</c:v>
+              </c:pt>
+              <c:pt idx="7">
+                <c:v>0.8</c:v>
+              </c:pt>
+              <c:pt idx="8">
+                <c:v>0.9</c:v>
+              </c:pt>
+            </c:numLit>
           </c:cat>
           <c:val>
             <c:numLit>
-              <c:formatCode>0</c:formatCode>
-              <c:ptCount val="3"/>
+              <c:formatCode>0.0</c:formatCode>
+              <c:ptCount val="9"/>
               <c:pt idx="0">
-                <c:v>0.44</c:v>
+                <c:v>0.045</c:v>
               </c:pt>
               <c:pt idx="1">
-                <c:v>0.83</c:v>
+                <c:v>0.072</c:v>
               </c:pt>
               <c:pt idx="2">
-                <c:v>1.87</c:v>
+                <c:v>0.112</c:v>
+              </c:pt>
+              <c:pt idx="3">
+                <c:v>0.162</c:v>
+              </c:pt>
+              <c:pt idx="4">
+                <c:v>0.21</c:v>
+              </c:pt>
+              <c:pt idx="5">
+                <c:v>0.232</c:v>
+              </c:pt>
+              <c:pt idx="6">
+                <c:v>0.219</c:v>
+              </c:pt>
+              <c:pt idx="7">
+                <c:v>0.168</c:v>
+              </c:pt>
+              <c:pt idx="8">
+                <c:v>0.091</c:v>
               </c:pt>
             </c:numLit>
           </c:val>
+          <c:smooth val="0"/>
         </c:ser>
         <c:dLbls>
           <c:showVal val="0"/>
         </c:dLbls>
-        <c:gapWidth val="75"/>
         <c:axId val="48650112"/>
         <c:axId val="48672768"/>
-      </c:barChart>
+      </c:lineChart>
       <c:catAx>
         <c:axId val="48650112"/>
         <c:scaling>
@@ -13092,6 +13250,38 @@
         </c:scaling>
         <c:delete val="0"/>
         <c:axPos val="b"/>
+        <c:title>
+          <c:tx>
+            <c:rich>
+              <a:bodyPr xmlns:a="http://schemas.openxmlformats.org/drawingml/2006/main"/>
+              <a:lstStyle xmlns:a="http://schemas.openxmlformats.org/drawingml/2006/main"/>
+              <a:p xmlns:a="http://schemas.openxmlformats.org/drawingml/2006/main">
+                <a:r>
+                  <a:rPr sz="600">
+                    <a:solidFill>
+                      <a:srgbClr val="000000"/>
+                    </a:solidFill>
+                  </a:rPr>
+                  <a:t>anchor a</a:t>
+                </a:r>
+              </a:p>
+            </c:rich>
+          </c:tx>
+          <c:overlay val="0"/>
+          <c:txPr>
+            <a:bodyPr xmlns:a="http://schemas.openxmlformats.org/drawingml/2006/main" anchorCtr="1"/>
+            <a:lstStyle xmlns:a="http://schemas.openxmlformats.org/drawingml/2006/main"/>
+            <a:p xmlns:a="http://schemas.openxmlformats.org/drawingml/2006/main">
+              <a:pPr>
+                <a:defRPr sz="600">
+                  <a:solidFill>
+                    <a:srgbClr val="000000"/>
+                  </a:solidFill>
+                </a:defRPr>
+              </a:pPr>
+            </a:p>
+          </c:txPr>
+        </c:title>
         <c:numFmt formatCode="General"/>
         <c:majorTickMark val="none"/>
         <c:minorTickMark val="none"/>
@@ -13108,7 +13298,7 @@
           <a:lstStyle xmlns:a="http://schemas.openxmlformats.org/drawingml/2006/main"/>
           <a:p xmlns:a="http://schemas.openxmlformats.org/drawingml/2006/main">
             <a:pPr>
-              <a:defRPr sz="600">
+              <a:defRPr sz="525">
                 <a:solidFill>
                   <a:srgbClr val="000000"/>
                 </a:solidFill>
@@ -13126,8 +13316,177 @@
         <c:axId val="48672768"/>
         <c:scaling>
           <c:orientation val="minMax"/>
-          <c:max val="75"/>
+          <c:max val="1"/>
           <c:min val="0"/>
+        </c:scaling>
+        <c:delete val="0"/>
+        <c:axPos val="l"/>
+        <c:majorGridlines>
+          <c:spPr>
+            <a:ln xmlns:a="http://schemas.openxmlformats.org/drawingml/2006/main" w="9525">
+              <a:solidFill>
+                <a:srgbClr val="D9E6F2"/>
+              </a:solidFill>
+              <a:prstDash val="solid"/>
+            </a:ln>
+          </c:spPr>
+        </c:majorGridlines>
+        <c:numFmt formatCode="0.0"/>
+        <c:majorTickMark val="none"/>
+        <c:minorTickMark val="none"/>
+        <c:spPr>
+          <a:ln xmlns:a="http://schemas.openxmlformats.org/drawingml/2006/main" w="9525">
+            <a:solidFill>
+              <a:srgbClr val="D4D4D4"/>
+            </a:solidFill>
+            <a:prstDash val="solid"/>
+          </a:ln>
+        </c:spPr>
+        <c:txPr>
+          <a:bodyPr xmlns:a="http://schemas.openxmlformats.org/drawingml/2006/main" anchorCtr="1"/>
+          <a:lstStyle xmlns:a="http://schemas.openxmlformats.org/drawingml/2006/main"/>
+          <a:p xmlns:a="http://schemas.openxmlformats.org/drawingml/2006/main">
+            <a:pPr>
+              <a:defRPr sz="525">
+                <a:solidFill>
+                  <a:srgbClr val="000000"/>
+                </a:solidFill>
+              </a:defRPr>
+            </a:pPr>
+          </a:p>
+        </c:txPr>
+        <c:crossAx val="48650112"/>
+        <c:crosses val="autoZero"/>
+        <c:crossBetween val="between"/>
+      </c:valAx>
+      <c:spPr>
+        <a:solidFill xmlns:a="http://schemas.openxmlformats.org/drawingml/2006/main">
+          <a:srgbClr val="FFFFFF"/>
+        </a:solidFill>
+      </c:spPr>
+    </c:plotArea>
+    <c:legend>
+      <c:legendPos val="b"/>
+      <c:overlay val="0"/>
+      <c:txPr>
+        <a:bodyPr xmlns:a="http://schemas.openxmlformats.org/drawingml/2006/main" anchorCtr="1"/>
+        <a:lstStyle xmlns:a="http://schemas.openxmlformats.org/drawingml/2006/main"/>
+        <a:p xmlns:a="http://schemas.openxmlformats.org/drawingml/2006/main">
+          <a:pPr>
+            <a:defRPr sz="600">
+              <a:solidFill>
+                <a:srgbClr val="000000"/>
+              </a:solidFill>
+            </a:defRPr>
+          </a:pPr>
+        </a:p>
+      </c:txPr>
+    </c:legend>
+    <c:plotVisOnly val="1"/>
+  </c:chart>
+  <c:spPr>
+    <a:solidFill xmlns:a="http://schemas.openxmlformats.org/drawingml/2006/main">
+      <a:srgbClr val="FFFFFF"/>
+    </a:solidFill>
+  </c:spPr>
+</c:chartSpace>
+</file>
+
+<file path=ppt/slides/charts/chart2.xml><?xml version="1.0" encoding="utf-8"?>
+<c:chartSpace xmlns:c="http://schemas.openxmlformats.org/drawingml/2006/chart">
+  <c:lang val="en-US"/>
+  <c:chart>
+    <c:title>
+      <c:tx>
+        <c:rich>
+          <a:bodyPr xmlns:a="http://schemas.openxmlformats.org/drawingml/2006/main"/>
+          <a:lstStyle xmlns:a="http://schemas.openxmlformats.org/drawingml/2006/main"/>
+          <a:p xmlns:a="http://schemas.openxmlformats.org/drawingml/2006/main">
+            <a:r>
+              <a:rPr sz="750" b="1">
+                <a:solidFill>
+                  <a:srgbClr val="000000"/>
+                </a:solidFill>
+              </a:rPr>
+              <a:t>Effective sample size at h = 0.05</a:t>
+            </a:r>
+          </a:p>
+        </c:rich>
+      </c:tx>
+      <c:overlay val="0"/>
+      <c:txPr>
+        <a:bodyPr xmlns:a="http://schemas.openxmlformats.org/drawingml/2006/main" anchorCtr="1"/>
+        <a:lstStyle xmlns:a="http://schemas.openxmlformats.org/drawingml/2006/main"/>
+        <a:p xmlns:a="http://schemas.openxmlformats.org/drawingml/2006/main">
+          <a:pPr>
+            <a:defRPr sz="750" b="1">
+              <a:solidFill>
+                <a:srgbClr val="000000"/>
+              </a:solidFill>
+            </a:defRPr>
+          </a:pPr>
+        </a:p>
+      </c:txPr>
+    </c:title>
+    <c:autoTitleDeleted val="0"/>
+    <c:plotArea>
+      <c:barChart>
+        <c:barDir val="bar"/>
+        <c:grouping val="clustered"/>
+        <c:varyColors val="0"/>
+        <c:ser>
+          <c:idx val="0"/>
+          <c:order val="0"/>
+          <c:tx>
+            <c:v>ESS fraction</c:v>
+          </c:tx>
+          <c:spPr>
+            <a:solidFill xmlns:a="http://schemas.openxmlformats.org/drawingml/2006/main">
+              <a:srgbClr val="005293"/>
+            </a:solidFill>
+          </c:spPr>
+          <c:dLbls/>
+          <c:cat>
+            <c:strLit>
+              <c:ptCount val="3"/>
+              <c:pt idx="0">
+                <c:v>Greedy</c:v>
+              </c:pt>
+              <c:pt idx="1">
+                <c:v>CQL</c:v>
+              </c:pt>
+              <c:pt idx="2">
+                <c:v>Fixed 0.70</c:v>
+              </c:pt>
+            </c:strLit>
+          </c:cat>
+          <c:val>
+            <c:numLit>
+              <c:formatCode>General</c:formatCode>
+              <c:ptCount val="3"/>
+              <c:pt idx="0">
+                <c:v>0.8</c:v>
+              </c:pt>
+              <c:pt idx="1">
+                <c:v>36.2</c:v>
+              </c:pt>
+              <c:pt idx="2">
+                <c:v>36.2</c:v>
+              </c:pt>
+            </c:numLit>
+          </c:val>
+        </c:ser>
+        <c:dLbls>
+          <c:showVal val="0"/>
+        </c:dLbls>
+        <c:gapWidth val="70"/>
+        <c:axId val="48650112"/>
+        <c:axId val="48672768"/>
+      </c:barChart>
+      <c:catAx>
+        <c:axId val="48650112"/>
+        <c:scaling>
+          <c:orientation val="minMax"/>
         </c:scaling>
         <c:delete val="0"/>
         <c:axPos val="l"/>
@@ -13197,6 +13556,43 @@
             </a:pPr>
           </a:p>
         </c:txPr>
+        <c:crossAx val="48672768"/>
+        <c:crosses val="autoZero"/>
+        <c:lblAlgn val="ctr"/>
+        <c:lblOffset val="100"/>
+        <c:noMultiLvlLbl val="0"/>
+      </c:catAx>
+      <c:valAx>
+        <c:axId val="48672768"/>
+        <c:scaling>
+          <c:orientation val="minMax"/>
+        </c:scaling>
+        <c:delete val="0"/>
+        <c:axPos val="b"/>
+        <c:numFmt formatCode="General"/>
+        <c:majorTickMark val="none"/>
+        <c:minorTickMark val="none"/>
+        <c:spPr>
+          <a:ln xmlns:a="http://schemas.openxmlformats.org/drawingml/2006/main" w="9525">
+            <a:solidFill>
+              <a:srgbClr val="D4D4D4"/>
+            </a:solidFill>
+            <a:prstDash val="solid"/>
+          </a:ln>
+        </c:spPr>
+        <c:txPr>
+          <a:bodyPr xmlns:a="http://schemas.openxmlformats.org/drawingml/2006/main" anchorCtr="1"/>
+          <a:lstStyle xmlns:a="http://schemas.openxmlformats.org/drawingml/2006/main"/>
+          <a:p xmlns:a="http://schemas.openxmlformats.org/drawingml/2006/main">
+            <a:pPr>
+              <a:defRPr sz="600">
+                <a:solidFill>
+                  <a:srgbClr val="000000"/>
+                </a:solidFill>
+              </a:defRPr>
+            </a:pPr>
+          </a:p>
+        </c:txPr>
         <c:crossAx val="48650112"/>
         <c:crosses val="autoZero"/>
         <c:crossBetween val="between"/>
@@ -13207,23 +13603,6 @@
         </a:solidFill>
       </c:spPr>
     </c:plotArea>
-    <c:legend>
-      <c:legendPos val="b"/>
-      <c:overlay val="0"/>
-      <c:txPr>
-        <a:bodyPr xmlns:a="http://schemas.openxmlformats.org/drawingml/2006/main" anchorCtr="1"/>
-        <a:lstStyle xmlns:a="http://schemas.openxmlformats.org/drawingml/2006/main"/>
-        <a:p xmlns:a="http://schemas.openxmlformats.org/drawingml/2006/main">
-          <a:pPr>
-            <a:defRPr sz="600">
-              <a:solidFill>
-                <a:srgbClr val="000000"/>
-              </a:solidFill>
-            </a:defRPr>
-          </a:pPr>
-        </a:p>
-      </c:txPr>
-    </c:legend>
     <c:plotVisOnly val="1"/>
   </c:chart>
   <c:spPr>
@@ -13255,7 +13634,7 @@
           <p:nvPr/>
         </p:nvPicPr>
         <p:blipFill>
-          <a:blip xmlns:r="http://schemas.openxmlformats.org/officeDocument/2006/relationships" xmlns:a="http://schemas.openxmlformats.org/drawingml/2006/main" r:embed="Rd0464a82546f49c5"/>
+          <a:blip xmlns:r="http://schemas.openxmlformats.org/officeDocument/2006/relationships" xmlns:a="http://schemas.openxmlformats.org/drawingml/2006/main" r:embed="R81fd95dd6d3a4c7e"/>
           <a:stretch xmlns:a="http://schemas.openxmlformats.org/drawingml/2006/main">
             <a:fillRect l="0" t="0" r="0" b="0"/>
           </a:stretch>
@@ -13275,7 +13654,7 @@
           <p:cNvPr id="3" name="Inhaltsplatzhalter 2">
             <a:extLst xmlns:a="http://schemas.openxmlformats.org/drawingml/2006/main">
               <a:ext uri="{FF2B5EF4-FFF2-40B4-BE49-F238E27FC236}">
-                <a16:creationId xmlns:a16="http://schemas.microsoft.com/office/drawing/2014/main" id="{833DE235-5022-481B-BF8E-045342A233CC}"/>
+                <a16:creationId xmlns:a16="http://schemas.microsoft.com/office/drawing/2014/main" id="{CBA5DE16-AA16-42B5-8437-1150F300445B}"/>
               </a:ext>
             </a:extLst>
           </p:cNvPr>
@@ -13297,7 +13676,12 @@
           <a:lstStyle xmlns:a="http://schemas.openxmlformats.org/drawingml/2006/main"/>
           <a:p xmlns:a="http://schemas.openxmlformats.org/drawingml/2006/main">
             <a:r>
-              <a:t>Offline and simulated online RL for eBay Best Offer anchoring</a:t>
+              <a:t>Offline and Simulated Online Reinforcement Learning</a:t>
+            </a:r>
+          </a:p>
+          <a:p xmlns:a="http://schemas.openxmlformats.org/drawingml/2006/main">
+            <a:r>
+              <a:t>for eBay Best Offer Anchoring</a:t>
             </a:r>
           </a:p>
           <a:p xmlns:a="http://schemas.openxmlformats.org/drawingml/2006/main">
@@ -13307,7 +13691,7 @@
           </a:p>
           <a:p xmlns:a="http://schemas.openxmlformats.org/drawingml/2006/main">
             <a:r>
-              <a:t>Why / How / What</a:t>
+              <a:t>Support-aware decision support for buyer opening offers</a:t>
             </a:r>
           </a:p>
           <a:p xmlns:a="http://schemas.openxmlformats.org/drawingml/2006/main">
@@ -13317,12 +13701,27 @@
           </a:p>
           <a:p xmlns:a="http://schemas.openxmlformats.org/drawingml/2006/main">
             <a:r>
-              <a:t>Support-aware decision support for buyer opening offers</a:t>
-            </a:r>
-          </a:p>
-          <a:p xmlns:a="http://schemas.openxmlformats.org/drawingml/2006/main">
-            <a:r>
-              <a:t>soluthan | Final project presentation | July 2026</a:t>
+              <a:t>Nathan Nozik | Final project presentation</a:t>
+            </a:r>
+          </a:p>
+          <a:p xmlns:a="http://schemas.openxmlformats.org/drawingml/2006/main">
+            <a:r>
+              <a:t>Advanced Seminar (WIHN0043SE)</a:t>
+            </a:r>
+          </a:p>
+          <a:p xmlns:a="http://schemas.openxmlformats.org/drawingml/2006/main">
+            <a:r>
+              <a:t>Real-World Applications of Deep Learning and RL</a:t>
+            </a:r>
+          </a:p>
+          <a:p xmlns:a="http://schemas.openxmlformats.org/drawingml/2006/main">
+            <a:r>
+              <a:t>TUM School of Management | Chair of Business Analytics</a:t>
+            </a:r>
+          </a:p>
+          <a:p xmlns:a="http://schemas.openxmlformats.org/drawingml/2006/main">
+            <a:r>
+              <a:t>Heilbronn, 31.07.2026</a:t>
             </a:r>
           </a:p>
         </p:txBody>
@@ -13330,7 +13729,7 @@
     </p:spTree>
     <p:extLst>
       <p:ext uri="{BB962C8B-B14F-4D97-AF65-F5344CB8AC3E}">
-        <p14:creationId xmlns:p14="http://schemas.microsoft.com/office/powerpoint/2010/main" val="567851067"/>
+        <p14:creationId xmlns:p14="http://schemas.microsoft.com/office/powerpoint/2010/main" val="1608922353"/>
       </p:ext>
     </p:extLst>
   </p:cSld>
@@ -13354,7 +13753,7 @@
           <p:cNvPr id="3" name="Inhaltsplatzhalter 2">
             <a:extLst xmlns:a="http://schemas.openxmlformats.org/drawingml/2006/main">
               <a:ext uri="{FF2B5EF4-FFF2-40B4-BE49-F238E27FC236}">
-                <a16:creationId xmlns:a16="http://schemas.microsoft.com/office/drawing/2014/main" id="{9FE37DC3-0575-43D9-AF7C-F5144AB7CF0E}"/>
+                <a16:creationId xmlns:a16="http://schemas.microsoft.com/office/drawing/2014/main" id="{349F6ED9-DD01-46EA-A0B2-3CF37391F570}"/>
               </a:ext>
             </a:extLst>
           </p:cNvPr>
@@ -13376,7 +13775,7 @@
           </a:p>
           <a:p xmlns:a="http://schemas.openxmlformats.org/drawingml/2006/main">
             <a:r>
-              <a:t>What the results mean and what remains uncertain</a:t>
+              <a:t>Results, honest claims, and what remains open</a:t>
             </a:r>
           </a:p>
         </p:txBody>
@@ -13384,7 +13783,7 @@
     </p:spTree>
     <p:extLst>
       <p:ext uri="{BB962C8B-B14F-4D97-AF65-F5344CB8AC3E}">
-        <p14:creationId xmlns:p14="http://schemas.microsoft.com/office/powerpoint/2010/main" val="22518012"/>
+        <p14:creationId xmlns:p14="http://schemas.microsoft.com/office/powerpoint/2010/main" val="848793366"/>
       </p:ext>
     </p:extLst>
   </p:cSld>
@@ -13408,15 +13807,15 @@
           <p:cNvPr id="2" name="Content Placeholder 1">
             <a:extLst xmlns:a="http://schemas.openxmlformats.org/drawingml/2006/main">
               <a:ext uri="{FF2B5EF4-FFF2-40B4-BE49-F238E27FC236}">
-                <a16:creationId xmlns:a16="http://schemas.microsoft.com/office/drawing/2014/main" id="{76DA83A1-33C7-42C4-8F9C-3BD42E18E156}"/>
-              </a:ext>
-            </a:extLst>
-          </p:cNvPr>
-          <p:cNvSpPr>
-            <a:spLocks xmlns:a="http://schemas.openxmlformats.org/drawingml/2006/main" noGrp="1"/>
-          </p:cNvSpPr>
-          <p:nvPr>
-            <p:ph idx="1"/>
+                <a16:creationId xmlns:a16="http://schemas.microsoft.com/office/drawing/2014/main" id="{38F05BFB-8908-46EB-84F3-3B1D5835FAE4}"/>
+              </a:ext>
+            </a:extLst>
+          </p:cNvPr>
+          <p:cNvSpPr>
+            <a:spLocks xmlns:a="http://schemas.openxmlformats.org/drawingml/2006/main" noGrp="1"/>
+          </p:cNvSpPr>
+          <p:nvPr>
+            <p:ph idx="14"/>
           </p:nvPr>
         </p:nvSpPr>
         <p:spPr/>
@@ -13425,12 +13824,7 @@
           <a:lstStyle xmlns:a="http://schemas.openxmlformats.org/drawingml/2006/main"/>
           <a:p xmlns:a="http://schemas.openxmlformats.org/drawingml/2006/main">
             <a:r>
-              <a:t>Supported claim</a:t>
-            </a:r>
-          </a:p>
-          <a:p xmlns:a="http://schemas.openxmlformats.org/drawingml/2006/main">
-            <a:r>
-              <a:t>CQL changes the recommendation profile and remains much more evaluable than greedy optimization.</a:t>
+              <a:t>The rows are not directly comparable as a single ranking.</a:t>
             </a:r>
           </a:p>
           <a:p xmlns:a="http://schemas.openxmlformats.org/drawingml/2006/main">
@@ -13440,12 +13834,17 @@
           </a:p>
           <a:p xmlns:a="http://schemas.openxmlformats.org/drawingml/2006/main">
             <a:r>
-              <a:t>Careful claim</a:t>
-            </a:r>
-          </a:p>
-          <a:p xmlns:a="http://schemas.openxmlformats.org/drawingml/2006/main">
-            <a:r>
-              <a:t>PPO obtains high simulator rewards, but those are learned-environment stress-test results.</a:t>
+              <a:t>Behavior is observed.</a:t>
+            </a:r>
+          </a:p>
+          <a:p xmlns:a="http://schemas.openxmlformats.org/drawingml/2006/main">
+            <a:r>
+              <a:t>Fixed and CQL are model estimates.</a:t>
+            </a:r>
+          </a:p>
+          <a:p xmlns:a="http://schemas.openxmlformats.org/drawingml/2006/main">
+            <a:r>
+              <a:t>PPO is simulator-only.</a:t>
             </a:r>
           </a:p>
           <a:p xmlns:a="http://schemas.openxmlformats.org/drawingml/2006/main">
@@ -13454,55 +13853,26 @@
             </a:r>
           </a:p>
           <a:p xmlns:a="http://schemas.openxmlformats.org/drawingml/2006/main">
-            <a:pPr>
-              <a:buNone/>
-            </a:pPr>
-            <a:r>
-              <a:t>Avoid claiming</a:t>
-            </a:r>
-          </a:p>
-          <a:p xmlns:a="http://schemas.openxmlformats.org/drawingml/2006/main">
-            <a:pPr>
-              <a:buNone/>
-            </a:pPr>
-            <a:r>
-              <a:t>RL has proven live marketplace lift.</a:t>
-            </a:r>
-          </a:p>
-          <a:p xmlns:a="http://schemas.openxmlformats.org/drawingml/2006/main">
-            <a:pPr>
-              <a:buNone/>
-            </a:pPr>
-            <a:r>
-              <a:t/>
-            </a:r>
-          </a:p>
-          <a:p xmlns:a="http://schemas.openxmlformats.org/drawingml/2006/main">
-            <a:r>
-              <a:t>Future work</a:t>
-            </a:r>
-          </a:p>
-          <a:p xmlns:a="http://schemas.openxmlformats.org/drawingml/2006/main">
-            <a:r>
-              <a:t>sequential negotiation, richer item features, temporal and leaf-holdout robustness tables</a:t>
-            </a:r>
-          </a:p>
-        </p:txBody>
-      </p:sp>
-      <p:sp>
-        <p:nvSpPr>
-          <p:cNvPr id="3" name="Slide Number Placeholder 2">
-            <a:extLst xmlns:a="http://schemas.openxmlformats.org/drawingml/2006/main">
-              <a:ext uri="{FF2B5EF4-FFF2-40B4-BE49-F238E27FC236}">
-                <a16:creationId xmlns:a16="http://schemas.microsoft.com/office/drawing/2014/main" id="{C44891E6-FD77-4ED2-B33D-9D52420B512C}"/>
-              </a:ext>
-            </a:extLst>
-          </p:cNvPr>
-          <p:cNvSpPr>
-            <a:spLocks xmlns:a="http://schemas.openxmlformats.org/drawingml/2006/main" noGrp="1"/>
-          </p:cNvSpPr>
-          <p:nvPr>
-            <p:ph type="sldNum" idx="11"/>
+            <a:r>
+              <a:t>Under the same model surface, conservative CQL does not beat logged behavior; its value is support discipline.</a:t>
+            </a:r>
+          </a:p>
+        </p:txBody>
+      </p:sp>
+      <p:sp>
+        <p:nvSpPr>
+          <p:cNvPr id="4" name="Slide Number Placeholder 3">
+            <a:extLst xmlns:a="http://schemas.openxmlformats.org/drawingml/2006/main">
+              <a:ext uri="{FF2B5EF4-FFF2-40B4-BE49-F238E27FC236}">
+                <a16:creationId xmlns:a16="http://schemas.microsoft.com/office/drawing/2014/main" id="{B00B1BF6-1E0F-4AD0-89BA-806F600E6D7D}"/>
+              </a:ext>
+            </a:extLst>
+          </p:cNvPr>
+          <p:cNvSpPr>
+            <a:spLocks xmlns:a="http://schemas.openxmlformats.org/drawingml/2006/main" noGrp="1"/>
+          </p:cNvSpPr>
+          <p:nvPr>
+            <p:ph type="sldNum" idx="16"/>
           </p:nvPr>
         </p:nvSpPr>
         <p:spPr/>
@@ -13518,18 +13888,18 @@
       </p:sp>
       <p:sp>
         <p:nvSpPr>
-          <p:cNvPr id="4" name="Footer Placeholder 3">
-            <a:extLst xmlns:a="http://schemas.openxmlformats.org/drawingml/2006/main">
-              <a:ext uri="{FF2B5EF4-FFF2-40B4-BE49-F238E27FC236}">
-                <a16:creationId xmlns:a16="http://schemas.microsoft.com/office/drawing/2014/main" id="{73735118-2018-403D-97C0-573C8DD06D6A}"/>
-              </a:ext>
-            </a:extLst>
-          </p:cNvPr>
-          <p:cNvSpPr>
-            <a:spLocks xmlns:a="http://schemas.openxmlformats.org/drawingml/2006/main" noGrp="1"/>
-          </p:cNvSpPr>
-          <p:nvPr>
-            <p:ph type="ftr" idx="12"/>
+          <p:cNvPr id="5" name="Footer Placeholder 4">
+            <a:extLst xmlns:a="http://schemas.openxmlformats.org/drawingml/2006/main">
+              <a:ext uri="{FF2B5EF4-FFF2-40B4-BE49-F238E27FC236}">
+                <a16:creationId xmlns:a16="http://schemas.microsoft.com/office/drawing/2014/main" id="{B4AEE372-D5A0-447D-9407-E3C69944FFDA}"/>
+              </a:ext>
+            </a:extLst>
+          </p:cNvPr>
+          <p:cNvSpPr>
+            <a:spLocks xmlns:a="http://schemas.openxmlformats.org/drawingml/2006/main" noGrp="1"/>
+          </p:cNvSpPr>
+          <p:nvPr>
+            <p:ph type="ftr" idx="17"/>
           </p:nvPr>
         </p:nvSpPr>
         <p:spPr/>
@@ -13538,17 +13908,17 @@
           <a:lstStyle xmlns:a="http://schemas.openxmlformats.org/drawingml/2006/main"/>
           <a:p xmlns:a="http://schemas.openxmlformats.org/drawingml/2006/main">
             <a:r>
-              <a:t>eBay Best Offer anchoring RL | Why / How / What</a:t>
-            </a:r>
-          </a:p>
-        </p:txBody>
-      </p:sp>
-      <p:sp>
-        <p:nvSpPr>
-          <p:cNvPr id="5" name="Title 4">
-            <a:extLst xmlns:a="http://schemas.openxmlformats.org/drawingml/2006/main">
-              <a:ext uri="{FF2B5EF4-FFF2-40B4-BE49-F238E27FC236}">
-                <a16:creationId xmlns:a16="http://schemas.microsoft.com/office/drawing/2014/main" id="{5E5BBDBF-7D0D-4939-977B-4D07FC6EF406}"/>
+              <a:t>eBay Best Offer anchoring RL | Advanced Seminar (WIHN0043SE)</a:t>
+            </a:r>
+          </a:p>
+        </p:txBody>
+      </p:sp>
+      <p:sp>
+        <p:nvSpPr>
+          <p:cNvPr id="6" name="Title 5">
+            <a:extLst xmlns:a="http://schemas.openxmlformats.org/drawingml/2006/main">
+              <a:ext uri="{FF2B5EF4-FFF2-40B4-BE49-F238E27FC236}">
+                <a16:creationId xmlns:a16="http://schemas.microsoft.com/office/drawing/2014/main" id="{0514C42E-BA49-4954-A66B-22C9793B6568}"/>
               </a:ext>
             </a:extLst>
           </p:cNvPr>
@@ -13565,7 +13935,2092 @@
           <a:lstStyle xmlns:a="http://schemas.openxmlformats.org/drawingml/2006/main"/>
           <a:p xmlns:a="http://schemas.openxmlformats.org/drawingml/2006/main">
             <a:r>
-              <a:t>What: the strongest claim is diagnostic</a:t>
+              <a:t>What: evidence triage, not a leaderboard</a:t>
+            </a:r>
+          </a:p>
+        </p:txBody>
+      </p:sp>
+      <p:sp>
+        <p:nvSpPr>
+          <p:cNvPr id="7" name="">
+            <a:extLst xmlns:a="http://schemas.openxmlformats.org/drawingml/2006/main">
+              <a:ext uri="{FF2B5EF4-FFF2-40B4-BE49-F238E27FC236}">
+                <a16:creationId xmlns:a16="http://schemas.microsoft.com/office/drawing/2014/main" id="{F41F438F-CF97-4D88-8941-D574B0B827D2}"/>
+              </a:ext>
+            </a:extLst>
+          </p:cNvPr>
+          <p:cNvSpPr>
+            <a:spLocks xmlns:a="http://schemas.openxmlformats.org/drawingml/2006/main" noGrp="1"/>
+          </p:cNvSpPr>
+          <p:nvPr/>
+        </p:nvSpPr>
+        <p:spPr>
+          <a:xfrm xmlns:a="http://schemas.openxmlformats.org/drawingml/2006/main">
+            <a:off x="4714875" y="1381125"/>
+            <a:ext cx="3448050" cy="247650"/>
+          </a:xfrm>
+          <a:prstGeom xmlns:a="http://schemas.openxmlformats.org/drawingml/2006/main" prst="rect">
+            <a:avLst/>
+          </a:prstGeom>
+          <a:solidFill xmlns:a="http://schemas.openxmlformats.org/drawingml/2006/main">
+            <a:srgbClr val="005293"/>
+          </a:solidFill>
+          <a:ln xmlns:a="http://schemas.openxmlformats.org/drawingml/2006/main" w="7144">
+            <a:solidFill>
+              <a:srgbClr val="8DAAC5"/>
+            </a:solidFill>
+            <a:prstDash val="solid"/>
+          </a:ln>
+        </p:spPr>
+      </p:sp>
+      <p:sp>
+        <p:nvSpPr>
+          <p:cNvPr id="8" name="">
+            <a:extLst xmlns:a="http://schemas.openxmlformats.org/drawingml/2006/main">
+              <a:ext uri="{FF2B5EF4-FFF2-40B4-BE49-F238E27FC236}">
+                <a16:creationId xmlns:a16="http://schemas.microsoft.com/office/drawing/2014/main" id="{30BECF39-D271-4B39-8C98-AE98FAD3364E}"/>
+              </a:ext>
+            </a:extLst>
+          </p:cNvPr>
+          <p:cNvSpPr>
+            <a:spLocks xmlns:a="http://schemas.openxmlformats.org/drawingml/2006/main" noGrp="1"/>
+          </p:cNvSpPr>
+          <p:nvPr/>
+        </p:nvSpPr>
+        <p:spPr>
+          <a:xfrm xmlns:a="http://schemas.openxmlformats.org/drawingml/2006/main">
+            <a:off x="4762500" y="1438275"/>
+            <a:ext cx="828675" cy="171450"/>
+          </a:xfrm>
+          <a:prstGeom xmlns:a="http://schemas.openxmlformats.org/drawingml/2006/main" prst="rect">
+            <a:avLst/>
+          </a:prstGeom>
+          <a:noFill xmlns:a="http://schemas.openxmlformats.org/drawingml/2006/main"/>
+          <a:ln xmlns:a="http://schemas.openxmlformats.org/drawingml/2006/main" w="0">
+            <a:noFill/>
+            <a:prstDash val="solid"/>
+          </a:ln>
+        </p:spPr>
+        <p:txBody>
+          <a:bodyPr xmlns:a="http://schemas.openxmlformats.org/drawingml/2006/main"/>
+          <a:lstStyle xmlns:a="http://schemas.openxmlformats.org/drawingml/2006/main"/>
+          <a:p xmlns:a="http://schemas.openxmlformats.org/drawingml/2006/main">
+            <a:pPr algn="l">
+              <a:defRPr sz="630" b="1">
+                <a:solidFill>
+                  <a:srgbClr val="FFFFFF"/>
+                </a:solidFill>
+              </a:defRPr>
+            </a:pPr>
+            <a:r>
+              <a:rPr sz="630" b="1">
+                <a:solidFill>
+                  <a:srgbClr val="FFFFFF"/>
+                </a:solidFill>
+              </a:rPr>
+              <a:t>Policy</a:t>
+            </a:r>
+          </a:p>
+        </p:txBody>
+      </p:sp>
+      <p:sp>
+        <p:nvSpPr>
+          <p:cNvPr id="9" name="">
+            <a:extLst xmlns:a="http://schemas.openxmlformats.org/drawingml/2006/main">
+              <a:ext uri="{FF2B5EF4-FFF2-40B4-BE49-F238E27FC236}">
+                <a16:creationId xmlns:a16="http://schemas.microsoft.com/office/drawing/2014/main" id="{599DD9B4-D3AE-4964-B115-DAE3A2FB5B18}"/>
+              </a:ext>
+            </a:extLst>
+          </p:cNvPr>
+          <p:cNvSpPr>
+            <a:spLocks xmlns:a="http://schemas.openxmlformats.org/drawingml/2006/main" noGrp="1"/>
+          </p:cNvSpPr>
+          <p:nvPr/>
+        </p:nvSpPr>
+        <p:spPr>
+          <a:xfrm xmlns:a="http://schemas.openxmlformats.org/drawingml/2006/main">
+            <a:off x="5629275" y="1381125"/>
+            <a:ext cx="7144" cy="247650"/>
+          </a:xfrm>
+          <a:prstGeom xmlns:a="http://schemas.openxmlformats.org/drawingml/2006/main" prst="rect">
+            <a:avLst/>
+          </a:prstGeom>
+          <a:solidFill xmlns:a="http://schemas.openxmlformats.org/drawingml/2006/main">
+            <a:srgbClr val="8DAAC5"/>
+          </a:solidFill>
+          <a:ln xmlns:a="http://schemas.openxmlformats.org/drawingml/2006/main" w="0">
+            <a:noFill/>
+            <a:prstDash val="solid"/>
+          </a:ln>
+        </p:spPr>
+      </p:sp>
+      <p:sp>
+        <p:nvSpPr>
+          <p:cNvPr id="10" name="">
+            <a:extLst xmlns:a="http://schemas.openxmlformats.org/drawingml/2006/main">
+              <a:ext uri="{FF2B5EF4-FFF2-40B4-BE49-F238E27FC236}">
+                <a16:creationId xmlns:a16="http://schemas.microsoft.com/office/drawing/2014/main" id="{27304A1E-E9FD-463A-A1C3-36C8435A57A5}"/>
+              </a:ext>
+            </a:extLst>
+          </p:cNvPr>
+          <p:cNvSpPr>
+            <a:spLocks xmlns:a="http://schemas.openxmlformats.org/drawingml/2006/main" noGrp="1"/>
+          </p:cNvSpPr>
+          <p:nvPr/>
+        </p:nvSpPr>
+        <p:spPr>
+          <a:xfrm xmlns:a="http://schemas.openxmlformats.org/drawingml/2006/main">
+            <a:off x="5676900" y="1438275"/>
+            <a:ext cx="695325" cy="171450"/>
+          </a:xfrm>
+          <a:prstGeom xmlns:a="http://schemas.openxmlformats.org/drawingml/2006/main" prst="rect">
+            <a:avLst/>
+          </a:prstGeom>
+          <a:noFill xmlns:a="http://schemas.openxmlformats.org/drawingml/2006/main"/>
+          <a:ln xmlns:a="http://schemas.openxmlformats.org/drawingml/2006/main" w="0">
+            <a:noFill/>
+            <a:prstDash val="solid"/>
+          </a:ln>
+        </p:spPr>
+        <p:txBody>
+          <a:bodyPr xmlns:a="http://schemas.openxmlformats.org/drawingml/2006/main"/>
+          <a:lstStyle xmlns:a="http://schemas.openxmlformats.org/drawingml/2006/main"/>
+          <a:p xmlns:a="http://schemas.openxmlformats.org/drawingml/2006/main">
+            <a:pPr algn="l">
+              <a:defRPr sz="630" b="1">
+                <a:solidFill>
+                  <a:srgbClr val="FFFFFF"/>
+                </a:solidFill>
+              </a:defRPr>
+            </a:pPr>
+            <a:r>
+              <a:rPr sz="630" b="1">
+                <a:solidFill>
+                  <a:srgbClr val="FFFFFF"/>
+                </a:solidFill>
+              </a:rPr>
+              <a:t>Evidence</a:t>
+            </a:r>
+          </a:p>
+        </p:txBody>
+      </p:sp>
+      <p:sp>
+        <p:nvSpPr>
+          <p:cNvPr id="11" name="">
+            <a:extLst xmlns:a="http://schemas.openxmlformats.org/drawingml/2006/main">
+              <a:ext uri="{FF2B5EF4-FFF2-40B4-BE49-F238E27FC236}">
+                <a16:creationId xmlns:a16="http://schemas.microsoft.com/office/drawing/2014/main" id="{8183D229-70DE-4D9E-B489-7670472A1B15}"/>
+              </a:ext>
+            </a:extLst>
+          </p:cNvPr>
+          <p:cNvSpPr>
+            <a:spLocks xmlns:a="http://schemas.openxmlformats.org/drawingml/2006/main" noGrp="1"/>
+          </p:cNvSpPr>
+          <p:nvPr/>
+        </p:nvSpPr>
+        <p:spPr>
+          <a:xfrm xmlns:a="http://schemas.openxmlformats.org/drawingml/2006/main">
+            <a:off x="6410325" y="1381125"/>
+            <a:ext cx="7144" cy="247650"/>
+          </a:xfrm>
+          <a:prstGeom xmlns:a="http://schemas.openxmlformats.org/drawingml/2006/main" prst="rect">
+            <a:avLst/>
+          </a:prstGeom>
+          <a:solidFill xmlns:a="http://schemas.openxmlformats.org/drawingml/2006/main">
+            <a:srgbClr val="8DAAC5"/>
+          </a:solidFill>
+          <a:ln xmlns:a="http://schemas.openxmlformats.org/drawingml/2006/main" w="0">
+            <a:noFill/>
+            <a:prstDash val="solid"/>
+          </a:ln>
+        </p:spPr>
+      </p:sp>
+      <p:sp>
+        <p:nvSpPr>
+          <p:cNvPr id="12" name="">
+            <a:extLst xmlns:a="http://schemas.openxmlformats.org/drawingml/2006/main">
+              <a:ext uri="{FF2B5EF4-FFF2-40B4-BE49-F238E27FC236}">
+                <a16:creationId xmlns:a16="http://schemas.microsoft.com/office/drawing/2014/main" id="{61E2D3AC-C95D-478A-A65C-97E555BD9869}"/>
+              </a:ext>
+            </a:extLst>
+          </p:cNvPr>
+          <p:cNvSpPr>
+            <a:spLocks xmlns:a="http://schemas.openxmlformats.org/drawingml/2006/main" noGrp="1"/>
+          </p:cNvSpPr>
+          <p:nvPr/>
+        </p:nvSpPr>
+        <p:spPr>
+          <a:xfrm xmlns:a="http://schemas.openxmlformats.org/drawingml/2006/main">
+            <a:off x="6457950" y="1438275"/>
+            <a:ext cx="561975" cy="171450"/>
+          </a:xfrm>
+          <a:prstGeom xmlns:a="http://schemas.openxmlformats.org/drawingml/2006/main" prst="rect">
+            <a:avLst/>
+          </a:prstGeom>
+          <a:noFill xmlns:a="http://schemas.openxmlformats.org/drawingml/2006/main"/>
+          <a:ln xmlns:a="http://schemas.openxmlformats.org/drawingml/2006/main" w="0">
+            <a:noFill/>
+            <a:prstDash val="solid"/>
+          </a:ln>
+        </p:spPr>
+        <p:txBody>
+          <a:bodyPr xmlns:a="http://schemas.openxmlformats.org/drawingml/2006/main"/>
+          <a:lstStyle xmlns:a="http://schemas.openxmlformats.org/drawingml/2006/main"/>
+          <a:p xmlns:a="http://schemas.openxmlformats.org/drawingml/2006/main">
+            <a:pPr algn="l">
+              <a:defRPr sz="630" b="1">
+                <a:solidFill>
+                  <a:srgbClr val="FFFFFF"/>
+                </a:solidFill>
+              </a:defRPr>
+            </a:pPr>
+            <a:r>
+              <a:rPr sz="630" b="1">
+                <a:solidFill>
+                  <a:srgbClr val="FFFFFF"/>
+                </a:solidFill>
+              </a:rPr>
+              <a:t>Savings</a:t>
+            </a:r>
+          </a:p>
+        </p:txBody>
+      </p:sp>
+      <p:sp>
+        <p:nvSpPr>
+          <p:cNvPr id="13" name="">
+            <a:extLst xmlns:a="http://schemas.openxmlformats.org/drawingml/2006/main">
+              <a:ext uri="{FF2B5EF4-FFF2-40B4-BE49-F238E27FC236}">
+                <a16:creationId xmlns:a16="http://schemas.microsoft.com/office/drawing/2014/main" id="{27E886D0-3DB4-4C93-A3A5-1F46D0397D70}"/>
+              </a:ext>
+            </a:extLst>
+          </p:cNvPr>
+          <p:cNvSpPr>
+            <a:spLocks xmlns:a="http://schemas.openxmlformats.org/drawingml/2006/main" noGrp="1"/>
+          </p:cNvSpPr>
+          <p:nvPr/>
+        </p:nvSpPr>
+        <p:spPr>
+          <a:xfrm xmlns:a="http://schemas.openxmlformats.org/drawingml/2006/main">
+            <a:off x="7058025" y="1381125"/>
+            <a:ext cx="7144" cy="247650"/>
+          </a:xfrm>
+          <a:prstGeom xmlns:a="http://schemas.openxmlformats.org/drawingml/2006/main" prst="rect">
+            <a:avLst/>
+          </a:prstGeom>
+          <a:solidFill xmlns:a="http://schemas.openxmlformats.org/drawingml/2006/main">
+            <a:srgbClr val="8DAAC5"/>
+          </a:solidFill>
+          <a:ln xmlns:a="http://schemas.openxmlformats.org/drawingml/2006/main" w="0">
+            <a:noFill/>
+            <a:prstDash val="solid"/>
+          </a:ln>
+        </p:spPr>
+      </p:sp>
+      <p:sp>
+        <p:nvSpPr>
+          <p:cNvPr id="14" name="">
+            <a:extLst xmlns:a="http://schemas.openxmlformats.org/drawingml/2006/main">
+              <a:ext uri="{FF2B5EF4-FFF2-40B4-BE49-F238E27FC236}">
+                <a16:creationId xmlns:a16="http://schemas.microsoft.com/office/drawing/2014/main" id="{9CBD7B55-4743-4697-9C98-F67F47207B85}"/>
+              </a:ext>
+            </a:extLst>
+          </p:cNvPr>
+          <p:cNvSpPr>
+            <a:spLocks xmlns:a="http://schemas.openxmlformats.org/drawingml/2006/main" noGrp="1"/>
+          </p:cNvSpPr>
+          <p:nvPr/>
+        </p:nvSpPr>
+        <p:spPr>
+          <a:xfrm xmlns:a="http://schemas.openxmlformats.org/drawingml/2006/main">
+            <a:off x="7105650" y="1438275"/>
+            <a:ext cx="466725" cy="171450"/>
+          </a:xfrm>
+          <a:prstGeom xmlns:a="http://schemas.openxmlformats.org/drawingml/2006/main" prst="rect">
+            <a:avLst/>
+          </a:prstGeom>
+          <a:noFill xmlns:a="http://schemas.openxmlformats.org/drawingml/2006/main"/>
+          <a:ln xmlns:a="http://schemas.openxmlformats.org/drawingml/2006/main" w="0">
+            <a:noFill/>
+            <a:prstDash val="solid"/>
+          </a:ln>
+        </p:spPr>
+        <p:txBody>
+          <a:bodyPr xmlns:a="http://schemas.openxmlformats.org/drawingml/2006/main"/>
+          <a:lstStyle xmlns:a="http://schemas.openxmlformats.org/drawingml/2006/main"/>
+          <a:p xmlns:a="http://schemas.openxmlformats.org/drawingml/2006/main">
+            <a:pPr algn="l">
+              <a:defRPr sz="630" b="1">
+                <a:solidFill>
+                  <a:srgbClr val="FFFFFF"/>
+                </a:solidFill>
+              </a:defRPr>
+            </a:pPr>
+            <a:r>
+              <a:rPr sz="630" b="1">
+                <a:solidFill>
+                  <a:srgbClr val="FFFFFF"/>
+                </a:solidFill>
+              </a:rPr>
+              <a:t>Deal</a:t>
+            </a:r>
+          </a:p>
+        </p:txBody>
+      </p:sp>
+      <p:sp>
+        <p:nvSpPr>
+          <p:cNvPr id="15" name="">
+            <a:extLst xmlns:a="http://schemas.openxmlformats.org/drawingml/2006/main">
+              <a:ext uri="{FF2B5EF4-FFF2-40B4-BE49-F238E27FC236}">
+                <a16:creationId xmlns:a16="http://schemas.microsoft.com/office/drawing/2014/main" id="{97E7CFEB-A635-4CD7-9B78-3892569409AD}"/>
+              </a:ext>
+            </a:extLst>
+          </p:cNvPr>
+          <p:cNvSpPr>
+            <a:spLocks xmlns:a="http://schemas.openxmlformats.org/drawingml/2006/main" noGrp="1"/>
+          </p:cNvSpPr>
+          <p:nvPr/>
+        </p:nvSpPr>
+        <p:spPr>
+          <a:xfrm xmlns:a="http://schemas.openxmlformats.org/drawingml/2006/main">
+            <a:off x="7610475" y="1381125"/>
+            <a:ext cx="7144" cy="247650"/>
+          </a:xfrm>
+          <a:prstGeom xmlns:a="http://schemas.openxmlformats.org/drawingml/2006/main" prst="rect">
+            <a:avLst/>
+          </a:prstGeom>
+          <a:solidFill xmlns:a="http://schemas.openxmlformats.org/drawingml/2006/main">
+            <a:srgbClr val="8DAAC5"/>
+          </a:solidFill>
+          <a:ln xmlns:a="http://schemas.openxmlformats.org/drawingml/2006/main" w="0">
+            <a:noFill/>
+            <a:prstDash val="solid"/>
+          </a:ln>
+        </p:spPr>
+      </p:sp>
+      <p:sp>
+        <p:nvSpPr>
+          <p:cNvPr id="16" name="">
+            <a:extLst xmlns:a="http://schemas.openxmlformats.org/drawingml/2006/main">
+              <a:ext uri="{FF2B5EF4-FFF2-40B4-BE49-F238E27FC236}">
+                <a16:creationId xmlns:a16="http://schemas.microsoft.com/office/drawing/2014/main" id="{5AC387DD-94EB-4B46-B446-F1F714D1AD8D}"/>
+              </a:ext>
+            </a:extLst>
+          </p:cNvPr>
+          <p:cNvSpPr>
+            <a:spLocks xmlns:a="http://schemas.openxmlformats.org/drawingml/2006/main" noGrp="1"/>
+          </p:cNvSpPr>
+          <p:nvPr/>
+        </p:nvSpPr>
+        <p:spPr>
+          <a:xfrm xmlns:a="http://schemas.openxmlformats.org/drawingml/2006/main">
+            <a:off x="7658100" y="1438275"/>
+            <a:ext cx="466725" cy="171450"/>
+          </a:xfrm>
+          <a:prstGeom xmlns:a="http://schemas.openxmlformats.org/drawingml/2006/main" prst="rect">
+            <a:avLst/>
+          </a:prstGeom>
+          <a:noFill xmlns:a="http://schemas.openxmlformats.org/drawingml/2006/main"/>
+          <a:ln xmlns:a="http://schemas.openxmlformats.org/drawingml/2006/main" w="0">
+            <a:noFill/>
+            <a:prstDash val="solid"/>
+          </a:ln>
+        </p:spPr>
+        <p:txBody>
+          <a:bodyPr xmlns:a="http://schemas.openxmlformats.org/drawingml/2006/main"/>
+          <a:lstStyle xmlns:a="http://schemas.openxmlformats.org/drawingml/2006/main"/>
+          <a:p xmlns:a="http://schemas.openxmlformats.org/drawingml/2006/main">
+            <a:pPr algn="l">
+              <a:defRPr sz="630" b="1">
+                <a:solidFill>
+                  <a:srgbClr val="FFFFFF"/>
+                </a:solidFill>
+              </a:defRPr>
+            </a:pPr>
+            <a:r>
+              <a:rPr sz="630" b="1">
+                <a:solidFill>
+                  <a:srgbClr val="FFFFFF"/>
+                </a:solidFill>
+              </a:rPr>
+              <a:t>Anchor</a:t>
+            </a:r>
+          </a:p>
+        </p:txBody>
+      </p:sp>
+      <p:sp>
+        <p:nvSpPr>
+          <p:cNvPr id="17" name="">
+            <a:extLst xmlns:a="http://schemas.openxmlformats.org/drawingml/2006/main">
+              <a:ext uri="{FF2B5EF4-FFF2-40B4-BE49-F238E27FC236}">
+                <a16:creationId xmlns:a16="http://schemas.microsoft.com/office/drawing/2014/main" id="{6E5510DE-28BD-4FC8-834E-3D8E9D1BE498}"/>
+              </a:ext>
+            </a:extLst>
+          </p:cNvPr>
+          <p:cNvSpPr>
+            <a:spLocks xmlns:a="http://schemas.openxmlformats.org/drawingml/2006/main" noGrp="1"/>
+          </p:cNvSpPr>
+          <p:nvPr/>
+        </p:nvSpPr>
+        <p:spPr>
+          <a:xfrm xmlns:a="http://schemas.openxmlformats.org/drawingml/2006/main">
+            <a:off x="4714875" y="1628775"/>
+            <a:ext cx="3448050" cy="285750"/>
+          </a:xfrm>
+          <a:prstGeom xmlns:a="http://schemas.openxmlformats.org/drawingml/2006/main" prst="rect">
+            <a:avLst/>
+          </a:prstGeom>
+          <a:solidFill xmlns:a="http://schemas.openxmlformats.org/drawingml/2006/main">
+            <a:srgbClr val="FFFFFF"/>
+          </a:solidFill>
+          <a:ln xmlns:a="http://schemas.openxmlformats.org/drawingml/2006/main" w="7144">
+            <a:solidFill>
+              <a:srgbClr val="8DAAC5"/>
+            </a:solidFill>
+            <a:prstDash val="solid"/>
+          </a:ln>
+        </p:spPr>
+      </p:sp>
+      <p:sp>
+        <p:nvSpPr>
+          <p:cNvPr id="18" name="">
+            <a:extLst xmlns:a="http://schemas.openxmlformats.org/drawingml/2006/main">
+              <a:ext uri="{FF2B5EF4-FFF2-40B4-BE49-F238E27FC236}">
+                <a16:creationId xmlns:a16="http://schemas.microsoft.com/office/drawing/2014/main" id="{056F12DA-0CC1-4300-A66C-78222D64980F}"/>
+              </a:ext>
+            </a:extLst>
+          </p:cNvPr>
+          <p:cNvSpPr>
+            <a:spLocks xmlns:a="http://schemas.openxmlformats.org/drawingml/2006/main" noGrp="1"/>
+          </p:cNvSpPr>
+          <p:nvPr/>
+        </p:nvSpPr>
+        <p:spPr>
+          <a:xfrm xmlns:a="http://schemas.openxmlformats.org/drawingml/2006/main">
+            <a:off x="4762500" y="1695450"/>
+            <a:ext cx="828675" cy="209550"/>
+          </a:xfrm>
+          <a:prstGeom xmlns:a="http://schemas.openxmlformats.org/drawingml/2006/main" prst="rect">
+            <a:avLst/>
+          </a:prstGeom>
+          <a:noFill xmlns:a="http://schemas.openxmlformats.org/drawingml/2006/main"/>
+          <a:ln xmlns:a="http://schemas.openxmlformats.org/drawingml/2006/main" w="0">
+            <a:noFill/>
+            <a:prstDash val="solid"/>
+          </a:ln>
+        </p:spPr>
+        <p:txBody>
+          <a:bodyPr xmlns:a="http://schemas.openxmlformats.org/drawingml/2006/main"/>
+          <a:lstStyle xmlns:a="http://schemas.openxmlformats.org/drawingml/2006/main"/>
+          <a:p xmlns:a="http://schemas.openxmlformats.org/drawingml/2006/main">
+            <a:pPr algn="l">
+              <a:defRPr sz="623" b="0">
+                <a:solidFill>
+                  <a:srgbClr val="000000"/>
+                </a:solidFill>
+              </a:defRPr>
+            </a:pPr>
+            <a:r>
+              <a:rPr sz="623" b="0">
+                <a:solidFill>
+                  <a:srgbClr val="000000"/>
+                </a:solidFill>
+              </a:rPr>
+              <a:t>Behavior</a:t>
+            </a:r>
+          </a:p>
+        </p:txBody>
+      </p:sp>
+      <p:sp>
+        <p:nvSpPr>
+          <p:cNvPr id="19" name="">
+            <a:extLst xmlns:a="http://schemas.openxmlformats.org/drawingml/2006/main">
+              <a:ext uri="{FF2B5EF4-FFF2-40B4-BE49-F238E27FC236}">
+                <a16:creationId xmlns:a16="http://schemas.microsoft.com/office/drawing/2014/main" id="{3ECBEF7D-C9C9-4E67-A530-FBC6EC214513}"/>
+              </a:ext>
+            </a:extLst>
+          </p:cNvPr>
+          <p:cNvSpPr>
+            <a:spLocks xmlns:a="http://schemas.openxmlformats.org/drawingml/2006/main" noGrp="1"/>
+          </p:cNvSpPr>
+          <p:nvPr/>
+        </p:nvSpPr>
+        <p:spPr>
+          <a:xfrm xmlns:a="http://schemas.openxmlformats.org/drawingml/2006/main">
+            <a:off x="5629275" y="1628775"/>
+            <a:ext cx="7144" cy="285750"/>
+          </a:xfrm>
+          <a:prstGeom xmlns:a="http://schemas.openxmlformats.org/drawingml/2006/main" prst="rect">
+            <a:avLst/>
+          </a:prstGeom>
+          <a:solidFill xmlns:a="http://schemas.openxmlformats.org/drawingml/2006/main">
+            <a:srgbClr val="8DAAC5"/>
+          </a:solidFill>
+          <a:ln xmlns:a="http://schemas.openxmlformats.org/drawingml/2006/main" w="0">
+            <a:noFill/>
+            <a:prstDash val="solid"/>
+          </a:ln>
+        </p:spPr>
+      </p:sp>
+      <p:sp>
+        <p:nvSpPr>
+          <p:cNvPr id="20" name="">
+            <a:extLst xmlns:a="http://schemas.openxmlformats.org/drawingml/2006/main">
+              <a:ext uri="{FF2B5EF4-FFF2-40B4-BE49-F238E27FC236}">
+                <a16:creationId xmlns:a16="http://schemas.microsoft.com/office/drawing/2014/main" id="{7423FDEC-15D2-4E0A-86C5-B1D29C7BE33B}"/>
+              </a:ext>
+            </a:extLst>
+          </p:cNvPr>
+          <p:cNvSpPr>
+            <a:spLocks xmlns:a="http://schemas.openxmlformats.org/drawingml/2006/main" noGrp="1"/>
+          </p:cNvSpPr>
+          <p:nvPr/>
+        </p:nvSpPr>
+        <p:spPr>
+          <a:xfrm xmlns:a="http://schemas.openxmlformats.org/drawingml/2006/main">
+            <a:off x="5676900" y="1695450"/>
+            <a:ext cx="695325" cy="209550"/>
+          </a:xfrm>
+          <a:prstGeom xmlns:a="http://schemas.openxmlformats.org/drawingml/2006/main" prst="rect">
+            <a:avLst/>
+          </a:prstGeom>
+          <a:noFill xmlns:a="http://schemas.openxmlformats.org/drawingml/2006/main"/>
+          <a:ln xmlns:a="http://schemas.openxmlformats.org/drawingml/2006/main" w="0">
+            <a:noFill/>
+            <a:prstDash val="solid"/>
+          </a:ln>
+        </p:spPr>
+        <p:txBody>
+          <a:bodyPr xmlns:a="http://schemas.openxmlformats.org/drawingml/2006/main"/>
+          <a:lstStyle xmlns:a="http://schemas.openxmlformats.org/drawingml/2006/main"/>
+          <a:p xmlns:a="http://schemas.openxmlformats.org/drawingml/2006/main">
+            <a:pPr algn="l">
+              <a:defRPr sz="623" b="0">
+                <a:solidFill>
+                  <a:srgbClr val="000000"/>
+                </a:solidFill>
+              </a:defRPr>
+            </a:pPr>
+            <a:r>
+              <a:rPr sz="623" b="0">
+                <a:solidFill>
+                  <a:srgbClr val="000000"/>
+                </a:solidFill>
+              </a:rPr>
+              <a:t>observed</a:t>
+            </a:r>
+          </a:p>
+        </p:txBody>
+      </p:sp>
+      <p:sp>
+        <p:nvSpPr>
+          <p:cNvPr id="21" name="">
+            <a:extLst xmlns:a="http://schemas.openxmlformats.org/drawingml/2006/main">
+              <a:ext uri="{FF2B5EF4-FFF2-40B4-BE49-F238E27FC236}">
+                <a16:creationId xmlns:a16="http://schemas.microsoft.com/office/drawing/2014/main" id="{4351C18D-9B58-45AF-AD42-0D78AC81C66D}"/>
+              </a:ext>
+            </a:extLst>
+          </p:cNvPr>
+          <p:cNvSpPr>
+            <a:spLocks xmlns:a="http://schemas.openxmlformats.org/drawingml/2006/main" noGrp="1"/>
+          </p:cNvSpPr>
+          <p:nvPr/>
+        </p:nvSpPr>
+        <p:spPr>
+          <a:xfrm xmlns:a="http://schemas.openxmlformats.org/drawingml/2006/main">
+            <a:off x="6410325" y="1628775"/>
+            <a:ext cx="7144" cy="285750"/>
+          </a:xfrm>
+          <a:prstGeom xmlns:a="http://schemas.openxmlformats.org/drawingml/2006/main" prst="rect">
+            <a:avLst/>
+          </a:prstGeom>
+          <a:solidFill xmlns:a="http://schemas.openxmlformats.org/drawingml/2006/main">
+            <a:srgbClr val="8DAAC5"/>
+          </a:solidFill>
+          <a:ln xmlns:a="http://schemas.openxmlformats.org/drawingml/2006/main" w="0">
+            <a:noFill/>
+            <a:prstDash val="solid"/>
+          </a:ln>
+        </p:spPr>
+      </p:sp>
+      <p:sp>
+        <p:nvSpPr>
+          <p:cNvPr id="22" name="">
+            <a:extLst xmlns:a="http://schemas.openxmlformats.org/drawingml/2006/main">
+              <a:ext uri="{FF2B5EF4-FFF2-40B4-BE49-F238E27FC236}">
+                <a16:creationId xmlns:a16="http://schemas.microsoft.com/office/drawing/2014/main" id="{24B91667-7D5D-4005-B95D-CBC92979BB64}"/>
+              </a:ext>
+            </a:extLst>
+          </p:cNvPr>
+          <p:cNvSpPr>
+            <a:spLocks xmlns:a="http://schemas.openxmlformats.org/drawingml/2006/main" noGrp="1"/>
+          </p:cNvSpPr>
+          <p:nvPr/>
+        </p:nvSpPr>
+        <p:spPr>
+          <a:xfrm xmlns:a="http://schemas.openxmlformats.org/drawingml/2006/main">
+            <a:off x="6457950" y="1695450"/>
+            <a:ext cx="561975" cy="209550"/>
+          </a:xfrm>
+          <a:prstGeom xmlns:a="http://schemas.openxmlformats.org/drawingml/2006/main" prst="rect">
+            <a:avLst/>
+          </a:prstGeom>
+          <a:noFill xmlns:a="http://schemas.openxmlformats.org/drawingml/2006/main"/>
+          <a:ln xmlns:a="http://schemas.openxmlformats.org/drawingml/2006/main" w="0">
+            <a:noFill/>
+            <a:prstDash val="solid"/>
+          </a:ln>
+        </p:spPr>
+        <p:txBody>
+          <a:bodyPr xmlns:a="http://schemas.openxmlformats.org/drawingml/2006/main"/>
+          <a:lstStyle xmlns:a="http://schemas.openxmlformats.org/drawingml/2006/main"/>
+          <a:p xmlns:a="http://schemas.openxmlformats.org/drawingml/2006/main">
+            <a:pPr algn="l">
+              <a:defRPr sz="623" b="0">
+                <a:solidFill>
+                  <a:srgbClr val="000000"/>
+                </a:solidFill>
+              </a:defRPr>
+            </a:pPr>
+            <a:r>
+              <a:rPr sz="623" b="0">
+                <a:solidFill>
+                  <a:srgbClr val="000000"/>
+                </a:solidFill>
+              </a:rPr>
+              <a:t>0.050</a:t>
+            </a:r>
+          </a:p>
+        </p:txBody>
+      </p:sp>
+      <p:sp>
+        <p:nvSpPr>
+          <p:cNvPr id="23" name="">
+            <a:extLst xmlns:a="http://schemas.openxmlformats.org/drawingml/2006/main">
+              <a:ext uri="{FF2B5EF4-FFF2-40B4-BE49-F238E27FC236}">
+                <a16:creationId xmlns:a16="http://schemas.microsoft.com/office/drawing/2014/main" id="{3EBF059B-2642-4FB6-A351-2D48287A0DC7}"/>
+              </a:ext>
+            </a:extLst>
+          </p:cNvPr>
+          <p:cNvSpPr>
+            <a:spLocks xmlns:a="http://schemas.openxmlformats.org/drawingml/2006/main" noGrp="1"/>
+          </p:cNvSpPr>
+          <p:nvPr/>
+        </p:nvSpPr>
+        <p:spPr>
+          <a:xfrm xmlns:a="http://schemas.openxmlformats.org/drawingml/2006/main">
+            <a:off x="7058025" y="1628775"/>
+            <a:ext cx="7144" cy="285750"/>
+          </a:xfrm>
+          <a:prstGeom xmlns:a="http://schemas.openxmlformats.org/drawingml/2006/main" prst="rect">
+            <a:avLst/>
+          </a:prstGeom>
+          <a:solidFill xmlns:a="http://schemas.openxmlformats.org/drawingml/2006/main">
+            <a:srgbClr val="8DAAC5"/>
+          </a:solidFill>
+          <a:ln xmlns:a="http://schemas.openxmlformats.org/drawingml/2006/main" w="0">
+            <a:noFill/>
+            <a:prstDash val="solid"/>
+          </a:ln>
+        </p:spPr>
+      </p:sp>
+      <p:sp>
+        <p:nvSpPr>
+          <p:cNvPr id="24" name="">
+            <a:extLst xmlns:a="http://schemas.openxmlformats.org/drawingml/2006/main">
+              <a:ext uri="{FF2B5EF4-FFF2-40B4-BE49-F238E27FC236}">
+                <a16:creationId xmlns:a16="http://schemas.microsoft.com/office/drawing/2014/main" id="{56E9C1AD-C60D-42AE-8480-E82DA6281C11}"/>
+              </a:ext>
+            </a:extLst>
+          </p:cNvPr>
+          <p:cNvSpPr>
+            <a:spLocks xmlns:a="http://schemas.openxmlformats.org/drawingml/2006/main" noGrp="1"/>
+          </p:cNvSpPr>
+          <p:nvPr/>
+        </p:nvSpPr>
+        <p:spPr>
+          <a:xfrm xmlns:a="http://schemas.openxmlformats.org/drawingml/2006/main">
+            <a:off x="7105650" y="1695450"/>
+            <a:ext cx="466725" cy="209550"/>
+          </a:xfrm>
+          <a:prstGeom xmlns:a="http://schemas.openxmlformats.org/drawingml/2006/main" prst="rect">
+            <a:avLst/>
+          </a:prstGeom>
+          <a:noFill xmlns:a="http://schemas.openxmlformats.org/drawingml/2006/main"/>
+          <a:ln xmlns:a="http://schemas.openxmlformats.org/drawingml/2006/main" w="0">
+            <a:noFill/>
+            <a:prstDash val="solid"/>
+          </a:ln>
+        </p:spPr>
+        <p:txBody>
+          <a:bodyPr xmlns:a="http://schemas.openxmlformats.org/drawingml/2006/main"/>
+          <a:lstStyle xmlns:a="http://schemas.openxmlformats.org/drawingml/2006/main"/>
+          <a:p xmlns:a="http://schemas.openxmlformats.org/drawingml/2006/main">
+            <a:pPr algn="l">
+              <a:defRPr sz="623" b="0">
+                <a:solidFill>
+                  <a:srgbClr val="000000"/>
+                </a:solidFill>
+              </a:defRPr>
+            </a:pPr>
+            <a:r>
+              <a:rPr sz="623" b="0">
+                <a:solidFill>
+                  <a:srgbClr val="000000"/>
+                </a:solidFill>
+              </a:rPr>
+              <a:t>0.128</a:t>
+            </a:r>
+          </a:p>
+        </p:txBody>
+      </p:sp>
+      <p:sp>
+        <p:nvSpPr>
+          <p:cNvPr id="25" name="">
+            <a:extLst xmlns:a="http://schemas.openxmlformats.org/drawingml/2006/main">
+              <a:ext uri="{FF2B5EF4-FFF2-40B4-BE49-F238E27FC236}">
+                <a16:creationId xmlns:a16="http://schemas.microsoft.com/office/drawing/2014/main" id="{7B525269-ABBC-452D-8263-4BC85D08B6CB}"/>
+              </a:ext>
+            </a:extLst>
+          </p:cNvPr>
+          <p:cNvSpPr>
+            <a:spLocks xmlns:a="http://schemas.openxmlformats.org/drawingml/2006/main" noGrp="1"/>
+          </p:cNvSpPr>
+          <p:nvPr/>
+        </p:nvSpPr>
+        <p:spPr>
+          <a:xfrm xmlns:a="http://schemas.openxmlformats.org/drawingml/2006/main">
+            <a:off x="7610475" y="1628775"/>
+            <a:ext cx="7144" cy="285750"/>
+          </a:xfrm>
+          <a:prstGeom xmlns:a="http://schemas.openxmlformats.org/drawingml/2006/main" prst="rect">
+            <a:avLst/>
+          </a:prstGeom>
+          <a:solidFill xmlns:a="http://schemas.openxmlformats.org/drawingml/2006/main">
+            <a:srgbClr val="8DAAC5"/>
+          </a:solidFill>
+          <a:ln xmlns:a="http://schemas.openxmlformats.org/drawingml/2006/main" w="0">
+            <a:noFill/>
+            <a:prstDash val="solid"/>
+          </a:ln>
+        </p:spPr>
+      </p:sp>
+      <p:sp>
+        <p:nvSpPr>
+          <p:cNvPr id="26" name="">
+            <a:extLst xmlns:a="http://schemas.openxmlformats.org/drawingml/2006/main">
+              <a:ext uri="{FF2B5EF4-FFF2-40B4-BE49-F238E27FC236}">
+                <a16:creationId xmlns:a16="http://schemas.microsoft.com/office/drawing/2014/main" id="{7C51F76F-EF0C-4E77-BB88-2B3D1305A5A3}"/>
+              </a:ext>
+            </a:extLst>
+          </p:cNvPr>
+          <p:cNvSpPr>
+            <a:spLocks xmlns:a="http://schemas.openxmlformats.org/drawingml/2006/main" noGrp="1"/>
+          </p:cNvSpPr>
+          <p:nvPr/>
+        </p:nvSpPr>
+        <p:spPr>
+          <a:xfrm xmlns:a="http://schemas.openxmlformats.org/drawingml/2006/main">
+            <a:off x="7658100" y="1695450"/>
+            <a:ext cx="466725" cy="209550"/>
+          </a:xfrm>
+          <a:prstGeom xmlns:a="http://schemas.openxmlformats.org/drawingml/2006/main" prst="rect">
+            <a:avLst/>
+          </a:prstGeom>
+          <a:noFill xmlns:a="http://schemas.openxmlformats.org/drawingml/2006/main"/>
+          <a:ln xmlns:a="http://schemas.openxmlformats.org/drawingml/2006/main" w="0">
+            <a:noFill/>
+            <a:prstDash val="solid"/>
+          </a:ln>
+        </p:spPr>
+        <p:txBody>
+          <a:bodyPr xmlns:a="http://schemas.openxmlformats.org/drawingml/2006/main"/>
+          <a:lstStyle xmlns:a="http://schemas.openxmlformats.org/drawingml/2006/main"/>
+          <a:p xmlns:a="http://schemas.openxmlformats.org/drawingml/2006/main">
+            <a:pPr algn="l">
+              <a:defRPr sz="623" b="0">
+                <a:solidFill>
+                  <a:srgbClr val="000000"/>
+                </a:solidFill>
+              </a:defRPr>
+            </a:pPr>
+            <a:r>
+              <a:rPr sz="623" b="0">
+                <a:solidFill>
+                  <a:srgbClr val="000000"/>
+                </a:solidFill>
+              </a:rPr>
+              <a:t>0.665</a:t>
+            </a:r>
+          </a:p>
+        </p:txBody>
+      </p:sp>
+      <p:sp>
+        <p:nvSpPr>
+          <p:cNvPr id="27" name="">
+            <a:extLst xmlns:a="http://schemas.openxmlformats.org/drawingml/2006/main">
+              <a:ext uri="{FF2B5EF4-FFF2-40B4-BE49-F238E27FC236}">
+                <a16:creationId xmlns:a16="http://schemas.microsoft.com/office/drawing/2014/main" id="{21F16F46-645D-4DE9-8FCF-6EB0483A0B73}"/>
+              </a:ext>
+            </a:extLst>
+          </p:cNvPr>
+          <p:cNvSpPr>
+            <a:spLocks xmlns:a="http://schemas.openxmlformats.org/drawingml/2006/main" noGrp="1"/>
+          </p:cNvSpPr>
+          <p:nvPr/>
+        </p:nvSpPr>
+        <p:spPr>
+          <a:xfrm xmlns:a="http://schemas.openxmlformats.org/drawingml/2006/main">
+            <a:off x="4714875" y="1914525"/>
+            <a:ext cx="3448050" cy="285750"/>
+          </a:xfrm>
+          <a:prstGeom xmlns:a="http://schemas.openxmlformats.org/drawingml/2006/main" prst="rect">
+            <a:avLst/>
+          </a:prstGeom>
+          <a:solidFill xmlns:a="http://schemas.openxmlformats.org/drawingml/2006/main">
+            <a:srgbClr val="FFFFFF"/>
+          </a:solidFill>
+          <a:ln xmlns:a="http://schemas.openxmlformats.org/drawingml/2006/main" w="7144">
+            <a:solidFill>
+              <a:srgbClr val="8DAAC5"/>
+            </a:solidFill>
+            <a:prstDash val="solid"/>
+          </a:ln>
+        </p:spPr>
+      </p:sp>
+      <p:sp>
+        <p:nvSpPr>
+          <p:cNvPr id="28" name="">
+            <a:extLst xmlns:a="http://schemas.openxmlformats.org/drawingml/2006/main">
+              <a:ext uri="{FF2B5EF4-FFF2-40B4-BE49-F238E27FC236}">
+                <a16:creationId xmlns:a16="http://schemas.microsoft.com/office/drawing/2014/main" id="{6C21EA63-C215-4C4F-A25B-3A99905A1B03}"/>
+              </a:ext>
+            </a:extLst>
+          </p:cNvPr>
+          <p:cNvSpPr>
+            <a:spLocks xmlns:a="http://schemas.openxmlformats.org/drawingml/2006/main" noGrp="1"/>
+          </p:cNvSpPr>
+          <p:nvPr/>
+        </p:nvSpPr>
+        <p:spPr>
+          <a:xfrm xmlns:a="http://schemas.openxmlformats.org/drawingml/2006/main">
+            <a:off x="4762500" y="1981200"/>
+            <a:ext cx="828675" cy="209550"/>
+          </a:xfrm>
+          <a:prstGeom xmlns:a="http://schemas.openxmlformats.org/drawingml/2006/main" prst="rect">
+            <a:avLst/>
+          </a:prstGeom>
+          <a:noFill xmlns:a="http://schemas.openxmlformats.org/drawingml/2006/main"/>
+          <a:ln xmlns:a="http://schemas.openxmlformats.org/drawingml/2006/main" w="0">
+            <a:noFill/>
+            <a:prstDash val="solid"/>
+          </a:ln>
+        </p:spPr>
+        <p:txBody>
+          <a:bodyPr xmlns:a="http://schemas.openxmlformats.org/drawingml/2006/main"/>
+          <a:lstStyle xmlns:a="http://schemas.openxmlformats.org/drawingml/2006/main"/>
+          <a:p xmlns:a="http://schemas.openxmlformats.org/drawingml/2006/main">
+            <a:pPr algn="l">
+              <a:defRPr sz="623" b="0">
+                <a:solidFill>
+                  <a:srgbClr val="000000"/>
+                </a:solidFill>
+              </a:defRPr>
+            </a:pPr>
+            <a:r>
+              <a:rPr sz="623" b="0">
+                <a:solidFill>
+                  <a:srgbClr val="000000"/>
+                </a:solidFill>
+              </a:rPr>
+              <a:t>Fixed 0.70</a:t>
+            </a:r>
+          </a:p>
+        </p:txBody>
+      </p:sp>
+      <p:sp>
+        <p:nvSpPr>
+          <p:cNvPr id="29" name="">
+            <a:extLst xmlns:a="http://schemas.openxmlformats.org/drawingml/2006/main">
+              <a:ext uri="{FF2B5EF4-FFF2-40B4-BE49-F238E27FC236}">
+                <a16:creationId xmlns:a16="http://schemas.microsoft.com/office/drawing/2014/main" id="{62221C6C-1527-48BE-9B4F-1B99511E5031}"/>
+              </a:ext>
+            </a:extLst>
+          </p:cNvPr>
+          <p:cNvSpPr>
+            <a:spLocks xmlns:a="http://schemas.openxmlformats.org/drawingml/2006/main" noGrp="1"/>
+          </p:cNvSpPr>
+          <p:nvPr/>
+        </p:nvSpPr>
+        <p:spPr>
+          <a:xfrm xmlns:a="http://schemas.openxmlformats.org/drawingml/2006/main">
+            <a:off x="5629275" y="1914525"/>
+            <a:ext cx="7144" cy="285750"/>
+          </a:xfrm>
+          <a:prstGeom xmlns:a="http://schemas.openxmlformats.org/drawingml/2006/main" prst="rect">
+            <a:avLst/>
+          </a:prstGeom>
+          <a:solidFill xmlns:a="http://schemas.openxmlformats.org/drawingml/2006/main">
+            <a:srgbClr val="8DAAC5"/>
+          </a:solidFill>
+          <a:ln xmlns:a="http://schemas.openxmlformats.org/drawingml/2006/main" w="0">
+            <a:noFill/>
+            <a:prstDash val="solid"/>
+          </a:ln>
+        </p:spPr>
+      </p:sp>
+      <p:sp>
+        <p:nvSpPr>
+          <p:cNvPr id="30" name="">
+            <a:extLst xmlns:a="http://schemas.openxmlformats.org/drawingml/2006/main">
+              <a:ext uri="{FF2B5EF4-FFF2-40B4-BE49-F238E27FC236}">
+                <a16:creationId xmlns:a16="http://schemas.microsoft.com/office/drawing/2014/main" id="{78F38192-7FC5-40BC-941F-6055DA0395A0}"/>
+              </a:ext>
+            </a:extLst>
+          </p:cNvPr>
+          <p:cNvSpPr>
+            <a:spLocks xmlns:a="http://schemas.openxmlformats.org/drawingml/2006/main" noGrp="1"/>
+          </p:cNvSpPr>
+          <p:nvPr/>
+        </p:nvSpPr>
+        <p:spPr>
+          <a:xfrm xmlns:a="http://schemas.openxmlformats.org/drawingml/2006/main">
+            <a:off x="5676900" y="1981200"/>
+            <a:ext cx="695325" cy="209550"/>
+          </a:xfrm>
+          <a:prstGeom xmlns:a="http://schemas.openxmlformats.org/drawingml/2006/main" prst="rect">
+            <a:avLst/>
+          </a:prstGeom>
+          <a:noFill xmlns:a="http://schemas.openxmlformats.org/drawingml/2006/main"/>
+          <a:ln xmlns:a="http://schemas.openxmlformats.org/drawingml/2006/main" w="0">
+            <a:noFill/>
+            <a:prstDash val="solid"/>
+          </a:ln>
+        </p:spPr>
+        <p:txBody>
+          <a:bodyPr xmlns:a="http://schemas.openxmlformats.org/drawingml/2006/main"/>
+          <a:lstStyle xmlns:a="http://schemas.openxmlformats.org/drawingml/2006/main"/>
+          <a:p xmlns:a="http://schemas.openxmlformats.org/drawingml/2006/main">
+            <a:pPr algn="l">
+              <a:defRPr sz="623" b="0">
+                <a:solidFill>
+                  <a:srgbClr val="000000"/>
+                </a:solidFill>
+              </a:defRPr>
+            </a:pPr>
+            <a:r>
+              <a:rPr sz="623" b="0">
+                <a:solidFill>
+                  <a:srgbClr val="000000"/>
+                </a:solidFill>
+              </a:rPr>
+              <a:t>model</a:t>
+            </a:r>
+          </a:p>
+        </p:txBody>
+      </p:sp>
+      <p:sp>
+        <p:nvSpPr>
+          <p:cNvPr id="31" name="">
+            <a:extLst xmlns:a="http://schemas.openxmlformats.org/drawingml/2006/main">
+              <a:ext uri="{FF2B5EF4-FFF2-40B4-BE49-F238E27FC236}">
+                <a16:creationId xmlns:a16="http://schemas.microsoft.com/office/drawing/2014/main" id="{CE4BFC7C-12A3-4528-8974-8DF5FDD2279B}"/>
+              </a:ext>
+            </a:extLst>
+          </p:cNvPr>
+          <p:cNvSpPr>
+            <a:spLocks xmlns:a="http://schemas.openxmlformats.org/drawingml/2006/main" noGrp="1"/>
+          </p:cNvSpPr>
+          <p:nvPr/>
+        </p:nvSpPr>
+        <p:spPr>
+          <a:xfrm xmlns:a="http://schemas.openxmlformats.org/drawingml/2006/main">
+            <a:off x="6410325" y="1914525"/>
+            <a:ext cx="7144" cy="285750"/>
+          </a:xfrm>
+          <a:prstGeom xmlns:a="http://schemas.openxmlformats.org/drawingml/2006/main" prst="rect">
+            <a:avLst/>
+          </a:prstGeom>
+          <a:solidFill xmlns:a="http://schemas.openxmlformats.org/drawingml/2006/main">
+            <a:srgbClr val="8DAAC5"/>
+          </a:solidFill>
+          <a:ln xmlns:a="http://schemas.openxmlformats.org/drawingml/2006/main" w="0">
+            <a:noFill/>
+            <a:prstDash val="solid"/>
+          </a:ln>
+        </p:spPr>
+      </p:sp>
+      <p:sp>
+        <p:nvSpPr>
+          <p:cNvPr id="32" name="">
+            <a:extLst xmlns:a="http://schemas.openxmlformats.org/drawingml/2006/main">
+              <a:ext uri="{FF2B5EF4-FFF2-40B4-BE49-F238E27FC236}">
+                <a16:creationId xmlns:a16="http://schemas.microsoft.com/office/drawing/2014/main" id="{903A6DE0-5D8E-41E7-BA1E-D2EAB3C9010C}"/>
+              </a:ext>
+            </a:extLst>
+          </p:cNvPr>
+          <p:cNvSpPr>
+            <a:spLocks xmlns:a="http://schemas.openxmlformats.org/drawingml/2006/main" noGrp="1"/>
+          </p:cNvSpPr>
+          <p:nvPr/>
+        </p:nvSpPr>
+        <p:spPr>
+          <a:xfrm xmlns:a="http://schemas.openxmlformats.org/drawingml/2006/main">
+            <a:off x="6457950" y="1981200"/>
+            <a:ext cx="561975" cy="209550"/>
+          </a:xfrm>
+          <a:prstGeom xmlns:a="http://schemas.openxmlformats.org/drawingml/2006/main" prst="rect">
+            <a:avLst/>
+          </a:prstGeom>
+          <a:noFill xmlns:a="http://schemas.openxmlformats.org/drawingml/2006/main"/>
+          <a:ln xmlns:a="http://schemas.openxmlformats.org/drawingml/2006/main" w="0">
+            <a:noFill/>
+            <a:prstDash val="solid"/>
+          </a:ln>
+        </p:spPr>
+        <p:txBody>
+          <a:bodyPr xmlns:a="http://schemas.openxmlformats.org/drawingml/2006/main"/>
+          <a:lstStyle xmlns:a="http://schemas.openxmlformats.org/drawingml/2006/main"/>
+          <a:p xmlns:a="http://schemas.openxmlformats.org/drawingml/2006/main">
+            <a:pPr algn="l">
+              <a:defRPr sz="623" b="0">
+                <a:solidFill>
+                  <a:srgbClr val="000000"/>
+                </a:solidFill>
+              </a:defRPr>
+            </a:pPr>
+            <a:r>
+              <a:rPr sz="623" b="0">
+                <a:solidFill>
+                  <a:srgbClr val="000000"/>
+                </a:solidFill>
+              </a:rPr>
+              <a:t>0.027</a:t>
+            </a:r>
+          </a:p>
+        </p:txBody>
+      </p:sp>
+      <p:sp>
+        <p:nvSpPr>
+          <p:cNvPr id="33" name="">
+            <a:extLst xmlns:a="http://schemas.openxmlformats.org/drawingml/2006/main">
+              <a:ext uri="{FF2B5EF4-FFF2-40B4-BE49-F238E27FC236}">
+                <a16:creationId xmlns:a16="http://schemas.microsoft.com/office/drawing/2014/main" id="{EB66C79F-2FDA-4854-BBEA-D8B10FEC3DE5}"/>
+              </a:ext>
+            </a:extLst>
+          </p:cNvPr>
+          <p:cNvSpPr>
+            <a:spLocks xmlns:a="http://schemas.openxmlformats.org/drawingml/2006/main" noGrp="1"/>
+          </p:cNvSpPr>
+          <p:nvPr/>
+        </p:nvSpPr>
+        <p:spPr>
+          <a:xfrm xmlns:a="http://schemas.openxmlformats.org/drawingml/2006/main">
+            <a:off x="7058025" y="1914525"/>
+            <a:ext cx="7144" cy="285750"/>
+          </a:xfrm>
+          <a:prstGeom xmlns:a="http://schemas.openxmlformats.org/drawingml/2006/main" prst="rect">
+            <a:avLst/>
+          </a:prstGeom>
+          <a:solidFill xmlns:a="http://schemas.openxmlformats.org/drawingml/2006/main">
+            <a:srgbClr val="8DAAC5"/>
+          </a:solidFill>
+          <a:ln xmlns:a="http://schemas.openxmlformats.org/drawingml/2006/main" w="0">
+            <a:noFill/>
+            <a:prstDash val="solid"/>
+          </a:ln>
+        </p:spPr>
+      </p:sp>
+      <p:sp>
+        <p:nvSpPr>
+          <p:cNvPr id="34" name="">
+            <a:extLst xmlns:a="http://schemas.openxmlformats.org/drawingml/2006/main">
+              <a:ext uri="{FF2B5EF4-FFF2-40B4-BE49-F238E27FC236}">
+                <a16:creationId xmlns:a16="http://schemas.microsoft.com/office/drawing/2014/main" id="{A5A65C9E-0D43-481D-B470-56FC4A60CCEE}"/>
+              </a:ext>
+            </a:extLst>
+          </p:cNvPr>
+          <p:cNvSpPr>
+            <a:spLocks xmlns:a="http://schemas.openxmlformats.org/drawingml/2006/main" noGrp="1"/>
+          </p:cNvSpPr>
+          <p:nvPr/>
+        </p:nvSpPr>
+        <p:spPr>
+          <a:xfrm xmlns:a="http://schemas.openxmlformats.org/drawingml/2006/main">
+            <a:off x="7105650" y="1981200"/>
+            <a:ext cx="466725" cy="209550"/>
+          </a:xfrm>
+          <a:prstGeom xmlns:a="http://schemas.openxmlformats.org/drawingml/2006/main" prst="rect">
+            <a:avLst/>
+          </a:prstGeom>
+          <a:noFill xmlns:a="http://schemas.openxmlformats.org/drawingml/2006/main"/>
+          <a:ln xmlns:a="http://schemas.openxmlformats.org/drawingml/2006/main" w="0">
+            <a:noFill/>
+            <a:prstDash val="solid"/>
+          </a:ln>
+        </p:spPr>
+        <p:txBody>
+          <a:bodyPr xmlns:a="http://schemas.openxmlformats.org/drawingml/2006/main"/>
+          <a:lstStyle xmlns:a="http://schemas.openxmlformats.org/drawingml/2006/main"/>
+          <a:p xmlns:a="http://schemas.openxmlformats.org/drawingml/2006/main">
+            <a:pPr algn="l">
+              <a:defRPr sz="623" b="0">
+                <a:solidFill>
+                  <a:srgbClr val="000000"/>
+                </a:solidFill>
+              </a:defRPr>
+            </a:pPr>
+            <a:r>
+              <a:rPr sz="623" b="0">
+                <a:solidFill>
+                  <a:srgbClr val="000000"/>
+                </a:solidFill>
+              </a:rPr>
+              <a:t>0.089</a:t>
+            </a:r>
+          </a:p>
+        </p:txBody>
+      </p:sp>
+      <p:sp>
+        <p:nvSpPr>
+          <p:cNvPr id="35" name="">
+            <a:extLst xmlns:a="http://schemas.openxmlformats.org/drawingml/2006/main">
+              <a:ext uri="{FF2B5EF4-FFF2-40B4-BE49-F238E27FC236}">
+                <a16:creationId xmlns:a16="http://schemas.microsoft.com/office/drawing/2014/main" id="{977A7B95-5559-4404-84CF-626490FF19A2}"/>
+              </a:ext>
+            </a:extLst>
+          </p:cNvPr>
+          <p:cNvSpPr>
+            <a:spLocks xmlns:a="http://schemas.openxmlformats.org/drawingml/2006/main" noGrp="1"/>
+          </p:cNvSpPr>
+          <p:nvPr/>
+        </p:nvSpPr>
+        <p:spPr>
+          <a:xfrm xmlns:a="http://schemas.openxmlformats.org/drawingml/2006/main">
+            <a:off x="7610475" y="1914525"/>
+            <a:ext cx="7144" cy="285750"/>
+          </a:xfrm>
+          <a:prstGeom xmlns:a="http://schemas.openxmlformats.org/drawingml/2006/main" prst="rect">
+            <a:avLst/>
+          </a:prstGeom>
+          <a:solidFill xmlns:a="http://schemas.openxmlformats.org/drawingml/2006/main">
+            <a:srgbClr val="8DAAC5"/>
+          </a:solidFill>
+          <a:ln xmlns:a="http://schemas.openxmlformats.org/drawingml/2006/main" w="0">
+            <a:noFill/>
+            <a:prstDash val="solid"/>
+          </a:ln>
+        </p:spPr>
+      </p:sp>
+      <p:sp>
+        <p:nvSpPr>
+          <p:cNvPr id="36" name="">
+            <a:extLst xmlns:a="http://schemas.openxmlformats.org/drawingml/2006/main">
+              <a:ext uri="{FF2B5EF4-FFF2-40B4-BE49-F238E27FC236}">
+                <a16:creationId xmlns:a16="http://schemas.microsoft.com/office/drawing/2014/main" id="{A7016E70-72E1-4499-ADEC-8104EC9C5751}"/>
+              </a:ext>
+            </a:extLst>
+          </p:cNvPr>
+          <p:cNvSpPr>
+            <a:spLocks xmlns:a="http://schemas.openxmlformats.org/drawingml/2006/main" noGrp="1"/>
+          </p:cNvSpPr>
+          <p:nvPr/>
+        </p:nvSpPr>
+        <p:spPr>
+          <a:xfrm xmlns:a="http://schemas.openxmlformats.org/drawingml/2006/main">
+            <a:off x="7658100" y="1981200"/>
+            <a:ext cx="466725" cy="209550"/>
+          </a:xfrm>
+          <a:prstGeom xmlns:a="http://schemas.openxmlformats.org/drawingml/2006/main" prst="rect">
+            <a:avLst/>
+          </a:prstGeom>
+          <a:noFill xmlns:a="http://schemas.openxmlformats.org/drawingml/2006/main"/>
+          <a:ln xmlns:a="http://schemas.openxmlformats.org/drawingml/2006/main" w="0">
+            <a:noFill/>
+            <a:prstDash val="solid"/>
+          </a:ln>
+        </p:spPr>
+        <p:txBody>
+          <a:bodyPr xmlns:a="http://schemas.openxmlformats.org/drawingml/2006/main"/>
+          <a:lstStyle xmlns:a="http://schemas.openxmlformats.org/drawingml/2006/main"/>
+          <a:p xmlns:a="http://schemas.openxmlformats.org/drawingml/2006/main">
+            <a:pPr algn="l">
+              <a:defRPr sz="623" b="0">
+                <a:solidFill>
+                  <a:srgbClr val="000000"/>
+                </a:solidFill>
+              </a:defRPr>
+            </a:pPr>
+            <a:r>
+              <a:rPr sz="623" b="0">
+                <a:solidFill>
+                  <a:srgbClr val="000000"/>
+                </a:solidFill>
+              </a:rPr>
+              <a:t>0.700</a:t>
+            </a:r>
+          </a:p>
+        </p:txBody>
+      </p:sp>
+      <p:sp>
+        <p:nvSpPr>
+          <p:cNvPr id="37" name="">
+            <a:extLst xmlns:a="http://schemas.openxmlformats.org/drawingml/2006/main">
+              <a:ext uri="{FF2B5EF4-FFF2-40B4-BE49-F238E27FC236}">
+                <a16:creationId xmlns:a16="http://schemas.microsoft.com/office/drawing/2014/main" id="{448C4AB4-A9D1-4902-ACD0-EEA555F40F1B}"/>
+              </a:ext>
+            </a:extLst>
+          </p:cNvPr>
+          <p:cNvSpPr>
+            <a:spLocks xmlns:a="http://schemas.openxmlformats.org/drawingml/2006/main" noGrp="1"/>
+          </p:cNvSpPr>
+          <p:nvPr/>
+        </p:nvSpPr>
+        <p:spPr>
+          <a:xfrm xmlns:a="http://schemas.openxmlformats.org/drawingml/2006/main">
+            <a:off x="4714875" y="2200275"/>
+            <a:ext cx="3448050" cy="285750"/>
+          </a:xfrm>
+          <a:prstGeom xmlns:a="http://schemas.openxmlformats.org/drawingml/2006/main" prst="rect">
+            <a:avLst/>
+          </a:prstGeom>
+          <a:solidFill xmlns:a="http://schemas.openxmlformats.org/drawingml/2006/main">
+            <a:srgbClr val="FFFFFF"/>
+          </a:solidFill>
+          <a:ln xmlns:a="http://schemas.openxmlformats.org/drawingml/2006/main" w="7144">
+            <a:solidFill>
+              <a:srgbClr val="8DAAC5"/>
+            </a:solidFill>
+            <a:prstDash val="solid"/>
+          </a:ln>
+        </p:spPr>
+      </p:sp>
+      <p:sp>
+        <p:nvSpPr>
+          <p:cNvPr id="38" name="">
+            <a:extLst xmlns:a="http://schemas.openxmlformats.org/drawingml/2006/main">
+              <a:ext uri="{FF2B5EF4-FFF2-40B4-BE49-F238E27FC236}">
+                <a16:creationId xmlns:a16="http://schemas.microsoft.com/office/drawing/2014/main" id="{7CD8B38B-118E-42AB-BC53-CA4B7BDF339B}"/>
+              </a:ext>
+            </a:extLst>
+          </p:cNvPr>
+          <p:cNvSpPr>
+            <a:spLocks xmlns:a="http://schemas.openxmlformats.org/drawingml/2006/main" noGrp="1"/>
+          </p:cNvSpPr>
+          <p:nvPr/>
+        </p:nvSpPr>
+        <p:spPr>
+          <a:xfrm xmlns:a="http://schemas.openxmlformats.org/drawingml/2006/main">
+            <a:off x="4762500" y="2266950"/>
+            <a:ext cx="828675" cy="209550"/>
+          </a:xfrm>
+          <a:prstGeom xmlns:a="http://schemas.openxmlformats.org/drawingml/2006/main" prst="rect">
+            <a:avLst/>
+          </a:prstGeom>
+          <a:noFill xmlns:a="http://schemas.openxmlformats.org/drawingml/2006/main"/>
+          <a:ln xmlns:a="http://schemas.openxmlformats.org/drawingml/2006/main" w="0">
+            <a:noFill/>
+            <a:prstDash val="solid"/>
+          </a:ln>
+        </p:spPr>
+        <p:txBody>
+          <a:bodyPr xmlns:a="http://schemas.openxmlformats.org/drawingml/2006/main"/>
+          <a:lstStyle xmlns:a="http://schemas.openxmlformats.org/drawingml/2006/main"/>
+          <a:p xmlns:a="http://schemas.openxmlformats.org/drawingml/2006/main">
+            <a:pPr algn="l">
+              <a:defRPr sz="623" b="0">
+                <a:solidFill>
+                  <a:srgbClr val="000000"/>
+                </a:solidFill>
+              </a:defRPr>
+            </a:pPr>
+            <a:r>
+              <a:rPr sz="623" b="0">
+                <a:solidFill>
+                  <a:srgbClr val="000000"/>
+                </a:solidFill>
+              </a:rPr>
+              <a:t>CQL</a:t>
+            </a:r>
+          </a:p>
+        </p:txBody>
+      </p:sp>
+      <p:sp>
+        <p:nvSpPr>
+          <p:cNvPr id="39" name="">
+            <a:extLst xmlns:a="http://schemas.openxmlformats.org/drawingml/2006/main">
+              <a:ext uri="{FF2B5EF4-FFF2-40B4-BE49-F238E27FC236}">
+                <a16:creationId xmlns:a16="http://schemas.microsoft.com/office/drawing/2014/main" id="{4C47E899-0502-4A23-8963-87D33CD06088}"/>
+              </a:ext>
+            </a:extLst>
+          </p:cNvPr>
+          <p:cNvSpPr>
+            <a:spLocks xmlns:a="http://schemas.openxmlformats.org/drawingml/2006/main" noGrp="1"/>
+          </p:cNvSpPr>
+          <p:nvPr/>
+        </p:nvSpPr>
+        <p:spPr>
+          <a:xfrm xmlns:a="http://schemas.openxmlformats.org/drawingml/2006/main">
+            <a:off x="5629275" y="2200275"/>
+            <a:ext cx="7144" cy="285750"/>
+          </a:xfrm>
+          <a:prstGeom xmlns:a="http://schemas.openxmlformats.org/drawingml/2006/main" prst="rect">
+            <a:avLst/>
+          </a:prstGeom>
+          <a:solidFill xmlns:a="http://schemas.openxmlformats.org/drawingml/2006/main">
+            <a:srgbClr val="8DAAC5"/>
+          </a:solidFill>
+          <a:ln xmlns:a="http://schemas.openxmlformats.org/drawingml/2006/main" w="0">
+            <a:noFill/>
+            <a:prstDash val="solid"/>
+          </a:ln>
+        </p:spPr>
+      </p:sp>
+      <p:sp>
+        <p:nvSpPr>
+          <p:cNvPr id="40" name="">
+            <a:extLst xmlns:a="http://schemas.openxmlformats.org/drawingml/2006/main">
+              <a:ext uri="{FF2B5EF4-FFF2-40B4-BE49-F238E27FC236}">
+                <a16:creationId xmlns:a16="http://schemas.microsoft.com/office/drawing/2014/main" id="{42517558-BFFD-459F-B848-044FDE4C85E9}"/>
+              </a:ext>
+            </a:extLst>
+          </p:cNvPr>
+          <p:cNvSpPr>
+            <a:spLocks xmlns:a="http://schemas.openxmlformats.org/drawingml/2006/main" noGrp="1"/>
+          </p:cNvSpPr>
+          <p:nvPr/>
+        </p:nvSpPr>
+        <p:spPr>
+          <a:xfrm xmlns:a="http://schemas.openxmlformats.org/drawingml/2006/main">
+            <a:off x="5676900" y="2266950"/>
+            <a:ext cx="695325" cy="209550"/>
+          </a:xfrm>
+          <a:prstGeom xmlns:a="http://schemas.openxmlformats.org/drawingml/2006/main" prst="rect">
+            <a:avLst/>
+          </a:prstGeom>
+          <a:noFill xmlns:a="http://schemas.openxmlformats.org/drawingml/2006/main"/>
+          <a:ln xmlns:a="http://schemas.openxmlformats.org/drawingml/2006/main" w="0">
+            <a:noFill/>
+            <a:prstDash val="solid"/>
+          </a:ln>
+        </p:spPr>
+        <p:txBody>
+          <a:bodyPr xmlns:a="http://schemas.openxmlformats.org/drawingml/2006/main"/>
+          <a:lstStyle xmlns:a="http://schemas.openxmlformats.org/drawingml/2006/main"/>
+          <a:p xmlns:a="http://schemas.openxmlformats.org/drawingml/2006/main">
+            <a:pPr algn="l">
+              <a:defRPr sz="623" b="0">
+                <a:solidFill>
+                  <a:srgbClr val="000000"/>
+                </a:solidFill>
+              </a:defRPr>
+            </a:pPr>
+            <a:r>
+              <a:rPr sz="623" b="0">
+                <a:solidFill>
+                  <a:srgbClr val="000000"/>
+                </a:solidFill>
+              </a:rPr>
+              <a:t>model</a:t>
+            </a:r>
+          </a:p>
+        </p:txBody>
+      </p:sp>
+      <p:sp>
+        <p:nvSpPr>
+          <p:cNvPr id="41" name="">
+            <a:extLst xmlns:a="http://schemas.openxmlformats.org/drawingml/2006/main">
+              <a:ext uri="{FF2B5EF4-FFF2-40B4-BE49-F238E27FC236}">
+                <a16:creationId xmlns:a16="http://schemas.microsoft.com/office/drawing/2014/main" id="{924EC56B-CBB1-4776-A7CF-A6B9B0EF06C1}"/>
+              </a:ext>
+            </a:extLst>
+          </p:cNvPr>
+          <p:cNvSpPr>
+            <a:spLocks xmlns:a="http://schemas.openxmlformats.org/drawingml/2006/main" noGrp="1"/>
+          </p:cNvSpPr>
+          <p:nvPr/>
+        </p:nvSpPr>
+        <p:spPr>
+          <a:xfrm xmlns:a="http://schemas.openxmlformats.org/drawingml/2006/main">
+            <a:off x="6410325" y="2200275"/>
+            <a:ext cx="7144" cy="285750"/>
+          </a:xfrm>
+          <a:prstGeom xmlns:a="http://schemas.openxmlformats.org/drawingml/2006/main" prst="rect">
+            <a:avLst/>
+          </a:prstGeom>
+          <a:solidFill xmlns:a="http://schemas.openxmlformats.org/drawingml/2006/main">
+            <a:srgbClr val="8DAAC5"/>
+          </a:solidFill>
+          <a:ln xmlns:a="http://schemas.openxmlformats.org/drawingml/2006/main" w="0">
+            <a:noFill/>
+            <a:prstDash val="solid"/>
+          </a:ln>
+        </p:spPr>
+      </p:sp>
+      <p:sp>
+        <p:nvSpPr>
+          <p:cNvPr id="42" name="">
+            <a:extLst xmlns:a="http://schemas.openxmlformats.org/drawingml/2006/main">
+              <a:ext uri="{FF2B5EF4-FFF2-40B4-BE49-F238E27FC236}">
+                <a16:creationId xmlns:a16="http://schemas.microsoft.com/office/drawing/2014/main" id="{175B1108-22EF-4B3B-841A-EB92FBB3A453}"/>
+              </a:ext>
+            </a:extLst>
+          </p:cNvPr>
+          <p:cNvSpPr>
+            <a:spLocks xmlns:a="http://schemas.openxmlformats.org/drawingml/2006/main" noGrp="1"/>
+          </p:cNvSpPr>
+          <p:nvPr/>
+        </p:nvSpPr>
+        <p:spPr>
+          <a:xfrm xmlns:a="http://schemas.openxmlformats.org/drawingml/2006/main">
+            <a:off x="6457950" y="2266950"/>
+            <a:ext cx="561975" cy="209550"/>
+          </a:xfrm>
+          <a:prstGeom xmlns:a="http://schemas.openxmlformats.org/drawingml/2006/main" prst="rect">
+            <a:avLst/>
+          </a:prstGeom>
+          <a:noFill xmlns:a="http://schemas.openxmlformats.org/drawingml/2006/main"/>
+          <a:ln xmlns:a="http://schemas.openxmlformats.org/drawingml/2006/main" w="0">
+            <a:noFill/>
+            <a:prstDash val="solid"/>
+          </a:ln>
+        </p:spPr>
+        <p:txBody>
+          <a:bodyPr xmlns:a="http://schemas.openxmlformats.org/drawingml/2006/main"/>
+          <a:lstStyle xmlns:a="http://schemas.openxmlformats.org/drawingml/2006/main"/>
+          <a:p xmlns:a="http://schemas.openxmlformats.org/drawingml/2006/main">
+            <a:pPr algn="l">
+              <a:defRPr sz="623" b="0">
+                <a:solidFill>
+                  <a:srgbClr val="000000"/>
+                </a:solidFill>
+              </a:defRPr>
+            </a:pPr>
+            <a:r>
+              <a:rPr sz="623" b="0">
+                <a:solidFill>
+                  <a:srgbClr val="000000"/>
+                </a:solidFill>
+              </a:rPr>
+              <a:t>0.020</a:t>
+            </a:r>
+          </a:p>
+        </p:txBody>
+      </p:sp>
+      <p:sp>
+        <p:nvSpPr>
+          <p:cNvPr id="43" name="">
+            <a:extLst xmlns:a="http://schemas.openxmlformats.org/drawingml/2006/main">
+              <a:ext uri="{FF2B5EF4-FFF2-40B4-BE49-F238E27FC236}">
+                <a16:creationId xmlns:a16="http://schemas.microsoft.com/office/drawing/2014/main" id="{AC2DA7DE-827A-4FC6-9A39-E643CD49E28E}"/>
+              </a:ext>
+            </a:extLst>
+          </p:cNvPr>
+          <p:cNvSpPr>
+            <a:spLocks xmlns:a="http://schemas.openxmlformats.org/drawingml/2006/main" noGrp="1"/>
+          </p:cNvSpPr>
+          <p:nvPr/>
+        </p:nvSpPr>
+        <p:spPr>
+          <a:xfrm xmlns:a="http://schemas.openxmlformats.org/drawingml/2006/main">
+            <a:off x="7058025" y="2200275"/>
+            <a:ext cx="7144" cy="285750"/>
+          </a:xfrm>
+          <a:prstGeom xmlns:a="http://schemas.openxmlformats.org/drawingml/2006/main" prst="rect">
+            <a:avLst/>
+          </a:prstGeom>
+          <a:solidFill xmlns:a="http://schemas.openxmlformats.org/drawingml/2006/main">
+            <a:srgbClr val="8DAAC5"/>
+          </a:solidFill>
+          <a:ln xmlns:a="http://schemas.openxmlformats.org/drawingml/2006/main" w="0">
+            <a:noFill/>
+            <a:prstDash val="solid"/>
+          </a:ln>
+        </p:spPr>
+      </p:sp>
+      <p:sp>
+        <p:nvSpPr>
+          <p:cNvPr id="44" name="">
+            <a:extLst xmlns:a="http://schemas.openxmlformats.org/drawingml/2006/main">
+              <a:ext uri="{FF2B5EF4-FFF2-40B4-BE49-F238E27FC236}">
+                <a16:creationId xmlns:a16="http://schemas.microsoft.com/office/drawing/2014/main" id="{B1997EC2-89ED-4EED-A22B-A1B4A3A25EA7}"/>
+              </a:ext>
+            </a:extLst>
+          </p:cNvPr>
+          <p:cNvSpPr>
+            <a:spLocks xmlns:a="http://schemas.openxmlformats.org/drawingml/2006/main" noGrp="1"/>
+          </p:cNvSpPr>
+          <p:nvPr/>
+        </p:nvSpPr>
+        <p:spPr>
+          <a:xfrm xmlns:a="http://schemas.openxmlformats.org/drawingml/2006/main">
+            <a:off x="7105650" y="2266950"/>
+            <a:ext cx="466725" cy="209550"/>
+          </a:xfrm>
+          <a:prstGeom xmlns:a="http://schemas.openxmlformats.org/drawingml/2006/main" prst="rect">
+            <a:avLst/>
+          </a:prstGeom>
+          <a:noFill xmlns:a="http://schemas.openxmlformats.org/drawingml/2006/main"/>
+          <a:ln xmlns:a="http://schemas.openxmlformats.org/drawingml/2006/main" w="0">
+            <a:noFill/>
+            <a:prstDash val="solid"/>
+          </a:ln>
+        </p:spPr>
+        <p:txBody>
+          <a:bodyPr xmlns:a="http://schemas.openxmlformats.org/drawingml/2006/main"/>
+          <a:lstStyle xmlns:a="http://schemas.openxmlformats.org/drawingml/2006/main"/>
+          <a:p xmlns:a="http://schemas.openxmlformats.org/drawingml/2006/main">
+            <a:pPr algn="l">
+              <a:defRPr sz="623" b="0">
+                <a:solidFill>
+                  <a:srgbClr val="000000"/>
+                </a:solidFill>
+              </a:defRPr>
+            </a:pPr>
+            <a:r>
+              <a:rPr sz="623" b="0">
+                <a:solidFill>
+                  <a:srgbClr val="000000"/>
+                </a:solidFill>
+              </a:rPr>
+              <a:t>0.087</a:t>
+            </a:r>
+          </a:p>
+        </p:txBody>
+      </p:sp>
+      <p:sp>
+        <p:nvSpPr>
+          <p:cNvPr id="45" name="">
+            <a:extLst xmlns:a="http://schemas.openxmlformats.org/drawingml/2006/main">
+              <a:ext uri="{FF2B5EF4-FFF2-40B4-BE49-F238E27FC236}">
+                <a16:creationId xmlns:a16="http://schemas.microsoft.com/office/drawing/2014/main" id="{C8453BC2-8BC3-4202-91B8-9A6D50FA8EB8}"/>
+              </a:ext>
+            </a:extLst>
+          </p:cNvPr>
+          <p:cNvSpPr>
+            <a:spLocks xmlns:a="http://schemas.openxmlformats.org/drawingml/2006/main" noGrp="1"/>
+          </p:cNvSpPr>
+          <p:nvPr/>
+        </p:nvSpPr>
+        <p:spPr>
+          <a:xfrm xmlns:a="http://schemas.openxmlformats.org/drawingml/2006/main">
+            <a:off x="7610475" y="2200275"/>
+            <a:ext cx="7144" cy="285750"/>
+          </a:xfrm>
+          <a:prstGeom xmlns:a="http://schemas.openxmlformats.org/drawingml/2006/main" prst="rect">
+            <a:avLst/>
+          </a:prstGeom>
+          <a:solidFill xmlns:a="http://schemas.openxmlformats.org/drawingml/2006/main">
+            <a:srgbClr val="8DAAC5"/>
+          </a:solidFill>
+          <a:ln xmlns:a="http://schemas.openxmlformats.org/drawingml/2006/main" w="0">
+            <a:noFill/>
+            <a:prstDash val="solid"/>
+          </a:ln>
+        </p:spPr>
+      </p:sp>
+      <p:sp>
+        <p:nvSpPr>
+          <p:cNvPr id="46" name="">
+            <a:extLst xmlns:a="http://schemas.openxmlformats.org/drawingml/2006/main">
+              <a:ext uri="{FF2B5EF4-FFF2-40B4-BE49-F238E27FC236}">
+                <a16:creationId xmlns:a16="http://schemas.microsoft.com/office/drawing/2014/main" id="{31863D93-DD3E-416A-B033-3C3BC417CC3A}"/>
+              </a:ext>
+            </a:extLst>
+          </p:cNvPr>
+          <p:cNvSpPr>
+            <a:spLocks xmlns:a="http://schemas.openxmlformats.org/drawingml/2006/main" noGrp="1"/>
+          </p:cNvSpPr>
+          <p:nvPr/>
+        </p:nvSpPr>
+        <p:spPr>
+          <a:xfrm xmlns:a="http://schemas.openxmlformats.org/drawingml/2006/main">
+            <a:off x="7658100" y="2266950"/>
+            <a:ext cx="466725" cy="209550"/>
+          </a:xfrm>
+          <a:prstGeom xmlns:a="http://schemas.openxmlformats.org/drawingml/2006/main" prst="rect">
+            <a:avLst/>
+          </a:prstGeom>
+          <a:noFill xmlns:a="http://schemas.openxmlformats.org/drawingml/2006/main"/>
+          <a:ln xmlns:a="http://schemas.openxmlformats.org/drawingml/2006/main" w="0">
+            <a:noFill/>
+            <a:prstDash val="solid"/>
+          </a:ln>
+        </p:spPr>
+        <p:txBody>
+          <a:bodyPr xmlns:a="http://schemas.openxmlformats.org/drawingml/2006/main"/>
+          <a:lstStyle xmlns:a="http://schemas.openxmlformats.org/drawingml/2006/main"/>
+          <a:p xmlns:a="http://schemas.openxmlformats.org/drawingml/2006/main">
+            <a:pPr algn="l">
+              <a:defRPr sz="623" b="0">
+                <a:solidFill>
+                  <a:srgbClr val="000000"/>
+                </a:solidFill>
+              </a:defRPr>
+            </a:pPr>
+            <a:r>
+              <a:rPr sz="623" b="0">
+                <a:solidFill>
+                  <a:srgbClr val="000000"/>
+                </a:solidFill>
+              </a:rPr>
+              <a:t>0.769</a:t>
+            </a:r>
+          </a:p>
+        </p:txBody>
+      </p:sp>
+      <p:sp>
+        <p:nvSpPr>
+          <p:cNvPr id="47" name="">
+            <a:extLst xmlns:a="http://schemas.openxmlformats.org/drawingml/2006/main">
+              <a:ext uri="{FF2B5EF4-FFF2-40B4-BE49-F238E27FC236}">
+                <a16:creationId xmlns:a16="http://schemas.microsoft.com/office/drawing/2014/main" id="{E65C49CB-B636-4BE0-A6B2-BEFE75D55B31}"/>
+              </a:ext>
+            </a:extLst>
+          </p:cNvPr>
+          <p:cNvSpPr>
+            <a:spLocks xmlns:a="http://schemas.openxmlformats.org/drawingml/2006/main" noGrp="1"/>
+          </p:cNvSpPr>
+          <p:nvPr/>
+        </p:nvSpPr>
+        <p:spPr>
+          <a:xfrm xmlns:a="http://schemas.openxmlformats.org/drawingml/2006/main">
+            <a:off x="4714875" y="2486025"/>
+            <a:ext cx="3448050" cy="285750"/>
+          </a:xfrm>
+          <a:prstGeom xmlns:a="http://schemas.openxmlformats.org/drawingml/2006/main" prst="rect">
+            <a:avLst/>
+          </a:prstGeom>
+          <a:solidFill xmlns:a="http://schemas.openxmlformats.org/drawingml/2006/main">
+            <a:srgbClr val="FFFFFF"/>
+          </a:solidFill>
+          <a:ln xmlns:a="http://schemas.openxmlformats.org/drawingml/2006/main" w="7144">
+            <a:solidFill>
+              <a:srgbClr val="8DAAC5"/>
+            </a:solidFill>
+            <a:prstDash val="solid"/>
+          </a:ln>
+        </p:spPr>
+      </p:sp>
+      <p:sp>
+        <p:nvSpPr>
+          <p:cNvPr id="48" name="">
+            <a:extLst xmlns:a="http://schemas.openxmlformats.org/drawingml/2006/main">
+              <a:ext uri="{FF2B5EF4-FFF2-40B4-BE49-F238E27FC236}">
+                <a16:creationId xmlns:a16="http://schemas.microsoft.com/office/drawing/2014/main" id="{9E455B7B-DBD7-4DE0-8FC4-D8B48C537FF0}"/>
+              </a:ext>
+            </a:extLst>
+          </p:cNvPr>
+          <p:cNvSpPr>
+            <a:spLocks xmlns:a="http://schemas.openxmlformats.org/drawingml/2006/main" noGrp="1"/>
+          </p:cNvSpPr>
+          <p:nvPr/>
+        </p:nvSpPr>
+        <p:spPr>
+          <a:xfrm xmlns:a="http://schemas.openxmlformats.org/drawingml/2006/main">
+            <a:off x="4762500" y="2552700"/>
+            <a:ext cx="828675" cy="209550"/>
+          </a:xfrm>
+          <a:prstGeom xmlns:a="http://schemas.openxmlformats.org/drawingml/2006/main" prst="rect">
+            <a:avLst/>
+          </a:prstGeom>
+          <a:noFill xmlns:a="http://schemas.openxmlformats.org/drawingml/2006/main"/>
+          <a:ln xmlns:a="http://schemas.openxmlformats.org/drawingml/2006/main" w="0">
+            <a:noFill/>
+            <a:prstDash val="solid"/>
+          </a:ln>
+        </p:spPr>
+        <p:txBody>
+          <a:bodyPr xmlns:a="http://schemas.openxmlformats.org/drawingml/2006/main"/>
+          <a:lstStyle xmlns:a="http://schemas.openxmlformats.org/drawingml/2006/main"/>
+          <a:p xmlns:a="http://schemas.openxmlformats.org/drawingml/2006/main">
+            <a:pPr algn="l">
+              <a:defRPr sz="623" b="0">
+                <a:solidFill>
+                  <a:srgbClr val="000000"/>
+                </a:solidFill>
+              </a:defRPr>
+            </a:pPr>
+            <a:r>
+              <a:rPr sz="623" b="0">
+                <a:solidFill>
+                  <a:srgbClr val="000000"/>
+                </a:solidFill>
+              </a:rPr>
+              <a:t>PPO</a:t>
+            </a:r>
+          </a:p>
+        </p:txBody>
+      </p:sp>
+      <p:sp>
+        <p:nvSpPr>
+          <p:cNvPr id="49" name="">
+            <a:extLst xmlns:a="http://schemas.openxmlformats.org/drawingml/2006/main">
+              <a:ext uri="{FF2B5EF4-FFF2-40B4-BE49-F238E27FC236}">
+                <a16:creationId xmlns:a16="http://schemas.microsoft.com/office/drawing/2014/main" id="{F6AD26FE-ED8B-43CD-8E28-0E9214C12EC9}"/>
+              </a:ext>
+            </a:extLst>
+          </p:cNvPr>
+          <p:cNvSpPr>
+            <a:spLocks xmlns:a="http://schemas.openxmlformats.org/drawingml/2006/main" noGrp="1"/>
+          </p:cNvSpPr>
+          <p:nvPr/>
+        </p:nvSpPr>
+        <p:spPr>
+          <a:xfrm xmlns:a="http://schemas.openxmlformats.org/drawingml/2006/main">
+            <a:off x="5629275" y="2486025"/>
+            <a:ext cx="7144" cy="285750"/>
+          </a:xfrm>
+          <a:prstGeom xmlns:a="http://schemas.openxmlformats.org/drawingml/2006/main" prst="rect">
+            <a:avLst/>
+          </a:prstGeom>
+          <a:solidFill xmlns:a="http://schemas.openxmlformats.org/drawingml/2006/main">
+            <a:srgbClr val="8DAAC5"/>
+          </a:solidFill>
+          <a:ln xmlns:a="http://schemas.openxmlformats.org/drawingml/2006/main" w="0">
+            <a:noFill/>
+            <a:prstDash val="solid"/>
+          </a:ln>
+        </p:spPr>
+      </p:sp>
+      <p:sp>
+        <p:nvSpPr>
+          <p:cNvPr id="50" name="">
+            <a:extLst xmlns:a="http://schemas.openxmlformats.org/drawingml/2006/main">
+              <a:ext uri="{FF2B5EF4-FFF2-40B4-BE49-F238E27FC236}">
+                <a16:creationId xmlns:a16="http://schemas.microsoft.com/office/drawing/2014/main" id="{EAE2AF19-1457-48A8-AF7A-C13E4BE5ACC3}"/>
+              </a:ext>
+            </a:extLst>
+          </p:cNvPr>
+          <p:cNvSpPr>
+            <a:spLocks xmlns:a="http://schemas.openxmlformats.org/drawingml/2006/main" noGrp="1"/>
+          </p:cNvSpPr>
+          <p:nvPr/>
+        </p:nvSpPr>
+        <p:spPr>
+          <a:xfrm xmlns:a="http://schemas.openxmlformats.org/drawingml/2006/main">
+            <a:off x="5676900" y="2552700"/>
+            <a:ext cx="695325" cy="209550"/>
+          </a:xfrm>
+          <a:prstGeom xmlns:a="http://schemas.openxmlformats.org/drawingml/2006/main" prst="rect">
+            <a:avLst/>
+          </a:prstGeom>
+          <a:noFill xmlns:a="http://schemas.openxmlformats.org/drawingml/2006/main"/>
+          <a:ln xmlns:a="http://schemas.openxmlformats.org/drawingml/2006/main" w="0">
+            <a:noFill/>
+            <a:prstDash val="solid"/>
+          </a:ln>
+        </p:spPr>
+        <p:txBody>
+          <a:bodyPr xmlns:a="http://schemas.openxmlformats.org/drawingml/2006/main"/>
+          <a:lstStyle xmlns:a="http://schemas.openxmlformats.org/drawingml/2006/main"/>
+          <a:p xmlns:a="http://schemas.openxmlformats.org/drawingml/2006/main">
+            <a:pPr algn="l">
+              <a:defRPr sz="623" b="0">
+                <a:solidFill>
+                  <a:srgbClr val="000000"/>
+                </a:solidFill>
+              </a:defRPr>
+            </a:pPr>
+            <a:r>
+              <a:rPr sz="623" b="0">
+                <a:solidFill>
+                  <a:srgbClr val="000000"/>
+                </a:solidFill>
+              </a:rPr>
+              <a:t>simulator</a:t>
+            </a:r>
+          </a:p>
+        </p:txBody>
+      </p:sp>
+      <p:sp>
+        <p:nvSpPr>
+          <p:cNvPr id="51" name="">
+            <a:extLst xmlns:a="http://schemas.openxmlformats.org/drawingml/2006/main">
+              <a:ext uri="{FF2B5EF4-FFF2-40B4-BE49-F238E27FC236}">
+                <a16:creationId xmlns:a16="http://schemas.microsoft.com/office/drawing/2014/main" id="{99090613-1A0A-4C9D-BF30-91D586451C15}"/>
+              </a:ext>
+            </a:extLst>
+          </p:cNvPr>
+          <p:cNvSpPr>
+            <a:spLocks xmlns:a="http://schemas.openxmlformats.org/drawingml/2006/main" noGrp="1"/>
+          </p:cNvSpPr>
+          <p:nvPr/>
+        </p:nvSpPr>
+        <p:spPr>
+          <a:xfrm xmlns:a="http://schemas.openxmlformats.org/drawingml/2006/main">
+            <a:off x="6410325" y="2486025"/>
+            <a:ext cx="7144" cy="285750"/>
+          </a:xfrm>
+          <a:prstGeom xmlns:a="http://schemas.openxmlformats.org/drawingml/2006/main" prst="rect">
+            <a:avLst/>
+          </a:prstGeom>
+          <a:solidFill xmlns:a="http://schemas.openxmlformats.org/drawingml/2006/main">
+            <a:srgbClr val="8DAAC5"/>
+          </a:solidFill>
+          <a:ln xmlns:a="http://schemas.openxmlformats.org/drawingml/2006/main" w="0">
+            <a:noFill/>
+            <a:prstDash val="solid"/>
+          </a:ln>
+        </p:spPr>
+      </p:sp>
+      <p:sp>
+        <p:nvSpPr>
+          <p:cNvPr id="52" name="">
+            <a:extLst xmlns:a="http://schemas.openxmlformats.org/drawingml/2006/main">
+              <a:ext uri="{FF2B5EF4-FFF2-40B4-BE49-F238E27FC236}">
+                <a16:creationId xmlns:a16="http://schemas.microsoft.com/office/drawing/2014/main" id="{BA3C22E0-3E15-422F-ACA6-46C9225DA33C}"/>
+              </a:ext>
+            </a:extLst>
+          </p:cNvPr>
+          <p:cNvSpPr>
+            <a:spLocks xmlns:a="http://schemas.openxmlformats.org/drawingml/2006/main" noGrp="1"/>
+          </p:cNvSpPr>
+          <p:nvPr/>
+        </p:nvSpPr>
+        <p:spPr>
+          <a:xfrm xmlns:a="http://schemas.openxmlformats.org/drawingml/2006/main">
+            <a:off x="6457950" y="2552700"/>
+            <a:ext cx="561975" cy="209550"/>
+          </a:xfrm>
+          <a:prstGeom xmlns:a="http://schemas.openxmlformats.org/drawingml/2006/main" prst="rect">
+            <a:avLst/>
+          </a:prstGeom>
+          <a:noFill xmlns:a="http://schemas.openxmlformats.org/drawingml/2006/main"/>
+          <a:ln xmlns:a="http://schemas.openxmlformats.org/drawingml/2006/main" w="0">
+            <a:noFill/>
+            <a:prstDash val="solid"/>
+          </a:ln>
+        </p:spPr>
+        <p:txBody>
+          <a:bodyPr xmlns:a="http://schemas.openxmlformats.org/drawingml/2006/main"/>
+          <a:lstStyle xmlns:a="http://schemas.openxmlformats.org/drawingml/2006/main"/>
+          <a:p xmlns:a="http://schemas.openxmlformats.org/drawingml/2006/main">
+            <a:pPr algn="l">
+              <a:defRPr sz="623" b="0">
+                <a:solidFill>
+                  <a:srgbClr val="000000"/>
+                </a:solidFill>
+              </a:defRPr>
+            </a:pPr>
+            <a:r>
+              <a:rPr sz="623" b="0">
+                <a:solidFill>
+                  <a:srgbClr val="000000"/>
+                </a:solidFill>
+              </a:rPr>
+              <a:t>0.184</a:t>
+            </a:r>
+          </a:p>
+        </p:txBody>
+      </p:sp>
+      <p:sp>
+        <p:nvSpPr>
+          <p:cNvPr id="53" name="">
+            <a:extLst xmlns:a="http://schemas.openxmlformats.org/drawingml/2006/main">
+              <a:ext uri="{FF2B5EF4-FFF2-40B4-BE49-F238E27FC236}">
+                <a16:creationId xmlns:a16="http://schemas.microsoft.com/office/drawing/2014/main" id="{0828A6CB-35E8-44F7-8843-7D0476DC8801}"/>
+              </a:ext>
+            </a:extLst>
+          </p:cNvPr>
+          <p:cNvSpPr>
+            <a:spLocks xmlns:a="http://schemas.openxmlformats.org/drawingml/2006/main" noGrp="1"/>
+          </p:cNvSpPr>
+          <p:nvPr/>
+        </p:nvSpPr>
+        <p:spPr>
+          <a:xfrm xmlns:a="http://schemas.openxmlformats.org/drawingml/2006/main">
+            <a:off x="7058025" y="2486025"/>
+            <a:ext cx="7144" cy="285750"/>
+          </a:xfrm>
+          <a:prstGeom xmlns:a="http://schemas.openxmlformats.org/drawingml/2006/main" prst="rect">
+            <a:avLst/>
+          </a:prstGeom>
+          <a:solidFill xmlns:a="http://schemas.openxmlformats.org/drawingml/2006/main">
+            <a:srgbClr val="8DAAC5"/>
+          </a:solidFill>
+          <a:ln xmlns:a="http://schemas.openxmlformats.org/drawingml/2006/main" w="0">
+            <a:noFill/>
+            <a:prstDash val="solid"/>
+          </a:ln>
+        </p:spPr>
+      </p:sp>
+      <p:sp>
+        <p:nvSpPr>
+          <p:cNvPr id="54" name="">
+            <a:extLst xmlns:a="http://schemas.openxmlformats.org/drawingml/2006/main">
+              <a:ext uri="{FF2B5EF4-FFF2-40B4-BE49-F238E27FC236}">
+                <a16:creationId xmlns:a16="http://schemas.microsoft.com/office/drawing/2014/main" id="{144B4832-FD1E-4A5C-86B5-88F5BBB87A42}"/>
+              </a:ext>
+            </a:extLst>
+          </p:cNvPr>
+          <p:cNvSpPr>
+            <a:spLocks xmlns:a="http://schemas.openxmlformats.org/drawingml/2006/main" noGrp="1"/>
+          </p:cNvSpPr>
+          <p:nvPr/>
+        </p:nvSpPr>
+        <p:spPr>
+          <a:xfrm xmlns:a="http://schemas.openxmlformats.org/drawingml/2006/main">
+            <a:off x="7105650" y="2552700"/>
+            <a:ext cx="466725" cy="209550"/>
+          </a:xfrm>
+          <a:prstGeom xmlns:a="http://schemas.openxmlformats.org/drawingml/2006/main" prst="rect">
+            <a:avLst/>
+          </a:prstGeom>
+          <a:noFill xmlns:a="http://schemas.openxmlformats.org/drawingml/2006/main"/>
+          <a:ln xmlns:a="http://schemas.openxmlformats.org/drawingml/2006/main" w="0">
+            <a:noFill/>
+            <a:prstDash val="solid"/>
+          </a:ln>
+        </p:spPr>
+        <p:txBody>
+          <a:bodyPr xmlns:a="http://schemas.openxmlformats.org/drawingml/2006/main"/>
+          <a:lstStyle xmlns:a="http://schemas.openxmlformats.org/drawingml/2006/main"/>
+          <a:p xmlns:a="http://schemas.openxmlformats.org/drawingml/2006/main">
+            <a:pPr algn="l">
+              <a:defRPr sz="623" b="0">
+                <a:solidFill>
+                  <a:srgbClr val="000000"/>
+                </a:solidFill>
+              </a:defRPr>
+            </a:pPr>
+            <a:r>
+              <a:rPr sz="623" b="0">
+                <a:solidFill>
+                  <a:srgbClr val="000000"/>
+                </a:solidFill>
+              </a:rPr>
+              <a:t>0.270</a:t>
+            </a:r>
+          </a:p>
+        </p:txBody>
+      </p:sp>
+      <p:sp>
+        <p:nvSpPr>
+          <p:cNvPr id="55" name="">
+            <a:extLst xmlns:a="http://schemas.openxmlformats.org/drawingml/2006/main">
+              <a:ext uri="{FF2B5EF4-FFF2-40B4-BE49-F238E27FC236}">
+                <a16:creationId xmlns:a16="http://schemas.microsoft.com/office/drawing/2014/main" id="{DFA39AD5-1138-4C34-B528-E305B0AAA79A}"/>
+              </a:ext>
+            </a:extLst>
+          </p:cNvPr>
+          <p:cNvSpPr>
+            <a:spLocks xmlns:a="http://schemas.openxmlformats.org/drawingml/2006/main" noGrp="1"/>
+          </p:cNvSpPr>
+          <p:nvPr/>
+        </p:nvSpPr>
+        <p:spPr>
+          <a:xfrm xmlns:a="http://schemas.openxmlformats.org/drawingml/2006/main">
+            <a:off x="7610475" y="2486025"/>
+            <a:ext cx="7144" cy="285750"/>
+          </a:xfrm>
+          <a:prstGeom xmlns:a="http://schemas.openxmlformats.org/drawingml/2006/main" prst="rect">
+            <a:avLst/>
+          </a:prstGeom>
+          <a:solidFill xmlns:a="http://schemas.openxmlformats.org/drawingml/2006/main">
+            <a:srgbClr val="8DAAC5"/>
+          </a:solidFill>
+          <a:ln xmlns:a="http://schemas.openxmlformats.org/drawingml/2006/main" w="0">
+            <a:noFill/>
+            <a:prstDash val="solid"/>
+          </a:ln>
+        </p:spPr>
+      </p:sp>
+      <p:sp>
+        <p:nvSpPr>
+          <p:cNvPr id="56" name="">
+            <a:extLst xmlns:a="http://schemas.openxmlformats.org/drawingml/2006/main">
+              <a:ext uri="{FF2B5EF4-FFF2-40B4-BE49-F238E27FC236}">
+                <a16:creationId xmlns:a16="http://schemas.microsoft.com/office/drawing/2014/main" id="{63C3F197-24C0-4032-945B-A6C169D2A8FA}"/>
+              </a:ext>
+            </a:extLst>
+          </p:cNvPr>
+          <p:cNvSpPr>
+            <a:spLocks xmlns:a="http://schemas.openxmlformats.org/drawingml/2006/main" noGrp="1"/>
+          </p:cNvSpPr>
+          <p:nvPr/>
+        </p:nvSpPr>
+        <p:spPr>
+          <a:xfrm xmlns:a="http://schemas.openxmlformats.org/drawingml/2006/main">
+            <a:off x="7658100" y="2552700"/>
+            <a:ext cx="466725" cy="209550"/>
+          </a:xfrm>
+          <a:prstGeom xmlns:a="http://schemas.openxmlformats.org/drawingml/2006/main" prst="rect">
+            <a:avLst/>
+          </a:prstGeom>
+          <a:noFill xmlns:a="http://schemas.openxmlformats.org/drawingml/2006/main"/>
+          <a:ln xmlns:a="http://schemas.openxmlformats.org/drawingml/2006/main" w="0">
+            <a:noFill/>
+            <a:prstDash val="solid"/>
+          </a:ln>
+        </p:spPr>
+        <p:txBody>
+          <a:bodyPr xmlns:a="http://schemas.openxmlformats.org/drawingml/2006/main"/>
+          <a:lstStyle xmlns:a="http://schemas.openxmlformats.org/drawingml/2006/main"/>
+          <a:p xmlns:a="http://schemas.openxmlformats.org/drawingml/2006/main">
+            <a:pPr algn="l">
+              <a:defRPr sz="623" b="0">
+                <a:solidFill>
+                  <a:srgbClr val="000000"/>
+                </a:solidFill>
+              </a:defRPr>
+            </a:pPr>
+            <a:r>
+              <a:rPr sz="623" b="0">
+                <a:solidFill>
+                  <a:srgbClr val="000000"/>
+                </a:solidFill>
+              </a:rPr>
+              <a:t>0.318</a:t>
+            </a:r>
+          </a:p>
+        </p:txBody>
+      </p:sp>
+      <p:sp>
+        <p:nvSpPr>
+          <p:cNvPr id="57" name="">
+            <a:extLst xmlns:a="http://schemas.openxmlformats.org/drawingml/2006/main">
+              <a:ext uri="{FF2B5EF4-FFF2-40B4-BE49-F238E27FC236}">
+                <a16:creationId xmlns:a16="http://schemas.microsoft.com/office/drawing/2014/main" id="{70D33F56-55CF-4576-8DB4-FD1CFC2B1908}"/>
+              </a:ext>
+            </a:extLst>
+          </p:cNvPr>
+          <p:cNvSpPr>
+            <a:spLocks xmlns:a="http://schemas.openxmlformats.org/drawingml/2006/main" noGrp="1"/>
+          </p:cNvSpPr>
+          <p:nvPr/>
+        </p:nvSpPr>
+        <p:spPr>
+          <a:xfrm xmlns:a="http://schemas.openxmlformats.org/drawingml/2006/main">
+            <a:off x="4762500" y="3067050"/>
+            <a:ext cx="3429000" cy="285750"/>
+          </a:xfrm>
+          <a:prstGeom xmlns:a="http://schemas.openxmlformats.org/drawingml/2006/main" prst="rect">
+            <a:avLst/>
+          </a:prstGeom>
+          <a:noFill xmlns:a="http://schemas.openxmlformats.org/drawingml/2006/main"/>
+          <a:ln xmlns:a="http://schemas.openxmlformats.org/drawingml/2006/main" w="0">
+            <a:noFill/>
+            <a:prstDash val="solid"/>
+          </a:ln>
+        </p:spPr>
+        <p:txBody>
+          <a:bodyPr xmlns:a="http://schemas.openxmlformats.org/drawingml/2006/main"/>
+          <a:lstStyle xmlns:a="http://schemas.openxmlformats.org/drawingml/2006/main"/>
+          <a:p xmlns:a="http://schemas.openxmlformats.org/drawingml/2006/main">
+            <a:pPr algn="l">
+              <a:defRPr sz="788" b="0">
+                <a:solidFill>
+                  <a:srgbClr val="000000"/>
+                </a:solidFill>
+              </a:defRPr>
+            </a:pPr>
+            <a:r>
+              <a:rPr sz="788" b="0">
+                <a:solidFill>
+                  <a:srgbClr val="000000"/>
+                </a:solidFill>
+              </a:rPr>
+              <a:t>Savings, deal rate, and anchor are rounded production-run values.</a:t>
             </a:r>
           </a:p>
         </p:txBody>
@@ -13573,7 +16028,7 @@
     </p:spTree>
     <p:extLst>
       <p:ext uri="{BB962C8B-B14F-4D97-AF65-F5344CB8AC3E}">
-        <p14:creationId xmlns:p14="http://schemas.microsoft.com/office/powerpoint/2010/main" val="3934807106"/>
+        <p14:creationId xmlns:p14="http://schemas.microsoft.com/office/powerpoint/2010/main" val="3265107568"/>
       </p:ext>
     </p:extLst>
   </p:cSld>
@@ -13597,7 +16052,7 @@
           <p:cNvPr id="2" name="Content Placeholder 1">
             <a:extLst xmlns:a="http://schemas.openxmlformats.org/drawingml/2006/main">
               <a:ext uri="{FF2B5EF4-FFF2-40B4-BE49-F238E27FC236}">
-                <a16:creationId xmlns:a16="http://schemas.microsoft.com/office/drawing/2014/main" id="{E6F57E75-77ED-F878-48AE-05A29C686D9A}"/>
+                <a16:creationId xmlns:a16="http://schemas.microsoft.com/office/drawing/2014/main" id="{76DA83A1-33C7-42C4-8F9C-3BD42E18E156}"/>
               </a:ext>
             </a:extLst>
           </p:cNvPr>
@@ -13614,7 +16069,12 @@
           <a:lstStyle xmlns:a="http://schemas.openxmlformats.org/drawingml/2006/main"/>
           <a:p xmlns:a="http://schemas.openxmlformats.org/drawingml/2006/main">
             <a:r>
-              <a:t>The project does not show that RL beats historical buyers in production.</a:t>
+              <a:t>Supported</a:t>
+            </a:r>
+          </a:p>
+          <a:p xmlns:a="http://schemas.openxmlformats.org/drawingml/2006/main">
+            <a:r>
+              <a:t>Greedy supervised maximization leaves the data support; CQL stays evaluable (ESS 36% vs 0.8%).</a:t>
             </a:r>
           </a:p>
           <a:p xmlns:a="http://schemas.openxmlformats.org/drawingml/2006/main">
@@ -13624,7 +16084,12 @@
           </a:p>
           <a:p xmlns:a="http://schemas.openxmlformats.org/drawingml/2006/main">
             <a:r>
-              <a:t>It shows why that claim would be unsafe without support diagnostics.</a:t>
+              <a:t>Cautious</a:t>
+            </a:r>
+          </a:p>
+          <a:p xmlns:a="http://schemas.openxmlformats.org/drawingml/2006/main">
+            <a:r>
+              <a:t>PPO's high simulator savings are a learned-environment stress test, not marketplace performance.</a:t>
             </a:r>
           </a:p>
           <a:p xmlns:a="http://schemas.openxmlformats.org/drawingml/2006/main">
@@ -13633,8 +16098,37 @@
             </a:r>
           </a:p>
           <a:p xmlns:a="http://schemas.openxmlformats.org/drawingml/2006/main">
-            <a:r>
-              <a:t>CQL makes the extrapolation problem measurable; PPO shows what the learned simulator incentivizes; the next model should handle multi-turn counteroffers with explicit uncertainty.</a:t>
+            <a:pPr>
+              <a:buNone/>
+            </a:pPr>
+            <a:r>
+              <a:t>Not claimed</a:t>
+            </a:r>
+          </a:p>
+          <a:p xmlns:a="http://schemas.openxmlformats.org/drawingml/2006/main">
+            <a:pPr>
+              <a:buNone/>
+            </a:pPr>
+            <a:r>
+              <a:t>Live marketplace lift, causal anchoring effects, or an optimal offer policy.</a:t>
+            </a:r>
+          </a:p>
+          <a:p xmlns:a="http://schemas.openxmlformats.org/drawingml/2006/main">
+            <a:pPr>
+              <a:buNone/>
+            </a:pPr>
+            <a:r>
+              <a:t/>
+            </a:r>
+          </a:p>
+          <a:p xmlns:a="http://schemas.openxmlformats.org/drawingml/2006/main">
+            <a:r>
+              <a:t>Future work</a:t>
+            </a:r>
+          </a:p>
+          <a:p xmlns:a="http://schemas.openxmlformats.org/drawingml/2006/main">
+            <a:r>
+              <a:t>Sequential counteroffers, richer item features, temporal and leaf-holdout robustness tables.</a:t>
             </a:r>
           </a:p>
         </p:txBody>
@@ -13644,7 +16138,7 @@
           <p:cNvPr id="3" name="Slide Number Placeholder 2">
             <a:extLst xmlns:a="http://schemas.openxmlformats.org/drawingml/2006/main">
               <a:ext uri="{FF2B5EF4-FFF2-40B4-BE49-F238E27FC236}">
-                <a16:creationId xmlns:a16="http://schemas.microsoft.com/office/drawing/2014/main" id="{BDDE685E-FB47-68F2-8D0F-75B31344B105}"/>
+                <a16:creationId xmlns:a16="http://schemas.microsoft.com/office/drawing/2014/main" id="{C44891E6-FD77-4ED2-B33D-9D52420B512C}"/>
               </a:ext>
             </a:extLst>
           </p:cNvPr>
@@ -13671,7 +16165,7 @@
           <p:cNvPr id="4" name="Footer Placeholder 3">
             <a:extLst xmlns:a="http://schemas.openxmlformats.org/drawingml/2006/main">
               <a:ext uri="{FF2B5EF4-FFF2-40B4-BE49-F238E27FC236}">
-                <a16:creationId xmlns:a16="http://schemas.microsoft.com/office/drawing/2014/main" id="{CD62A944-DD20-AABC-1EC2-6316001E6196}"/>
+                <a16:creationId xmlns:a16="http://schemas.microsoft.com/office/drawing/2014/main" id="{73735118-2018-403D-97C0-573C8DD06D6A}"/>
               </a:ext>
             </a:extLst>
           </p:cNvPr>
@@ -13688,7 +16182,157 @@
           <a:lstStyle xmlns:a="http://schemas.openxmlformats.org/drawingml/2006/main"/>
           <a:p xmlns:a="http://schemas.openxmlformats.org/drawingml/2006/main">
             <a:r>
-              <a:t>eBay Best Offer anchoring RL | Why / How / What</a:t>
+              <a:t>eBay Best Offer anchoring RL | Advanced Seminar (WIHN0043SE)</a:t>
+            </a:r>
+          </a:p>
+        </p:txBody>
+      </p:sp>
+      <p:sp>
+        <p:nvSpPr>
+          <p:cNvPr id="5" name="Title 4">
+            <a:extLst xmlns:a="http://schemas.openxmlformats.org/drawingml/2006/main">
+              <a:ext uri="{FF2B5EF4-FFF2-40B4-BE49-F238E27FC236}">
+                <a16:creationId xmlns:a16="http://schemas.microsoft.com/office/drawing/2014/main" id="{5E5BBDBF-7D0D-4939-977B-4D07FC6EF406}"/>
+              </a:ext>
+            </a:extLst>
+          </p:cNvPr>
+          <p:cNvSpPr>
+            <a:spLocks xmlns:a="http://schemas.openxmlformats.org/drawingml/2006/main" noGrp="1"/>
+          </p:cNvSpPr>
+          <p:nvPr>
+            <p:ph type="title" idx="0"/>
+          </p:nvPr>
+        </p:nvSpPr>
+        <p:spPr/>
+        <p:txBody>
+          <a:bodyPr xmlns:a="http://schemas.openxmlformats.org/drawingml/2006/main"/>
+          <a:lstStyle xmlns:a="http://schemas.openxmlformats.org/drawingml/2006/main"/>
+          <a:p xmlns:a="http://schemas.openxmlformats.org/drawingml/2006/main">
+            <a:r>
+              <a:t>What: claims this evidence supports</a:t>
+            </a:r>
+          </a:p>
+        </p:txBody>
+      </p:sp>
+    </p:spTree>
+    <p:extLst>
+      <p:ext uri="{BB962C8B-B14F-4D97-AF65-F5344CB8AC3E}">
+        <p14:creationId xmlns:p14="http://schemas.microsoft.com/office/powerpoint/2010/main" val="3934807106"/>
+      </p:ext>
+    </p:extLst>
+  </p:cSld>
+</p:sld>
+</file>
+
+<file path=ppt/slides/slide13.xml><?xml version="1.0" encoding="utf-8"?>
+<p:sld xmlns:p="http://schemas.openxmlformats.org/presentationml/2006/main">
+  <p:cSld>
+    <p:spTree>
+      <p:nvGrpSpPr>
+        <p:cNvPr id="1" name=""/>
+        <p:cNvGrpSpPr/>
+        <p:nvPr/>
+      </p:nvGrpSpPr>
+      <p:grpSpPr>
+        <a:xfrm xmlns:a="http://schemas.openxmlformats.org/drawingml/2006/main"/>
+      </p:grpSpPr>
+      <p:sp>
+        <p:nvSpPr>
+          <p:cNvPr id="2" name="Content Placeholder 1">
+            <a:extLst xmlns:a="http://schemas.openxmlformats.org/drawingml/2006/main">
+              <a:ext uri="{FF2B5EF4-FFF2-40B4-BE49-F238E27FC236}">
+                <a16:creationId xmlns:a16="http://schemas.microsoft.com/office/drawing/2014/main" id="{E6F57E75-77ED-F878-48AE-05A29C686D9A}"/>
+              </a:ext>
+            </a:extLst>
+          </p:cNvPr>
+          <p:cNvSpPr>
+            <a:spLocks xmlns:a="http://schemas.openxmlformats.org/drawingml/2006/main" noGrp="1"/>
+          </p:cNvSpPr>
+          <p:nvPr>
+            <p:ph idx="1"/>
+          </p:nvPr>
+        </p:nvSpPr>
+        <p:spPr/>
+        <p:txBody>
+          <a:bodyPr xmlns:a="http://schemas.openxmlformats.org/drawingml/2006/main"/>
+          <a:lstStyle xmlns:a="http://schemas.openxmlformats.org/drawingml/2006/main"/>
+          <a:p xmlns:a="http://schemas.openxmlformats.org/drawingml/2006/main">
+            <a:r>
+              <a:t>The lowest offer is not the best decision, and the highest estimate is not the best evidence.</a:t>
+            </a:r>
+          </a:p>
+          <a:p xmlns:a="http://schemas.openxmlformats.org/drawingml/2006/main">
+            <a:r>
+              <a:t/>
+            </a:r>
+          </a:p>
+          <a:p xmlns:a="http://schemas.openxmlformats.org/drawingml/2006/main">
+            <a:r>
+              <a:t>This project makes extrapolation measurable before a recommendation is trusted.</a:t>
+            </a:r>
+          </a:p>
+          <a:p xmlns:a="http://schemas.openxmlformats.org/drawingml/2006/main">
+            <a:r>
+              <a:t/>
+            </a:r>
+          </a:p>
+          <a:p xmlns:a="http://schemas.openxmlformats.org/drawingml/2006/main">
+            <a:r>
+              <a:t>Next: model counteroffers so rejection can lead to a second decision, not simply zero reward.</a:t>
+            </a:r>
+          </a:p>
+        </p:txBody>
+      </p:sp>
+      <p:sp>
+        <p:nvSpPr>
+          <p:cNvPr id="3" name="Slide Number Placeholder 2">
+            <a:extLst xmlns:a="http://schemas.openxmlformats.org/drawingml/2006/main">
+              <a:ext uri="{FF2B5EF4-FFF2-40B4-BE49-F238E27FC236}">
+                <a16:creationId xmlns:a16="http://schemas.microsoft.com/office/drawing/2014/main" id="{BDDE685E-FB47-68F2-8D0F-75B31344B105}"/>
+              </a:ext>
+            </a:extLst>
+          </p:cNvPr>
+          <p:cNvSpPr>
+            <a:spLocks xmlns:a="http://schemas.openxmlformats.org/drawingml/2006/main" noGrp="1"/>
+          </p:cNvSpPr>
+          <p:nvPr>
+            <p:ph type="sldNum" idx="11"/>
+          </p:nvPr>
+        </p:nvSpPr>
+        <p:spPr/>
+        <p:txBody>
+          <a:bodyPr xmlns:a="http://schemas.openxmlformats.org/drawingml/2006/main"/>
+          <a:lstStyle xmlns:a="http://schemas.openxmlformats.org/drawingml/2006/main"/>
+          <a:p xmlns:a="http://schemas.openxmlformats.org/drawingml/2006/main">
+            <a:fld id="{2DD23107-4986-8758-3A93-3D74F35908CC}" type="slidenum">
+              <a:t>13</a:t>
+            </a:fld>
+          </a:p>
+        </p:txBody>
+      </p:sp>
+      <p:sp>
+        <p:nvSpPr>
+          <p:cNvPr id="4" name="Footer Placeholder 3">
+            <a:extLst xmlns:a="http://schemas.openxmlformats.org/drawingml/2006/main">
+              <a:ext uri="{FF2B5EF4-FFF2-40B4-BE49-F238E27FC236}">
+                <a16:creationId xmlns:a16="http://schemas.microsoft.com/office/drawing/2014/main" id="{CD62A944-DD20-AABC-1EC2-6316001E6196}"/>
+              </a:ext>
+            </a:extLst>
+          </p:cNvPr>
+          <p:cNvSpPr>
+            <a:spLocks xmlns:a="http://schemas.openxmlformats.org/drawingml/2006/main" noGrp="1"/>
+          </p:cNvSpPr>
+          <p:nvPr>
+            <p:ph type="ftr" idx="12"/>
+          </p:nvPr>
+        </p:nvSpPr>
+        <p:spPr/>
+        <p:txBody>
+          <a:bodyPr xmlns:a="http://schemas.openxmlformats.org/drawingml/2006/main"/>
+          <a:lstStyle xmlns:a="http://schemas.openxmlformats.org/drawingml/2006/main"/>
+          <a:p xmlns:a="http://schemas.openxmlformats.org/drawingml/2006/main">
+            <a:r>
+              <a:t>eBay Best Offer anchoring RL | Advanced Seminar (WIHN0043SE)</a:t>
             </a:r>
           </a:p>
         </p:txBody>
@@ -13774,7 +16418,7 @@
           <p:cNvPr id="3" name="Inhaltsplatzhalter 2">
             <a:extLst xmlns:a="http://schemas.openxmlformats.org/drawingml/2006/main">
               <a:ext uri="{FF2B5EF4-FFF2-40B4-BE49-F238E27FC236}">
-                <a16:creationId xmlns:a16="http://schemas.microsoft.com/office/drawing/2014/main" id="{9FE37DC3-0575-43D9-AF7C-F5144AB7CF0E}"/>
+                <a16:creationId xmlns:a16="http://schemas.microsoft.com/office/drawing/2014/main" id="{349F6ED9-DD01-46EA-A0B2-3CF37391F570}"/>
               </a:ext>
             </a:extLst>
           </p:cNvPr>
@@ -13804,7 +16448,7 @@
     </p:spTree>
     <p:extLst>
       <p:ext uri="{BB962C8B-B14F-4D97-AF65-F5344CB8AC3E}">
-        <p14:creationId xmlns:p14="http://schemas.microsoft.com/office/powerpoint/2010/main" val="22518012"/>
+        <p14:creationId xmlns:p14="http://schemas.microsoft.com/office/powerpoint/2010/main" val="848793366"/>
       </p:ext>
     </p:extLst>
   </p:cSld>
@@ -13828,15 +16472,15 @@
           <p:cNvPr id="2" name="Content Placeholder 1">
             <a:extLst xmlns:a="http://schemas.openxmlformats.org/drawingml/2006/main">
               <a:ext uri="{FF2B5EF4-FFF2-40B4-BE49-F238E27FC236}">
-                <a16:creationId xmlns:a16="http://schemas.microsoft.com/office/drawing/2014/main" id="{76DA83A1-33C7-42C4-8F9C-3BD42E18E156}"/>
-              </a:ext>
-            </a:extLst>
-          </p:cNvPr>
-          <p:cNvSpPr>
-            <a:spLocks xmlns:a="http://schemas.openxmlformats.org/drawingml/2006/main" noGrp="1"/>
-          </p:cNvSpPr>
-          <p:nvPr>
-            <p:ph idx="1"/>
+                <a16:creationId xmlns:a16="http://schemas.microsoft.com/office/drawing/2014/main" id="{38F05BFB-8908-46EB-84F3-3B1D5835FAE4}"/>
+              </a:ext>
+            </a:extLst>
+          </p:cNvPr>
+          <p:cNvSpPr>
+            <a:spLocks xmlns:a="http://schemas.openxmlformats.org/drawingml/2006/main" noGrp="1"/>
+          </p:cNvSpPr>
+          <p:nvPr>
+            <p:ph idx="14"/>
           </p:nvPr>
         </p:nvSpPr>
         <p:spPr/>
@@ -13845,7 +16489,7 @@
           <a:lstStyle xmlns:a="http://schemas.openxmlformats.org/drawingml/2006/main"/>
           <a:p xmlns:a="http://schemas.openxmlformats.org/drawingml/2006/main">
             <a:r>
-              <a:t>Best Offer creates a concrete trade-off.</a:t>
+              <a:t>A jacket lists at EUR 100 with Best Offer. What do you offer?</a:t>
             </a:r>
           </a:p>
           <a:p xmlns:a="http://schemas.openxmlformats.org/drawingml/2006/main">
@@ -13855,7 +16499,7 @@
           </a:p>
           <a:p xmlns:a="http://schemas.openxmlformats.org/drawingml/2006/main">
             <a:r>
-              <a:t>Lower anchors increase savings only if the offer is accepted.</a:t>
+              <a:t>Lower anchors raise the prize (1 - a) but lower the chance of acceptance.</a:t>
             </a:r>
           </a:p>
           <a:p xmlns:a="http://schemas.openxmlformats.org/drawingml/2006/main">
@@ -13865,46 +16509,40 @@
           </a:p>
           <a:p xmlns:a="http://schemas.openxmlformats.org/drawingml/2006/main">
             <a:r>
-              <a:t>Expected savings can be written as:</a:t>
-            </a:r>
-          </a:p>
-          <a:p xmlns:a="http://schemas.openxmlformats.org/drawingml/2006/main">
-            <a:r>
-              <a:t>P(accept | state, anchor) x (1 - anchor)</a:t>
-            </a:r>
-          </a:p>
-          <a:p xmlns:a="http://schemas.openxmlformats.org/drawingml/2006/main">
-            <a:pPr>
-              <a:buNone/>
-            </a:pPr>
+              <a:t>Expected savings:</a:t>
+            </a:r>
+          </a:p>
+          <a:p xmlns:a="http://schemas.openxmlformats.org/drawingml/2006/main">
+            <a:r>
+              <a:t>E[savings] = P(accept | s, a) * (1 - a)</a:t>
+            </a:r>
+          </a:p>
+          <a:p xmlns:a="http://schemas.openxmlformats.org/drawingml/2006/main">
             <a:r>
               <a:t/>
             </a:r>
           </a:p>
           <a:p xmlns:a="http://schemas.openxmlformats.org/drawingml/2006/main">
-            <a:pPr>
-              <a:buNone/>
-            </a:pPr>
-            <a:r>
-              <a:t>The project treats the recommendation as buyer decision support, not as proof of seller manipulation.</a:t>
-            </a:r>
-          </a:p>
-        </p:txBody>
-      </p:sp>
-      <p:sp>
-        <p:nvSpPr>
-          <p:cNvPr id="3" name="Slide Number Placeholder 2">
-            <a:extLst xmlns:a="http://schemas.openxmlformats.org/drawingml/2006/main">
-              <a:ext uri="{FF2B5EF4-FFF2-40B4-BE49-F238E27FC236}">
-                <a16:creationId xmlns:a16="http://schemas.microsoft.com/office/drawing/2014/main" id="{C44891E6-FD77-4ED2-B33D-9D52420B512C}"/>
-              </a:ext>
-            </a:extLst>
-          </p:cNvPr>
-          <p:cNvSpPr>
-            <a:spLocks xmlns:a="http://schemas.openxmlformats.org/drawingml/2006/main" noGrp="1"/>
-          </p:cNvSpPr>
-          <p:nvPr>
-            <p:ph type="sldNum" idx="11"/>
+            <a:r>
+              <a:t>The useful anchor is an interior trade-off, not simply the lowest offer.</a:t>
+            </a:r>
+          </a:p>
+        </p:txBody>
+      </p:sp>
+      <p:sp>
+        <p:nvSpPr>
+          <p:cNvPr id="4" name="Slide Number Placeholder 3">
+            <a:extLst xmlns:a="http://schemas.openxmlformats.org/drawingml/2006/main">
+              <a:ext uri="{FF2B5EF4-FFF2-40B4-BE49-F238E27FC236}">
+                <a16:creationId xmlns:a16="http://schemas.microsoft.com/office/drawing/2014/main" id="{B00B1BF6-1E0F-4AD0-89BA-806F600E6D7D}"/>
+              </a:ext>
+            </a:extLst>
+          </p:cNvPr>
+          <p:cNvSpPr>
+            <a:spLocks xmlns:a="http://schemas.openxmlformats.org/drawingml/2006/main" noGrp="1"/>
+          </p:cNvSpPr>
+          <p:nvPr>
+            <p:ph type="sldNum" idx="16"/>
           </p:nvPr>
         </p:nvSpPr>
         <p:spPr/>
@@ -13920,18 +16558,18 @@
       </p:sp>
       <p:sp>
         <p:nvSpPr>
-          <p:cNvPr id="4" name="Footer Placeholder 3">
-            <a:extLst xmlns:a="http://schemas.openxmlformats.org/drawingml/2006/main">
-              <a:ext uri="{FF2B5EF4-FFF2-40B4-BE49-F238E27FC236}">
-                <a16:creationId xmlns:a16="http://schemas.microsoft.com/office/drawing/2014/main" id="{73735118-2018-403D-97C0-573C8DD06D6A}"/>
-              </a:ext>
-            </a:extLst>
-          </p:cNvPr>
-          <p:cNvSpPr>
-            <a:spLocks xmlns:a="http://schemas.openxmlformats.org/drawingml/2006/main" noGrp="1"/>
-          </p:cNvSpPr>
-          <p:nvPr>
-            <p:ph type="ftr" idx="12"/>
+          <p:cNvPr id="5" name="Footer Placeholder 4">
+            <a:extLst xmlns:a="http://schemas.openxmlformats.org/drawingml/2006/main">
+              <a:ext uri="{FF2B5EF4-FFF2-40B4-BE49-F238E27FC236}">
+                <a16:creationId xmlns:a16="http://schemas.microsoft.com/office/drawing/2014/main" id="{B4AEE372-D5A0-447D-9407-E3C69944FFDA}"/>
+              </a:ext>
+            </a:extLst>
+          </p:cNvPr>
+          <p:cNvSpPr>
+            <a:spLocks xmlns:a="http://schemas.openxmlformats.org/drawingml/2006/main" noGrp="1"/>
+          </p:cNvSpPr>
+          <p:nvPr>
+            <p:ph type="ftr" idx="17"/>
           </p:nvPr>
         </p:nvSpPr>
         <p:spPr/>
@@ -13940,17 +16578,17 @@
           <a:lstStyle xmlns:a="http://schemas.openxmlformats.org/drawingml/2006/main"/>
           <a:p xmlns:a="http://schemas.openxmlformats.org/drawingml/2006/main">
             <a:r>
-              <a:t>eBay Best Offer anchoring RL | Why / How / What</a:t>
-            </a:r>
-          </a:p>
-        </p:txBody>
-      </p:sp>
-      <p:sp>
-        <p:nvSpPr>
-          <p:cNvPr id="5" name="Title 4">
-            <a:extLst xmlns:a="http://schemas.openxmlformats.org/drawingml/2006/main">
-              <a:ext uri="{FF2B5EF4-FFF2-40B4-BE49-F238E27FC236}">
-                <a16:creationId xmlns:a16="http://schemas.microsoft.com/office/drawing/2014/main" id="{5E5BBDBF-7D0D-4939-977B-4D07FC6EF406}"/>
+              <a:t>eBay Best Offer anchoring RL | Advanced Seminar (WIHN0043SE)</a:t>
+            </a:r>
+          </a:p>
+        </p:txBody>
+      </p:sp>
+      <p:sp>
+        <p:nvSpPr>
+          <p:cNvPr id="6" name="Title 5">
+            <a:extLst xmlns:a="http://schemas.openxmlformats.org/drawingml/2006/main">
+              <a:ext uri="{FF2B5EF4-FFF2-40B4-BE49-F238E27FC236}">
+                <a16:creationId xmlns:a16="http://schemas.microsoft.com/office/drawing/2014/main" id="{0514C42E-BA49-4954-A66B-22C9793B6568}"/>
               </a:ext>
             </a:extLst>
           </p:cNvPr>
@@ -13968,6 +16606,72 @@
           <a:p xmlns:a="http://schemas.openxmlformats.org/drawingml/2006/main">
             <a:r>
               <a:t>Why: the lowest offer is not automatically the best decision</a:t>
+            </a:r>
+          </a:p>
+        </p:txBody>
+      </p:sp>
+      <p:graphicFrame>
+        <p:nvGraphicFramePr>
+          <p:cNvPr id="13" name="Chart"/>
+          <p:cNvGraphicFramePr/>
+          <p:nvPr/>
+        </p:nvGraphicFramePr>
+        <p:xfrm>
+          <a:off xmlns:a="http://schemas.openxmlformats.org/drawingml/2006/main" x="4762500" y="1257300"/>
+          <a:ext xmlns:a="http://schemas.openxmlformats.org/drawingml/2006/main" cx="3524250" cy="2305050"/>
+        </p:xfrm>
+        <a:graphic xmlns:a="http://schemas.openxmlformats.org/drawingml/2006/main">
+          <a:graphicData uri="http://schemas.openxmlformats.org/drawingml/2006/chart">
+            <c:chart xmlns:r="http://schemas.openxmlformats.org/officeDocument/2006/relationships" xmlns:c="http://schemas.openxmlformats.org/drawingml/2006/chart" r:id="R2ccdcdd506824f22"/>
+          </a:graphicData>
+        </a:graphic>
+      </p:graphicFrame>
+      <p:sp>
+        <p:nvSpPr>
+          <p:cNvPr id="8" name="">
+            <a:extLst xmlns:a="http://schemas.openxmlformats.org/drawingml/2006/main">
+              <a:ext uri="{FF2B5EF4-FFF2-40B4-BE49-F238E27FC236}">
+                <a16:creationId xmlns:a16="http://schemas.microsoft.com/office/drawing/2014/main" id="{A6BFFF87-F26C-476E-9910-7F365F255831}"/>
+              </a:ext>
+            </a:extLst>
+          </p:cNvPr>
+          <p:cNvSpPr>
+            <a:spLocks xmlns:a="http://schemas.openxmlformats.org/drawingml/2006/main" noGrp="1"/>
+          </p:cNvSpPr>
+          <p:nvPr/>
+        </p:nvSpPr>
+        <p:spPr>
+          <a:xfrm xmlns:a="http://schemas.openxmlformats.org/drawingml/2006/main">
+            <a:off x="4838700" y="3667125"/>
+            <a:ext cx="3333750" cy="209550"/>
+          </a:xfrm>
+          <a:prstGeom xmlns:a="http://schemas.openxmlformats.org/drawingml/2006/main" prst="rect">
+            <a:avLst/>
+          </a:prstGeom>
+          <a:noFill xmlns:a="http://schemas.openxmlformats.org/drawingml/2006/main"/>
+          <a:ln xmlns:a="http://schemas.openxmlformats.org/drawingml/2006/main" w="0">
+            <a:noFill/>
+            <a:prstDash val="solid"/>
+          </a:ln>
+        </p:spPr>
+        <p:txBody>
+          <a:bodyPr xmlns:a="http://schemas.openxmlformats.org/drawingml/2006/main"/>
+          <a:lstStyle xmlns:a="http://schemas.openxmlformats.org/drawingml/2006/main"/>
+          <a:p xmlns:a="http://schemas.openxmlformats.org/drawingml/2006/main">
+            <a:pPr algn="l">
+              <a:defRPr sz="750" b="0">
+                <a:solidFill>
+                  <a:srgbClr val="000000"/>
+                </a:solidFill>
+              </a:defRPr>
+            </a:pPr>
+            <a:r>
+              <a:rPr sz="750" b="0">
+                <a:solidFill>
+                  <a:srgbClr val="000000"/>
+                </a:solidFill>
+              </a:rPr>
+              <a:t>Illustrative curve, not an empirical fit.</a:t>
             </a:r>
           </a:p>
         </p:txBody>
@@ -13975,7 +16679,7 @@
     </p:spTree>
     <p:extLst>
       <p:ext uri="{BB962C8B-B14F-4D97-AF65-F5344CB8AC3E}">
-        <p14:creationId xmlns:p14="http://schemas.microsoft.com/office/powerpoint/2010/main" val="3934807106"/>
+        <p14:creationId xmlns:p14="http://schemas.microsoft.com/office/powerpoint/2010/main" val="3265107568"/>
       </p:ext>
     </p:extLst>
   </p:cSld>
@@ -13999,15 +16703,15 @@
           <p:cNvPr id="2" name="Content Placeholder 1">
             <a:extLst xmlns:a="http://schemas.openxmlformats.org/drawingml/2006/main">
               <a:ext uri="{FF2B5EF4-FFF2-40B4-BE49-F238E27FC236}">
-                <a16:creationId xmlns:a16="http://schemas.microsoft.com/office/drawing/2014/main" id="{B17CCC31-C182-4362-A806-ED097C67863A}"/>
-              </a:ext>
-            </a:extLst>
-          </p:cNvPr>
-          <p:cNvSpPr>
-            <a:spLocks xmlns:a="http://schemas.openxmlformats.org/drawingml/2006/main" noGrp="1"/>
-          </p:cNvSpPr>
-          <p:nvPr>
-            <p:ph idx="1"/>
+                <a16:creationId xmlns:a16="http://schemas.microsoft.com/office/drawing/2014/main" id="{38F05BFB-8908-46EB-84F3-3B1D5835FAE4}"/>
+              </a:ext>
+            </a:extLst>
+          </p:cNvPr>
+          <p:cNvSpPr>
+            <a:spLocks xmlns:a="http://schemas.openxmlformats.org/drawingml/2006/main" noGrp="1"/>
+          </p:cNvSpPr>
+          <p:nvPr>
+            <p:ph idx="14"/>
           </p:nvPr>
         </p:nvSpPr>
         <p:spPr/>
@@ -14016,7 +16720,22 @@
           <a:lstStyle xmlns:a="http://schemas.openxmlformats.org/drawingml/2006/main"/>
           <a:p xmlns:a="http://schemas.openxmlformats.org/drawingml/2006/main">
             <a:r>
-              <a:t>The data are observational.</a:t>
+              <a:t>Prior work establishes the setting</a:t>
+            </a:r>
+          </a:p>
+          <a:p xmlns:a="http://schemas.openxmlformats.org/drawingml/2006/main">
+            <a:r>
+              <a:t>Tversky and Kahneman: numeric anchors shape judgment.</a:t>
+            </a:r>
+          </a:p>
+          <a:p xmlns:a="http://schemas.openxmlformats.org/drawingml/2006/main">
+            <a:r>
+              <a:t>Galinsky and Mussweiler: first offers anchor negotiations.</a:t>
+            </a:r>
+          </a:p>
+          <a:p xmlns:a="http://schemas.openxmlformats.org/drawingml/2006/main">
+            <a:r>
+              <a:t>Backus et al.: eBay Best Offer is sequential bargaining at scale.</a:t>
             </a:r>
           </a:p>
           <a:p xmlns:a="http://schemas.openxmlformats.org/drawingml/2006/main">
@@ -14026,7 +16745,17 @@
           </a:p>
           <a:p xmlns:a="http://schemas.openxmlformats.org/drawingml/2006/main">
             <a:r>
-              <a:t>Buyers chose their own anchors; logged behavior is not randomized.</a:t>
+              <a:t>What this dataset cannot identify</a:t>
+            </a:r>
+          </a:p>
+          <a:p xmlns:a="http://schemas.openxmlformats.org/drawingml/2006/main">
+            <a:r>
+              <a:t>Offers were chosen by buyers, not randomized.</a:t>
+            </a:r>
+          </a:p>
+          <a:p xmlns:a="http://schemas.openxmlformats.org/drawingml/2006/main">
+            <a:r>
+              <a:t>Greedy optimization can select anchors the logs barely contain.</a:t>
             </a:r>
           </a:p>
           <a:p xmlns:a="http://schemas.openxmlformats.org/drawingml/2006/main">
@@ -14036,35 +16765,25 @@
           </a:p>
           <a:p xmlns:a="http://schemas.openxmlformats.org/drawingml/2006/main">
             <a:r>
-              <a:t>A greedy supervised optimizer may choose anchors rarely seen in the logs.</a:t>
-            </a:r>
-          </a:p>
-          <a:p xmlns:a="http://schemas.openxmlformats.org/drawingml/2006/main">
-            <a:r>
-              <a:t/>
-            </a:r>
-          </a:p>
-          <a:p xmlns:a="http://schemas.openxmlformats.org/drawingml/2006/main">
-            <a:r>
-              <a:t>This makes support diagnostics as important as reward estimates.</a:t>
-            </a:r>
-          </a:p>
-        </p:txBody>
-      </p:sp>
-      <p:sp>
-        <p:nvSpPr>
-          <p:cNvPr id="3" name="Slide Number Placeholder 2">
-            <a:extLst xmlns:a="http://schemas.openxmlformats.org/drawingml/2006/main">
-              <a:ext uri="{FF2B5EF4-FFF2-40B4-BE49-F238E27FC236}">
-                <a16:creationId xmlns:a16="http://schemas.microsoft.com/office/drawing/2014/main" id="{623CA3EA-E7D2-4B95-8A60-B0208474879F}"/>
-              </a:ext>
-            </a:extLst>
-          </p:cNvPr>
-          <p:cNvSpPr>
-            <a:spLocks xmlns:a="http://schemas.openxmlformats.org/drawingml/2006/main" noGrp="1"/>
-          </p:cNvSpPr>
-          <p:nvPr>
-            <p:ph type="sldNum" idx="11"/>
+              <a:t>Support diagnostics are therefore part of the main result.</a:t>
+            </a:r>
+          </a:p>
+        </p:txBody>
+      </p:sp>
+      <p:sp>
+        <p:nvSpPr>
+          <p:cNvPr id="4" name="Slide Number Placeholder 3">
+            <a:extLst xmlns:a="http://schemas.openxmlformats.org/drawingml/2006/main">
+              <a:ext uri="{FF2B5EF4-FFF2-40B4-BE49-F238E27FC236}">
+                <a16:creationId xmlns:a16="http://schemas.microsoft.com/office/drawing/2014/main" id="{B00B1BF6-1E0F-4AD0-89BA-806F600E6D7D}"/>
+              </a:ext>
+            </a:extLst>
+          </p:cNvPr>
+          <p:cNvSpPr>
+            <a:spLocks xmlns:a="http://schemas.openxmlformats.org/drawingml/2006/main" noGrp="1"/>
+          </p:cNvSpPr>
+          <p:nvPr>
+            <p:ph type="sldNum" idx="16"/>
           </p:nvPr>
         </p:nvSpPr>
         <p:spPr/>
@@ -14080,18 +16799,18 @@
       </p:sp>
       <p:sp>
         <p:nvSpPr>
-          <p:cNvPr id="4" name="Footer Placeholder 3">
-            <a:extLst xmlns:a="http://schemas.openxmlformats.org/drawingml/2006/main">
-              <a:ext uri="{FF2B5EF4-FFF2-40B4-BE49-F238E27FC236}">
-                <a16:creationId xmlns:a16="http://schemas.microsoft.com/office/drawing/2014/main" id="{89834F68-4BE3-4CFA-9D7D-122B49444E8B}"/>
-              </a:ext>
-            </a:extLst>
-          </p:cNvPr>
-          <p:cNvSpPr>
-            <a:spLocks xmlns:a="http://schemas.openxmlformats.org/drawingml/2006/main" noGrp="1"/>
-          </p:cNvSpPr>
-          <p:nvPr>
-            <p:ph type="ftr" idx="12"/>
+          <p:cNvPr id="5" name="Footer Placeholder 4">
+            <a:extLst xmlns:a="http://schemas.openxmlformats.org/drawingml/2006/main">
+              <a:ext uri="{FF2B5EF4-FFF2-40B4-BE49-F238E27FC236}">
+                <a16:creationId xmlns:a16="http://schemas.microsoft.com/office/drawing/2014/main" id="{B4AEE372-D5A0-447D-9407-E3C69944FFDA}"/>
+              </a:ext>
+            </a:extLst>
+          </p:cNvPr>
+          <p:cNvSpPr>
+            <a:spLocks xmlns:a="http://schemas.openxmlformats.org/drawingml/2006/main" noGrp="1"/>
+          </p:cNvSpPr>
+          <p:nvPr>
+            <p:ph type="ftr" idx="17"/>
           </p:nvPr>
         </p:nvSpPr>
         <p:spPr/>
@@ -14100,17 +16819,17 @@
           <a:lstStyle xmlns:a="http://schemas.openxmlformats.org/drawingml/2006/main"/>
           <a:p xmlns:a="http://schemas.openxmlformats.org/drawingml/2006/main">
             <a:r>
-              <a:t>eBay Best Offer anchoring RL | Why / How / What</a:t>
-            </a:r>
-          </a:p>
-        </p:txBody>
-      </p:sp>
-      <p:sp>
-        <p:nvSpPr>
-          <p:cNvPr id="5" name="Title 4">
-            <a:extLst xmlns:a="http://schemas.openxmlformats.org/drawingml/2006/main">
-              <a:ext uri="{FF2B5EF4-FFF2-40B4-BE49-F238E27FC236}">
-                <a16:creationId xmlns:a16="http://schemas.microsoft.com/office/drawing/2014/main" id="{5303C1D3-845E-4838-B723-09F7B0338DA5}"/>
+              <a:t>eBay Best Offer anchoring RL | Advanced Seminar (WIHN0043SE)</a:t>
+            </a:r>
+          </a:p>
+        </p:txBody>
+      </p:sp>
+      <p:sp>
+        <p:nvSpPr>
+          <p:cNvPr id="6" name="Title 5">
+            <a:extLst xmlns:a="http://schemas.openxmlformats.org/drawingml/2006/main">
+              <a:ext uri="{FF2B5EF4-FFF2-40B4-BE49-F238E27FC236}">
+                <a16:creationId xmlns:a16="http://schemas.microsoft.com/office/drawing/2014/main" id="{0514C42E-BA49-4954-A66B-22C9793B6568}"/>
               </a:ext>
             </a:extLst>
           </p:cNvPr>
@@ -14127,7 +16846,7 @@
           <a:lstStyle xmlns:a="http://schemas.openxmlformats.org/drawingml/2006/main"/>
           <a:p xmlns:a="http://schemas.openxmlformats.org/drawingml/2006/main">
             <a:r>
-              <a:t>Why: supervised maximization can leave the data</a:t>
+              <a:t>Why: prior work motivates the question, but not a causal claim</a:t>
             </a:r>
           </a:p>
         </p:txBody>
@@ -14135,7 +16854,7 @@
     </p:spTree>
     <p:extLst>
       <p:ext uri="{BB962C8B-B14F-4D97-AF65-F5344CB8AC3E}">
-        <p14:creationId xmlns:p14="http://schemas.microsoft.com/office/powerpoint/2010/main" val="3895484043"/>
+        <p14:creationId xmlns:p14="http://schemas.microsoft.com/office/powerpoint/2010/main" val="3265107568"/>
       </p:ext>
     </p:extLst>
   </p:cSld>
@@ -14159,7 +16878,7 @@
           <p:cNvPr id="3" name="Inhaltsplatzhalter 2">
             <a:extLst xmlns:a="http://schemas.openxmlformats.org/drawingml/2006/main">
               <a:ext uri="{FF2B5EF4-FFF2-40B4-BE49-F238E27FC236}">
-                <a16:creationId xmlns:a16="http://schemas.microsoft.com/office/drawing/2014/main" id="{9FE37DC3-0575-43D9-AF7C-F5144AB7CF0E}"/>
+                <a16:creationId xmlns:a16="http://schemas.microsoft.com/office/drawing/2014/main" id="{349F6ED9-DD01-46EA-A0B2-3CF37391F570}"/>
               </a:ext>
             </a:extLst>
           </p:cNvPr>
@@ -14181,7 +16900,7 @@
           </a:p>
           <a:p xmlns:a="http://schemas.openxmlformats.org/drawingml/2006/main">
             <a:r>
-              <a:t>How the report turns negotiation into a support-aware decision problem</a:t>
+              <a:t>From 9.6M logged offers to a support-aware comparison</a:t>
             </a:r>
           </a:p>
         </p:txBody>
@@ -14189,7 +16908,7 @@
     </p:spTree>
     <p:extLst>
       <p:ext uri="{BB962C8B-B14F-4D97-AF65-F5344CB8AC3E}">
-        <p14:creationId xmlns:p14="http://schemas.microsoft.com/office/powerpoint/2010/main" val="22518012"/>
+        <p14:creationId xmlns:p14="http://schemas.microsoft.com/office/powerpoint/2010/main" val="848793366"/>
       </p:ext>
     </p:extLst>
   </p:cSld>
@@ -14235,7 +16954,7 @@
           </a:p>
           <a:p xmlns:a="http://schemas.openxmlformats.org/drawingml/2006/main">
             <a:r>
-              <a:t>listing and seller features</a:t>
+              <a:t>log list price, seller reputation, seller positive %, anonymized leaf-category context</a:t>
             </a:r>
           </a:p>
           <a:p xmlns:a="http://schemas.openxmlformats.org/drawingml/2006/main">
@@ -14250,7 +16969,7 @@
           </a:p>
           <a:p xmlns:a="http://schemas.openxmlformats.org/drawingml/2006/main">
             <a:r>
-              <a:t>opening offer ratio = offer / list price</a:t>
+              <a:t>anchor a = opening offer / list price</a:t>
             </a:r>
           </a:p>
           <a:p xmlns:a="http://schemas.openxmlformats.org/drawingml/2006/main">
@@ -14265,7 +16984,7 @@
           </a:p>
           <a:p xmlns:a="http://schemas.openxmlformats.org/drawingml/2006/main">
             <a:r>
-              <a:t>1 - anchor if accepted, otherwise 0</a:t>
+              <a:t>1 - a if accepted, otherwise 0</a:t>
             </a:r>
           </a:p>
           <a:p xmlns:a="http://schemas.openxmlformats.org/drawingml/2006/main">
@@ -14275,12 +16994,12 @@
           </a:p>
           <a:p xmlns:a="http://schemas.openxmlformats.org/drawingml/2006/main">
             <a:r>
-              <a:t>Key correction</a:t>
-            </a:r>
-          </a:p>
-          <a:p xmlns:a="http://schemas.openxmlformats.org/drawingml/2006/main">
-            <a:r>
-              <a:t>no separate price regressor is needed because accepted-offer savings are mechanical in the anchor ratio</a:t>
+              <a:t>No separate price model</a:t>
+            </a:r>
+          </a:p>
+          <a:p xmlns:a="http://schemas.openxmlformats.org/drawingml/2006/main">
+            <a:r>
+              <a:t>accepted-offer savings are mechanical in the anchor</a:t>
             </a:r>
           </a:p>
         </p:txBody>
@@ -14334,7 +17053,7 @@
           <a:lstStyle xmlns:a="http://schemas.openxmlformats.org/drawingml/2006/main"/>
           <a:p xmlns:a="http://schemas.openxmlformats.org/drawingml/2006/main">
             <a:r>
-              <a:t>eBay Best Offer anchoring RL | Why / How / What</a:t>
+              <a:t>eBay Best Offer anchoring RL | Advanced Seminar (WIHN0043SE)</a:t>
             </a:r>
           </a:p>
         </p:txBody>
@@ -14361,7 +17080,7 @@
           <a:lstStyle xmlns:a="http://schemas.openxmlformats.org/drawingml/2006/main"/>
           <a:p xmlns:a="http://schemas.openxmlformats.org/drawingml/2006/main">
             <a:r>
-              <a:t>How: one-step MDP / contextual bandit</a:t>
+              <a:t>How: a one-step decision problem</a:t>
             </a:r>
           </a:p>
         </p:txBody>
@@ -14371,7 +17090,7 @@
           <p:cNvPr id="7" name="">
             <a:extLst xmlns:a="http://schemas.openxmlformats.org/drawingml/2006/main">
               <a:ext uri="{FF2B5EF4-FFF2-40B4-BE49-F238E27FC236}">
-                <a16:creationId xmlns:a16="http://schemas.microsoft.com/office/drawing/2014/main" id="{D851B8E5-6F08-4919-885C-8AB8BB610871}"/>
+                <a16:creationId xmlns:a16="http://schemas.microsoft.com/office/drawing/2014/main" id="{FEA87574-8985-4A50-94E6-AB5C1BCEEBEF}"/>
               </a:ext>
             </a:extLst>
           </p:cNvPr>
@@ -14382,8 +17101,8 @@
         </p:nvSpPr>
         <p:spPr>
           <a:xfrm xmlns:a="http://schemas.openxmlformats.org/drawingml/2006/main">
-            <a:off x="4953000" y="1428750"/>
-            <a:ext cx="1123950" cy="666750"/>
+            <a:off x="4953000" y="1409700"/>
+            <a:ext cx="1066800" cy="628650"/>
           </a:xfrm>
           <a:prstGeom xmlns:a="http://schemas.openxmlformats.org/drawingml/2006/main" prst="rect">
             <a:avLst/>
@@ -14404,7 +17123,7 @@
           <p:cNvPr id="8" name="">
             <a:extLst xmlns:a="http://schemas.openxmlformats.org/drawingml/2006/main">
               <a:ext uri="{FF2B5EF4-FFF2-40B4-BE49-F238E27FC236}">
-                <a16:creationId xmlns:a16="http://schemas.microsoft.com/office/drawing/2014/main" id="{F44C6871-6099-4C2A-9CC2-44CF44C4771C}"/>
+                <a16:creationId xmlns:a16="http://schemas.microsoft.com/office/drawing/2014/main" id="{4CCC9D28-2C14-4BC3-96EA-89B3989463AA}"/>
               </a:ext>
             </a:extLst>
           </p:cNvPr>
@@ -14415,8 +17134,8 @@
         </p:nvSpPr>
         <p:spPr>
           <a:xfrm xmlns:a="http://schemas.openxmlformats.org/drawingml/2006/main">
-            <a:off x="5048250" y="1524000"/>
-            <a:ext cx="933450" cy="228600"/>
+            <a:off x="5038725" y="1504950"/>
+            <a:ext cx="895350" cy="209550"/>
           </a:xfrm>
           <a:prstGeom xmlns:a="http://schemas.openxmlformats.org/drawingml/2006/main" prst="rect">
             <a:avLst/>
@@ -14431,15 +17150,15 @@
           <a:bodyPr xmlns:a="http://schemas.openxmlformats.org/drawingml/2006/main"/>
           <a:lstStyle xmlns:a="http://schemas.openxmlformats.org/drawingml/2006/main"/>
           <a:p xmlns:a="http://schemas.openxmlformats.org/drawingml/2006/main">
-            <a:pPr algn="l">
-              <a:defRPr sz="1500" b="1">
+            <a:pPr algn="ctr">
+              <a:defRPr sz="1350" b="1">
                 <a:solidFill>
                   <a:srgbClr val="005293"/>
                 </a:solidFill>
               </a:defRPr>
             </a:pPr>
             <a:r>
-              <a:rPr sz="1500" b="1">
+              <a:rPr sz="1350" b="1">
                 <a:solidFill>
                   <a:srgbClr val="005293"/>
                 </a:solidFill>
@@ -14454,7 +17173,7 @@
           <p:cNvPr id="9" name="">
             <a:extLst xmlns:a="http://schemas.openxmlformats.org/drawingml/2006/main">
               <a:ext uri="{FF2B5EF4-FFF2-40B4-BE49-F238E27FC236}">
-                <a16:creationId xmlns:a16="http://schemas.microsoft.com/office/drawing/2014/main" id="{F2FB8C52-2B14-4ACA-88E2-01632B212680}"/>
+                <a16:creationId xmlns:a16="http://schemas.microsoft.com/office/drawing/2014/main" id="{0352C38E-890F-407F-AB2A-C826A23B804F}"/>
               </a:ext>
             </a:extLst>
           </p:cNvPr>
@@ -14465,7 +17184,7 @@
         </p:nvSpPr>
         <p:spPr>
           <a:xfrm xmlns:a="http://schemas.openxmlformats.org/drawingml/2006/main">
-            <a:off x="5048250" y="1790700"/>
+            <a:off x="5019675" y="1762125"/>
             <a:ext cx="933450" cy="209550"/>
           </a:xfrm>
           <a:prstGeom xmlns:a="http://schemas.openxmlformats.org/drawingml/2006/main" prst="rect">
@@ -14481,20 +17200,20 @@
           <a:bodyPr xmlns:a="http://schemas.openxmlformats.org/drawingml/2006/main"/>
           <a:lstStyle xmlns:a="http://schemas.openxmlformats.org/drawingml/2006/main"/>
           <a:p xmlns:a="http://schemas.openxmlformats.org/drawingml/2006/main">
-            <a:pPr algn="l">
-              <a:defRPr sz="788" b="0">
+            <a:pPr algn="ctr">
+              <a:defRPr sz="720" b="0">
                 <a:solidFill>
                   <a:srgbClr val="000000"/>
                 </a:solidFill>
               </a:defRPr>
             </a:pPr>
             <a:r>
-              <a:rPr sz="788" b="0">
+              <a:rPr sz="720" b="0">
                 <a:solidFill>
                   <a:srgbClr val="000000"/>
                 </a:solidFill>
               </a:rPr>
-              <a:t>train rows</a:t>
+              <a:t>training interactions</a:t>
             </a:r>
           </a:p>
         </p:txBody>
@@ -14504,7 +17223,7 @@
           <p:cNvPr id="10" name="">
             <a:extLst xmlns:a="http://schemas.openxmlformats.org/drawingml/2006/main">
               <a:ext uri="{FF2B5EF4-FFF2-40B4-BE49-F238E27FC236}">
-                <a16:creationId xmlns:a16="http://schemas.microsoft.com/office/drawing/2014/main" id="{20D337F0-CD6A-416A-A68F-A710C8DF5C66}"/>
+                <a16:creationId xmlns:a16="http://schemas.microsoft.com/office/drawing/2014/main" id="{9D2E7591-D035-4E50-B1A2-9C21BABE0B1C}"/>
               </a:ext>
             </a:extLst>
           </p:cNvPr>
@@ -14515,8 +17234,8 @@
         </p:nvSpPr>
         <p:spPr>
           <a:xfrm xmlns:a="http://schemas.openxmlformats.org/drawingml/2006/main">
-            <a:off x="6286500" y="1428750"/>
-            <a:ext cx="1123950" cy="666750"/>
+            <a:off x="6191250" y="1409700"/>
+            <a:ext cx="1066800" cy="628650"/>
           </a:xfrm>
           <a:prstGeom xmlns:a="http://schemas.openxmlformats.org/drawingml/2006/main" prst="rect">
             <a:avLst/>
@@ -14537,7 +17256,7 @@
           <p:cNvPr id="11" name="">
             <a:extLst xmlns:a="http://schemas.openxmlformats.org/drawingml/2006/main">
               <a:ext uri="{FF2B5EF4-FFF2-40B4-BE49-F238E27FC236}">
-                <a16:creationId xmlns:a16="http://schemas.microsoft.com/office/drawing/2014/main" id="{BE10B7A0-5D90-439E-B841-1A94AF796A75}"/>
+                <a16:creationId xmlns:a16="http://schemas.microsoft.com/office/drawing/2014/main" id="{F5D4C901-E482-43ED-9107-FE8FF2E7BD3E}"/>
               </a:ext>
             </a:extLst>
           </p:cNvPr>
@@ -14548,8 +17267,8 @@
         </p:nvSpPr>
         <p:spPr>
           <a:xfrm xmlns:a="http://schemas.openxmlformats.org/drawingml/2006/main">
-            <a:off x="6381750" y="1524000"/>
-            <a:ext cx="933450" cy="228600"/>
+            <a:off x="6276975" y="1504950"/>
+            <a:ext cx="895350" cy="209550"/>
           </a:xfrm>
           <a:prstGeom xmlns:a="http://schemas.openxmlformats.org/drawingml/2006/main" prst="rect">
             <a:avLst/>
@@ -14564,15 +17283,15 @@
           <a:bodyPr xmlns:a="http://schemas.openxmlformats.org/drawingml/2006/main"/>
           <a:lstStyle xmlns:a="http://schemas.openxmlformats.org/drawingml/2006/main"/>
           <a:p xmlns:a="http://schemas.openxmlformats.org/drawingml/2006/main">
-            <a:pPr algn="l">
-              <a:defRPr sz="1500" b="1">
+            <a:pPr algn="ctr">
+              <a:defRPr sz="1350" b="1">
                 <a:solidFill>
                   <a:srgbClr val="005293"/>
                 </a:solidFill>
               </a:defRPr>
             </a:pPr>
             <a:r>
-              <a:rPr sz="1500" b="1">
+              <a:rPr sz="1350" b="1">
                 <a:solidFill>
                   <a:srgbClr val="005293"/>
                 </a:solidFill>
@@ -14587,7 +17306,7 @@
           <p:cNvPr id="12" name="">
             <a:extLst xmlns:a="http://schemas.openxmlformats.org/drawingml/2006/main">
               <a:ext uri="{FF2B5EF4-FFF2-40B4-BE49-F238E27FC236}">
-                <a16:creationId xmlns:a16="http://schemas.microsoft.com/office/drawing/2014/main" id="{3C6AA587-2222-441B-8027-943AF3A6A98A}"/>
+                <a16:creationId xmlns:a16="http://schemas.microsoft.com/office/drawing/2014/main" id="{2F34BB25-76F8-49E7-9362-7D19C7529A2B}"/>
               </a:ext>
             </a:extLst>
           </p:cNvPr>
@@ -14598,7 +17317,7 @@
         </p:nvSpPr>
         <p:spPr>
           <a:xfrm xmlns:a="http://schemas.openxmlformats.org/drawingml/2006/main">
-            <a:off x="6381750" y="1790700"/>
+            <a:off x="6257925" y="1762125"/>
             <a:ext cx="933450" cy="209550"/>
           </a:xfrm>
           <a:prstGeom xmlns:a="http://schemas.openxmlformats.org/drawingml/2006/main" prst="rect">
@@ -14614,15 +17333,15 @@
           <a:bodyPr xmlns:a="http://schemas.openxmlformats.org/drawingml/2006/main"/>
           <a:lstStyle xmlns:a="http://schemas.openxmlformats.org/drawingml/2006/main"/>
           <a:p xmlns:a="http://schemas.openxmlformats.org/drawingml/2006/main">
-            <a:pPr algn="l">
-              <a:defRPr sz="788" b="0">
+            <a:pPr algn="ctr">
+              <a:defRPr sz="720" b="0">
                 <a:solidFill>
                   <a:srgbClr val="000000"/>
                 </a:solidFill>
               </a:defRPr>
             </a:pPr>
             <a:r>
-              <a:rPr sz="788" b="0">
+              <a:rPr sz="720" b="0">
                 <a:solidFill>
                   <a:srgbClr val="000000"/>
                 </a:solidFill>
@@ -14637,7 +17356,7 @@
           <p:cNvPr id="13" name="">
             <a:extLst xmlns:a="http://schemas.openxmlformats.org/drawingml/2006/main">
               <a:ext uri="{FF2B5EF4-FFF2-40B4-BE49-F238E27FC236}">
-                <a16:creationId xmlns:a16="http://schemas.microsoft.com/office/drawing/2014/main" id="{4B922DC8-FF76-4568-B877-F147EEE9F165}"/>
+                <a16:creationId xmlns:a16="http://schemas.microsoft.com/office/drawing/2014/main" id="{F3507145-C4BC-4F05-9D69-F9BF617799D1}"/>
               </a:ext>
             </a:extLst>
           </p:cNvPr>
@@ -14648,8 +17367,8 @@
         </p:nvSpPr>
         <p:spPr>
           <a:xfrm xmlns:a="http://schemas.openxmlformats.org/drawingml/2006/main">
-            <a:off x="7620000" y="1428750"/>
-            <a:ext cx="1123950" cy="666750"/>
+            <a:off x="7429500" y="1409700"/>
+            <a:ext cx="1066800" cy="628650"/>
           </a:xfrm>
           <a:prstGeom xmlns:a="http://schemas.openxmlformats.org/drawingml/2006/main" prst="rect">
             <a:avLst/>
@@ -14670,7 +17389,7 @@
           <p:cNvPr id="14" name="">
             <a:extLst xmlns:a="http://schemas.openxmlformats.org/drawingml/2006/main">
               <a:ext uri="{FF2B5EF4-FFF2-40B4-BE49-F238E27FC236}">
-                <a16:creationId xmlns:a16="http://schemas.microsoft.com/office/drawing/2014/main" id="{8B37B74C-55BE-4FB2-A399-EFFA967B7664}"/>
+                <a16:creationId xmlns:a16="http://schemas.microsoft.com/office/drawing/2014/main" id="{84D0B745-86CB-4219-9D54-42E93D16320C}"/>
               </a:ext>
             </a:extLst>
           </p:cNvPr>
@@ -14681,8 +17400,8 @@
         </p:nvSpPr>
         <p:spPr>
           <a:xfrm xmlns:a="http://schemas.openxmlformats.org/drawingml/2006/main">
-            <a:off x="7715250" y="1524000"/>
-            <a:ext cx="933450" cy="228600"/>
+            <a:off x="7515225" y="1504950"/>
+            <a:ext cx="895350" cy="209550"/>
           </a:xfrm>
           <a:prstGeom xmlns:a="http://schemas.openxmlformats.org/drawingml/2006/main" prst="rect">
             <a:avLst/>
@@ -14697,20 +17416,20 @@
           <a:bodyPr xmlns:a="http://schemas.openxmlformats.org/drawingml/2006/main"/>
           <a:lstStyle xmlns:a="http://schemas.openxmlformats.org/drawingml/2006/main"/>
           <a:p xmlns:a="http://schemas.openxmlformats.org/drawingml/2006/main">
-            <a:pPr algn="l">
-              <a:defRPr sz="1500" b="1">
+            <a:pPr algn="ctr">
+              <a:defRPr sz="1350" b="1">
                 <a:solidFill>
                   <a:srgbClr val="005293"/>
                 </a:solidFill>
               </a:defRPr>
             </a:pPr>
             <a:r>
-              <a:rPr sz="1500" b="1">
+              <a:rPr sz="1350" b="1">
                 <a:solidFill>
                   <a:srgbClr val="005293"/>
                 </a:solidFill>
               </a:rPr>
-              <a:t>0.311</a:t>
+              <a:t>0.31-0.93</a:t>
             </a:r>
           </a:p>
         </p:txBody>
@@ -14720,7 +17439,7 @@
           <p:cNvPr id="15" name="">
             <a:extLst xmlns:a="http://schemas.openxmlformats.org/drawingml/2006/main">
               <a:ext uri="{FF2B5EF4-FFF2-40B4-BE49-F238E27FC236}">
-                <a16:creationId xmlns:a16="http://schemas.microsoft.com/office/drawing/2014/main" id="{205F0CA9-F5CC-42BC-A1F0-E57AE1855073}"/>
+                <a16:creationId xmlns:a16="http://schemas.microsoft.com/office/drawing/2014/main" id="{B7314546-EB7C-4A18-8482-177F068831FE}"/>
               </a:ext>
             </a:extLst>
           </p:cNvPr>
@@ -14731,7 +17450,7 @@
         </p:nvSpPr>
         <p:spPr>
           <a:xfrm xmlns:a="http://schemas.openxmlformats.org/drawingml/2006/main">
-            <a:off x="7715250" y="1790700"/>
+            <a:off x="7496175" y="1762125"/>
             <a:ext cx="933450" cy="209550"/>
           </a:xfrm>
           <a:prstGeom xmlns:a="http://schemas.openxmlformats.org/drawingml/2006/main" prst="rect">
@@ -14747,20 +17466,20 @@
           <a:bodyPr xmlns:a="http://schemas.openxmlformats.org/drawingml/2006/main"/>
           <a:lstStyle xmlns:a="http://schemas.openxmlformats.org/drawingml/2006/main"/>
           <a:p xmlns:a="http://schemas.openxmlformats.org/drawingml/2006/main">
-            <a:pPr algn="l">
-              <a:defRPr sz="788" b="0">
+            <a:pPr algn="ctr">
+              <a:defRPr sz="720" b="0">
                 <a:solidFill>
                   <a:srgbClr val="000000"/>
                 </a:solidFill>
               </a:defRPr>
             </a:pPr>
             <a:r>
-              <a:rPr sz="788" b="0">
+              <a:rPr sz="720" b="0">
                 <a:solidFill>
                   <a:srgbClr val="000000"/>
                 </a:solidFill>
               </a:rPr>
-              <a:t>support p5</a:t>
+              <a:t>logged range p5-p95</a:t>
             </a:r>
           </a:p>
         </p:txBody>
@@ -14770,7 +17489,7 @@
           <p:cNvPr id="16" name="">
             <a:extLst xmlns:a="http://schemas.openxmlformats.org/drawingml/2006/main">
               <a:ext uri="{FF2B5EF4-FFF2-40B4-BE49-F238E27FC236}">
-                <a16:creationId xmlns:a16="http://schemas.microsoft.com/office/drawing/2014/main" id="{F2FE1F1D-9D9F-4BEB-A572-4BB7CB7E58DE}"/>
+                <a16:creationId xmlns:a16="http://schemas.microsoft.com/office/drawing/2014/main" id="{1F521606-A594-4E6B-86A1-F447E8B7BFD5}"/>
               </a:ext>
             </a:extLst>
           </p:cNvPr>
@@ -14781,8 +17500,8 @@
         </p:nvSpPr>
         <p:spPr>
           <a:xfrm xmlns:a="http://schemas.openxmlformats.org/drawingml/2006/main">
-            <a:off x="4953000" y="2476500"/>
-            <a:ext cx="3381375" cy="781050"/>
+            <a:off x="4953000" y="2428875"/>
+            <a:ext cx="3381375" cy="714375"/>
           </a:xfrm>
           <a:prstGeom xmlns:a="http://schemas.openxmlformats.org/drawingml/2006/main" prst="rect">
             <a:avLst/>
@@ -14798,19 +17517,19 @@
           <a:lstStyle xmlns:a="http://schemas.openxmlformats.org/drawingml/2006/main"/>
           <a:p xmlns:a="http://schemas.openxmlformats.org/drawingml/2006/main">
             <a:pPr algn="l">
-              <a:defRPr sz="1200" b="0">
+              <a:defRPr sz="1125" b="0">
                 <a:solidFill>
                   <a:srgbClr val="000000"/>
                 </a:solidFill>
               </a:defRPr>
             </a:pPr>
             <a:r>
-              <a:rPr sz="1200" b="0">
+              <a:rPr sz="1125" b="0">
                 <a:solidFill>
                   <a:srgbClr val="000000"/>
                 </a:solidFill>
               </a:rPr>
-              <a:t>The formulation is intentionally simple: first-offer support is evaluated before claiming policy quality.</a:t>
+              <a:t>The formulation is intentionally simple: first-offer support is evaluated before policy quality is claimed.</a:t>
             </a:r>
           </a:p>
         </p:txBody>
@@ -14948,7 +17667,7 @@
           <a:lstStyle xmlns:a="http://schemas.openxmlformats.org/drawingml/2006/main"/>
           <a:p xmlns:a="http://schemas.openxmlformats.org/drawingml/2006/main">
             <a:r>
-              <a:t>eBay Best Offer anchoring RL | Why / How / What</a:t>
+              <a:t>eBay Best Offer anchoring RL | Advanced Seminar (WIHN0043SE)</a:t>
             </a:r>
           </a:p>
         </p:txBody>
@@ -14985,7 +17704,7 @@
           <p:cNvPr id="7" name="">
             <a:extLst xmlns:a="http://schemas.openxmlformats.org/drawingml/2006/main">
               <a:ext uri="{FF2B5EF4-FFF2-40B4-BE49-F238E27FC236}">
-                <a16:creationId xmlns:a16="http://schemas.microsoft.com/office/drawing/2014/main" id="{3694BF57-AB0F-4F86-BEA2-E4EAE835E403}"/>
+                <a16:creationId xmlns:a16="http://schemas.microsoft.com/office/drawing/2014/main" id="{72924A99-9BAD-471B-971D-897E6F2B2D97}"/>
               </a:ext>
             </a:extLst>
           </p:cNvPr>
@@ -15018,7 +17737,7 @@
           <p:cNvPr id="8" name="">
             <a:extLst xmlns:a="http://schemas.openxmlformats.org/drawingml/2006/main">
               <a:ext uri="{FF2B5EF4-FFF2-40B4-BE49-F238E27FC236}">
-                <a16:creationId xmlns:a16="http://schemas.microsoft.com/office/drawing/2014/main" id="{9740568A-B654-43EA-BC10-B98E6CD12BD2}"/>
+                <a16:creationId xmlns:a16="http://schemas.microsoft.com/office/drawing/2014/main" id="{A90139CC-8F03-4BB6-8759-7F85625970DB}"/>
               </a:ext>
             </a:extLst>
           </p:cNvPr>
@@ -15029,8 +17748,8 @@
         </p:nvSpPr>
         <p:spPr>
           <a:xfrm xmlns:a="http://schemas.openxmlformats.org/drawingml/2006/main">
-            <a:off x="4819650" y="1409700"/>
-            <a:ext cx="819150" cy="228600"/>
+            <a:off x="4810125" y="1409700"/>
+            <a:ext cx="828675" cy="190500"/>
           </a:xfrm>
           <a:prstGeom xmlns:a="http://schemas.openxmlformats.org/drawingml/2006/main" prst="rect">
             <a:avLst/>
@@ -15046,14 +17765,14 @@
           <a:lstStyle xmlns:a="http://schemas.openxmlformats.org/drawingml/2006/main"/>
           <a:p xmlns:a="http://schemas.openxmlformats.org/drawingml/2006/main">
             <a:pPr algn="l">
-              <a:defRPr sz="765" b="1">
+              <a:defRPr sz="713" b="1">
                 <a:solidFill>
                   <a:srgbClr val="FFFFFF"/>
                 </a:solidFill>
               </a:defRPr>
             </a:pPr>
             <a:r>
-              <a:rPr sz="765" b="1">
+              <a:rPr sz="713" b="1">
                 <a:solidFill>
                   <a:srgbClr val="FFFFFF"/>
                 </a:solidFill>
@@ -15068,7 +17787,7 @@
           <p:cNvPr id="9" name="">
             <a:extLst xmlns:a="http://schemas.openxmlformats.org/drawingml/2006/main">
               <a:ext uri="{FF2B5EF4-FFF2-40B4-BE49-F238E27FC236}">
-                <a16:creationId xmlns:a16="http://schemas.microsoft.com/office/drawing/2014/main" id="{D5EB6A4D-AC6D-4280-BADC-79CBA641DA4B}"/>
+                <a16:creationId xmlns:a16="http://schemas.microsoft.com/office/drawing/2014/main" id="{7BA3029A-45B2-4971-A216-0ED172A6B0FB}"/>
               </a:ext>
             </a:extLst>
           </p:cNvPr>
@@ -15099,7 +17818,7 @@
           <p:cNvPr id="10" name="">
             <a:extLst xmlns:a="http://schemas.openxmlformats.org/drawingml/2006/main">
               <a:ext uri="{FF2B5EF4-FFF2-40B4-BE49-F238E27FC236}">
-                <a16:creationId xmlns:a16="http://schemas.microsoft.com/office/drawing/2014/main" id="{67B6457C-C5D7-4D6D-8414-CA461033A15E}"/>
+                <a16:creationId xmlns:a16="http://schemas.microsoft.com/office/drawing/2014/main" id="{7AE60E45-95F8-4A27-90F2-82181A9B41D5}"/>
               </a:ext>
             </a:extLst>
           </p:cNvPr>
@@ -15110,8 +17829,8 @@
         </p:nvSpPr>
         <p:spPr>
           <a:xfrm xmlns:a="http://schemas.openxmlformats.org/drawingml/2006/main">
-            <a:off x="5734050" y="1409700"/>
-            <a:ext cx="952500" cy="228600"/>
+            <a:off x="5724525" y="1409700"/>
+            <a:ext cx="962025" cy="190500"/>
           </a:xfrm>
           <a:prstGeom xmlns:a="http://schemas.openxmlformats.org/drawingml/2006/main" prst="rect">
             <a:avLst/>
@@ -15127,14 +17846,14 @@
           <a:lstStyle xmlns:a="http://schemas.openxmlformats.org/drawingml/2006/main"/>
           <a:p xmlns:a="http://schemas.openxmlformats.org/drawingml/2006/main">
             <a:pPr algn="l">
-              <a:defRPr sz="765" b="1">
+              <a:defRPr sz="713" b="1">
                 <a:solidFill>
                   <a:srgbClr val="FFFFFF"/>
                 </a:solidFill>
               </a:defRPr>
             </a:pPr>
             <a:r>
-              <a:rPr sz="765" b="1">
+              <a:rPr sz="713" b="1">
                 <a:solidFill>
                   <a:srgbClr val="FFFFFF"/>
                 </a:solidFill>
@@ -15149,7 +17868,7 @@
           <p:cNvPr id="11" name="">
             <a:extLst xmlns:a="http://schemas.openxmlformats.org/drawingml/2006/main">
               <a:ext uri="{FF2B5EF4-FFF2-40B4-BE49-F238E27FC236}">
-                <a16:creationId xmlns:a16="http://schemas.microsoft.com/office/drawing/2014/main" id="{36C4BC3A-794B-473E-9A98-378D8E0A1927}"/>
+                <a16:creationId xmlns:a16="http://schemas.microsoft.com/office/drawing/2014/main" id="{582B301A-9B0F-4464-811D-157449B7A958}"/>
               </a:ext>
             </a:extLst>
           </p:cNvPr>
@@ -15180,7 +17899,7 @@
           <p:cNvPr id="12" name="">
             <a:extLst xmlns:a="http://schemas.openxmlformats.org/drawingml/2006/main">
               <a:ext uri="{FF2B5EF4-FFF2-40B4-BE49-F238E27FC236}">
-                <a16:creationId xmlns:a16="http://schemas.microsoft.com/office/drawing/2014/main" id="{3EE0636D-5866-4A97-B08A-FE8F3BFC134A}"/>
+                <a16:creationId xmlns:a16="http://schemas.microsoft.com/office/drawing/2014/main" id="{D0364D87-4847-4BAB-8AEA-0BF9EB9BA6DE}"/>
               </a:ext>
             </a:extLst>
           </p:cNvPr>
@@ -15191,8 +17910,8 @@
         </p:nvSpPr>
         <p:spPr>
           <a:xfrm xmlns:a="http://schemas.openxmlformats.org/drawingml/2006/main">
-            <a:off x="6781800" y="1409700"/>
-            <a:ext cx="1619250" cy="228600"/>
+            <a:off x="6772275" y="1409700"/>
+            <a:ext cx="1628775" cy="190500"/>
           </a:xfrm>
           <a:prstGeom xmlns:a="http://schemas.openxmlformats.org/drawingml/2006/main" prst="rect">
             <a:avLst/>
@@ -15208,14 +17927,14 @@
           <a:lstStyle xmlns:a="http://schemas.openxmlformats.org/drawingml/2006/main"/>
           <a:p xmlns:a="http://schemas.openxmlformats.org/drawingml/2006/main">
             <a:pPr algn="l">
-              <a:defRPr sz="765" b="1">
+              <a:defRPr sz="713" b="1">
                 <a:solidFill>
                   <a:srgbClr val="FFFFFF"/>
                 </a:solidFill>
               </a:defRPr>
             </a:pPr>
             <a:r>
-              <a:rPr sz="765" b="1">
+              <a:rPr sz="713" b="1">
                 <a:solidFill>
                   <a:srgbClr val="FFFFFF"/>
                 </a:solidFill>
@@ -15230,7 +17949,7 @@
           <p:cNvPr id="13" name="">
             <a:extLst xmlns:a="http://schemas.openxmlformats.org/drawingml/2006/main">
               <a:ext uri="{FF2B5EF4-FFF2-40B4-BE49-F238E27FC236}">
-                <a16:creationId xmlns:a16="http://schemas.microsoft.com/office/drawing/2014/main" id="{B40B6008-0513-466D-89F4-A5D6FDBE32E1}"/>
+                <a16:creationId xmlns:a16="http://schemas.microsoft.com/office/drawing/2014/main" id="{B1B53416-1462-423F-AC6D-42855E89AD89}"/>
               </a:ext>
             </a:extLst>
           </p:cNvPr>
@@ -15263,7 +17982,7 @@
           <p:cNvPr id="14" name="">
             <a:extLst xmlns:a="http://schemas.openxmlformats.org/drawingml/2006/main">
               <a:ext uri="{FF2B5EF4-FFF2-40B4-BE49-F238E27FC236}">
-                <a16:creationId xmlns:a16="http://schemas.microsoft.com/office/drawing/2014/main" id="{52E3AD3E-7412-4FB4-8DCF-AF1AB3F10CDB}"/>
+                <a16:creationId xmlns:a16="http://schemas.microsoft.com/office/drawing/2014/main" id="{4FE3BF30-BD23-4C5A-8B3F-1E6FA6790C58}"/>
               </a:ext>
             </a:extLst>
           </p:cNvPr>
@@ -15274,8 +17993,8 @@
         </p:nvSpPr>
         <p:spPr>
           <a:xfrm xmlns:a="http://schemas.openxmlformats.org/drawingml/2006/main">
-            <a:off x="4819650" y="1695450"/>
-            <a:ext cx="819150" cy="228600"/>
+            <a:off x="4810125" y="1685925"/>
+            <a:ext cx="828675" cy="323850"/>
           </a:xfrm>
           <a:prstGeom xmlns:a="http://schemas.openxmlformats.org/drawingml/2006/main" prst="rect">
             <a:avLst/>
@@ -15291,14 +18010,14 @@
           <a:lstStyle xmlns:a="http://schemas.openxmlformats.org/drawingml/2006/main"/>
           <a:p xmlns:a="http://schemas.openxmlformats.org/drawingml/2006/main">
             <a:pPr algn="l">
-              <a:defRPr sz="728" b="0">
+              <a:defRPr sz="713" b="0">
                 <a:solidFill>
                   <a:srgbClr val="000000"/>
                 </a:solidFill>
               </a:defRPr>
             </a:pPr>
             <a:r>
-              <a:rPr sz="728" b="0">
+              <a:rPr sz="713" b="0">
                 <a:solidFill>
                   <a:srgbClr val="000000"/>
                 </a:solidFill>
@@ -15313,7 +18032,7 @@
           <p:cNvPr id="15" name="">
             <a:extLst xmlns:a="http://schemas.openxmlformats.org/drawingml/2006/main">
               <a:ext uri="{FF2B5EF4-FFF2-40B4-BE49-F238E27FC236}">
-                <a16:creationId xmlns:a16="http://schemas.microsoft.com/office/drawing/2014/main" id="{B1699F3A-FF0B-48FB-B8A4-86243C48F84B}"/>
+                <a16:creationId xmlns:a16="http://schemas.microsoft.com/office/drawing/2014/main" id="{6DEAB828-E50B-4004-9E61-5A1B551D173B}"/>
               </a:ext>
             </a:extLst>
           </p:cNvPr>
@@ -15344,7 +18063,7 @@
           <p:cNvPr id="16" name="">
             <a:extLst xmlns:a="http://schemas.openxmlformats.org/drawingml/2006/main">
               <a:ext uri="{FF2B5EF4-FFF2-40B4-BE49-F238E27FC236}">
-                <a16:creationId xmlns:a16="http://schemas.microsoft.com/office/drawing/2014/main" id="{D1E9EC40-1F27-419A-BB8B-A563F79A5438}"/>
+                <a16:creationId xmlns:a16="http://schemas.microsoft.com/office/drawing/2014/main" id="{0A6BDC77-BC4F-4F18-A090-D75DB02210F7}"/>
               </a:ext>
             </a:extLst>
           </p:cNvPr>
@@ -15355,8 +18074,8 @@
         </p:nvSpPr>
         <p:spPr>
           <a:xfrm xmlns:a="http://schemas.openxmlformats.org/drawingml/2006/main">
-            <a:off x="5734050" y="1695450"/>
-            <a:ext cx="952500" cy="228600"/>
+            <a:off x="5724525" y="1685925"/>
+            <a:ext cx="962025" cy="323850"/>
           </a:xfrm>
           <a:prstGeom xmlns:a="http://schemas.openxmlformats.org/drawingml/2006/main" prst="rect">
             <a:avLst/>
@@ -15372,14 +18091,14 @@
           <a:lstStyle xmlns:a="http://schemas.openxmlformats.org/drawingml/2006/main"/>
           <a:p xmlns:a="http://schemas.openxmlformats.org/drawingml/2006/main">
             <a:pPr algn="l">
-              <a:defRPr sz="728" b="1">
+              <a:defRPr sz="713" b="1">
                 <a:solidFill>
                   <a:srgbClr val="000000"/>
                 </a:solidFill>
               </a:defRPr>
             </a:pPr>
             <a:r>
-              <a:rPr sz="728" b="1">
+              <a:rPr sz="713" b="1">
                 <a:solidFill>
                   <a:srgbClr val="000000"/>
                 </a:solidFill>
@@ -15394,7 +18113,7 @@
           <p:cNvPr id="17" name="">
             <a:extLst xmlns:a="http://schemas.openxmlformats.org/drawingml/2006/main">
               <a:ext uri="{FF2B5EF4-FFF2-40B4-BE49-F238E27FC236}">
-                <a16:creationId xmlns:a16="http://schemas.microsoft.com/office/drawing/2014/main" id="{79070675-FC3A-4F61-B1F3-90757B078567}"/>
+                <a16:creationId xmlns:a16="http://schemas.microsoft.com/office/drawing/2014/main" id="{5AB6B486-6E29-4195-9774-EE20796A3D62}"/>
               </a:ext>
             </a:extLst>
           </p:cNvPr>
@@ -15425,7 +18144,7 @@
           <p:cNvPr id="18" name="">
             <a:extLst xmlns:a="http://schemas.openxmlformats.org/drawingml/2006/main">
               <a:ext uri="{FF2B5EF4-FFF2-40B4-BE49-F238E27FC236}">
-                <a16:creationId xmlns:a16="http://schemas.microsoft.com/office/drawing/2014/main" id="{076F8397-79F5-4A3B-9E64-D0F807606DF8}"/>
+                <a16:creationId xmlns:a16="http://schemas.microsoft.com/office/drawing/2014/main" id="{A8087991-DFC3-4F78-B3E5-2AF4164F1A9D}"/>
               </a:ext>
             </a:extLst>
           </p:cNvPr>
@@ -15436,8 +18155,8 @@
         </p:nvSpPr>
         <p:spPr>
           <a:xfrm xmlns:a="http://schemas.openxmlformats.org/drawingml/2006/main">
-            <a:off x="6781800" y="1695450"/>
-            <a:ext cx="1619250" cy="228600"/>
+            <a:off x="6772275" y="1685925"/>
+            <a:ext cx="1628775" cy="323850"/>
           </a:xfrm>
           <a:prstGeom xmlns:a="http://schemas.openxmlformats.org/drawingml/2006/main" prst="rect">
             <a:avLst/>
@@ -15453,14 +18172,14 @@
           <a:lstStyle xmlns:a="http://schemas.openxmlformats.org/drawingml/2006/main"/>
           <a:p xmlns:a="http://schemas.openxmlformats.org/drawingml/2006/main">
             <a:pPr algn="l">
-              <a:defRPr sz="728" b="0">
+              <a:defRPr sz="713" b="0">
                 <a:solidFill>
                   <a:srgbClr val="000000"/>
                 </a:solidFill>
               </a:defRPr>
             </a:pPr>
             <a:r>
-              <a:rPr sz="728" b="0">
+              <a:rPr sz="713" b="0">
                 <a:solidFill>
                   <a:srgbClr val="000000"/>
                 </a:solidFill>
@@ -15475,7 +18194,7 @@
           <p:cNvPr id="19" name="">
             <a:extLst xmlns:a="http://schemas.openxmlformats.org/drawingml/2006/main">
               <a:ext uri="{FF2B5EF4-FFF2-40B4-BE49-F238E27FC236}">
-                <a16:creationId xmlns:a16="http://schemas.microsoft.com/office/drawing/2014/main" id="{A47792D9-B728-4904-9780-7D92CAEED603}"/>
+                <a16:creationId xmlns:a16="http://schemas.microsoft.com/office/drawing/2014/main" id="{C96A93DE-0A27-4A2B-8FDF-142ACF5968C1}"/>
               </a:ext>
             </a:extLst>
           </p:cNvPr>
@@ -15508,7 +18227,7 @@
           <p:cNvPr id="20" name="">
             <a:extLst xmlns:a="http://schemas.openxmlformats.org/drawingml/2006/main">
               <a:ext uri="{FF2B5EF4-FFF2-40B4-BE49-F238E27FC236}">
-                <a16:creationId xmlns:a16="http://schemas.microsoft.com/office/drawing/2014/main" id="{1FEEC272-13D4-4D46-98E1-381A9DB34319}"/>
+                <a16:creationId xmlns:a16="http://schemas.microsoft.com/office/drawing/2014/main" id="{534B7DD2-ADBA-431A-A607-0FCF157683CA}"/>
               </a:ext>
             </a:extLst>
           </p:cNvPr>
@@ -15519,8 +18238,8 @@
         </p:nvSpPr>
         <p:spPr>
           <a:xfrm xmlns:a="http://schemas.openxmlformats.org/drawingml/2006/main">
-            <a:off x="4819650" y="2095500"/>
-            <a:ext cx="819150" cy="228600"/>
+            <a:off x="4810125" y="2085975"/>
+            <a:ext cx="828675" cy="323850"/>
           </a:xfrm>
           <a:prstGeom xmlns:a="http://schemas.openxmlformats.org/drawingml/2006/main" prst="rect">
             <a:avLst/>
@@ -15536,14 +18255,14 @@
           <a:lstStyle xmlns:a="http://schemas.openxmlformats.org/drawingml/2006/main"/>
           <a:p xmlns:a="http://schemas.openxmlformats.org/drawingml/2006/main">
             <a:pPr algn="l">
-              <a:defRPr sz="728" b="0">
+              <a:defRPr sz="713" b="0">
                 <a:solidFill>
                   <a:srgbClr val="000000"/>
                 </a:solidFill>
               </a:defRPr>
             </a:pPr>
             <a:r>
-              <a:rPr sz="728" b="0">
+              <a:rPr sz="713" b="0">
                 <a:solidFill>
                   <a:srgbClr val="000000"/>
                 </a:solidFill>
@@ -15558,7 +18277,7 @@
           <p:cNvPr id="21" name="">
             <a:extLst xmlns:a="http://schemas.openxmlformats.org/drawingml/2006/main">
               <a:ext uri="{FF2B5EF4-FFF2-40B4-BE49-F238E27FC236}">
-                <a16:creationId xmlns:a16="http://schemas.microsoft.com/office/drawing/2014/main" id="{AFA00F3C-D154-4FC3-B90E-0F066A11C277}"/>
+                <a16:creationId xmlns:a16="http://schemas.microsoft.com/office/drawing/2014/main" id="{40396CE9-002B-4C9E-ACBF-D9DD3BE720C0}"/>
               </a:ext>
             </a:extLst>
           </p:cNvPr>
@@ -15589,7 +18308,7 @@
           <p:cNvPr id="22" name="">
             <a:extLst xmlns:a="http://schemas.openxmlformats.org/drawingml/2006/main">
               <a:ext uri="{FF2B5EF4-FFF2-40B4-BE49-F238E27FC236}">
-                <a16:creationId xmlns:a16="http://schemas.microsoft.com/office/drawing/2014/main" id="{8E0C5C30-F3DF-4354-A5BD-294DB3FAE4D8}"/>
+                <a16:creationId xmlns:a16="http://schemas.microsoft.com/office/drawing/2014/main" id="{DDB64B30-2669-48C6-AD01-9D9B109837B4}"/>
               </a:ext>
             </a:extLst>
           </p:cNvPr>
@@ -15600,8 +18319,8 @@
         </p:nvSpPr>
         <p:spPr>
           <a:xfrm xmlns:a="http://schemas.openxmlformats.org/drawingml/2006/main">
-            <a:off x="5734050" y="2095500"/>
-            <a:ext cx="952500" cy="228600"/>
+            <a:off x="5724525" y="2085975"/>
+            <a:ext cx="962025" cy="323850"/>
           </a:xfrm>
           <a:prstGeom xmlns:a="http://schemas.openxmlformats.org/drawingml/2006/main" prst="rect">
             <a:avLst/>
@@ -15617,14 +18336,14 @@
           <a:lstStyle xmlns:a="http://schemas.openxmlformats.org/drawingml/2006/main"/>
           <a:p xmlns:a="http://schemas.openxmlformats.org/drawingml/2006/main">
             <a:pPr algn="l">
-              <a:defRPr sz="728" b="1">
+              <a:defRPr sz="713" b="1">
                 <a:solidFill>
                   <a:srgbClr val="000000"/>
                 </a:solidFill>
               </a:defRPr>
             </a:pPr>
             <a:r>
-              <a:rPr sz="728" b="1">
+              <a:rPr sz="713" b="1">
                 <a:solidFill>
                   <a:srgbClr val="000000"/>
                 </a:solidFill>
@@ -15639,7 +18358,7 @@
           <p:cNvPr id="23" name="">
             <a:extLst xmlns:a="http://schemas.openxmlformats.org/drawingml/2006/main">
               <a:ext uri="{FF2B5EF4-FFF2-40B4-BE49-F238E27FC236}">
-                <a16:creationId xmlns:a16="http://schemas.microsoft.com/office/drawing/2014/main" id="{0E0CF950-7899-4B4D-80A3-A3F7AA52004B}"/>
+                <a16:creationId xmlns:a16="http://schemas.microsoft.com/office/drawing/2014/main" id="{32E085E8-4DE9-44FE-AA3F-5198452855FA}"/>
               </a:ext>
             </a:extLst>
           </p:cNvPr>
@@ -15670,7 +18389,7 @@
           <p:cNvPr id="24" name="">
             <a:extLst xmlns:a="http://schemas.openxmlformats.org/drawingml/2006/main">
               <a:ext uri="{FF2B5EF4-FFF2-40B4-BE49-F238E27FC236}">
-                <a16:creationId xmlns:a16="http://schemas.microsoft.com/office/drawing/2014/main" id="{98D9BFC4-CF7D-48AC-B34A-5567B432B0EF}"/>
+                <a16:creationId xmlns:a16="http://schemas.microsoft.com/office/drawing/2014/main" id="{19B9BFF7-8859-401A-B898-4F4CA6D3B26D}"/>
               </a:ext>
             </a:extLst>
           </p:cNvPr>
@@ -15681,8 +18400,8 @@
         </p:nvSpPr>
         <p:spPr>
           <a:xfrm xmlns:a="http://schemas.openxmlformats.org/drawingml/2006/main">
-            <a:off x="6781800" y="2095500"/>
-            <a:ext cx="1619250" cy="228600"/>
+            <a:off x="6772275" y="2085975"/>
+            <a:ext cx="1628775" cy="323850"/>
           </a:xfrm>
           <a:prstGeom xmlns:a="http://schemas.openxmlformats.org/drawingml/2006/main" prst="rect">
             <a:avLst/>
@@ -15698,14 +18417,14 @@
           <a:lstStyle xmlns:a="http://schemas.openxmlformats.org/drawingml/2006/main"/>
           <a:p xmlns:a="http://schemas.openxmlformats.org/drawingml/2006/main">
             <a:pPr algn="l">
-              <a:defRPr sz="728" b="0">
+              <a:defRPr sz="713" b="0">
                 <a:solidFill>
                   <a:srgbClr val="000000"/>
                 </a:solidFill>
               </a:defRPr>
             </a:pPr>
             <a:r>
-              <a:rPr sz="728" b="0">
+              <a:rPr sz="713" b="0">
                 <a:solidFill>
                   <a:srgbClr val="000000"/>
                 </a:solidFill>
@@ -15720,7 +18439,7 @@
           <p:cNvPr id="25" name="">
             <a:extLst xmlns:a="http://schemas.openxmlformats.org/drawingml/2006/main">
               <a:ext uri="{FF2B5EF4-FFF2-40B4-BE49-F238E27FC236}">
-                <a16:creationId xmlns:a16="http://schemas.microsoft.com/office/drawing/2014/main" id="{46D9EDF8-D846-4AFA-9E2F-A2C53EED5F1A}"/>
+                <a16:creationId xmlns:a16="http://schemas.microsoft.com/office/drawing/2014/main" id="{7F5ECA8F-8B3C-47DD-A0EF-D1C568D8DB12}"/>
               </a:ext>
             </a:extLst>
           </p:cNvPr>
@@ -15753,7 +18472,7 @@
           <p:cNvPr id="26" name="">
             <a:extLst xmlns:a="http://schemas.openxmlformats.org/drawingml/2006/main">
               <a:ext uri="{FF2B5EF4-FFF2-40B4-BE49-F238E27FC236}">
-                <a16:creationId xmlns:a16="http://schemas.microsoft.com/office/drawing/2014/main" id="{B766437C-6168-41D7-A09C-8363526C9E10}"/>
+                <a16:creationId xmlns:a16="http://schemas.microsoft.com/office/drawing/2014/main" id="{17EB3020-9AA4-4660-9806-512180D98B2F}"/>
               </a:ext>
             </a:extLst>
           </p:cNvPr>
@@ -15764,8 +18483,8 @@
         </p:nvSpPr>
         <p:spPr>
           <a:xfrm xmlns:a="http://schemas.openxmlformats.org/drawingml/2006/main">
-            <a:off x="4819650" y="2495550"/>
-            <a:ext cx="819150" cy="228600"/>
+            <a:off x="4810125" y="2486025"/>
+            <a:ext cx="828675" cy="323850"/>
           </a:xfrm>
           <a:prstGeom xmlns:a="http://schemas.openxmlformats.org/drawingml/2006/main" prst="rect">
             <a:avLst/>
@@ -15781,14 +18500,14 @@
           <a:lstStyle xmlns:a="http://schemas.openxmlformats.org/drawingml/2006/main"/>
           <a:p xmlns:a="http://schemas.openxmlformats.org/drawingml/2006/main">
             <a:pPr algn="l">
-              <a:defRPr sz="728" b="0">
+              <a:defRPr sz="713" b="0">
                 <a:solidFill>
                   <a:srgbClr val="000000"/>
                 </a:solidFill>
               </a:defRPr>
             </a:pPr>
             <a:r>
-              <a:rPr sz="728" b="0">
+              <a:rPr sz="713" b="0">
                 <a:solidFill>
                   <a:srgbClr val="000000"/>
                 </a:solidFill>
@@ -15803,7 +18522,7 @@
           <p:cNvPr id="27" name="">
             <a:extLst xmlns:a="http://schemas.openxmlformats.org/drawingml/2006/main">
               <a:ext uri="{FF2B5EF4-FFF2-40B4-BE49-F238E27FC236}">
-                <a16:creationId xmlns:a16="http://schemas.microsoft.com/office/drawing/2014/main" id="{C98B82AD-4E31-41CC-8375-EFC6886AAE7E}"/>
+                <a16:creationId xmlns:a16="http://schemas.microsoft.com/office/drawing/2014/main" id="{86E7E3CE-411C-42F8-BAE1-04D32531CD8E}"/>
               </a:ext>
             </a:extLst>
           </p:cNvPr>
@@ -15834,7 +18553,7 @@
           <p:cNvPr id="28" name="">
             <a:extLst xmlns:a="http://schemas.openxmlformats.org/drawingml/2006/main">
               <a:ext uri="{FF2B5EF4-FFF2-40B4-BE49-F238E27FC236}">
-                <a16:creationId xmlns:a16="http://schemas.microsoft.com/office/drawing/2014/main" id="{E436FEBC-D40A-4AE2-91B1-11B2FC3CEEF4}"/>
+                <a16:creationId xmlns:a16="http://schemas.microsoft.com/office/drawing/2014/main" id="{A0F2EA14-1417-4A99-91DB-1FD81FD84F84}"/>
               </a:ext>
             </a:extLst>
           </p:cNvPr>
@@ -15845,8 +18564,8 @@
         </p:nvSpPr>
         <p:spPr>
           <a:xfrm xmlns:a="http://schemas.openxmlformats.org/drawingml/2006/main">
-            <a:off x="5734050" y="2495550"/>
-            <a:ext cx="952500" cy="228600"/>
+            <a:off x="5724525" y="2486025"/>
+            <a:ext cx="962025" cy="323850"/>
           </a:xfrm>
           <a:prstGeom xmlns:a="http://schemas.openxmlformats.org/drawingml/2006/main" prst="rect">
             <a:avLst/>
@@ -15862,14 +18581,14 @@
           <a:lstStyle xmlns:a="http://schemas.openxmlformats.org/drawingml/2006/main"/>
           <a:p xmlns:a="http://schemas.openxmlformats.org/drawingml/2006/main">
             <a:pPr algn="l">
-              <a:defRPr sz="728" b="1">
+              <a:defRPr sz="713" b="1">
                 <a:solidFill>
                   <a:srgbClr val="000000"/>
                 </a:solidFill>
               </a:defRPr>
             </a:pPr>
             <a:r>
-              <a:rPr sz="728" b="1">
+              <a:rPr sz="713" b="1">
                 <a:solidFill>
                   <a:srgbClr val="000000"/>
                 </a:solidFill>
@@ -15884,7 +18603,7 @@
           <p:cNvPr id="29" name="">
             <a:extLst xmlns:a="http://schemas.openxmlformats.org/drawingml/2006/main">
               <a:ext uri="{FF2B5EF4-FFF2-40B4-BE49-F238E27FC236}">
-                <a16:creationId xmlns:a16="http://schemas.microsoft.com/office/drawing/2014/main" id="{A514396C-610F-4857-A374-1095C14EAFEF}"/>
+                <a16:creationId xmlns:a16="http://schemas.microsoft.com/office/drawing/2014/main" id="{4EBA5271-924D-403E-8956-008F6A0EC8BF}"/>
               </a:ext>
             </a:extLst>
           </p:cNvPr>
@@ -15915,7 +18634,7 @@
           <p:cNvPr id="30" name="">
             <a:extLst xmlns:a="http://schemas.openxmlformats.org/drawingml/2006/main">
               <a:ext uri="{FF2B5EF4-FFF2-40B4-BE49-F238E27FC236}">
-                <a16:creationId xmlns:a16="http://schemas.microsoft.com/office/drawing/2014/main" id="{32B50270-BE0A-403D-A805-C658A448FB14}"/>
+                <a16:creationId xmlns:a16="http://schemas.microsoft.com/office/drawing/2014/main" id="{76B69A94-B888-40D5-ACE6-7CE28705AFC8}"/>
               </a:ext>
             </a:extLst>
           </p:cNvPr>
@@ -15926,8 +18645,8 @@
         </p:nvSpPr>
         <p:spPr>
           <a:xfrm xmlns:a="http://schemas.openxmlformats.org/drawingml/2006/main">
-            <a:off x="6781800" y="2495550"/>
-            <a:ext cx="1619250" cy="228600"/>
+            <a:off x="6772275" y="2486025"/>
+            <a:ext cx="1628775" cy="323850"/>
           </a:xfrm>
           <a:prstGeom xmlns:a="http://schemas.openxmlformats.org/drawingml/2006/main" prst="rect">
             <a:avLst/>
@@ -15943,14 +18662,14 @@
           <a:lstStyle xmlns:a="http://schemas.openxmlformats.org/drawingml/2006/main"/>
           <a:p xmlns:a="http://schemas.openxmlformats.org/drawingml/2006/main">
             <a:pPr algn="l">
-              <a:defRPr sz="728" b="0">
+              <a:defRPr sz="713" b="0">
                 <a:solidFill>
                   <a:srgbClr val="000000"/>
                 </a:solidFill>
               </a:defRPr>
             </a:pPr>
             <a:r>
-              <a:rPr sz="728" b="0">
+              <a:rPr sz="713" b="0">
                 <a:solidFill>
                   <a:srgbClr val="000000"/>
                 </a:solidFill>
@@ -15965,7 +18684,7 @@
           <p:cNvPr id="31" name="">
             <a:extLst xmlns:a="http://schemas.openxmlformats.org/drawingml/2006/main">
               <a:ext uri="{FF2B5EF4-FFF2-40B4-BE49-F238E27FC236}">
-                <a16:creationId xmlns:a16="http://schemas.microsoft.com/office/drawing/2014/main" id="{85E3F836-27AC-46B1-996D-6761E9C2983E}"/>
+                <a16:creationId xmlns:a16="http://schemas.microsoft.com/office/drawing/2014/main" id="{6AA75EAE-461E-4CDD-A1CA-9A6780168318}"/>
               </a:ext>
             </a:extLst>
           </p:cNvPr>
@@ -16015,7 +18734,7 @@
           <p:cNvPr id="32" name="">
             <a:extLst xmlns:a="http://schemas.openxmlformats.org/drawingml/2006/main">
               <a:ext uri="{FF2B5EF4-FFF2-40B4-BE49-F238E27FC236}">
-                <a16:creationId xmlns:a16="http://schemas.microsoft.com/office/drawing/2014/main" id="{42363C00-A225-4036-BC4D-EDDC186311FD}"/>
+                <a16:creationId xmlns:a16="http://schemas.microsoft.com/office/drawing/2014/main" id="{DA2137A3-63AB-4A6C-8CC8-9FEA5AECE60C}"/>
               </a:ext>
             </a:extLst>
           </p:cNvPr>
@@ -16104,12 +18823,7 @@
           <a:lstStyle xmlns:a="http://schemas.openxmlformats.org/drawingml/2006/main"/>
           <a:p xmlns:a="http://schemas.openxmlformats.org/drawingml/2006/main">
             <a:r>
-              <a:t>Phase 1</a:t>
-            </a:r>
-          </a:p>
-          <a:p xmlns:a="http://schemas.openxmlformats.org/drawingml/2006/main">
-            <a:r>
-              <a:t>supervised acceptance model</a:t>
+              <a:t>All rows use the same savings objective.</a:t>
             </a:r>
           </a:p>
           <a:p xmlns:a="http://schemas.openxmlformats.org/drawingml/2006/main">
@@ -16119,12 +18833,7 @@
           </a:p>
           <a:p xmlns:a="http://schemas.openxmlformats.org/drawingml/2006/main">
             <a:r>
-              <a:t>Phase 2</a:t>
-            </a:r>
-          </a:p>
-          <a:p xmlns:a="http://schemas.openxmlformats.org/drawingml/2006/main">
-            <a:r>
-              <a:t>CQL offline RL, conservative under distribution shift</a:t>
+              <a:t>What changes is how much the method trusts P(accept | s, a) where data are thin.</a:t>
             </a:r>
           </a:p>
           <a:p xmlns:a="http://schemas.openxmlformats.org/drawingml/2006/main">
@@ -16134,27 +18843,7 @@
           </a:p>
           <a:p xmlns:a="http://schemas.openxmlformats.org/drawingml/2006/main">
             <a:r>
-              <a:t>Phase 3</a:t>
-            </a:r>
-          </a:p>
-          <a:p xmlns:a="http://schemas.openxmlformats.org/drawingml/2006/main">
-            <a:r>
-              <a:t>PPO in a learned faithful simulator</a:t>
-            </a:r>
-          </a:p>
-          <a:p xmlns:a="http://schemas.openxmlformats.org/drawingml/2006/main">
-            <a:r>
-              <a:t/>
-            </a:r>
-          </a:p>
-          <a:p xmlns:a="http://schemas.openxmlformats.org/drawingml/2006/main">
-            <a:r>
-              <a:t>Evaluation</a:t>
-            </a:r>
-          </a:p>
-          <a:p xmlns:a="http://schemas.openxmlformats.org/drawingml/2006/main">
-            <a:r>
-              <a:t>report evidence type beside every number</a:t>
+              <a:t>The comparison is evidence triage, not a leaderboard.</a:t>
             </a:r>
           </a:p>
         </p:txBody>
@@ -16208,7 +18897,7 @@
           <a:lstStyle xmlns:a="http://schemas.openxmlformats.org/drawingml/2006/main"/>
           <a:p xmlns:a="http://schemas.openxmlformats.org/drawingml/2006/main">
             <a:r>
-              <a:t>eBay Best Offer anchoring RL | Why / How / What</a:t>
+              <a:t>eBay Best Offer anchoring RL | Advanced Seminar (WIHN0043SE)</a:t>
             </a:r>
           </a:p>
         </p:txBody>
@@ -16235,7 +18924,7 @@
           <a:lstStyle xmlns:a="http://schemas.openxmlformats.org/drawingml/2006/main"/>
           <a:p xmlns:a="http://schemas.openxmlformats.org/drawingml/2006/main">
             <a:r>
-              <a:t>How: three model layers are compared</a:t>
+              <a:t>How: four policies, four levels of trust in the model</a:t>
             </a:r>
           </a:p>
         </p:txBody>
@@ -16245,7 +18934,7 @@
           <p:cNvPr id="7" name="">
             <a:extLst xmlns:a="http://schemas.openxmlformats.org/drawingml/2006/main">
               <a:ext uri="{FF2B5EF4-FFF2-40B4-BE49-F238E27FC236}">
-                <a16:creationId xmlns:a16="http://schemas.microsoft.com/office/drawing/2014/main" id="{9EC0A1F4-9BA9-4D71-B7A3-448546C24A71}"/>
+                <a16:creationId xmlns:a16="http://schemas.microsoft.com/office/drawing/2014/main" id="{B3983A04-AE0A-4734-B725-17492D6C1BB5}"/>
               </a:ext>
             </a:extLst>
           </p:cNvPr>
@@ -16257,7 +18946,7 @@
         <p:spPr>
           <a:xfrm xmlns:a="http://schemas.openxmlformats.org/drawingml/2006/main">
             <a:off x="4762500" y="1352550"/>
-            <a:ext cx="3676650" cy="266700"/>
+            <a:ext cx="3657600" cy="266700"/>
           </a:xfrm>
           <a:prstGeom xmlns:a="http://schemas.openxmlformats.org/drawingml/2006/main" prst="rect">
             <a:avLst/>
@@ -16278,7 +18967,7 @@
           <p:cNvPr id="8" name="">
             <a:extLst xmlns:a="http://schemas.openxmlformats.org/drawingml/2006/main">
               <a:ext uri="{FF2B5EF4-FFF2-40B4-BE49-F238E27FC236}">
-                <a16:creationId xmlns:a16="http://schemas.microsoft.com/office/drawing/2014/main" id="{331C36F9-D11D-4E00-878F-D687D734E992}"/>
+                <a16:creationId xmlns:a16="http://schemas.microsoft.com/office/drawing/2014/main" id="{C3FB4BBF-70A5-46B7-B482-DB6ABD09D1FA}"/>
               </a:ext>
             </a:extLst>
           </p:cNvPr>
@@ -16289,8 +18978,8 @@
         </p:nvSpPr>
         <p:spPr>
           <a:xfrm xmlns:a="http://schemas.openxmlformats.org/drawingml/2006/main">
-            <a:off x="4819650" y="1409700"/>
-            <a:ext cx="781050" cy="171450"/>
+            <a:off x="4810125" y="1409700"/>
+            <a:ext cx="790575" cy="190500"/>
           </a:xfrm>
           <a:prstGeom xmlns:a="http://schemas.openxmlformats.org/drawingml/2006/main" prst="rect">
             <a:avLst/>
@@ -16306,14 +18995,14 @@
           <a:lstStyle xmlns:a="http://schemas.openxmlformats.org/drawingml/2006/main"/>
           <a:p xmlns:a="http://schemas.openxmlformats.org/drawingml/2006/main">
             <a:pPr algn="l">
-              <a:defRPr sz="788" b="1">
+              <a:defRPr sz="713" b="1">
                 <a:solidFill>
                   <a:srgbClr val="FFFFFF"/>
                 </a:solidFill>
               </a:defRPr>
             </a:pPr>
             <a:r>
-              <a:rPr sz="788" b="1">
+              <a:rPr sz="713" b="1">
                 <a:solidFill>
                   <a:srgbClr val="FFFFFF"/>
                 </a:solidFill>
@@ -16328,7 +19017,7 @@
           <p:cNvPr id="9" name="">
             <a:extLst xmlns:a="http://schemas.openxmlformats.org/drawingml/2006/main">
               <a:ext uri="{FF2B5EF4-FFF2-40B4-BE49-F238E27FC236}">
-                <a16:creationId xmlns:a16="http://schemas.microsoft.com/office/drawing/2014/main" id="{B6E12695-3ADE-4F4F-B2A8-1280DDB33BB6}"/>
+                <a16:creationId xmlns:a16="http://schemas.microsoft.com/office/drawing/2014/main" id="{249B603C-C71E-4F72-A546-6CD0F42D14A2}"/>
               </a:ext>
             </a:extLst>
           </p:cNvPr>
@@ -16359,7 +19048,7 @@
           <p:cNvPr id="10" name="">
             <a:extLst xmlns:a="http://schemas.openxmlformats.org/drawingml/2006/main">
               <a:ext uri="{FF2B5EF4-FFF2-40B4-BE49-F238E27FC236}">
-                <a16:creationId xmlns:a16="http://schemas.microsoft.com/office/drawing/2014/main" id="{81ED31C0-A2C8-4EE0-B75C-27887C2414B1}"/>
+                <a16:creationId xmlns:a16="http://schemas.microsoft.com/office/drawing/2014/main" id="{030F1D0E-22E9-459E-B945-6F69BBEC3D35}"/>
               </a:ext>
             </a:extLst>
           </p:cNvPr>
@@ -16370,8 +19059,8 @@
         </p:nvSpPr>
         <p:spPr>
           <a:xfrm xmlns:a="http://schemas.openxmlformats.org/drawingml/2006/main">
-            <a:off x="5695950" y="1409700"/>
-            <a:ext cx="647700" cy="171450"/>
+            <a:off x="5686425" y="1409700"/>
+            <a:ext cx="1343025" cy="190500"/>
           </a:xfrm>
           <a:prstGeom xmlns:a="http://schemas.openxmlformats.org/drawingml/2006/main" prst="rect">
             <a:avLst/>
@@ -16387,19 +19076,19 @@
           <a:lstStyle xmlns:a="http://schemas.openxmlformats.org/drawingml/2006/main"/>
           <a:p xmlns:a="http://schemas.openxmlformats.org/drawingml/2006/main">
             <a:pPr algn="l">
-              <a:defRPr sz="788" b="1">
+              <a:defRPr sz="713" b="1">
                 <a:solidFill>
                   <a:srgbClr val="FFFFFF"/>
                 </a:solidFill>
               </a:defRPr>
             </a:pPr>
             <a:r>
-              <a:rPr sz="788" b="1">
+              <a:rPr sz="713" b="1">
                 <a:solidFill>
                   <a:srgbClr val="FFFFFF"/>
                 </a:solidFill>
               </a:rPr>
-              <a:t>Evidence</a:t>
+              <a:t>What it does</a:t>
             </a:r>
           </a:p>
         </p:txBody>
@@ -16409,7 +19098,7 @@
           <p:cNvPr id="11" name="">
             <a:extLst xmlns:a="http://schemas.openxmlformats.org/drawingml/2006/main">
               <a:ext uri="{FF2B5EF4-FFF2-40B4-BE49-F238E27FC236}">
-                <a16:creationId xmlns:a16="http://schemas.microsoft.com/office/drawing/2014/main" id="{BFA76A8A-E07C-4257-8BA7-9DC80145C256}"/>
+                <a16:creationId xmlns:a16="http://schemas.microsoft.com/office/drawing/2014/main" id="{46340202-683B-4258-8B5F-2DFE91BB4B6D}"/>
               </a:ext>
             </a:extLst>
           </p:cNvPr>
@@ -16420,7 +19109,7 @@
         </p:nvSpPr>
         <p:spPr>
           <a:xfrm xmlns:a="http://schemas.openxmlformats.org/drawingml/2006/main">
-            <a:off x="6381750" y="1352550"/>
+            <a:off x="7067550" y="1352550"/>
             <a:ext cx="7144" cy="266700"/>
           </a:xfrm>
           <a:prstGeom xmlns:a="http://schemas.openxmlformats.org/drawingml/2006/main" prst="rect">
@@ -16440,7 +19129,7 @@
           <p:cNvPr id="12" name="">
             <a:extLst xmlns:a="http://schemas.openxmlformats.org/drawingml/2006/main">
               <a:ext uri="{FF2B5EF4-FFF2-40B4-BE49-F238E27FC236}">
-                <a16:creationId xmlns:a16="http://schemas.microsoft.com/office/drawing/2014/main" id="{199D8B93-65B0-489D-8F13-5E0F5696D81C}"/>
+                <a16:creationId xmlns:a16="http://schemas.microsoft.com/office/drawing/2014/main" id="{16B59C92-902A-42B8-B87F-DE08D7F5FE9E}"/>
               </a:ext>
             </a:extLst>
           </p:cNvPr>
@@ -16451,8 +19140,8 @@
         </p:nvSpPr>
         <p:spPr>
           <a:xfrm xmlns:a="http://schemas.openxmlformats.org/drawingml/2006/main">
-            <a:off x="6438900" y="1409700"/>
-            <a:ext cx="590550" cy="171450"/>
+            <a:off x="7115175" y="1409700"/>
+            <a:ext cx="1266825" cy="190500"/>
           </a:xfrm>
           <a:prstGeom xmlns:a="http://schemas.openxmlformats.org/drawingml/2006/main" prst="rect">
             <a:avLst/>
@@ -16468,19 +19157,19 @@
           <a:lstStyle xmlns:a="http://schemas.openxmlformats.org/drawingml/2006/main"/>
           <a:p xmlns:a="http://schemas.openxmlformats.org/drawingml/2006/main">
             <a:pPr algn="l">
-              <a:defRPr sz="788" b="1">
+              <a:defRPr sz="713" b="1">
                 <a:solidFill>
                   <a:srgbClr val="FFFFFF"/>
                 </a:solidFill>
               </a:defRPr>
             </a:pPr>
             <a:r>
-              <a:rPr sz="788" b="1">
+              <a:rPr sz="713" b="1">
                 <a:solidFill>
                   <a:srgbClr val="FFFFFF"/>
                 </a:solidFill>
               </a:rPr>
-              <a:t>Savings</a:t>
+              <a:t>Trust level</a:t>
             </a:r>
           </a:p>
         </p:txBody>
@@ -16490,7 +19179,7 @@
           <p:cNvPr id="13" name="">
             <a:extLst xmlns:a="http://schemas.openxmlformats.org/drawingml/2006/main">
               <a:ext uri="{FF2B5EF4-FFF2-40B4-BE49-F238E27FC236}">
-                <a16:creationId xmlns:a16="http://schemas.microsoft.com/office/drawing/2014/main" id="{08A2F879-6CF6-4D3C-8EB2-CDD4A2663B0F}"/>
+                <a16:creationId xmlns:a16="http://schemas.microsoft.com/office/drawing/2014/main" id="{C8F27E84-4CA4-4F48-9F24-AD2EE3A333AB}"/>
               </a:ext>
             </a:extLst>
           </p:cNvPr>
@@ -16501,89 +19190,8 @@
         </p:nvSpPr>
         <p:spPr>
           <a:xfrm xmlns:a="http://schemas.openxmlformats.org/drawingml/2006/main">
-            <a:off x="7067550" y="1352550"/>
-            <a:ext cx="7144" cy="266700"/>
-          </a:xfrm>
-          <a:prstGeom xmlns:a="http://schemas.openxmlformats.org/drawingml/2006/main" prst="rect">
-            <a:avLst/>
-          </a:prstGeom>
-          <a:solidFill xmlns:a="http://schemas.openxmlformats.org/drawingml/2006/main">
-            <a:srgbClr val="8DAAC5"/>
-          </a:solidFill>
-          <a:ln xmlns:a="http://schemas.openxmlformats.org/drawingml/2006/main" w="0">
-            <a:noFill/>
-            <a:prstDash val="solid"/>
-          </a:ln>
-        </p:spPr>
-      </p:sp>
-      <p:sp>
-        <p:nvSpPr>
-          <p:cNvPr id="14" name="">
-            <a:extLst xmlns:a="http://schemas.openxmlformats.org/drawingml/2006/main">
-              <a:ext uri="{FF2B5EF4-FFF2-40B4-BE49-F238E27FC236}">
-                <a16:creationId xmlns:a16="http://schemas.microsoft.com/office/drawing/2014/main" id="{2752BEE1-FFD2-411C-B0B4-3CC70222C8BC}"/>
-              </a:ext>
-            </a:extLst>
-          </p:cNvPr>
-          <p:cNvSpPr>
-            <a:spLocks xmlns:a="http://schemas.openxmlformats.org/drawingml/2006/main" noGrp="1"/>
-          </p:cNvSpPr>
-          <p:nvPr/>
-        </p:nvSpPr>
-        <p:spPr>
-          <a:xfrm xmlns:a="http://schemas.openxmlformats.org/drawingml/2006/main">
-            <a:off x="7124700" y="1409700"/>
-            <a:ext cx="1276350" cy="171450"/>
-          </a:xfrm>
-          <a:prstGeom xmlns:a="http://schemas.openxmlformats.org/drawingml/2006/main" prst="rect">
-            <a:avLst/>
-          </a:prstGeom>
-          <a:noFill xmlns:a="http://schemas.openxmlformats.org/drawingml/2006/main"/>
-          <a:ln xmlns:a="http://schemas.openxmlformats.org/drawingml/2006/main" w="0">
-            <a:noFill/>
-            <a:prstDash val="solid"/>
-          </a:ln>
-        </p:spPr>
-        <p:txBody>
-          <a:bodyPr xmlns:a="http://schemas.openxmlformats.org/drawingml/2006/main"/>
-          <a:lstStyle xmlns:a="http://schemas.openxmlformats.org/drawingml/2006/main"/>
-          <a:p xmlns:a="http://schemas.openxmlformats.org/drawingml/2006/main">
-            <a:pPr algn="l">
-              <a:defRPr sz="788" b="1">
-                <a:solidFill>
-                  <a:srgbClr val="FFFFFF"/>
-                </a:solidFill>
-              </a:defRPr>
-            </a:pPr>
-            <a:r>
-              <a:rPr sz="788" b="1">
-                <a:solidFill>
-                  <a:srgbClr val="FFFFFF"/>
-                </a:solidFill>
-              </a:rPr>
-              <a:t>Support read</a:t>
-            </a:r>
-          </a:p>
-        </p:txBody>
-      </p:sp>
-      <p:sp>
-        <p:nvSpPr>
-          <p:cNvPr id="15" name="">
-            <a:extLst xmlns:a="http://schemas.openxmlformats.org/drawingml/2006/main">
-              <a:ext uri="{FF2B5EF4-FFF2-40B4-BE49-F238E27FC236}">
-                <a16:creationId xmlns:a16="http://schemas.microsoft.com/office/drawing/2014/main" id="{35D03AFE-B15D-4A96-80FA-48440317CC8B}"/>
-              </a:ext>
-            </a:extLst>
-          </p:cNvPr>
-          <p:cNvSpPr>
-            <a:spLocks xmlns:a="http://schemas.openxmlformats.org/drawingml/2006/main" noGrp="1"/>
-          </p:cNvSpPr>
-          <p:nvPr/>
-        </p:nvSpPr>
-        <p:spPr>
-          <a:xfrm xmlns:a="http://schemas.openxmlformats.org/drawingml/2006/main">
             <a:off x="4762500" y="1619250"/>
-            <a:ext cx="3676650" cy="285750"/>
+            <a:ext cx="3657600" cy="323850"/>
           </a:xfrm>
           <a:prstGeom xmlns:a="http://schemas.openxmlformats.org/drawingml/2006/main" prst="rect">
             <a:avLst/>
@@ -16601,10 +19209,10 @@
       </p:sp>
       <p:sp>
         <p:nvSpPr>
-          <p:cNvPr id="16" name="">
-            <a:extLst xmlns:a="http://schemas.openxmlformats.org/drawingml/2006/main">
-              <a:ext uri="{FF2B5EF4-FFF2-40B4-BE49-F238E27FC236}">
-                <a16:creationId xmlns:a16="http://schemas.microsoft.com/office/drawing/2014/main" id="{85279771-FF5A-4560-9A39-90452B648EBD}"/>
+          <p:cNvPr id="14" name="">
+            <a:extLst xmlns:a="http://schemas.openxmlformats.org/drawingml/2006/main">
+              <a:ext uri="{FF2B5EF4-FFF2-40B4-BE49-F238E27FC236}">
+                <a16:creationId xmlns:a16="http://schemas.microsoft.com/office/drawing/2014/main" id="{0404F45F-B7CA-4A8A-B73D-85BCFF39DD69}"/>
               </a:ext>
             </a:extLst>
           </p:cNvPr>
@@ -16615,8 +19223,8 @@
         </p:nvSpPr>
         <p:spPr>
           <a:xfrm xmlns:a="http://schemas.openxmlformats.org/drawingml/2006/main">
-            <a:off x="4819650" y="1685925"/>
-            <a:ext cx="781050" cy="171450"/>
+            <a:off x="4810125" y="1685925"/>
+            <a:ext cx="790575" cy="247650"/>
           </a:xfrm>
           <a:prstGeom xmlns:a="http://schemas.openxmlformats.org/drawingml/2006/main" prst="rect">
             <a:avLst/>
@@ -16632,29 +19240,29 @@
           <a:lstStyle xmlns:a="http://schemas.openxmlformats.org/drawingml/2006/main"/>
           <a:p xmlns:a="http://schemas.openxmlformats.org/drawingml/2006/main">
             <a:pPr algn="l">
-              <a:defRPr sz="750" b="0">
+              <a:defRPr sz="645" b="0">
                 <a:solidFill>
                   <a:srgbClr val="000000"/>
                 </a:solidFill>
               </a:defRPr>
             </a:pPr>
             <a:r>
-              <a:rPr sz="750" b="0">
+              <a:rPr sz="645" b="0">
                 <a:solidFill>
                   <a:srgbClr val="000000"/>
                 </a:solidFill>
               </a:rPr>
-              <a:t>Behavior</a:t>
-            </a:r>
-          </a:p>
-        </p:txBody>
-      </p:sp>
-      <p:sp>
-        <p:nvSpPr>
-          <p:cNvPr id="17" name="">
-            <a:extLst xmlns:a="http://schemas.openxmlformats.org/drawingml/2006/main">
-              <a:ext uri="{FF2B5EF4-FFF2-40B4-BE49-F238E27FC236}">
-                <a16:creationId xmlns:a16="http://schemas.microsoft.com/office/drawing/2014/main" id="{8909C49C-358A-43D2-A685-C8EFE47D4FC1}"/>
+              <a:t>Fixed 0.70</a:t>
+            </a:r>
+          </a:p>
+        </p:txBody>
+      </p:sp>
+      <p:sp>
+        <p:nvSpPr>
+          <p:cNvPr id="15" name="">
+            <a:extLst xmlns:a="http://schemas.openxmlformats.org/drawingml/2006/main">
+              <a:ext uri="{FF2B5EF4-FFF2-40B4-BE49-F238E27FC236}">
+                <a16:creationId xmlns:a16="http://schemas.microsoft.com/office/drawing/2014/main" id="{D76D56BE-1DB1-4C91-BBA6-E4C4BB06D87B}"/>
               </a:ext>
             </a:extLst>
           </p:cNvPr>
@@ -16666,7 +19274,7 @@
         <p:spPr>
           <a:xfrm xmlns:a="http://schemas.openxmlformats.org/drawingml/2006/main">
             <a:off x="5638800" y="1619250"/>
-            <a:ext cx="7144" cy="285750"/>
+            <a:ext cx="7144" cy="323850"/>
           </a:xfrm>
           <a:prstGeom xmlns:a="http://schemas.openxmlformats.org/drawingml/2006/main" prst="rect">
             <a:avLst/>
@@ -16682,10 +19290,10 @@
       </p:sp>
       <p:sp>
         <p:nvSpPr>
-          <p:cNvPr id="18" name="">
-            <a:extLst xmlns:a="http://schemas.openxmlformats.org/drawingml/2006/main">
-              <a:ext uri="{FF2B5EF4-FFF2-40B4-BE49-F238E27FC236}">
-                <a16:creationId xmlns:a16="http://schemas.microsoft.com/office/drawing/2014/main" id="{0F54A0EE-FE56-4375-8CC7-C55490E1FC8D}"/>
+          <p:cNvPr id="16" name="">
+            <a:extLst xmlns:a="http://schemas.openxmlformats.org/drawingml/2006/main">
+              <a:ext uri="{FF2B5EF4-FFF2-40B4-BE49-F238E27FC236}">
+                <a16:creationId xmlns:a16="http://schemas.microsoft.com/office/drawing/2014/main" id="{C53FDE3D-A17D-477F-863B-EC03CBD2E2F0}"/>
               </a:ext>
             </a:extLst>
           </p:cNvPr>
@@ -16696,8 +19304,8 @@
         </p:nvSpPr>
         <p:spPr>
           <a:xfrm xmlns:a="http://schemas.openxmlformats.org/drawingml/2006/main">
-            <a:off x="5695950" y="1685925"/>
-            <a:ext cx="647700" cy="171450"/>
+            <a:off x="5686425" y="1685925"/>
+            <a:ext cx="1343025" cy="247650"/>
           </a:xfrm>
           <a:prstGeom xmlns:a="http://schemas.openxmlformats.org/drawingml/2006/main" prst="rect">
             <a:avLst/>
@@ -16713,29 +19321,29 @@
           <a:lstStyle xmlns:a="http://schemas.openxmlformats.org/drawingml/2006/main"/>
           <a:p xmlns:a="http://schemas.openxmlformats.org/drawingml/2006/main">
             <a:pPr algn="l">
-              <a:defRPr sz="750" b="0">
+              <a:defRPr sz="645" b="0">
                 <a:solidFill>
                   <a:srgbClr val="000000"/>
                 </a:solidFill>
               </a:defRPr>
             </a:pPr>
             <a:r>
-              <a:rPr sz="750" b="0">
+              <a:rPr sz="645" b="0">
                 <a:solidFill>
                   <a:srgbClr val="000000"/>
                 </a:solidFill>
               </a:rPr>
-              <a:t>observed</a:t>
-            </a:r>
-          </a:p>
-        </p:txBody>
-      </p:sp>
-      <p:sp>
-        <p:nvSpPr>
-          <p:cNvPr id="19" name="">
-            <a:extLst xmlns:a="http://schemas.openxmlformats.org/drawingml/2006/main">
-              <a:ext uri="{FF2B5EF4-FFF2-40B4-BE49-F238E27FC236}">
-                <a16:creationId xmlns:a16="http://schemas.microsoft.com/office/drawing/2014/main" id="{C29F6021-7292-4455-BE25-03467519F300}"/>
+              <a:t>evaluate one anchor</a:t>
+            </a:r>
+          </a:p>
+        </p:txBody>
+      </p:sp>
+      <p:sp>
+        <p:nvSpPr>
+          <p:cNvPr id="17" name="">
+            <a:extLst xmlns:a="http://schemas.openxmlformats.org/drawingml/2006/main">
+              <a:ext uri="{FF2B5EF4-FFF2-40B4-BE49-F238E27FC236}">
+                <a16:creationId xmlns:a16="http://schemas.microsoft.com/office/drawing/2014/main" id="{5DB1D68B-9801-4126-BE07-E3E55B6EE9FC}"/>
               </a:ext>
             </a:extLst>
           </p:cNvPr>
@@ -16746,8 +19354,8 @@
         </p:nvSpPr>
         <p:spPr>
           <a:xfrm xmlns:a="http://schemas.openxmlformats.org/drawingml/2006/main">
-            <a:off x="6381750" y="1619250"/>
-            <a:ext cx="7144" cy="285750"/>
+            <a:off x="7067550" y="1619250"/>
+            <a:ext cx="7144" cy="323850"/>
           </a:xfrm>
           <a:prstGeom xmlns:a="http://schemas.openxmlformats.org/drawingml/2006/main" prst="rect">
             <a:avLst/>
@@ -16763,10 +19371,10 @@
       </p:sp>
       <p:sp>
         <p:nvSpPr>
-          <p:cNvPr id="20" name="">
-            <a:extLst xmlns:a="http://schemas.openxmlformats.org/drawingml/2006/main">
-              <a:ext uri="{FF2B5EF4-FFF2-40B4-BE49-F238E27FC236}">
-                <a16:creationId xmlns:a16="http://schemas.microsoft.com/office/drawing/2014/main" id="{8A6EE0A8-1969-4FF8-B803-D932FD516C3D}"/>
+          <p:cNvPr id="18" name="">
+            <a:extLst xmlns:a="http://schemas.openxmlformats.org/drawingml/2006/main">
+              <a:ext uri="{FF2B5EF4-FFF2-40B4-BE49-F238E27FC236}">
+                <a16:creationId xmlns:a16="http://schemas.microsoft.com/office/drawing/2014/main" id="{600E0C97-C0CF-4BA0-8CE8-DA92F047C826}"/>
               </a:ext>
             </a:extLst>
           </p:cNvPr>
@@ -16777,8 +19385,8 @@
         </p:nvSpPr>
         <p:spPr>
           <a:xfrm xmlns:a="http://schemas.openxmlformats.org/drawingml/2006/main">
-            <a:off x="6438900" y="1685925"/>
-            <a:ext cx="590550" cy="171450"/>
+            <a:off x="7115175" y="1685925"/>
+            <a:ext cx="1266825" cy="247650"/>
           </a:xfrm>
           <a:prstGeom xmlns:a="http://schemas.openxmlformats.org/drawingml/2006/main" prst="rect">
             <a:avLst/>
@@ -16794,29 +19402,29 @@
           <a:lstStyle xmlns:a="http://schemas.openxmlformats.org/drawingml/2006/main"/>
           <a:p xmlns:a="http://schemas.openxmlformats.org/drawingml/2006/main">
             <a:pPr algn="l">
-              <a:defRPr sz="750" b="0">
+              <a:defRPr sz="645" b="0">
                 <a:solidFill>
                   <a:srgbClr val="000000"/>
                 </a:solidFill>
               </a:defRPr>
             </a:pPr>
             <a:r>
-              <a:rPr sz="750" b="0">
+              <a:rPr sz="645" b="0">
                 <a:solidFill>
                   <a:srgbClr val="000000"/>
                 </a:solidFill>
               </a:rPr>
-              <a:t>0.050</a:t>
-            </a:r>
-          </a:p>
-        </p:txBody>
-      </p:sp>
-      <p:sp>
-        <p:nvSpPr>
-          <p:cNvPr id="21" name="">
-            <a:extLst xmlns:a="http://schemas.openxmlformats.org/drawingml/2006/main">
-              <a:ext uri="{FF2B5EF4-FFF2-40B4-BE49-F238E27FC236}">
-                <a16:creationId xmlns:a16="http://schemas.microsoft.com/office/drawing/2014/main" id="{6E6A5AF8-A8E7-4D6C-9D17-60E19DB8FEFA}"/>
+              <a:t>no search</a:t>
+            </a:r>
+          </a:p>
+        </p:txBody>
+      </p:sp>
+      <p:sp>
+        <p:nvSpPr>
+          <p:cNvPr id="19" name="">
+            <a:extLst xmlns:a="http://schemas.openxmlformats.org/drawingml/2006/main">
+              <a:ext uri="{FF2B5EF4-FFF2-40B4-BE49-F238E27FC236}">
+                <a16:creationId xmlns:a16="http://schemas.microsoft.com/office/drawing/2014/main" id="{490A0D30-0B0E-40A6-93BE-DC51B3F74C73}"/>
               </a:ext>
             </a:extLst>
           </p:cNvPr>
@@ -16827,89 +19435,8 @@
         </p:nvSpPr>
         <p:spPr>
           <a:xfrm xmlns:a="http://schemas.openxmlformats.org/drawingml/2006/main">
-            <a:off x="7067550" y="1619250"/>
-            <a:ext cx="7144" cy="285750"/>
-          </a:xfrm>
-          <a:prstGeom xmlns:a="http://schemas.openxmlformats.org/drawingml/2006/main" prst="rect">
-            <a:avLst/>
-          </a:prstGeom>
-          <a:solidFill xmlns:a="http://schemas.openxmlformats.org/drawingml/2006/main">
-            <a:srgbClr val="8DAAC5"/>
-          </a:solidFill>
-          <a:ln xmlns:a="http://schemas.openxmlformats.org/drawingml/2006/main" w="0">
-            <a:noFill/>
-            <a:prstDash val="solid"/>
-          </a:ln>
-        </p:spPr>
-      </p:sp>
-      <p:sp>
-        <p:nvSpPr>
-          <p:cNvPr id="22" name="">
-            <a:extLst xmlns:a="http://schemas.openxmlformats.org/drawingml/2006/main">
-              <a:ext uri="{FF2B5EF4-FFF2-40B4-BE49-F238E27FC236}">
-                <a16:creationId xmlns:a16="http://schemas.microsoft.com/office/drawing/2014/main" id="{79BB99A4-6687-4BBC-8363-A4A1BA5DA61B}"/>
-              </a:ext>
-            </a:extLst>
-          </p:cNvPr>
-          <p:cNvSpPr>
-            <a:spLocks xmlns:a="http://schemas.openxmlformats.org/drawingml/2006/main" noGrp="1"/>
-          </p:cNvSpPr>
-          <p:nvPr/>
-        </p:nvSpPr>
-        <p:spPr>
-          <a:xfrm xmlns:a="http://schemas.openxmlformats.org/drawingml/2006/main">
-            <a:off x="7124700" y="1685925"/>
-            <a:ext cx="1276350" cy="171450"/>
-          </a:xfrm>
-          <a:prstGeom xmlns:a="http://schemas.openxmlformats.org/drawingml/2006/main" prst="rect">
-            <a:avLst/>
-          </a:prstGeom>
-          <a:noFill xmlns:a="http://schemas.openxmlformats.org/drawingml/2006/main"/>
-          <a:ln xmlns:a="http://schemas.openxmlformats.org/drawingml/2006/main" w="0">
-            <a:noFill/>
-            <a:prstDash val="solid"/>
-          </a:ln>
-        </p:spPr>
-        <p:txBody>
-          <a:bodyPr xmlns:a="http://schemas.openxmlformats.org/drawingml/2006/main"/>
-          <a:lstStyle xmlns:a="http://schemas.openxmlformats.org/drawingml/2006/main"/>
-          <a:p xmlns:a="http://schemas.openxmlformats.org/drawingml/2006/main">
-            <a:pPr algn="l">
-              <a:defRPr sz="750" b="0">
-                <a:solidFill>
-                  <a:srgbClr val="000000"/>
-                </a:solidFill>
-              </a:defRPr>
-            </a:pPr>
-            <a:r>
-              <a:rPr sz="750" b="0">
-                <a:solidFill>
-                  <a:srgbClr val="000000"/>
-                </a:solidFill>
-              </a:rPr>
-              <a:t>logged baseline</a:t>
-            </a:r>
-          </a:p>
-        </p:txBody>
-      </p:sp>
-      <p:sp>
-        <p:nvSpPr>
-          <p:cNvPr id="23" name="">
-            <a:extLst xmlns:a="http://schemas.openxmlformats.org/drawingml/2006/main">
-              <a:ext uri="{FF2B5EF4-FFF2-40B4-BE49-F238E27FC236}">
-                <a16:creationId xmlns:a16="http://schemas.microsoft.com/office/drawing/2014/main" id="{7F56E3FC-B695-4938-8C07-E7DC47DCBAA6}"/>
-              </a:ext>
-            </a:extLst>
-          </p:cNvPr>
-          <p:cNvSpPr>
-            <a:spLocks xmlns:a="http://schemas.openxmlformats.org/drawingml/2006/main" noGrp="1"/>
-          </p:cNvSpPr>
-          <p:nvPr/>
-        </p:nvSpPr>
-        <p:spPr>
-          <a:xfrm xmlns:a="http://schemas.openxmlformats.org/drawingml/2006/main">
-            <a:off x="4762500" y="1905000"/>
-            <a:ext cx="3676650" cy="285750"/>
+            <a:off x="4762500" y="1943100"/>
+            <a:ext cx="3657600" cy="323850"/>
           </a:xfrm>
           <a:prstGeom xmlns:a="http://schemas.openxmlformats.org/drawingml/2006/main" prst="rect">
             <a:avLst/>
@@ -16927,10 +19454,10 @@
       </p:sp>
       <p:sp>
         <p:nvSpPr>
-          <p:cNvPr id="24" name="">
-            <a:extLst xmlns:a="http://schemas.openxmlformats.org/drawingml/2006/main">
-              <a:ext uri="{FF2B5EF4-FFF2-40B4-BE49-F238E27FC236}">
-                <a16:creationId xmlns:a16="http://schemas.microsoft.com/office/drawing/2014/main" id="{3108DABD-C96E-4732-A950-BA574AF15555}"/>
+          <p:cNvPr id="20" name="">
+            <a:extLst xmlns:a="http://schemas.openxmlformats.org/drawingml/2006/main">
+              <a:ext uri="{FF2B5EF4-FFF2-40B4-BE49-F238E27FC236}">
+                <a16:creationId xmlns:a16="http://schemas.microsoft.com/office/drawing/2014/main" id="{2083F304-1987-493E-A3A2-51E8758ABF9F}"/>
               </a:ext>
             </a:extLst>
           </p:cNvPr>
@@ -16941,8 +19468,8 @@
         </p:nvSpPr>
         <p:spPr>
           <a:xfrm xmlns:a="http://schemas.openxmlformats.org/drawingml/2006/main">
-            <a:off x="4819650" y="1971675"/>
-            <a:ext cx="781050" cy="171450"/>
+            <a:off x="4810125" y="2009775"/>
+            <a:ext cx="790575" cy="247650"/>
           </a:xfrm>
           <a:prstGeom xmlns:a="http://schemas.openxmlformats.org/drawingml/2006/main" prst="rect">
             <a:avLst/>
@@ -16958,14 +19485,14 @@
           <a:lstStyle xmlns:a="http://schemas.openxmlformats.org/drawingml/2006/main"/>
           <a:p xmlns:a="http://schemas.openxmlformats.org/drawingml/2006/main">
             <a:pPr algn="l">
-              <a:defRPr sz="750" b="0">
+              <a:defRPr sz="645" b="0">
                 <a:solidFill>
                   <a:srgbClr val="000000"/>
                 </a:solidFill>
               </a:defRPr>
             </a:pPr>
             <a:r>
-              <a:rPr sz="750" b="0">
+              <a:rPr sz="645" b="0">
                 <a:solidFill>
                   <a:srgbClr val="000000"/>
                 </a:solidFill>
@@ -16977,10 +19504,10 @@
       </p:sp>
       <p:sp>
         <p:nvSpPr>
-          <p:cNvPr id="25" name="">
-            <a:extLst xmlns:a="http://schemas.openxmlformats.org/drawingml/2006/main">
-              <a:ext uri="{FF2B5EF4-FFF2-40B4-BE49-F238E27FC236}">
-                <a16:creationId xmlns:a16="http://schemas.microsoft.com/office/drawing/2014/main" id="{D96D759A-C946-4286-AB86-C78F2E83073D}"/>
+          <p:cNvPr id="21" name="">
+            <a:extLst xmlns:a="http://schemas.openxmlformats.org/drawingml/2006/main">
+              <a:ext uri="{FF2B5EF4-FFF2-40B4-BE49-F238E27FC236}">
+                <a16:creationId xmlns:a16="http://schemas.microsoft.com/office/drawing/2014/main" id="{FA061BF7-39BB-4130-9469-7F057B22D3C0}"/>
               </a:ext>
             </a:extLst>
           </p:cNvPr>
@@ -16991,8 +19518,8 @@
         </p:nvSpPr>
         <p:spPr>
           <a:xfrm xmlns:a="http://schemas.openxmlformats.org/drawingml/2006/main">
-            <a:off x="5638800" y="1905000"/>
-            <a:ext cx="7144" cy="285750"/>
+            <a:off x="5638800" y="1943100"/>
+            <a:ext cx="7144" cy="323850"/>
           </a:xfrm>
           <a:prstGeom xmlns:a="http://schemas.openxmlformats.org/drawingml/2006/main" prst="rect">
             <a:avLst/>
@@ -17008,10 +19535,10 @@
       </p:sp>
       <p:sp>
         <p:nvSpPr>
-          <p:cNvPr id="26" name="">
-            <a:extLst xmlns:a="http://schemas.openxmlformats.org/drawingml/2006/main">
-              <a:ext uri="{FF2B5EF4-FFF2-40B4-BE49-F238E27FC236}">
-                <a16:creationId xmlns:a16="http://schemas.microsoft.com/office/drawing/2014/main" id="{C4F03E6D-0BDB-4EE7-8083-EAA50CE88C72}"/>
+          <p:cNvPr id="22" name="">
+            <a:extLst xmlns:a="http://schemas.openxmlformats.org/drawingml/2006/main">
+              <a:ext uri="{FF2B5EF4-FFF2-40B4-BE49-F238E27FC236}">
+                <a16:creationId xmlns:a16="http://schemas.microsoft.com/office/drawing/2014/main" id="{DAC62281-5963-4471-9FD6-EC6690EE63AD}"/>
               </a:ext>
             </a:extLst>
           </p:cNvPr>
@@ -17022,8 +19549,8 @@
         </p:nvSpPr>
         <p:spPr>
           <a:xfrm xmlns:a="http://schemas.openxmlformats.org/drawingml/2006/main">
-            <a:off x="5695950" y="1971675"/>
-            <a:ext cx="647700" cy="171450"/>
+            <a:off x="5686425" y="2009775"/>
+            <a:ext cx="1343025" cy="247650"/>
           </a:xfrm>
           <a:prstGeom xmlns:a="http://schemas.openxmlformats.org/drawingml/2006/main" prst="rect">
             <a:avLst/>
@@ -17039,29 +19566,29 @@
           <a:lstStyle xmlns:a="http://schemas.openxmlformats.org/drawingml/2006/main"/>
           <a:p xmlns:a="http://schemas.openxmlformats.org/drawingml/2006/main">
             <a:pPr algn="l">
-              <a:defRPr sz="750" b="0">
+              <a:defRPr sz="645" b="0">
                 <a:solidFill>
                   <a:srgbClr val="000000"/>
                 </a:solidFill>
               </a:defRPr>
             </a:pPr>
             <a:r>
-              <a:rPr sz="750" b="0">
+              <a:rPr sz="645" b="0">
                 <a:solidFill>
                   <a:srgbClr val="000000"/>
                 </a:solidFill>
               </a:rPr>
-              <a:t>model</a:t>
-            </a:r>
-          </a:p>
-        </p:txBody>
-      </p:sp>
-      <p:sp>
-        <p:nvSpPr>
-          <p:cNvPr id="27" name="">
-            <a:extLst xmlns:a="http://schemas.openxmlformats.org/drawingml/2006/main">
-              <a:ext uri="{FF2B5EF4-FFF2-40B4-BE49-F238E27FC236}">
-                <a16:creationId xmlns:a16="http://schemas.microsoft.com/office/drawing/2014/main" id="{3FBD7A2C-73E7-446B-A891-DF7BA205452C}"/>
+              <a:t>maximize everywhere</a:t>
+            </a:r>
+          </a:p>
+        </p:txBody>
+      </p:sp>
+      <p:sp>
+        <p:nvSpPr>
+          <p:cNvPr id="23" name="">
+            <a:extLst xmlns:a="http://schemas.openxmlformats.org/drawingml/2006/main">
+              <a:ext uri="{FF2B5EF4-FFF2-40B4-BE49-F238E27FC236}">
+                <a16:creationId xmlns:a16="http://schemas.microsoft.com/office/drawing/2014/main" id="{92D8BD96-14BA-41F8-98A5-0D40D8A72FA1}"/>
               </a:ext>
             </a:extLst>
           </p:cNvPr>
@@ -17072,8 +19599,8 @@
         </p:nvSpPr>
         <p:spPr>
           <a:xfrm xmlns:a="http://schemas.openxmlformats.org/drawingml/2006/main">
-            <a:off x="6381750" y="1905000"/>
-            <a:ext cx="7144" cy="285750"/>
+            <a:off x="7067550" y="1943100"/>
+            <a:ext cx="7144" cy="323850"/>
           </a:xfrm>
           <a:prstGeom xmlns:a="http://schemas.openxmlformats.org/drawingml/2006/main" prst="rect">
             <a:avLst/>
@@ -17089,10 +19616,10 @@
       </p:sp>
       <p:sp>
         <p:nvSpPr>
-          <p:cNvPr id="28" name="">
-            <a:extLst xmlns:a="http://schemas.openxmlformats.org/drawingml/2006/main">
-              <a:ext uri="{FF2B5EF4-FFF2-40B4-BE49-F238E27FC236}">
-                <a16:creationId xmlns:a16="http://schemas.microsoft.com/office/drawing/2014/main" id="{F99BA319-B612-4E7A-8FB2-B91044373F03}"/>
+          <p:cNvPr id="24" name="">
+            <a:extLst xmlns:a="http://schemas.openxmlformats.org/drawingml/2006/main">
+              <a:ext uri="{FF2B5EF4-FFF2-40B4-BE49-F238E27FC236}">
+                <a16:creationId xmlns:a16="http://schemas.microsoft.com/office/drawing/2014/main" id="{71AC7D95-4327-43FD-A159-8AE6C37FCD13}"/>
               </a:ext>
             </a:extLst>
           </p:cNvPr>
@@ -17103,8 +19630,8 @@
         </p:nvSpPr>
         <p:spPr>
           <a:xfrm xmlns:a="http://schemas.openxmlformats.org/drawingml/2006/main">
-            <a:off x="6438900" y="1971675"/>
-            <a:ext cx="590550" cy="171450"/>
+            <a:off x="7115175" y="2009775"/>
+            <a:ext cx="1266825" cy="247650"/>
           </a:xfrm>
           <a:prstGeom xmlns:a="http://schemas.openxmlformats.org/drawingml/2006/main" prst="rect">
             <a:avLst/>
@@ -17120,29 +19647,29 @@
           <a:lstStyle xmlns:a="http://schemas.openxmlformats.org/drawingml/2006/main"/>
           <a:p xmlns:a="http://schemas.openxmlformats.org/drawingml/2006/main">
             <a:pPr algn="l">
-              <a:defRPr sz="750" b="0">
+              <a:defRPr sz="645" b="0">
                 <a:solidFill>
                   <a:srgbClr val="000000"/>
                 </a:solidFill>
               </a:defRPr>
             </a:pPr>
             <a:r>
-              <a:rPr sz="750" b="0">
+              <a:rPr sz="645" b="0">
                 <a:solidFill>
                   <a:srgbClr val="000000"/>
                 </a:solidFill>
               </a:rPr>
-              <a:t>0.027</a:t>
-            </a:r>
-          </a:p>
-        </p:txBody>
-      </p:sp>
-      <p:sp>
-        <p:nvSpPr>
-          <p:cNvPr id="29" name="">
-            <a:extLst xmlns:a="http://schemas.openxmlformats.org/drawingml/2006/main">
-              <a:ext uri="{FF2B5EF4-FFF2-40B4-BE49-F238E27FC236}">
-                <a16:creationId xmlns:a16="http://schemas.microsoft.com/office/drawing/2014/main" id="{80D1C8B6-75C2-4947-AFCA-D4040D62AF28}"/>
+              <a:t>trusts model fully</a:t>
+            </a:r>
+          </a:p>
+        </p:txBody>
+      </p:sp>
+      <p:sp>
+        <p:nvSpPr>
+          <p:cNvPr id="25" name="">
+            <a:extLst xmlns:a="http://schemas.openxmlformats.org/drawingml/2006/main">
+              <a:ext uri="{FF2B5EF4-FFF2-40B4-BE49-F238E27FC236}">
+                <a16:creationId xmlns:a16="http://schemas.microsoft.com/office/drawing/2014/main" id="{4AA70E63-3F03-4DB5-958A-615C87883F65}"/>
               </a:ext>
             </a:extLst>
           </p:cNvPr>
@@ -17153,89 +19680,8 @@
         </p:nvSpPr>
         <p:spPr>
           <a:xfrm xmlns:a="http://schemas.openxmlformats.org/drawingml/2006/main">
-            <a:off x="7067550" y="1905000"/>
-            <a:ext cx="7144" cy="285750"/>
-          </a:xfrm>
-          <a:prstGeom xmlns:a="http://schemas.openxmlformats.org/drawingml/2006/main" prst="rect">
-            <a:avLst/>
-          </a:prstGeom>
-          <a:solidFill xmlns:a="http://schemas.openxmlformats.org/drawingml/2006/main">
-            <a:srgbClr val="8DAAC5"/>
-          </a:solidFill>
-          <a:ln xmlns:a="http://schemas.openxmlformats.org/drawingml/2006/main" w="0">
-            <a:noFill/>
-            <a:prstDash val="solid"/>
-          </a:ln>
-        </p:spPr>
-      </p:sp>
-      <p:sp>
-        <p:nvSpPr>
-          <p:cNvPr id="30" name="">
-            <a:extLst xmlns:a="http://schemas.openxmlformats.org/drawingml/2006/main">
-              <a:ext uri="{FF2B5EF4-FFF2-40B4-BE49-F238E27FC236}">
-                <a16:creationId xmlns:a16="http://schemas.microsoft.com/office/drawing/2014/main" id="{292514CD-A8FD-4234-8A83-A1A897A2B043}"/>
-              </a:ext>
-            </a:extLst>
-          </p:cNvPr>
-          <p:cNvSpPr>
-            <a:spLocks xmlns:a="http://schemas.openxmlformats.org/drawingml/2006/main" noGrp="1"/>
-          </p:cNvSpPr>
-          <p:nvPr/>
-        </p:nvSpPr>
-        <p:spPr>
-          <a:xfrm xmlns:a="http://schemas.openxmlformats.org/drawingml/2006/main">
-            <a:off x="7124700" y="1971675"/>
-            <a:ext cx="1276350" cy="171450"/>
-          </a:xfrm>
-          <a:prstGeom xmlns:a="http://schemas.openxmlformats.org/drawingml/2006/main" prst="rect">
-            <a:avLst/>
-          </a:prstGeom>
-          <a:noFill xmlns:a="http://schemas.openxmlformats.org/drawingml/2006/main"/>
-          <a:ln xmlns:a="http://schemas.openxmlformats.org/drawingml/2006/main" w="0">
-            <a:noFill/>
-            <a:prstDash val="solid"/>
-          </a:ln>
-        </p:spPr>
-        <p:txBody>
-          <a:bodyPr xmlns:a="http://schemas.openxmlformats.org/drawingml/2006/main"/>
-          <a:lstStyle xmlns:a="http://schemas.openxmlformats.org/drawingml/2006/main"/>
-          <a:p xmlns:a="http://schemas.openxmlformats.org/drawingml/2006/main">
-            <a:pPr algn="l">
-              <a:defRPr sz="750" b="0">
-                <a:solidFill>
-                  <a:srgbClr val="000000"/>
-                </a:solidFill>
-              </a:defRPr>
-            </a:pPr>
-            <a:r>
-              <a:rPr sz="750" b="0">
-                <a:solidFill>
-                  <a:srgbClr val="000000"/>
-                </a:solidFill>
-              </a:rPr>
-              <a:t>weak support</a:t>
-            </a:r>
-          </a:p>
-        </p:txBody>
-      </p:sp>
-      <p:sp>
-        <p:nvSpPr>
-          <p:cNvPr id="31" name="">
-            <a:extLst xmlns:a="http://schemas.openxmlformats.org/drawingml/2006/main">
-              <a:ext uri="{FF2B5EF4-FFF2-40B4-BE49-F238E27FC236}">
-                <a16:creationId xmlns:a16="http://schemas.microsoft.com/office/drawing/2014/main" id="{87573E4F-0EF7-4527-BC9B-564FD11EBA8A}"/>
-              </a:ext>
-            </a:extLst>
-          </p:cNvPr>
-          <p:cNvSpPr>
-            <a:spLocks xmlns:a="http://schemas.openxmlformats.org/drawingml/2006/main" noGrp="1"/>
-          </p:cNvSpPr>
-          <p:nvPr/>
-        </p:nvSpPr>
-        <p:spPr>
-          <a:xfrm xmlns:a="http://schemas.openxmlformats.org/drawingml/2006/main">
-            <a:off x="4762500" y="2190750"/>
-            <a:ext cx="3676650" cy="285750"/>
+            <a:off x="4762500" y="2266950"/>
+            <a:ext cx="3657600" cy="323850"/>
           </a:xfrm>
           <a:prstGeom xmlns:a="http://schemas.openxmlformats.org/drawingml/2006/main" prst="rect">
             <a:avLst/>
@@ -17253,10 +19699,10 @@
       </p:sp>
       <p:sp>
         <p:nvSpPr>
-          <p:cNvPr id="32" name="">
-            <a:extLst xmlns:a="http://schemas.openxmlformats.org/drawingml/2006/main">
-              <a:ext uri="{FF2B5EF4-FFF2-40B4-BE49-F238E27FC236}">
-                <a16:creationId xmlns:a16="http://schemas.microsoft.com/office/drawing/2014/main" id="{57C3B4FA-2835-4D0C-9599-C6370A82D2DB}"/>
+          <p:cNvPr id="26" name="">
+            <a:extLst xmlns:a="http://schemas.openxmlformats.org/drawingml/2006/main">
+              <a:ext uri="{FF2B5EF4-FFF2-40B4-BE49-F238E27FC236}">
+                <a16:creationId xmlns:a16="http://schemas.microsoft.com/office/drawing/2014/main" id="{9F2B8147-3F3A-47B4-A25C-122C33E8EC05}"/>
               </a:ext>
             </a:extLst>
           </p:cNvPr>
@@ -17267,8 +19713,8 @@
         </p:nvSpPr>
         <p:spPr>
           <a:xfrm xmlns:a="http://schemas.openxmlformats.org/drawingml/2006/main">
-            <a:off x="4819650" y="2257425"/>
-            <a:ext cx="781050" cy="171450"/>
+            <a:off x="4810125" y="2333625"/>
+            <a:ext cx="790575" cy="247650"/>
           </a:xfrm>
           <a:prstGeom xmlns:a="http://schemas.openxmlformats.org/drawingml/2006/main" prst="rect">
             <a:avLst/>
@@ -17284,14 +19730,14 @@
           <a:lstStyle xmlns:a="http://schemas.openxmlformats.org/drawingml/2006/main"/>
           <a:p xmlns:a="http://schemas.openxmlformats.org/drawingml/2006/main">
             <a:pPr algn="l">
-              <a:defRPr sz="750" b="0">
+              <a:defRPr sz="645" b="0">
                 <a:solidFill>
                   <a:srgbClr val="000000"/>
                 </a:solidFill>
               </a:defRPr>
             </a:pPr>
             <a:r>
-              <a:rPr sz="750" b="0">
+              <a:rPr sz="645" b="0">
                 <a:solidFill>
                   <a:srgbClr val="000000"/>
                 </a:solidFill>
@@ -17303,10 +19749,10 @@
       </p:sp>
       <p:sp>
         <p:nvSpPr>
-          <p:cNvPr id="33" name="">
-            <a:extLst xmlns:a="http://schemas.openxmlformats.org/drawingml/2006/main">
-              <a:ext uri="{FF2B5EF4-FFF2-40B4-BE49-F238E27FC236}">
-                <a16:creationId xmlns:a16="http://schemas.microsoft.com/office/drawing/2014/main" id="{76F8E392-1F77-480A-812E-B7222A3EB7AB}"/>
+          <p:cNvPr id="27" name="">
+            <a:extLst xmlns:a="http://schemas.openxmlformats.org/drawingml/2006/main">
+              <a:ext uri="{FF2B5EF4-FFF2-40B4-BE49-F238E27FC236}">
+                <a16:creationId xmlns:a16="http://schemas.microsoft.com/office/drawing/2014/main" id="{04BC33A0-D004-46A3-9F51-F5AF47ED7289}"/>
               </a:ext>
             </a:extLst>
           </p:cNvPr>
@@ -17317,8 +19763,8 @@
         </p:nvSpPr>
         <p:spPr>
           <a:xfrm xmlns:a="http://schemas.openxmlformats.org/drawingml/2006/main">
-            <a:off x="5638800" y="2190750"/>
-            <a:ext cx="7144" cy="285750"/>
+            <a:off x="5638800" y="2266950"/>
+            <a:ext cx="7144" cy="323850"/>
           </a:xfrm>
           <a:prstGeom xmlns:a="http://schemas.openxmlformats.org/drawingml/2006/main" prst="rect">
             <a:avLst/>
@@ -17334,10 +19780,10 @@
       </p:sp>
       <p:sp>
         <p:nvSpPr>
-          <p:cNvPr id="34" name="">
-            <a:extLst xmlns:a="http://schemas.openxmlformats.org/drawingml/2006/main">
-              <a:ext uri="{FF2B5EF4-FFF2-40B4-BE49-F238E27FC236}">
-                <a16:creationId xmlns:a16="http://schemas.microsoft.com/office/drawing/2014/main" id="{71826977-0D7D-4993-A521-BDEB7B69E6F0}"/>
+          <p:cNvPr id="28" name="">
+            <a:extLst xmlns:a="http://schemas.openxmlformats.org/drawingml/2006/main">
+              <a:ext uri="{FF2B5EF4-FFF2-40B4-BE49-F238E27FC236}">
+                <a16:creationId xmlns:a16="http://schemas.microsoft.com/office/drawing/2014/main" id="{66167CB7-32DD-4E8D-9766-373556A6F93E}"/>
               </a:ext>
             </a:extLst>
           </p:cNvPr>
@@ -17348,8 +19794,8 @@
         </p:nvSpPr>
         <p:spPr>
           <a:xfrm xmlns:a="http://schemas.openxmlformats.org/drawingml/2006/main">
-            <a:off x="5695950" y="2257425"/>
-            <a:ext cx="647700" cy="171450"/>
+            <a:off x="5686425" y="2333625"/>
+            <a:ext cx="1343025" cy="247650"/>
           </a:xfrm>
           <a:prstGeom xmlns:a="http://schemas.openxmlformats.org/drawingml/2006/main" prst="rect">
             <a:avLst/>
@@ -17365,29 +19811,29 @@
           <a:lstStyle xmlns:a="http://schemas.openxmlformats.org/drawingml/2006/main"/>
           <a:p xmlns:a="http://schemas.openxmlformats.org/drawingml/2006/main">
             <a:pPr algn="l">
-              <a:defRPr sz="750" b="0">
+              <a:defRPr sz="645" b="0">
                 <a:solidFill>
                   <a:srgbClr val="000000"/>
                 </a:solidFill>
               </a:defRPr>
             </a:pPr>
             <a:r>
-              <a:rPr sz="750" b="0">
+              <a:rPr sz="645" b="0">
                 <a:solidFill>
                   <a:srgbClr val="000000"/>
                 </a:solidFill>
               </a:rPr>
-              <a:t>model</a:t>
-            </a:r>
-          </a:p>
-        </p:txBody>
-      </p:sp>
-      <p:sp>
-        <p:nvSpPr>
-          <p:cNvPr id="35" name="">
-            <a:extLst xmlns:a="http://schemas.openxmlformats.org/drawingml/2006/main">
-              <a:ext uri="{FF2B5EF4-FFF2-40B4-BE49-F238E27FC236}">
-                <a16:creationId xmlns:a16="http://schemas.microsoft.com/office/drawing/2014/main" id="{943A0087-07E5-4617-87AB-E545D6EE0B98}"/>
+              <a:t>adds conservatism</a:t>
+            </a:r>
+          </a:p>
+        </p:txBody>
+      </p:sp>
+      <p:sp>
+        <p:nvSpPr>
+          <p:cNvPr id="29" name="">
+            <a:extLst xmlns:a="http://schemas.openxmlformats.org/drawingml/2006/main">
+              <a:ext uri="{FF2B5EF4-FFF2-40B4-BE49-F238E27FC236}">
+                <a16:creationId xmlns:a16="http://schemas.microsoft.com/office/drawing/2014/main" id="{1DE66B00-DBF6-4974-80A4-9081757912D6}"/>
               </a:ext>
             </a:extLst>
           </p:cNvPr>
@@ -17398,8 +19844,8 @@
         </p:nvSpPr>
         <p:spPr>
           <a:xfrm xmlns:a="http://schemas.openxmlformats.org/drawingml/2006/main">
-            <a:off x="6381750" y="2190750"/>
-            <a:ext cx="7144" cy="285750"/>
+            <a:off x="7067550" y="2266950"/>
+            <a:ext cx="7144" cy="323850"/>
           </a:xfrm>
           <a:prstGeom xmlns:a="http://schemas.openxmlformats.org/drawingml/2006/main" prst="rect">
             <a:avLst/>
@@ -17415,10 +19861,10 @@
       </p:sp>
       <p:sp>
         <p:nvSpPr>
-          <p:cNvPr id="36" name="">
-            <a:extLst xmlns:a="http://schemas.openxmlformats.org/drawingml/2006/main">
-              <a:ext uri="{FF2B5EF4-FFF2-40B4-BE49-F238E27FC236}">
-                <a16:creationId xmlns:a16="http://schemas.microsoft.com/office/drawing/2014/main" id="{F3206267-CFEE-4801-BE50-572F175C72F1}"/>
+          <p:cNvPr id="30" name="">
+            <a:extLst xmlns:a="http://schemas.openxmlformats.org/drawingml/2006/main">
+              <a:ext uri="{FF2B5EF4-FFF2-40B4-BE49-F238E27FC236}">
+                <a16:creationId xmlns:a16="http://schemas.microsoft.com/office/drawing/2014/main" id="{99A3DD4D-4F31-45F6-B659-E094652F5749}"/>
               </a:ext>
             </a:extLst>
           </p:cNvPr>
@@ -17429,8 +19875,8 @@
         </p:nvSpPr>
         <p:spPr>
           <a:xfrm xmlns:a="http://schemas.openxmlformats.org/drawingml/2006/main">
-            <a:off x="6438900" y="2257425"/>
-            <a:ext cx="590550" cy="171450"/>
+            <a:off x="7115175" y="2333625"/>
+            <a:ext cx="1266825" cy="247650"/>
           </a:xfrm>
           <a:prstGeom xmlns:a="http://schemas.openxmlformats.org/drawingml/2006/main" prst="rect">
             <a:avLst/>
@@ -17446,29 +19892,29 @@
           <a:lstStyle xmlns:a="http://schemas.openxmlformats.org/drawingml/2006/main"/>
           <a:p xmlns:a="http://schemas.openxmlformats.org/drawingml/2006/main">
             <a:pPr algn="l">
-              <a:defRPr sz="750" b="0">
+              <a:defRPr sz="645" b="0">
                 <a:solidFill>
                   <a:srgbClr val="000000"/>
                 </a:solidFill>
               </a:defRPr>
             </a:pPr>
             <a:r>
-              <a:rPr sz="750" b="0">
+              <a:rPr sz="645" b="0">
                 <a:solidFill>
                   <a:srgbClr val="000000"/>
                 </a:solidFill>
               </a:rPr>
-              <a:t>0.020</a:t>
-            </a:r>
-          </a:p>
-        </p:txBody>
-      </p:sp>
-      <p:sp>
-        <p:nvSpPr>
-          <p:cNvPr id="37" name="">
-            <a:extLst xmlns:a="http://schemas.openxmlformats.org/drawingml/2006/main">
-              <a:ext uri="{FF2B5EF4-FFF2-40B4-BE49-F238E27FC236}">
-                <a16:creationId xmlns:a16="http://schemas.microsoft.com/office/drawing/2014/main" id="{A3841E4A-86FF-440A-B7D2-85D7C07ED647}"/>
+              <a:t>distrusts off-support</a:t>
+            </a:r>
+          </a:p>
+        </p:txBody>
+      </p:sp>
+      <p:sp>
+        <p:nvSpPr>
+          <p:cNvPr id="31" name="">
+            <a:extLst xmlns:a="http://schemas.openxmlformats.org/drawingml/2006/main">
+              <a:ext uri="{FF2B5EF4-FFF2-40B4-BE49-F238E27FC236}">
+                <a16:creationId xmlns:a16="http://schemas.microsoft.com/office/drawing/2014/main" id="{5CF1CD9A-1945-492D-A564-198B133145C6}"/>
               </a:ext>
             </a:extLst>
           </p:cNvPr>
@@ -17479,89 +19925,8 @@
         </p:nvSpPr>
         <p:spPr>
           <a:xfrm xmlns:a="http://schemas.openxmlformats.org/drawingml/2006/main">
-            <a:off x="7067550" y="2190750"/>
-            <a:ext cx="7144" cy="285750"/>
-          </a:xfrm>
-          <a:prstGeom xmlns:a="http://schemas.openxmlformats.org/drawingml/2006/main" prst="rect">
-            <a:avLst/>
-          </a:prstGeom>
-          <a:solidFill xmlns:a="http://schemas.openxmlformats.org/drawingml/2006/main">
-            <a:srgbClr val="8DAAC5"/>
-          </a:solidFill>
-          <a:ln xmlns:a="http://schemas.openxmlformats.org/drawingml/2006/main" w="0">
-            <a:noFill/>
-            <a:prstDash val="solid"/>
-          </a:ln>
-        </p:spPr>
-      </p:sp>
-      <p:sp>
-        <p:nvSpPr>
-          <p:cNvPr id="38" name="">
-            <a:extLst xmlns:a="http://schemas.openxmlformats.org/drawingml/2006/main">
-              <a:ext uri="{FF2B5EF4-FFF2-40B4-BE49-F238E27FC236}">
-                <a16:creationId xmlns:a16="http://schemas.microsoft.com/office/drawing/2014/main" id="{F2A309E5-B7E7-48EC-BBFC-BE2EDBA41065}"/>
-              </a:ext>
-            </a:extLst>
-          </p:cNvPr>
-          <p:cNvSpPr>
-            <a:spLocks xmlns:a="http://schemas.openxmlformats.org/drawingml/2006/main" noGrp="1"/>
-          </p:cNvSpPr>
-          <p:nvPr/>
-        </p:nvSpPr>
-        <p:spPr>
-          <a:xfrm xmlns:a="http://schemas.openxmlformats.org/drawingml/2006/main">
-            <a:off x="7124700" y="2257425"/>
-            <a:ext cx="1276350" cy="171450"/>
-          </a:xfrm>
-          <a:prstGeom xmlns:a="http://schemas.openxmlformats.org/drawingml/2006/main" prst="rect">
-            <a:avLst/>
-          </a:prstGeom>
-          <a:noFill xmlns:a="http://schemas.openxmlformats.org/drawingml/2006/main"/>
-          <a:ln xmlns:a="http://schemas.openxmlformats.org/drawingml/2006/main" w="0">
-            <a:noFill/>
-            <a:prstDash val="solid"/>
-          </a:ln>
-        </p:spPr>
-        <p:txBody>
-          <a:bodyPr xmlns:a="http://schemas.openxmlformats.org/drawingml/2006/main"/>
-          <a:lstStyle xmlns:a="http://schemas.openxmlformats.org/drawingml/2006/main"/>
-          <a:p xmlns:a="http://schemas.openxmlformats.org/drawingml/2006/main">
-            <a:pPr algn="l">
-              <a:defRPr sz="750" b="0">
-                <a:solidFill>
-                  <a:srgbClr val="000000"/>
-                </a:solidFill>
-              </a:defRPr>
-            </a:pPr>
-            <a:r>
-              <a:rPr sz="750" b="0">
-                <a:solidFill>
-                  <a:srgbClr val="000000"/>
-                </a:solidFill>
-              </a:rPr>
-              <a:t>healthy ESS</a:t>
-            </a:r>
-          </a:p>
-        </p:txBody>
-      </p:sp>
-      <p:sp>
-        <p:nvSpPr>
-          <p:cNvPr id="39" name="">
-            <a:extLst xmlns:a="http://schemas.openxmlformats.org/drawingml/2006/main">
-              <a:ext uri="{FF2B5EF4-FFF2-40B4-BE49-F238E27FC236}">
-                <a16:creationId xmlns:a16="http://schemas.microsoft.com/office/drawing/2014/main" id="{D50E4A15-851B-46CF-9F3D-9773EA43AF28}"/>
-              </a:ext>
-            </a:extLst>
-          </p:cNvPr>
-          <p:cNvSpPr>
-            <a:spLocks xmlns:a="http://schemas.openxmlformats.org/drawingml/2006/main" noGrp="1"/>
-          </p:cNvSpPr>
-          <p:nvPr/>
-        </p:nvSpPr>
-        <p:spPr>
-          <a:xfrm xmlns:a="http://schemas.openxmlformats.org/drawingml/2006/main">
-            <a:off x="4762500" y="2476500"/>
-            <a:ext cx="3676650" cy="285750"/>
+            <a:off x="4762500" y="2590800"/>
+            <a:ext cx="3657600" cy="323850"/>
           </a:xfrm>
           <a:prstGeom xmlns:a="http://schemas.openxmlformats.org/drawingml/2006/main" prst="rect">
             <a:avLst/>
@@ -17579,10 +19944,10 @@
       </p:sp>
       <p:sp>
         <p:nvSpPr>
-          <p:cNvPr id="40" name="">
-            <a:extLst xmlns:a="http://schemas.openxmlformats.org/drawingml/2006/main">
-              <a:ext uri="{FF2B5EF4-FFF2-40B4-BE49-F238E27FC236}">
-                <a16:creationId xmlns:a16="http://schemas.microsoft.com/office/drawing/2014/main" id="{1741C08B-E302-46DD-BAE8-28D835EA706A}"/>
+          <p:cNvPr id="32" name="">
+            <a:extLst xmlns:a="http://schemas.openxmlformats.org/drawingml/2006/main">
+              <a:ext uri="{FF2B5EF4-FFF2-40B4-BE49-F238E27FC236}">
+                <a16:creationId xmlns:a16="http://schemas.microsoft.com/office/drawing/2014/main" id="{8514BEBB-BBFA-4DAC-80A8-1BEAA7F2630B}"/>
               </a:ext>
             </a:extLst>
           </p:cNvPr>
@@ -17593,8 +19958,8 @@
         </p:nvSpPr>
         <p:spPr>
           <a:xfrm xmlns:a="http://schemas.openxmlformats.org/drawingml/2006/main">
-            <a:off x="4819650" y="2543175"/>
-            <a:ext cx="781050" cy="171450"/>
+            <a:off x="4810125" y="2657475"/>
+            <a:ext cx="790575" cy="247650"/>
           </a:xfrm>
           <a:prstGeom xmlns:a="http://schemas.openxmlformats.org/drawingml/2006/main" prst="rect">
             <a:avLst/>
@@ -17610,14 +19975,14 @@
           <a:lstStyle xmlns:a="http://schemas.openxmlformats.org/drawingml/2006/main"/>
           <a:p xmlns:a="http://schemas.openxmlformats.org/drawingml/2006/main">
             <a:pPr algn="l">
-              <a:defRPr sz="750" b="0">
+              <a:defRPr sz="645" b="0">
                 <a:solidFill>
                   <a:srgbClr val="000000"/>
                 </a:solidFill>
               </a:defRPr>
             </a:pPr>
             <a:r>
-              <a:rPr sz="750" b="0">
+              <a:rPr sz="645" b="0">
                 <a:solidFill>
                   <a:srgbClr val="000000"/>
                 </a:solidFill>
@@ -17629,10 +19994,10 @@
       </p:sp>
       <p:sp>
         <p:nvSpPr>
-          <p:cNvPr id="41" name="">
-            <a:extLst xmlns:a="http://schemas.openxmlformats.org/drawingml/2006/main">
-              <a:ext uri="{FF2B5EF4-FFF2-40B4-BE49-F238E27FC236}">
-                <a16:creationId xmlns:a16="http://schemas.microsoft.com/office/drawing/2014/main" id="{18799E3A-B089-47D4-8C97-174B2CE4545D}"/>
+          <p:cNvPr id="33" name="">
+            <a:extLst xmlns:a="http://schemas.openxmlformats.org/drawingml/2006/main">
+              <a:ext uri="{FF2B5EF4-FFF2-40B4-BE49-F238E27FC236}">
+                <a16:creationId xmlns:a16="http://schemas.microsoft.com/office/drawing/2014/main" id="{71BBA10F-70C8-4E4A-BC1A-5AE3B5BB442E}"/>
               </a:ext>
             </a:extLst>
           </p:cNvPr>
@@ -17643,8 +20008,8 @@
         </p:nvSpPr>
         <p:spPr>
           <a:xfrm xmlns:a="http://schemas.openxmlformats.org/drawingml/2006/main">
-            <a:off x="5638800" y="2476500"/>
-            <a:ext cx="7144" cy="285750"/>
+            <a:off x="5638800" y="2590800"/>
+            <a:ext cx="7144" cy="323850"/>
           </a:xfrm>
           <a:prstGeom xmlns:a="http://schemas.openxmlformats.org/drawingml/2006/main" prst="rect">
             <a:avLst/>
@@ -17660,10 +20025,10 @@
       </p:sp>
       <p:sp>
         <p:nvSpPr>
-          <p:cNvPr id="42" name="">
-            <a:extLst xmlns:a="http://schemas.openxmlformats.org/drawingml/2006/main">
-              <a:ext uri="{FF2B5EF4-FFF2-40B4-BE49-F238E27FC236}">
-                <a16:creationId xmlns:a16="http://schemas.microsoft.com/office/drawing/2014/main" id="{2FFEF599-3784-489F-9EC6-AD800FF32545}"/>
+          <p:cNvPr id="34" name="">
+            <a:extLst xmlns:a="http://schemas.openxmlformats.org/drawingml/2006/main">
+              <a:ext uri="{FF2B5EF4-FFF2-40B4-BE49-F238E27FC236}">
+                <a16:creationId xmlns:a16="http://schemas.microsoft.com/office/drawing/2014/main" id="{46BF44E5-2B73-4281-95EE-3E061D330165}"/>
               </a:ext>
             </a:extLst>
           </p:cNvPr>
@@ -17674,8 +20039,8 @@
         </p:nvSpPr>
         <p:spPr>
           <a:xfrm xmlns:a="http://schemas.openxmlformats.org/drawingml/2006/main">
-            <a:off x="5695950" y="2543175"/>
-            <a:ext cx="647700" cy="171450"/>
+            <a:off x="5686425" y="2657475"/>
+            <a:ext cx="1343025" cy="247650"/>
           </a:xfrm>
           <a:prstGeom xmlns:a="http://schemas.openxmlformats.org/drawingml/2006/main" prst="rect">
             <a:avLst/>
@@ -17691,29 +20056,29 @@
           <a:lstStyle xmlns:a="http://schemas.openxmlformats.org/drawingml/2006/main"/>
           <a:p xmlns:a="http://schemas.openxmlformats.org/drawingml/2006/main">
             <a:pPr algn="l">
-              <a:defRPr sz="750" b="0">
+              <a:defRPr sz="645" b="0">
                 <a:solidFill>
                   <a:srgbClr val="000000"/>
                 </a:solidFill>
               </a:defRPr>
             </a:pPr>
             <a:r>
-              <a:rPr sz="750" b="0">
+              <a:rPr sz="645" b="0">
                 <a:solidFill>
                   <a:srgbClr val="000000"/>
                 </a:solidFill>
               </a:rPr>
-              <a:t>simulator</a:t>
-            </a:r>
-          </a:p>
-        </p:txBody>
-      </p:sp>
-      <p:sp>
-        <p:nvSpPr>
-          <p:cNvPr id="43" name="">
-            <a:extLst xmlns:a="http://schemas.openxmlformats.org/drawingml/2006/main">
-              <a:ext uri="{FF2B5EF4-FFF2-40B4-BE49-F238E27FC236}">
-                <a16:creationId xmlns:a16="http://schemas.microsoft.com/office/drawing/2014/main" id="{661B8352-7472-405A-8AAC-E5DE8B90EC4E}"/>
+              <a:t>optimizes simulator</a:t>
+            </a:r>
+          </a:p>
+        </p:txBody>
+      </p:sp>
+      <p:sp>
+        <p:nvSpPr>
+          <p:cNvPr id="35" name="">
+            <a:extLst xmlns:a="http://schemas.openxmlformats.org/drawingml/2006/main">
+              <a:ext uri="{FF2B5EF4-FFF2-40B4-BE49-F238E27FC236}">
+                <a16:creationId xmlns:a16="http://schemas.microsoft.com/office/drawing/2014/main" id="{E018D4E9-B0F5-47F4-B4E6-3CC9202AAA04}"/>
               </a:ext>
             </a:extLst>
           </p:cNvPr>
@@ -17724,8 +20089,8 @@
         </p:nvSpPr>
         <p:spPr>
           <a:xfrm xmlns:a="http://schemas.openxmlformats.org/drawingml/2006/main">
-            <a:off x="6381750" y="2476500"/>
-            <a:ext cx="7144" cy="285750"/>
+            <a:off x="7067550" y="2590800"/>
+            <a:ext cx="7144" cy="323850"/>
           </a:xfrm>
           <a:prstGeom xmlns:a="http://schemas.openxmlformats.org/drawingml/2006/main" prst="rect">
             <a:avLst/>
@@ -17741,10 +20106,10 @@
       </p:sp>
       <p:sp>
         <p:nvSpPr>
-          <p:cNvPr id="44" name="">
-            <a:extLst xmlns:a="http://schemas.openxmlformats.org/drawingml/2006/main">
-              <a:ext uri="{FF2B5EF4-FFF2-40B4-BE49-F238E27FC236}">
-                <a16:creationId xmlns:a16="http://schemas.microsoft.com/office/drawing/2014/main" id="{90DD310B-4B37-4CCB-B216-56AF9E29FE44}"/>
+          <p:cNvPr id="36" name="">
+            <a:extLst xmlns:a="http://schemas.openxmlformats.org/drawingml/2006/main">
+              <a:ext uri="{FF2B5EF4-FFF2-40B4-BE49-F238E27FC236}">
+                <a16:creationId xmlns:a16="http://schemas.microsoft.com/office/drawing/2014/main" id="{A512E68A-4800-432C-92E6-EE7FAAB07FC3}"/>
               </a:ext>
             </a:extLst>
           </p:cNvPr>
@@ -17755,8 +20120,8 @@
         </p:nvSpPr>
         <p:spPr>
           <a:xfrm xmlns:a="http://schemas.openxmlformats.org/drawingml/2006/main">
-            <a:off x="6438900" y="2543175"/>
-            <a:ext cx="590550" cy="171450"/>
+            <a:off x="7115175" y="2657475"/>
+            <a:ext cx="1266825" cy="247650"/>
           </a:xfrm>
           <a:prstGeom xmlns:a="http://schemas.openxmlformats.org/drawingml/2006/main" prst="rect">
             <a:avLst/>
@@ -17772,29 +20137,29 @@
           <a:lstStyle xmlns:a="http://schemas.openxmlformats.org/drawingml/2006/main"/>
           <a:p xmlns:a="http://schemas.openxmlformats.org/drawingml/2006/main">
             <a:pPr algn="l">
-              <a:defRPr sz="750" b="0">
+              <a:defRPr sz="645" b="0">
                 <a:solidFill>
                   <a:srgbClr val="000000"/>
                 </a:solidFill>
               </a:defRPr>
             </a:pPr>
             <a:r>
-              <a:rPr sz="750" b="0">
+              <a:rPr sz="645" b="0">
                 <a:solidFill>
                   <a:srgbClr val="000000"/>
                 </a:solidFill>
               </a:rPr>
-              <a:t>0.184</a:t>
-            </a:r>
-          </a:p>
-        </p:txBody>
-      </p:sp>
-      <p:sp>
-        <p:nvSpPr>
-          <p:cNvPr id="45" name="">
-            <a:extLst xmlns:a="http://schemas.openxmlformats.org/drawingml/2006/main">
-              <a:ext uri="{FF2B5EF4-FFF2-40B4-BE49-F238E27FC236}">
-                <a16:creationId xmlns:a16="http://schemas.microsoft.com/office/drawing/2014/main" id="{054191EB-678E-4176-BE0E-5A8D6BE8514E}"/>
+              <a:t>simulator-only evidence</a:t>
+            </a:r>
+          </a:p>
+        </p:txBody>
+      </p:sp>
+      <p:sp>
+        <p:nvSpPr>
+          <p:cNvPr id="37" name="">
+            <a:extLst xmlns:a="http://schemas.openxmlformats.org/drawingml/2006/main">
+              <a:ext uri="{FF2B5EF4-FFF2-40B4-BE49-F238E27FC236}">
+                <a16:creationId xmlns:a16="http://schemas.microsoft.com/office/drawing/2014/main" id="{7037000E-31E1-4B9E-8917-D69A1E3ACC6E}"/>
               </a:ext>
             </a:extLst>
           </p:cNvPr>
@@ -17805,39 +20170,8 @@
         </p:nvSpPr>
         <p:spPr>
           <a:xfrm xmlns:a="http://schemas.openxmlformats.org/drawingml/2006/main">
-            <a:off x="7067550" y="2476500"/>
-            <a:ext cx="7144" cy="285750"/>
-          </a:xfrm>
-          <a:prstGeom xmlns:a="http://schemas.openxmlformats.org/drawingml/2006/main" prst="rect">
-            <a:avLst/>
-          </a:prstGeom>
-          <a:solidFill xmlns:a="http://schemas.openxmlformats.org/drawingml/2006/main">
-            <a:srgbClr val="8DAAC5"/>
-          </a:solidFill>
-          <a:ln xmlns:a="http://schemas.openxmlformats.org/drawingml/2006/main" w="0">
-            <a:noFill/>
-            <a:prstDash val="solid"/>
-          </a:ln>
-        </p:spPr>
-      </p:sp>
-      <p:sp>
-        <p:nvSpPr>
-          <p:cNvPr id="46" name="">
-            <a:extLst xmlns:a="http://schemas.openxmlformats.org/drawingml/2006/main">
-              <a:ext uri="{FF2B5EF4-FFF2-40B4-BE49-F238E27FC236}">
-                <a16:creationId xmlns:a16="http://schemas.microsoft.com/office/drawing/2014/main" id="{B97C46D9-D2E6-4AB1-9F19-EF4DBBD9540F}"/>
-              </a:ext>
-            </a:extLst>
-          </p:cNvPr>
-          <p:cNvSpPr>
-            <a:spLocks xmlns:a="http://schemas.openxmlformats.org/drawingml/2006/main" noGrp="1"/>
-          </p:cNvSpPr>
-          <p:nvPr/>
-        </p:nvSpPr>
-        <p:spPr>
-          <a:xfrm xmlns:a="http://schemas.openxmlformats.org/drawingml/2006/main">
-            <a:off x="7124700" y="2543175"/>
-            <a:ext cx="1276350" cy="171450"/>
+            <a:off x="4810125" y="3257550"/>
+            <a:ext cx="3381375" cy="514350"/>
           </a:xfrm>
           <a:prstGeom xmlns:a="http://schemas.openxmlformats.org/drawingml/2006/main" prst="rect">
             <a:avLst/>
@@ -17853,69 +20187,19 @@
           <a:lstStyle xmlns:a="http://schemas.openxmlformats.org/drawingml/2006/main"/>
           <a:p xmlns:a="http://schemas.openxmlformats.org/drawingml/2006/main">
             <a:pPr algn="l">
-              <a:defRPr sz="750" b="0">
+              <a:defRPr sz="1013" b="1">
                 <a:solidFill>
-                  <a:srgbClr val="000000"/>
+                  <a:srgbClr val="005293"/>
                 </a:solidFill>
               </a:defRPr>
             </a:pPr>
             <a:r>
-              <a:rPr sz="750" b="0">
+              <a:rPr sz="1013" b="1">
                 <a:solidFill>
-                  <a:srgbClr val="000000"/>
+                  <a:srgbClr val="005293"/>
                 </a:solidFill>
               </a:rPr>
-              <a:t>simulator only</a:t>
-            </a:r>
-          </a:p>
-        </p:txBody>
-      </p:sp>
-      <p:sp>
-        <p:nvSpPr>
-          <p:cNvPr id="47" name="">
-            <a:extLst xmlns:a="http://schemas.openxmlformats.org/drawingml/2006/main">
-              <a:ext uri="{FF2B5EF4-FFF2-40B4-BE49-F238E27FC236}">
-                <a16:creationId xmlns:a16="http://schemas.microsoft.com/office/drawing/2014/main" id="{0DA9A460-B1D7-423E-8F09-4898267C337B}"/>
-              </a:ext>
-            </a:extLst>
-          </p:cNvPr>
-          <p:cNvSpPr>
-            <a:spLocks xmlns:a="http://schemas.openxmlformats.org/drawingml/2006/main" noGrp="1"/>
-          </p:cNvSpPr>
-          <p:nvPr/>
-        </p:nvSpPr>
-        <p:spPr>
-          <a:xfrm xmlns:a="http://schemas.openxmlformats.org/drawingml/2006/main">
-            <a:off x="4762500" y="3381375"/>
-            <a:ext cx="3524250" cy="571500"/>
-          </a:xfrm>
-          <a:prstGeom xmlns:a="http://schemas.openxmlformats.org/drawingml/2006/main" prst="rect">
-            <a:avLst/>
-          </a:prstGeom>
-          <a:noFill xmlns:a="http://schemas.openxmlformats.org/drawingml/2006/main"/>
-          <a:ln xmlns:a="http://schemas.openxmlformats.org/drawingml/2006/main" w="0">
-            <a:noFill/>
-            <a:prstDash val="solid"/>
-          </a:ln>
-        </p:spPr>
-        <p:txBody>
-          <a:bodyPr xmlns:a="http://schemas.openxmlformats.org/drawingml/2006/main"/>
-          <a:lstStyle xmlns:a="http://schemas.openxmlformats.org/drawingml/2006/main"/>
-          <a:p xmlns:a="http://schemas.openxmlformats.org/drawingml/2006/main">
-            <a:pPr algn="l">
-              <a:defRPr sz="1050" b="0">
-                <a:solidFill>
-                  <a:srgbClr val="000000"/>
-                </a:solidFill>
-              </a:defRPr>
-            </a:pPr>
-            <a:r>
-              <a:rPr sz="1050" b="0">
-                <a:solidFill>
-                  <a:srgbClr val="000000"/>
-                </a:solidFill>
-              </a:rPr>
-              <a:t>Read this as evidence triage, not a leaderboard. PPO is simulator-only; CQL is lower reward but more evaluable.</a:t>
+              <a:t>Every reported number carries an evidence type: observed, model estimate, or simulator-only.</a:t>
             </a:r>
           </a:p>
         </p:txBody>
@@ -17964,7 +20248,7 @@
           <a:lstStyle xmlns:a="http://schemas.openxmlformats.org/drawingml/2006/main"/>
           <a:p xmlns:a="http://schemas.openxmlformats.org/drawingml/2006/main">
             <a:r>
-              <a:t>OPE is diagnostic because true logging propensities are unavailable.</a:t>
+              <a:t>True logging propensities are unavailable, so off-policy evaluation is diagnostic, not causal.</a:t>
             </a:r>
           </a:p>
           <a:p xmlns:a="http://schemas.openxmlformats.org/drawingml/2006/main">
@@ -17974,7 +20258,7 @@
           </a:p>
           <a:p xmlns:a="http://schemas.openxmlformats.org/drawingml/2006/main">
             <a:r>
-              <a:t>The useful question is whether target actions have enough logged support.</a:t>
+              <a:t>Effective sample size measures how much logged data actually supports a target policy.</a:t>
             </a:r>
           </a:p>
           <a:p xmlns:a="http://schemas.openxmlformats.org/drawingml/2006/main">
@@ -17984,7 +20268,7 @@
           </a:p>
           <a:p xmlns:a="http://schemas.openxmlformats.org/drawingml/2006/main">
             <a:r>
-              <a:t>ESS makes unsupported extrapolation visible.</a:t>
+              <a:t>The useful question is not only reward. It is whether the target action can be evaluated from the logs.</a:t>
             </a:r>
           </a:p>
         </p:txBody>
@@ -18038,7 +20322,7 @@
           <a:lstStyle xmlns:a="http://schemas.openxmlformats.org/drawingml/2006/main"/>
           <a:p xmlns:a="http://schemas.openxmlformats.org/drawingml/2006/main">
             <a:r>
-              <a:t>eBay Best Offer anchoring RL | Why / How / What</a:t>
+              <a:t>eBay Best Offer anchoring RL | Advanced Seminar (WIHN0043SE)</a:t>
             </a:r>
           </a:p>
         </p:txBody>
@@ -18065,24 +20349,24 @@
           <a:lstStyle xmlns:a="http://schemas.openxmlformats.org/drawingml/2006/main"/>
           <a:p xmlns:a="http://schemas.openxmlformats.org/drawingml/2006/main">
             <a:r>
-              <a:t>How: OPE tests whether a policy is evaluable</a:t>
+              <a:t>How: OPE asks whether a policy is evaluable</a:t>
             </a:r>
           </a:p>
         </p:txBody>
       </p:sp>
       <p:graphicFrame>
         <p:nvGraphicFramePr>
-          <p:cNvPr id="13" name="Chart"/>
+          <p:cNvPr id="16" name="Chart"/>
           <p:cNvGraphicFramePr/>
           <p:nvPr/>
         </p:nvGraphicFramePr>
         <p:xfrm>
-          <a:off xmlns:a="http://schemas.openxmlformats.org/drawingml/2006/main" x="4810125" y="1257300"/>
-          <a:ext xmlns:a="http://schemas.openxmlformats.org/drawingml/2006/main" cx="3524250" cy="2381250"/>
+          <a:off xmlns:a="http://schemas.openxmlformats.org/drawingml/2006/main" x="4810125" y="1285875"/>
+          <a:ext xmlns:a="http://schemas.openxmlformats.org/drawingml/2006/main" cx="3476625" cy="2362200"/>
         </p:xfrm>
         <a:graphic xmlns:a="http://schemas.openxmlformats.org/drawingml/2006/main">
           <a:graphicData uri="http://schemas.openxmlformats.org/drawingml/2006/chart">
-            <c:chart xmlns:r="http://schemas.openxmlformats.org/officeDocument/2006/relationships" xmlns:c="http://schemas.openxmlformats.org/drawingml/2006/chart" r:id="R482a2d29f3c64933"/>
+            <c:chart xmlns:r="http://schemas.openxmlformats.org/officeDocument/2006/relationships" xmlns:c="http://schemas.openxmlformats.org/drawingml/2006/chart" r:id="R02a15bda6b114c8a"/>
           </a:graphicData>
         </a:graphic>
       </p:graphicFrame>
@@ -18091,7 +20375,7 @@
           <p:cNvPr id="8" name="">
             <a:extLst xmlns:a="http://schemas.openxmlformats.org/drawingml/2006/main">
               <a:ext uri="{FF2B5EF4-FFF2-40B4-BE49-F238E27FC236}">
-                <a16:creationId xmlns:a16="http://schemas.microsoft.com/office/drawing/2014/main" id="{0D5730CE-EF6E-4EEF-BFB1-D674517E2F79}"/>
+                <a16:creationId xmlns:a16="http://schemas.microsoft.com/office/drawing/2014/main" id="{BA4B7F2D-2E3C-4948-BA1A-10BA1284E991}"/>
               </a:ext>
             </a:extLst>
           </p:cNvPr>
@@ -18102,8 +20386,8 @@
         </p:nvSpPr>
         <p:spPr>
           <a:xfrm xmlns:a="http://schemas.openxmlformats.org/drawingml/2006/main">
-            <a:off x="4857750" y="3771900"/>
-            <a:ext cx="3333750" cy="323850"/>
+            <a:off x="7886700" y="1695450"/>
+            <a:ext cx="438150" cy="171450"/>
           </a:xfrm>
           <a:prstGeom xmlns:a="http://schemas.openxmlformats.org/drawingml/2006/main" prst="rect">
             <a:avLst/>
@@ -18118,20 +20402,170 @@
           <a:bodyPr xmlns:a="http://schemas.openxmlformats.org/drawingml/2006/main"/>
           <a:lstStyle xmlns:a="http://schemas.openxmlformats.org/drawingml/2006/main"/>
           <a:p xmlns:a="http://schemas.openxmlformats.org/drawingml/2006/main">
+            <a:pPr algn="r">
+              <a:defRPr sz="675" b="1">
+                <a:solidFill>
+                  <a:srgbClr val="000000"/>
+                </a:solidFill>
+              </a:defRPr>
+            </a:pPr>
+            <a:r>
+              <a:rPr sz="675" b="1">
+                <a:solidFill>
+                  <a:srgbClr val="000000"/>
+                </a:solidFill>
+              </a:rPr>
+              <a:t>36.2%</a:t>
+            </a:r>
+          </a:p>
+        </p:txBody>
+      </p:sp>
+      <p:sp>
+        <p:nvSpPr>
+          <p:cNvPr id="9" name="">
+            <a:extLst xmlns:a="http://schemas.openxmlformats.org/drawingml/2006/main">
+              <a:ext uri="{FF2B5EF4-FFF2-40B4-BE49-F238E27FC236}">
+                <a16:creationId xmlns:a16="http://schemas.microsoft.com/office/drawing/2014/main" id="{34FD0E57-1F07-497B-BE3E-507003940953}"/>
+              </a:ext>
+            </a:extLst>
+          </p:cNvPr>
+          <p:cNvSpPr>
+            <a:spLocks xmlns:a="http://schemas.openxmlformats.org/drawingml/2006/main" noGrp="1"/>
+          </p:cNvSpPr>
+          <p:nvPr/>
+        </p:nvSpPr>
+        <p:spPr>
+          <a:xfrm xmlns:a="http://schemas.openxmlformats.org/drawingml/2006/main">
+            <a:off x="7886700" y="2343150"/>
+            <a:ext cx="438150" cy="171450"/>
+          </a:xfrm>
+          <a:prstGeom xmlns:a="http://schemas.openxmlformats.org/drawingml/2006/main" prst="rect">
+            <a:avLst/>
+          </a:prstGeom>
+          <a:noFill xmlns:a="http://schemas.openxmlformats.org/drawingml/2006/main"/>
+          <a:ln xmlns:a="http://schemas.openxmlformats.org/drawingml/2006/main" w="0">
+            <a:noFill/>
+            <a:prstDash val="solid"/>
+          </a:ln>
+        </p:spPr>
+        <p:txBody>
+          <a:bodyPr xmlns:a="http://schemas.openxmlformats.org/drawingml/2006/main"/>
+          <a:lstStyle xmlns:a="http://schemas.openxmlformats.org/drawingml/2006/main"/>
+          <a:p xmlns:a="http://schemas.openxmlformats.org/drawingml/2006/main">
+            <a:pPr algn="r">
+              <a:defRPr sz="675" b="1">
+                <a:solidFill>
+                  <a:srgbClr val="000000"/>
+                </a:solidFill>
+              </a:defRPr>
+            </a:pPr>
+            <a:r>
+              <a:rPr sz="675" b="1">
+                <a:solidFill>
+                  <a:srgbClr val="000000"/>
+                </a:solidFill>
+              </a:rPr>
+              <a:t>36.2%</a:t>
+            </a:r>
+          </a:p>
+        </p:txBody>
+      </p:sp>
+      <p:sp>
+        <p:nvSpPr>
+          <p:cNvPr id="10" name="">
+            <a:extLst xmlns:a="http://schemas.openxmlformats.org/drawingml/2006/main">
+              <a:ext uri="{FF2B5EF4-FFF2-40B4-BE49-F238E27FC236}">
+                <a16:creationId xmlns:a16="http://schemas.microsoft.com/office/drawing/2014/main" id="{656E898B-2CD8-43F6-97A5-C5397A4C0877}"/>
+              </a:ext>
+            </a:extLst>
+          </p:cNvPr>
+          <p:cNvSpPr>
+            <a:spLocks xmlns:a="http://schemas.openxmlformats.org/drawingml/2006/main" noGrp="1"/>
+          </p:cNvSpPr>
+          <p:nvPr/>
+        </p:nvSpPr>
+        <p:spPr>
+          <a:xfrm xmlns:a="http://schemas.openxmlformats.org/drawingml/2006/main">
+            <a:off x="5486400" y="2990850"/>
+            <a:ext cx="400050" cy="171450"/>
+          </a:xfrm>
+          <a:prstGeom xmlns:a="http://schemas.openxmlformats.org/drawingml/2006/main" prst="rect">
+            <a:avLst/>
+          </a:prstGeom>
+          <a:noFill xmlns:a="http://schemas.openxmlformats.org/drawingml/2006/main"/>
+          <a:ln xmlns:a="http://schemas.openxmlformats.org/drawingml/2006/main" w="0">
+            <a:noFill/>
+            <a:prstDash val="solid"/>
+          </a:ln>
+        </p:spPr>
+        <p:txBody>
+          <a:bodyPr xmlns:a="http://schemas.openxmlformats.org/drawingml/2006/main"/>
+          <a:lstStyle xmlns:a="http://schemas.openxmlformats.org/drawingml/2006/main"/>
+          <a:p xmlns:a="http://schemas.openxmlformats.org/drawingml/2006/main">
             <a:pPr algn="l">
-              <a:defRPr sz="1050" b="1">
+              <a:defRPr sz="675" b="1">
+                <a:solidFill>
+                  <a:srgbClr val="000000"/>
+                </a:solidFill>
+              </a:defRPr>
+            </a:pPr>
+            <a:r>
+              <a:rPr sz="675" b="1">
+                <a:solidFill>
+                  <a:srgbClr val="000000"/>
+                </a:solidFill>
+              </a:rPr>
+              <a:t>0.8%</a:t>
+            </a:r>
+          </a:p>
+        </p:txBody>
+      </p:sp>
+      <p:sp>
+        <p:nvSpPr>
+          <p:cNvPr id="11" name="">
+            <a:extLst xmlns:a="http://schemas.openxmlformats.org/drawingml/2006/main">
+              <a:ext uri="{FF2B5EF4-FFF2-40B4-BE49-F238E27FC236}">
+                <a16:creationId xmlns:a16="http://schemas.microsoft.com/office/drawing/2014/main" id="{E2A82E28-DC4E-4613-8A38-351B5D6282F2}"/>
+              </a:ext>
+            </a:extLst>
+          </p:cNvPr>
+          <p:cNvSpPr>
+            <a:spLocks xmlns:a="http://schemas.openxmlformats.org/drawingml/2006/main" noGrp="1"/>
+          </p:cNvSpPr>
+          <p:nvPr/>
+        </p:nvSpPr>
+        <p:spPr>
+          <a:xfrm xmlns:a="http://schemas.openxmlformats.org/drawingml/2006/main">
+            <a:off x="4857750" y="3790950"/>
+            <a:ext cx="3381375" cy="323850"/>
+          </a:xfrm>
+          <a:prstGeom xmlns:a="http://schemas.openxmlformats.org/drawingml/2006/main" prst="rect">
+            <a:avLst/>
+          </a:prstGeom>
+          <a:noFill xmlns:a="http://schemas.openxmlformats.org/drawingml/2006/main"/>
+          <a:ln xmlns:a="http://schemas.openxmlformats.org/drawingml/2006/main" w="0">
+            <a:noFill/>
+            <a:prstDash val="solid"/>
+          </a:ln>
+        </p:spPr>
+        <p:txBody>
+          <a:bodyPr xmlns:a="http://schemas.openxmlformats.org/drawingml/2006/main"/>
+          <a:lstStyle xmlns:a="http://schemas.openxmlformats.org/drawingml/2006/main"/>
+          <a:p xmlns:a="http://schemas.openxmlformats.org/drawingml/2006/main">
+            <a:pPr algn="l">
+              <a:defRPr sz="975" b="1">
                 <a:solidFill>
                   <a:srgbClr val="005293"/>
                 </a:solidFill>
               </a:defRPr>
             </a:pPr>
             <a:r>
-              <a:rPr sz="1050" b="1">
+              <a:rPr sz="975" b="1">
                 <a:solidFill>
                   <a:srgbClr val="005293"/>
                 </a:solidFill>
               </a:rPr>
-              <a:t>At h = 0.05, CQL retains 36.2% effective support; greedy retains 0.8%.</a:t>
+              <a:t>Greedy looks attractive only because it leaves the logged support.</a:t>
             </a:r>
           </a:p>
         </p:txBody>

--- a/report/ebay_anchoring_rl_presentation.pptx
+++ b/report/ebay_anchoring_rl_presentation.pptx
@@ -2,26 +2,27 @@
 <file path=ppt/presentation.xml><?xml version="1.0" encoding="utf-8"?>
 <p:presentation xmlns:p="http://schemas.openxmlformats.org/presentationml/2006/main">
   <p:sldMasterIdLst>
-    <p:sldMasterId xmlns:r="http://schemas.openxmlformats.org/officeDocument/2006/relationships" id="2147483648" r:id="Reccd2d69562a4e10"/>
+    <p:sldMasterId xmlns:r="http://schemas.openxmlformats.org/officeDocument/2006/relationships" id="2147483648" r:id="Rb18b11d49b1a4a87"/>
   </p:sldMasterIdLst>
   <p:notesMasterIdLst>
-    <p:notesMasterId xmlns:r="http://schemas.openxmlformats.org/officeDocument/2006/relationships" r:id="R965cc9f0266148aa"/>
+    <p:notesMasterId xmlns:r="http://schemas.openxmlformats.org/officeDocument/2006/relationships" r:id="R17906ce6c9864ee5"/>
   </p:notesMasterIdLst>
   <p:sldIdLst>
-    <p:sldId xmlns:r="http://schemas.openxmlformats.org/officeDocument/2006/relationships" id="256" r:id="R6465e1d50e874c7a"/>
-    <p:sldId xmlns:r="http://schemas.openxmlformats.org/officeDocument/2006/relationships" id="257" r:id="R00f1fd69f23c49ea"/>
-    <p:sldId xmlns:r="http://schemas.openxmlformats.org/officeDocument/2006/relationships" id="258" r:id="R09079d0f1a754969"/>
-    <p:sldId xmlns:r="http://schemas.openxmlformats.org/officeDocument/2006/relationships" id="259" r:id="R9f5f854875eb4ea7"/>
-    <p:sldId xmlns:r="http://schemas.openxmlformats.org/officeDocument/2006/relationships" id="260" r:id="R919a38ba02244ee6"/>
-    <p:sldId xmlns:r="http://schemas.openxmlformats.org/officeDocument/2006/relationships" id="261" r:id="Raa286811c9254357"/>
-    <p:sldId xmlns:r="http://schemas.openxmlformats.org/officeDocument/2006/relationships" id="262" r:id="Rde3b2e9df5e14158"/>
-    <p:sldId xmlns:r="http://schemas.openxmlformats.org/officeDocument/2006/relationships" id="263" r:id="Ra97f4e6368ef495d"/>
-    <p:sldId xmlns:r="http://schemas.openxmlformats.org/officeDocument/2006/relationships" id="264" r:id="R68a49ff8c93f48fa"/>
-    <p:sldId xmlns:r="http://schemas.openxmlformats.org/officeDocument/2006/relationships" id="265" r:id="Rb582f0b3b00445fd"/>
-    <p:sldId xmlns:r="http://schemas.openxmlformats.org/officeDocument/2006/relationships" id="266" r:id="Rff90bfd289d1479e"/>
-    <p:sldId xmlns:r="http://schemas.openxmlformats.org/officeDocument/2006/relationships" id="267" r:id="Rec8132d5927a4923"/>
-    <p:sldId xmlns:r="http://schemas.openxmlformats.org/officeDocument/2006/relationships" id="268" r:id="R6f293f64b8f4443f"/>
-    <p:sldId xmlns:r="http://schemas.openxmlformats.org/officeDocument/2006/relationships" id="269" r:id="Rb46a4f1c97d34894"/>
+    <p:sldId xmlns:r="http://schemas.openxmlformats.org/officeDocument/2006/relationships" id="256" r:id="R06e1c4abb53c4108"/>
+    <p:sldId xmlns:r="http://schemas.openxmlformats.org/officeDocument/2006/relationships" id="257" r:id="R71e60174eb224aee"/>
+    <p:sldId xmlns:r="http://schemas.openxmlformats.org/officeDocument/2006/relationships" id="258" r:id="R9ccebb2805cb420d"/>
+    <p:sldId xmlns:r="http://schemas.openxmlformats.org/officeDocument/2006/relationships" id="259" r:id="R914bc5981272473e"/>
+    <p:sldId xmlns:r="http://schemas.openxmlformats.org/officeDocument/2006/relationships" id="260" r:id="R23ee085260d04396"/>
+    <p:sldId xmlns:r="http://schemas.openxmlformats.org/officeDocument/2006/relationships" id="261" r:id="R437251f166274495"/>
+    <p:sldId xmlns:r="http://schemas.openxmlformats.org/officeDocument/2006/relationships" id="262" r:id="R4f75eb74ff684624"/>
+    <p:sldId xmlns:r="http://schemas.openxmlformats.org/officeDocument/2006/relationships" id="263" r:id="Re4cc04a768f5454c"/>
+    <p:sldId xmlns:r="http://schemas.openxmlformats.org/officeDocument/2006/relationships" id="264" r:id="R39779d0770234719"/>
+    <p:sldId xmlns:r="http://schemas.openxmlformats.org/officeDocument/2006/relationships" id="265" r:id="Rf0851880686d40ec"/>
+    <p:sldId xmlns:r="http://schemas.openxmlformats.org/officeDocument/2006/relationships" id="266" r:id="R46a1eed907394a3e"/>
+    <p:sldId xmlns:r="http://schemas.openxmlformats.org/officeDocument/2006/relationships" id="267" r:id="Re00eddf80dda4df9"/>
+    <p:sldId xmlns:r="http://schemas.openxmlformats.org/officeDocument/2006/relationships" id="268" r:id="R86524e7d278e40cc"/>
+    <p:sldId xmlns:r="http://schemas.openxmlformats.org/officeDocument/2006/relationships" id="269" r:id="R6814c36df9404a80"/>
+    <p:sldId xmlns:r="http://schemas.openxmlformats.org/officeDocument/2006/relationships" id="270" r:id="Ra8a45ae55f9646c8"/>
   </p:sldIdLst>
   <p:sldSz cx="9144000" cy="5143500"/>
   <p:notesSz cx="6858000" cy="9144000"/>
@@ -949,6 +950,72 @@
 </p:notes>
 </file>
 
+<file path=ppt/notesSlides/notesSlide15.xml><?xml version="1.0" encoding="utf-8"?>
+<p:notes xmlns:p="http://schemas.openxmlformats.org/presentationml/2006/main">
+  <p:cSld>
+    <p:spTree>
+      <p:nvGrpSpPr>
+        <p:cNvPr id="1" name=""/>
+        <p:cNvGrpSpPr/>
+        <p:nvPr/>
+      </p:nvGrpSpPr>
+      <p:grpSpPr>
+        <a:xfrm xmlns:a="http://schemas.openxmlformats.org/drawingml/2006/main"/>
+      </p:grpSpPr>
+      <p:sp>
+        <p:nvSpPr>
+          <p:cNvPr id="2" name="Slide Image Placeholder 1"/>
+          <p:cNvSpPr>
+            <a:spLocks xmlns:a="http://schemas.openxmlformats.org/drawingml/2006/main" noGrp="1"/>
+          </p:cNvSpPr>
+          <p:nvPr>
+            <p:ph type="sldImg" idx="0"/>
+          </p:nvPr>
+        </p:nvSpPr>
+        <p:spPr/>
+      </p:sp>
+      <p:sp>
+        <p:nvSpPr>
+          <p:cNvPr id="3" name="Notes Placeholder 2"/>
+          <p:cNvSpPr>
+            <a:spLocks xmlns:a="http://schemas.openxmlformats.org/drawingml/2006/main" noGrp="1"/>
+          </p:cNvSpPr>
+          <p:nvPr>
+            <p:ph type="body" idx="1"/>
+          </p:nvPr>
+        </p:nvSpPr>
+        <p:spPr/>
+        <p:txBody>
+          <a:bodyPr xmlns:a="http://schemas.openxmlformats.org/drawingml/2006/main"/>
+          <a:lstStyle xmlns:a="http://schemas.openxmlformats.org/drawingml/2006/main"/>
+          <a:p xmlns:a="http://schemas.openxmlformats.org/drawingml/2006/main"/>
+        </p:txBody>
+      </p:sp>
+      <p:sp>
+        <p:nvSpPr>
+          <p:cNvPr id="4" name="Slide Number Placeholder 3"/>
+          <p:cNvSpPr>
+            <a:spLocks xmlns:a="http://schemas.openxmlformats.org/drawingml/2006/main" noGrp="1"/>
+          </p:cNvSpPr>
+          <p:nvPr>
+            <p:ph type="sldNum" idx="5"/>
+          </p:nvPr>
+        </p:nvSpPr>
+        <p:spPr/>
+        <p:txBody>
+          <a:bodyPr xmlns:a="http://schemas.openxmlformats.org/drawingml/2006/main"/>
+          <a:lstStyle xmlns:a="http://schemas.openxmlformats.org/drawingml/2006/main"/>
+          <a:p xmlns:a="http://schemas.openxmlformats.org/drawingml/2006/main"/>
+        </p:txBody>
+      </p:sp>
+    </p:spTree>
+  </p:cSld>
+  <p:clrMapOvr>
+    <a:masterClrMapping xmlns:a="http://schemas.openxmlformats.org/drawingml/2006/main"/>
+  </p:clrMapOvr>
+</p:notes>
+</file>
+
 <file path=ppt/notesSlides/notesSlide2.xml><?xml version="1.0" encoding="utf-8"?>
 <p:notes xmlns:p="http://schemas.openxmlformats.org/presentationml/2006/main">
   <p:cSld>
@@ -4435,17 +4502,17 @@
   </p:cSld>
   <p:clrMap bg1="lt1" tx1="dk1" bg2="lt2" tx2="dk2" accent1="accent1" accent2="accent2" accent3="accent3" accent4="accent4" accent5="accent5" accent6="accent6" hlink="hlink" folHlink="folHlink"/>
   <p:sldLayoutIdLst>
-    <p:sldLayoutId xmlns:r="http://schemas.openxmlformats.org/officeDocument/2006/relationships" id="2147483649" r:id="R90fdd8cd5cdc4f3d"/>
-    <p:sldLayoutId xmlns:r="http://schemas.openxmlformats.org/officeDocument/2006/relationships" id="2147483650" r:id="Rf44d275cb39349b2"/>
-    <p:sldLayoutId xmlns:r="http://schemas.openxmlformats.org/officeDocument/2006/relationships" id="2147483651" r:id="Rf4bfd9db91184d82"/>
-    <p:sldLayoutId xmlns:r="http://schemas.openxmlformats.org/officeDocument/2006/relationships" id="2147483652" r:id="R24c3c3f209764c26"/>
-    <p:sldLayoutId xmlns:r="http://schemas.openxmlformats.org/officeDocument/2006/relationships" id="2147483653" r:id="Rd374eccfa321482c"/>
-    <p:sldLayoutId xmlns:r="http://schemas.openxmlformats.org/officeDocument/2006/relationships" id="2147483654" r:id="R767cd620b42b4d76"/>
-    <p:sldLayoutId xmlns:r="http://schemas.openxmlformats.org/officeDocument/2006/relationships" id="2147483655" r:id="R4b87c222a39547b3"/>
-    <p:sldLayoutId xmlns:r="http://schemas.openxmlformats.org/officeDocument/2006/relationships" id="2147483656" r:id="Rb00fb10d8e3d45c4"/>
-    <p:sldLayoutId xmlns:r="http://schemas.openxmlformats.org/officeDocument/2006/relationships" id="2147483657" r:id="R0d2102cb5d07499d"/>
-    <p:sldLayoutId xmlns:r="http://schemas.openxmlformats.org/officeDocument/2006/relationships" id="2147483658" r:id="R58b7b80cdfee4adb"/>
-    <p:sldLayoutId xmlns:r="http://schemas.openxmlformats.org/officeDocument/2006/relationships" id="2147483659" r:id="Rcc2a293c09dc4792"/>
+    <p:sldLayoutId xmlns:r="http://schemas.openxmlformats.org/officeDocument/2006/relationships" id="2147483649" r:id="R83e70888bb23499e"/>
+    <p:sldLayoutId xmlns:r="http://schemas.openxmlformats.org/officeDocument/2006/relationships" id="2147483650" r:id="R1767977c581d4835"/>
+    <p:sldLayoutId xmlns:r="http://schemas.openxmlformats.org/officeDocument/2006/relationships" id="2147483651" r:id="Red5587056e884629"/>
+    <p:sldLayoutId xmlns:r="http://schemas.openxmlformats.org/officeDocument/2006/relationships" id="2147483652" r:id="Ra41f1bdad1e04776"/>
+    <p:sldLayoutId xmlns:r="http://schemas.openxmlformats.org/officeDocument/2006/relationships" id="2147483653" r:id="R00b7778e8b6d4f1a"/>
+    <p:sldLayoutId xmlns:r="http://schemas.openxmlformats.org/officeDocument/2006/relationships" id="2147483654" r:id="R5f7ac345e5a948df"/>
+    <p:sldLayoutId xmlns:r="http://schemas.openxmlformats.org/officeDocument/2006/relationships" id="2147483655" r:id="Re27b9ef12f994ceb"/>
+    <p:sldLayoutId xmlns:r="http://schemas.openxmlformats.org/officeDocument/2006/relationships" id="2147483656" r:id="R85a04191d6064dc9"/>
+    <p:sldLayoutId xmlns:r="http://schemas.openxmlformats.org/officeDocument/2006/relationships" id="2147483657" r:id="Rdf2685746d1243e1"/>
+    <p:sldLayoutId xmlns:r="http://schemas.openxmlformats.org/officeDocument/2006/relationships" id="2147483658" r:id="Rc5053c11f2384d6d"/>
+    <p:sldLayoutId xmlns:r="http://schemas.openxmlformats.org/officeDocument/2006/relationships" id="2147483659" r:id="R7e122ed921414cf0"/>
   </p:sldLayoutIdLst>
   <p:txStyles>
     <p:titleStyle>
@@ -6026,7 +6093,7 @@
           <p:nvPr/>
         </p:nvPicPr>
         <p:blipFill>
-          <a:blip xmlns:r="http://schemas.openxmlformats.org/officeDocument/2006/relationships" xmlns:a="http://schemas.openxmlformats.org/drawingml/2006/main" r:embed="Rf9b3417492414603"/>
+          <a:blip xmlns:r="http://schemas.openxmlformats.org/officeDocument/2006/relationships" xmlns:a="http://schemas.openxmlformats.org/drawingml/2006/main" r:embed="R920131b0e46b4504"/>
           <a:stretch xmlns:a="http://schemas.openxmlformats.org/drawingml/2006/main">
             <a:fillRect l="0" t="0" r="0" b="0"/>
           </a:stretch>
@@ -6329,7 +6396,7 @@
           <p:nvPr/>
         </p:nvPicPr>
         <p:blipFill>
-          <a:blip xmlns:r="http://schemas.openxmlformats.org/officeDocument/2006/relationships" xmlns:a="http://schemas.openxmlformats.org/drawingml/2006/main" r:embed="R676b2d4cf30c402a"/>
+          <a:blip xmlns:r="http://schemas.openxmlformats.org/officeDocument/2006/relationships" xmlns:a="http://schemas.openxmlformats.org/drawingml/2006/main" r:embed="R13c728c21e4f46a2"/>
           <a:stretch xmlns:a="http://schemas.openxmlformats.org/drawingml/2006/main">
             <a:fillRect l="0" t="0" r="0" b="0"/>
           </a:stretch>
@@ -6625,7 +6692,7 @@
           <p:nvPr/>
         </p:nvPicPr>
         <p:blipFill>
-          <a:blip xmlns:r="http://schemas.openxmlformats.org/officeDocument/2006/relationships" xmlns:a="http://schemas.openxmlformats.org/drawingml/2006/main" r:embed="R54c9799cf1ec4b9f"/>
+          <a:blip xmlns:r="http://schemas.openxmlformats.org/officeDocument/2006/relationships" xmlns:a="http://schemas.openxmlformats.org/drawingml/2006/main" r:embed="R96f9dbd99e8f4684"/>
           <a:stretch xmlns:a="http://schemas.openxmlformats.org/drawingml/2006/main">
             <a:fillRect l="0" t="0" r="0" b="0"/>
           </a:stretch>
@@ -7543,7 +7610,7 @@
           <p:nvPr/>
         </p:nvPicPr>
         <p:blipFill>
-          <a:blip xmlns:r="http://schemas.openxmlformats.org/officeDocument/2006/relationships" xmlns:a="http://schemas.openxmlformats.org/drawingml/2006/main" r:embed="Rb117954d25944c30"/>
+          <a:blip xmlns:r="http://schemas.openxmlformats.org/officeDocument/2006/relationships" xmlns:a="http://schemas.openxmlformats.org/drawingml/2006/main" r:embed="R9b40bd527ba242e2"/>
           <a:stretch xmlns:a="http://schemas.openxmlformats.org/drawingml/2006/main">
             <a:fillRect l="0" t="0" r="0" b="0"/>
           </a:stretch>
@@ -8139,7 +8206,7 @@
           <p:nvPr/>
         </p:nvPicPr>
         <p:blipFill>
-          <a:blip xmlns:r="http://schemas.openxmlformats.org/officeDocument/2006/relationships" xmlns:a="http://schemas.openxmlformats.org/drawingml/2006/main" r:embed="R17027f840cb949c3"/>
+          <a:blip xmlns:r="http://schemas.openxmlformats.org/officeDocument/2006/relationships" xmlns:a="http://schemas.openxmlformats.org/drawingml/2006/main" r:embed="R88f30944e7a54d84"/>
           <a:stretch xmlns:a="http://schemas.openxmlformats.org/drawingml/2006/main">
             <a:fillRect l="0" t="0" r="0" b="0"/>
           </a:stretch>
@@ -8535,6 +8602,7 @@
           <a:lstStyle xmlns:a="http://schemas.openxmlformats.org/drawingml/2006/main"/>
           <a:p xmlns:a="http://schemas.openxmlformats.org/drawingml/2006/main">
             <a:pPr algn="l">
+              <a:buNone/>
               <a:defRPr sz="2175" b="1" i="0">
                 <a:solidFill>
                   <a:srgbClr val="000000"/>
@@ -8616,6 +8684,7 @@
           <a:lstStyle xmlns:a="http://schemas.openxmlformats.org/drawingml/2006/main"/>
           <a:p xmlns:a="http://schemas.openxmlformats.org/drawingml/2006/main">
             <a:pPr algn="l">
+              <a:buNone/>
               <a:defRPr sz="1238" b="0" i="0">
                 <a:solidFill>
                   <a:srgbClr val="6B6B6B"/>
@@ -8730,6 +8799,7 @@
           <a:lstStyle xmlns:a="http://schemas.openxmlformats.org/drawingml/2006/main"/>
           <a:p xmlns:a="http://schemas.openxmlformats.org/drawingml/2006/main">
             <a:pPr algn="l">
+              <a:buNone/>
               <a:defRPr sz="1350" b="1" i="0">
                 <a:solidFill>
                   <a:srgbClr val="005293"/>
@@ -8780,6 +8850,7 @@
           <a:lstStyle xmlns:a="http://schemas.openxmlformats.org/drawingml/2006/main"/>
           <a:p xmlns:a="http://schemas.openxmlformats.org/drawingml/2006/main">
             <a:pPr algn="l">
+              <a:buNone/>
               <a:defRPr sz="1088" b="0" i="0">
                 <a:solidFill>
                   <a:srgbClr val="000000"/>
@@ -8894,6 +8965,7 @@
           <a:lstStyle xmlns:a="http://schemas.openxmlformats.org/drawingml/2006/main"/>
           <a:p xmlns:a="http://schemas.openxmlformats.org/drawingml/2006/main">
             <a:pPr algn="l">
+              <a:buNone/>
               <a:defRPr sz="1350" b="1" i="0">
                 <a:solidFill>
                   <a:srgbClr val="005293"/>
@@ -8944,6 +9016,7 @@
           <a:lstStyle xmlns:a="http://schemas.openxmlformats.org/drawingml/2006/main"/>
           <a:p xmlns:a="http://schemas.openxmlformats.org/drawingml/2006/main">
             <a:pPr algn="l">
+              <a:buNone/>
               <a:defRPr sz="1088" b="0" i="0">
                 <a:solidFill>
                   <a:srgbClr val="000000"/>
@@ -8961,6 +9034,7 @@
           </a:p>
           <a:p xmlns:a="http://schemas.openxmlformats.org/drawingml/2006/main">
             <a:pPr algn="l">
+              <a:buNone/>
               <a:defRPr sz="1088" b="0" i="0">
                 <a:solidFill>
                   <a:srgbClr val="000000"/>
@@ -9075,6 +9149,7 @@
           <a:lstStyle xmlns:a="http://schemas.openxmlformats.org/drawingml/2006/main"/>
           <a:p xmlns:a="http://schemas.openxmlformats.org/drawingml/2006/main">
             <a:pPr algn="l">
+              <a:buNone/>
               <a:defRPr sz="1350" b="1" i="0">
                 <a:solidFill>
                   <a:srgbClr val="005293"/>
@@ -9125,6 +9200,7 @@
           <a:lstStyle xmlns:a="http://schemas.openxmlformats.org/drawingml/2006/main"/>
           <a:p xmlns:a="http://schemas.openxmlformats.org/drawingml/2006/main">
             <a:pPr algn="l">
+              <a:buNone/>
               <a:defRPr sz="1088" b="0" i="0">
                 <a:solidFill>
                   <a:srgbClr val="000000"/>
@@ -9208,6 +9284,7 @@
           <a:lstStyle xmlns:a="http://schemas.openxmlformats.org/drawingml/2006/main"/>
           <a:p xmlns:a="http://schemas.openxmlformats.org/drawingml/2006/main">
             <a:pPr algn="ctr">
+              <a:buNone/>
               <a:defRPr sz="1140" b="1" i="0">
                 <a:solidFill>
                   <a:srgbClr val="005293"/>
@@ -9258,6 +9335,7 @@
           <a:lstStyle xmlns:a="http://schemas.openxmlformats.org/drawingml/2006/main"/>
           <a:p xmlns:a="http://schemas.openxmlformats.org/drawingml/2006/main">
             <a:pPr algn="l">
+              <a:buNone/>
               <a:defRPr sz="1102" b="0" i="0">
                 <a:solidFill>
                   <a:srgbClr val="000000"/>
@@ -9308,6 +9386,7 @@
           <a:lstStyle xmlns:a="http://schemas.openxmlformats.org/drawingml/2006/main"/>
           <a:p xmlns:a="http://schemas.openxmlformats.org/drawingml/2006/main">
             <a:pPr algn="r">
+              <a:buNone/>
               <a:defRPr sz="1102" b="0" i="0">
                 <a:solidFill>
                   <a:srgbClr val="000000"/>
@@ -9329,6 +9408,1237 @@
     <p:extLst>
       <p:ext uri="{BB962C8B-B14F-4D97-AF65-F5344CB8AC3E}">
         <p14:creationId xmlns:p14="http://schemas.microsoft.com/office/powerpoint/2010/main" val="985585785"/>
+      </p:ext>
+    </p:extLst>
+  </p:cSld>
+</p:sld>
+</file>
+
+<file path=ppt/slides/slide15.xml><?xml version="1.0" encoding="utf-8"?>
+<p:sld xmlns:p="http://schemas.openxmlformats.org/presentationml/2006/main">
+  <p:cSld>
+    <p:bg>
+      <p:bgPr>
+        <a:solidFill xmlns:a="http://schemas.openxmlformats.org/drawingml/2006/main">
+          <a:srgbClr val="FFFFFF"/>
+        </a:solidFill>
+      </p:bgPr>
+    </p:bg>
+    <p:spTree>
+      <p:nvGrpSpPr>
+        <p:cNvPr id="1" name=""/>
+        <p:cNvGrpSpPr/>
+        <p:nvPr/>
+      </p:nvGrpSpPr>
+      <p:grpSpPr>
+        <a:xfrm xmlns:a="http://schemas.openxmlformats.org/drawingml/2006/main"/>
+      </p:grpSpPr>
+      <p:sp>
+        <p:nvSpPr>
+          <p:cNvPr id="1" name="">
+            <a:extLst xmlns:a="http://schemas.openxmlformats.org/drawingml/2006/main">
+              <a:ext uri="{FF2B5EF4-FFF2-40B4-BE49-F238E27FC236}">
+                <a16:creationId xmlns:a16="http://schemas.microsoft.com/office/drawing/2014/main" id="{222E4CEA-A60B-4B78-BEE9-F39BC428FDD4}"/>
+              </a:ext>
+            </a:extLst>
+          </p:cNvPr>
+          <p:cNvSpPr>
+            <a:spLocks xmlns:a="http://schemas.openxmlformats.org/drawingml/2006/main" noGrp="1"/>
+          </p:cNvSpPr>
+          <p:nvPr/>
+        </p:nvSpPr>
+        <p:spPr>
+          <a:xfrm xmlns:a="http://schemas.openxmlformats.org/drawingml/2006/main">
+            <a:off x="514350" y="381000"/>
+            <a:ext cx="8048625" cy="409575"/>
+          </a:xfrm>
+          <a:prstGeom xmlns:a="http://schemas.openxmlformats.org/drawingml/2006/main" prst="rect">
+            <a:avLst/>
+          </a:prstGeom>
+          <a:noFill xmlns:a="http://schemas.openxmlformats.org/drawingml/2006/main"/>
+          <a:ln xmlns:a="http://schemas.openxmlformats.org/drawingml/2006/main" w="0">
+            <a:noFill/>
+            <a:prstDash val="solid"/>
+          </a:ln>
+        </p:spPr>
+        <p:txBody>
+          <a:bodyPr xmlns:a="http://schemas.openxmlformats.org/drawingml/2006/main"/>
+          <a:lstStyle xmlns:a="http://schemas.openxmlformats.org/drawingml/2006/main"/>
+          <a:p xmlns:a="http://schemas.openxmlformats.org/drawingml/2006/main">
+            <a:pPr algn="l">
+              <a:defRPr sz="2175" b="1">
+                <a:solidFill>
+                  <a:srgbClr val="000000"/>
+                </a:solidFill>
+              </a:defRPr>
+            </a:pPr>
+            <a:r>
+              <a:rPr sz="2175" b="1">
+                <a:solidFill>
+                  <a:srgbClr val="000000"/>
+                </a:solidFill>
+              </a:rPr>
+              <a:t>Appendix: real data deliverables are local, not tracked</a:t>
+            </a:r>
+          </a:p>
+        </p:txBody>
+      </p:sp>
+      <p:sp>
+        <p:nvSpPr>
+          <p:cNvPr id="2" name="">
+            <a:extLst xmlns:a="http://schemas.openxmlformats.org/drawingml/2006/main">
+              <a:ext uri="{FF2B5EF4-FFF2-40B4-BE49-F238E27FC236}">
+                <a16:creationId xmlns:a16="http://schemas.microsoft.com/office/drawing/2014/main" id="{0FDD08E2-31FA-4D31-A546-F99EBFA4424F}"/>
+              </a:ext>
+            </a:extLst>
+          </p:cNvPr>
+          <p:cNvSpPr>
+            <a:spLocks xmlns:a="http://schemas.openxmlformats.org/drawingml/2006/main" noGrp="1"/>
+          </p:cNvSpPr>
+          <p:nvPr/>
+        </p:nvSpPr>
+        <p:spPr>
+          <a:xfrm xmlns:a="http://schemas.openxmlformats.org/drawingml/2006/main">
+            <a:off x="514350" y="876300"/>
+            <a:ext cx="1524000" cy="28575"/>
+          </a:xfrm>
+          <a:prstGeom xmlns:a="http://schemas.openxmlformats.org/drawingml/2006/main" prst="rect">
+            <a:avLst/>
+          </a:prstGeom>
+          <a:solidFill xmlns:a="http://schemas.openxmlformats.org/drawingml/2006/main">
+            <a:srgbClr val="005293"/>
+          </a:solidFill>
+          <a:ln xmlns:a="http://schemas.openxmlformats.org/drawingml/2006/main" w="0">
+            <a:noFill/>
+            <a:prstDash val="solid"/>
+          </a:ln>
+        </p:spPr>
+      </p:sp>
+      <p:sp>
+        <p:nvSpPr>
+          <p:cNvPr id="3" name="">
+            <a:extLst xmlns:a="http://schemas.openxmlformats.org/drawingml/2006/main">
+              <a:ext uri="{FF2B5EF4-FFF2-40B4-BE49-F238E27FC236}">
+                <a16:creationId xmlns:a16="http://schemas.microsoft.com/office/drawing/2014/main" id="{CD08FDA4-C2E3-4353-AED5-49F87F5E082E}"/>
+              </a:ext>
+            </a:extLst>
+          </p:cNvPr>
+          <p:cNvSpPr>
+            <a:spLocks xmlns:a="http://schemas.openxmlformats.org/drawingml/2006/main" noGrp="1"/>
+          </p:cNvSpPr>
+          <p:nvPr/>
+        </p:nvSpPr>
+        <p:spPr>
+          <a:xfrm xmlns:a="http://schemas.openxmlformats.org/drawingml/2006/main">
+            <a:off x="514350" y="1104900"/>
+            <a:ext cx="7810500" cy="304800"/>
+          </a:xfrm>
+          <a:prstGeom xmlns:a="http://schemas.openxmlformats.org/drawingml/2006/main" prst="rect">
+            <a:avLst/>
+          </a:prstGeom>
+          <a:noFill xmlns:a="http://schemas.openxmlformats.org/drawingml/2006/main"/>
+          <a:ln xmlns:a="http://schemas.openxmlformats.org/drawingml/2006/main" w="0">
+            <a:noFill/>
+            <a:prstDash val="solid"/>
+          </a:ln>
+        </p:spPr>
+        <p:txBody>
+          <a:bodyPr xmlns:a="http://schemas.openxmlformats.org/drawingml/2006/main"/>
+          <a:lstStyle xmlns:a="http://schemas.openxmlformats.org/drawingml/2006/main"/>
+          <a:p xmlns:a="http://schemas.openxmlformats.org/drawingml/2006/main">
+            <a:pPr algn="l">
+              <a:defRPr sz="1238" b="0">
+                <a:solidFill>
+                  <a:srgbClr val="666666"/>
+                </a:solidFill>
+              </a:defRPr>
+            </a:pPr>
+            <a:r>
+              <a:rPr sz="1238" b="0">
+                <a:solidFill>
+                  <a:srgbClr val="666666"/>
+                </a:solidFill>
+              </a:rPr>
+              <a:t>The repository tracks code and final report assets; production reruns recreate these ignored local files.</a:t>
+            </a:r>
+          </a:p>
+        </p:txBody>
+      </p:sp>
+      <p:sp>
+        <p:nvSpPr>
+          <p:cNvPr id="4" name="">
+            <a:extLst xmlns:a="http://schemas.openxmlformats.org/drawingml/2006/main">
+              <a:ext uri="{FF2B5EF4-FFF2-40B4-BE49-F238E27FC236}">
+                <a16:creationId xmlns:a16="http://schemas.microsoft.com/office/drawing/2014/main" id="{C3118999-1055-4853-B7D2-1B330F733539}"/>
+              </a:ext>
+            </a:extLst>
+          </p:cNvPr>
+          <p:cNvSpPr>
+            <a:spLocks xmlns:a="http://schemas.openxmlformats.org/drawingml/2006/main" noGrp="1"/>
+          </p:cNvSpPr>
+          <p:nvPr/>
+        </p:nvSpPr>
+        <p:spPr>
+          <a:xfrm xmlns:a="http://schemas.openxmlformats.org/drawingml/2006/main">
+            <a:off x="514350" y="1676400"/>
+            <a:ext cx="2457450" cy="790575"/>
+          </a:xfrm>
+          <a:prstGeom xmlns:a="http://schemas.openxmlformats.org/drawingml/2006/main" prst="rect">
+            <a:avLst/>
+          </a:prstGeom>
+          <a:solidFill xmlns:a="http://schemas.openxmlformats.org/drawingml/2006/main">
+            <a:srgbClr val="FFFFFF"/>
+          </a:solidFill>
+          <a:ln xmlns:a="http://schemas.openxmlformats.org/drawingml/2006/main" w="9525">
+            <a:solidFill>
+              <a:srgbClr val="D7E6F2"/>
+            </a:solidFill>
+            <a:prstDash val="solid"/>
+          </a:ln>
+        </p:spPr>
+      </p:sp>
+      <p:sp>
+        <p:nvSpPr>
+          <p:cNvPr id="5" name="">
+            <a:extLst xmlns:a="http://schemas.openxmlformats.org/drawingml/2006/main">
+              <a:ext uri="{FF2B5EF4-FFF2-40B4-BE49-F238E27FC236}">
+                <a16:creationId xmlns:a16="http://schemas.microsoft.com/office/drawing/2014/main" id="{DE9F2EC6-BD0F-4DA0-A85B-747D2400BE62}"/>
+              </a:ext>
+            </a:extLst>
+          </p:cNvPr>
+          <p:cNvSpPr>
+            <a:spLocks xmlns:a="http://schemas.openxmlformats.org/drawingml/2006/main" noGrp="1"/>
+          </p:cNvSpPr>
+          <p:nvPr/>
+        </p:nvSpPr>
+        <p:spPr>
+          <a:xfrm xmlns:a="http://schemas.openxmlformats.org/drawingml/2006/main">
+            <a:off x="514350" y="1676400"/>
+            <a:ext cx="66675" cy="790575"/>
+          </a:xfrm>
+          <a:prstGeom xmlns:a="http://schemas.openxmlformats.org/drawingml/2006/main" prst="rect">
+            <a:avLst/>
+          </a:prstGeom>
+          <a:solidFill xmlns:a="http://schemas.openxmlformats.org/drawingml/2006/main">
+            <a:srgbClr val="005293"/>
+          </a:solidFill>
+          <a:ln xmlns:a="http://schemas.openxmlformats.org/drawingml/2006/main" w="0">
+            <a:noFill/>
+            <a:prstDash val="solid"/>
+          </a:ln>
+        </p:spPr>
+      </p:sp>
+      <p:sp>
+        <p:nvSpPr>
+          <p:cNvPr id="6" name="">
+            <a:extLst xmlns:a="http://schemas.openxmlformats.org/drawingml/2006/main">
+              <a:ext uri="{FF2B5EF4-FFF2-40B4-BE49-F238E27FC236}">
+                <a16:creationId xmlns:a16="http://schemas.microsoft.com/office/drawing/2014/main" id="{5666912E-8C27-4C8E-8DA6-C7F64826AC07}"/>
+              </a:ext>
+            </a:extLst>
+          </p:cNvPr>
+          <p:cNvSpPr>
+            <a:spLocks xmlns:a="http://schemas.openxmlformats.org/drawingml/2006/main" noGrp="1"/>
+          </p:cNvSpPr>
+          <p:nvPr/>
+        </p:nvSpPr>
+        <p:spPr>
+          <a:xfrm xmlns:a="http://schemas.openxmlformats.org/drawingml/2006/main">
+            <a:off x="676275" y="1771650"/>
+            <a:ext cx="2190750" cy="190500"/>
+          </a:xfrm>
+          <a:prstGeom xmlns:a="http://schemas.openxmlformats.org/drawingml/2006/main" prst="rect">
+            <a:avLst/>
+          </a:prstGeom>
+          <a:noFill xmlns:a="http://schemas.openxmlformats.org/drawingml/2006/main"/>
+          <a:ln xmlns:a="http://schemas.openxmlformats.org/drawingml/2006/main" w="0">
+            <a:noFill/>
+            <a:prstDash val="solid"/>
+          </a:ln>
+        </p:spPr>
+        <p:txBody>
+          <a:bodyPr xmlns:a="http://schemas.openxmlformats.org/drawingml/2006/main"/>
+          <a:lstStyle xmlns:a="http://schemas.openxmlformats.org/drawingml/2006/main"/>
+          <a:p xmlns:a="http://schemas.openxmlformats.org/drawingml/2006/main">
+            <a:pPr algn="l">
+              <a:defRPr sz="1125" b="1">
+                <a:solidFill>
+                  <a:srgbClr val="005293"/>
+                </a:solidFill>
+              </a:defRPr>
+            </a:pPr>
+            <a:r>
+              <a:rPr sz="1125" b="1">
+                <a:solidFill>
+                  <a:srgbClr val="005293"/>
+                </a:solidFill>
+              </a:rPr>
+              <a:t>1. Raw input</a:t>
+            </a:r>
+          </a:p>
+        </p:txBody>
+      </p:sp>
+      <p:sp>
+        <p:nvSpPr>
+          <p:cNvPr id="7" name="">
+            <a:extLst xmlns:a="http://schemas.openxmlformats.org/drawingml/2006/main">
+              <a:ext uri="{FF2B5EF4-FFF2-40B4-BE49-F238E27FC236}">
+                <a16:creationId xmlns:a16="http://schemas.microsoft.com/office/drawing/2014/main" id="{828FF00F-F8CA-4C77-8162-C7BA561FA8AD}"/>
+              </a:ext>
+            </a:extLst>
+          </p:cNvPr>
+          <p:cNvSpPr>
+            <a:spLocks xmlns:a="http://schemas.openxmlformats.org/drawingml/2006/main" noGrp="1"/>
+          </p:cNvSpPr>
+          <p:nvPr/>
+        </p:nvSpPr>
+        <p:spPr>
+          <a:xfrm xmlns:a="http://schemas.openxmlformats.org/drawingml/2006/main">
+            <a:off x="676275" y="2009775"/>
+            <a:ext cx="2190750" cy="381000"/>
+          </a:xfrm>
+          <a:prstGeom xmlns:a="http://schemas.openxmlformats.org/drawingml/2006/main" prst="rect">
+            <a:avLst/>
+          </a:prstGeom>
+          <a:noFill xmlns:a="http://schemas.openxmlformats.org/drawingml/2006/main"/>
+          <a:ln xmlns:a="http://schemas.openxmlformats.org/drawingml/2006/main" w="0">
+            <a:noFill/>
+            <a:prstDash val="solid"/>
+          </a:ln>
+        </p:spPr>
+        <p:txBody>
+          <a:bodyPr xmlns:a="http://schemas.openxmlformats.org/drawingml/2006/main"/>
+          <a:lstStyle xmlns:a="http://schemas.openxmlformats.org/drawingml/2006/main"/>
+          <a:p xmlns:a="http://schemas.openxmlformats.org/drawingml/2006/main">
+            <a:pPr algn="l">
+              <a:defRPr sz="923" b="0">
+                <a:solidFill>
+                  <a:srgbClr val="000000"/>
+                </a:solidFill>
+              </a:defRPr>
+            </a:pPr>
+            <a:r>
+              <a:rPr sz="923" b="0">
+                <a:solidFill>
+                  <a:srgbClr val="000000"/>
+                </a:solidFill>
+              </a:rPr>
+              <a:t>clean_master_dataset.parquet</a:t>
+            </a:r>
+          </a:p>
+        </p:txBody>
+      </p:sp>
+      <p:sp>
+        <p:nvSpPr>
+          <p:cNvPr id="8" name="">
+            <a:extLst xmlns:a="http://schemas.openxmlformats.org/drawingml/2006/main">
+              <a:ext uri="{FF2B5EF4-FFF2-40B4-BE49-F238E27FC236}">
+                <a16:creationId xmlns:a16="http://schemas.microsoft.com/office/drawing/2014/main" id="{732120A8-16A4-4FAF-A90F-8B9D747D49DC}"/>
+              </a:ext>
+            </a:extLst>
+          </p:cNvPr>
+          <p:cNvSpPr>
+            <a:spLocks xmlns:a="http://schemas.openxmlformats.org/drawingml/2006/main" noGrp="1"/>
+          </p:cNvSpPr>
+          <p:nvPr/>
+        </p:nvSpPr>
+        <p:spPr>
+          <a:xfrm xmlns:a="http://schemas.openxmlformats.org/drawingml/2006/main">
+            <a:off x="3343275" y="1676400"/>
+            <a:ext cx="2457450" cy="790575"/>
+          </a:xfrm>
+          <a:prstGeom xmlns:a="http://schemas.openxmlformats.org/drawingml/2006/main" prst="rect">
+            <a:avLst/>
+          </a:prstGeom>
+          <a:solidFill xmlns:a="http://schemas.openxmlformats.org/drawingml/2006/main">
+            <a:srgbClr val="FFFFFF"/>
+          </a:solidFill>
+          <a:ln xmlns:a="http://schemas.openxmlformats.org/drawingml/2006/main" w="9525">
+            <a:solidFill>
+              <a:srgbClr val="D7E6F2"/>
+            </a:solidFill>
+            <a:prstDash val="solid"/>
+          </a:ln>
+        </p:spPr>
+      </p:sp>
+      <p:sp>
+        <p:nvSpPr>
+          <p:cNvPr id="9" name="">
+            <a:extLst xmlns:a="http://schemas.openxmlformats.org/drawingml/2006/main">
+              <a:ext uri="{FF2B5EF4-FFF2-40B4-BE49-F238E27FC236}">
+                <a16:creationId xmlns:a16="http://schemas.microsoft.com/office/drawing/2014/main" id="{AAF7B4B4-9963-4404-95AE-33D41EDE86BE}"/>
+              </a:ext>
+            </a:extLst>
+          </p:cNvPr>
+          <p:cNvSpPr>
+            <a:spLocks xmlns:a="http://schemas.openxmlformats.org/drawingml/2006/main" noGrp="1"/>
+          </p:cNvSpPr>
+          <p:nvPr/>
+        </p:nvSpPr>
+        <p:spPr>
+          <a:xfrm xmlns:a="http://schemas.openxmlformats.org/drawingml/2006/main">
+            <a:off x="3343275" y="1676400"/>
+            <a:ext cx="66675" cy="790575"/>
+          </a:xfrm>
+          <a:prstGeom xmlns:a="http://schemas.openxmlformats.org/drawingml/2006/main" prst="rect">
+            <a:avLst/>
+          </a:prstGeom>
+          <a:solidFill xmlns:a="http://schemas.openxmlformats.org/drawingml/2006/main">
+            <a:srgbClr val="64A0C8"/>
+          </a:solidFill>
+          <a:ln xmlns:a="http://schemas.openxmlformats.org/drawingml/2006/main" w="0">
+            <a:noFill/>
+            <a:prstDash val="solid"/>
+          </a:ln>
+        </p:spPr>
+      </p:sp>
+      <p:sp>
+        <p:nvSpPr>
+          <p:cNvPr id="10" name="">
+            <a:extLst xmlns:a="http://schemas.openxmlformats.org/drawingml/2006/main">
+              <a:ext uri="{FF2B5EF4-FFF2-40B4-BE49-F238E27FC236}">
+                <a16:creationId xmlns:a16="http://schemas.microsoft.com/office/drawing/2014/main" id="{C271639E-39B6-4A44-AD71-CF915DAFA671}"/>
+              </a:ext>
+            </a:extLst>
+          </p:cNvPr>
+          <p:cNvSpPr>
+            <a:spLocks xmlns:a="http://schemas.openxmlformats.org/drawingml/2006/main" noGrp="1"/>
+          </p:cNvSpPr>
+          <p:nvPr/>
+        </p:nvSpPr>
+        <p:spPr>
+          <a:xfrm xmlns:a="http://schemas.openxmlformats.org/drawingml/2006/main">
+            <a:off x="3505200" y="1771650"/>
+            <a:ext cx="2190750" cy="190500"/>
+          </a:xfrm>
+          <a:prstGeom xmlns:a="http://schemas.openxmlformats.org/drawingml/2006/main" prst="rect">
+            <a:avLst/>
+          </a:prstGeom>
+          <a:noFill xmlns:a="http://schemas.openxmlformats.org/drawingml/2006/main"/>
+          <a:ln xmlns:a="http://schemas.openxmlformats.org/drawingml/2006/main" w="0">
+            <a:noFill/>
+            <a:prstDash val="solid"/>
+          </a:ln>
+        </p:spPr>
+        <p:txBody>
+          <a:bodyPr xmlns:a="http://schemas.openxmlformats.org/drawingml/2006/main"/>
+          <a:lstStyle xmlns:a="http://schemas.openxmlformats.org/drawingml/2006/main"/>
+          <a:p xmlns:a="http://schemas.openxmlformats.org/drawingml/2006/main">
+            <a:pPr algn="l">
+              <a:defRPr sz="1125" b="1">
+                <a:solidFill>
+                  <a:srgbClr val="005293"/>
+                </a:solidFill>
+              </a:defRPr>
+            </a:pPr>
+            <a:r>
+              <a:rPr sz="1125" b="1">
+                <a:solidFill>
+                  <a:srgbClr val="005293"/>
+                </a:solidFill>
+              </a:rPr>
+              <a:t>2. MDP splits</a:t>
+            </a:r>
+          </a:p>
+        </p:txBody>
+      </p:sp>
+      <p:sp>
+        <p:nvSpPr>
+          <p:cNvPr id="11" name="">
+            <a:extLst xmlns:a="http://schemas.openxmlformats.org/drawingml/2006/main">
+              <a:ext uri="{FF2B5EF4-FFF2-40B4-BE49-F238E27FC236}">
+                <a16:creationId xmlns:a16="http://schemas.microsoft.com/office/drawing/2014/main" id="{821614BE-AC71-4240-947A-51075B976E99}"/>
+              </a:ext>
+            </a:extLst>
+          </p:cNvPr>
+          <p:cNvSpPr>
+            <a:spLocks xmlns:a="http://schemas.openxmlformats.org/drawingml/2006/main" noGrp="1"/>
+          </p:cNvSpPr>
+          <p:nvPr/>
+        </p:nvSpPr>
+        <p:spPr>
+          <a:xfrm xmlns:a="http://schemas.openxmlformats.org/drawingml/2006/main">
+            <a:off x="3505200" y="2009775"/>
+            <a:ext cx="2190750" cy="381000"/>
+          </a:xfrm>
+          <a:prstGeom xmlns:a="http://schemas.openxmlformats.org/drawingml/2006/main" prst="rect">
+            <a:avLst/>
+          </a:prstGeom>
+          <a:noFill xmlns:a="http://schemas.openxmlformats.org/drawingml/2006/main"/>
+          <a:ln xmlns:a="http://schemas.openxmlformats.org/drawingml/2006/main" w="0">
+            <a:noFill/>
+            <a:prstDash val="solid"/>
+          </a:ln>
+        </p:spPr>
+        <p:txBody>
+          <a:bodyPr xmlns:a="http://schemas.openxmlformats.org/drawingml/2006/main"/>
+          <a:lstStyle xmlns:a="http://schemas.openxmlformats.org/drawingml/2006/main"/>
+          <a:p xmlns:a="http://schemas.openxmlformats.org/drawingml/2006/main">
+            <a:pPr algn="l">
+              <a:defRPr sz="923" b="0">
+                <a:solidFill>
+                  <a:srgbClr val="000000"/>
+                </a:solidFill>
+              </a:defRPr>
+            </a:pPr>
+            <a:r>
+              <a:rPr sz="923" b="0">
+                <a:solidFill>
+                  <a:srgbClr val="000000"/>
+                </a:solidFill>
+              </a:rPr>
+              <a:t>data/train.parquet, val.parquet, test.parquet</a:t>
+            </a:r>
+          </a:p>
+          <a:p xmlns:a="http://schemas.openxmlformats.org/drawingml/2006/main">
+            <a:pPr algn="l">
+              <a:defRPr sz="923" b="0">
+                <a:solidFill>
+                  <a:srgbClr val="000000"/>
+                </a:solidFill>
+              </a:defRPr>
+            </a:pPr>
+            <a:r>
+              <a:rPr sz="923" b="0">
+                <a:solidFill>
+                  <a:srgbClr val="000000"/>
+                </a:solidFill>
+              </a:rPr>
+              <a:t>split_summary.csv, preprocess_stats.json</a:t>
+            </a:r>
+          </a:p>
+        </p:txBody>
+      </p:sp>
+      <p:sp>
+        <p:nvSpPr>
+          <p:cNvPr id="12" name="">
+            <a:extLst xmlns:a="http://schemas.openxmlformats.org/drawingml/2006/main">
+              <a:ext uri="{FF2B5EF4-FFF2-40B4-BE49-F238E27FC236}">
+                <a16:creationId xmlns:a16="http://schemas.microsoft.com/office/drawing/2014/main" id="{9BA012F1-6A8A-47C2-9FBD-A9D033017807}"/>
+              </a:ext>
+            </a:extLst>
+          </p:cNvPr>
+          <p:cNvSpPr>
+            <a:spLocks xmlns:a="http://schemas.openxmlformats.org/drawingml/2006/main" noGrp="1"/>
+          </p:cNvSpPr>
+          <p:nvPr/>
+        </p:nvSpPr>
+        <p:spPr>
+          <a:xfrm xmlns:a="http://schemas.openxmlformats.org/drawingml/2006/main">
+            <a:off x="6172200" y="1676400"/>
+            <a:ext cx="2457450" cy="790575"/>
+          </a:xfrm>
+          <a:prstGeom xmlns:a="http://schemas.openxmlformats.org/drawingml/2006/main" prst="rect">
+            <a:avLst/>
+          </a:prstGeom>
+          <a:solidFill xmlns:a="http://schemas.openxmlformats.org/drawingml/2006/main">
+            <a:srgbClr val="FFFFFF"/>
+          </a:solidFill>
+          <a:ln xmlns:a="http://schemas.openxmlformats.org/drawingml/2006/main" w="9525">
+            <a:solidFill>
+              <a:srgbClr val="D7E6F2"/>
+            </a:solidFill>
+            <a:prstDash val="solid"/>
+          </a:ln>
+        </p:spPr>
+      </p:sp>
+      <p:sp>
+        <p:nvSpPr>
+          <p:cNvPr id="13" name="">
+            <a:extLst xmlns:a="http://schemas.openxmlformats.org/drawingml/2006/main">
+              <a:ext uri="{FF2B5EF4-FFF2-40B4-BE49-F238E27FC236}">
+                <a16:creationId xmlns:a16="http://schemas.microsoft.com/office/drawing/2014/main" id="{B215D18D-3942-465F-87D6-A40659A0F721}"/>
+              </a:ext>
+            </a:extLst>
+          </p:cNvPr>
+          <p:cNvSpPr>
+            <a:spLocks xmlns:a="http://schemas.openxmlformats.org/drawingml/2006/main" noGrp="1"/>
+          </p:cNvSpPr>
+          <p:nvPr/>
+        </p:nvSpPr>
+        <p:spPr>
+          <a:xfrm xmlns:a="http://schemas.openxmlformats.org/drawingml/2006/main">
+            <a:off x="6172200" y="1676400"/>
+            <a:ext cx="66675" cy="790575"/>
+          </a:xfrm>
+          <a:prstGeom xmlns:a="http://schemas.openxmlformats.org/drawingml/2006/main" prst="rect">
+            <a:avLst/>
+          </a:prstGeom>
+          <a:solidFill xmlns:a="http://schemas.openxmlformats.org/drawingml/2006/main">
+            <a:srgbClr val="A2AD00"/>
+          </a:solidFill>
+          <a:ln xmlns:a="http://schemas.openxmlformats.org/drawingml/2006/main" w="0">
+            <a:noFill/>
+            <a:prstDash val="solid"/>
+          </a:ln>
+        </p:spPr>
+      </p:sp>
+      <p:sp>
+        <p:nvSpPr>
+          <p:cNvPr id="14" name="">
+            <a:extLst xmlns:a="http://schemas.openxmlformats.org/drawingml/2006/main">
+              <a:ext uri="{FF2B5EF4-FFF2-40B4-BE49-F238E27FC236}">
+                <a16:creationId xmlns:a16="http://schemas.microsoft.com/office/drawing/2014/main" id="{BCD2BC1A-380E-433A-BAA1-330907A4C86C}"/>
+              </a:ext>
+            </a:extLst>
+          </p:cNvPr>
+          <p:cNvSpPr>
+            <a:spLocks xmlns:a="http://schemas.openxmlformats.org/drawingml/2006/main" noGrp="1"/>
+          </p:cNvSpPr>
+          <p:nvPr/>
+        </p:nvSpPr>
+        <p:spPr>
+          <a:xfrm xmlns:a="http://schemas.openxmlformats.org/drawingml/2006/main">
+            <a:off x="6334125" y="1771650"/>
+            <a:ext cx="2190750" cy="190500"/>
+          </a:xfrm>
+          <a:prstGeom xmlns:a="http://schemas.openxmlformats.org/drawingml/2006/main" prst="rect">
+            <a:avLst/>
+          </a:prstGeom>
+          <a:noFill xmlns:a="http://schemas.openxmlformats.org/drawingml/2006/main"/>
+          <a:ln xmlns:a="http://schemas.openxmlformats.org/drawingml/2006/main" w="0">
+            <a:noFill/>
+            <a:prstDash val="solid"/>
+          </a:ln>
+        </p:spPr>
+        <p:txBody>
+          <a:bodyPr xmlns:a="http://schemas.openxmlformats.org/drawingml/2006/main"/>
+          <a:lstStyle xmlns:a="http://schemas.openxmlformats.org/drawingml/2006/main"/>
+          <a:p xmlns:a="http://schemas.openxmlformats.org/drawingml/2006/main">
+            <a:pPr algn="l">
+              <a:defRPr sz="1125" b="1">
+                <a:solidFill>
+                  <a:srgbClr val="005293"/>
+                </a:solidFill>
+              </a:defRPr>
+            </a:pPr>
+            <a:r>
+              <a:rPr sz="1125" b="1">
+                <a:solidFill>
+                  <a:srgbClr val="005293"/>
+                </a:solidFill>
+              </a:rPr>
+              <a:t>3. Trained models</a:t>
+            </a:r>
+          </a:p>
+        </p:txBody>
+      </p:sp>
+      <p:sp>
+        <p:nvSpPr>
+          <p:cNvPr id="15" name="">
+            <a:extLst xmlns:a="http://schemas.openxmlformats.org/drawingml/2006/main">
+              <a:ext uri="{FF2B5EF4-FFF2-40B4-BE49-F238E27FC236}">
+                <a16:creationId xmlns:a16="http://schemas.microsoft.com/office/drawing/2014/main" id="{E7EEBE91-7615-4423-8838-3FF0E394C5EB}"/>
+              </a:ext>
+            </a:extLst>
+          </p:cNvPr>
+          <p:cNvSpPr>
+            <a:spLocks xmlns:a="http://schemas.openxmlformats.org/drawingml/2006/main" noGrp="1"/>
+          </p:cNvSpPr>
+          <p:nvPr/>
+        </p:nvSpPr>
+        <p:spPr>
+          <a:xfrm xmlns:a="http://schemas.openxmlformats.org/drawingml/2006/main">
+            <a:off x="6334125" y="2009775"/>
+            <a:ext cx="2190750" cy="381000"/>
+          </a:xfrm>
+          <a:prstGeom xmlns:a="http://schemas.openxmlformats.org/drawingml/2006/main" prst="rect">
+            <a:avLst/>
+          </a:prstGeom>
+          <a:noFill xmlns:a="http://schemas.openxmlformats.org/drawingml/2006/main"/>
+          <a:ln xmlns:a="http://schemas.openxmlformats.org/drawingml/2006/main" w="0">
+            <a:noFill/>
+            <a:prstDash val="solid"/>
+          </a:ln>
+        </p:spPr>
+        <p:txBody>
+          <a:bodyPr xmlns:a="http://schemas.openxmlformats.org/drawingml/2006/main"/>
+          <a:lstStyle xmlns:a="http://schemas.openxmlformats.org/drawingml/2006/main"/>
+          <a:p xmlns:a="http://schemas.openxmlformats.org/drawingml/2006/main">
+            <a:pPr algn="l">
+              <a:defRPr sz="923" b="0">
+                <a:solidFill>
+                  <a:srgbClr val="000000"/>
+                </a:solidFill>
+              </a:defRPr>
+            </a:pPr>
+            <a:r>
+              <a:rPr sz="923" b="0">
+                <a:solidFill>
+                  <a:srgbClr val="000000"/>
+                </a:solidFill>
+              </a:rPr>
+              <a:t>deal_classifier.ubj, cql_best.pt,</a:t>
+            </a:r>
+          </a:p>
+          <a:p xmlns:a="http://schemas.openxmlformats.org/drawingml/2006/main">
+            <a:pPr algn="l">
+              <a:defRPr sz="923" b="0">
+                <a:solidFill>
+                  <a:srgbClr val="000000"/>
+                </a:solidFill>
+              </a:defRPr>
+            </a:pPr>
+            <a:r>
+              <a:rPr sz="923" b="0">
+                <a:solidFill>
+                  <a:srgbClr val="000000"/>
+                </a:solidFill>
+              </a:rPr>
+              <a:t>cql_scaler.pkl, ppo_best_faithful.pt</a:t>
+            </a:r>
+          </a:p>
+        </p:txBody>
+      </p:sp>
+      <p:sp>
+        <p:nvSpPr>
+          <p:cNvPr id="16" name="">
+            <a:extLst xmlns:a="http://schemas.openxmlformats.org/drawingml/2006/main">
+              <a:ext uri="{FF2B5EF4-FFF2-40B4-BE49-F238E27FC236}">
+                <a16:creationId xmlns:a16="http://schemas.microsoft.com/office/drawing/2014/main" id="{95EE70FD-D108-4183-9B99-F4E5D0B85DAF}"/>
+              </a:ext>
+            </a:extLst>
+          </p:cNvPr>
+          <p:cNvSpPr>
+            <a:spLocks xmlns:a="http://schemas.openxmlformats.org/drawingml/2006/main" noGrp="1"/>
+          </p:cNvSpPr>
+          <p:nvPr/>
+        </p:nvSpPr>
+        <p:spPr>
+          <a:xfrm xmlns:a="http://schemas.openxmlformats.org/drawingml/2006/main">
+            <a:off x="514350" y="2790825"/>
+            <a:ext cx="3876675" cy="790575"/>
+          </a:xfrm>
+          <a:prstGeom xmlns:a="http://schemas.openxmlformats.org/drawingml/2006/main" prst="rect">
+            <a:avLst/>
+          </a:prstGeom>
+          <a:solidFill xmlns:a="http://schemas.openxmlformats.org/drawingml/2006/main">
+            <a:srgbClr val="FFFFFF"/>
+          </a:solidFill>
+          <a:ln xmlns:a="http://schemas.openxmlformats.org/drawingml/2006/main" w="9525">
+            <a:solidFill>
+              <a:srgbClr val="D7E6F2"/>
+            </a:solidFill>
+            <a:prstDash val="solid"/>
+          </a:ln>
+        </p:spPr>
+      </p:sp>
+      <p:sp>
+        <p:nvSpPr>
+          <p:cNvPr id="17" name="">
+            <a:extLst xmlns:a="http://schemas.openxmlformats.org/drawingml/2006/main">
+              <a:ext uri="{FF2B5EF4-FFF2-40B4-BE49-F238E27FC236}">
+                <a16:creationId xmlns:a16="http://schemas.microsoft.com/office/drawing/2014/main" id="{78204229-7734-49C0-A3D0-D0777AACF37F}"/>
+              </a:ext>
+            </a:extLst>
+          </p:cNvPr>
+          <p:cNvSpPr>
+            <a:spLocks xmlns:a="http://schemas.openxmlformats.org/drawingml/2006/main" noGrp="1"/>
+          </p:cNvSpPr>
+          <p:nvPr/>
+        </p:nvSpPr>
+        <p:spPr>
+          <a:xfrm xmlns:a="http://schemas.openxmlformats.org/drawingml/2006/main">
+            <a:off x="514350" y="2790825"/>
+            <a:ext cx="66675" cy="790575"/>
+          </a:xfrm>
+          <a:prstGeom xmlns:a="http://schemas.openxmlformats.org/drawingml/2006/main" prst="rect">
+            <a:avLst/>
+          </a:prstGeom>
+          <a:solidFill xmlns:a="http://schemas.openxmlformats.org/drawingml/2006/main">
+            <a:srgbClr val="005293"/>
+          </a:solidFill>
+          <a:ln xmlns:a="http://schemas.openxmlformats.org/drawingml/2006/main" w="0">
+            <a:noFill/>
+            <a:prstDash val="solid"/>
+          </a:ln>
+        </p:spPr>
+      </p:sp>
+      <p:sp>
+        <p:nvSpPr>
+          <p:cNvPr id="18" name="">
+            <a:extLst xmlns:a="http://schemas.openxmlformats.org/drawingml/2006/main">
+              <a:ext uri="{FF2B5EF4-FFF2-40B4-BE49-F238E27FC236}">
+                <a16:creationId xmlns:a16="http://schemas.microsoft.com/office/drawing/2014/main" id="{1FA5A17F-EF36-42B0-B324-0AF725D10B78}"/>
+              </a:ext>
+            </a:extLst>
+          </p:cNvPr>
+          <p:cNvSpPr>
+            <a:spLocks xmlns:a="http://schemas.openxmlformats.org/drawingml/2006/main" noGrp="1"/>
+          </p:cNvSpPr>
+          <p:nvPr/>
+        </p:nvSpPr>
+        <p:spPr>
+          <a:xfrm xmlns:a="http://schemas.openxmlformats.org/drawingml/2006/main">
+            <a:off x="676275" y="2886075"/>
+            <a:ext cx="3609975" cy="190500"/>
+          </a:xfrm>
+          <a:prstGeom xmlns:a="http://schemas.openxmlformats.org/drawingml/2006/main" prst="rect">
+            <a:avLst/>
+          </a:prstGeom>
+          <a:noFill xmlns:a="http://schemas.openxmlformats.org/drawingml/2006/main"/>
+          <a:ln xmlns:a="http://schemas.openxmlformats.org/drawingml/2006/main" w="0">
+            <a:noFill/>
+            <a:prstDash val="solid"/>
+          </a:ln>
+        </p:spPr>
+        <p:txBody>
+          <a:bodyPr xmlns:a="http://schemas.openxmlformats.org/drawingml/2006/main"/>
+          <a:lstStyle xmlns:a="http://schemas.openxmlformats.org/drawingml/2006/main"/>
+          <a:p xmlns:a="http://schemas.openxmlformats.org/drawingml/2006/main">
+            <a:pPr algn="l">
+              <a:defRPr sz="1125" b="1">
+                <a:solidFill>
+                  <a:srgbClr val="005293"/>
+                </a:solidFill>
+              </a:defRPr>
+            </a:pPr>
+            <a:r>
+              <a:rPr sz="1125" b="1">
+                <a:solidFill>
+                  <a:srgbClr val="005293"/>
+                </a:solidFill>
+              </a:rPr>
+              <a:t>4. Evaluation outputs</a:t>
+            </a:r>
+          </a:p>
+        </p:txBody>
+      </p:sp>
+      <p:sp>
+        <p:nvSpPr>
+          <p:cNvPr id="19" name="">
+            <a:extLst xmlns:a="http://schemas.openxmlformats.org/drawingml/2006/main">
+              <a:ext uri="{FF2B5EF4-FFF2-40B4-BE49-F238E27FC236}">
+                <a16:creationId xmlns:a16="http://schemas.microsoft.com/office/drawing/2014/main" id="{71254B44-B0AB-4E33-83A1-E9EC5950D232}"/>
+              </a:ext>
+            </a:extLst>
+          </p:cNvPr>
+          <p:cNvSpPr>
+            <a:spLocks xmlns:a="http://schemas.openxmlformats.org/drawingml/2006/main" noGrp="1"/>
+          </p:cNvSpPr>
+          <p:nvPr/>
+        </p:nvSpPr>
+        <p:spPr>
+          <a:xfrm xmlns:a="http://schemas.openxmlformats.org/drawingml/2006/main">
+            <a:off x="676275" y="3124200"/>
+            <a:ext cx="3609975" cy="381000"/>
+          </a:xfrm>
+          <a:prstGeom xmlns:a="http://schemas.openxmlformats.org/drawingml/2006/main" prst="rect">
+            <a:avLst/>
+          </a:prstGeom>
+          <a:noFill xmlns:a="http://schemas.openxmlformats.org/drawingml/2006/main"/>
+          <a:ln xmlns:a="http://schemas.openxmlformats.org/drawingml/2006/main" w="0">
+            <a:noFill/>
+            <a:prstDash val="solid"/>
+          </a:ln>
+        </p:spPr>
+        <p:txBody>
+          <a:bodyPr xmlns:a="http://schemas.openxmlformats.org/drawingml/2006/main"/>
+          <a:lstStyle xmlns:a="http://schemas.openxmlformats.org/drawingml/2006/main"/>
+          <a:p xmlns:a="http://schemas.openxmlformats.org/drawingml/2006/main">
+            <a:pPr algn="l">
+              <a:defRPr sz="923" b="0">
+                <a:solidFill>
+                  <a:srgbClr val="000000"/>
+                </a:solidFill>
+              </a:defRPr>
+            </a:pPr>
+            <a:r>
+              <a:rPr sz="923" b="0">
+                <a:solidFill>
+                  <a:srgbClr val="000000"/>
+                </a:solidFill>
+              </a:rPr>
+              <a:t>policy_comparison.csv, ope_policy_eval.csv,</a:t>
+            </a:r>
+          </a:p>
+          <a:p xmlns:a="http://schemas.openxmlformats.org/drawingml/2006/main">
+            <a:pPr algn="l">
+              <a:defRPr sz="923" b="0">
+                <a:solidFill>
+                  <a:srgbClr val="000000"/>
+                </a:solidFill>
+              </a:defRPr>
+            </a:pPr>
+            <a:r>
+              <a:rPr sz="923" b="0">
+                <a:solidFill>
+                  <a:srgbClr val="000000"/>
+                </a:solidFill>
+              </a:rPr>
+              <a:t>ope_weight_diagnostics.csv, ope_summary.json</a:t>
+            </a:r>
+          </a:p>
+        </p:txBody>
+      </p:sp>
+      <p:sp>
+        <p:nvSpPr>
+          <p:cNvPr id="20" name="">
+            <a:extLst xmlns:a="http://schemas.openxmlformats.org/drawingml/2006/main">
+              <a:ext uri="{FF2B5EF4-FFF2-40B4-BE49-F238E27FC236}">
+                <a16:creationId xmlns:a16="http://schemas.microsoft.com/office/drawing/2014/main" id="{AF0B470A-BACA-42E6-BA82-9ACA56A61FDD}"/>
+              </a:ext>
+            </a:extLst>
+          </p:cNvPr>
+          <p:cNvSpPr>
+            <a:spLocks xmlns:a="http://schemas.openxmlformats.org/drawingml/2006/main" noGrp="1"/>
+          </p:cNvSpPr>
+          <p:nvPr/>
+        </p:nvSpPr>
+        <p:spPr>
+          <a:xfrm xmlns:a="http://schemas.openxmlformats.org/drawingml/2006/main">
+            <a:off x="4752975" y="2790825"/>
+            <a:ext cx="3876675" cy="790575"/>
+          </a:xfrm>
+          <a:prstGeom xmlns:a="http://schemas.openxmlformats.org/drawingml/2006/main" prst="rect">
+            <a:avLst/>
+          </a:prstGeom>
+          <a:solidFill xmlns:a="http://schemas.openxmlformats.org/drawingml/2006/main">
+            <a:srgbClr val="FFFFFF"/>
+          </a:solidFill>
+          <a:ln xmlns:a="http://schemas.openxmlformats.org/drawingml/2006/main" w="9525">
+            <a:solidFill>
+              <a:srgbClr val="D7E6F2"/>
+            </a:solidFill>
+            <a:prstDash val="solid"/>
+          </a:ln>
+        </p:spPr>
+      </p:sp>
+      <p:sp>
+        <p:nvSpPr>
+          <p:cNvPr id="21" name="">
+            <a:extLst xmlns:a="http://schemas.openxmlformats.org/drawingml/2006/main">
+              <a:ext uri="{FF2B5EF4-FFF2-40B4-BE49-F238E27FC236}">
+                <a16:creationId xmlns:a16="http://schemas.microsoft.com/office/drawing/2014/main" id="{FD07B89D-C885-4028-B11F-E6F05A918C96}"/>
+              </a:ext>
+            </a:extLst>
+          </p:cNvPr>
+          <p:cNvSpPr>
+            <a:spLocks xmlns:a="http://schemas.openxmlformats.org/drawingml/2006/main" noGrp="1"/>
+          </p:cNvSpPr>
+          <p:nvPr/>
+        </p:nvSpPr>
+        <p:spPr>
+          <a:xfrm xmlns:a="http://schemas.openxmlformats.org/drawingml/2006/main">
+            <a:off x="4752975" y="2790825"/>
+            <a:ext cx="66675" cy="790575"/>
+          </a:xfrm>
+          <a:prstGeom xmlns:a="http://schemas.openxmlformats.org/drawingml/2006/main" prst="rect">
+            <a:avLst/>
+          </a:prstGeom>
+          <a:solidFill xmlns:a="http://schemas.openxmlformats.org/drawingml/2006/main">
+            <a:srgbClr val="64A0C8"/>
+          </a:solidFill>
+          <a:ln xmlns:a="http://schemas.openxmlformats.org/drawingml/2006/main" w="0">
+            <a:noFill/>
+            <a:prstDash val="solid"/>
+          </a:ln>
+        </p:spPr>
+      </p:sp>
+      <p:sp>
+        <p:nvSpPr>
+          <p:cNvPr id="22" name="">
+            <a:extLst xmlns:a="http://schemas.openxmlformats.org/drawingml/2006/main">
+              <a:ext uri="{FF2B5EF4-FFF2-40B4-BE49-F238E27FC236}">
+                <a16:creationId xmlns:a16="http://schemas.microsoft.com/office/drawing/2014/main" id="{956AACE2-234F-4772-B555-9AF0DEC24015}"/>
+              </a:ext>
+            </a:extLst>
+          </p:cNvPr>
+          <p:cNvSpPr>
+            <a:spLocks xmlns:a="http://schemas.openxmlformats.org/drawingml/2006/main" noGrp="1"/>
+          </p:cNvSpPr>
+          <p:nvPr/>
+        </p:nvSpPr>
+        <p:spPr>
+          <a:xfrm xmlns:a="http://schemas.openxmlformats.org/drawingml/2006/main">
+            <a:off x="4914900" y="2886075"/>
+            <a:ext cx="3609975" cy="190500"/>
+          </a:xfrm>
+          <a:prstGeom xmlns:a="http://schemas.openxmlformats.org/drawingml/2006/main" prst="rect">
+            <a:avLst/>
+          </a:prstGeom>
+          <a:noFill xmlns:a="http://schemas.openxmlformats.org/drawingml/2006/main"/>
+          <a:ln xmlns:a="http://schemas.openxmlformats.org/drawingml/2006/main" w="0">
+            <a:noFill/>
+            <a:prstDash val="solid"/>
+          </a:ln>
+        </p:spPr>
+        <p:txBody>
+          <a:bodyPr xmlns:a="http://schemas.openxmlformats.org/drawingml/2006/main"/>
+          <a:lstStyle xmlns:a="http://schemas.openxmlformats.org/drawingml/2006/main"/>
+          <a:p xmlns:a="http://schemas.openxmlformats.org/drawingml/2006/main">
+            <a:pPr algn="l">
+              <a:defRPr sz="1125" b="1">
+                <a:solidFill>
+                  <a:srgbClr val="005293"/>
+                </a:solidFill>
+              </a:defRPr>
+            </a:pPr>
+            <a:r>
+              <a:rPr sz="1125" b="1">
+                <a:solidFill>
+                  <a:srgbClr val="005293"/>
+                </a:solidFill>
+              </a:rPr>
+              <a:t>5. Recommendation outputs</a:t>
+            </a:r>
+          </a:p>
+        </p:txBody>
+      </p:sp>
+      <p:sp>
+        <p:nvSpPr>
+          <p:cNvPr id="23" name="">
+            <a:extLst xmlns:a="http://schemas.openxmlformats.org/drawingml/2006/main">
+              <a:ext uri="{FF2B5EF4-FFF2-40B4-BE49-F238E27FC236}">
+                <a16:creationId xmlns:a16="http://schemas.microsoft.com/office/drawing/2014/main" id="{E600B103-4AA2-4A4C-8B26-C9BD014C830E}"/>
+              </a:ext>
+            </a:extLst>
+          </p:cNvPr>
+          <p:cNvSpPr>
+            <a:spLocks xmlns:a="http://schemas.openxmlformats.org/drawingml/2006/main" noGrp="1"/>
+          </p:cNvSpPr>
+          <p:nvPr/>
+        </p:nvSpPr>
+        <p:spPr>
+          <a:xfrm xmlns:a="http://schemas.openxmlformats.org/drawingml/2006/main">
+            <a:off x="4914900" y="3124200"/>
+            <a:ext cx="3609975" cy="381000"/>
+          </a:xfrm>
+          <a:prstGeom xmlns:a="http://schemas.openxmlformats.org/drawingml/2006/main" prst="rect">
+            <a:avLst/>
+          </a:prstGeom>
+          <a:noFill xmlns:a="http://schemas.openxmlformats.org/drawingml/2006/main"/>
+          <a:ln xmlns:a="http://schemas.openxmlformats.org/drawingml/2006/main" w="0">
+            <a:noFill/>
+            <a:prstDash val="solid"/>
+          </a:ln>
+        </p:spPr>
+        <p:txBody>
+          <a:bodyPr xmlns:a="http://schemas.openxmlformats.org/drawingml/2006/main"/>
+          <a:lstStyle xmlns:a="http://schemas.openxmlformats.org/drawingml/2006/main"/>
+          <a:p xmlns:a="http://schemas.openxmlformats.org/drawingml/2006/main">
+            <a:pPr algn="l">
+              <a:defRPr sz="923" b="0">
+                <a:solidFill>
+                  <a:srgbClr val="000000"/>
+                </a:solidFill>
+              </a:defRPr>
+            </a:pPr>
+            <a:r>
+              <a:rPr sz="923" b="0">
+                <a:solidFill>
+                  <a:srgbClr val="000000"/>
+                </a:solidFill>
+              </a:rPr>
+              <a:t>offer_recommendations.csv</a:t>
+            </a:r>
+          </a:p>
+          <a:p xmlns:a="http://schemas.openxmlformats.org/drawingml/2006/main">
+            <a:pPr algn="l">
+              <a:defRPr sz="923" b="0">
+                <a:solidFill>
+                  <a:srgbClr val="000000"/>
+                </a:solidFill>
+              </a:defRPr>
+            </a:pPr>
+            <a:r>
+              <a:rPr sz="923" b="0">
+                <a:solidFill>
+                  <a:srgbClr val="000000"/>
+                </a:solidFill>
+              </a:rPr>
+              <a:t>single-listing menus from recommend_one.py</a:t>
+            </a:r>
+          </a:p>
+        </p:txBody>
+      </p:sp>
+      <p:sp>
+        <p:nvSpPr>
+          <p:cNvPr id="24" name="">
+            <a:extLst xmlns:a="http://schemas.openxmlformats.org/drawingml/2006/main">
+              <a:ext uri="{FF2B5EF4-FFF2-40B4-BE49-F238E27FC236}">
+                <a16:creationId xmlns:a16="http://schemas.microsoft.com/office/drawing/2014/main" id="{CB6B5882-6416-4348-A869-AA11F8FFBC4F}"/>
+              </a:ext>
+            </a:extLst>
+          </p:cNvPr>
+          <p:cNvSpPr>
+            <a:spLocks xmlns:a="http://schemas.openxmlformats.org/drawingml/2006/main" noGrp="1"/>
+          </p:cNvSpPr>
+          <p:nvPr/>
+        </p:nvSpPr>
+        <p:spPr>
+          <a:xfrm xmlns:a="http://schemas.openxmlformats.org/drawingml/2006/main">
+            <a:off x="514350" y="4000500"/>
+            <a:ext cx="8115300" cy="590550"/>
+          </a:xfrm>
+          <a:prstGeom xmlns:a="http://schemas.openxmlformats.org/drawingml/2006/main" prst="rect">
+            <a:avLst/>
+          </a:prstGeom>
+          <a:solidFill xmlns:a="http://schemas.openxmlformats.org/drawingml/2006/main">
+            <a:srgbClr val="EAF3FA"/>
+          </a:solidFill>
+          <a:ln xmlns:a="http://schemas.openxmlformats.org/drawingml/2006/main" w="9525">
+            <a:solidFill>
+              <a:srgbClr val="C7DDEC"/>
+            </a:solidFill>
+            <a:prstDash val="solid"/>
+          </a:ln>
+        </p:spPr>
+      </p:sp>
+      <p:sp>
+        <p:nvSpPr>
+          <p:cNvPr id="25" name="">
+            <a:extLst xmlns:a="http://schemas.openxmlformats.org/drawingml/2006/main">
+              <a:ext uri="{FF2B5EF4-FFF2-40B4-BE49-F238E27FC236}">
+                <a16:creationId xmlns:a16="http://schemas.microsoft.com/office/drawing/2014/main" id="{D14C4C11-9F92-4663-B715-5767CDFE6282}"/>
+              </a:ext>
+            </a:extLst>
+          </p:cNvPr>
+          <p:cNvSpPr>
+            <a:spLocks xmlns:a="http://schemas.openxmlformats.org/drawingml/2006/main" noGrp="1"/>
+          </p:cNvSpPr>
+          <p:nvPr/>
+        </p:nvSpPr>
+        <p:spPr>
+          <a:xfrm xmlns:a="http://schemas.openxmlformats.org/drawingml/2006/main">
+            <a:off x="742950" y="4181475"/>
+            <a:ext cx="7658100" cy="247650"/>
+          </a:xfrm>
+          <a:prstGeom xmlns:a="http://schemas.openxmlformats.org/drawingml/2006/main" prst="rect">
+            <a:avLst/>
+          </a:prstGeom>
+          <a:noFill xmlns:a="http://schemas.openxmlformats.org/drawingml/2006/main"/>
+          <a:ln xmlns:a="http://schemas.openxmlformats.org/drawingml/2006/main" w="0">
+            <a:noFill/>
+            <a:prstDash val="solid"/>
+          </a:ln>
+        </p:spPr>
+        <p:txBody>
+          <a:bodyPr xmlns:a="http://schemas.openxmlformats.org/drawingml/2006/main"/>
+          <a:lstStyle xmlns:a="http://schemas.openxmlformats.org/drawingml/2006/main"/>
+          <a:p xmlns:a="http://schemas.openxmlformats.org/drawingml/2006/main">
+            <a:pPr algn="ctr">
+              <a:defRPr sz="1140" b="1">
+                <a:solidFill>
+                  <a:srgbClr val="005293"/>
+                </a:solidFill>
+              </a:defRPr>
+            </a:pPr>
+            <a:r>
+              <a:rPr sz="1140" b="1">
+                <a:solidFill>
+                  <a:srgbClr val="005293"/>
+                </a:solidFill>
+              </a:rPr>
+              <a:t>Tracked final deliverables: technical_report.md/.pdf, results dashboard figure, and this presentation deck.</a:t>
+            </a:r>
+          </a:p>
+        </p:txBody>
+      </p:sp>
+      <p:sp>
+        <p:nvSpPr>
+          <p:cNvPr id="26" name="">
+            <a:extLst xmlns:a="http://schemas.openxmlformats.org/drawingml/2006/main">
+              <a:ext uri="{FF2B5EF4-FFF2-40B4-BE49-F238E27FC236}">
+                <a16:creationId xmlns:a16="http://schemas.microsoft.com/office/drawing/2014/main" id="{D4ED4CC9-DC87-4666-8FD5-2061BB0338C3}"/>
+              </a:ext>
+            </a:extLst>
+          </p:cNvPr>
+          <p:cNvSpPr>
+            <a:spLocks xmlns:a="http://schemas.openxmlformats.org/drawingml/2006/main" noGrp="1"/>
+          </p:cNvSpPr>
+          <p:nvPr/>
+        </p:nvSpPr>
+        <p:spPr>
+          <a:xfrm xmlns:a="http://schemas.openxmlformats.org/drawingml/2006/main">
+            <a:off x="304800" y="4857750"/>
+            <a:ext cx="6191250" cy="228600"/>
+          </a:xfrm>
+          <a:prstGeom xmlns:a="http://schemas.openxmlformats.org/drawingml/2006/main" prst="rect">
+            <a:avLst/>
+          </a:prstGeom>
+          <a:noFill xmlns:a="http://schemas.openxmlformats.org/drawingml/2006/main"/>
+          <a:ln xmlns:a="http://schemas.openxmlformats.org/drawingml/2006/main" w="0">
+            <a:noFill/>
+            <a:prstDash val="solid"/>
+          </a:ln>
+        </p:spPr>
+        <p:txBody>
+          <a:bodyPr xmlns:a="http://schemas.openxmlformats.org/drawingml/2006/main"/>
+          <a:lstStyle xmlns:a="http://schemas.openxmlformats.org/drawingml/2006/main"/>
+          <a:p xmlns:a="http://schemas.openxmlformats.org/drawingml/2006/main">
+            <a:pPr algn="l">
+              <a:defRPr sz="1102" b="0">
+                <a:solidFill>
+                  <a:srgbClr val="000000"/>
+                </a:solidFill>
+              </a:defRPr>
+            </a:pPr>
+            <a:r>
+              <a:rPr sz="1102" b="0">
+                <a:solidFill>
+                  <a:srgbClr val="000000"/>
+                </a:solidFill>
+              </a:rPr>
+              <a:t>eBay Best Offer anchoring RL | Advanced Seminar (WIHN0043SE)</a:t>
+            </a:r>
+          </a:p>
+        </p:txBody>
+      </p:sp>
+      <p:sp>
+        <p:nvSpPr>
+          <p:cNvPr id="27" name="">
+            <a:extLst xmlns:a="http://schemas.openxmlformats.org/drawingml/2006/main">
+              <a:ext uri="{FF2B5EF4-FFF2-40B4-BE49-F238E27FC236}">
+                <a16:creationId xmlns:a16="http://schemas.microsoft.com/office/drawing/2014/main" id="{6C8C6AD7-06A6-4963-AD76-9CED3F4C5F84}"/>
+              </a:ext>
+            </a:extLst>
+          </p:cNvPr>
+          <p:cNvSpPr>
+            <a:spLocks xmlns:a="http://schemas.openxmlformats.org/drawingml/2006/main" noGrp="1"/>
+          </p:cNvSpPr>
+          <p:nvPr/>
+        </p:nvSpPr>
+        <p:spPr>
+          <a:xfrm xmlns:a="http://schemas.openxmlformats.org/drawingml/2006/main">
+            <a:off x="7810500" y="4857750"/>
+            <a:ext cx="1009650" cy="228600"/>
+          </a:xfrm>
+          <a:prstGeom xmlns:a="http://schemas.openxmlformats.org/drawingml/2006/main" prst="rect">
+            <a:avLst/>
+          </a:prstGeom>
+          <a:noFill xmlns:a="http://schemas.openxmlformats.org/drawingml/2006/main"/>
+          <a:ln xmlns:a="http://schemas.openxmlformats.org/drawingml/2006/main" w="0">
+            <a:noFill/>
+            <a:prstDash val="solid"/>
+          </a:ln>
+        </p:spPr>
+        <p:txBody>
+          <a:bodyPr xmlns:a="http://schemas.openxmlformats.org/drawingml/2006/main"/>
+          <a:lstStyle xmlns:a="http://schemas.openxmlformats.org/drawingml/2006/main"/>
+          <a:p xmlns:a="http://schemas.openxmlformats.org/drawingml/2006/main">
+            <a:pPr algn="r">
+              <a:defRPr sz="1102" b="0">
+                <a:solidFill>
+                  <a:srgbClr val="000000"/>
+                </a:solidFill>
+              </a:defRPr>
+            </a:pPr>
+            <a:r>
+              <a:rPr sz="1102" b="0">
+                <a:solidFill>
+                  <a:srgbClr val="000000"/>
+                </a:solidFill>
+              </a:rPr>
+              <a:t>15</a:t>
+            </a:r>
+          </a:p>
+        </p:txBody>
+      </p:sp>
+    </p:spTree>
+    <p:extLst>
+      <p:ext uri="{BB962C8B-B14F-4D97-AF65-F5344CB8AC3E}">
+        <p14:creationId xmlns:p14="http://schemas.microsoft.com/office/powerpoint/2010/main" val="1637574051"/>
       </p:ext>
     </p:extLst>
   </p:cSld>
@@ -9356,7 +10666,7 @@
           <p:nvPr/>
         </p:nvPicPr>
         <p:blipFill>
-          <a:blip xmlns:r="http://schemas.openxmlformats.org/officeDocument/2006/relationships" xmlns:a="http://schemas.openxmlformats.org/drawingml/2006/main" r:embed="R195e1fe9cd414522"/>
+          <a:blip xmlns:r="http://schemas.openxmlformats.org/officeDocument/2006/relationships" xmlns:a="http://schemas.openxmlformats.org/drawingml/2006/main" r:embed="Reb9b0537ef0841ec"/>
           <a:stretch xmlns:a="http://schemas.openxmlformats.org/drawingml/2006/main">
             <a:fillRect l="0" t="0" r="0" b="0"/>
           </a:stretch>
@@ -9652,7 +10962,7 @@
           <p:nvPr/>
         </p:nvPicPr>
         <p:blipFill>
-          <a:blip xmlns:r="http://schemas.openxmlformats.org/officeDocument/2006/relationships" xmlns:a="http://schemas.openxmlformats.org/drawingml/2006/main" r:embed="R8f8dae1148294c80"/>
+          <a:blip xmlns:r="http://schemas.openxmlformats.org/officeDocument/2006/relationships" xmlns:a="http://schemas.openxmlformats.org/drawingml/2006/main" r:embed="R8334ccdc9af64609"/>
           <a:stretch xmlns:a="http://schemas.openxmlformats.org/drawingml/2006/main">
             <a:fillRect l="0" t="0" r="0" b="0"/>
           </a:stretch>
@@ -9974,7 +11284,7 @@
         </p:xfrm>
         <a:graphic xmlns:a="http://schemas.openxmlformats.org/drawingml/2006/main">
           <a:graphicData uri="http://schemas.openxmlformats.org/drawingml/2006/chart">
-            <c:chart xmlns:r="http://schemas.openxmlformats.org/officeDocument/2006/relationships" xmlns:c="http://schemas.openxmlformats.org/drawingml/2006/chart" r:id="R6ee85f79c7134076"/>
+            <c:chart xmlns:r="http://schemas.openxmlformats.org/officeDocument/2006/relationships" xmlns:c="http://schemas.openxmlformats.org/drawingml/2006/chart" r:id="Re61742e8892b470e"/>
           </a:graphicData>
         </a:graphic>
       </p:graphicFrame>
@@ -10059,7 +11369,7 @@
           <p:nvPr/>
         </p:nvPicPr>
         <p:blipFill>
-          <a:blip xmlns:r="http://schemas.openxmlformats.org/officeDocument/2006/relationships" xmlns:a="http://schemas.openxmlformats.org/drawingml/2006/main" r:embed="R0a32c4e4c1ee42a0"/>
+          <a:blip xmlns:r="http://schemas.openxmlformats.org/officeDocument/2006/relationships" xmlns:a="http://schemas.openxmlformats.org/drawingml/2006/main" r:embed="R0da98654db0f421d"/>
           <a:stretch xmlns:a="http://schemas.openxmlformats.org/drawingml/2006/main">
             <a:fillRect l="0" t="0" r="0" b="0"/>
           </a:stretch>
@@ -10531,7 +11841,7 @@
           <p:nvPr/>
         </p:nvPicPr>
         <p:blipFill>
-          <a:blip xmlns:r="http://schemas.openxmlformats.org/officeDocument/2006/relationships" xmlns:a="http://schemas.openxmlformats.org/drawingml/2006/main" r:embed="Rf9e3254f719643b4"/>
+          <a:blip xmlns:r="http://schemas.openxmlformats.org/officeDocument/2006/relationships" xmlns:a="http://schemas.openxmlformats.org/drawingml/2006/main" r:embed="Rd1a164f5355440db"/>
           <a:stretch xmlns:a="http://schemas.openxmlformats.org/drawingml/2006/main">
             <a:fillRect l="0" t="0" r="0" b="0"/>
           </a:stretch>
@@ -10827,7 +12137,7 @@
           <p:nvPr/>
         </p:nvPicPr>
         <p:blipFill>
-          <a:blip xmlns:r="http://schemas.openxmlformats.org/officeDocument/2006/relationships" xmlns:a="http://schemas.openxmlformats.org/drawingml/2006/main" r:embed="R3564c0909b3c45b0"/>
+          <a:blip xmlns:r="http://schemas.openxmlformats.org/officeDocument/2006/relationships" xmlns:a="http://schemas.openxmlformats.org/drawingml/2006/main" r:embed="R3f98a67ee7b8435a"/>
           <a:stretch xmlns:a="http://schemas.openxmlformats.org/drawingml/2006/main">
             <a:fillRect l="0" t="0" r="0" b="0"/>
           </a:stretch>
@@ -11773,7 +13083,7 @@
           <p:nvPr/>
         </p:nvPicPr>
         <p:blipFill>
-          <a:blip xmlns:r="http://schemas.openxmlformats.org/officeDocument/2006/relationships" xmlns:a="http://schemas.openxmlformats.org/drawingml/2006/main" r:embed="R19122a4a80ce4385"/>
+          <a:blip xmlns:r="http://schemas.openxmlformats.org/officeDocument/2006/relationships" xmlns:a="http://schemas.openxmlformats.org/drawingml/2006/main" r:embed="R400ab7e3633544b7"/>
           <a:stretch xmlns:a="http://schemas.openxmlformats.org/drawingml/2006/main">
             <a:fillRect l="0" t="0" r="0" b="0"/>
           </a:stretch>
@@ -12470,7 +13780,7 @@
           <p:nvPr/>
         </p:nvPicPr>
         <p:blipFill>
-          <a:blip xmlns:r="http://schemas.openxmlformats.org/officeDocument/2006/relationships" xmlns:a="http://schemas.openxmlformats.org/drawingml/2006/main" r:embed="R98ba8bd3ec654168"/>
+          <a:blip xmlns:r="http://schemas.openxmlformats.org/officeDocument/2006/relationships" xmlns:a="http://schemas.openxmlformats.org/drawingml/2006/main" r:embed="R4162297806f14186"/>
           <a:stretch xmlns:a="http://schemas.openxmlformats.org/drawingml/2006/main">
             <a:fillRect l="0" t="0" r="0" b="0"/>
           </a:stretch>
@@ -13586,7 +14896,7 @@
           <p:nvPr/>
         </p:nvPicPr>
         <p:blipFill>
-          <a:blip xmlns:r="http://schemas.openxmlformats.org/officeDocument/2006/relationships" xmlns:a="http://schemas.openxmlformats.org/drawingml/2006/main" r:embed="Rb37e16b5eaed4b4a"/>
+          <a:blip xmlns:r="http://schemas.openxmlformats.org/officeDocument/2006/relationships" xmlns:a="http://schemas.openxmlformats.org/drawingml/2006/main" r:embed="R60cb980f17224686"/>
           <a:stretch xmlns:a="http://schemas.openxmlformats.org/drawingml/2006/main">
             <a:fillRect l="0" t="0" r="0" b="0"/>
           </a:stretch>
@@ -13851,7 +15161,7 @@
         </p:xfrm>
         <a:graphic xmlns:a="http://schemas.openxmlformats.org/drawingml/2006/main">
           <a:graphicData uri="http://schemas.openxmlformats.org/drawingml/2006/chart">
-            <c:chart xmlns:r="http://schemas.openxmlformats.org/officeDocument/2006/relationships" xmlns:c="http://schemas.openxmlformats.org/drawingml/2006/chart" r:id="Rcc76a196c35d47cf"/>
+            <c:chart xmlns:r="http://schemas.openxmlformats.org/officeDocument/2006/relationships" xmlns:c="http://schemas.openxmlformats.org/drawingml/2006/chart" r:id="Rf617e4bef4ee412a"/>
           </a:graphicData>
         </a:graphic>
       </p:graphicFrame>

--- a/report/ebay_anchoring_rl_presentation.pptx
+++ b/report/ebay_anchoring_rl_presentation.pptx
@@ -2,27 +2,26 @@
 <file path=ppt/presentation.xml><?xml version="1.0" encoding="utf-8"?>
 <p:presentation xmlns:p="http://schemas.openxmlformats.org/presentationml/2006/main">
   <p:sldMasterIdLst>
-    <p:sldMasterId xmlns:r="http://schemas.openxmlformats.org/officeDocument/2006/relationships" id="2147483648" r:id="Rb18b11d49b1a4a87"/>
+    <p:sldMasterId xmlns:r="http://schemas.openxmlformats.org/officeDocument/2006/relationships" id="2147483648" r:id="R3419f6d499974777"/>
   </p:sldMasterIdLst>
   <p:notesMasterIdLst>
-    <p:notesMasterId xmlns:r="http://schemas.openxmlformats.org/officeDocument/2006/relationships" r:id="R17906ce6c9864ee5"/>
+    <p:notesMasterId xmlns:r="http://schemas.openxmlformats.org/officeDocument/2006/relationships" r:id="R9d32fefdebaf493a"/>
   </p:notesMasterIdLst>
   <p:sldIdLst>
-    <p:sldId xmlns:r="http://schemas.openxmlformats.org/officeDocument/2006/relationships" id="256" r:id="R06e1c4abb53c4108"/>
-    <p:sldId xmlns:r="http://schemas.openxmlformats.org/officeDocument/2006/relationships" id="257" r:id="R71e60174eb224aee"/>
-    <p:sldId xmlns:r="http://schemas.openxmlformats.org/officeDocument/2006/relationships" id="258" r:id="R9ccebb2805cb420d"/>
-    <p:sldId xmlns:r="http://schemas.openxmlformats.org/officeDocument/2006/relationships" id="259" r:id="R914bc5981272473e"/>
-    <p:sldId xmlns:r="http://schemas.openxmlformats.org/officeDocument/2006/relationships" id="260" r:id="R23ee085260d04396"/>
-    <p:sldId xmlns:r="http://schemas.openxmlformats.org/officeDocument/2006/relationships" id="261" r:id="R437251f166274495"/>
-    <p:sldId xmlns:r="http://schemas.openxmlformats.org/officeDocument/2006/relationships" id="262" r:id="R4f75eb74ff684624"/>
-    <p:sldId xmlns:r="http://schemas.openxmlformats.org/officeDocument/2006/relationships" id="263" r:id="Re4cc04a768f5454c"/>
-    <p:sldId xmlns:r="http://schemas.openxmlformats.org/officeDocument/2006/relationships" id="264" r:id="R39779d0770234719"/>
-    <p:sldId xmlns:r="http://schemas.openxmlformats.org/officeDocument/2006/relationships" id="265" r:id="Rf0851880686d40ec"/>
-    <p:sldId xmlns:r="http://schemas.openxmlformats.org/officeDocument/2006/relationships" id="266" r:id="R46a1eed907394a3e"/>
-    <p:sldId xmlns:r="http://schemas.openxmlformats.org/officeDocument/2006/relationships" id="267" r:id="Re00eddf80dda4df9"/>
-    <p:sldId xmlns:r="http://schemas.openxmlformats.org/officeDocument/2006/relationships" id="268" r:id="R86524e7d278e40cc"/>
-    <p:sldId xmlns:r="http://schemas.openxmlformats.org/officeDocument/2006/relationships" id="269" r:id="R6814c36df9404a80"/>
-    <p:sldId xmlns:r="http://schemas.openxmlformats.org/officeDocument/2006/relationships" id="270" r:id="Ra8a45ae55f9646c8"/>
+    <p:sldId xmlns:r="http://schemas.openxmlformats.org/officeDocument/2006/relationships" id="256" r:id="Re414cd07c6b744b3"/>
+    <p:sldId xmlns:r="http://schemas.openxmlformats.org/officeDocument/2006/relationships" id="257" r:id="Rc0e86462fb0a466e"/>
+    <p:sldId xmlns:r="http://schemas.openxmlformats.org/officeDocument/2006/relationships" id="258" r:id="Rfbc8da35a89642b5"/>
+    <p:sldId xmlns:r="http://schemas.openxmlformats.org/officeDocument/2006/relationships" id="259" r:id="R46dfcf6ff05e4001"/>
+    <p:sldId xmlns:r="http://schemas.openxmlformats.org/officeDocument/2006/relationships" id="260" r:id="R96568e83eed34f8b"/>
+    <p:sldId xmlns:r="http://schemas.openxmlformats.org/officeDocument/2006/relationships" id="261" r:id="R992c2511cc264fc0"/>
+    <p:sldId xmlns:r="http://schemas.openxmlformats.org/officeDocument/2006/relationships" id="262" r:id="R9f23c51ee58d4a87"/>
+    <p:sldId xmlns:r="http://schemas.openxmlformats.org/officeDocument/2006/relationships" id="263" r:id="Re66edfa6de134311"/>
+    <p:sldId xmlns:r="http://schemas.openxmlformats.org/officeDocument/2006/relationships" id="264" r:id="Rbb1aeec6a66d4f55"/>
+    <p:sldId xmlns:r="http://schemas.openxmlformats.org/officeDocument/2006/relationships" id="265" r:id="R37f466412c934eb3"/>
+    <p:sldId xmlns:r="http://schemas.openxmlformats.org/officeDocument/2006/relationships" id="266" r:id="Rc81bb15bde834311"/>
+    <p:sldId xmlns:r="http://schemas.openxmlformats.org/officeDocument/2006/relationships" id="267" r:id="Rc8f9b63ace48418a"/>
+    <p:sldId xmlns:r="http://schemas.openxmlformats.org/officeDocument/2006/relationships" id="268" r:id="Ra5214e9ff7794fe2"/>
+    <p:sldId xmlns:r="http://schemas.openxmlformats.org/officeDocument/2006/relationships" id="269" r:id="R6a7d928bace54772"/>
   </p:sldIdLst>
   <p:sldSz cx="9144000" cy="5143500"/>
   <p:notesSz cx="6858000" cy="9144000"/>
@@ -714,7 +713,7 @@
           <a:lstStyle xmlns:a="http://schemas.openxmlformats.org/drawingml/2006/main"/>
           <a:p xmlns:a="http://schemas.openxmlformats.org/drawingml/2006/main">
             <a:r>
-              <a:t>Read column two before column three. Observed, model estimate, simulator-only. The honest finding: no policy provably beats historical buyers; the contribution is knowing which numbers deserve trust.</a:t>
+              <a:t>Read evidence type before expected savings. The fixed 70 percent rule is fully supported and remains practically competitive with more complex policies.</a:t>
             </a:r>
           </a:p>
         </p:txBody>
@@ -784,7 +783,7 @@
           <a:lstStyle xmlns:a="http://schemas.openxmlformats.org/drawingml/2006/main"/>
           <a:p xmlns:a="http://schemas.openxmlformats.org/drawingml/2006/main">
             <a:r>
-              <a:t>Claims triage. If asked why savings estimates look small: they are per-thread expected savings including failed offers.</a:t>
+              <a:t>H1 is supported, H2 is partial, and H3 is supported only as a simulator sensitivity result. No live causal effect is claimed.</a:t>
             </a:r>
           </a:p>
         </p:txBody>
@@ -854,7 +853,7 @@
           <a:lstStyle xmlns:a="http://schemas.openxmlformats.org/drawingml/2006/main"/>
           <a:p xmlns:a="http://schemas.openxmlformats.org/drawingml/2006/main">
             <a:r>
-              <a:t>Close on the symmetry: behavioral insight for buyers, methodological insight for RL. Invite questions on OPE or the simulator.</a:t>
+              <a:t>Close with the practical 70 percent default and the support-flag rule for personalization.</a:t>
             </a:r>
           </a:p>
         </p:txBody>
@@ -950,72 +949,6 @@
 </p:notes>
 </file>
 
-<file path=ppt/notesSlides/notesSlide15.xml><?xml version="1.0" encoding="utf-8"?>
-<p:notes xmlns:p="http://schemas.openxmlformats.org/presentationml/2006/main">
-  <p:cSld>
-    <p:spTree>
-      <p:nvGrpSpPr>
-        <p:cNvPr id="1" name=""/>
-        <p:cNvGrpSpPr/>
-        <p:nvPr/>
-      </p:nvGrpSpPr>
-      <p:grpSpPr>
-        <a:xfrm xmlns:a="http://schemas.openxmlformats.org/drawingml/2006/main"/>
-      </p:grpSpPr>
-      <p:sp>
-        <p:nvSpPr>
-          <p:cNvPr id="2" name="Slide Image Placeholder 1"/>
-          <p:cNvSpPr>
-            <a:spLocks xmlns:a="http://schemas.openxmlformats.org/drawingml/2006/main" noGrp="1"/>
-          </p:cNvSpPr>
-          <p:nvPr>
-            <p:ph type="sldImg" idx="0"/>
-          </p:nvPr>
-        </p:nvSpPr>
-        <p:spPr/>
-      </p:sp>
-      <p:sp>
-        <p:nvSpPr>
-          <p:cNvPr id="3" name="Notes Placeholder 2"/>
-          <p:cNvSpPr>
-            <a:spLocks xmlns:a="http://schemas.openxmlformats.org/drawingml/2006/main" noGrp="1"/>
-          </p:cNvSpPr>
-          <p:nvPr>
-            <p:ph type="body" idx="1"/>
-          </p:nvPr>
-        </p:nvSpPr>
-        <p:spPr/>
-        <p:txBody>
-          <a:bodyPr xmlns:a="http://schemas.openxmlformats.org/drawingml/2006/main"/>
-          <a:lstStyle xmlns:a="http://schemas.openxmlformats.org/drawingml/2006/main"/>
-          <a:p xmlns:a="http://schemas.openxmlformats.org/drawingml/2006/main"/>
-        </p:txBody>
-      </p:sp>
-      <p:sp>
-        <p:nvSpPr>
-          <p:cNvPr id="4" name="Slide Number Placeholder 3"/>
-          <p:cNvSpPr>
-            <a:spLocks xmlns:a="http://schemas.openxmlformats.org/drawingml/2006/main" noGrp="1"/>
-          </p:cNvSpPr>
-          <p:nvPr>
-            <p:ph type="sldNum" idx="5"/>
-          </p:nvPr>
-        </p:nvSpPr>
-        <p:spPr/>
-        <p:txBody>
-          <a:bodyPr xmlns:a="http://schemas.openxmlformats.org/drawingml/2006/main"/>
-          <a:lstStyle xmlns:a="http://schemas.openxmlformats.org/drawingml/2006/main"/>
-          <a:p xmlns:a="http://schemas.openxmlformats.org/drawingml/2006/main"/>
-        </p:txBody>
-      </p:sp>
-    </p:spTree>
-  </p:cSld>
-  <p:clrMapOvr>
-    <a:masterClrMapping xmlns:a="http://schemas.openxmlformats.org/drawingml/2006/main"/>
-  </p:clrMapOvr>
-</p:notes>
-</file>
-
 <file path=ppt/notesSlides/notesSlide2.xml><?xml version="1.0" encoding="utf-8"?>
 <p:notes xmlns:p="http://schemas.openxmlformats.org/presentationml/2006/main">
   <p:cSld>
@@ -1406,7 +1339,7 @@
           <a:lstStyle xmlns:a="http://schemas.openxmlformats.org/drawingml/2006/main"/>
           <a:p xmlns:a="http://schemas.openxmlformats.org/drawingml/2006/main">
             <a:r>
-              <a:t>Ported findings slide: Phase 1 is a response model, not a value function. AUC says prediction is usable; the ESS number previews why greedy maximization of this surface fails.</a:t>
+              <a:t>Phase 1 is both discriminative and calibrated. The key limitation is not prediction quality alone; it is observational support when the model is optimized.</a:t>
             </a:r>
           </a:p>
         </p:txBody>
@@ -1546,7 +1479,7 @@
           <a:lstStyle xmlns:a="http://schemas.openxmlformats.org/drawingml/2006/main"/>
           <a:p xmlns:a="http://schemas.openxmlformats.org/drawingml/2006/main">
             <a:r>
-              <a:t>The headline diagnostic. CQL and the fixed anchor retain around 36 percent effective support; greedy collapses to under one percent. High estimated reward, no evaluability.</a:t>
+              <a:t>At h = 0.05, greedy has lower ESS than CQL or fixed 0.70. These estimated-propensity diagnostics are useful for support, not causal policy lift.</a:t>
             </a:r>
           </a:p>
         </p:txBody>
@@ -4502,17 +4435,17 @@
   </p:cSld>
   <p:clrMap bg1="lt1" tx1="dk1" bg2="lt2" tx2="dk2" accent1="accent1" accent2="accent2" accent3="accent3" accent4="accent4" accent5="accent5" accent6="accent6" hlink="hlink" folHlink="folHlink"/>
   <p:sldLayoutIdLst>
-    <p:sldLayoutId xmlns:r="http://schemas.openxmlformats.org/officeDocument/2006/relationships" id="2147483649" r:id="R83e70888bb23499e"/>
-    <p:sldLayoutId xmlns:r="http://schemas.openxmlformats.org/officeDocument/2006/relationships" id="2147483650" r:id="R1767977c581d4835"/>
-    <p:sldLayoutId xmlns:r="http://schemas.openxmlformats.org/officeDocument/2006/relationships" id="2147483651" r:id="Red5587056e884629"/>
-    <p:sldLayoutId xmlns:r="http://schemas.openxmlformats.org/officeDocument/2006/relationships" id="2147483652" r:id="Ra41f1bdad1e04776"/>
-    <p:sldLayoutId xmlns:r="http://schemas.openxmlformats.org/officeDocument/2006/relationships" id="2147483653" r:id="R00b7778e8b6d4f1a"/>
-    <p:sldLayoutId xmlns:r="http://schemas.openxmlformats.org/officeDocument/2006/relationships" id="2147483654" r:id="R5f7ac345e5a948df"/>
-    <p:sldLayoutId xmlns:r="http://schemas.openxmlformats.org/officeDocument/2006/relationships" id="2147483655" r:id="Re27b9ef12f994ceb"/>
-    <p:sldLayoutId xmlns:r="http://schemas.openxmlformats.org/officeDocument/2006/relationships" id="2147483656" r:id="R85a04191d6064dc9"/>
-    <p:sldLayoutId xmlns:r="http://schemas.openxmlformats.org/officeDocument/2006/relationships" id="2147483657" r:id="Rdf2685746d1243e1"/>
-    <p:sldLayoutId xmlns:r="http://schemas.openxmlformats.org/officeDocument/2006/relationships" id="2147483658" r:id="Rc5053c11f2384d6d"/>
-    <p:sldLayoutId xmlns:r="http://schemas.openxmlformats.org/officeDocument/2006/relationships" id="2147483659" r:id="R7e122ed921414cf0"/>
+    <p:sldLayoutId xmlns:r="http://schemas.openxmlformats.org/officeDocument/2006/relationships" id="2147483649" r:id="Ra292774b760a4da7"/>
+    <p:sldLayoutId xmlns:r="http://schemas.openxmlformats.org/officeDocument/2006/relationships" id="2147483650" r:id="Rf46b8eb557584e62"/>
+    <p:sldLayoutId xmlns:r="http://schemas.openxmlformats.org/officeDocument/2006/relationships" id="2147483651" r:id="R589c31d0e5964da2"/>
+    <p:sldLayoutId xmlns:r="http://schemas.openxmlformats.org/officeDocument/2006/relationships" id="2147483652" r:id="R8941f7aff2b94135"/>
+    <p:sldLayoutId xmlns:r="http://schemas.openxmlformats.org/officeDocument/2006/relationships" id="2147483653" r:id="R036164d91ee34ad2"/>
+    <p:sldLayoutId xmlns:r="http://schemas.openxmlformats.org/officeDocument/2006/relationships" id="2147483654" r:id="Rbbc89adddf944437"/>
+    <p:sldLayoutId xmlns:r="http://schemas.openxmlformats.org/officeDocument/2006/relationships" id="2147483655" r:id="R8863600462bc436f"/>
+    <p:sldLayoutId xmlns:r="http://schemas.openxmlformats.org/officeDocument/2006/relationships" id="2147483656" r:id="R4a3c8010670e4d34"/>
+    <p:sldLayoutId xmlns:r="http://schemas.openxmlformats.org/officeDocument/2006/relationships" id="2147483657" r:id="Rba474a5fd5864b2d"/>
+    <p:sldLayoutId xmlns:r="http://schemas.openxmlformats.org/officeDocument/2006/relationships" id="2147483658" r:id="R0ba059de7a864bd7"/>
+    <p:sldLayoutId xmlns:r="http://schemas.openxmlformats.org/officeDocument/2006/relationships" id="2147483659" r:id="R8295b6f88e434cff"/>
   </p:sldLayoutIdLst>
   <p:txStyles>
     <p:titleStyle>
@@ -5944,7 +5877,6 @@
           </a:p>
         </c:rich>
       </c:tx>
-      <c:overlay val="0"/>
       <c:txPr>
         <a:bodyPr xmlns:a="http://schemas.openxmlformats.org/drawingml/2006/main" anchorCtr="1"/>
         <a:lstStyle xmlns:a="http://schemas.openxmlformats.org/drawingml/2006/main"/>
@@ -6005,13 +5937,13 @@
                 <c:formatCode>General</c:formatCode>
                 <c:ptCount val="3"/>
                 <c:pt idx="0">
-                  <c:v>0.008</c:v>
+                  <c:v>0.256</c:v>
                 </c:pt>
                 <c:pt idx="1">
                   <c:v>0.362</c:v>
                 </c:pt>
                 <c:pt idx="2">
-                  <c:v>0.362</c:v>
+                  <c:v>0.355</c:v>
                 </c:pt>
               </c:numCache>
             </c:numRef>
@@ -6093,7 +6025,7 @@
           <p:nvPr/>
         </p:nvPicPr>
         <p:blipFill>
-          <a:blip xmlns:r="http://schemas.openxmlformats.org/officeDocument/2006/relationships" xmlns:a="http://schemas.openxmlformats.org/drawingml/2006/main" r:embed="R920131b0e46b4504"/>
+          <a:blip xmlns:r="http://schemas.openxmlformats.org/officeDocument/2006/relationships" xmlns:a="http://schemas.openxmlformats.org/drawingml/2006/main" r:embed="Rf52065732c3c4ff0"/>
           <a:stretch xmlns:a="http://schemas.openxmlformats.org/drawingml/2006/main">
             <a:fillRect l="0" t="0" r="0" b="0"/>
           </a:stretch>
@@ -6396,7 +6328,7 @@
           <p:nvPr/>
         </p:nvPicPr>
         <p:blipFill>
-          <a:blip xmlns:r="http://schemas.openxmlformats.org/officeDocument/2006/relationships" xmlns:a="http://schemas.openxmlformats.org/drawingml/2006/main" r:embed="R13c728c21e4f46a2"/>
+          <a:blip xmlns:r="http://schemas.openxmlformats.org/officeDocument/2006/relationships" xmlns:a="http://schemas.openxmlformats.org/drawingml/2006/main" r:embed="R0d14f01e92024e7c"/>
           <a:stretch xmlns:a="http://schemas.openxmlformats.org/drawingml/2006/main">
             <a:fillRect l="0" t="0" r="0" b="0"/>
           </a:stretch>
@@ -6692,7 +6624,7 @@
           <p:nvPr/>
         </p:nvPicPr>
         <p:blipFill>
-          <a:blip xmlns:r="http://schemas.openxmlformats.org/officeDocument/2006/relationships" xmlns:a="http://schemas.openxmlformats.org/drawingml/2006/main" r:embed="R96f9dbd99e8f4684"/>
+          <a:blip xmlns:r="http://schemas.openxmlformats.org/officeDocument/2006/relationships" xmlns:a="http://schemas.openxmlformats.org/drawingml/2006/main" r:embed="Rc34ac51e16964d8b"/>
           <a:stretch xmlns:a="http://schemas.openxmlformats.org/drawingml/2006/main">
             <a:fillRect l="0" t="0" r="0" b="0"/>
           </a:stretch>
@@ -6752,7 +6684,7 @@
                 <a:ea typeface="Arial"/>
                 <a:cs typeface="Arial"/>
               </a:rPr>
-              <a:t>What: evidence triage, not a leaderboard</a:t>
+              <a:t>What: the simple rule remains competitive</a:t>
             </a:r>
           </a:p>
         </p:txBody>
@@ -6973,7 +6905,7 @@
                           <a:ea typeface="Arial"/>
                           <a:cs typeface="Arial"/>
                         </a:rPr>
-                        <a:t>Deal / accept rate</a:t>
+                        <a:t>Accept rate</a:t>
                       </a:r>
                     </a:p>
                   </a:txBody>
@@ -7023,7 +6955,7 @@
                           <a:ea typeface="Arial"/>
                           <a:cs typeface="Arial"/>
                         </a:rPr>
-                        <a:t>Behavioral (historical)</a:t>
+                        <a:t>Historical</a:t>
                       </a:r>
                     </a:p>
                   </a:txBody>
@@ -7068,7 +7000,7 @@
                           <a:ea typeface="Arial"/>
                           <a:cs typeface="Arial"/>
                         </a:rPr>
-                        <a:t>0.050</a:t>
+                        <a:t>0.0973</a:t>
                       </a:r>
                     </a:p>
                   </a:txBody>
@@ -7092,7 +7024,7 @@
                           <a:ea typeface="Arial"/>
                           <a:cs typeface="Arial"/>
                         </a:rPr>
-                        <a:t>0.128</a:t>
+                        <a:t>0.3346</a:t>
                       </a:r>
                     </a:p>
                   </a:txBody>
@@ -7116,7 +7048,7 @@
                           <a:ea typeface="Arial"/>
                           <a:cs typeface="Arial"/>
                         </a:rPr>
-                        <a:t>0.665</a:t>
+                        <a:t>0.6062</a:t>
                       </a:r>
                     </a:p>
                   </a:txBody>
@@ -7139,7 +7071,7 @@
                           <a:ea typeface="Arial"/>
                           <a:cs typeface="Arial"/>
                         </a:rPr>
-                        <a:t>Fixed anchor 0.70</a:t>
+                        <a:t>Fixed 0.70</a:t>
                       </a:r>
                     </a:p>
                   </a:txBody>
@@ -7184,7 +7116,7 @@
                           <a:ea typeface="Arial"/>
                           <a:cs typeface="Arial"/>
                         </a:rPr>
-                        <a:t>0.027</a:t>
+                        <a:t>0.1268</a:t>
                       </a:r>
                     </a:p>
                   </a:txBody>
@@ -7208,7 +7140,7 @@
                           <a:ea typeface="Arial"/>
                           <a:cs typeface="Arial"/>
                         </a:rPr>
-                        <a:t>0.089</a:t>
+                        <a:t>0.4226</a:t>
                       </a:r>
                     </a:p>
                   </a:txBody>
@@ -7232,7 +7164,7 @@
                           <a:ea typeface="Arial"/>
                           <a:cs typeface="Arial"/>
                         </a:rPr>
-                        <a:t>0.700</a:t>
+                        <a:t>0.7000</a:t>
                       </a:r>
                     </a:p>
                   </a:txBody>
@@ -7255,7 +7187,7 @@
                           <a:ea typeface="Arial"/>
                           <a:cs typeface="Arial"/>
                         </a:rPr>
-                        <a:t>CQL offline RL</a:t>
+                        <a:t>Greedy</a:t>
                       </a:r>
                     </a:p>
                   </a:txBody>
@@ -7300,7 +7232,7 @@
                           <a:ea typeface="Arial"/>
                           <a:cs typeface="Arial"/>
                         </a:rPr>
-                        <a:t>0.020</a:t>
+                        <a:t>0.1371</a:t>
                       </a:r>
                     </a:p>
                   </a:txBody>
@@ -7324,7 +7256,7 @@
                           <a:ea typeface="Arial"/>
                           <a:cs typeface="Arial"/>
                         </a:rPr>
-                        <a:t>0.087</a:t>
+                        <a:t>0.5007</a:t>
                       </a:r>
                     </a:p>
                   </a:txBody>
@@ -7348,7 +7280,7 @@
                           <a:ea typeface="Arial"/>
                           <a:cs typeface="Arial"/>
                         </a:rPr>
-                        <a:t>0.769</a:t>
+                        <a:t>0.7333</a:t>
                       </a:r>
                     </a:p>
                   </a:txBody>
@@ -7371,7 +7303,7 @@
                           <a:ea typeface="Arial"/>
                           <a:cs typeface="Arial"/>
                         </a:rPr>
-                        <a:t>PPO faithful simulator</a:t>
+                        <a:t>CQL</a:t>
                       </a:r>
                     </a:p>
                   </a:txBody>
@@ -7392,7 +7324,7 @@
                           <a:ea typeface="Arial"/>
                           <a:cs typeface="Arial"/>
                         </a:rPr>
-                        <a:t>simulator-only</a:t>
+                        <a:t>model estimate</a:t>
                       </a:r>
                     </a:p>
                   </a:txBody>
@@ -7416,7 +7348,7 @@
                           <a:ea typeface="Arial"/>
                           <a:cs typeface="Arial"/>
                         </a:rPr>
-                        <a:t>0.184</a:t>
+                        <a:t>0.1219</a:t>
                       </a:r>
                     </a:p>
                   </a:txBody>
@@ -7440,7 +7372,7 @@
                           <a:ea typeface="Arial"/>
                           <a:cs typeface="Arial"/>
                         </a:rPr>
-                        <a:t>0.270</a:t>
+                        <a:t>0.4214</a:t>
                       </a:r>
                     </a:p>
                   </a:txBody>
@@ -7464,7 +7396,7 @@
                           <a:ea typeface="Arial"/>
                           <a:cs typeface="Arial"/>
                         </a:rPr>
-                        <a:t>0.318</a:t>
+                        <a:t>0.7025</a:t>
                       </a:r>
                     </a:p>
                   </a:txBody>
@@ -7524,7 +7456,7 @@
                 <a:ea typeface="Arial"/>
                 <a:cs typeface="Arial"/>
               </a:rPr>
-              <a:t>Rows carry different evidence types: the PPO row is a learned-simulator stress test and is not comparable to the observed behavioral row.</a:t>
+              <a:t>Observed outcomes and Phase-1 estimates are different evidence types; neither is causal marketplace lift.</a:t>
             </a:r>
           </a:p>
         </p:txBody>
@@ -7574,7 +7506,7 @@
                 <a:ea typeface="Arial"/>
                 <a:cs typeface="Arial"/>
               </a:rPr>
-              <a:t>Under the same model surface, conservative CQL does not beat logged behavior - a negative result that motivates the diagnostics.</a:t>
+              <a:t>PPO falls from 0.1273 to 0.1209 under robustness checks (-4.99%): simulator sensitivity, not marketplace evidence.</a:t>
             </a:r>
           </a:p>
         </p:txBody>
@@ -7610,7 +7542,7 @@
           <p:nvPr/>
         </p:nvPicPr>
         <p:blipFill>
-          <a:blip xmlns:r="http://schemas.openxmlformats.org/officeDocument/2006/relationships" xmlns:a="http://schemas.openxmlformats.org/drawingml/2006/main" r:embed="R9b40bd527ba242e2"/>
+          <a:blip xmlns:r="http://schemas.openxmlformats.org/officeDocument/2006/relationships" xmlns:a="http://schemas.openxmlformats.org/drawingml/2006/main" r:embed="R82eb75edc1454c02"/>
           <a:stretch xmlns:a="http://schemas.openxmlformats.org/drawingml/2006/main">
             <a:fillRect l="0" t="0" r="0" b="0"/>
           </a:stretch>
@@ -7820,7 +7752,7 @@
                 <a:ea typeface="Arial"/>
                 <a:cs typeface="Arial"/>
               </a:rPr>
-              <a:t>Supported</a:t>
+              <a:t>H1 supported</a:t>
             </a:r>
           </a:p>
         </p:txBody>
@@ -7870,7 +7802,7 @@
                 <a:ea typeface="Arial"/>
                 <a:cs typeface="Arial"/>
               </a:rPr>
-              <a:t>Greedy supervised maximization leaves the data's support; CQL stays evaluable (ESS 36% vs 0.8%).</a:t>
+              <a:t>99.981% of supervised-greedy choices are interior; the population curve peaks near 0.67.</a:t>
             </a:r>
           </a:p>
         </p:txBody>
@@ -7920,7 +7852,7 @@
                 <a:ea typeface="Arial"/>
                 <a:cs typeface="Arial"/>
               </a:rPr>
-              <a:t>Cautious</a:t>
+              <a:t>H2 partial</a:t>
             </a:r>
           </a:p>
         </p:txBody>
@@ -7970,7 +7902,7 @@
                 <a:ea typeface="Arial"/>
                 <a:cs typeface="Arial"/>
               </a:rPr>
-              <a:t>PPO's high simulator savings are a stress test of the learned environment, not marketplace performance.</a:t>
+              <a:t>Greedy stays in p5-p95 support 90.99% vs CQL 99.92%; OPE remains bandwidth-sensitive and non-causal.</a:t>
             </a:r>
           </a:p>
         </p:txBody>
@@ -8015,6 +7947,106 @@
               <a:rPr sz="1350" b="1" i="0">
                 <a:solidFill>
                   <a:srgbClr val="000000"/>
+                </a:solidFill>
+                <a:latin typeface="Arial"/>
+                <a:ea typeface="Arial"/>
+                <a:cs typeface="Arial"/>
+              </a:rPr>
+              <a:t>H3 simulator</a:t>
+            </a:r>
+          </a:p>
+        </p:txBody>
+      </p:sp>
+      <p:sp>
+        <p:nvSpPr>
+          <p:cNvPr id="11" name="TextBox 10">
+            <a:extLst xmlns:a="http://schemas.openxmlformats.org/drawingml/2006/main">
+              <a:ext uri="{FF2B5EF4-FFF2-40B4-BE49-F238E27FC236}">
+                <a16:creationId xmlns:a16="http://schemas.microsoft.com/office/drawing/2014/main" id="{FB0D60BA-8227-41A2-B66D-EC00C9DA5A8A}"/>
+              </a:ext>
+            </a:extLst>
+          </p:cNvPr>
+          <p:cNvSpPr>
+            <a:spLocks xmlns:a="http://schemas.openxmlformats.org/drawingml/2006/main" noGrp="1"/>
+          </p:cNvSpPr>
+          <p:nvPr/>
+        </p:nvSpPr>
+        <p:spPr>
+          <a:xfrm xmlns:a="http://schemas.openxmlformats.org/drawingml/2006/main">
+            <a:off x="2011680" y="2697480"/>
+            <a:ext cx="6766560" cy="685800"/>
+          </a:xfrm>
+          <a:prstGeom xmlns:a="http://schemas.openxmlformats.org/drawingml/2006/main" prst="rect">
+            <a:avLst/>
+          </a:prstGeom>
+          <a:noFill xmlns:a="http://schemas.openxmlformats.org/drawingml/2006/main"/>
+        </p:spPr>
+        <p:txBody>
+          <a:bodyPr xmlns:a="http://schemas.openxmlformats.org/drawingml/2006/main" wrap="square">
+            <a:spAutoFit/>
+          </a:bodyPr>
+          <a:lstStyle xmlns:a="http://schemas.openxmlformats.org/drawingml/2006/main"/>
+          <a:p xmlns:a="http://schemas.openxmlformats.org/drawingml/2006/main">
+            <a:pPr algn="l">
+              <a:spcAft>
+                <a:spcPts val="600"/>
+              </a:spcAft>
+              <a:buNone/>
+            </a:pPr>
+            <a:r>
+              <a:rPr sz="1250" b="0" i="0">
+                <a:solidFill>
+                  <a:srgbClr val="000000"/>
+                </a:solidFill>
+                <a:latin typeface="Arial"/>
+                <a:ea typeface="Arial"/>
+                <a:cs typeface="Arial"/>
+              </a:rPr>
+              <a:t>Robust PPO reward is 4.99% below basic PPO, supporting simulator sensitivity only.</a:t>
+            </a:r>
+          </a:p>
+        </p:txBody>
+      </p:sp>
+      <p:sp>
+        <p:nvSpPr>
+          <p:cNvPr id="12" name="TextBox 11">
+            <a:extLst xmlns:a="http://schemas.openxmlformats.org/drawingml/2006/main">
+              <a:ext uri="{FF2B5EF4-FFF2-40B4-BE49-F238E27FC236}">
+                <a16:creationId xmlns:a16="http://schemas.microsoft.com/office/drawing/2014/main" id="{0F901A1F-412A-411D-A3AC-7CA5BA918422}"/>
+              </a:ext>
+            </a:extLst>
+          </p:cNvPr>
+          <p:cNvSpPr>
+            <a:spLocks xmlns:a="http://schemas.openxmlformats.org/drawingml/2006/main" noGrp="1"/>
+          </p:cNvSpPr>
+          <p:nvPr/>
+        </p:nvSpPr>
+        <p:spPr>
+          <a:xfrm xmlns:a="http://schemas.openxmlformats.org/drawingml/2006/main">
+            <a:off x="384048" y="3657600"/>
+            <a:ext cx="1554480" cy="365760"/>
+          </a:xfrm>
+          <a:prstGeom xmlns:a="http://schemas.openxmlformats.org/drawingml/2006/main" prst="rect">
+            <a:avLst/>
+          </a:prstGeom>
+          <a:noFill xmlns:a="http://schemas.openxmlformats.org/drawingml/2006/main"/>
+        </p:spPr>
+        <p:txBody>
+          <a:bodyPr xmlns:a="http://schemas.openxmlformats.org/drawingml/2006/main" wrap="square">
+            <a:spAutoFit/>
+          </a:bodyPr>
+          <a:lstStyle xmlns:a="http://schemas.openxmlformats.org/drawingml/2006/main"/>
+          <a:p xmlns:a="http://schemas.openxmlformats.org/drawingml/2006/main">
+            <a:pPr algn="l">
+              <a:spcAft>
+                <a:spcPts val="600"/>
+              </a:spcAft>
+              <a:buNone/>
+            </a:pPr>
+            <a:r>
+              <a:rPr sz="1350" b="1" i="0">
+                <a:solidFill>
+                  <a:srgbClr val="0065BD"/>
                 </a:solidFill>
                 <a:latin typeface="Arial"/>
                 <a:ea typeface="Arial"/>
@@ -8027,10 +8059,10 @@
       </p:sp>
       <p:sp>
         <p:nvSpPr>
-          <p:cNvPr id="11" name="TextBox 10">
-            <a:extLst xmlns:a="http://schemas.openxmlformats.org/drawingml/2006/main">
-              <a:ext uri="{FF2B5EF4-FFF2-40B4-BE49-F238E27FC236}">
-                <a16:creationId xmlns:a16="http://schemas.microsoft.com/office/drawing/2014/main" id="{FB0D60BA-8227-41A2-B66D-EC00C9DA5A8A}"/>
+          <p:cNvPr id="13" name="TextBox 12">
+            <a:extLst xmlns:a="http://schemas.openxmlformats.org/drawingml/2006/main">
+              <a:ext uri="{FF2B5EF4-FFF2-40B4-BE49-F238E27FC236}">
+                <a16:creationId xmlns:a16="http://schemas.microsoft.com/office/drawing/2014/main" id="{B7B9B380-DF38-48F4-8BEF-7283E5BD7741}"/>
               </a:ext>
             </a:extLst>
           </p:cNvPr>
@@ -8041,8 +8073,8 @@
         </p:nvSpPr>
         <p:spPr>
           <a:xfrm xmlns:a="http://schemas.openxmlformats.org/drawingml/2006/main">
-            <a:off x="2011680" y="2697480"/>
-            <a:ext cx="6766560" cy="685800"/>
+            <a:off x="2011680" y="3657600"/>
+            <a:ext cx="6766560" cy="914400"/>
           </a:xfrm>
           <a:prstGeom xmlns:a="http://schemas.openxmlformats.org/drawingml/2006/main" prst="rect">
             <a:avLst/>
@@ -8070,107 +8102,7 @@
                 <a:ea typeface="Arial"/>
                 <a:cs typeface="Arial"/>
               </a:rPr>
-              <a:t>Live marketplace lift, causal anchoring effects, or an optimal offer policy.</a:t>
-            </a:r>
-          </a:p>
-        </p:txBody>
-      </p:sp>
-      <p:sp>
-        <p:nvSpPr>
-          <p:cNvPr id="12" name="TextBox 11">
-            <a:extLst xmlns:a="http://schemas.openxmlformats.org/drawingml/2006/main">
-              <a:ext uri="{FF2B5EF4-FFF2-40B4-BE49-F238E27FC236}">
-                <a16:creationId xmlns:a16="http://schemas.microsoft.com/office/drawing/2014/main" id="{0F901A1F-412A-411D-A3AC-7CA5BA918422}"/>
-              </a:ext>
-            </a:extLst>
-          </p:cNvPr>
-          <p:cNvSpPr>
-            <a:spLocks xmlns:a="http://schemas.openxmlformats.org/drawingml/2006/main" noGrp="1"/>
-          </p:cNvSpPr>
-          <p:nvPr/>
-        </p:nvSpPr>
-        <p:spPr>
-          <a:xfrm xmlns:a="http://schemas.openxmlformats.org/drawingml/2006/main">
-            <a:off x="384048" y="3657600"/>
-            <a:ext cx="1554480" cy="365760"/>
-          </a:xfrm>
-          <a:prstGeom xmlns:a="http://schemas.openxmlformats.org/drawingml/2006/main" prst="rect">
-            <a:avLst/>
-          </a:prstGeom>
-          <a:noFill xmlns:a="http://schemas.openxmlformats.org/drawingml/2006/main"/>
-        </p:spPr>
-        <p:txBody>
-          <a:bodyPr xmlns:a="http://schemas.openxmlformats.org/drawingml/2006/main" wrap="square">
-            <a:spAutoFit/>
-          </a:bodyPr>
-          <a:lstStyle xmlns:a="http://schemas.openxmlformats.org/drawingml/2006/main"/>
-          <a:p xmlns:a="http://schemas.openxmlformats.org/drawingml/2006/main">
-            <a:pPr algn="l">
-              <a:spcAft>
-                <a:spcPts val="600"/>
-              </a:spcAft>
-              <a:buNone/>
-            </a:pPr>
-            <a:r>
-              <a:rPr sz="1350" b="1" i="0">
-                <a:solidFill>
-                  <a:srgbClr val="0065BD"/>
-                </a:solidFill>
-                <a:latin typeface="Arial"/>
-                <a:ea typeface="Arial"/>
-                <a:cs typeface="Arial"/>
-              </a:rPr>
-              <a:t>Future work</a:t>
-            </a:r>
-          </a:p>
-        </p:txBody>
-      </p:sp>
-      <p:sp>
-        <p:nvSpPr>
-          <p:cNvPr id="13" name="TextBox 12">
-            <a:extLst xmlns:a="http://schemas.openxmlformats.org/drawingml/2006/main">
-              <a:ext uri="{FF2B5EF4-FFF2-40B4-BE49-F238E27FC236}">
-                <a16:creationId xmlns:a16="http://schemas.microsoft.com/office/drawing/2014/main" id="{B7B9B380-DF38-48F4-8BEF-7283E5BD7741}"/>
-              </a:ext>
-            </a:extLst>
-          </p:cNvPr>
-          <p:cNvSpPr>
-            <a:spLocks xmlns:a="http://schemas.openxmlformats.org/drawingml/2006/main" noGrp="1"/>
-          </p:cNvSpPr>
-          <p:nvPr/>
-        </p:nvSpPr>
-        <p:spPr>
-          <a:xfrm xmlns:a="http://schemas.openxmlformats.org/drawingml/2006/main">
-            <a:off x="2011680" y="3657600"/>
-            <a:ext cx="6766560" cy="914400"/>
-          </a:xfrm>
-          <a:prstGeom xmlns:a="http://schemas.openxmlformats.org/drawingml/2006/main" prst="rect">
-            <a:avLst/>
-          </a:prstGeom>
-          <a:noFill xmlns:a="http://schemas.openxmlformats.org/drawingml/2006/main"/>
-        </p:spPr>
-        <p:txBody>
-          <a:bodyPr xmlns:a="http://schemas.openxmlformats.org/drawingml/2006/main" wrap="square">
-            <a:spAutoFit/>
-          </a:bodyPr>
-          <a:lstStyle xmlns:a="http://schemas.openxmlformats.org/drawingml/2006/main"/>
-          <a:p xmlns:a="http://schemas.openxmlformats.org/drawingml/2006/main">
-            <a:pPr algn="l">
-              <a:spcAft>
-                <a:spcPts val="600"/>
-              </a:spcAft>
-              <a:buNone/>
-            </a:pPr>
-            <a:r>
-              <a:rPr sz="1250" b="0" i="0">
-                <a:solidFill>
-                  <a:srgbClr val="000000"/>
-                </a:solidFill>
-                <a:latin typeface="Arial"/>
-                <a:ea typeface="Arial"/>
-                <a:cs typeface="Arial"/>
-              </a:rPr>
-              <a:t>Sequential counteroffers (about 40% of threads contain a second move), richer item features, temporal and leaf-holdout robustness tables.</a:t>
+              <a:t>Live marketplace lift, causal anchoring effects, resale margin, or total buyer welfare.</a:t>
             </a:r>
           </a:p>
         </p:txBody>
@@ -8206,7 +8138,7 @@
           <p:nvPr/>
         </p:nvPicPr>
         <p:blipFill>
-          <a:blip xmlns:r="http://schemas.openxmlformats.org/officeDocument/2006/relationships" xmlns:a="http://schemas.openxmlformats.org/drawingml/2006/main" r:embed="R88f30944e7a54d84"/>
+          <a:blip xmlns:r="http://schemas.openxmlformats.org/officeDocument/2006/relationships" xmlns:a="http://schemas.openxmlformats.org/drawingml/2006/main" r:embed="R933f44b7c8f34e7d"/>
           <a:stretch xmlns:a="http://schemas.openxmlformats.org/drawingml/2006/main">
             <a:fillRect l="0" t="0" r="0" b="0"/>
           </a:stretch>
@@ -8416,7 +8348,7 @@
                 <a:ea typeface="Arial"/>
                 <a:cs typeface="Arial"/>
               </a:rPr>
-              <a:t>The lowest offer is not the best decision - and the highest estimate is not the best evidence.</a:t>
+              <a:t>The simplest defensible opening offer is near 70% of the listing price.</a:t>
             </a:r>
           </a:p>
         </p:txBody>
@@ -8466,7 +8398,7 @@
                 <a:ea typeface="Arial"/>
                 <a:cs typeface="Arial"/>
               </a:rPr>
-              <a:t>Contribution: a reproducible, support-aware pipeline that makes extrapolation measurable before a recommendation is trusted.</a:t>
+              <a:t>Use supervised-greedy personalization only when its support flag is true; otherwise prefer CQL or fixed 70%.</a:t>
             </a:r>
           </a:p>
           <a:p xmlns:a="http://schemas.openxmlformats.org/drawingml/2006/main">
@@ -8485,7 +8417,7 @@
                 <a:ea typeface="Arial"/>
                 <a:cs typeface="Arial"/>
               </a:rPr>
-              <a:t>Next: multi-turn counteroffers with explicit uncertainty - the rejection branch stops being zero.</a:t>
+              <a:t>Contribution: corrected event semantics, calibrated acceptance, a measurable reward-support trade-off, and a quantified PPO robustness gap.</a:t>
             </a:r>
           </a:p>
         </p:txBody>
@@ -8571,7 +8503,7 @@
       </p:grpSpPr>
       <p:sp>
         <p:nvSpPr>
-          <p:cNvPr id="1" name="">
+          <p:cNvPr id="20" name="">
             <a:extLst xmlns:a="http://schemas.openxmlformats.org/drawingml/2006/main">
               <a:ext uri="{FF2B5EF4-FFF2-40B4-BE49-F238E27FC236}">
                 <a16:creationId xmlns:a16="http://schemas.microsoft.com/office/drawing/2014/main" id="{0855E245-BD5D-4DF9-BCCE-7D5954D294BF}"/>
@@ -9408,1237 +9340,6 @@
     <p:extLst>
       <p:ext uri="{BB962C8B-B14F-4D97-AF65-F5344CB8AC3E}">
         <p14:creationId xmlns:p14="http://schemas.microsoft.com/office/powerpoint/2010/main" val="985585785"/>
-      </p:ext>
-    </p:extLst>
-  </p:cSld>
-</p:sld>
-</file>
-
-<file path=ppt/slides/slide15.xml><?xml version="1.0" encoding="utf-8"?>
-<p:sld xmlns:p="http://schemas.openxmlformats.org/presentationml/2006/main">
-  <p:cSld>
-    <p:bg>
-      <p:bgPr>
-        <a:solidFill xmlns:a="http://schemas.openxmlformats.org/drawingml/2006/main">
-          <a:srgbClr val="FFFFFF"/>
-        </a:solidFill>
-      </p:bgPr>
-    </p:bg>
-    <p:spTree>
-      <p:nvGrpSpPr>
-        <p:cNvPr id="1" name=""/>
-        <p:cNvGrpSpPr/>
-        <p:nvPr/>
-      </p:nvGrpSpPr>
-      <p:grpSpPr>
-        <a:xfrm xmlns:a="http://schemas.openxmlformats.org/drawingml/2006/main"/>
-      </p:grpSpPr>
-      <p:sp>
-        <p:nvSpPr>
-          <p:cNvPr id="1" name="">
-            <a:extLst xmlns:a="http://schemas.openxmlformats.org/drawingml/2006/main">
-              <a:ext uri="{FF2B5EF4-FFF2-40B4-BE49-F238E27FC236}">
-                <a16:creationId xmlns:a16="http://schemas.microsoft.com/office/drawing/2014/main" id="{222E4CEA-A60B-4B78-BEE9-F39BC428FDD4}"/>
-              </a:ext>
-            </a:extLst>
-          </p:cNvPr>
-          <p:cNvSpPr>
-            <a:spLocks xmlns:a="http://schemas.openxmlformats.org/drawingml/2006/main" noGrp="1"/>
-          </p:cNvSpPr>
-          <p:nvPr/>
-        </p:nvSpPr>
-        <p:spPr>
-          <a:xfrm xmlns:a="http://schemas.openxmlformats.org/drawingml/2006/main">
-            <a:off x="514350" y="381000"/>
-            <a:ext cx="8048625" cy="409575"/>
-          </a:xfrm>
-          <a:prstGeom xmlns:a="http://schemas.openxmlformats.org/drawingml/2006/main" prst="rect">
-            <a:avLst/>
-          </a:prstGeom>
-          <a:noFill xmlns:a="http://schemas.openxmlformats.org/drawingml/2006/main"/>
-          <a:ln xmlns:a="http://schemas.openxmlformats.org/drawingml/2006/main" w="0">
-            <a:noFill/>
-            <a:prstDash val="solid"/>
-          </a:ln>
-        </p:spPr>
-        <p:txBody>
-          <a:bodyPr xmlns:a="http://schemas.openxmlformats.org/drawingml/2006/main"/>
-          <a:lstStyle xmlns:a="http://schemas.openxmlformats.org/drawingml/2006/main"/>
-          <a:p xmlns:a="http://schemas.openxmlformats.org/drawingml/2006/main">
-            <a:pPr algn="l">
-              <a:defRPr sz="2175" b="1">
-                <a:solidFill>
-                  <a:srgbClr val="000000"/>
-                </a:solidFill>
-              </a:defRPr>
-            </a:pPr>
-            <a:r>
-              <a:rPr sz="2175" b="1">
-                <a:solidFill>
-                  <a:srgbClr val="000000"/>
-                </a:solidFill>
-              </a:rPr>
-              <a:t>Appendix: real data deliverables are local, not tracked</a:t>
-            </a:r>
-          </a:p>
-        </p:txBody>
-      </p:sp>
-      <p:sp>
-        <p:nvSpPr>
-          <p:cNvPr id="2" name="">
-            <a:extLst xmlns:a="http://schemas.openxmlformats.org/drawingml/2006/main">
-              <a:ext uri="{FF2B5EF4-FFF2-40B4-BE49-F238E27FC236}">
-                <a16:creationId xmlns:a16="http://schemas.microsoft.com/office/drawing/2014/main" id="{0FDD08E2-31FA-4D31-A546-F99EBFA4424F}"/>
-              </a:ext>
-            </a:extLst>
-          </p:cNvPr>
-          <p:cNvSpPr>
-            <a:spLocks xmlns:a="http://schemas.openxmlformats.org/drawingml/2006/main" noGrp="1"/>
-          </p:cNvSpPr>
-          <p:nvPr/>
-        </p:nvSpPr>
-        <p:spPr>
-          <a:xfrm xmlns:a="http://schemas.openxmlformats.org/drawingml/2006/main">
-            <a:off x="514350" y="876300"/>
-            <a:ext cx="1524000" cy="28575"/>
-          </a:xfrm>
-          <a:prstGeom xmlns:a="http://schemas.openxmlformats.org/drawingml/2006/main" prst="rect">
-            <a:avLst/>
-          </a:prstGeom>
-          <a:solidFill xmlns:a="http://schemas.openxmlformats.org/drawingml/2006/main">
-            <a:srgbClr val="005293"/>
-          </a:solidFill>
-          <a:ln xmlns:a="http://schemas.openxmlformats.org/drawingml/2006/main" w="0">
-            <a:noFill/>
-            <a:prstDash val="solid"/>
-          </a:ln>
-        </p:spPr>
-      </p:sp>
-      <p:sp>
-        <p:nvSpPr>
-          <p:cNvPr id="3" name="">
-            <a:extLst xmlns:a="http://schemas.openxmlformats.org/drawingml/2006/main">
-              <a:ext uri="{FF2B5EF4-FFF2-40B4-BE49-F238E27FC236}">
-                <a16:creationId xmlns:a16="http://schemas.microsoft.com/office/drawing/2014/main" id="{CD08FDA4-C2E3-4353-AED5-49F87F5E082E}"/>
-              </a:ext>
-            </a:extLst>
-          </p:cNvPr>
-          <p:cNvSpPr>
-            <a:spLocks xmlns:a="http://schemas.openxmlformats.org/drawingml/2006/main" noGrp="1"/>
-          </p:cNvSpPr>
-          <p:nvPr/>
-        </p:nvSpPr>
-        <p:spPr>
-          <a:xfrm xmlns:a="http://schemas.openxmlformats.org/drawingml/2006/main">
-            <a:off x="514350" y="1104900"/>
-            <a:ext cx="7810500" cy="304800"/>
-          </a:xfrm>
-          <a:prstGeom xmlns:a="http://schemas.openxmlformats.org/drawingml/2006/main" prst="rect">
-            <a:avLst/>
-          </a:prstGeom>
-          <a:noFill xmlns:a="http://schemas.openxmlformats.org/drawingml/2006/main"/>
-          <a:ln xmlns:a="http://schemas.openxmlformats.org/drawingml/2006/main" w="0">
-            <a:noFill/>
-            <a:prstDash val="solid"/>
-          </a:ln>
-        </p:spPr>
-        <p:txBody>
-          <a:bodyPr xmlns:a="http://schemas.openxmlformats.org/drawingml/2006/main"/>
-          <a:lstStyle xmlns:a="http://schemas.openxmlformats.org/drawingml/2006/main"/>
-          <a:p xmlns:a="http://schemas.openxmlformats.org/drawingml/2006/main">
-            <a:pPr algn="l">
-              <a:defRPr sz="1238" b="0">
-                <a:solidFill>
-                  <a:srgbClr val="666666"/>
-                </a:solidFill>
-              </a:defRPr>
-            </a:pPr>
-            <a:r>
-              <a:rPr sz="1238" b="0">
-                <a:solidFill>
-                  <a:srgbClr val="666666"/>
-                </a:solidFill>
-              </a:rPr>
-              <a:t>The repository tracks code and final report assets; production reruns recreate these ignored local files.</a:t>
-            </a:r>
-          </a:p>
-        </p:txBody>
-      </p:sp>
-      <p:sp>
-        <p:nvSpPr>
-          <p:cNvPr id="4" name="">
-            <a:extLst xmlns:a="http://schemas.openxmlformats.org/drawingml/2006/main">
-              <a:ext uri="{FF2B5EF4-FFF2-40B4-BE49-F238E27FC236}">
-                <a16:creationId xmlns:a16="http://schemas.microsoft.com/office/drawing/2014/main" id="{C3118999-1055-4853-B7D2-1B330F733539}"/>
-              </a:ext>
-            </a:extLst>
-          </p:cNvPr>
-          <p:cNvSpPr>
-            <a:spLocks xmlns:a="http://schemas.openxmlformats.org/drawingml/2006/main" noGrp="1"/>
-          </p:cNvSpPr>
-          <p:nvPr/>
-        </p:nvSpPr>
-        <p:spPr>
-          <a:xfrm xmlns:a="http://schemas.openxmlformats.org/drawingml/2006/main">
-            <a:off x="514350" y="1676400"/>
-            <a:ext cx="2457450" cy="790575"/>
-          </a:xfrm>
-          <a:prstGeom xmlns:a="http://schemas.openxmlformats.org/drawingml/2006/main" prst="rect">
-            <a:avLst/>
-          </a:prstGeom>
-          <a:solidFill xmlns:a="http://schemas.openxmlformats.org/drawingml/2006/main">
-            <a:srgbClr val="FFFFFF"/>
-          </a:solidFill>
-          <a:ln xmlns:a="http://schemas.openxmlformats.org/drawingml/2006/main" w="9525">
-            <a:solidFill>
-              <a:srgbClr val="D7E6F2"/>
-            </a:solidFill>
-            <a:prstDash val="solid"/>
-          </a:ln>
-        </p:spPr>
-      </p:sp>
-      <p:sp>
-        <p:nvSpPr>
-          <p:cNvPr id="5" name="">
-            <a:extLst xmlns:a="http://schemas.openxmlformats.org/drawingml/2006/main">
-              <a:ext uri="{FF2B5EF4-FFF2-40B4-BE49-F238E27FC236}">
-                <a16:creationId xmlns:a16="http://schemas.microsoft.com/office/drawing/2014/main" id="{DE9F2EC6-BD0F-4DA0-A85B-747D2400BE62}"/>
-              </a:ext>
-            </a:extLst>
-          </p:cNvPr>
-          <p:cNvSpPr>
-            <a:spLocks xmlns:a="http://schemas.openxmlformats.org/drawingml/2006/main" noGrp="1"/>
-          </p:cNvSpPr>
-          <p:nvPr/>
-        </p:nvSpPr>
-        <p:spPr>
-          <a:xfrm xmlns:a="http://schemas.openxmlformats.org/drawingml/2006/main">
-            <a:off x="514350" y="1676400"/>
-            <a:ext cx="66675" cy="790575"/>
-          </a:xfrm>
-          <a:prstGeom xmlns:a="http://schemas.openxmlformats.org/drawingml/2006/main" prst="rect">
-            <a:avLst/>
-          </a:prstGeom>
-          <a:solidFill xmlns:a="http://schemas.openxmlformats.org/drawingml/2006/main">
-            <a:srgbClr val="005293"/>
-          </a:solidFill>
-          <a:ln xmlns:a="http://schemas.openxmlformats.org/drawingml/2006/main" w="0">
-            <a:noFill/>
-            <a:prstDash val="solid"/>
-          </a:ln>
-        </p:spPr>
-      </p:sp>
-      <p:sp>
-        <p:nvSpPr>
-          <p:cNvPr id="6" name="">
-            <a:extLst xmlns:a="http://schemas.openxmlformats.org/drawingml/2006/main">
-              <a:ext uri="{FF2B5EF4-FFF2-40B4-BE49-F238E27FC236}">
-                <a16:creationId xmlns:a16="http://schemas.microsoft.com/office/drawing/2014/main" id="{5666912E-8C27-4C8E-8DA6-C7F64826AC07}"/>
-              </a:ext>
-            </a:extLst>
-          </p:cNvPr>
-          <p:cNvSpPr>
-            <a:spLocks xmlns:a="http://schemas.openxmlformats.org/drawingml/2006/main" noGrp="1"/>
-          </p:cNvSpPr>
-          <p:nvPr/>
-        </p:nvSpPr>
-        <p:spPr>
-          <a:xfrm xmlns:a="http://schemas.openxmlformats.org/drawingml/2006/main">
-            <a:off x="676275" y="1771650"/>
-            <a:ext cx="2190750" cy="190500"/>
-          </a:xfrm>
-          <a:prstGeom xmlns:a="http://schemas.openxmlformats.org/drawingml/2006/main" prst="rect">
-            <a:avLst/>
-          </a:prstGeom>
-          <a:noFill xmlns:a="http://schemas.openxmlformats.org/drawingml/2006/main"/>
-          <a:ln xmlns:a="http://schemas.openxmlformats.org/drawingml/2006/main" w="0">
-            <a:noFill/>
-            <a:prstDash val="solid"/>
-          </a:ln>
-        </p:spPr>
-        <p:txBody>
-          <a:bodyPr xmlns:a="http://schemas.openxmlformats.org/drawingml/2006/main"/>
-          <a:lstStyle xmlns:a="http://schemas.openxmlformats.org/drawingml/2006/main"/>
-          <a:p xmlns:a="http://schemas.openxmlformats.org/drawingml/2006/main">
-            <a:pPr algn="l">
-              <a:defRPr sz="1125" b="1">
-                <a:solidFill>
-                  <a:srgbClr val="005293"/>
-                </a:solidFill>
-              </a:defRPr>
-            </a:pPr>
-            <a:r>
-              <a:rPr sz="1125" b="1">
-                <a:solidFill>
-                  <a:srgbClr val="005293"/>
-                </a:solidFill>
-              </a:rPr>
-              <a:t>1. Raw input</a:t>
-            </a:r>
-          </a:p>
-        </p:txBody>
-      </p:sp>
-      <p:sp>
-        <p:nvSpPr>
-          <p:cNvPr id="7" name="">
-            <a:extLst xmlns:a="http://schemas.openxmlformats.org/drawingml/2006/main">
-              <a:ext uri="{FF2B5EF4-FFF2-40B4-BE49-F238E27FC236}">
-                <a16:creationId xmlns:a16="http://schemas.microsoft.com/office/drawing/2014/main" id="{828FF00F-F8CA-4C77-8162-C7BA561FA8AD}"/>
-              </a:ext>
-            </a:extLst>
-          </p:cNvPr>
-          <p:cNvSpPr>
-            <a:spLocks xmlns:a="http://schemas.openxmlformats.org/drawingml/2006/main" noGrp="1"/>
-          </p:cNvSpPr>
-          <p:nvPr/>
-        </p:nvSpPr>
-        <p:spPr>
-          <a:xfrm xmlns:a="http://schemas.openxmlformats.org/drawingml/2006/main">
-            <a:off x="676275" y="2009775"/>
-            <a:ext cx="2190750" cy="381000"/>
-          </a:xfrm>
-          <a:prstGeom xmlns:a="http://schemas.openxmlformats.org/drawingml/2006/main" prst="rect">
-            <a:avLst/>
-          </a:prstGeom>
-          <a:noFill xmlns:a="http://schemas.openxmlformats.org/drawingml/2006/main"/>
-          <a:ln xmlns:a="http://schemas.openxmlformats.org/drawingml/2006/main" w="0">
-            <a:noFill/>
-            <a:prstDash val="solid"/>
-          </a:ln>
-        </p:spPr>
-        <p:txBody>
-          <a:bodyPr xmlns:a="http://schemas.openxmlformats.org/drawingml/2006/main"/>
-          <a:lstStyle xmlns:a="http://schemas.openxmlformats.org/drawingml/2006/main"/>
-          <a:p xmlns:a="http://schemas.openxmlformats.org/drawingml/2006/main">
-            <a:pPr algn="l">
-              <a:defRPr sz="923" b="0">
-                <a:solidFill>
-                  <a:srgbClr val="000000"/>
-                </a:solidFill>
-              </a:defRPr>
-            </a:pPr>
-            <a:r>
-              <a:rPr sz="923" b="0">
-                <a:solidFill>
-                  <a:srgbClr val="000000"/>
-                </a:solidFill>
-              </a:rPr>
-              <a:t>clean_master_dataset.parquet</a:t>
-            </a:r>
-          </a:p>
-        </p:txBody>
-      </p:sp>
-      <p:sp>
-        <p:nvSpPr>
-          <p:cNvPr id="8" name="">
-            <a:extLst xmlns:a="http://schemas.openxmlformats.org/drawingml/2006/main">
-              <a:ext uri="{FF2B5EF4-FFF2-40B4-BE49-F238E27FC236}">
-                <a16:creationId xmlns:a16="http://schemas.microsoft.com/office/drawing/2014/main" id="{732120A8-16A4-4FAF-A90F-8B9D747D49DC}"/>
-              </a:ext>
-            </a:extLst>
-          </p:cNvPr>
-          <p:cNvSpPr>
-            <a:spLocks xmlns:a="http://schemas.openxmlformats.org/drawingml/2006/main" noGrp="1"/>
-          </p:cNvSpPr>
-          <p:nvPr/>
-        </p:nvSpPr>
-        <p:spPr>
-          <a:xfrm xmlns:a="http://schemas.openxmlformats.org/drawingml/2006/main">
-            <a:off x="3343275" y="1676400"/>
-            <a:ext cx="2457450" cy="790575"/>
-          </a:xfrm>
-          <a:prstGeom xmlns:a="http://schemas.openxmlformats.org/drawingml/2006/main" prst="rect">
-            <a:avLst/>
-          </a:prstGeom>
-          <a:solidFill xmlns:a="http://schemas.openxmlformats.org/drawingml/2006/main">
-            <a:srgbClr val="FFFFFF"/>
-          </a:solidFill>
-          <a:ln xmlns:a="http://schemas.openxmlformats.org/drawingml/2006/main" w="9525">
-            <a:solidFill>
-              <a:srgbClr val="D7E6F2"/>
-            </a:solidFill>
-            <a:prstDash val="solid"/>
-          </a:ln>
-        </p:spPr>
-      </p:sp>
-      <p:sp>
-        <p:nvSpPr>
-          <p:cNvPr id="9" name="">
-            <a:extLst xmlns:a="http://schemas.openxmlformats.org/drawingml/2006/main">
-              <a:ext uri="{FF2B5EF4-FFF2-40B4-BE49-F238E27FC236}">
-                <a16:creationId xmlns:a16="http://schemas.microsoft.com/office/drawing/2014/main" id="{AAF7B4B4-9963-4404-95AE-33D41EDE86BE}"/>
-              </a:ext>
-            </a:extLst>
-          </p:cNvPr>
-          <p:cNvSpPr>
-            <a:spLocks xmlns:a="http://schemas.openxmlformats.org/drawingml/2006/main" noGrp="1"/>
-          </p:cNvSpPr>
-          <p:nvPr/>
-        </p:nvSpPr>
-        <p:spPr>
-          <a:xfrm xmlns:a="http://schemas.openxmlformats.org/drawingml/2006/main">
-            <a:off x="3343275" y="1676400"/>
-            <a:ext cx="66675" cy="790575"/>
-          </a:xfrm>
-          <a:prstGeom xmlns:a="http://schemas.openxmlformats.org/drawingml/2006/main" prst="rect">
-            <a:avLst/>
-          </a:prstGeom>
-          <a:solidFill xmlns:a="http://schemas.openxmlformats.org/drawingml/2006/main">
-            <a:srgbClr val="64A0C8"/>
-          </a:solidFill>
-          <a:ln xmlns:a="http://schemas.openxmlformats.org/drawingml/2006/main" w="0">
-            <a:noFill/>
-            <a:prstDash val="solid"/>
-          </a:ln>
-        </p:spPr>
-      </p:sp>
-      <p:sp>
-        <p:nvSpPr>
-          <p:cNvPr id="10" name="">
-            <a:extLst xmlns:a="http://schemas.openxmlformats.org/drawingml/2006/main">
-              <a:ext uri="{FF2B5EF4-FFF2-40B4-BE49-F238E27FC236}">
-                <a16:creationId xmlns:a16="http://schemas.microsoft.com/office/drawing/2014/main" id="{C271639E-39B6-4A44-AD71-CF915DAFA671}"/>
-              </a:ext>
-            </a:extLst>
-          </p:cNvPr>
-          <p:cNvSpPr>
-            <a:spLocks xmlns:a="http://schemas.openxmlformats.org/drawingml/2006/main" noGrp="1"/>
-          </p:cNvSpPr>
-          <p:nvPr/>
-        </p:nvSpPr>
-        <p:spPr>
-          <a:xfrm xmlns:a="http://schemas.openxmlformats.org/drawingml/2006/main">
-            <a:off x="3505200" y="1771650"/>
-            <a:ext cx="2190750" cy="190500"/>
-          </a:xfrm>
-          <a:prstGeom xmlns:a="http://schemas.openxmlformats.org/drawingml/2006/main" prst="rect">
-            <a:avLst/>
-          </a:prstGeom>
-          <a:noFill xmlns:a="http://schemas.openxmlformats.org/drawingml/2006/main"/>
-          <a:ln xmlns:a="http://schemas.openxmlformats.org/drawingml/2006/main" w="0">
-            <a:noFill/>
-            <a:prstDash val="solid"/>
-          </a:ln>
-        </p:spPr>
-        <p:txBody>
-          <a:bodyPr xmlns:a="http://schemas.openxmlformats.org/drawingml/2006/main"/>
-          <a:lstStyle xmlns:a="http://schemas.openxmlformats.org/drawingml/2006/main"/>
-          <a:p xmlns:a="http://schemas.openxmlformats.org/drawingml/2006/main">
-            <a:pPr algn="l">
-              <a:defRPr sz="1125" b="1">
-                <a:solidFill>
-                  <a:srgbClr val="005293"/>
-                </a:solidFill>
-              </a:defRPr>
-            </a:pPr>
-            <a:r>
-              <a:rPr sz="1125" b="1">
-                <a:solidFill>
-                  <a:srgbClr val="005293"/>
-                </a:solidFill>
-              </a:rPr>
-              <a:t>2. MDP splits</a:t>
-            </a:r>
-          </a:p>
-        </p:txBody>
-      </p:sp>
-      <p:sp>
-        <p:nvSpPr>
-          <p:cNvPr id="11" name="">
-            <a:extLst xmlns:a="http://schemas.openxmlformats.org/drawingml/2006/main">
-              <a:ext uri="{FF2B5EF4-FFF2-40B4-BE49-F238E27FC236}">
-                <a16:creationId xmlns:a16="http://schemas.microsoft.com/office/drawing/2014/main" id="{821614BE-AC71-4240-947A-51075B976E99}"/>
-              </a:ext>
-            </a:extLst>
-          </p:cNvPr>
-          <p:cNvSpPr>
-            <a:spLocks xmlns:a="http://schemas.openxmlformats.org/drawingml/2006/main" noGrp="1"/>
-          </p:cNvSpPr>
-          <p:nvPr/>
-        </p:nvSpPr>
-        <p:spPr>
-          <a:xfrm xmlns:a="http://schemas.openxmlformats.org/drawingml/2006/main">
-            <a:off x="3505200" y="2009775"/>
-            <a:ext cx="2190750" cy="381000"/>
-          </a:xfrm>
-          <a:prstGeom xmlns:a="http://schemas.openxmlformats.org/drawingml/2006/main" prst="rect">
-            <a:avLst/>
-          </a:prstGeom>
-          <a:noFill xmlns:a="http://schemas.openxmlformats.org/drawingml/2006/main"/>
-          <a:ln xmlns:a="http://schemas.openxmlformats.org/drawingml/2006/main" w="0">
-            <a:noFill/>
-            <a:prstDash val="solid"/>
-          </a:ln>
-        </p:spPr>
-        <p:txBody>
-          <a:bodyPr xmlns:a="http://schemas.openxmlformats.org/drawingml/2006/main"/>
-          <a:lstStyle xmlns:a="http://schemas.openxmlformats.org/drawingml/2006/main"/>
-          <a:p xmlns:a="http://schemas.openxmlformats.org/drawingml/2006/main">
-            <a:pPr algn="l">
-              <a:defRPr sz="923" b="0">
-                <a:solidFill>
-                  <a:srgbClr val="000000"/>
-                </a:solidFill>
-              </a:defRPr>
-            </a:pPr>
-            <a:r>
-              <a:rPr sz="923" b="0">
-                <a:solidFill>
-                  <a:srgbClr val="000000"/>
-                </a:solidFill>
-              </a:rPr>
-              <a:t>data/train.parquet, val.parquet, test.parquet</a:t>
-            </a:r>
-          </a:p>
-          <a:p xmlns:a="http://schemas.openxmlformats.org/drawingml/2006/main">
-            <a:pPr algn="l">
-              <a:defRPr sz="923" b="0">
-                <a:solidFill>
-                  <a:srgbClr val="000000"/>
-                </a:solidFill>
-              </a:defRPr>
-            </a:pPr>
-            <a:r>
-              <a:rPr sz="923" b="0">
-                <a:solidFill>
-                  <a:srgbClr val="000000"/>
-                </a:solidFill>
-              </a:rPr>
-              <a:t>split_summary.csv, preprocess_stats.json</a:t>
-            </a:r>
-          </a:p>
-        </p:txBody>
-      </p:sp>
-      <p:sp>
-        <p:nvSpPr>
-          <p:cNvPr id="12" name="">
-            <a:extLst xmlns:a="http://schemas.openxmlformats.org/drawingml/2006/main">
-              <a:ext uri="{FF2B5EF4-FFF2-40B4-BE49-F238E27FC236}">
-                <a16:creationId xmlns:a16="http://schemas.microsoft.com/office/drawing/2014/main" id="{9BA012F1-6A8A-47C2-9FBD-A9D033017807}"/>
-              </a:ext>
-            </a:extLst>
-          </p:cNvPr>
-          <p:cNvSpPr>
-            <a:spLocks xmlns:a="http://schemas.openxmlformats.org/drawingml/2006/main" noGrp="1"/>
-          </p:cNvSpPr>
-          <p:nvPr/>
-        </p:nvSpPr>
-        <p:spPr>
-          <a:xfrm xmlns:a="http://schemas.openxmlformats.org/drawingml/2006/main">
-            <a:off x="6172200" y="1676400"/>
-            <a:ext cx="2457450" cy="790575"/>
-          </a:xfrm>
-          <a:prstGeom xmlns:a="http://schemas.openxmlformats.org/drawingml/2006/main" prst="rect">
-            <a:avLst/>
-          </a:prstGeom>
-          <a:solidFill xmlns:a="http://schemas.openxmlformats.org/drawingml/2006/main">
-            <a:srgbClr val="FFFFFF"/>
-          </a:solidFill>
-          <a:ln xmlns:a="http://schemas.openxmlformats.org/drawingml/2006/main" w="9525">
-            <a:solidFill>
-              <a:srgbClr val="D7E6F2"/>
-            </a:solidFill>
-            <a:prstDash val="solid"/>
-          </a:ln>
-        </p:spPr>
-      </p:sp>
-      <p:sp>
-        <p:nvSpPr>
-          <p:cNvPr id="13" name="">
-            <a:extLst xmlns:a="http://schemas.openxmlformats.org/drawingml/2006/main">
-              <a:ext uri="{FF2B5EF4-FFF2-40B4-BE49-F238E27FC236}">
-                <a16:creationId xmlns:a16="http://schemas.microsoft.com/office/drawing/2014/main" id="{B215D18D-3942-465F-87D6-A40659A0F721}"/>
-              </a:ext>
-            </a:extLst>
-          </p:cNvPr>
-          <p:cNvSpPr>
-            <a:spLocks xmlns:a="http://schemas.openxmlformats.org/drawingml/2006/main" noGrp="1"/>
-          </p:cNvSpPr>
-          <p:nvPr/>
-        </p:nvSpPr>
-        <p:spPr>
-          <a:xfrm xmlns:a="http://schemas.openxmlformats.org/drawingml/2006/main">
-            <a:off x="6172200" y="1676400"/>
-            <a:ext cx="66675" cy="790575"/>
-          </a:xfrm>
-          <a:prstGeom xmlns:a="http://schemas.openxmlformats.org/drawingml/2006/main" prst="rect">
-            <a:avLst/>
-          </a:prstGeom>
-          <a:solidFill xmlns:a="http://schemas.openxmlformats.org/drawingml/2006/main">
-            <a:srgbClr val="A2AD00"/>
-          </a:solidFill>
-          <a:ln xmlns:a="http://schemas.openxmlformats.org/drawingml/2006/main" w="0">
-            <a:noFill/>
-            <a:prstDash val="solid"/>
-          </a:ln>
-        </p:spPr>
-      </p:sp>
-      <p:sp>
-        <p:nvSpPr>
-          <p:cNvPr id="14" name="">
-            <a:extLst xmlns:a="http://schemas.openxmlformats.org/drawingml/2006/main">
-              <a:ext uri="{FF2B5EF4-FFF2-40B4-BE49-F238E27FC236}">
-                <a16:creationId xmlns:a16="http://schemas.microsoft.com/office/drawing/2014/main" id="{BCD2BC1A-380E-433A-BAA1-330907A4C86C}"/>
-              </a:ext>
-            </a:extLst>
-          </p:cNvPr>
-          <p:cNvSpPr>
-            <a:spLocks xmlns:a="http://schemas.openxmlformats.org/drawingml/2006/main" noGrp="1"/>
-          </p:cNvSpPr>
-          <p:nvPr/>
-        </p:nvSpPr>
-        <p:spPr>
-          <a:xfrm xmlns:a="http://schemas.openxmlformats.org/drawingml/2006/main">
-            <a:off x="6334125" y="1771650"/>
-            <a:ext cx="2190750" cy="190500"/>
-          </a:xfrm>
-          <a:prstGeom xmlns:a="http://schemas.openxmlformats.org/drawingml/2006/main" prst="rect">
-            <a:avLst/>
-          </a:prstGeom>
-          <a:noFill xmlns:a="http://schemas.openxmlformats.org/drawingml/2006/main"/>
-          <a:ln xmlns:a="http://schemas.openxmlformats.org/drawingml/2006/main" w="0">
-            <a:noFill/>
-            <a:prstDash val="solid"/>
-          </a:ln>
-        </p:spPr>
-        <p:txBody>
-          <a:bodyPr xmlns:a="http://schemas.openxmlformats.org/drawingml/2006/main"/>
-          <a:lstStyle xmlns:a="http://schemas.openxmlformats.org/drawingml/2006/main"/>
-          <a:p xmlns:a="http://schemas.openxmlformats.org/drawingml/2006/main">
-            <a:pPr algn="l">
-              <a:defRPr sz="1125" b="1">
-                <a:solidFill>
-                  <a:srgbClr val="005293"/>
-                </a:solidFill>
-              </a:defRPr>
-            </a:pPr>
-            <a:r>
-              <a:rPr sz="1125" b="1">
-                <a:solidFill>
-                  <a:srgbClr val="005293"/>
-                </a:solidFill>
-              </a:rPr>
-              <a:t>3. Trained models</a:t>
-            </a:r>
-          </a:p>
-        </p:txBody>
-      </p:sp>
-      <p:sp>
-        <p:nvSpPr>
-          <p:cNvPr id="15" name="">
-            <a:extLst xmlns:a="http://schemas.openxmlformats.org/drawingml/2006/main">
-              <a:ext uri="{FF2B5EF4-FFF2-40B4-BE49-F238E27FC236}">
-                <a16:creationId xmlns:a16="http://schemas.microsoft.com/office/drawing/2014/main" id="{E7EEBE91-7615-4423-8838-3FF0E394C5EB}"/>
-              </a:ext>
-            </a:extLst>
-          </p:cNvPr>
-          <p:cNvSpPr>
-            <a:spLocks xmlns:a="http://schemas.openxmlformats.org/drawingml/2006/main" noGrp="1"/>
-          </p:cNvSpPr>
-          <p:nvPr/>
-        </p:nvSpPr>
-        <p:spPr>
-          <a:xfrm xmlns:a="http://schemas.openxmlformats.org/drawingml/2006/main">
-            <a:off x="6334125" y="2009775"/>
-            <a:ext cx="2190750" cy="381000"/>
-          </a:xfrm>
-          <a:prstGeom xmlns:a="http://schemas.openxmlformats.org/drawingml/2006/main" prst="rect">
-            <a:avLst/>
-          </a:prstGeom>
-          <a:noFill xmlns:a="http://schemas.openxmlformats.org/drawingml/2006/main"/>
-          <a:ln xmlns:a="http://schemas.openxmlformats.org/drawingml/2006/main" w="0">
-            <a:noFill/>
-            <a:prstDash val="solid"/>
-          </a:ln>
-        </p:spPr>
-        <p:txBody>
-          <a:bodyPr xmlns:a="http://schemas.openxmlformats.org/drawingml/2006/main"/>
-          <a:lstStyle xmlns:a="http://schemas.openxmlformats.org/drawingml/2006/main"/>
-          <a:p xmlns:a="http://schemas.openxmlformats.org/drawingml/2006/main">
-            <a:pPr algn="l">
-              <a:defRPr sz="923" b="0">
-                <a:solidFill>
-                  <a:srgbClr val="000000"/>
-                </a:solidFill>
-              </a:defRPr>
-            </a:pPr>
-            <a:r>
-              <a:rPr sz="923" b="0">
-                <a:solidFill>
-                  <a:srgbClr val="000000"/>
-                </a:solidFill>
-              </a:rPr>
-              <a:t>deal_classifier.ubj, cql_best.pt,</a:t>
-            </a:r>
-          </a:p>
-          <a:p xmlns:a="http://schemas.openxmlformats.org/drawingml/2006/main">
-            <a:pPr algn="l">
-              <a:defRPr sz="923" b="0">
-                <a:solidFill>
-                  <a:srgbClr val="000000"/>
-                </a:solidFill>
-              </a:defRPr>
-            </a:pPr>
-            <a:r>
-              <a:rPr sz="923" b="0">
-                <a:solidFill>
-                  <a:srgbClr val="000000"/>
-                </a:solidFill>
-              </a:rPr>
-              <a:t>cql_scaler.pkl, ppo_best_faithful.pt</a:t>
-            </a:r>
-          </a:p>
-        </p:txBody>
-      </p:sp>
-      <p:sp>
-        <p:nvSpPr>
-          <p:cNvPr id="16" name="">
-            <a:extLst xmlns:a="http://schemas.openxmlformats.org/drawingml/2006/main">
-              <a:ext uri="{FF2B5EF4-FFF2-40B4-BE49-F238E27FC236}">
-                <a16:creationId xmlns:a16="http://schemas.microsoft.com/office/drawing/2014/main" id="{95EE70FD-D108-4183-9B99-F4E5D0B85DAF}"/>
-              </a:ext>
-            </a:extLst>
-          </p:cNvPr>
-          <p:cNvSpPr>
-            <a:spLocks xmlns:a="http://schemas.openxmlformats.org/drawingml/2006/main" noGrp="1"/>
-          </p:cNvSpPr>
-          <p:nvPr/>
-        </p:nvSpPr>
-        <p:spPr>
-          <a:xfrm xmlns:a="http://schemas.openxmlformats.org/drawingml/2006/main">
-            <a:off x="514350" y="2790825"/>
-            <a:ext cx="3876675" cy="790575"/>
-          </a:xfrm>
-          <a:prstGeom xmlns:a="http://schemas.openxmlformats.org/drawingml/2006/main" prst="rect">
-            <a:avLst/>
-          </a:prstGeom>
-          <a:solidFill xmlns:a="http://schemas.openxmlformats.org/drawingml/2006/main">
-            <a:srgbClr val="FFFFFF"/>
-          </a:solidFill>
-          <a:ln xmlns:a="http://schemas.openxmlformats.org/drawingml/2006/main" w="9525">
-            <a:solidFill>
-              <a:srgbClr val="D7E6F2"/>
-            </a:solidFill>
-            <a:prstDash val="solid"/>
-          </a:ln>
-        </p:spPr>
-      </p:sp>
-      <p:sp>
-        <p:nvSpPr>
-          <p:cNvPr id="17" name="">
-            <a:extLst xmlns:a="http://schemas.openxmlformats.org/drawingml/2006/main">
-              <a:ext uri="{FF2B5EF4-FFF2-40B4-BE49-F238E27FC236}">
-                <a16:creationId xmlns:a16="http://schemas.microsoft.com/office/drawing/2014/main" id="{78204229-7734-49C0-A3D0-D0777AACF37F}"/>
-              </a:ext>
-            </a:extLst>
-          </p:cNvPr>
-          <p:cNvSpPr>
-            <a:spLocks xmlns:a="http://schemas.openxmlformats.org/drawingml/2006/main" noGrp="1"/>
-          </p:cNvSpPr>
-          <p:nvPr/>
-        </p:nvSpPr>
-        <p:spPr>
-          <a:xfrm xmlns:a="http://schemas.openxmlformats.org/drawingml/2006/main">
-            <a:off x="514350" y="2790825"/>
-            <a:ext cx="66675" cy="790575"/>
-          </a:xfrm>
-          <a:prstGeom xmlns:a="http://schemas.openxmlformats.org/drawingml/2006/main" prst="rect">
-            <a:avLst/>
-          </a:prstGeom>
-          <a:solidFill xmlns:a="http://schemas.openxmlformats.org/drawingml/2006/main">
-            <a:srgbClr val="005293"/>
-          </a:solidFill>
-          <a:ln xmlns:a="http://schemas.openxmlformats.org/drawingml/2006/main" w="0">
-            <a:noFill/>
-            <a:prstDash val="solid"/>
-          </a:ln>
-        </p:spPr>
-      </p:sp>
-      <p:sp>
-        <p:nvSpPr>
-          <p:cNvPr id="18" name="">
-            <a:extLst xmlns:a="http://schemas.openxmlformats.org/drawingml/2006/main">
-              <a:ext uri="{FF2B5EF4-FFF2-40B4-BE49-F238E27FC236}">
-                <a16:creationId xmlns:a16="http://schemas.microsoft.com/office/drawing/2014/main" id="{1FA5A17F-EF36-42B0-B324-0AF725D10B78}"/>
-              </a:ext>
-            </a:extLst>
-          </p:cNvPr>
-          <p:cNvSpPr>
-            <a:spLocks xmlns:a="http://schemas.openxmlformats.org/drawingml/2006/main" noGrp="1"/>
-          </p:cNvSpPr>
-          <p:nvPr/>
-        </p:nvSpPr>
-        <p:spPr>
-          <a:xfrm xmlns:a="http://schemas.openxmlformats.org/drawingml/2006/main">
-            <a:off x="676275" y="2886075"/>
-            <a:ext cx="3609975" cy="190500"/>
-          </a:xfrm>
-          <a:prstGeom xmlns:a="http://schemas.openxmlformats.org/drawingml/2006/main" prst="rect">
-            <a:avLst/>
-          </a:prstGeom>
-          <a:noFill xmlns:a="http://schemas.openxmlformats.org/drawingml/2006/main"/>
-          <a:ln xmlns:a="http://schemas.openxmlformats.org/drawingml/2006/main" w="0">
-            <a:noFill/>
-            <a:prstDash val="solid"/>
-          </a:ln>
-        </p:spPr>
-        <p:txBody>
-          <a:bodyPr xmlns:a="http://schemas.openxmlformats.org/drawingml/2006/main"/>
-          <a:lstStyle xmlns:a="http://schemas.openxmlformats.org/drawingml/2006/main"/>
-          <a:p xmlns:a="http://schemas.openxmlformats.org/drawingml/2006/main">
-            <a:pPr algn="l">
-              <a:defRPr sz="1125" b="1">
-                <a:solidFill>
-                  <a:srgbClr val="005293"/>
-                </a:solidFill>
-              </a:defRPr>
-            </a:pPr>
-            <a:r>
-              <a:rPr sz="1125" b="1">
-                <a:solidFill>
-                  <a:srgbClr val="005293"/>
-                </a:solidFill>
-              </a:rPr>
-              <a:t>4. Evaluation outputs</a:t>
-            </a:r>
-          </a:p>
-        </p:txBody>
-      </p:sp>
-      <p:sp>
-        <p:nvSpPr>
-          <p:cNvPr id="19" name="">
-            <a:extLst xmlns:a="http://schemas.openxmlformats.org/drawingml/2006/main">
-              <a:ext uri="{FF2B5EF4-FFF2-40B4-BE49-F238E27FC236}">
-                <a16:creationId xmlns:a16="http://schemas.microsoft.com/office/drawing/2014/main" id="{71254B44-B0AB-4E33-83A1-E9EC5950D232}"/>
-              </a:ext>
-            </a:extLst>
-          </p:cNvPr>
-          <p:cNvSpPr>
-            <a:spLocks xmlns:a="http://schemas.openxmlformats.org/drawingml/2006/main" noGrp="1"/>
-          </p:cNvSpPr>
-          <p:nvPr/>
-        </p:nvSpPr>
-        <p:spPr>
-          <a:xfrm xmlns:a="http://schemas.openxmlformats.org/drawingml/2006/main">
-            <a:off x="676275" y="3124200"/>
-            <a:ext cx="3609975" cy="381000"/>
-          </a:xfrm>
-          <a:prstGeom xmlns:a="http://schemas.openxmlformats.org/drawingml/2006/main" prst="rect">
-            <a:avLst/>
-          </a:prstGeom>
-          <a:noFill xmlns:a="http://schemas.openxmlformats.org/drawingml/2006/main"/>
-          <a:ln xmlns:a="http://schemas.openxmlformats.org/drawingml/2006/main" w="0">
-            <a:noFill/>
-            <a:prstDash val="solid"/>
-          </a:ln>
-        </p:spPr>
-        <p:txBody>
-          <a:bodyPr xmlns:a="http://schemas.openxmlformats.org/drawingml/2006/main"/>
-          <a:lstStyle xmlns:a="http://schemas.openxmlformats.org/drawingml/2006/main"/>
-          <a:p xmlns:a="http://schemas.openxmlformats.org/drawingml/2006/main">
-            <a:pPr algn="l">
-              <a:defRPr sz="923" b="0">
-                <a:solidFill>
-                  <a:srgbClr val="000000"/>
-                </a:solidFill>
-              </a:defRPr>
-            </a:pPr>
-            <a:r>
-              <a:rPr sz="923" b="0">
-                <a:solidFill>
-                  <a:srgbClr val="000000"/>
-                </a:solidFill>
-              </a:rPr>
-              <a:t>policy_comparison.csv, ope_policy_eval.csv,</a:t>
-            </a:r>
-          </a:p>
-          <a:p xmlns:a="http://schemas.openxmlformats.org/drawingml/2006/main">
-            <a:pPr algn="l">
-              <a:defRPr sz="923" b="0">
-                <a:solidFill>
-                  <a:srgbClr val="000000"/>
-                </a:solidFill>
-              </a:defRPr>
-            </a:pPr>
-            <a:r>
-              <a:rPr sz="923" b="0">
-                <a:solidFill>
-                  <a:srgbClr val="000000"/>
-                </a:solidFill>
-              </a:rPr>
-              <a:t>ope_weight_diagnostics.csv, ope_summary.json</a:t>
-            </a:r>
-          </a:p>
-        </p:txBody>
-      </p:sp>
-      <p:sp>
-        <p:nvSpPr>
-          <p:cNvPr id="20" name="">
-            <a:extLst xmlns:a="http://schemas.openxmlformats.org/drawingml/2006/main">
-              <a:ext uri="{FF2B5EF4-FFF2-40B4-BE49-F238E27FC236}">
-                <a16:creationId xmlns:a16="http://schemas.microsoft.com/office/drawing/2014/main" id="{AF0B470A-BACA-42E6-BA82-9ACA56A61FDD}"/>
-              </a:ext>
-            </a:extLst>
-          </p:cNvPr>
-          <p:cNvSpPr>
-            <a:spLocks xmlns:a="http://schemas.openxmlformats.org/drawingml/2006/main" noGrp="1"/>
-          </p:cNvSpPr>
-          <p:nvPr/>
-        </p:nvSpPr>
-        <p:spPr>
-          <a:xfrm xmlns:a="http://schemas.openxmlformats.org/drawingml/2006/main">
-            <a:off x="4752975" y="2790825"/>
-            <a:ext cx="3876675" cy="790575"/>
-          </a:xfrm>
-          <a:prstGeom xmlns:a="http://schemas.openxmlformats.org/drawingml/2006/main" prst="rect">
-            <a:avLst/>
-          </a:prstGeom>
-          <a:solidFill xmlns:a="http://schemas.openxmlformats.org/drawingml/2006/main">
-            <a:srgbClr val="FFFFFF"/>
-          </a:solidFill>
-          <a:ln xmlns:a="http://schemas.openxmlformats.org/drawingml/2006/main" w="9525">
-            <a:solidFill>
-              <a:srgbClr val="D7E6F2"/>
-            </a:solidFill>
-            <a:prstDash val="solid"/>
-          </a:ln>
-        </p:spPr>
-      </p:sp>
-      <p:sp>
-        <p:nvSpPr>
-          <p:cNvPr id="21" name="">
-            <a:extLst xmlns:a="http://schemas.openxmlformats.org/drawingml/2006/main">
-              <a:ext uri="{FF2B5EF4-FFF2-40B4-BE49-F238E27FC236}">
-                <a16:creationId xmlns:a16="http://schemas.microsoft.com/office/drawing/2014/main" id="{FD07B89D-C885-4028-B11F-E6F05A918C96}"/>
-              </a:ext>
-            </a:extLst>
-          </p:cNvPr>
-          <p:cNvSpPr>
-            <a:spLocks xmlns:a="http://schemas.openxmlformats.org/drawingml/2006/main" noGrp="1"/>
-          </p:cNvSpPr>
-          <p:nvPr/>
-        </p:nvSpPr>
-        <p:spPr>
-          <a:xfrm xmlns:a="http://schemas.openxmlformats.org/drawingml/2006/main">
-            <a:off x="4752975" y="2790825"/>
-            <a:ext cx="66675" cy="790575"/>
-          </a:xfrm>
-          <a:prstGeom xmlns:a="http://schemas.openxmlformats.org/drawingml/2006/main" prst="rect">
-            <a:avLst/>
-          </a:prstGeom>
-          <a:solidFill xmlns:a="http://schemas.openxmlformats.org/drawingml/2006/main">
-            <a:srgbClr val="64A0C8"/>
-          </a:solidFill>
-          <a:ln xmlns:a="http://schemas.openxmlformats.org/drawingml/2006/main" w="0">
-            <a:noFill/>
-            <a:prstDash val="solid"/>
-          </a:ln>
-        </p:spPr>
-      </p:sp>
-      <p:sp>
-        <p:nvSpPr>
-          <p:cNvPr id="22" name="">
-            <a:extLst xmlns:a="http://schemas.openxmlformats.org/drawingml/2006/main">
-              <a:ext uri="{FF2B5EF4-FFF2-40B4-BE49-F238E27FC236}">
-                <a16:creationId xmlns:a16="http://schemas.microsoft.com/office/drawing/2014/main" id="{956AACE2-234F-4772-B555-9AF0DEC24015}"/>
-              </a:ext>
-            </a:extLst>
-          </p:cNvPr>
-          <p:cNvSpPr>
-            <a:spLocks xmlns:a="http://schemas.openxmlformats.org/drawingml/2006/main" noGrp="1"/>
-          </p:cNvSpPr>
-          <p:nvPr/>
-        </p:nvSpPr>
-        <p:spPr>
-          <a:xfrm xmlns:a="http://schemas.openxmlformats.org/drawingml/2006/main">
-            <a:off x="4914900" y="2886075"/>
-            <a:ext cx="3609975" cy="190500"/>
-          </a:xfrm>
-          <a:prstGeom xmlns:a="http://schemas.openxmlformats.org/drawingml/2006/main" prst="rect">
-            <a:avLst/>
-          </a:prstGeom>
-          <a:noFill xmlns:a="http://schemas.openxmlformats.org/drawingml/2006/main"/>
-          <a:ln xmlns:a="http://schemas.openxmlformats.org/drawingml/2006/main" w="0">
-            <a:noFill/>
-            <a:prstDash val="solid"/>
-          </a:ln>
-        </p:spPr>
-        <p:txBody>
-          <a:bodyPr xmlns:a="http://schemas.openxmlformats.org/drawingml/2006/main"/>
-          <a:lstStyle xmlns:a="http://schemas.openxmlformats.org/drawingml/2006/main"/>
-          <a:p xmlns:a="http://schemas.openxmlformats.org/drawingml/2006/main">
-            <a:pPr algn="l">
-              <a:defRPr sz="1125" b="1">
-                <a:solidFill>
-                  <a:srgbClr val="005293"/>
-                </a:solidFill>
-              </a:defRPr>
-            </a:pPr>
-            <a:r>
-              <a:rPr sz="1125" b="1">
-                <a:solidFill>
-                  <a:srgbClr val="005293"/>
-                </a:solidFill>
-              </a:rPr>
-              <a:t>5. Recommendation outputs</a:t>
-            </a:r>
-          </a:p>
-        </p:txBody>
-      </p:sp>
-      <p:sp>
-        <p:nvSpPr>
-          <p:cNvPr id="23" name="">
-            <a:extLst xmlns:a="http://schemas.openxmlformats.org/drawingml/2006/main">
-              <a:ext uri="{FF2B5EF4-FFF2-40B4-BE49-F238E27FC236}">
-                <a16:creationId xmlns:a16="http://schemas.microsoft.com/office/drawing/2014/main" id="{E600B103-4AA2-4A4C-8B26-C9BD014C830E}"/>
-              </a:ext>
-            </a:extLst>
-          </p:cNvPr>
-          <p:cNvSpPr>
-            <a:spLocks xmlns:a="http://schemas.openxmlformats.org/drawingml/2006/main" noGrp="1"/>
-          </p:cNvSpPr>
-          <p:nvPr/>
-        </p:nvSpPr>
-        <p:spPr>
-          <a:xfrm xmlns:a="http://schemas.openxmlformats.org/drawingml/2006/main">
-            <a:off x="4914900" y="3124200"/>
-            <a:ext cx="3609975" cy="381000"/>
-          </a:xfrm>
-          <a:prstGeom xmlns:a="http://schemas.openxmlformats.org/drawingml/2006/main" prst="rect">
-            <a:avLst/>
-          </a:prstGeom>
-          <a:noFill xmlns:a="http://schemas.openxmlformats.org/drawingml/2006/main"/>
-          <a:ln xmlns:a="http://schemas.openxmlformats.org/drawingml/2006/main" w="0">
-            <a:noFill/>
-            <a:prstDash val="solid"/>
-          </a:ln>
-        </p:spPr>
-        <p:txBody>
-          <a:bodyPr xmlns:a="http://schemas.openxmlformats.org/drawingml/2006/main"/>
-          <a:lstStyle xmlns:a="http://schemas.openxmlformats.org/drawingml/2006/main"/>
-          <a:p xmlns:a="http://schemas.openxmlformats.org/drawingml/2006/main">
-            <a:pPr algn="l">
-              <a:defRPr sz="923" b="0">
-                <a:solidFill>
-                  <a:srgbClr val="000000"/>
-                </a:solidFill>
-              </a:defRPr>
-            </a:pPr>
-            <a:r>
-              <a:rPr sz="923" b="0">
-                <a:solidFill>
-                  <a:srgbClr val="000000"/>
-                </a:solidFill>
-              </a:rPr>
-              <a:t>offer_recommendations.csv</a:t>
-            </a:r>
-          </a:p>
-          <a:p xmlns:a="http://schemas.openxmlformats.org/drawingml/2006/main">
-            <a:pPr algn="l">
-              <a:defRPr sz="923" b="0">
-                <a:solidFill>
-                  <a:srgbClr val="000000"/>
-                </a:solidFill>
-              </a:defRPr>
-            </a:pPr>
-            <a:r>
-              <a:rPr sz="923" b="0">
-                <a:solidFill>
-                  <a:srgbClr val="000000"/>
-                </a:solidFill>
-              </a:rPr>
-              <a:t>single-listing menus from recommend_one.py</a:t>
-            </a:r>
-          </a:p>
-        </p:txBody>
-      </p:sp>
-      <p:sp>
-        <p:nvSpPr>
-          <p:cNvPr id="24" name="">
-            <a:extLst xmlns:a="http://schemas.openxmlformats.org/drawingml/2006/main">
-              <a:ext uri="{FF2B5EF4-FFF2-40B4-BE49-F238E27FC236}">
-                <a16:creationId xmlns:a16="http://schemas.microsoft.com/office/drawing/2014/main" id="{CB6B5882-6416-4348-A869-AA11F8FFBC4F}"/>
-              </a:ext>
-            </a:extLst>
-          </p:cNvPr>
-          <p:cNvSpPr>
-            <a:spLocks xmlns:a="http://schemas.openxmlformats.org/drawingml/2006/main" noGrp="1"/>
-          </p:cNvSpPr>
-          <p:nvPr/>
-        </p:nvSpPr>
-        <p:spPr>
-          <a:xfrm xmlns:a="http://schemas.openxmlformats.org/drawingml/2006/main">
-            <a:off x="514350" y="4000500"/>
-            <a:ext cx="8115300" cy="590550"/>
-          </a:xfrm>
-          <a:prstGeom xmlns:a="http://schemas.openxmlformats.org/drawingml/2006/main" prst="rect">
-            <a:avLst/>
-          </a:prstGeom>
-          <a:solidFill xmlns:a="http://schemas.openxmlformats.org/drawingml/2006/main">
-            <a:srgbClr val="EAF3FA"/>
-          </a:solidFill>
-          <a:ln xmlns:a="http://schemas.openxmlformats.org/drawingml/2006/main" w="9525">
-            <a:solidFill>
-              <a:srgbClr val="C7DDEC"/>
-            </a:solidFill>
-            <a:prstDash val="solid"/>
-          </a:ln>
-        </p:spPr>
-      </p:sp>
-      <p:sp>
-        <p:nvSpPr>
-          <p:cNvPr id="25" name="">
-            <a:extLst xmlns:a="http://schemas.openxmlformats.org/drawingml/2006/main">
-              <a:ext uri="{FF2B5EF4-FFF2-40B4-BE49-F238E27FC236}">
-                <a16:creationId xmlns:a16="http://schemas.microsoft.com/office/drawing/2014/main" id="{D14C4C11-9F92-4663-B715-5767CDFE6282}"/>
-              </a:ext>
-            </a:extLst>
-          </p:cNvPr>
-          <p:cNvSpPr>
-            <a:spLocks xmlns:a="http://schemas.openxmlformats.org/drawingml/2006/main" noGrp="1"/>
-          </p:cNvSpPr>
-          <p:nvPr/>
-        </p:nvSpPr>
-        <p:spPr>
-          <a:xfrm xmlns:a="http://schemas.openxmlformats.org/drawingml/2006/main">
-            <a:off x="742950" y="4181475"/>
-            <a:ext cx="7658100" cy="247650"/>
-          </a:xfrm>
-          <a:prstGeom xmlns:a="http://schemas.openxmlformats.org/drawingml/2006/main" prst="rect">
-            <a:avLst/>
-          </a:prstGeom>
-          <a:noFill xmlns:a="http://schemas.openxmlformats.org/drawingml/2006/main"/>
-          <a:ln xmlns:a="http://schemas.openxmlformats.org/drawingml/2006/main" w="0">
-            <a:noFill/>
-            <a:prstDash val="solid"/>
-          </a:ln>
-        </p:spPr>
-        <p:txBody>
-          <a:bodyPr xmlns:a="http://schemas.openxmlformats.org/drawingml/2006/main"/>
-          <a:lstStyle xmlns:a="http://schemas.openxmlformats.org/drawingml/2006/main"/>
-          <a:p xmlns:a="http://schemas.openxmlformats.org/drawingml/2006/main">
-            <a:pPr algn="ctr">
-              <a:defRPr sz="1140" b="1">
-                <a:solidFill>
-                  <a:srgbClr val="005293"/>
-                </a:solidFill>
-              </a:defRPr>
-            </a:pPr>
-            <a:r>
-              <a:rPr sz="1140" b="1">
-                <a:solidFill>
-                  <a:srgbClr val="005293"/>
-                </a:solidFill>
-              </a:rPr>
-              <a:t>Tracked final deliverables: technical_report.md/.pdf, results dashboard figure, and this presentation deck.</a:t>
-            </a:r>
-          </a:p>
-        </p:txBody>
-      </p:sp>
-      <p:sp>
-        <p:nvSpPr>
-          <p:cNvPr id="26" name="">
-            <a:extLst xmlns:a="http://schemas.openxmlformats.org/drawingml/2006/main">
-              <a:ext uri="{FF2B5EF4-FFF2-40B4-BE49-F238E27FC236}">
-                <a16:creationId xmlns:a16="http://schemas.microsoft.com/office/drawing/2014/main" id="{D4ED4CC9-DC87-4666-8FD5-2061BB0338C3}"/>
-              </a:ext>
-            </a:extLst>
-          </p:cNvPr>
-          <p:cNvSpPr>
-            <a:spLocks xmlns:a="http://schemas.openxmlformats.org/drawingml/2006/main" noGrp="1"/>
-          </p:cNvSpPr>
-          <p:nvPr/>
-        </p:nvSpPr>
-        <p:spPr>
-          <a:xfrm xmlns:a="http://schemas.openxmlformats.org/drawingml/2006/main">
-            <a:off x="304800" y="4857750"/>
-            <a:ext cx="6191250" cy="228600"/>
-          </a:xfrm>
-          <a:prstGeom xmlns:a="http://schemas.openxmlformats.org/drawingml/2006/main" prst="rect">
-            <a:avLst/>
-          </a:prstGeom>
-          <a:noFill xmlns:a="http://schemas.openxmlformats.org/drawingml/2006/main"/>
-          <a:ln xmlns:a="http://schemas.openxmlformats.org/drawingml/2006/main" w="0">
-            <a:noFill/>
-            <a:prstDash val="solid"/>
-          </a:ln>
-        </p:spPr>
-        <p:txBody>
-          <a:bodyPr xmlns:a="http://schemas.openxmlformats.org/drawingml/2006/main"/>
-          <a:lstStyle xmlns:a="http://schemas.openxmlformats.org/drawingml/2006/main"/>
-          <a:p xmlns:a="http://schemas.openxmlformats.org/drawingml/2006/main">
-            <a:pPr algn="l">
-              <a:defRPr sz="1102" b="0">
-                <a:solidFill>
-                  <a:srgbClr val="000000"/>
-                </a:solidFill>
-              </a:defRPr>
-            </a:pPr>
-            <a:r>
-              <a:rPr sz="1102" b="0">
-                <a:solidFill>
-                  <a:srgbClr val="000000"/>
-                </a:solidFill>
-              </a:rPr>
-              <a:t>eBay Best Offer anchoring RL | Advanced Seminar (WIHN0043SE)</a:t>
-            </a:r>
-          </a:p>
-        </p:txBody>
-      </p:sp>
-      <p:sp>
-        <p:nvSpPr>
-          <p:cNvPr id="27" name="">
-            <a:extLst xmlns:a="http://schemas.openxmlformats.org/drawingml/2006/main">
-              <a:ext uri="{FF2B5EF4-FFF2-40B4-BE49-F238E27FC236}">
-                <a16:creationId xmlns:a16="http://schemas.microsoft.com/office/drawing/2014/main" id="{6C8C6AD7-06A6-4963-AD76-9CED3F4C5F84}"/>
-              </a:ext>
-            </a:extLst>
-          </p:cNvPr>
-          <p:cNvSpPr>
-            <a:spLocks xmlns:a="http://schemas.openxmlformats.org/drawingml/2006/main" noGrp="1"/>
-          </p:cNvSpPr>
-          <p:nvPr/>
-        </p:nvSpPr>
-        <p:spPr>
-          <a:xfrm xmlns:a="http://schemas.openxmlformats.org/drawingml/2006/main">
-            <a:off x="7810500" y="4857750"/>
-            <a:ext cx="1009650" cy="228600"/>
-          </a:xfrm>
-          <a:prstGeom xmlns:a="http://schemas.openxmlformats.org/drawingml/2006/main" prst="rect">
-            <a:avLst/>
-          </a:prstGeom>
-          <a:noFill xmlns:a="http://schemas.openxmlformats.org/drawingml/2006/main"/>
-          <a:ln xmlns:a="http://schemas.openxmlformats.org/drawingml/2006/main" w="0">
-            <a:noFill/>
-            <a:prstDash val="solid"/>
-          </a:ln>
-        </p:spPr>
-        <p:txBody>
-          <a:bodyPr xmlns:a="http://schemas.openxmlformats.org/drawingml/2006/main"/>
-          <a:lstStyle xmlns:a="http://schemas.openxmlformats.org/drawingml/2006/main"/>
-          <a:p xmlns:a="http://schemas.openxmlformats.org/drawingml/2006/main">
-            <a:pPr algn="r">
-              <a:defRPr sz="1102" b="0">
-                <a:solidFill>
-                  <a:srgbClr val="000000"/>
-                </a:solidFill>
-              </a:defRPr>
-            </a:pPr>
-            <a:r>
-              <a:rPr sz="1102" b="0">
-                <a:solidFill>
-                  <a:srgbClr val="000000"/>
-                </a:solidFill>
-              </a:rPr>
-              <a:t>15</a:t>
-            </a:r>
-          </a:p>
-        </p:txBody>
-      </p:sp>
-    </p:spTree>
-    <p:extLst>
-      <p:ext uri="{BB962C8B-B14F-4D97-AF65-F5344CB8AC3E}">
-        <p14:creationId xmlns:p14="http://schemas.microsoft.com/office/powerpoint/2010/main" val="1637574051"/>
       </p:ext>
     </p:extLst>
   </p:cSld>
@@ -10666,7 +9367,7 @@
           <p:nvPr/>
         </p:nvPicPr>
         <p:blipFill>
-          <a:blip xmlns:r="http://schemas.openxmlformats.org/officeDocument/2006/relationships" xmlns:a="http://schemas.openxmlformats.org/drawingml/2006/main" r:embed="Reb9b0537ef0841ec"/>
+          <a:blip xmlns:r="http://schemas.openxmlformats.org/officeDocument/2006/relationships" xmlns:a="http://schemas.openxmlformats.org/drawingml/2006/main" r:embed="R6454c11476164e1e"/>
           <a:stretch xmlns:a="http://schemas.openxmlformats.org/drawingml/2006/main">
             <a:fillRect l="0" t="0" r="0" b="0"/>
           </a:stretch>
@@ -10962,7 +9663,7 @@
           <p:nvPr/>
         </p:nvPicPr>
         <p:blipFill>
-          <a:blip xmlns:r="http://schemas.openxmlformats.org/officeDocument/2006/relationships" xmlns:a="http://schemas.openxmlformats.org/drawingml/2006/main" r:embed="R8334ccdc9af64609"/>
+          <a:blip xmlns:r="http://schemas.openxmlformats.org/officeDocument/2006/relationships" xmlns:a="http://schemas.openxmlformats.org/drawingml/2006/main" r:embed="Rc1c06ea4198f4c46"/>
           <a:stretch xmlns:a="http://schemas.openxmlformats.org/drawingml/2006/main">
             <a:fillRect l="0" t="0" r="0" b="0"/>
           </a:stretch>
@@ -11284,7 +9985,7 @@
         </p:xfrm>
         <a:graphic xmlns:a="http://schemas.openxmlformats.org/drawingml/2006/main">
           <a:graphicData uri="http://schemas.openxmlformats.org/drawingml/2006/chart">
-            <c:chart xmlns:r="http://schemas.openxmlformats.org/officeDocument/2006/relationships" xmlns:c="http://schemas.openxmlformats.org/drawingml/2006/chart" r:id="Re61742e8892b470e"/>
+            <c:chart xmlns:r="http://schemas.openxmlformats.org/officeDocument/2006/relationships" xmlns:c="http://schemas.openxmlformats.org/drawingml/2006/chart" r:id="Ra8cb33024dda46c7"/>
           </a:graphicData>
         </a:graphic>
       </p:graphicFrame>
@@ -11369,7 +10070,7 @@
           <p:nvPr/>
         </p:nvPicPr>
         <p:blipFill>
-          <a:blip xmlns:r="http://schemas.openxmlformats.org/officeDocument/2006/relationships" xmlns:a="http://schemas.openxmlformats.org/drawingml/2006/main" r:embed="R0da98654db0f421d"/>
+          <a:blip xmlns:r="http://schemas.openxmlformats.org/officeDocument/2006/relationships" xmlns:a="http://schemas.openxmlformats.org/drawingml/2006/main" r:embed="R974b91b9d8904609"/>
           <a:stretch xmlns:a="http://schemas.openxmlformats.org/drawingml/2006/main">
             <a:fillRect l="0" t="0" r="0" b="0"/>
           </a:stretch>
@@ -11841,7 +10542,7 @@
           <p:nvPr/>
         </p:nvPicPr>
         <p:blipFill>
-          <a:blip xmlns:r="http://schemas.openxmlformats.org/officeDocument/2006/relationships" xmlns:a="http://schemas.openxmlformats.org/drawingml/2006/main" r:embed="Rd1a164f5355440db"/>
+          <a:blip xmlns:r="http://schemas.openxmlformats.org/officeDocument/2006/relationships" xmlns:a="http://schemas.openxmlformats.org/drawingml/2006/main" r:embed="Rdc66e2e15bc3411d"/>
           <a:stretch xmlns:a="http://schemas.openxmlformats.org/drawingml/2006/main">
             <a:fillRect l="0" t="0" r="0" b="0"/>
           </a:stretch>
@@ -12051,7 +10752,7 @@
                 <a:ea typeface="Arial"/>
                 <a:cs typeface="Arial"/>
               </a:rPr>
-              <a:t>From 9.6M logged offers to a support-aware comparison</a:t>
+              <a:t>From 5.71M valid opening offers to a support-aware comparison</a:t>
             </a:r>
           </a:p>
         </p:txBody>
@@ -12137,7 +10838,7 @@
           <p:nvPr/>
         </p:nvPicPr>
         <p:blipFill>
-          <a:blip xmlns:r="http://schemas.openxmlformats.org/officeDocument/2006/relationships" xmlns:a="http://schemas.openxmlformats.org/drawingml/2006/main" r:embed="R3f98a67ee7b8435a"/>
+          <a:blip xmlns:r="http://schemas.openxmlformats.org/officeDocument/2006/relationships" xmlns:a="http://schemas.openxmlformats.org/drawingml/2006/main" r:embed="Reefe3a392f764195"/>
           <a:stretch xmlns:a="http://schemas.openxmlformats.org/drawingml/2006/main">
             <a:fillRect l="0" t="0" r="0" b="0"/>
           </a:stretch>
@@ -12797,7 +11498,7 @@
                 <a:ea typeface="Arial"/>
                 <a:cs typeface="Arial"/>
               </a:rPr>
-              <a:t>7.67M</a:t>
+              <a:t>5.71M</a:t>
             </a:r>
           </a:p>
         </p:txBody>
@@ -12847,7 +11548,7 @@
                 <a:ea typeface="Arial"/>
                 <a:cs typeface="Arial"/>
               </a:rPr>
-              <a:t>training interactions</a:t>
+              <a:t>valid fashion opening offers</a:t>
             </a:r>
           </a:p>
         </p:txBody>
@@ -12897,7 +11598,7 @@
                 <a:ea typeface="Arial"/>
                 <a:cs typeface="Arial"/>
               </a:rPr>
-              <a:t>0.701</a:t>
+              <a:t>0.834</a:t>
             </a:r>
           </a:p>
         </p:txBody>
@@ -12997,7 +11698,7 @@
                 <a:ea typeface="Arial"/>
                 <a:cs typeface="Arial"/>
               </a:rPr>
-              <a:t>0.31 - 0.93</a:t>
+              <a:t>0.268 - 0.867</a:t>
             </a:r>
           </a:p>
         </p:txBody>
@@ -13047,7 +11748,7 @@
                 <a:ea typeface="Arial"/>
                 <a:cs typeface="Arial"/>
               </a:rPr>
-              <a:t>anchor support (p5 - p95)</a:t>
+              <a:t>train anchor support (p5 - p95)</a:t>
             </a:r>
           </a:p>
         </p:txBody>
@@ -13083,7 +11784,7 @@
           <p:nvPr/>
         </p:nvPicPr>
         <p:blipFill>
-          <a:blip xmlns:r="http://schemas.openxmlformats.org/officeDocument/2006/relationships" xmlns:a="http://schemas.openxmlformats.org/drawingml/2006/main" r:embed="R400ab7e3633544b7"/>
+          <a:blip xmlns:r="http://schemas.openxmlformats.org/officeDocument/2006/relationships" xmlns:a="http://schemas.openxmlformats.org/drawingml/2006/main" r:embed="R90193e582d594a25"/>
           <a:stretch xmlns:a="http://schemas.openxmlformats.org/drawingml/2006/main">
             <a:fillRect l="0" t="0" r="0" b="0"/>
           </a:stretch>
@@ -13115,7 +11816,7 @@
         <p:spPr>
           <a:xfrm xmlns:a="http://schemas.openxmlformats.org/drawingml/2006/main">
             <a:off x="384048" y="292608"/>
-            <a:ext cx="7589520" cy="685800"/>
+            <a:ext cx="7589520" cy="822960"/>
           </a:xfrm>
           <a:prstGeom xmlns:a="http://schemas.openxmlformats.org/drawingml/2006/main" prst="rect">
             <a:avLst/>
@@ -13143,7 +11844,7 @@
                 <a:ea typeface="Arial"/>
                 <a:cs typeface="Arial"/>
               </a:rPr>
-              <a:t>How: Phase 1 predicts acceptance - greedy use is unsafe</a:t>
+              <a:t>How: Phase 1 is calibrated - greedy still needs support checks</a:t>
             </a:r>
           </a:p>
         </p:txBody>
@@ -13312,7 +12013,7 @@
                 <a:ea typeface="Arial"/>
                 <a:cs typeface="Arial"/>
               </a:rPr>
-              <a:t>It is a response model, not a value function - expected savings are derived afterwards as P(accept) × (1 − a).</a:t>
+              <a:t>Expected savings is then P(accept) × (1 − a).</a:t>
             </a:r>
           </a:p>
           <a:p xmlns:a="http://schemas.openxmlformats.org/drawingml/2006/main">
@@ -13331,7 +12032,7 @@
                 <a:ea typeface="Arial"/>
                 <a:cs typeface="Arial"/>
               </a:rPr>
-              <a:t>The model is useful for prediction and simple baselines.</a:t>
+              <a:t>AUC 0.834 and Brier 0.154 support useful probability prediction.</a:t>
             </a:r>
           </a:p>
           <a:p xmlns:a="http://schemas.openxmlformats.org/drawingml/2006/main">
@@ -13350,7 +12051,7 @@
                 <a:ea typeface="Arial"/>
                 <a:cs typeface="Arial"/>
               </a:rPr>
-              <a:t>The failure appears when the learned surface is maximized greedily: target anchors move outside reliable logged support.</a:t>
+              <a:t>But actions are observational, so grid optimization still needs historical-support checks.</a:t>
             </a:r>
           </a:p>
         </p:txBody>
@@ -13483,7 +12184,7 @@
                           <a:ea typeface="Arial"/>
                           <a:cs typeface="Arial"/>
                         </a:rPr>
-                        <a:t>AUC 0.701</a:t>
+                        <a:t>AUC 0.834</a:t>
                       </a:r>
                     </a:p>
                   </a:txBody>
@@ -13504,7 +12205,7 @@
                           <a:ea typeface="Arial"/>
                           <a:cs typeface="Arial"/>
                         </a:rPr>
-                        <a:t>usable acceptance model</a:t>
+                        <a:t>strong discrimination</a:t>
                       </a:r>
                     </a:p>
                   </a:txBody>
@@ -13527,7 +12228,7 @@
                           <a:ea typeface="Arial"/>
                           <a:cs typeface="Arial"/>
                         </a:rPr>
-                        <a:t>Fixed 0.70</a:t>
+                        <a:t>Calibration</a:t>
                       </a:r>
                     </a:p>
                   </a:txBody>
@@ -13548,7 +12249,7 @@
                           <a:ea typeface="Arial"/>
                           <a:cs typeface="Arial"/>
                         </a:rPr>
-                        <a:t>0.0268</a:t>
+                        <a:t>Brier 0.154</a:t>
                       </a:r>
                     </a:p>
                   </a:txBody>
@@ -13569,7 +12270,7 @@
                           <a:ea typeface="Arial"/>
                           <a:cs typeface="Arial"/>
                         </a:rPr>
-                        <a:t>expected savings (model)</a:t>
+                        <a:t>probability quality</a:t>
                       </a:r>
                     </a:p>
                   </a:txBody>
@@ -13592,7 +12293,7 @@
                           <a:ea typeface="Arial"/>
                           <a:cs typeface="Arial"/>
                         </a:rPr>
-                        <a:t>Greedy use</a:t>
+                        <a:t>Greedy</a:t>
                       </a:r>
                     </a:p>
                   </a:txBody>
@@ -13613,7 +12314,7 @@
                           <a:ea typeface="Arial"/>
                           <a:cs typeface="Arial"/>
                         </a:rPr>
-                        <a:t>ESS 0.008</a:t>
+                        <a:t>Support 91.0%</a:t>
                       </a:r>
                     </a:p>
                   </a:txBody>
@@ -13634,7 +12335,7 @@
                           <a:ea typeface="Arial"/>
                           <a:cs typeface="Arial"/>
                         </a:rPr>
-                        <a:t>almost no logged support</a:t>
+                        <a:t>some extrapolation</a:t>
                       </a:r>
                     </a:p>
                   </a:txBody>
@@ -13694,7 +12395,7 @@
                 <a:ea typeface="Arial"/>
                 <a:cs typeface="Arial"/>
               </a:rPr>
-              <a:t>ESS shown for bandwidth h = 0.05.</a:t>
+              <a:t>OPE ESS at h = 0.05: fixed 35.5% | greedy 25.6% | CQL 36.2%.</a:t>
             </a:r>
           </a:p>
         </p:txBody>
@@ -13744,7 +12445,7 @@
                 <a:ea typeface="Arial"/>
                 <a:cs typeface="Arial"/>
               </a:rPr>
-              <a:t>This closes Phase 1: prediction works, but support-aware optimization is still needed.</a:t>
+              <a:t>Phase 1 is useful for prediction; support-aware optimization is still needed.</a:t>
             </a:r>
           </a:p>
         </p:txBody>
@@ -13780,7 +12481,7 @@
           <p:nvPr/>
         </p:nvPicPr>
         <p:blipFill>
-          <a:blip xmlns:r="http://schemas.openxmlformats.org/officeDocument/2006/relationships" xmlns:a="http://schemas.openxmlformats.org/drawingml/2006/main" r:embed="R4162297806f14186"/>
+          <a:blip xmlns:r="http://schemas.openxmlformats.org/officeDocument/2006/relationships" xmlns:a="http://schemas.openxmlformats.org/drawingml/2006/main" r:embed="R0ef54806462a491a"/>
           <a:stretch xmlns:a="http://schemas.openxmlformats.org/drawingml/2006/main">
             <a:fillRect l="0" t="0" r="0" b="0"/>
           </a:stretch>
@@ -14896,7 +13597,7 @@
           <p:nvPr/>
         </p:nvPicPr>
         <p:blipFill>
-          <a:blip xmlns:r="http://schemas.openxmlformats.org/officeDocument/2006/relationships" xmlns:a="http://schemas.openxmlformats.org/drawingml/2006/main" r:embed="R60cb980f17224686"/>
+          <a:blip xmlns:r="http://schemas.openxmlformats.org/officeDocument/2006/relationships" xmlns:a="http://schemas.openxmlformats.org/drawingml/2006/main" r:embed="Ra4531a8f57b04339"/>
           <a:stretch xmlns:a="http://schemas.openxmlformats.org/drawingml/2006/main">
             <a:fillRect l="0" t="0" r="0" b="0"/>
           </a:stretch>
@@ -15106,7 +13807,7 @@
                 <a:ea typeface="Arial"/>
                 <a:cs typeface="Arial"/>
               </a:rPr>
-              <a:t>True logging propensities are unavailable, so off-policy evaluation is diagnostic, not causal.</a:t>
+              <a:t>True logging propensities are unavailable, so off-policy evaluation remains diagnostic, not causal.</a:t>
             </a:r>
           </a:p>
           <a:p xmlns:a="http://schemas.openxmlformats.org/drawingml/2006/main">
@@ -15125,7 +13826,7 @@
                 <a:ea typeface="Arial"/>
                 <a:cs typeface="Arial"/>
               </a:rPr>
-              <a:t>Effective sample size (ESS) measures how much logged data actually supports a target policy.</a:t>
+              <a:t>At h = 0.05, greedy has the weakest support (ESS 25.6%); CQL retains 36.2% and fixed 0.70 retains 35.5%.</a:t>
             </a:r>
           </a:p>
           <a:p xmlns:a="http://schemas.openxmlformats.org/drawingml/2006/main">
@@ -15144,7 +13845,7 @@
                 <a:ea typeface="Arial"/>
                 <a:cs typeface="Arial"/>
               </a:rPr>
-              <a:t>Greedy keeps 0.8% effective support: its attractive estimate is unverifiable extrapolation.</a:t>
+              <a:t>SNIPS: greedy 0.1277 | CQL 0.1235 | fixed 0.1257. Bandwidth sensitivity prevents a causal lift claim.</a:t>
             </a:r>
           </a:p>
         </p:txBody>
@@ -15161,7 +13862,7 @@
         </p:xfrm>
         <a:graphic xmlns:a="http://schemas.openxmlformats.org/drawingml/2006/main">
           <a:graphicData uri="http://schemas.openxmlformats.org/drawingml/2006/chart">
-            <c:chart xmlns:r="http://schemas.openxmlformats.org/officeDocument/2006/relationships" xmlns:c="http://schemas.openxmlformats.org/drawingml/2006/chart" r:id="Rf617e4bef4ee412a"/>
+            <c:chart xmlns:r="http://schemas.openxmlformats.org/officeDocument/2006/relationships" xmlns:c="http://schemas.openxmlformats.org/drawingml/2006/chart" r:id="R6ec0e7b6f14d4baa"/>
           </a:graphicData>
         </a:graphic>
       </p:graphicFrame>
